--- a/downloads/presentations/modules/ops-220.pptx
+++ b/downloads/presentations/modules/ops-220.pptx
@@ -3427,13 +3427,11 @@
             </a:avLst>
           </a:prstGeom>
           <a:solidFill>
-            <a:srgbClr val="FFFFFF">
-              <a:alpha val="88000"/>
-            </a:srgbClr>
+            <a:srgbClr val="FFFFFF"/>
           </a:solidFill>
           <a:ln w="12700">
             <a:solidFill>
-              <a:srgbClr val="D6E8F2"/>
+              <a:srgbClr val="B9D7E6"/>
             </a:solidFill>
             <a:prstDash val="solid"/>
           </a:ln>
@@ -3441,30 +3439,42 @@
       </p:sp>
       <p:sp>
         <p:nvSpPr>
-          <p:cNvPr id="14" name="Shape 12"/>
-          <p:cNvSpPr/>
-          <p:nvPr/>
-        </p:nvSpPr>
-        <p:spPr>
-          <a:xfrm>
-            <a:off x="7927848" y="3319272"/>
-            <a:ext cx="792480" cy="749808"/>
-          </a:xfrm>
-          <a:prstGeom prst="roundRect">
-            <a:avLst>
-              <a:gd name="adj" fmla="val 14634"/>
-            </a:avLst>
-          </a:prstGeom>
-          <a:solidFill>
-            <a:srgbClr val="0068B7"/>
-          </a:solidFill>
-          <a:ln w="12700">
-            <a:solidFill>
-              <a:srgbClr val="0068B7"/>
-            </a:solidFill>
-            <a:prstDash val="solid"/>
-          </a:ln>
-        </p:spPr>
+          <p:cNvPr id="14" name="Text 12"/>
+          <p:cNvSpPr/>
+          <p:nvPr/>
+        </p:nvSpPr>
+        <p:spPr>
+          <a:xfrm>
+            <a:off x="7799832" y="2935224"/>
+            <a:ext cx="3145536" cy="256032"/>
+          </a:xfrm>
+          <a:prstGeom prst="rect">
+            <a:avLst/>
+          </a:prstGeom>
+          <a:noFill/>
+          <a:ln/>
+        </p:spPr>
+        <p:txBody>
+          <a:bodyPr wrap="square" lIns="0" tIns="0" rIns="0" bIns="0" rtlCol="0" anchor="ctr"/>
+          <a:lstStyle/>
+          <a:p>
+            <a:pPr indent="0" marL="0">
+              <a:buNone/>
+            </a:pPr>
+            <a:r>
+              <a:rPr lang="en-US" sz="1300" b="1" dirty="0">
+                <a:solidFill>
+                  <a:srgbClr val="0068B7"/>
+                </a:solidFill>
+                <a:latin typeface="Aptos" pitchFamily="34" charset="0"/>
+                <a:ea typeface="Aptos" pitchFamily="34" charset="-122"/>
+                <a:cs typeface="Aptos" pitchFamily="34" charset="-120"/>
+              </a:rPr>
+              <a:t>Concept checkpoints</a:t>
+            </a:r>
+            <a:endParaRPr lang="en-US" sz="1300" dirty="0"/>
+          </a:p>
+        </p:txBody>
       </p:sp>
       <p:sp>
         <p:nvSpPr>
@@ -3474,240 +3484,67 @@
         </p:nvSpPr>
         <p:spPr>
           <a:xfrm>
-            <a:off x="8001000" y="3511296"/>
-            <a:ext cx="646176" cy="310896"/>
-          </a:xfrm>
-          <a:prstGeom prst="rect">
-            <a:avLst/>
-          </a:prstGeom>
-          <a:noFill/>
-          <a:ln/>
-        </p:spPr>
-        <p:txBody>
-          <a:bodyPr wrap="square" lIns="0" tIns="0" rIns="0" bIns="0" rtlCol="0" anchor="ctr">
+            <a:off x="7818120" y="3300984"/>
+            <a:ext cx="3090672" cy="877824"/>
+          </a:xfrm>
+          <a:prstGeom prst="rect">
+            <a:avLst/>
+          </a:prstGeom>
+          <a:noFill/>
+          <a:ln/>
+        </p:spPr>
+        <p:txBody>
+          <a:bodyPr wrap="square" lIns="254" tIns="254" rIns="254" bIns="254" rtlCol="0" anchor="t">
             <a:normAutofit/>
           </a:bodyPr>
           <a:lstStyle/>
           <a:p>
-            <a:pPr algn="ctr" indent="0" marL="0">
-              <a:buNone/>
-            </a:pPr>
-            <a:r>
-              <a:rPr lang="en-US" sz="1500" b="1" dirty="0">
-                <a:solidFill>
-                  <a:srgbClr val="FFFFFF"/>
-                </a:solidFill>
-                <a:latin typeface="Aptos" pitchFamily="34" charset="0"/>
-                <a:ea typeface="Aptos" pitchFamily="34" charset="-122"/>
-                <a:cs typeface="Aptos" pitchFamily="34" charset="-120"/>
-              </a:rPr>
-              <a:t>Plan</a:t>
-            </a:r>
-            <a:endParaRPr lang="en-US" sz="1500" dirty="0"/>
+            <a:r>
+              <a:rPr lang="en-US" sz="1380" dirty="0">
+                <a:solidFill>
+                  <a:srgbClr val="17364A"/>
+                </a:solidFill>
+                <a:latin typeface="Aptos" pitchFamily="34" charset="0"/>
+                <a:ea typeface="Aptos" pitchFamily="34" charset="-122"/>
+                <a:cs typeface="Aptos" pitchFamily="34" charset="-120"/>
+              </a:rPr>
+              <a:t>If the summary hides uncertainty or makes unsupported claims look official, the.</a:t>
+            </a:r>
+            <a:endParaRPr lang="en-US" sz="1380" dirty="0"/>
+          </a:p>
+          <a:p>
+            <a:r>
+              <a:rPr lang="en-US" sz="1380" dirty="0">
+                <a:solidFill>
+                  <a:srgbClr val="17364A"/>
+                </a:solidFill>
+                <a:latin typeface="Aptos" pitchFamily="34" charset="0"/>
+                <a:ea typeface="Aptos" pitchFamily="34" charset="-122"/>
+                <a:cs typeface="Aptos" pitchFamily="34" charset="-120"/>
+              </a:rPr>
+              <a:t>If the summary is too long, poorly organized, or disconnected from source fields, it may.</a:t>
+            </a:r>
+            <a:endParaRPr lang="en-US" sz="1380" dirty="0"/>
+          </a:p>
+          <a:p>
+            <a:r>
+              <a:rPr lang="en-US" sz="1380" dirty="0">
+                <a:solidFill>
+                  <a:srgbClr val="17364A"/>
+                </a:solidFill>
+                <a:latin typeface="Aptos" pitchFamily="34" charset="0"/>
+                <a:ea typeface="Aptos" pitchFamily="34" charset="-122"/>
+                <a:cs typeface="Aptos" pitchFamily="34" charset="-120"/>
+              </a:rPr>
+              <a:t>Usability testing would observe investigators using the summary and identify changes.</a:t>
+            </a:r>
+            <a:endParaRPr lang="en-US" sz="1380" dirty="0"/>
           </a:p>
         </p:txBody>
       </p:sp>
       <p:sp>
         <p:nvSpPr>
           <p:cNvPr id="16" name="Shape 14"/>
-          <p:cNvSpPr/>
-          <p:nvPr/>
-        </p:nvSpPr>
-        <p:spPr>
-          <a:xfrm>
-            <a:off x="8976360" y="3319272"/>
-            <a:ext cx="792480" cy="749808"/>
-          </a:xfrm>
-          <a:prstGeom prst="roundRect">
-            <a:avLst>
-              <a:gd name="adj" fmla="val 14634"/>
-            </a:avLst>
-          </a:prstGeom>
-          <a:solidFill>
-            <a:srgbClr val="2F8A28"/>
-          </a:solidFill>
-          <a:ln w="12700">
-            <a:solidFill>
-              <a:srgbClr val="2F8A28"/>
-            </a:solidFill>
-            <a:prstDash val="solid"/>
-          </a:ln>
-        </p:spPr>
-      </p:sp>
-      <p:sp>
-        <p:nvSpPr>
-          <p:cNvPr id="17" name="Text 15"/>
-          <p:cNvSpPr/>
-          <p:nvPr/>
-        </p:nvSpPr>
-        <p:spPr>
-          <a:xfrm>
-            <a:off x="9049512" y="3511296"/>
-            <a:ext cx="646176" cy="310896"/>
-          </a:xfrm>
-          <a:prstGeom prst="rect">
-            <a:avLst/>
-          </a:prstGeom>
-          <a:noFill/>
-          <a:ln/>
-        </p:spPr>
-        <p:txBody>
-          <a:bodyPr wrap="square" lIns="0" tIns="0" rIns="0" bIns="0" rtlCol="0" anchor="ctr">
-            <a:normAutofit/>
-          </a:bodyPr>
-          <a:lstStyle/>
-          <a:p>
-            <a:pPr algn="ctr" indent="0" marL="0">
-              <a:buNone/>
-            </a:pPr>
-            <a:r>
-              <a:rPr lang="en-US" sz="1500" b="1" dirty="0">
-                <a:solidFill>
-                  <a:srgbClr val="FFFFFF"/>
-                </a:solidFill>
-                <a:latin typeface="Aptos" pitchFamily="34" charset="0"/>
-                <a:ea typeface="Aptos" pitchFamily="34" charset="-122"/>
-                <a:cs typeface="Aptos" pitchFamily="34" charset="-120"/>
-              </a:rPr>
-              <a:t>Do</a:t>
-            </a:r>
-            <a:endParaRPr lang="en-US" sz="1500" dirty="0"/>
-          </a:p>
-        </p:txBody>
-      </p:sp>
-      <p:sp>
-        <p:nvSpPr>
-          <p:cNvPr id="18" name="Shape 16"/>
-          <p:cNvSpPr/>
-          <p:nvPr/>
-        </p:nvSpPr>
-        <p:spPr>
-          <a:xfrm>
-            <a:off x="10024872" y="3319272"/>
-            <a:ext cx="792480" cy="749808"/>
-          </a:xfrm>
-          <a:prstGeom prst="roundRect">
-            <a:avLst>
-              <a:gd name="adj" fmla="val 14634"/>
-            </a:avLst>
-          </a:prstGeom>
-          <a:solidFill>
-            <a:srgbClr val="D69A2D"/>
-          </a:solidFill>
-          <a:ln w="12700">
-            <a:solidFill>
-              <a:srgbClr val="D69A2D"/>
-            </a:solidFill>
-            <a:prstDash val="solid"/>
-          </a:ln>
-        </p:spPr>
-      </p:sp>
-      <p:sp>
-        <p:nvSpPr>
-          <p:cNvPr id="19" name="Text 17"/>
-          <p:cNvSpPr/>
-          <p:nvPr/>
-        </p:nvSpPr>
-        <p:spPr>
-          <a:xfrm>
-            <a:off x="10098024" y="3511296"/>
-            <a:ext cx="646176" cy="310896"/>
-          </a:xfrm>
-          <a:prstGeom prst="rect">
-            <a:avLst/>
-          </a:prstGeom>
-          <a:noFill/>
-          <a:ln/>
-        </p:spPr>
-        <p:txBody>
-          <a:bodyPr wrap="square" lIns="0" tIns="0" rIns="0" bIns="0" rtlCol="0" anchor="ctr">
-            <a:normAutofit/>
-          </a:bodyPr>
-          <a:lstStyle/>
-          <a:p>
-            <a:pPr algn="ctr" indent="0" marL="0">
-              <a:buNone/>
-            </a:pPr>
-            <a:r>
-              <a:rPr lang="en-US" sz="1500" b="1" dirty="0">
-                <a:solidFill>
-                  <a:srgbClr val="FFFFFF"/>
-                </a:solidFill>
-                <a:latin typeface="Aptos" pitchFamily="34" charset="0"/>
-                <a:ea typeface="Aptos" pitchFamily="34" charset="-122"/>
-                <a:cs typeface="Aptos" pitchFamily="34" charset="-120"/>
-              </a:rPr>
-              <a:t>Review</a:t>
-            </a:r>
-            <a:endParaRPr lang="en-US" sz="1500" dirty="0"/>
-          </a:p>
-        </p:txBody>
-      </p:sp>
-      <p:sp>
-        <p:nvSpPr>
-          <p:cNvPr id="20" name="Shape 18"/>
-          <p:cNvSpPr/>
-          <p:nvPr/>
-        </p:nvSpPr>
-        <p:spPr>
-          <a:xfrm>
-            <a:off x="8293608" y="4389120"/>
-            <a:ext cx="2157984" cy="0"/>
-          </a:xfrm>
-          <a:prstGeom prst="line">
-            <a:avLst/>
-          </a:prstGeom>
-          <a:noFill/>
-          <a:ln w="25400">
-            <a:solidFill>
-              <a:srgbClr val="8ABBD8"/>
-            </a:solidFill>
-            <a:prstDash val="solid"/>
-          </a:ln>
-        </p:spPr>
-      </p:sp>
-      <p:sp>
-        <p:nvSpPr>
-          <p:cNvPr id="21" name="Text 19"/>
-          <p:cNvSpPr/>
-          <p:nvPr/>
-        </p:nvSpPr>
-        <p:spPr>
-          <a:xfrm>
-            <a:off x="7909560" y="3977640"/>
-            <a:ext cx="2926080" cy="182880"/>
-          </a:xfrm>
-          <a:prstGeom prst="rect">
-            <a:avLst/>
-          </a:prstGeom>
-          <a:noFill/>
-          <a:ln/>
-        </p:spPr>
-        <p:txBody>
-          <a:bodyPr wrap="square" lIns="0" tIns="0" rIns="0" bIns="0" rtlCol="0" anchor="ctr"/>
-          <a:lstStyle/>
-          <a:p>
-            <a:pPr algn="ctr" indent="0" marL="0">
-              <a:buNone/>
-            </a:pPr>
-            <a:r>
-              <a:rPr lang="en-US" sz="1000" dirty="0">
-                <a:solidFill>
-                  <a:srgbClr val="003A63"/>
-                </a:solidFill>
-                <a:latin typeface="Aptos" pitchFamily="34" charset="0"/>
-                <a:ea typeface="Aptos" pitchFamily="34" charset="-122"/>
-                <a:cs typeface="Aptos" pitchFamily="34" charset="-120"/>
-              </a:rPr>
-              <a:t>Dependencies visible</a:t>
-            </a:r>
-            <a:endParaRPr lang="en-US" sz="1000" dirty="0"/>
-          </a:p>
-        </p:txBody>
-      </p:sp>
-      <p:sp>
-        <p:nvSpPr>
-          <p:cNvPr id="22" name="Shape 20"/>
           <p:cNvSpPr/>
           <p:nvPr/>
         </p:nvSpPr>
@@ -3734,7 +3571,7 @@
       </p:sp>
       <p:sp>
         <p:nvSpPr>
-          <p:cNvPr id="23" name="Text 21"/>
+          <p:cNvPr id="17" name="Text 15"/>
           <p:cNvSpPr/>
           <p:nvPr/>
         </p:nvSpPr>
@@ -3773,7 +3610,7 @@
       </p:sp>
       <p:sp>
         <p:nvSpPr>
-          <p:cNvPr id="24" name="Text 22"/>
+          <p:cNvPr id="18" name="Text 16"/>
           <p:cNvSpPr/>
           <p:nvPr/>
         </p:nvSpPr>
@@ -4281,13 +4118,11 @@
             </a:avLst>
           </a:prstGeom>
           <a:solidFill>
-            <a:srgbClr val="FFFFFF">
-              <a:alpha val="88000"/>
-            </a:srgbClr>
+            <a:srgbClr val="FFFFFF"/>
           </a:solidFill>
           <a:ln w="12700">
             <a:solidFill>
-              <a:srgbClr val="D6E8F2"/>
+              <a:srgbClr val="B9D7E6"/>
             </a:solidFill>
             <a:prstDash val="solid"/>
           </a:ln>
@@ -4295,30 +4130,42 @@
       </p:sp>
       <p:sp>
         <p:nvSpPr>
-          <p:cNvPr id="14" name="Shape 12"/>
-          <p:cNvSpPr/>
-          <p:nvPr/>
-        </p:nvSpPr>
-        <p:spPr>
-          <a:xfrm>
-            <a:off x="7927848" y="3319272"/>
-            <a:ext cx="792480" cy="749808"/>
-          </a:xfrm>
-          <a:prstGeom prst="roundRect">
-            <a:avLst>
-              <a:gd name="adj" fmla="val 14634"/>
-            </a:avLst>
-          </a:prstGeom>
-          <a:solidFill>
-            <a:srgbClr val="0068B7"/>
-          </a:solidFill>
-          <a:ln w="12700">
-            <a:solidFill>
-              <a:srgbClr val="0068B7"/>
-            </a:solidFill>
-            <a:prstDash val="solid"/>
-          </a:ln>
-        </p:spPr>
+          <p:cNvPr id="14" name="Text 12"/>
+          <p:cNvSpPr/>
+          <p:nvPr/>
+        </p:nvSpPr>
+        <p:spPr>
+          <a:xfrm>
+            <a:off x="7799832" y="2935224"/>
+            <a:ext cx="3145536" cy="256032"/>
+          </a:xfrm>
+          <a:prstGeom prst="rect">
+            <a:avLst/>
+          </a:prstGeom>
+          <a:noFill/>
+          <a:ln/>
+        </p:spPr>
+        <p:txBody>
+          <a:bodyPr wrap="square" lIns="0" tIns="0" rIns="0" bIns="0" rtlCol="0" anchor="ctr"/>
+          <a:lstStyle/>
+          <a:p>
+            <a:pPr indent="0" marL="0">
+              <a:buNone/>
+            </a:pPr>
+            <a:r>
+              <a:rPr lang="en-US" sz="1300" b="1" dirty="0">
+                <a:solidFill>
+                  <a:srgbClr val="0068B7"/>
+                </a:solidFill>
+                <a:latin typeface="Aptos" pitchFamily="34" charset="0"/>
+                <a:ea typeface="Aptos" pitchFamily="34" charset="-122"/>
+                <a:cs typeface="Aptos" pitchFamily="34" charset="-120"/>
+              </a:rPr>
+              <a:t>Concept checkpoints</a:t>
+            </a:r>
+            <a:endParaRPr lang="en-US" sz="1300" dirty="0"/>
+          </a:p>
+        </p:txBody>
       </p:sp>
       <p:sp>
         <p:nvSpPr>
@@ -4328,240 +4175,67 @@
         </p:nvSpPr>
         <p:spPr>
           <a:xfrm>
-            <a:off x="8001000" y="3511296"/>
-            <a:ext cx="646176" cy="310896"/>
-          </a:xfrm>
-          <a:prstGeom prst="rect">
-            <a:avLst/>
-          </a:prstGeom>
-          <a:noFill/>
-          <a:ln/>
-        </p:spPr>
-        <p:txBody>
-          <a:bodyPr wrap="square" lIns="0" tIns="0" rIns="0" bIns="0" rtlCol="0" anchor="ctr">
+            <a:off x="7818120" y="3300984"/>
+            <a:ext cx="3090672" cy="877824"/>
+          </a:xfrm>
+          <a:prstGeom prst="rect">
+            <a:avLst/>
+          </a:prstGeom>
+          <a:noFill/>
+          <a:ln/>
+        </p:spPr>
+        <p:txBody>
+          <a:bodyPr wrap="square" lIns="254" tIns="254" rIns="254" bIns="254" rtlCol="0" anchor="t">
             <a:normAutofit/>
           </a:bodyPr>
           <a:lstStyle/>
           <a:p>
-            <a:pPr algn="ctr" indent="0" marL="0">
-              <a:buNone/>
-            </a:pPr>
-            <a:r>
-              <a:rPr lang="en-US" sz="1500" b="1" dirty="0">
-                <a:solidFill>
-                  <a:srgbClr val="FFFFFF"/>
-                </a:solidFill>
-                <a:latin typeface="Aptos" pitchFamily="34" charset="0"/>
-                <a:ea typeface="Aptos" pitchFamily="34" charset="-122"/>
-                <a:cs typeface="Aptos" pitchFamily="34" charset="-120"/>
-              </a:rPr>
-              <a:t>Plan</a:t>
-            </a:r>
-            <a:endParaRPr lang="en-US" sz="1500" dirty="0"/>
+            <a:r>
+              <a:rPr lang="en-US" sz="1380" dirty="0">
+                <a:solidFill>
+                  <a:srgbClr val="17364A"/>
+                </a:solidFill>
+                <a:latin typeface="Aptos" pitchFamily="34" charset="0"/>
+                <a:ea typeface="Aptos" pitchFamily="34" charset="-122"/>
+                <a:cs typeface="Aptos" pitchFamily="34" charset="-120"/>
+              </a:rPr>
+              <a:t>Agencies should document how work happens today, including informal workarounds, duplicate.</a:t>
+            </a:r>
+            <a:endParaRPr lang="en-US" sz="1380" dirty="0"/>
+          </a:p>
+          <a:p>
+            <a:r>
+              <a:rPr lang="en-US" sz="1380" dirty="0">
+                <a:solidFill>
+                  <a:srgbClr val="17364A"/>
+                </a:solidFill>
+                <a:latin typeface="Aptos" pitchFamily="34" charset="0"/>
+                <a:ea typeface="Aptos" pitchFamily="34" charset="-122"/>
+                <a:cs typeface="Aptos" pitchFamily="34" charset="-120"/>
+              </a:rPr>
+              <a:t>AI should be introduced only after the team understands which step is being improved and.</a:t>
+            </a:r>
+            <a:endParaRPr lang="en-US" sz="1380" dirty="0"/>
+          </a:p>
+          <a:p>
+            <a:r>
+              <a:rPr lang="en-US" sz="1380" dirty="0">
+                <a:solidFill>
+                  <a:srgbClr val="17364A"/>
+                </a:solidFill>
+                <a:latin typeface="Aptos" pitchFamily="34" charset="0"/>
+                <a:ea typeface="Aptos" pitchFamily="34" charset="-122"/>
+                <a:cs typeface="Aptos" pitchFamily="34" charset="-120"/>
+              </a:rPr>
+              <a:t>Future-state design should define how staff will see, review, correct, accept, reject, or.</a:t>
+            </a:r>
+            <a:endParaRPr lang="en-US" sz="1380" dirty="0"/>
           </a:p>
         </p:txBody>
       </p:sp>
       <p:sp>
         <p:nvSpPr>
           <p:cNvPr id="16" name="Shape 14"/>
-          <p:cNvSpPr/>
-          <p:nvPr/>
-        </p:nvSpPr>
-        <p:spPr>
-          <a:xfrm>
-            <a:off x="8976360" y="3319272"/>
-            <a:ext cx="792480" cy="749808"/>
-          </a:xfrm>
-          <a:prstGeom prst="roundRect">
-            <a:avLst>
-              <a:gd name="adj" fmla="val 14634"/>
-            </a:avLst>
-          </a:prstGeom>
-          <a:solidFill>
-            <a:srgbClr val="2F8A28"/>
-          </a:solidFill>
-          <a:ln w="12700">
-            <a:solidFill>
-              <a:srgbClr val="2F8A28"/>
-            </a:solidFill>
-            <a:prstDash val="solid"/>
-          </a:ln>
-        </p:spPr>
-      </p:sp>
-      <p:sp>
-        <p:nvSpPr>
-          <p:cNvPr id="17" name="Text 15"/>
-          <p:cNvSpPr/>
-          <p:nvPr/>
-        </p:nvSpPr>
-        <p:spPr>
-          <a:xfrm>
-            <a:off x="9049512" y="3511296"/>
-            <a:ext cx="646176" cy="310896"/>
-          </a:xfrm>
-          <a:prstGeom prst="rect">
-            <a:avLst/>
-          </a:prstGeom>
-          <a:noFill/>
-          <a:ln/>
-        </p:spPr>
-        <p:txBody>
-          <a:bodyPr wrap="square" lIns="0" tIns="0" rIns="0" bIns="0" rtlCol="0" anchor="ctr">
-            <a:normAutofit/>
-          </a:bodyPr>
-          <a:lstStyle/>
-          <a:p>
-            <a:pPr algn="ctr" indent="0" marL="0">
-              <a:buNone/>
-            </a:pPr>
-            <a:r>
-              <a:rPr lang="en-US" sz="1500" b="1" dirty="0">
-                <a:solidFill>
-                  <a:srgbClr val="FFFFFF"/>
-                </a:solidFill>
-                <a:latin typeface="Aptos" pitchFamily="34" charset="0"/>
-                <a:ea typeface="Aptos" pitchFamily="34" charset="-122"/>
-                <a:cs typeface="Aptos" pitchFamily="34" charset="-120"/>
-              </a:rPr>
-              <a:t>Do</a:t>
-            </a:r>
-            <a:endParaRPr lang="en-US" sz="1500" dirty="0"/>
-          </a:p>
-        </p:txBody>
-      </p:sp>
-      <p:sp>
-        <p:nvSpPr>
-          <p:cNvPr id="18" name="Shape 16"/>
-          <p:cNvSpPr/>
-          <p:nvPr/>
-        </p:nvSpPr>
-        <p:spPr>
-          <a:xfrm>
-            <a:off x="10024872" y="3319272"/>
-            <a:ext cx="792480" cy="749808"/>
-          </a:xfrm>
-          <a:prstGeom prst="roundRect">
-            <a:avLst>
-              <a:gd name="adj" fmla="val 14634"/>
-            </a:avLst>
-          </a:prstGeom>
-          <a:solidFill>
-            <a:srgbClr val="D69A2D"/>
-          </a:solidFill>
-          <a:ln w="12700">
-            <a:solidFill>
-              <a:srgbClr val="D69A2D"/>
-            </a:solidFill>
-            <a:prstDash val="solid"/>
-          </a:ln>
-        </p:spPr>
-      </p:sp>
-      <p:sp>
-        <p:nvSpPr>
-          <p:cNvPr id="19" name="Text 17"/>
-          <p:cNvSpPr/>
-          <p:nvPr/>
-        </p:nvSpPr>
-        <p:spPr>
-          <a:xfrm>
-            <a:off x="10098024" y="3511296"/>
-            <a:ext cx="646176" cy="310896"/>
-          </a:xfrm>
-          <a:prstGeom prst="rect">
-            <a:avLst/>
-          </a:prstGeom>
-          <a:noFill/>
-          <a:ln/>
-        </p:spPr>
-        <p:txBody>
-          <a:bodyPr wrap="square" lIns="0" tIns="0" rIns="0" bIns="0" rtlCol="0" anchor="ctr">
-            <a:normAutofit/>
-          </a:bodyPr>
-          <a:lstStyle/>
-          <a:p>
-            <a:pPr algn="ctr" indent="0" marL="0">
-              <a:buNone/>
-            </a:pPr>
-            <a:r>
-              <a:rPr lang="en-US" sz="1500" b="1" dirty="0">
-                <a:solidFill>
-                  <a:srgbClr val="FFFFFF"/>
-                </a:solidFill>
-                <a:latin typeface="Aptos" pitchFamily="34" charset="0"/>
-                <a:ea typeface="Aptos" pitchFamily="34" charset="-122"/>
-                <a:cs typeface="Aptos" pitchFamily="34" charset="-120"/>
-              </a:rPr>
-              <a:t>Review</a:t>
-            </a:r>
-            <a:endParaRPr lang="en-US" sz="1500" dirty="0"/>
-          </a:p>
-        </p:txBody>
-      </p:sp>
-      <p:sp>
-        <p:nvSpPr>
-          <p:cNvPr id="20" name="Shape 18"/>
-          <p:cNvSpPr/>
-          <p:nvPr/>
-        </p:nvSpPr>
-        <p:spPr>
-          <a:xfrm>
-            <a:off x="8293608" y="4389120"/>
-            <a:ext cx="2157984" cy="0"/>
-          </a:xfrm>
-          <a:prstGeom prst="line">
-            <a:avLst/>
-          </a:prstGeom>
-          <a:noFill/>
-          <a:ln w="25400">
-            <a:solidFill>
-              <a:srgbClr val="8ABBD8"/>
-            </a:solidFill>
-            <a:prstDash val="solid"/>
-          </a:ln>
-        </p:spPr>
-      </p:sp>
-      <p:sp>
-        <p:nvSpPr>
-          <p:cNvPr id="21" name="Text 19"/>
-          <p:cNvSpPr/>
-          <p:nvPr/>
-        </p:nvSpPr>
-        <p:spPr>
-          <a:xfrm>
-            <a:off x="7909560" y="3977640"/>
-            <a:ext cx="2926080" cy="182880"/>
-          </a:xfrm>
-          <a:prstGeom prst="rect">
-            <a:avLst/>
-          </a:prstGeom>
-          <a:noFill/>
-          <a:ln/>
-        </p:spPr>
-        <p:txBody>
-          <a:bodyPr wrap="square" lIns="0" tIns="0" rIns="0" bIns="0" rtlCol="0" anchor="ctr"/>
-          <a:lstStyle/>
-          <a:p>
-            <a:pPr algn="ctr" indent="0" marL="0">
-              <a:buNone/>
-            </a:pPr>
-            <a:r>
-              <a:rPr lang="en-US" sz="1000" dirty="0">
-                <a:solidFill>
-                  <a:srgbClr val="003A63"/>
-                </a:solidFill>
-                <a:latin typeface="Aptos" pitchFamily="34" charset="0"/>
-                <a:ea typeface="Aptos" pitchFamily="34" charset="-122"/>
-                <a:cs typeface="Aptos" pitchFamily="34" charset="-120"/>
-              </a:rPr>
-              <a:t>Dependencies visible</a:t>
-            </a:r>
-            <a:endParaRPr lang="en-US" sz="1000" dirty="0"/>
-          </a:p>
-        </p:txBody>
-      </p:sp>
-      <p:sp>
-        <p:nvSpPr>
-          <p:cNvPr id="22" name="Shape 20"/>
           <p:cNvSpPr/>
           <p:nvPr/>
         </p:nvSpPr>
@@ -4588,7 +4262,7 @@
       </p:sp>
       <p:sp>
         <p:nvSpPr>
-          <p:cNvPr id="23" name="Text 21"/>
+          <p:cNvPr id="17" name="Text 15"/>
           <p:cNvSpPr/>
           <p:nvPr/>
         </p:nvSpPr>
@@ -4627,7 +4301,7 @@
       </p:sp>
       <p:sp>
         <p:nvSpPr>
-          <p:cNvPr id="24" name="Text 22"/>
+          <p:cNvPr id="18" name="Text 16"/>
           <p:cNvSpPr/>
           <p:nvPr/>
         </p:nvSpPr>
@@ -5135,13 +4809,11 @@
             </a:avLst>
           </a:prstGeom>
           <a:solidFill>
-            <a:srgbClr val="FFFFFF">
-              <a:alpha val="88000"/>
-            </a:srgbClr>
+            <a:srgbClr val="FFFFFF"/>
           </a:solidFill>
           <a:ln w="12700">
             <a:solidFill>
-              <a:srgbClr val="D6E8F2"/>
+              <a:srgbClr val="B9D7E6"/>
             </a:solidFill>
             <a:prstDash val="solid"/>
           </a:ln>
@@ -5149,26 +4821,42 @@
       </p:sp>
       <p:sp>
         <p:nvSpPr>
-          <p:cNvPr id="14" name="Shape 12"/>
-          <p:cNvSpPr/>
-          <p:nvPr/>
-        </p:nvSpPr>
-        <p:spPr>
-          <a:xfrm>
-            <a:off x="8046720" y="3108960"/>
-            <a:ext cx="2651760" cy="896112"/>
-          </a:xfrm>
-          <a:prstGeom prst="arc">
-            <a:avLst/>
-          </a:prstGeom>
-          <a:noFill/>
-          <a:ln w="25400">
-            <a:solidFill>
-              <a:srgbClr val="0068B7"/>
-            </a:solidFill>
-            <a:prstDash val="solid"/>
-          </a:ln>
-        </p:spPr>
+          <p:cNvPr id="14" name="Text 12"/>
+          <p:cNvSpPr/>
+          <p:nvPr/>
+        </p:nvSpPr>
+        <p:spPr>
+          <a:xfrm>
+            <a:off x="7799832" y="2935224"/>
+            <a:ext cx="3145536" cy="256032"/>
+          </a:xfrm>
+          <a:prstGeom prst="rect">
+            <a:avLst/>
+          </a:prstGeom>
+          <a:noFill/>
+          <a:ln/>
+        </p:spPr>
+        <p:txBody>
+          <a:bodyPr wrap="square" lIns="0" tIns="0" rIns="0" bIns="0" rtlCol="0" anchor="ctr"/>
+          <a:lstStyle/>
+          <a:p>
+            <a:pPr indent="0" marL="0">
+              <a:buNone/>
+            </a:pPr>
+            <a:r>
+              <a:rPr lang="en-US" sz="1300" b="1" dirty="0">
+                <a:solidFill>
+                  <a:srgbClr val="0068B7"/>
+                </a:solidFill>
+                <a:latin typeface="Aptos" pitchFamily="34" charset="0"/>
+                <a:ea typeface="Aptos" pitchFamily="34" charset="-122"/>
+                <a:cs typeface="Aptos" pitchFamily="34" charset="-120"/>
+              </a:rPr>
+              <a:t>Concept checkpoints</a:t>
+            </a:r>
+            <a:endParaRPr lang="en-US" sz="1300" dirty="0"/>
+          </a:p>
+        </p:txBody>
       </p:sp>
       <p:sp>
         <p:nvSpPr>
@@ -5178,102 +4866,67 @@
         </p:nvSpPr>
         <p:spPr>
           <a:xfrm>
-            <a:off x="7909560" y="3099816"/>
-            <a:ext cx="2926080" cy="256032"/>
-          </a:xfrm>
-          <a:prstGeom prst="rect">
-            <a:avLst/>
-          </a:prstGeom>
-          <a:noFill/>
-          <a:ln/>
-        </p:spPr>
-        <p:txBody>
-          <a:bodyPr wrap="square" lIns="0" tIns="0" rIns="0" bIns="0" rtlCol="0" anchor="ctr"/>
-          <a:lstStyle/>
-          <a:p>
-            <a:pPr algn="ctr" indent="0" marL="0">
-              <a:buNone/>
-            </a:pPr>
-            <a:r>
-              <a:rPr lang="en-US" sz="1500" b="1" dirty="0">
-                <a:solidFill>
-                  <a:srgbClr val="003A63"/>
-                </a:solidFill>
-                <a:latin typeface="Aptos" pitchFamily="34" charset="0"/>
-                <a:ea typeface="Aptos" pitchFamily="34" charset="-122"/>
-                <a:cs typeface="Aptos" pitchFamily="34" charset="-120"/>
-              </a:rPr>
-              <a:t>Risk</a:t>
-            </a:r>
-            <a:endParaRPr lang="en-US" sz="1500" dirty="0"/>
+            <a:off x="7818120" y="3300984"/>
+            <a:ext cx="3090672" cy="877824"/>
+          </a:xfrm>
+          <a:prstGeom prst="rect">
+            <a:avLst/>
+          </a:prstGeom>
+          <a:noFill/>
+          <a:ln/>
+        </p:spPr>
+        <p:txBody>
+          <a:bodyPr wrap="square" lIns="254" tIns="254" rIns="254" bIns="254" rtlCol="0" anchor="t">
+            <a:normAutofit/>
+          </a:bodyPr>
+          <a:lstStyle/>
+          <a:p>
+            <a:r>
+              <a:rPr lang="en-US" sz="1380" dirty="0">
+                <a:solidFill>
+                  <a:srgbClr val="17364A"/>
+                </a:solidFill>
+                <a:latin typeface="Aptos" pitchFamily="34" charset="0"/>
+                <a:ea typeface="Aptos" pitchFamily="34" charset="-122"/>
+                <a:cs typeface="Aptos" pitchFamily="34" charset="-120"/>
+              </a:rPr>
+              <a:t>When staff do not connect technical decisions to authority, workflow, equity, privacy,.</a:t>
+            </a:r>
+            <a:endParaRPr lang="en-US" sz="1380" dirty="0"/>
+          </a:p>
+          <a:p>
+            <a:r>
+              <a:rPr lang="en-US" sz="1380" dirty="0">
+                <a:solidFill>
+                  <a:srgbClr val="17364A"/>
+                </a:solidFill>
+                <a:latin typeface="Aptos" pitchFamily="34" charset="0"/>
+                <a:ea typeface="Aptos" pitchFamily="34" charset="-122"/>
+                <a:cs typeface="Aptos" pitchFamily="34" charset="-120"/>
+              </a:rPr>
+              <a:t>Vendors may provide demonstrations, dashboards, or summary metrics that do not match the.</a:t>
+            </a:r>
+            <a:endParaRPr lang="en-US" sz="1380" dirty="0"/>
+          </a:p>
+          <a:p>
+            <a:r>
+              <a:rPr lang="en-US" sz="1380" dirty="0">
+                <a:solidFill>
+                  <a:srgbClr val="17364A"/>
+                </a:solidFill>
+                <a:latin typeface="Aptos" pitchFamily="34" charset="0"/>
+                <a:ea typeface="Aptos" pitchFamily="34" charset="-122"/>
+                <a:cs typeface="Aptos" pitchFamily="34" charset="-120"/>
+              </a:rPr>
+              <a:t>A guardrail is to require documentation, test results, acceptance criteria, and.</a:t>
+            </a:r>
+            <a:endParaRPr lang="en-US" sz="1380" dirty="0"/>
           </a:p>
         </p:txBody>
       </p:sp>
       <p:sp>
         <p:nvSpPr>
           <p:cNvPr id="16" name="Shape 14"/>
-          <p:cNvSpPr/>
-          <p:nvPr/>
-        </p:nvSpPr>
-        <p:spPr>
-          <a:xfrm>
-            <a:off x="8366760" y="3639312"/>
-            <a:ext cx="2011680" cy="0"/>
-          </a:xfrm>
-          <a:prstGeom prst="line">
-            <a:avLst/>
-          </a:prstGeom>
-          <a:noFill/>
-          <a:ln w="63500">
-            <a:solidFill>
-              <a:srgbClr val="2F8A28"/>
-            </a:solidFill>
-            <a:prstDash val="solid"/>
-          </a:ln>
-        </p:spPr>
-      </p:sp>
-      <p:sp>
-        <p:nvSpPr>
-          <p:cNvPr id="17" name="Text 15"/>
-          <p:cNvSpPr/>
-          <p:nvPr/>
-        </p:nvSpPr>
-        <p:spPr>
-          <a:xfrm>
-            <a:off x="7909560" y="3849624"/>
-            <a:ext cx="2926080" cy="164592"/>
-          </a:xfrm>
-          <a:prstGeom prst="rect">
-            <a:avLst/>
-          </a:prstGeom>
-          <a:noFill/>
-          <a:ln/>
-        </p:spPr>
-        <p:txBody>
-          <a:bodyPr wrap="square" lIns="0" tIns="0" rIns="0" bIns="0" rtlCol="0" anchor="ctr"/>
-          <a:lstStyle/>
-          <a:p>
-            <a:pPr algn="ctr" indent="0" marL="0">
-              <a:buNone/>
-            </a:pPr>
-            <a:r>
-              <a:rPr lang="en-US" sz="900" dirty="0">
-                <a:solidFill>
-                  <a:srgbClr val="003A63"/>
-                </a:solidFill>
-                <a:latin typeface="Aptos" pitchFamily="34" charset="0"/>
-                <a:ea typeface="Aptos" pitchFamily="34" charset="-122"/>
-                <a:cs typeface="Aptos" pitchFamily="34" charset="-120"/>
-              </a:rPr>
-              <a:t>Human review</a:t>
-            </a:r>
-            <a:endParaRPr lang="en-US" sz="900" dirty="0"/>
-          </a:p>
-        </p:txBody>
-      </p:sp>
-      <p:sp>
-        <p:nvSpPr>
-          <p:cNvPr id="18" name="Shape 16"/>
           <p:cNvSpPr/>
           <p:nvPr/>
         </p:nvSpPr>
@@ -5300,7 +4953,7 @@
       </p:sp>
       <p:sp>
         <p:nvSpPr>
-          <p:cNvPr id="19" name="Text 17"/>
+          <p:cNvPr id="17" name="Text 15"/>
           <p:cNvSpPr/>
           <p:nvPr/>
         </p:nvSpPr>
@@ -5339,7 +4992,7 @@
       </p:sp>
       <p:sp>
         <p:nvSpPr>
-          <p:cNvPr id="20" name="Text 18"/>
+          <p:cNvPr id="18" name="Text 16"/>
           <p:cNvSpPr/>
           <p:nvPr/>
         </p:nvSpPr>
@@ -5847,13 +5500,11 @@
             </a:avLst>
           </a:prstGeom>
           <a:solidFill>
-            <a:srgbClr val="FFFFFF">
-              <a:alpha val="88000"/>
-            </a:srgbClr>
+            <a:srgbClr val="FFFFFF"/>
           </a:solidFill>
           <a:ln w="12700">
             <a:solidFill>
-              <a:srgbClr val="D6E8F2"/>
+              <a:srgbClr val="B9D7E6"/>
             </a:solidFill>
             <a:prstDash val="solid"/>
           </a:ln>
@@ -5861,30 +5512,42 @@
       </p:sp>
       <p:sp>
         <p:nvSpPr>
-          <p:cNvPr id="14" name="Shape 12"/>
-          <p:cNvSpPr/>
-          <p:nvPr/>
-        </p:nvSpPr>
-        <p:spPr>
-          <a:xfrm>
-            <a:off x="7927848" y="3319272"/>
-            <a:ext cx="792480" cy="749808"/>
-          </a:xfrm>
-          <a:prstGeom prst="roundRect">
-            <a:avLst>
-              <a:gd name="adj" fmla="val 14634"/>
-            </a:avLst>
-          </a:prstGeom>
-          <a:solidFill>
-            <a:srgbClr val="0068B7"/>
-          </a:solidFill>
-          <a:ln w="12700">
-            <a:solidFill>
-              <a:srgbClr val="0068B7"/>
-            </a:solidFill>
-            <a:prstDash val="solid"/>
-          </a:ln>
-        </p:spPr>
+          <p:cNvPr id="14" name="Text 12"/>
+          <p:cNvSpPr/>
+          <p:nvPr/>
+        </p:nvSpPr>
+        <p:spPr>
+          <a:xfrm>
+            <a:off x="7799832" y="2935224"/>
+            <a:ext cx="3145536" cy="256032"/>
+          </a:xfrm>
+          <a:prstGeom prst="rect">
+            <a:avLst/>
+          </a:prstGeom>
+          <a:noFill/>
+          <a:ln/>
+        </p:spPr>
+        <p:txBody>
+          <a:bodyPr wrap="square" lIns="0" tIns="0" rIns="0" bIns="0" rtlCol="0" anchor="ctr"/>
+          <a:lstStyle/>
+          <a:p>
+            <a:pPr indent="0" marL="0">
+              <a:buNone/>
+            </a:pPr>
+            <a:r>
+              <a:rPr lang="en-US" sz="1300" b="1" dirty="0">
+                <a:solidFill>
+                  <a:srgbClr val="0068B7"/>
+                </a:solidFill>
+                <a:latin typeface="Aptos" pitchFamily="34" charset="0"/>
+                <a:ea typeface="Aptos" pitchFamily="34" charset="-122"/>
+                <a:cs typeface="Aptos" pitchFamily="34" charset="-120"/>
+              </a:rPr>
+              <a:t>Concept checkpoints</a:t>
+            </a:r>
+            <a:endParaRPr lang="en-US" sz="1300" dirty="0"/>
+          </a:p>
+        </p:txBody>
       </p:sp>
       <p:sp>
         <p:nvSpPr>
@@ -5894,240 +5557,67 @@
         </p:nvSpPr>
         <p:spPr>
           <a:xfrm>
-            <a:off x="8001000" y="3511296"/>
-            <a:ext cx="646176" cy="310896"/>
-          </a:xfrm>
-          <a:prstGeom prst="rect">
-            <a:avLst/>
-          </a:prstGeom>
-          <a:noFill/>
-          <a:ln/>
-        </p:spPr>
-        <p:txBody>
-          <a:bodyPr wrap="square" lIns="0" tIns="0" rIns="0" bIns="0" rtlCol="0" anchor="ctr">
+            <a:off x="7818120" y="3300984"/>
+            <a:ext cx="3090672" cy="877824"/>
+          </a:xfrm>
+          <a:prstGeom prst="rect">
+            <a:avLst/>
+          </a:prstGeom>
+          <a:noFill/>
+          <a:ln/>
+        </p:spPr>
+        <p:txBody>
+          <a:bodyPr wrap="square" lIns="254" tIns="254" rIns="254" bIns="254" rtlCol="0" anchor="t">
             <a:normAutofit/>
           </a:bodyPr>
           <a:lstStyle/>
           <a:p>
-            <a:pPr algn="ctr" indent="0" marL="0">
-              <a:buNone/>
-            </a:pPr>
-            <a:r>
-              <a:rPr lang="en-US" sz="1500" b="1" dirty="0">
-                <a:solidFill>
-                  <a:srgbClr val="FFFFFF"/>
-                </a:solidFill>
-                <a:latin typeface="Aptos" pitchFamily="34" charset="0"/>
-                <a:ea typeface="Aptos" pitchFamily="34" charset="-122"/>
-                <a:cs typeface="Aptos" pitchFamily="34" charset="-120"/>
-              </a:rPr>
-              <a:t>Plan</a:t>
-            </a:r>
-            <a:endParaRPr lang="en-US" sz="1500" dirty="0"/>
+            <a:r>
+              <a:rPr lang="en-US" sz="1380" dirty="0">
+                <a:solidFill>
+                  <a:srgbClr val="17364A"/>
+                </a:solidFill>
+                <a:latin typeface="Aptos" pitchFamily="34" charset="0"/>
+                <a:ea typeface="Aptos" pitchFamily="34" charset="-122"/>
+                <a:cs typeface="Aptos" pitchFamily="34" charset="-120"/>
+              </a:rPr>
+              <a:t>Generative AI, predictive analytics, RAG, automation, and agentic workflows all depend on.</a:t>
+            </a:r>
+            <a:endParaRPr lang="en-US" sz="1380" dirty="0"/>
+          </a:p>
+          <a:p>
+            <a:r>
+              <a:rPr lang="en-US" sz="1380" dirty="0">
+                <a:solidFill>
+                  <a:srgbClr val="17364A"/>
+                </a:solidFill>
+                <a:latin typeface="Aptos" pitchFamily="34" charset="0"/>
+                <a:ea typeface="Aptos" pitchFamily="34" charset="-122"/>
+                <a:cs typeface="Aptos" pitchFamily="34" charset="-120"/>
+              </a:rPr>
+              <a:t>A tool that drafts internal training text may require lighter review than a tool that.</a:t>
+            </a:r>
+            <a:endParaRPr lang="en-US" sz="1380" dirty="0"/>
+          </a:p>
+          <a:p>
+            <a:r>
+              <a:rPr lang="en-US" sz="1380" dirty="0">
+                <a:solidFill>
+                  <a:srgbClr val="17364A"/>
+                </a:solidFill>
+                <a:latin typeface="Aptos" pitchFamily="34" charset="0"/>
+                <a:ea typeface="Aptos" pitchFamily="34" charset="-122"/>
+                <a:cs typeface="Aptos" pitchFamily="34" charset="-120"/>
+              </a:rPr>
+              <a:t>The module should be applied during readiness assessment, procurement, implementation.</a:t>
+            </a:r>
+            <a:endParaRPr lang="en-US" sz="1380" dirty="0"/>
           </a:p>
         </p:txBody>
       </p:sp>
       <p:sp>
         <p:nvSpPr>
           <p:cNvPr id="16" name="Shape 14"/>
-          <p:cNvSpPr/>
-          <p:nvPr/>
-        </p:nvSpPr>
-        <p:spPr>
-          <a:xfrm>
-            <a:off x="8976360" y="3319272"/>
-            <a:ext cx="792480" cy="749808"/>
-          </a:xfrm>
-          <a:prstGeom prst="roundRect">
-            <a:avLst>
-              <a:gd name="adj" fmla="val 14634"/>
-            </a:avLst>
-          </a:prstGeom>
-          <a:solidFill>
-            <a:srgbClr val="2F8A28"/>
-          </a:solidFill>
-          <a:ln w="12700">
-            <a:solidFill>
-              <a:srgbClr val="2F8A28"/>
-            </a:solidFill>
-            <a:prstDash val="solid"/>
-          </a:ln>
-        </p:spPr>
-      </p:sp>
-      <p:sp>
-        <p:nvSpPr>
-          <p:cNvPr id="17" name="Text 15"/>
-          <p:cNvSpPr/>
-          <p:nvPr/>
-        </p:nvSpPr>
-        <p:spPr>
-          <a:xfrm>
-            <a:off x="9049512" y="3511296"/>
-            <a:ext cx="646176" cy="310896"/>
-          </a:xfrm>
-          <a:prstGeom prst="rect">
-            <a:avLst/>
-          </a:prstGeom>
-          <a:noFill/>
-          <a:ln/>
-        </p:spPr>
-        <p:txBody>
-          <a:bodyPr wrap="square" lIns="0" tIns="0" rIns="0" bIns="0" rtlCol="0" anchor="ctr">
-            <a:normAutofit/>
-          </a:bodyPr>
-          <a:lstStyle/>
-          <a:p>
-            <a:pPr algn="ctr" indent="0" marL="0">
-              <a:buNone/>
-            </a:pPr>
-            <a:r>
-              <a:rPr lang="en-US" sz="1500" b="1" dirty="0">
-                <a:solidFill>
-                  <a:srgbClr val="FFFFFF"/>
-                </a:solidFill>
-                <a:latin typeface="Aptos" pitchFamily="34" charset="0"/>
-                <a:ea typeface="Aptos" pitchFamily="34" charset="-122"/>
-                <a:cs typeface="Aptos" pitchFamily="34" charset="-120"/>
-              </a:rPr>
-              <a:t>Do</a:t>
-            </a:r>
-            <a:endParaRPr lang="en-US" sz="1500" dirty="0"/>
-          </a:p>
-        </p:txBody>
-      </p:sp>
-      <p:sp>
-        <p:nvSpPr>
-          <p:cNvPr id="18" name="Shape 16"/>
-          <p:cNvSpPr/>
-          <p:nvPr/>
-        </p:nvSpPr>
-        <p:spPr>
-          <a:xfrm>
-            <a:off x="10024872" y="3319272"/>
-            <a:ext cx="792480" cy="749808"/>
-          </a:xfrm>
-          <a:prstGeom prst="roundRect">
-            <a:avLst>
-              <a:gd name="adj" fmla="val 14634"/>
-            </a:avLst>
-          </a:prstGeom>
-          <a:solidFill>
-            <a:srgbClr val="D69A2D"/>
-          </a:solidFill>
-          <a:ln w="12700">
-            <a:solidFill>
-              <a:srgbClr val="D69A2D"/>
-            </a:solidFill>
-            <a:prstDash val="solid"/>
-          </a:ln>
-        </p:spPr>
-      </p:sp>
-      <p:sp>
-        <p:nvSpPr>
-          <p:cNvPr id="19" name="Text 17"/>
-          <p:cNvSpPr/>
-          <p:nvPr/>
-        </p:nvSpPr>
-        <p:spPr>
-          <a:xfrm>
-            <a:off x="10098024" y="3511296"/>
-            <a:ext cx="646176" cy="310896"/>
-          </a:xfrm>
-          <a:prstGeom prst="rect">
-            <a:avLst/>
-          </a:prstGeom>
-          <a:noFill/>
-          <a:ln/>
-        </p:spPr>
-        <p:txBody>
-          <a:bodyPr wrap="square" lIns="0" tIns="0" rIns="0" bIns="0" rtlCol="0" anchor="ctr">
-            <a:normAutofit/>
-          </a:bodyPr>
-          <a:lstStyle/>
-          <a:p>
-            <a:pPr algn="ctr" indent="0" marL="0">
-              <a:buNone/>
-            </a:pPr>
-            <a:r>
-              <a:rPr lang="en-US" sz="1500" b="1" dirty="0">
-                <a:solidFill>
-                  <a:srgbClr val="FFFFFF"/>
-                </a:solidFill>
-                <a:latin typeface="Aptos" pitchFamily="34" charset="0"/>
-                <a:ea typeface="Aptos" pitchFamily="34" charset="-122"/>
-                <a:cs typeface="Aptos" pitchFamily="34" charset="-120"/>
-              </a:rPr>
-              <a:t>Review</a:t>
-            </a:r>
-            <a:endParaRPr lang="en-US" sz="1500" dirty="0"/>
-          </a:p>
-        </p:txBody>
-      </p:sp>
-      <p:sp>
-        <p:nvSpPr>
-          <p:cNvPr id="20" name="Shape 18"/>
-          <p:cNvSpPr/>
-          <p:nvPr/>
-        </p:nvSpPr>
-        <p:spPr>
-          <a:xfrm>
-            <a:off x="8293608" y="4389120"/>
-            <a:ext cx="2157984" cy="0"/>
-          </a:xfrm>
-          <a:prstGeom prst="line">
-            <a:avLst/>
-          </a:prstGeom>
-          <a:noFill/>
-          <a:ln w="25400">
-            <a:solidFill>
-              <a:srgbClr val="8ABBD8"/>
-            </a:solidFill>
-            <a:prstDash val="solid"/>
-          </a:ln>
-        </p:spPr>
-      </p:sp>
-      <p:sp>
-        <p:nvSpPr>
-          <p:cNvPr id="21" name="Text 19"/>
-          <p:cNvSpPr/>
-          <p:nvPr/>
-        </p:nvSpPr>
-        <p:spPr>
-          <a:xfrm>
-            <a:off x="7909560" y="3977640"/>
-            <a:ext cx="2926080" cy="182880"/>
-          </a:xfrm>
-          <a:prstGeom prst="rect">
-            <a:avLst/>
-          </a:prstGeom>
-          <a:noFill/>
-          <a:ln/>
-        </p:spPr>
-        <p:txBody>
-          <a:bodyPr wrap="square" lIns="0" tIns="0" rIns="0" bIns="0" rtlCol="0" anchor="ctr"/>
-          <a:lstStyle/>
-          <a:p>
-            <a:pPr algn="ctr" indent="0" marL="0">
-              <a:buNone/>
-            </a:pPr>
-            <a:r>
-              <a:rPr lang="en-US" sz="1000" dirty="0">
-                <a:solidFill>
-                  <a:srgbClr val="003A63"/>
-                </a:solidFill>
-                <a:latin typeface="Aptos" pitchFamily="34" charset="0"/>
-                <a:ea typeface="Aptos" pitchFamily="34" charset="-122"/>
-                <a:cs typeface="Aptos" pitchFamily="34" charset="-120"/>
-              </a:rPr>
-              <a:t>Dependencies visible</a:t>
-            </a:r>
-            <a:endParaRPr lang="en-US" sz="1000" dirty="0"/>
-          </a:p>
-        </p:txBody>
-      </p:sp>
-      <p:sp>
-        <p:nvSpPr>
-          <p:cNvPr id="22" name="Shape 20"/>
           <p:cNvSpPr/>
           <p:nvPr/>
         </p:nvSpPr>
@@ -6154,7 +5644,7 @@
       </p:sp>
       <p:sp>
         <p:nvSpPr>
-          <p:cNvPr id="23" name="Text 21"/>
+          <p:cNvPr id="17" name="Text 15"/>
           <p:cNvSpPr/>
           <p:nvPr/>
         </p:nvSpPr>
@@ -6193,7 +5683,7 @@
       </p:sp>
       <p:sp>
         <p:nvSpPr>
-          <p:cNvPr id="24" name="Text 22"/>
+          <p:cNvPr id="18" name="Text 16"/>
           <p:cNvSpPr/>
           <p:nvPr/>
         </p:nvSpPr>
@@ -6701,13 +6191,11 @@
             </a:avLst>
           </a:prstGeom>
           <a:solidFill>
-            <a:srgbClr val="FFFFFF">
-              <a:alpha val="88000"/>
-            </a:srgbClr>
+            <a:srgbClr val="FFFFFF"/>
           </a:solidFill>
           <a:ln w="12700">
             <a:solidFill>
-              <a:srgbClr val="D6E8F2"/>
+              <a:srgbClr val="B9D7E6"/>
             </a:solidFill>
             <a:prstDash val="solid"/>
           </a:ln>
@@ -6715,30 +6203,42 @@
       </p:sp>
       <p:sp>
         <p:nvSpPr>
-          <p:cNvPr id="14" name="Shape 12"/>
-          <p:cNvSpPr/>
-          <p:nvPr/>
-        </p:nvSpPr>
-        <p:spPr>
-          <a:xfrm>
-            <a:off x="7927848" y="3319272"/>
-            <a:ext cx="792480" cy="749808"/>
-          </a:xfrm>
-          <a:prstGeom prst="roundRect">
-            <a:avLst>
-              <a:gd name="adj" fmla="val 14634"/>
-            </a:avLst>
-          </a:prstGeom>
-          <a:solidFill>
-            <a:srgbClr val="0068B7"/>
-          </a:solidFill>
-          <a:ln w="12700">
-            <a:solidFill>
-              <a:srgbClr val="0068B7"/>
-            </a:solidFill>
-            <a:prstDash val="solid"/>
-          </a:ln>
-        </p:spPr>
+          <p:cNvPr id="14" name="Text 12"/>
+          <p:cNvSpPr/>
+          <p:nvPr/>
+        </p:nvSpPr>
+        <p:spPr>
+          <a:xfrm>
+            <a:off x="7799832" y="2935224"/>
+            <a:ext cx="3145536" cy="256032"/>
+          </a:xfrm>
+          <a:prstGeom prst="rect">
+            <a:avLst/>
+          </a:prstGeom>
+          <a:noFill/>
+          <a:ln/>
+        </p:spPr>
+        <p:txBody>
+          <a:bodyPr wrap="square" lIns="0" tIns="0" rIns="0" bIns="0" rtlCol="0" anchor="ctr"/>
+          <a:lstStyle/>
+          <a:p>
+            <a:pPr indent="0" marL="0">
+              <a:buNone/>
+            </a:pPr>
+            <a:r>
+              <a:rPr lang="en-US" sz="1300" b="1" dirty="0">
+                <a:solidFill>
+                  <a:srgbClr val="0068B7"/>
+                </a:solidFill>
+                <a:latin typeface="Aptos" pitchFamily="34" charset="0"/>
+                <a:ea typeface="Aptos" pitchFamily="34" charset="-122"/>
+                <a:cs typeface="Aptos" pitchFamily="34" charset="-120"/>
+              </a:rPr>
+              <a:t>Concept checkpoints</a:t>
+            </a:r>
+            <a:endParaRPr lang="en-US" sz="1300" dirty="0"/>
+          </a:p>
+        </p:txBody>
       </p:sp>
       <p:sp>
         <p:nvSpPr>
@@ -6748,240 +6248,67 @@
         </p:nvSpPr>
         <p:spPr>
           <a:xfrm>
-            <a:off x="8001000" y="3511296"/>
-            <a:ext cx="646176" cy="310896"/>
-          </a:xfrm>
-          <a:prstGeom prst="rect">
-            <a:avLst/>
-          </a:prstGeom>
-          <a:noFill/>
-          <a:ln/>
-        </p:spPr>
-        <p:txBody>
-          <a:bodyPr wrap="square" lIns="0" tIns="0" rIns="0" bIns="0" rtlCol="0" anchor="ctr">
+            <a:off x="7818120" y="3300984"/>
+            <a:ext cx="3090672" cy="877824"/>
+          </a:xfrm>
+          <a:prstGeom prst="rect">
+            <a:avLst/>
+          </a:prstGeom>
+          <a:noFill/>
+          <a:ln/>
+        </p:spPr>
+        <p:txBody>
+          <a:bodyPr wrap="square" lIns="254" tIns="254" rIns="254" bIns="254" rtlCol="0" anchor="t">
             <a:normAutofit/>
           </a:bodyPr>
           <a:lstStyle/>
           <a:p>
-            <a:pPr algn="ctr" indent="0" marL="0">
-              <a:buNone/>
-            </a:pPr>
-            <a:r>
-              <a:rPr lang="en-US" sz="1500" b="1" dirty="0">
-                <a:solidFill>
-                  <a:srgbClr val="FFFFFF"/>
-                </a:solidFill>
-                <a:latin typeface="Aptos" pitchFamily="34" charset="0"/>
-                <a:ea typeface="Aptos" pitchFamily="34" charset="-122"/>
-                <a:cs typeface="Aptos" pitchFamily="34" charset="-120"/>
-              </a:rPr>
-              <a:t>Plan</a:t>
-            </a:r>
-            <a:endParaRPr lang="en-US" sz="1500" dirty="0"/>
+            <a:r>
+              <a:rPr lang="en-US" sz="1380" dirty="0">
+                <a:solidFill>
+                  <a:srgbClr val="17364A"/>
+                </a:solidFill>
+                <a:latin typeface="Aptos" pitchFamily="34" charset="0"/>
+                <a:ea typeface="Aptos" pitchFamily="34" charset="-122"/>
+                <a:cs typeface="Aptos" pitchFamily="34" charset="-120"/>
+              </a:rPr>
+              <a:t>Where does this topic appear in one current or proposed AI workflow in your agency?</a:t>
+            </a:r>
+            <a:endParaRPr lang="en-US" sz="1380" dirty="0"/>
+          </a:p>
+          <a:p>
+            <a:r>
+              <a:rPr lang="en-US" sz="1380" dirty="0">
+                <a:solidFill>
+                  <a:srgbClr val="17364A"/>
+                </a:solidFill>
+                <a:latin typeface="Aptos" pitchFamily="34" charset="0"/>
+                <a:ea typeface="Aptos" pitchFamily="34" charset="-122"/>
+                <a:cs typeface="Aptos" pitchFamily="34" charset="-120"/>
+              </a:rPr>
+              <a:t>What decisions, data sources, users, or partners would be affected if this area is poorly.</a:t>
+            </a:r>
+            <a:endParaRPr lang="en-US" sz="1380" dirty="0"/>
+          </a:p>
+          <a:p>
+            <a:r>
+              <a:rPr lang="en-US" sz="1380" dirty="0">
+                <a:solidFill>
+                  <a:srgbClr val="17364A"/>
+                </a:solidFill>
+                <a:latin typeface="Aptos" pitchFamily="34" charset="0"/>
+                <a:ea typeface="Aptos" pitchFamily="34" charset="-122"/>
+                <a:cs typeface="Aptos" pitchFamily="34" charset="-120"/>
+              </a:rPr>
+              <a:t>What evidence would governance reviewers need before approving the workflow?</a:t>
+            </a:r>
+            <a:endParaRPr lang="en-US" sz="1380" dirty="0"/>
           </a:p>
         </p:txBody>
       </p:sp>
       <p:sp>
         <p:nvSpPr>
           <p:cNvPr id="16" name="Shape 14"/>
-          <p:cNvSpPr/>
-          <p:nvPr/>
-        </p:nvSpPr>
-        <p:spPr>
-          <a:xfrm>
-            <a:off x="8976360" y="3319272"/>
-            <a:ext cx="792480" cy="749808"/>
-          </a:xfrm>
-          <a:prstGeom prst="roundRect">
-            <a:avLst>
-              <a:gd name="adj" fmla="val 14634"/>
-            </a:avLst>
-          </a:prstGeom>
-          <a:solidFill>
-            <a:srgbClr val="2F8A28"/>
-          </a:solidFill>
-          <a:ln w="12700">
-            <a:solidFill>
-              <a:srgbClr val="2F8A28"/>
-            </a:solidFill>
-            <a:prstDash val="solid"/>
-          </a:ln>
-        </p:spPr>
-      </p:sp>
-      <p:sp>
-        <p:nvSpPr>
-          <p:cNvPr id="17" name="Text 15"/>
-          <p:cNvSpPr/>
-          <p:nvPr/>
-        </p:nvSpPr>
-        <p:spPr>
-          <a:xfrm>
-            <a:off x="9049512" y="3511296"/>
-            <a:ext cx="646176" cy="310896"/>
-          </a:xfrm>
-          <a:prstGeom prst="rect">
-            <a:avLst/>
-          </a:prstGeom>
-          <a:noFill/>
-          <a:ln/>
-        </p:spPr>
-        <p:txBody>
-          <a:bodyPr wrap="square" lIns="0" tIns="0" rIns="0" bIns="0" rtlCol="0" anchor="ctr">
-            <a:normAutofit/>
-          </a:bodyPr>
-          <a:lstStyle/>
-          <a:p>
-            <a:pPr algn="ctr" indent="0" marL="0">
-              <a:buNone/>
-            </a:pPr>
-            <a:r>
-              <a:rPr lang="en-US" sz="1500" b="1" dirty="0">
-                <a:solidFill>
-                  <a:srgbClr val="FFFFFF"/>
-                </a:solidFill>
-                <a:latin typeface="Aptos" pitchFamily="34" charset="0"/>
-                <a:ea typeface="Aptos" pitchFamily="34" charset="-122"/>
-                <a:cs typeface="Aptos" pitchFamily="34" charset="-120"/>
-              </a:rPr>
-              <a:t>Do</a:t>
-            </a:r>
-            <a:endParaRPr lang="en-US" sz="1500" dirty="0"/>
-          </a:p>
-        </p:txBody>
-      </p:sp>
-      <p:sp>
-        <p:nvSpPr>
-          <p:cNvPr id="18" name="Shape 16"/>
-          <p:cNvSpPr/>
-          <p:nvPr/>
-        </p:nvSpPr>
-        <p:spPr>
-          <a:xfrm>
-            <a:off x="10024872" y="3319272"/>
-            <a:ext cx="792480" cy="749808"/>
-          </a:xfrm>
-          <a:prstGeom prst="roundRect">
-            <a:avLst>
-              <a:gd name="adj" fmla="val 14634"/>
-            </a:avLst>
-          </a:prstGeom>
-          <a:solidFill>
-            <a:srgbClr val="D69A2D"/>
-          </a:solidFill>
-          <a:ln w="12700">
-            <a:solidFill>
-              <a:srgbClr val="D69A2D"/>
-            </a:solidFill>
-            <a:prstDash val="solid"/>
-          </a:ln>
-        </p:spPr>
-      </p:sp>
-      <p:sp>
-        <p:nvSpPr>
-          <p:cNvPr id="19" name="Text 17"/>
-          <p:cNvSpPr/>
-          <p:nvPr/>
-        </p:nvSpPr>
-        <p:spPr>
-          <a:xfrm>
-            <a:off x="10098024" y="3511296"/>
-            <a:ext cx="646176" cy="310896"/>
-          </a:xfrm>
-          <a:prstGeom prst="rect">
-            <a:avLst/>
-          </a:prstGeom>
-          <a:noFill/>
-          <a:ln/>
-        </p:spPr>
-        <p:txBody>
-          <a:bodyPr wrap="square" lIns="0" tIns="0" rIns="0" bIns="0" rtlCol="0" anchor="ctr">
-            <a:normAutofit/>
-          </a:bodyPr>
-          <a:lstStyle/>
-          <a:p>
-            <a:pPr algn="ctr" indent="0" marL="0">
-              <a:buNone/>
-            </a:pPr>
-            <a:r>
-              <a:rPr lang="en-US" sz="1500" b="1" dirty="0">
-                <a:solidFill>
-                  <a:srgbClr val="FFFFFF"/>
-                </a:solidFill>
-                <a:latin typeface="Aptos" pitchFamily="34" charset="0"/>
-                <a:ea typeface="Aptos" pitchFamily="34" charset="-122"/>
-                <a:cs typeface="Aptos" pitchFamily="34" charset="-120"/>
-              </a:rPr>
-              <a:t>Review</a:t>
-            </a:r>
-            <a:endParaRPr lang="en-US" sz="1500" dirty="0"/>
-          </a:p>
-        </p:txBody>
-      </p:sp>
-      <p:sp>
-        <p:nvSpPr>
-          <p:cNvPr id="20" name="Shape 18"/>
-          <p:cNvSpPr/>
-          <p:nvPr/>
-        </p:nvSpPr>
-        <p:spPr>
-          <a:xfrm>
-            <a:off x="8293608" y="4389120"/>
-            <a:ext cx="2157984" cy="0"/>
-          </a:xfrm>
-          <a:prstGeom prst="line">
-            <a:avLst/>
-          </a:prstGeom>
-          <a:noFill/>
-          <a:ln w="25400">
-            <a:solidFill>
-              <a:srgbClr val="8ABBD8"/>
-            </a:solidFill>
-            <a:prstDash val="solid"/>
-          </a:ln>
-        </p:spPr>
-      </p:sp>
-      <p:sp>
-        <p:nvSpPr>
-          <p:cNvPr id="21" name="Text 19"/>
-          <p:cNvSpPr/>
-          <p:nvPr/>
-        </p:nvSpPr>
-        <p:spPr>
-          <a:xfrm>
-            <a:off x="7909560" y="3977640"/>
-            <a:ext cx="2926080" cy="182880"/>
-          </a:xfrm>
-          <a:prstGeom prst="rect">
-            <a:avLst/>
-          </a:prstGeom>
-          <a:noFill/>
-          <a:ln/>
-        </p:spPr>
-        <p:txBody>
-          <a:bodyPr wrap="square" lIns="0" tIns="0" rIns="0" bIns="0" rtlCol="0" anchor="ctr"/>
-          <a:lstStyle/>
-          <a:p>
-            <a:pPr algn="ctr" indent="0" marL="0">
-              <a:buNone/>
-            </a:pPr>
-            <a:r>
-              <a:rPr lang="en-US" sz="1000" dirty="0">
-                <a:solidFill>
-                  <a:srgbClr val="003A63"/>
-                </a:solidFill>
-                <a:latin typeface="Aptos" pitchFamily="34" charset="0"/>
-                <a:ea typeface="Aptos" pitchFamily="34" charset="-122"/>
-                <a:cs typeface="Aptos" pitchFamily="34" charset="-120"/>
-              </a:rPr>
-              <a:t>Dependencies visible</a:t>
-            </a:r>
-            <a:endParaRPr lang="en-US" sz="1000" dirty="0"/>
-          </a:p>
-        </p:txBody>
-      </p:sp>
-      <p:sp>
-        <p:nvSpPr>
-          <p:cNvPr id="22" name="Shape 20"/>
           <p:cNvSpPr/>
           <p:nvPr/>
         </p:nvSpPr>
@@ -7008,7 +6335,7 @@
       </p:sp>
       <p:sp>
         <p:nvSpPr>
-          <p:cNvPr id="23" name="Text 21"/>
+          <p:cNvPr id="17" name="Text 15"/>
           <p:cNvSpPr/>
           <p:nvPr/>
         </p:nvSpPr>
@@ -7047,7 +6374,7 @@
       </p:sp>
       <p:sp>
         <p:nvSpPr>
-          <p:cNvPr id="24" name="Text 22"/>
+          <p:cNvPr id="18" name="Text 16"/>
           <p:cNvSpPr/>
           <p:nvPr/>
         </p:nvSpPr>
@@ -7541,13 +6868,11 @@
             </a:avLst>
           </a:prstGeom>
           <a:solidFill>
-            <a:srgbClr val="FFFFFF">
-              <a:alpha val="88000"/>
-            </a:srgbClr>
+            <a:srgbClr val="FFFFFF"/>
           </a:solidFill>
           <a:ln w="12700">
             <a:solidFill>
-              <a:srgbClr val="D6E8F2"/>
+              <a:srgbClr val="B9D7E6"/>
             </a:solidFill>
             <a:prstDash val="solid"/>
           </a:ln>
@@ -7555,30 +6880,42 @@
       </p:sp>
       <p:sp>
         <p:nvSpPr>
-          <p:cNvPr id="14" name="Shape 12"/>
-          <p:cNvSpPr/>
-          <p:nvPr/>
-        </p:nvSpPr>
-        <p:spPr>
-          <a:xfrm>
-            <a:off x="7927848" y="3319272"/>
-            <a:ext cx="792480" cy="749808"/>
-          </a:xfrm>
-          <a:prstGeom prst="roundRect">
-            <a:avLst>
-              <a:gd name="adj" fmla="val 14634"/>
-            </a:avLst>
-          </a:prstGeom>
-          <a:solidFill>
-            <a:srgbClr val="0068B7"/>
-          </a:solidFill>
-          <a:ln w="12700">
-            <a:solidFill>
-              <a:srgbClr val="0068B7"/>
-            </a:solidFill>
-            <a:prstDash val="solid"/>
-          </a:ln>
-        </p:spPr>
+          <p:cNvPr id="14" name="Text 12"/>
+          <p:cNvSpPr/>
+          <p:nvPr/>
+        </p:nvSpPr>
+        <p:spPr>
+          <a:xfrm>
+            <a:off x="7799832" y="2935224"/>
+            <a:ext cx="3145536" cy="256032"/>
+          </a:xfrm>
+          <a:prstGeom prst="rect">
+            <a:avLst/>
+          </a:prstGeom>
+          <a:noFill/>
+          <a:ln/>
+        </p:spPr>
+        <p:txBody>
+          <a:bodyPr wrap="square" lIns="0" tIns="0" rIns="0" bIns="0" rtlCol="0" anchor="ctr"/>
+          <a:lstStyle/>
+          <a:p>
+            <a:pPr indent="0" marL="0">
+              <a:buNone/>
+            </a:pPr>
+            <a:r>
+              <a:rPr lang="en-US" sz="1300" b="1" dirty="0">
+                <a:solidFill>
+                  <a:srgbClr val="0068B7"/>
+                </a:solidFill>
+                <a:latin typeface="Aptos" pitchFamily="34" charset="0"/>
+                <a:ea typeface="Aptos" pitchFamily="34" charset="-122"/>
+                <a:cs typeface="Aptos" pitchFamily="34" charset="-120"/>
+              </a:rPr>
+              <a:t>Concept checkpoints</a:t>
+            </a:r>
+            <a:endParaRPr lang="en-US" sz="1300" dirty="0"/>
+          </a:p>
+        </p:txBody>
       </p:sp>
       <p:sp>
         <p:nvSpPr>
@@ -7588,240 +6925,53 @@
         </p:nvSpPr>
         <p:spPr>
           <a:xfrm>
-            <a:off x="8001000" y="3511296"/>
-            <a:ext cx="646176" cy="310896"/>
-          </a:xfrm>
-          <a:prstGeom prst="rect">
-            <a:avLst/>
-          </a:prstGeom>
-          <a:noFill/>
-          <a:ln/>
-        </p:spPr>
-        <p:txBody>
-          <a:bodyPr wrap="square" lIns="0" tIns="0" rIns="0" bIns="0" rtlCol="0" anchor="ctr">
+            <a:off x="7818120" y="3300984"/>
+            <a:ext cx="3090672" cy="877824"/>
+          </a:xfrm>
+          <a:prstGeom prst="rect">
+            <a:avLst/>
+          </a:prstGeom>
+          <a:noFill/>
+          <a:ln/>
+        </p:spPr>
+        <p:txBody>
+          <a:bodyPr wrap="square" lIns="254" tIns="254" rIns="254" bIns="254" rtlCol="0" anchor="t">
             <a:normAutofit/>
           </a:bodyPr>
           <a:lstStyle/>
           <a:p>
-            <a:pPr algn="ctr" indent="0" marL="0">
-              <a:buNone/>
-            </a:pPr>
-            <a:r>
-              <a:rPr lang="en-US" sz="1500" b="1" dirty="0">
-                <a:solidFill>
-                  <a:srgbClr val="FFFFFF"/>
-                </a:solidFill>
-                <a:latin typeface="Aptos" pitchFamily="34" charset="0"/>
-                <a:ea typeface="Aptos" pitchFamily="34" charset="-122"/>
-                <a:cs typeface="Aptos" pitchFamily="34" charset="-120"/>
-              </a:rPr>
-              <a:t>Plan</a:t>
-            </a:r>
-            <a:endParaRPr lang="en-US" sz="1500" dirty="0"/>
+            <a:r>
+              <a:rPr lang="en-US" sz="1380" dirty="0">
+                <a:solidFill>
+                  <a:srgbClr val="17364A"/>
+                </a:solidFill>
+                <a:latin typeface="Aptos" pitchFamily="34" charset="0"/>
+                <a:ea typeface="Aptos" pitchFamily="34" charset="-122"/>
+                <a:cs typeface="Aptos" pitchFamily="34" charset="-120"/>
+              </a:rPr>
+              <a:t>Which safeguards should be required before pilot testing?</a:t>
+            </a:r>
+            <a:endParaRPr lang="en-US" sz="1380" dirty="0"/>
+          </a:p>
+          <a:p>
+            <a:r>
+              <a:rPr lang="en-US" sz="1380" dirty="0">
+                <a:solidFill>
+                  <a:srgbClr val="17364A"/>
+                </a:solidFill>
+                <a:latin typeface="Aptos" pitchFamily="34" charset="0"/>
+                <a:ea typeface="Aptos" pitchFamily="34" charset="-122"/>
+                <a:cs typeface="Aptos" pitchFamily="34" charset="-120"/>
+              </a:rPr>
+              <a:t>Who owns ongoing monitoring and review?</a:t>
+            </a:r>
+            <a:endParaRPr lang="en-US" sz="1380" dirty="0"/>
           </a:p>
         </p:txBody>
       </p:sp>
       <p:sp>
         <p:nvSpPr>
           <p:cNvPr id="16" name="Shape 14"/>
-          <p:cNvSpPr/>
-          <p:nvPr/>
-        </p:nvSpPr>
-        <p:spPr>
-          <a:xfrm>
-            <a:off x="8976360" y="3319272"/>
-            <a:ext cx="792480" cy="749808"/>
-          </a:xfrm>
-          <a:prstGeom prst="roundRect">
-            <a:avLst>
-              <a:gd name="adj" fmla="val 14634"/>
-            </a:avLst>
-          </a:prstGeom>
-          <a:solidFill>
-            <a:srgbClr val="2F8A28"/>
-          </a:solidFill>
-          <a:ln w="12700">
-            <a:solidFill>
-              <a:srgbClr val="2F8A28"/>
-            </a:solidFill>
-            <a:prstDash val="solid"/>
-          </a:ln>
-        </p:spPr>
-      </p:sp>
-      <p:sp>
-        <p:nvSpPr>
-          <p:cNvPr id="17" name="Text 15"/>
-          <p:cNvSpPr/>
-          <p:nvPr/>
-        </p:nvSpPr>
-        <p:spPr>
-          <a:xfrm>
-            <a:off x="9049512" y="3511296"/>
-            <a:ext cx="646176" cy="310896"/>
-          </a:xfrm>
-          <a:prstGeom prst="rect">
-            <a:avLst/>
-          </a:prstGeom>
-          <a:noFill/>
-          <a:ln/>
-        </p:spPr>
-        <p:txBody>
-          <a:bodyPr wrap="square" lIns="0" tIns="0" rIns="0" bIns="0" rtlCol="0" anchor="ctr">
-            <a:normAutofit/>
-          </a:bodyPr>
-          <a:lstStyle/>
-          <a:p>
-            <a:pPr algn="ctr" indent="0" marL="0">
-              <a:buNone/>
-            </a:pPr>
-            <a:r>
-              <a:rPr lang="en-US" sz="1500" b="1" dirty="0">
-                <a:solidFill>
-                  <a:srgbClr val="FFFFFF"/>
-                </a:solidFill>
-                <a:latin typeface="Aptos" pitchFamily="34" charset="0"/>
-                <a:ea typeface="Aptos" pitchFamily="34" charset="-122"/>
-                <a:cs typeface="Aptos" pitchFamily="34" charset="-120"/>
-              </a:rPr>
-              <a:t>Do</a:t>
-            </a:r>
-            <a:endParaRPr lang="en-US" sz="1500" dirty="0"/>
-          </a:p>
-        </p:txBody>
-      </p:sp>
-      <p:sp>
-        <p:nvSpPr>
-          <p:cNvPr id="18" name="Shape 16"/>
-          <p:cNvSpPr/>
-          <p:nvPr/>
-        </p:nvSpPr>
-        <p:spPr>
-          <a:xfrm>
-            <a:off x="10024872" y="3319272"/>
-            <a:ext cx="792480" cy="749808"/>
-          </a:xfrm>
-          <a:prstGeom prst="roundRect">
-            <a:avLst>
-              <a:gd name="adj" fmla="val 14634"/>
-            </a:avLst>
-          </a:prstGeom>
-          <a:solidFill>
-            <a:srgbClr val="D69A2D"/>
-          </a:solidFill>
-          <a:ln w="12700">
-            <a:solidFill>
-              <a:srgbClr val="D69A2D"/>
-            </a:solidFill>
-            <a:prstDash val="solid"/>
-          </a:ln>
-        </p:spPr>
-      </p:sp>
-      <p:sp>
-        <p:nvSpPr>
-          <p:cNvPr id="19" name="Text 17"/>
-          <p:cNvSpPr/>
-          <p:nvPr/>
-        </p:nvSpPr>
-        <p:spPr>
-          <a:xfrm>
-            <a:off x="10098024" y="3511296"/>
-            <a:ext cx="646176" cy="310896"/>
-          </a:xfrm>
-          <a:prstGeom prst="rect">
-            <a:avLst/>
-          </a:prstGeom>
-          <a:noFill/>
-          <a:ln/>
-        </p:spPr>
-        <p:txBody>
-          <a:bodyPr wrap="square" lIns="0" tIns="0" rIns="0" bIns="0" rtlCol="0" anchor="ctr">
-            <a:normAutofit/>
-          </a:bodyPr>
-          <a:lstStyle/>
-          <a:p>
-            <a:pPr algn="ctr" indent="0" marL="0">
-              <a:buNone/>
-            </a:pPr>
-            <a:r>
-              <a:rPr lang="en-US" sz="1500" b="1" dirty="0">
-                <a:solidFill>
-                  <a:srgbClr val="FFFFFF"/>
-                </a:solidFill>
-                <a:latin typeface="Aptos" pitchFamily="34" charset="0"/>
-                <a:ea typeface="Aptos" pitchFamily="34" charset="-122"/>
-                <a:cs typeface="Aptos" pitchFamily="34" charset="-120"/>
-              </a:rPr>
-              <a:t>Review</a:t>
-            </a:r>
-            <a:endParaRPr lang="en-US" sz="1500" dirty="0"/>
-          </a:p>
-        </p:txBody>
-      </p:sp>
-      <p:sp>
-        <p:nvSpPr>
-          <p:cNvPr id="20" name="Shape 18"/>
-          <p:cNvSpPr/>
-          <p:nvPr/>
-        </p:nvSpPr>
-        <p:spPr>
-          <a:xfrm>
-            <a:off x="8293608" y="4389120"/>
-            <a:ext cx="2157984" cy="0"/>
-          </a:xfrm>
-          <a:prstGeom prst="line">
-            <a:avLst/>
-          </a:prstGeom>
-          <a:noFill/>
-          <a:ln w="25400">
-            <a:solidFill>
-              <a:srgbClr val="8ABBD8"/>
-            </a:solidFill>
-            <a:prstDash val="solid"/>
-          </a:ln>
-        </p:spPr>
-      </p:sp>
-      <p:sp>
-        <p:nvSpPr>
-          <p:cNvPr id="21" name="Text 19"/>
-          <p:cNvSpPr/>
-          <p:nvPr/>
-        </p:nvSpPr>
-        <p:spPr>
-          <a:xfrm>
-            <a:off x="7909560" y="3977640"/>
-            <a:ext cx="2926080" cy="182880"/>
-          </a:xfrm>
-          <a:prstGeom prst="rect">
-            <a:avLst/>
-          </a:prstGeom>
-          <a:noFill/>
-          <a:ln/>
-        </p:spPr>
-        <p:txBody>
-          <a:bodyPr wrap="square" lIns="0" tIns="0" rIns="0" bIns="0" rtlCol="0" anchor="ctr"/>
-          <a:lstStyle/>
-          <a:p>
-            <a:pPr algn="ctr" indent="0" marL="0">
-              <a:buNone/>
-            </a:pPr>
-            <a:r>
-              <a:rPr lang="en-US" sz="1000" dirty="0">
-                <a:solidFill>
-                  <a:srgbClr val="003A63"/>
-                </a:solidFill>
-                <a:latin typeface="Aptos" pitchFamily="34" charset="0"/>
-                <a:ea typeface="Aptos" pitchFamily="34" charset="-122"/>
-                <a:cs typeface="Aptos" pitchFamily="34" charset="-120"/>
-              </a:rPr>
-              <a:t>Dependencies visible</a:t>
-            </a:r>
-            <a:endParaRPr lang="en-US" sz="1000" dirty="0"/>
-          </a:p>
-        </p:txBody>
-      </p:sp>
-      <p:sp>
-        <p:nvSpPr>
-          <p:cNvPr id="22" name="Shape 20"/>
           <p:cNvSpPr/>
           <p:nvPr/>
         </p:nvSpPr>
@@ -7848,7 +6998,7 @@
       </p:sp>
       <p:sp>
         <p:nvSpPr>
-          <p:cNvPr id="23" name="Text 21"/>
+          <p:cNvPr id="17" name="Text 15"/>
           <p:cNvSpPr/>
           <p:nvPr/>
         </p:nvSpPr>
@@ -7887,7 +7037,7 @@
       </p:sp>
       <p:sp>
         <p:nvSpPr>
-          <p:cNvPr id="24" name="Text 22"/>
+          <p:cNvPr id="18" name="Text 16"/>
           <p:cNvSpPr/>
           <p:nvPr/>
         </p:nvSpPr>
@@ -8395,13 +7545,11 @@
             </a:avLst>
           </a:prstGeom>
           <a:solidFill>
-            <a:srgbClr val="FFFFFF">
-              <a:alpha val="88000"/>
-            </a:srgbClr>
+            <a:srgbClr val="FFFFFF"/>
           </a:solidFill>
           <a:ln w="12700">
             <a:solidFill>
-              <a:srgbClr val="D6E8F2"/>
+              <a:srgbClr val="B9D7E6"/>
             </a:solidFill>
             <a:prstDash val="solid"/>
           </a:ln>
@@ -8409,30 +7557,42 @@
       </p:sp>
       <p:sp>
         <p:nvSpPr>
-          <p:cNvPr id="14" name="Shape 12"/>
-          <p:cNvSpPr/>
-          <p:nvPr/>
-        </p:nvSpPr>
-        <p:spPr>
-          <a:xfrm>
-            <a:off x="7927848" y="3319272"/>
-            <a:ext cx="792480" cy="749808"/>
-          </a:xfrm>
-          <a:prstGeom prst="roundRect">
-            <a:avLst>
-              <a:gd name="adj" fmla="val 14634"/>
-            </a:avLst>
-          </a:prstGeom>
-          <a:solidFill>
-            <a:srgbClr val="0068B7"/>
-          </a:solidFill>
-          <a:ln w="12700">
-            <a:solidFill>
-              <a:srgbClr val="0068B7"/>
-            </a:solidFill>
-            <a:prstDash val="solid"/>
-          </a:ln>
-        </p:spPr>
+          <p:cNvPr id="14" name="Text 12"/>
+          <p:cNvSpPr/>
+          <p:nvPr/>
+        </p:nvSpPr>
+        <p:spPr>
+          <a:xfrm>
+            <a:off x="7799832" y="2935224"/>
+            <a:ext cx="3145536" cy="256032"/>
+          </a:xfrm>
+          <a:prstGeom prst="rect">
+            <a:avLst/>
+          </a:prstGeom>
+          <a:noFill/>
+          <a:ln/>
+        </p:spPr>
+        <p:txBody>
+          <a:bodyPr wrap="square" lIns="0" tIns="0" rIns="0" bIns="0" rtlCol="0" anchor="ctr"/>
+          <a:lstStyle/>
+          <a:p>
+            <a:pPr indent="0" marL="0">
+              <a:buNone/>
+            </a:pPr>
+            <a:r>
+              <a:rPr lang="en-US" sz="1300" b="1" dirty="0">
+                <a:solidFill>
+                  <a:srgbClr val="0068B7"/>
+                </a:solidFill>
+                <a:latin typeface="Aptos" pitchFamily="34" charset="0"/>
+                <a:ea typeface="Aptos" pitchFamily="34" charset="-122"/>
+                <a:cs typeface="Aptos" pitchFamily="34" charset="-120"/>
+              </a:rPr>
+              <a:t>Concept checkpoints</a:t>
+            </a:r>
+            <a:endParaRPr lang="en-US" sz="1300" dirty="0"/>
+          </a:p>
+        </p:txBody>
       </p:sp>
       <p:sp>
         <p:nvSpPr>
@@ -8442,240 +7602,67 @@
         </p:nvSpPr>
         <p:spPr>
           <a:xfrm>
-            <a:off x="8001000" y="3511296"/>
-            <a:ext cx="646176" cy="310896"/>
-          </a:xfrm>
-          <a:prstGeom prst="rect">
-            <a:avLst/>
-          </a:prstGeom>
-          <a:noFill/>
-          <a:ln/>
-        </p:spPr>
-        <p:txBody>
-          <a:bodyPr wrap="square" lIns="0" tIns="0" rIns="0" bIns="0" rtlCol="0" anchor="ctr">
+            <a:off x="7818120" y="3300984"/>
+            <a:ext cx="3090672" cy="877824"/>
+          </a:xfrm>
+          <a:prstGeom prst="rect">
+            <a:avLst/>
+          </a:prstGeom>
+          <a:noFill/>
+          <a:ln/>
+        </p:spPr>
+        <p:txBody>
+          <a:bodyPr wrap="square" lIns="254" tIns="254" rIns="254" bIns="254" rtlCol="0" anchor="t">
             <a:normAutofit/>
           </a:bodyPr>
           <a:lstStyle/>
           <a:p>
-            <a:pPr algn="ctr" indent="0" marL="0">
-              <a:buNone/>
-            </a:pPr>
-            <a:r>
-              <a:rPr lang="en-US" sz="1500" b="1" dirty="0">
-                <a:solidFill>
-                  <a:srgbClr val="FFFFFF"/>
-                </a:solidFill>
-                <a:latin typeface="Aptos" pitchFamily="34" charset="0"/>
-                <a:ea typeface="Aptos" pitchFamily="34" charset="-122"/>
-                <a:cs typeface="Aptos" pitchFamily="34" charset="-120"/>
-              </a:rPr>
-              <a:t>Plan</a:t>
-            </a:r>
-            <a:endParaRPr lang="en-US" sz="1500" dirty="0"/>
+            <a:r>
+              <a:rPr lang="en-US" sz="1380" dirty="0">
+                <a:solidFill>
+                  <a:srgbClr val="17364A"/>
+                </a:solidFill>
+                <a:latin typeface="Aptos" pitchFamily="34" charset="0"/>
+                <a:ea typeface="Aptos" pitchFamily="34" charset="-122"/>
+                <a:cs typeface="Aptos" pitchFamily="34" charset="-120"/>
+              </a:rPr>
+              <a:t>The artifact should describe the use case, affected users, data sources, system.</a:t>
+            </a:r>
+            <a:endParaRPr lang="en-US" sz="1380" dirty="0"/>
+          </a:p>
+          <a:p>
+            <a:r>
+              <a:rPr lang="en-US" sz="1380" dirty="0">
+                <a:solidFill>
+                  <a:srgbClr val="17364A"/>
+                </a:solidFill>
+                <a:latin typeface="Aptos" pitchFamily="34" charset="0"/>
+                <a:ea typeface="Aptos" pitchFamily="34" charset="-122"/>
+                <a:cs typeface="Aptos" pitchFamily="34" charset="-120"/>
+              </a:rPr>
+              <a:t>The exercise should produce a work product that could be used in a governance meeting,.</a:t>
+            </a:r>
+            <a:endParaRPr lang="en-US" sz="1380" dirty="0"/>
+          </a:p>
+          <a:p>
+            <a:r>
+              <a:rPr lang="en-US" sz="1380" dirty="0">
+                <a:solidFill>
+                  <a:srgbClr val="17364A"/>
+                </a:solidFill>
+                <a:latin typeface="Aptos" pitchFamily="34" charset="0"/>
+                <a:ea typeface="Aptos" pitchFamily="34" charset="-122"/>
+                <a:cs typeface="Aptos" pitchFamily="34" charset="-120"/>
+              </a:rPr>
+              <a:t>Learners should document assumptions and identify which staff or partners need to be.</a:t>
+            </a:r>
+            <a:endParaRPr lang="en-US" sz="1380" dirty="0"/>
           </a:p>
         </p:txBody>
       </p:sp>
       <p:sp>
         <p:nvSpPr>
           <p:cNvPr id="16" name="Shape 14"/>
-          <p:cNvSpPr/>
-          <p:nvPr/>
-        </p:nvSpPr>
-        <p:spPr>
-          <a:xfrm>
-            <a:off x="8976360" y="3319272"/>
-            <a:ext cx="792480" cy="749808"/>
-          </a:xfrm>
-          <a:prstGeom prst="roundRect">
-            <a:avLst>
-              <a:gd name="adj" fmla="val 14634"/>
-            </a:avLst>
-          </a:prstGeom>
-          <a:solidFill>
-            <a:srgbClr val="2F8A28"/>
-          </a:solidFill>
-          <a:ln w="12700">
-            <a:solidFill>
-              <a:srgbClr val="2F8A28"/>
-            </a:solidFill>
-            <a:prstDash val="solid"/>
-          </a:ln>
-        </p:spPr>
-      </p:sp>
-      <p:sp>
-        <p:nvSpPr>
-          <p:cNvPr id="17" name="Text 15"/>
-          <p:cNvSpPr/>
-          <p:nvPr/>
-        </p:nvSpPr>
-        <p:spPr>
-          <a:xfrm>
-            <a:off x="9049512" y="3511296"/>
-            <a:ext cx="646176" cy="310896"/>
-          </a:xfrm>
-          <a:prstGeom prst="rect">
-            <a:avLst/>
-          </a:prstGeom>
-          <a:noFill/>
-          <a:ln/>
-        </p:spPr>
-        <p:txBody>
-          <a:bodyPr wrap="square" lIns="0" tIns="0" rIns="0" bIns="0" rtlCol="0" anchor="ctr">
-            <a:normAutofit/>
-          </a:bodyPr>
-          <a:lstStyle/>
-          <a:p>
-            <a:pPr algn="ctr" indent="0" marL="0">
-              <a:buNone/>
-            </a:pPr>
-            <a:r>
-              <a:rPr lang="en-US" sz="1500" b="1" dirty="0">
-                <a:solidFill>
-                  <a:srgbClr val="FFFFFF"/>
-                </a:solidFill>
-                <a:latin typeface="Aptos" pitchFamily="34" charset="0"/>
-                <a:ea typeface="Aptos" pitchFamily="34" charset="-122"/>
-                <a:cs typeface="Aptos" pitchFamily="34" charset="-120"/>
-              </a:rPr>
-              <a:t>Do</a:t>
-            </a:r>
-            <a:endParaRPr lang="en-US" sz="1500" dirty="0"/>
-          </a:p>
-        </p:txBody>
-      </p:sp>
-      <p:sp>
-        <p:nvSpPr>
-          <p:cNvPr id="18" name="Shape 16"/>
-          <p:cNvSpPr/>
-          <p:nvPr/>
-        </p:nvSpPr>
-        <p:spPr>
-          <a:xfrm>
-            <a:off x="10024872" y="3319272"/>
-            <a:ext cx="792480" cy="749808"/>
-          </a:xfrm>
-          <a:prstGeom prst="roundRect">
-            <a:avLst>
-              <a:gd name="adj" fmla="val 14634"/>
-            </a:avLst>
-          </a:prstGeom>
-          <a:solidFill>
-            <a:srgbClr val="D69A2D"/>
-          </a:solidFill>
-          <a:ln w="12700">
-            <a:solidFill>
-              <a:srgbClr val="D69A2D"/>
-            </a:solidFill>
-            <a:prstDash val="solid"/>
-          </a:ln>
-        </p:spPr>
-      </p:sp>
-      <p:sp>
-        <p:nvSpPr>
-          <p:cNvPr id="19" name="Text 17"/>
-          <p:cNvSpPr/>
-          <p:nvPr/>
-        </p:nvSpPr>
-        <p:spPr>
-          <a:xfrm>
-            <a:off x="10098024" y="3511296"/>
-            <a:ext cx="646176" cy="310896"/>
-          </a:xfrm>
-          <a:prstGeom prst="rect">
-            <a:avLst/>
-          </a:prstGeom>
-          <a:noFill/>
-          <a:ln/>
-        </p:spPr>
-        <p:txBody>
-          <a:bodyPr wrap="square" lIns="0" tIns="0" rIns="0" bIns="0" rtlCol="0" anchor="ctr">
-            <a:normAutofit/>
-          </a:bodyPr>
-          <a:lstStyle/>
-          <a:p>
-            <a:pPr algn="ctr" indent="0" marL="0">
-              <a:buNone/>
-            </a:pPr>
-            <a:r>
-              <a:rPr lang="en-US" sz="1500" b="1" dirty="0">
-                <a:solidFill>
-                  <a:srgbClr val="FFFFFF"/>
-                </a:solidFill>
-                <a:latin typeface="Aptos" pitchFamily="34" charset="0"/>
-                <a:ea typeface="Aptos" pitchFamily="34" charset="-122"/>
-                <a:cs typeface="Aptos" pitchFamily="34" charset="-120"/>
-              </a:rPr>
-              <a:t>Review</a:t>
-            </a:r>
-            <a:endParaRPr lang="en-US" sz="1500" dirty="0"/>
-          </a:p>
-        </p:txBody>
-      </p:sp>
-      <p:sp>
-        <p:nvSpPr>
-          <p:cNvPr id="20" name="Shape 18"/>
-          <p:cNvSpPr/>
-          <p:nvPr/>
-        </p:nvSpPr>
-        <p:spPr>
-          <a:xfrm>
-            <a:off x="8293608" y="4389120"/>
-            <a:ext cx="2157984" cy="0"/>
-          </a:xfrm>
-          <a:prstGeom prst="line">
-            <a:avLst/>
-          </a:prstGeom>
-          <a:noFill/>
-          <a:ln w="25400">
-            <a:solidFill>
-              <a:srgbClr val="8ABBD8"/>
-            </a:solidFill>
-            <a:prstDash val="solid"/>
-          </a:ln>
-        </p:spPr>
-      </p:sp>
-      <p:sp>
-        <p:nvSpPr>
-          <p:cNvPr id="21" name="Text 19"/>
-          <p:cNvSpPr/>
-          <p:nvPr/>
-        </p:nvSpPr>
-        <p:spPr>
-          <a:xfrm>
-            <a:off x="7909560" y="3977640"/>
-            <a:ext cx="2926080" cy="182880"/>
-          </a:xfrm>
-          <a:prstGeom prst="rect">
-            <a:avLst/>
-          </a:prstGeom>
-          <a:noFill/>
-          <a:ln/>
-        </p:spPr>
-        <p:txBody>
-          <a:bodyPr wrap="square" lIns="0" tIns="0" rIns="0" bIns="0" rtlCol="0" anchor="ctr"/>
-          <a:lstStyle/>
-          <a:p>
-            <a:pPr algn="ctr" indent="0" marL="0">
-              <a:buNone/>
-            </a:pPr>
-            <a:r>
-              <a:rPr lang="en-US" sz="1000" dirty="0">
-                <a:solidFill>
-                  <a:srgbClr val="003A63"/>
-                </a:solidFill>
-                <a:latin typeface="Aptos" pitchFamily="34" charset="0"/>
-                <a:ea typeface="Aptos" pitchFamily="34" charset="-122"/>
-                <a:cs typeface="Aptos" pitchFamily="34" charset="-120"/>
-              </a:rPr>
-              <a:t>Dependencies visible</a:t>
-            </a:r>
-            <a:endParaRPr lang="en-US" sz="1000" dirty="0"/>
-          </a:p>
-        </p:txBody>
-      </p:sp>
-      <p:sp>
-        <p:nvSpPr>
-          <p:cNvPr id="22" name="Shape 20"/>
           <p:cNvSpPr/>
           <p:nvPr/>
         </p:nvSpPr>
@@ -8702,7 +7689,7 @@
       </p:sp>
       <p:sp>
         <p:nvSpPr>
-          <p:cNvPr id="23" name="Text 21"/>
+          <p:cNvPr id="17" name="Text 15"/>
           <p:cNvSpPr/>
           <p:nvPr/>
         </p:nvSpPr>
@@ -8741,7 +7728,7 @@
       </p:sp>
       <p:sp>
         <p:nvSpPr>
-          <p:cNvPr id="24" name="Text 22"/>
+          <p:cNvPr id="18" name="Text 16"/>
           <p:cNvSpPr/>
           <p:nvPr/>
         </p:nvSpPr>
@@ -9235,13 +8222,11 @@
             </a:avLst>
           </a:prstGeom>
           <a:solidFill>
-            <a:srgbClr val="FFFFFF">
-              <a:alpha val="88000"/>
-            </a:srgbClr>
+            <a:srgbClr val="FFFFFF"/>
           </a:solidFill>
           <a:ln w="12700">
             <a:solidFill>
-              <a:srgbClr val="D6E8F2"/>
+              <a:srgbClr val="B9D7E6"/>
             </a:solidFill>
             <a:prstDash val="solid"/>
           </a:ln>
@@ -9249,30 +8234,42 @@
       </p:sp>
       <p:sp>
         <p:nvSpPr>
-          <p:cNvPr id="14" name="Shape 12"/>
-          <p:cNvSpPr/>
-          <p:nvPr/>
-        </p:nvSpPr>
-        <p:spPr>
-          <a:xfrm>
-            <a:off x="7927848" y="3319272"/>
-            <a:ext cx="792480" cy="749808"/>
-          </a:xfrm>
-          <a:prstGeom prst="roundRect">
-            <a:avLst>
-              <a:gd name="adj" fmla="val 14634"/>
-            </a:avLst>
-          </a:prstGeom>
-          <a:solidFill>
-            <a:srgbClr val="0068B7"/>
-          </a:solidFill>
-          <a:ln w="12700">
-            <a:solidFill>
-              <a:srgbClr val="0068B7"/>
-            </a:solidFill>
-            <a:prstDash val="solid"/>
-          </a:ln>
-        </p:spPr>
+          <p:cNvPr id="14" name="Text 12"/>
+          <p:cNvSpPr/>
+          <p:nvPr/>
+        </p:nvSpPr>
+        <p:spPr>
+          <a:xfrm>
+            <a:off x="7799832" y="2935224"/>
+            <a:ext cx="3145536" cy="256032"/>
+          </a:xfrm>
+          <a:prstGeom prst="rect">
+            <a:avLst/>
+          </a:prstGeom>
+          <a:noFill/>
+          <a:ln/>
+        </p:spPr>
+        <p:txBody>
+          <a:bodyPr wrap="square" lIns="0" tIns="0" rIns="0" bIns="0" rtlCol="0" anchor="ctr"/>
+          <a:lstStyle/>
+          <a:p>
+            <a:pPr indent="0" marL="0">
+              <a:buNone/>
+            </a:pPr>
+            <a:r>
+              <a:rPr lang="en-US" sz="1300" b="1" dirty="0">
+                <a:solidFill>
+                  <a:srgbClr val="0068B7"/>
+                </a:solidFill>
+                <a:latin typeface="Aptos" pitchFamily="34" charset="0"/>
+                <a:ea typeface="Aptos" pitchFamily="34" charset="-122"/>
+                <a:cs typeface="Aptos" pitchFamily="34" charset="-120"/>
+              </a:rPr>
+              <a:t>Concept checkpoints</a:t>
+            </a:r>
+            <a:endParaRPr lang="en-US" sz="1300" dirty="0"/>
+          </a:p>
+        </p:txBody>
       </p:sp>
       <p:sp>
         <p:nvSpPr>
@@ -9282,240 +8279,53 @@
         </p:nvSpPr>
         <p:spPr>
           <a:xfrm>
-            <a:off x="8001000" y="3511296"/>
-            <a:ext cx="646176" cy="310896"/>
-          </a:xfrm>
-          <a:prstGeom prst="rect">
-            <a:avLst/>
-          </a:prstGeom>
-          <a:noFill/>
-          <a:ln/>
-        </p:spPr>
-        <p:txBody>
-          <a:bodyPr wrap="square" lIns="0" tIns="0" rIns="0" bIns="0" rtlCol="0" anchor="ctr">
+            <a:off x="7818120" y="3300984"/>
+            <a:ext cx="3090672" cy="877824"/>
+          </a:xfrm>
+          <a:prstGeom prst="rect">
+            <a:avLst/>
+          </a:prstGeom>
+          <a:noFill/>
+          <a:ln/>
+        </p:spPr>
+        <p:txBody>
+          <a:bodyPr wrap="square" lIns="254" tIns="254" rIns="254" bIns="254" rtlCol="0" anchor="t">
             <a:normAutofit/>
           </a:bodyPr>
           <a:lstStyle/>
           <a:p>
-            <a:pPr algn="ctr" indent="0" marL="0">
-              <a:buNone/>
-            </a:pPr>
-            <a:r>
-              <a:rPr lang="en-US" sz="1500" b="1" dirty="0">
-                <a:solidFill>
-                  <a:srgbClr val="FFFFFF"/>
-                </a:solidFill>
-                <a:latin typeface="Aptos" pitchFamily="34" charset="0"/>
-                <a:ea typeface="Aptos" pitchFamily="34" charset="-122"/>
-                <a:cs typeface="Aptos" pitchFamily="34" charset="-120"/>
-              </a:rPr>
-              <a:t>Plan</a:t>
-            </a:r>
-            <a:endParaRPr lang="en-US" sz="1500" dirty="0"/>
+            <a:r>
+              <a:rPr lang="en-US" sz="1380" dirty="0">
+                <a:solidFill>
+                  <a:srgbClr val="17364A"/>
+                </a:solidFill>
+                <a:latin typeface="Aptos" pitchFamily="34" charset="0"/>
+                <a:ea typeface="Aptos" pitchFamily="34" charset="-122"/>
+                <a:cs typeface="Aptos" pitchFamily="34" charset="-120"/>
+              </a:rPr>
+              <a:t>The expected artifact is a completed workflow usability test plan.</a:t>
+            </a:r>
+            <a:endParaRPr lang="en-US" sz="1380" dirty="0"/>
+          </a:p>
+          <a:p>
+            <a:r>
+              <a:rPr lang="en-US" sz="1380" dirty="0">
+                <a:solidFill>
+                  <a:srgbClr val="17364A"/>
+                </a:solidFill>
+                <a:latin typeface="Aptos" pitchFamily="34" charset="0"/>
+                <a:ea typeface="Aptos" pitchFamily="34" charset="-122"/>
+                <a:cs typeface="Aptos" pitchFamily="34" charset="-120"/>
+              </a:rPr>
+              <a:t>It should be specific to a public health workflow and should include technical.</a:t>
+            </a:r>
+            <a:endParaRPr lang="en-US" sz="1380" dirty="0"/>
           </a:p>
         </p:txBody>
       </p:sp>
       <p:sp>
         <p:nvSpPr>
           <p:cNvPr id="16" name="Shape 14"/>
-          <p:cNvSpPr/>
-          <p:nvPr/>
-        </p:nvSpPr>
-        <p:spPr>
-          <a:xfrm>
-            <a:off x="8976360" y="3319272"/>
-            <a:ext cx="792480" cy="749808"/>
-          </a:xfrm>
-          <a:prstGeom prst="roundRect">
-            <a:avLst>
-              <a:gd name="adj" fmla="val 14634"/>
-            </a:avLst>
-          </a:prstGeom>
-          <a:solidFill>
-            <a:srgbClr val="2F8A28"/>
-          </a:solidFill>
-          <a:ln w="12700">
-            <a:solidFill>
-              <a:srgbClr val="2F8A28"/>
-            </a:solidFill>
-            <a:prstDash val="solid"/>
-          </a:ln>
-        </p:spPr>
-      </p:sp>
-      <p:sp>
-        <p:nvSpPr>
-          <p:cNvPr id="17" name="Text 15"/>
-          <p:cNvSpPr/>
-          <p:nvPr/>
-        </p:nvSpPr>
-        <p:spPr>
-          <a:xfrm>
-            <a:off x="9049512" y="3511296"/>
-            <a:ext cx="646176" cy="310896"/>
-          </a:xfrm>
-          <a:prstGeom prst="rect">
-            <a:avLst/>
-          </a:prstGeom>
-          <a:noFill/>
-          <a:ln/>
-        </p:spPr>
-        <p:txBody>
-          <a:bodyPr wrap="square" lIns="0" tIns="0" rIns="0" bIns="0" rtlCol="0" anchor="ctr">
-            <a:normAutofit/>
-          </a:bodyPr>
-          <a:lstStyle/>
-          <a:p>
-            <a:pPr algn="ctr" indent="0" marL="0">
-              <a:buNone/>
-            </a:pPr>
-            <a:r>
-              <a:rPr lang="en-US" sz="1500" b="1" dirty="0">
-                <a:solidFill>
-                  <a:srgbClr val="FFFFFF"/>
-                </a:solidFill>
-                <a:latin typeface="Aptos" pitchFamily="34" charset="0"/>
-                <a:ea typeface="Aptos" pitchFamily="34" charset="-122"/>
-                <a:cs typeface="Aptos" pitchFamily="34" charset="-120"/>
-              </a:rPr>
-              <a:t>Do</a:t>
-            </a:r>
-            <a:endParaRPr lang="en-US" sz="1500" dirty="0"/>
-          </a:p>
-        </p:txBody>
-      </p:sp>
-      <p:sp>
-        <p:nvSpPr>
-          <p:cNvPr id="18" name="Shape 16"/>
-          <p:cNvSpPr/>
-          <p:nvPr/>
-        </p:nvSpPr>
-        <p:spPr>
-          <a:xfrm>
-            <a:off x="10024872" y="3319272"/>
-            <a:ext cx="792480" cy="749808"/>
-          </a:xfrm>
-          <a:prstGeom prst="roundRect">
-            <a:avLst>
-              <a:gd name="adj" fmla="val 14634"/>
-            </a:avLst>
-          </a:prstGeom>
-          <a:solidFill>
-            <a:srgbClr val="D69A2D"/>
-          </a:solidFill>
-          <a:ln w="12700">
-            <a:solidFill>
-              <a:srgbClr val="D69A2D"/>
-            </a:solidFill>
-            <a:prstDash val="solid"/>
-          </a:ln>
-        </p:spPr>
-      </p:sp>
-      <p:sp>
-        <p:nvSpPr>
-          <p:cNvPr id="19" name="Text 17"/>
-          <p:cNvSpPr/>
-          <p:nvPr/>
-        </p:nvSpPr>
-        <p:spPr>
-          <a:xfrm>
-            <a:off x="10098024" y="3511296"/>
-            <a:ext cx="646176" cy="310896"/>
-          </a:xfrm>
-          <a:prstGeom prst="rect">
-            <a:avLst/>
-          </a:prstGeom>
-          <a:noFill/>
-          <a:ln/>
-        </p:spPr>
-        <p:txBody>
-          <a:bodyPr wrap="square" lIns="0" tIns="0" rIns="0" bIns="0" rtlCol="0" anchor="ctr">
-            <a:normAutofit/>
-          </a:bodyPr>
-          <a:lstStyle/>
-          <a:p>
-            <a:pPr algn="ctr" indent="0" marL="0">
-              <a:buNone/>
-            </a:pPr>
-            <a:r>
-              <a:rPr lang="en-US" sz="1500" b="1" dirty="0">
-                <a:solidFill>
-                  <a:srgbClr val="FFFFFF"/>
-                </a:solidFill>
-                <a:latin typeface="Aptos" pitchFamily="34" charset="0"/>
-                <a:ea typeface="Aptos" pitchFamily="34" charset="-122"/>
-                <a:cs typeface="Aptos" pitchFamily="34" charset="-120"/>
-              </a:rPr>
-              <a:t>Review</a:t>
-            </a:r>
-            <a:endParaRPr lang="en-US" sz="1500" dirty="0"/>
-          </a:p>
-        </p:txBody>
-      </p:sp>
-      <p:sp>
-        <p:nvSpPr>
-          <p:cNvPr id="20" name="Shape 18"/>
-          <p:cNvSpPr/>
-          <p:nvPr/>
-        </p:nvSpPr>
-        <p:spPr>
-          <a:xfrm>
-            <a:off x="8293608" y="4389120"/>
-            <a:ext cx="2157984" cy="0"/>
-          </a:xfrm>
-          <a:prstGeom prst="line">
-            <a:avLst/>
-          </a:prstGeom>
-          <a:noFill/>
-          <a:ln w="25400">
-            <a:solidFill>
-              <a:srgbClr val="8ABBD8"/>
-            </a:solidFill>
-            <a:prstDash val="solid"/>
-          </a:ln>
-        </p:spPr>
-      </p:sp>
-      <p:sp>
-        <p:nvSpPr>
-          <p:cNvPr id="21" name="Text 19"/>
-          <p:cNvSpPr/>
-          <p:nvPr/>
-        </p:nvSpPr>
-        <p:spPr>
-          <a:xfrm>
-            <a:off x="7909560" y="3977640"/>
-            <a:ext cx="2926080" cy="182880"/>
-          </a:xfrm>
-          <a:prstGeom prst="rect">
-            <a:avLst/>
-          </a:prstGeom>
-          <a:noFill/>
-          <a:ln/>
-        </p:spPr>
-        <p:txBody>
-          <a:bodyPr wrap="square" lIns="0" tIns="0" rIns="0" bIns="0" rtlCol="0" anchor="ctr"/>
-          <a:lstStyle/>
-          <a:p>
-            <a:pPr algn="ctr" indent="0" marL="0">
-              <a:buNone/>
-            </a:pPr>
-            <a:r>
-              <a:rPr lang="en-US" sz="1000" dirty="0">
-                <a:solidFill>
-                  <a:srgbClr val="003A63"/>
-                </a:solidFill>
-                <a:latin typeface="Aptos" pitchFamily="34" charset="0"/>
-                <a:ea typeface="Aptos" pitchFamily="34" charset="-122"/>
-                <a:cs typeface="Aptos" pitchFamily="34" charset="-120"/>
-              </a:rPr>
-              <a:t>Dependencies visible</a:t>
-            </a:r>
-            <a:endParaRPr lang="en-US" sz="1000" dirty="0"/>
-          </a:p>
-        </p:txBody>
-      </p:sp>
-      <p:sp>
-        <p:nvSpPr>
-          <p:cNvPr id="22" name="Shape 20"/>
           <p:cNvSpPr/>
           <p:nvPr/>
         </p:nvSpPr>
@@ -9542,7 +8352,7 @@
       </p:sp>
       <p:sp>
         <p:nvSpPr>
-          <p:cNvPr id="23" name="Text 21"/>
+          <p:cNvPr id="17" name="Text 15"/>
           <p:cNvSpPr/>
           <p:nvPr/>
         </p:nvSpPr>
@@ -9581,7 +8391,7 @@
       </p:sp>
       <p:sp>
         <p:nvSpPr>
-          <p:cNvPr id="24" name="Text 22"/>
+          <p:cNvPr id="18" name="Text 16"/>
           <p:cNvSpPr/>
           <p:nvPr/>
         </p:nvSpPr>
@@ -10061,13 +8871,11 @@
             </a:avLst>
           </a:prstGeom>
           <a:solidFill>
-            <a:srgbClr val="FFFFFF">
-              <a:alpha val="88000"/>
-            </a:srgbClr>
+            <a:srgbClr val="FFFFFF"/>
           </a:solidFill>
           <a:ln w="12700">
             <a:solidFill>
-              <a:srgbClr val="D6E8F2"/>
+              <a:srgbClr val="B9D7E6"/>
             </a:solidFill>
             <a:prstDash val="solid"/>
           </a:ln>
@@ -10075,30 +8883,42 @@
       </p:sp>
       <p:sp>
         <p:nvSpPr>
-          <p:cNvPr id="14" name="Shape 12"/>
-          <p:cNvSpPr/>
-          <p:nvPr/>
-        </p:nvSpPr>
-        <p:spPr>
-          <a:xfrm>
-            <a:off x="7927848" y="3319272"/>
-            <a:ext cx="792480" cy="749808"/>
-          </a:xfrm>
-          <a:prstGeom prst="roundRect">
-            <a:avLst>
-              <a:gd name="adj" fmla="val 14634"/>
-            </a:avLst>
-          </a:prstGeom>
-          <a:solidFill>
-            <a:srgbClr val="0068B7"/>
-          </a:solidFill>
-          <a:ln w="12700">
-            <a:solidFill>
-              <a:srgbClr val="0068B7"/>
-            </a:solidFill>
-            <a:prstDash val="solid"/>
-          </a:ln>
-        </p:spPr>
+          <p:cNvPr id="14" name="Text 12"/>
+          <p:cNvSpPr/>
+          <p:nvPr/>
+        </p:nvSpPr>
+        <p:spPr>
+          <a:xfrm>
+            <a:off x="7799832" y="2935224"/>
+            <a:ext cx="3145536" cy="256032"/>
+          </a:xfrm>
+          <a:prstGeom prst="rect">
+            <a:avLst/>
+          </a:prstGeom>
+          <a:noFill/>
+          <a:ln/>
+        </p:spPr>
+        <p:txBody>
+          <a:bodyPr wrap="square" lIns="0" tIns="0" rIns="0" bIns="0" rtlCol="0" anchor="ctr"/>
+          <a:lstStyle/>
+          <a:p>
+            <a:pPr indent="0" marL="0">
+              <a:buNone/>
+            </a:pPr>
+            <a:r>
+              <a:rPr lang="en-US" sz="1300" b="1" dirty="0">
+                <a:solidFill>
+                  <a:srgbClr val="0068B7"/>
+                </a:solidFill>
+                <a:latin typeface="Aptos" pitchFamily="34" charset="0"/>
+                <a:ea typeface="Aptos" pitchFamily="34" charset="-122"/>
+                <a:cs typeface="Aptos" pitchFamily="34" charset="-120"/>
+              </a:rPr>
+              <a:t>Concept checkpoints</a:t>
+            </a:r>
+            <a:endParaRPr lang="en-US" sz="1300" dirty="0"/>
+          </a:p>
+        </p:txBody>
       </p:sp>
       <p:sp>
         <p:nvSpPr>
@@ -10108,240 +8928,53 @@
         </p:nvSpPr>
         <p:spPr>
           <a:xfrm>
-            <a:off x="8001000" y="3511296"/>
-            <a:ext cx="646176" cy="310896"/>
-          </a:xfrm>
-          <a:prstGeom prst="rect">
-            <a:avLst/>
-          </a:prstGeom>
-          <a:noFill/>
-          <a:ln/>
-        </p:spPr>
-        <p:txBody>
-          <a:bodyPr wrap="square" lIns="0" tIns="0" rIns="0" bIns="0" rtlCol="0" anchor="ctr">
+            <a:off x="7818120" y="3300984"/>
+            <a:ext cx="3090672" cy="877824"/>
+          </a:xfrm>
+          <a:prstGeom prst="rect">
+            <a:avLst/>
+          </a:prstGeom>
+          <a:noFill/>
+          <a:ln/>
+        </p:spPr>
+        <p:txBody>
+          <a:bodyPr wrap="square" lIns="254" tIns="254" rIns="254" bIns="254" rtlCol="0" anchor="t">
             <a:normAutofit/>
           </a:bodyPr>
           <a:lstStyle/>
           <a:p>
-            <a:pPr algn="ctr" indent="0" marL="0">
-              <a:buNone/>
-            </a:pPr>
-            <a:r>
-              <a:rPr lang="en-US" sz="1500" b="1" dirty="0">
-                <a:solidFill>
-                  <a:srgbClr val="FFFFFF"/>
-                </a:solidFill>
-                <a:latin typeface="Aptos" pitchFamily="34" charset="0"/>
-                <a:ea typeface="Aptos" pitchFamily="34" charset="-122"/>
-                <a:cs typeface="Aptos" pitchFamily="34" charset="-120"/>
-              </a:rPr>
-              <a:t>Plan</a:t>
-            </a:r>
-            <a:endParaRPr lang="en-US" sz="1500" dirty="0"/>
+            <a:r>
+              <a:rPr lang="en-US" sz="1380" dirty="0">
+                <a:solidFill>
+                  <a:srgbClr val="17364A"/>
+                </a:solidFill>
+                <a:latin typeface="Aptos" pitchFamily="34" charset="0"/>
+                <a:ea typeface="Aptos" pitchFamily="34" charset="-122"/>
+                <a:cs typeface="Aptos" pitchFamily="34" charset="-120"/>
+              </a:rPr>
+              <a:t>The expected artifact is a completed workflow usability test plan.</a:t>
+            </a:r>
+            <a:endParaRPr lang="en-US" sz="1380" dirty="0"/>
+          </a:p>
+          <a:p>
+            <a:r>
+              <a:rPr lang="en-US" sz="1380" dirty="0">
+                <a:solidFill>
+                  <a:srgbClr val="17364A"/>
+                </a:solidFill>
+                <a:latin typeface="Aptos" pitchFamily="34" charset="0"/>
+                <a:ea typeface="Aptos" pitchFamily="34" charset="-122"/>
+                <a:cs typeface="Aptos" pitchFamily="34" charset="-120"/>
+              </a:rPr>
+              <a:t>It should be specific to a public health workflow and should include technical.</a:t>
+            </a:r>
+            <a:endParaRPr lang="en-US" sz="1380" dirty="0"/>
           </a:p>
         </p:txBody>
       </p:sp>
       <p:sp>
         <p:nvSpPr>
           <p:cNvPr id="16" name="Shape 14"/>
-          <p:cNvSpPr/>
-          <p:nvPr/>
-        </p:nvSpPr>
-        <p:spPr>
-          <a:xfrm>
-            <a:off x="8976360" y="3319272"/>
-            <a:ext cx="792480" cy="749808"/>
-          </a:xfrm>
-          <a:prstGeom prst="roundRect">
-            <a:avLst>
-              <a:gd name="adj" fmla="val 14634"/>
-            </a:avLst>
-          </a:prstGeom>
-          <a:solidFill>
-            <a:srgbClr val="2F8A28"/>
-          </a:solidFill>
-          <a:ln w="12700">
-            <a:solidFill>
-              <a:srgbClr val="2F8A28"/>
-            </a:solidFill>
-            <a:prstDash val="solid"/>
-          </a:ln>
-        </p:spPr>
-      </p:sp>
-      <p:sp>
-        <p:nvSpPr>
-          <p:cNvPr id="17" name="Text 15"/>
-          <p:cNvSpPr/>
-          <p:nvPr/>
-        </p:nvSpPr>
-        <p:spPr>
-          <a:xfrm>
-            <a:off x="9049512" y="3511296"/>
-            <a:ext cx="646176" cy="310896"/>
-          </a:xfrm>
-          <a:prstGeom prst="rect">
-            <a:avLst/>
-          </a:prstGeom>
-          <a:noFill/>
-          <a:ln/>
-        </p:spPr>
-        <p:txBody>
-          <a:bodyPr wrap="square" lIns="0" tIns="0" rIns="0" bIns="0" rtlCol="0" anchor="ctr">
-            <a:normAutofit/>
-          </a:bodyPr>
-          <a:lstStyle/>
-          <a:p>
-            <a:pPr algn="ctr" indent="0" marL="0">
-              <a:buNone/>
-            </a:pPr>
-            <a:r>
-              <a:rPr lang="en-US" sz="1500" b="1" dirty="0">
-                <a:solidFill>
-                  <a:srgbClr val="FFFFFF"/>
-                </a:solidFill>
-                <a:latin typeface="Aptos" pitchFamily="34" charset="0"/>
-                <a:ea typeface="Aptos" pitchFamily="34" charset="-122"/>
-                <a:cs typeface="Aptos" pitchFamily="34" charset="-120"/>
-              </a:rPr>
-              <a:t>Do</a:t>
-            </a:r>
-            <a:endParaRPr lang="en-US" sz="1500" dirty="0"/>
-          </a:p>
-        </p:txBody>
-      </p:sp>
-      <p:sp>
-        <p:nvSpPr>
-          <p:cNvPr id="18" name="Shape 16"/>
-          <p:cNvSpPr/>
-          <p:nvPr/>
-        </p:nvSpPr>
-        <p:spPr>
-          <a:xfrm>
-            <a:off x="10024872" y="3319272"/>
-            <a:ext cx="792480" cy="749808"/>
-          </a:xfrm>
-          <a:prstGeom prst="roundRect">
-            <a:avLst>
-              <a:gd name="adj" fmla="val 14634"/>
-            </a:avLst>
-          </a:prstGeom>
-          <a:solidFill>
-            <a:srgbClr val="D69A2D"/>
-          </a:solidFill>
-          <a:ln w="12700">
-            <a:solidFill>
-              <a:srgbClr val="D69A2D"/>
-            </a:solidFill>
-            <a:prstDash val="solid"/>
-          </a:ln>
-        </p:spPr>
-      </p:sp>
-      <p:sp>
-        <p:nvSpPr>
-          <p:cNvPr id="19" name="Text 17"/>
-          <p:cNvSpPr/>
-          <p:nvPr/>
-        </p:nvSpPr>
-        <p:spPr>
-          <a:xfrm>
-            <a:off x="10098024" y="3511296"/>
-            <a:ext cx="646176" cy="310896"/>
-          </a:xfrm>
-          <a:prstGeom prst="rect">
-            <a:avLst/>
-          </a:prstGeom>
-          <a:noFill/>
-          <a:ln/>
-        </p:spPr>
-        <p:txBody>
-          <a:bodyPr wrap="square" lIns="0" tIns="0" rIns="0" bIns="0" rtlCol="0" anchor="ctr">
-            <a:normAutofit/>
-          </a:bodyPr>
-          <a:lstStyle/>
-          <a:p>
-            <a:pPr algn="ctr" indent="0" marL="0">
-              <a:buNone/>
-            </a:pPr>
-            <a:r>
-              <a:rPr lang="en-US" sz="1500" b="1" dirty="0">
-                <a:solidFill>
-                  <a:srgbClr val="FFFFFF"/>
-                </a:solidFill>
-                <a:latin typeface="Aptos" pitchFamily="34" charset="0"/>
-                <a:ea typeface="Aptos" pitchFamily="34" charset="-122"/>
-                <a:cs typeface="Aptos" pitchFamily="34" charset="-120"/>
-              </a:rPr>
-              <a:t>Review</a:t>
-            </a:r>
-            <a:endParaRPr lang="en-US" sz="1500" dirty="0"/>
-          </a:p>
-        </p:txBody>
-      </p:sp>
-      <p:sp>
-        <p:nvSpPr>
-          <p:cNvPr id="20" name="Shape 18"/>
-          <p:cNvSpPr/>
-          <p:nvPr/>
-        </p:nvSpPr>
-        <p:spPr>
-          <a:xfrm>
-            <a:off x="8293608" y="4389120"/>
-            <a:ext cx="2157984" cy="0"/>
-          </a:xfrm>
-          <a:prstGeom prst="line">
-            <a:avLst/>
-          </a:prstGeom>
-          <a:noFill/>
-          <a:ln w="25400">
-            <a:solidFill>
-              <a:srgbClr val="8ABBD8"/>
-            </a:solidFill>
-            <a:prstDash val="solid"/>
-          </a:ln>
-        </p:spPr>
-      </p:sp>
-      <p:sp>
-        <p:nvSpPr>
-          <p:cNvPr id="21" name="Text 19"/>
-          <p:cNvSpPr/>
-          <p:nvPr/>
-        </p:nvSpPr>
-        <p:spPr>
-          <a:xfrm>
-            <a:off x="7909560" y="3977640"/>
-            <a:ext cx="2926080" cy="182880"/>
-          </a:xfrm>
-          <a:prstGeom prst="rect">
-            <a:avLst/>
-          </a:prstGeom>
-          <a:noFill/>
-          <a:ln/>
-        </p:spPr>
-        <p:txBody>
-          <a:bodyPr wrap="square" lIns="0" tIns="0" rIns="0" bIns="0" rtlCol="0" anchor="ctr"/>
-          <a:lstStyle/>
-          <a:p>
-            <a:pPr algn="ctr" indent="0" marL="0">
-              <a:buNone/>
-            </a:pPr>
-            <a:r>
-              <a:rPr lang="en-US" sz="1000" dirty="0">
-                <a:solidFill>
-                  <a:srgbClr val="003A63"/>
-                </a:solidFill>
-                <a:latin typeface="Aptos" pitchFamily="34" charset="0"/>
-                <a:ea typeface="Aptos" pitchFamily="34" charset="-122"/>
-                <a:cs typeface="Aptos" pitchFamily="34" charset="-120"/>
-              </a:rPr>
-              <a:t>Dependencies visible</a:t>
-            </a:r>
-            <a:endParaRPr lang="en-US" sz="1000" dirty="0"/>
-          </a:p>
-        </p:txBody>
-      </p:sp>
-      <p:sp>
-        <p:nvSpPr>
-          <p:cNvPr id="22" name="Shape 20"/>
           <p:cNvSpPr/>
           <p:nvPr/>
         </p:nvSpPr>
@@ -10368,7 +9001,7 @@
       </p:sp>
       <p:sp>
         <p:nvSpPr>
-          <p:cNvPr id="23" name="Text 21"/>
+          <p:cNvPr id="17" name="Text 15"/>
           <p:cNvSpPr/>
           <p:nvPr/>
         </p:nvSpPr>
@@ -10407,7 +9040,7 @@
       </p:sp>
       <p:sp>
         <p:nvSpPr>
-          <p:cNvPr id="24" name="Text 22"/>
+          <p:cNvPr id="18" name="Text 16"/>
           <p:cNvSpPr/>
           <p:nvPr/>
         </p:nvSpPr>
@@ -10915,13 +9548,11 @@
             </a:avLst>
           </a:prstGeom>
           <a:solidFill>
-            <a:srgbClr val="FFFFFF">
-              <a:alpha val="88000"/>
-            </a:srgbClr>
+            <a:srgbClr val="FFFFFF"/>
           </a:solidFill>
           <a:ln w="12700">
             <a:solidFill>
-              <a:srgbClr val="D6E8F2"/>
+              <a:srgbClr val="B9D7E6"/>
             </a:solidFill>
             <a:prstDash val="solid"/>
           </a:ln>
@@ -10929,30 +9560,42 @@
       </p:sp>
       <p:sp>
         <p:nvSpPr>
-          <p:cNvPr id="14" name="Shape 12"/>
-          <p:cNvSpPr/>
-          <p:nvPr/>
-        </p:nvSpPr>
-        <p:spPr>
-          <a:xfrm>
-            <a:off x="7927848" y="3319272"/>
-            <a:ext cx="792480" cy="749808"/>
-          </a:xfrm>
-          <a:prstGeom prst="roundRect">
-            <a:avLst>
-              <a:gd name="adj" fmla="val 14634"/>
-            </a:avLst>
-          </a:prstGeom>
-          <a:solidFill>
-            <a:srgbClr val="0068B7"/>
-          </a:solidFill>
-          <a:ln w="12700">
-            <a:solidFill>
-              <a:srgbClr val="0068B7"/>
-            </a:solidFill>
-            <a:prstDash val="solid"/>
-          </a:ln>
-        </p:spPr>
+          <p:cNvPr id="14" name="Text 12"/>
+          <p:cNvSpPr/>
+          <p:nvPr/>
+        </p:nvSpPr>
+        <p:spPr>
+          <a:xfrm>
+            <a:off x="7799832" y="2935224"/>
+            <a:ext cx="3145536" cy="256032"/>
+          </a:xfrm>
+          <a:prstGeom prst="rect">
+            <a:avLst/>
+          </a:prstGeom>
+          <a:noFill/>
+          <a:ln/>
+        </p:spPr>
+        <p:txBody>
+          <a:bodyPr wrap="square" lIns="0" tIns="0" rIns="0" bIns="0" rtlCol="0" anchor="ctr"/>
+          <a:lstStyle/>
+          <a:p>
+            <a:pPr indent="0" marL="0">
+              <a:buNone/>
+            </a:pPr>
+            <a:r>
+              <a:rPr lang="en-US" sz="1300" b="1" dirty="0">
+                <a:solidFill>
+                  <a:srgbClr val="0068B7"/>
+                </a:solidFill>
+                <a:latin typeface="Aptos" pitchFamily="34" charset="0"/>
+                <a:ea typeface="Aptos" pitchFamily="34" charset="-122"/>
+                <a:cs typeface="Aptos" pitchFamily="34" charset="-120"/>
+              </a:rPr>
+              <a:t>Concept checkpoints</a:t>
+            </a:r>
+            <a:endParaRPr lang="en-US" sz="1300" dirty="0"/>
+          </a:p>
+        </p:txBody>
       </p:sp>
       <p:sp>
         <p:nvSpPr>
@@ -10962,240 +9605,67 @@
         </p:nvSpPr>
         <p:spPr>
           <a:xfrm>
-            <a:off x="8001000" y="3511296"/>
-            <a:ext cx="646176" cy="310896"/>
-          </a:xfrm>
-          <a:prstGeom prst="rect">
-            <a:avLst/>
-          </a:prstGeom>
-          <a:noFill/>
-          <a:ln/>
-        </p:spPr>
-        <p:txBody>
-          <a:bodyPr wrap="square" lIns="0" tIns="0" rIns="0" bIns="0" rtlCol="0" anchor="ctr">
+            <a:off x="7818120" y="3300984"/>
+            <a:ext cx="3090672" cy="877824"/>
+          </a:xfrm>
+          <a:prstGeom prst="rect">
+            <a:avLst/>
+          </a:prstGeom>
+          <a:noFill/>
+          <a:ln/>
+        </p:spPr>
+        <p:txBody>
+          <a:bodyPr wrap="square" lIns="254" tIns="254" rIns="254" bIns="254" rtlCol="0" anchor="t">
             <a:normAutofit/>
           </a:bodyPr>
           <a:lstStyle/>
           <a:p>
-            <a:pPr algn="ctr" indent="0" marL="0">
-              <a:buNone/>
-            </a:pPr>
-            <a:r>
-              <a:rPr lang="en-US" sz="1500" b="1" dirty="0">
-                <a:solidFill>
-                  <a:srgbClr val="FFFFFF"/>
-                </a:solidFill>
-                <a:latin typeface="Aptos" pitchFamily="34" charset="0"/>
-                <a:ea typeface="Aptos" pitchFamily="34" charset="-122"/>
-                <a:cs typeface="Aptos" pitchFamily="34" charset="-120"/>
-              </a:rPr>
-              <a:t>Plan</a:t>
-            </a:r>
-            <a:endParaRPr lang="en-US" sz="1500" dirty="0"/>
+            <a:r>
+              <a:rPr lang="en-US" sz="1380" dirty="0">
+                <a:solidFill>
+                  <a:srgbClr val="17364A"/>
+                </a:solidFill>
+                <a:latin typeface="Aptos" pitchFamily="34" charset="0"/>
+                <a:ea typeface="Aptos" pitchFamily="34" charset="-122"/>
+                <a:cs typeface="Aptos" pitchFamily="34" charset="-120"/>
+              </a:rPr>
+              <a:t>1.</a:t>
+            </a:r>
+            <a:endParaRPr lang="en-US" sz="1380" dirty="0"/>
+          </a:p>
+          <a:p>
+            <a:r>
+              <a:rPr lang="en-US" sz="1380" dirty="0">
+                <a:solidFill>
+                  <a:srgbClr val="17364A"/>
+                </a:solidFill>
+                <a:latin typeface="Aptos" pitchFamily="34" charset="0"/>
+                <a:ea typeface="Aptos" pitchFamily="34" charset="-122"/>
+                <a:cs typeface="Aptos" pitchFamily="34" charset="-120"/>
+              </a:rPr>
+              <a:t>What is the best reason to address human factors, workflow integration, and usability.</a:t>
+            </a:r>
+            <a:endParaRPr lang="en-US" sz="1380" dirty="0"/>
+          </a:p>
+          <a:p>
+            <a:r>
+              <a:rPr lang="en-US" sz="1380" dirty="0">
+                <a:solidFill>
+                  <a:srgbClr val="17364A"/>
+                </a:solidFill>
+                <a:latin typeface="Aptos" pitchFamily="34" charset="0"/>
+                <a:ea typeface="Aptos" pitchFamily="34" charset="-122"/>
+                <a:cs typeface="Aptos" pitchFamily="34" charset="-120"/>
+              </a:rPr>
+              <a:t>2.</a:t>
+            </a:r>
+            <a:endParaRPr lang="en-US" sz="1380" dirty="0"/>
           </a:p>
         </p:txBody>
       </p:sp>
       <p:sp>
         <p:nvSpPr>
           <p:cNvPr id="16" name="Shape 14"/>
-          <p:cNvSpPr/>
-          <p:nvPr/>
-        </p:nvSpPr>
-        <p:spPr>
-          <a:xfrm>
-            <a:off x="8976360" y="3319272"/>
-            <a:ext cx="792480" cy="749808"/>
-          </a:xfrm>
-          <a:prstGeom prst="roundRect">
-            <a:avLst>
-              <a:gd name="adj" fmla="val 14634"/>
-            </a:avLst>
-          </a:prstGeom>
-          <a:solidFill>
-            <a:srgbClr val="2F8A28"/>
-          </a:solidFill>
-          <a:ln w="12700">
-            <a:solidFill>
-              <a:srgbClr val="2F8A28"/>
-            </a:solidFill>
-            <a:prstDash val="solid"/>
-          </a:ln>
-        </p:spPr>
-      </p:sp>
-      <p:sp>
-        <p:nvSpPr>
-          <p:cNvPr id="17" name="Text 15"/>
-          <p:cNvSpPr/>
-          <p:nvPr/>
-        </p:nvSpPr>
-        <p:spPr>
-          <a:xfrm>
-            <a:off x="9049512" y="3511296"/>
-            <a:ext cx="646176" cy="310896"/>
-          </a:xfrm>
-          <a:prstGeom prst="rect">
-            <a:avLst/>
-          </a:prstGeom>
-          <a:noFill/>
-          <a:ln/>
-        </p:spPr>
-        <p:txBody>
-          <a:bodyPr wrap="square" lIns="0" tIns="0" rIns="0" bIns="0" rtlCol="0" anchor="ctr">
-            <a:normAutofit/>
-          </a:bodyPr>
-          <a:lstStyle/>
-          <a:p>
-            <a:pPr algn="ctr" indent="0" marL="0">
-              <a:buNone/>
-            </a:pPr>
-            <a:r>
-              <a:rPr lang="en-US" sz="1500" b="1" dirty="0">
-                <a:solidFill>
-                  <a:srgbClr val="FFFFFF"/>
-                </a:solidFill>
-                <a:latin typeface="Aptos" pitchFamily="34" charset="0"/>
-                <a:ea typeface="Aptos" pitchFamily="34" charset="-122"/>
-                <a:cs typeface="Aptos" pitchFamily="34" charset="-120"/>
-              </a:rPr>
-              <a:t>Do</a:t>
-            </a:r>
-            <a:endParaRPr lang="en-US" sz="1500" dirty="0"/>
-          </a:p>
-        </p:txBody>
-      </p:sp>
-      <p:sp>
-        <p:nvSpPr>
-          <p:cNvPr id="18" name="Shape 16"/>
-          <p:cNvSpPr/>
-          <p:nvPr/>
-        </p:nvSpPr>
-        <p:spPr>
-          <a:xfrm>
-            <a:off x="10024872" y="3319272"/>
-            <a:ext cx="792480" cy="749808"/>
-          </a:xfrm>
-          <a:prstGeom prst="roundRect">
-            <a:avLst>
-              <a:gd name="adj" fmla="val 14634"/>
-            </a:avLst>
-          </a:prstGeom>
-          <a:solidFill>
-            <a:srgbClr val="D69A2D"/>
-          </a:solidFill>
-          <a:ln w="12700">
-            <a:solidFill>
-              <a:srgbClr val="D69A2D"/>
-            </a:solidFill>
-            <a:prstDash val="solid"/>
-          </a:ln>
-        </p:spPr>
-      </p:sp>
-      <p:sp>
-        <p:nvSpPr>
-          <p:cNvPr id="19" name="Text 17"/>
-          <p:cNvSpPr/>
-          <p:nvPr/>
-        </p:nvSpPr>
-        <p:spPr>
-          <a:xfrm>
-            <a:off x="10098024" y="3511296"/>
-            <a:ext cx="646176" cy="310896"/>
-          </a:xfrm>
-          <a:prstGeom prst="rect">
-            <a:avLst/>
-          </a:prstGeom>
-          <a:noFill/>
-          <a:ln/>
-        </p:spPr>
-        <p:txBody>
-          <a:bodyPr wrap="square" lIns="0" tIns="0" rIns="0" bIns="0" rtlCol="0" anchor="ctr">
-            <a:normAutofit/>
-          </a:bodyPr>
-          <a:lstStyle/>
-          <a:p>
-            <a:pPr algn="ctr" indent="0" marL="0">
-              <a:buNone/>
-            </a:pPr>
-            <a:r>
-              <a:rPr lang="en-US" sz="1500" b="1" dirty="0">
-                <a:solidFill>
-                  <a:srgbClr val="FFFFFF"/>
-                </a:solidFill>
-                <a:latin typeface="Aptos" pitchFamily="34" charset="0"/>
-                <a:ea typeface="Aptos" pitchFamily="34" charset="-122"/>
-                <a:cs typeface="Aptos" pitchFamily="34" charset="-120"/>
-              </a:rPr>
-              <a:t>Review</a:t>
-            </a:r>
-            <a:endParaRPr lang="en-US" sz="1500" dirty="0"/>
-          </a:p>
-        </p:txBody>
-      </p:sp>
-      <p:sp>
-        <p:nvSpPr>
-          <p:cNvPr id="20" name="Shape 18"/>
-          <p:cNvSpPr/>
-          <p:nvPr/>
-        </p:nvSpPr>
-        <p:spPr>
-          <a:xfrm>
-            <a:off x="8293608" y="4389120"/>
-            <a:ext cx="2157984" cy="0"/>
-          </a:xfrm>
-          <a:prstGeom prst="line">
-            <a:avLst/>
-          </a:prstGeom>
-          <a:noFill/>
-          <a:ln w="25400">
-            <a:solidFill>
-              <a:srgbClr val="8ABBD8"/>
-            </a:solidFill>
-            <a:prstDash val="solid"/>
-          </a:ln>
-        </p:spPr>
-      </p:sp>
-      <p:sp>
-        <p:nvSpPr>
-          <p:cNvPr id="21" name="Text 19"/>
-          <p:cNvSpPr/>
-          <p:nvPr/>
-        </p:nvSpPr>
-        <p:spPr>
-          <a:xfrm>
-            <a:off x="7909560" y="3977640"/>
-            <a:ext cx="2926080" cy="182880"/>
-          </a:xfrm>
-          <a:prstGeom prst="rect">
-            <a:avLst/>
-          </a:prstGeom>
-          <a:noFill/>
-          <a:ln/>
-        </p:spPr>
-        <p:txBody>
-          <a:bodyPr wrap="square" lIns="0" tIns="0" rIns="0" bIns="0" rtlCol="0" anchor="ctr"/>
-          <a:lstStyle/>
-          <a:p>
-            <a:pPr algn="ctr" indent="0" marL="0">
-              <a:buNone/>
-            </a:pPr>
-            <a:r>
-              <a:rPr lang="en-US" sz="1000" dirty="0">
-                <a:solidFill>
-                  <a:srgbClr val="003A63"/>
-                </a:solidFill>
-                <a:latin typeface="Aptos" pitchFamily="34" charset="0"/>
-                <a:ea typeface="Aptos" pitchFamily="34" charset="-122"/>
-                <a:cs typeface="Aptos" pitchFamily="34" charset="-120"/>
-              </a:rPr>
-              <a:t>Dependencies visible</a:t>
-            </a:r>
-            <a:endParaRPr lang="en-US" sz="1000" dirty="0"/>
-          </a:p>
-        </p:txBody>
-      </p:sp>
-      <p:sp>
-        <p:nvSpPr>
-          <p:cNvPr id="22" name="Shape 20"/>
           <p:cNvSpPr/>
           <p:nvPr/>
         </p:nvSpPr>
@@ -11222,7 +9692,7 @@
       </p:sp>
       <p:sp>
         <p:nvSpPr>
-          <p:cNvPr id="23" name="Text 21"/>
+          <p:cNvPr id="17" name="Text 15"/>
           <p:cNvSpPr/>
           <p:nvPr/>
         </p:nvSpPr>
@@ -11261,7 +9731,7 @@
       </p:sp>
       <p:sp>
         <p:nvSpPr>
-          <p:cNvPr id="24" name="Text 22"/>
+          <p:cNvPr id="18" name="Text 16"/>
           <p:cNvSpPr/>
           <p:nvPr/>
         </p:nvSpPr>
@@ -11794,20 +10264,20 @@
         </p:nvSpPr>
         <p:spPr>
           <a:xfrm>
-            <a:off x="7635240" y="3730752"/>
-            <a:ext cx="1033272" cy="749808"/>
+            <a:off x="7909560" y="3675888"/>
+            <a:ext cx="3154680" cy="1691640"/>
           </a:xfrm>
           <a:prstGeom prst="roundRect">
             <a:avLst>
-              <a:gd name="adj" fmla="val 14634"/>
+              <a:gd name="adj" fmla="val 6486"/>
             </a:avLst>
           </a:prstGeom>
           <a:solidFill>
-            <a:srgbClr val="0068B7"/>
+            <a:srgbClr val="FFFFFF"/>
           </a:solidFill>
           <a:ln w="12700">
             <a:solidFill>
-              <a:srgbClr val="0068B7"/>
+              <a:srgbClr val="B9D7E6"/>
             </a:solidFill>
             <a:prstDash val="solid"/>
           </a:ln>
@@ -11821,172 +10291,100 @@
         </p:nvSpPr>
         <p:spPr>
           <a:xfrm>
-            <a:off x="7708392" y="3922776"/>
-            <a:ext cx="886968" cy="310896"/>
-          </a:xfrm>
-          <a:prstGeom prst="rect">
-            <a:avLst/>
-          </a:prstGeom>
-          <a:noFill/>
-          <a:ln/>
-        </p:spPr>
-        <p:txBody>
-          <a:bodyPr wrap="square" lIns="0" tIns="0" rIns="0" bIns="0" rtlCol="0" anchor="ctr">
+            <a:off x="8074152" y="3822192"/>
+            <a:ext cx="2825496" cy="256032"/>
+          </a:xfrm>
+          <a:prstGeom prst="rect">
+            <a:avLst/>
+          </a:prstGeom>
+          <a:noFill/>
+          <a:ln/>
+        </p:spPr>
+        <p:txBody>
+          <a:bodyPr wrap="square" lIns="0" tIns="0" rIns="0" bIns="0" rtlCol="0" anchor="ctr"/>
+          <a:lstStyle/>
+          <a:p>
+            <a:pPr indent="0" marL="0">
+              <a:buNone/>
+            </a:pPr>
+            <a:r>
+              <a:rPr lang="en-US" sz="1300" b="1" dirty="0">
+                <a:solidFill>
+                  <a:srgbClr val="0068B7"/>
+                </a:solidFill>
+                <a:latin typeface="Aptos" pitchFamily="34" charset="0"/>
+                <a:ea typeface="Aptos" pitchFamily="34" charset="-122"/>
+                <a:cs typeface="Aptos" pitchFamily="34" charset="-120"/>
+              </a:rPr>
+              <a:t>Learning sequence</a:t>
+            </a:r>
+            <a:endParaRPr lang="en-US" sz="1300" dirty="0"/>
+          </a:p>
+        </p:txBody>
+      </p:sp>
+      <p:sp>
+        <p:nvSpPr>
+          <p:cNvPr id="15" name="Text 13"/>
+          <p:cNvSpPr/>
+          <p:nvPr/>
+        </p:nvSpPr>
+        <p:spPr>
+          <a:xfrm>
+            <a:off x="8092440" y="4187952"/>
+            <a:ext cx="2770632" cy="1033272"/>
+          </a:xfrm>
+          <a:prstGeom prst="rect">
+            <a:avLst/>
+          </a:prstGeom>
+          <a:noFill/>
+          <a:ln/>
+        </p:spPr>
+        <p:txBody>
+          <a:bodyPr wrap="square" lIns="254" tIns="254" rIns="254" bIns="254" rtlCol="0" anchor="t">
             <a:normAutofit/>
           </a:bodyPr>
           <a:lstStyle/>
           <a:p>
-            <a:pPr algn="ctr" indent="0" marL="0">
-              <a:buNone/>
-            </a:pPr>
-            <a:r>
-              <a:rPr lang="en-US" sz="1500" b="1" dirty="0">
-                <a:solidFill>
-                  <a:srgbClr val="FFFFFF"/>
-                </a:solidFill>
-                <a:latin typeface="Aptos" pitchFamily="34" charset="0"/>
-                <a:ea typeface="Aptos" pitchFamily="34" charset="-122"/>
-                <a:cs typeface="Aptos" pitchFamily="34" charset="-120"/>
-              </a:rPr>
-              <a:t>Learn</a:t>
-            </a:r>
-            <a:endParaRPr lang="en-US" sz="1500" dirty="0"/>
-          </a:p>
-        </p:txBody>
-      </p:sp>
-      <p:sp>
-        <p:nvSpPr>
-          <p:cNvPr id="15" name="Shape 13"/>
-          <p:cNvSpPr/>
-          <p:nvPr/>
-        </p:nvSpPr>
-        <p:spPr>
-          <a:xfrm>
-            <a:off x="8924544" y="3730752"/>
-            <a:ext cx="1033272" cy="749808"/>
-          </a:xfrm>
-          <a:prstGeom prst="roundRect">
-            <a:avLst>
-              <a:gd name="adj" fmla="val 14634"/>
-            </a:avLst>
-          </a:prstGeom>
-          <a:solidFill>
-            <a:srgbClr val="2F8A28"/>
-          </a:solidFill>
-          <a:ln w="12700">
-            <a:solidFill>
-              <a:srgbClr val="2F8A28"/>
-            </a:solidFill>
-            <a:prstDash val="solid"/>
-          </a:ln>
-        </p:spPr>
-      </p:sp>
-      <p:sp>
-        <p:nvSpPr>
-          <p:cNvPr id="16" name="Text 14"/>
-          <p:cNvSpPr/>
-          <p:nvPr/>
-        </p:nvSpPr>
-        <p:spPr>
-          <a:xfrm>
-            <a:off x="8997696" y="3922776"/>
-            <a:ext cx="886968" cy="310896"/>
-          </a:xfrm>
-          <a:prstGeom prst="rect">
-            <a:avLst/>
-          </a:prstGeom>
-          <a:noFill/>
-          <a:ln/>
-        </p:spPr>
-        <p:txBody>
-          <a:bodyPr wrap="square" lIns="0" tIns="0" rIns="0" bIns="0" rtlCol="0" anchor="ctr">
-            <a:normAutofit/>
-          </a:bodyPr>
-          <a:lstStyle/>
-          <a:p>
-            <a:pPr algn="ctr" indent="0" marL="0">
-              <a:buNone/>
-            </a:pPr>
-            <a:r>
-              <a:rPr lang="en-US" sz="1500" b="1" dirty="0">
-                <a:solidFill>
-                  <a:srgbClr val="FFFFFF"/>
-                </a:solidFill>
-                <a:latin typeface="Aptos" pitchFamily="34" charset="0"/>
-                <a:ea typeface="Aptos" pitchFamily="34" charset="-122"/>
-                <a:cs typeface="Aptos" pitchFamily="34" charset="-120"/>
-              </a:rPr>
-              <a:t>Apply</a:t>
-            </a:r>
-            <a:endParaRPr lang="en-US" sz="1500" dirty="0"/>
-          </a:p>
-        </p:txBody>
-      </p:sp>
-      <p:sp>
-        <p:nvSpPr>
-          <p:cNvPr id="17" name="Shape 15"/>
-          <p:cNvSpPr/>
-          <p:nvPr/>
-        </p:nvSpPr>
-        <p:spPr>
-          <a:xfrm>
-            <a:off x="10213848" y="3730752"/>
-            <a:ext cx="1033272" cy="749808"/>
-          </a:xfrm>
-          <a:prstGeom prst="roundRect">
-            <a:avLst>
-              <a:gd name="adj" fmla="val 14634"/>
-            </a:avLst>
-          </a:prstGeom>
-          <a:solidFill>
-            <a:srgbClr val="6A4CA3"/>
-          </a:solidFill>
-          <a:ln w="12700">
-            <a:solidFill>
-              <a:srgbClr val="6A4CA3"/>
-            </a:solidFill>
-            <a:prstDash val="solid"/>
-          </a:ln>
-        </p:spPr>
-      </p:sp>
-      <p:sp>
-        <p:nvSpPr>
-          <p:cNvPr id="18" name="Text 16"/>
-          <p:cNvSpPr/>
-          <p:nvPr/>
-        </p:nvSpPr>
-        <p:spPr>
-          <a:xfrm>
-            <a:off x="10287000" y="3922776"/>
-            <a:ext cx="886968" cy="310896"/>
-          </a:xfrm>
-          <a:prstGeom prst="rect">
-            <a:avLst/>
-          </a:prstGeom>
-          <a:noFill/>
-          <a:ln/>
-        </p:spPr>
-        <p:txBody>
-          <a:bodyPr wrap="square" lIns="0" tIns="0" rIns="0" bIns="0" rtlCol="0" anchor="ctr">
-            <a:normAutofit/>
-          </a:bodyPr>
-          <a:lstStyle/>
-          <a:p>
-            <a:pPr algn="ctr" indent="0" marL="0">
-              <a:buNone/>
-            </a:pPr>
-            <a:r>
-              <a:rPr lang="en-US" sz="1500" b="1" dirty="0">
-                <a:solidFill>
-                  <a:srgbClr val="FFFFFF"/>
-                </a:solidFill>
-                <a:latin typeface="Aptos" pitchFamily="34" charset="0"/>
-                <a:ea typeface="Aptos" pitchFamily="34" charset="-122"/>
-                <a:cs typeface="Aptos" pitchFamily="34" charset="-120"/>
-              </a:rPr>
-              <a:t>Document</a:t>
-            </a:r>
-            <a:endParaRPr lang="en-US" sz="1500" dirty="0"/>
+            <a:r>
+              <a:rPr lang="en-US" sz="1380" dirty="0">
+                <a:solidFill>
+                  <a:srgbClr val="17364A"/>
+                </a:solidFill>
+                <a:latin typeface="Aptos" pitchFamily="34" charset="0"/>
+                <a:ea typeface="Aptos" pitchFamily="34" charset="-122"/>
+                <a:cs typeface="Aptos" pitchFamily="34" charset="-120"/>
+              </a:rPr>
+              <a:t>Read the module for shared vocabulary and context.</a:t>
+            </a:r>
+            <a:endParaRPr lang="en-US" sz="1380" dirty="0"/>
+          </a:p>
+          <a:p>
+            <a:r>
+              <a:rPr lang="en-US" sz="1380" dirty="0">
+                <a:solidFill>
+                  <a:srgbClr val="17364A"/>
+                </a:solidFill>
+                <a:latin typeface="Aptos" pitchFamily="34" charset="0"/>
+                <a:ea typeface="Aptos" pitchFamily="34" charset="-122"/>
+                <a:cs typeface="Aptos" pitchFamily="34" charset="-120"/>
+              </a:rPr>
+              <a:t>Complete the practical exercise to apply the concept.</a:t>
+            </a:r>
+            <a:endParaRPr lang="en-US" sz="1380" dirty="0"/>
+          </a:p>
+          <a:p>
+            <a:r>
+              <a:rPr lang="en-US" sz="1380" dirty="0">
+                <a:solidFill>
+                  <a:srgbClr val="17364A"/>
+                </a:solidFill>
+                <a:latin typeface="Aptos" pitchFamily="34" charset="0"/>
+                <a:ea typeface="Aptos" pitchFamily="34" charset="-122"/>
+                <a:cs typeface="Aptos" pitchFamily="34" charset="-120"/>
+              </a:rPr>
+              <a:t>Use the notes and references for deeper review.</a:t>
+            </a:r>
+            <a:endParaRPr lang="en-US" sz="1380" dirty="0"/>
           </a:p>
         </p:txBody>
       </p:sp>
@@ -12459,13 +10857,11 @@
             </a:avLst>
           </a:prstGeom>
           <a:solidFill>
-            <a:srgbClr val="FFFFFF">
-              <a:alpha val="88000"/>
-            </a:srgbClr>
+            <a:srgbClr val="FFFFFF"/>
           </a:solidFill>
           <a:ln w="12700">
             <a:solidFill>
-              <a:srgbClr val="D6E8F2"/>
+              <a:srgbClr val="B9D7E6"/>
             </a:solidFill>
             <a:prstDash val="solid"/>
           </a:ln>
@@ -12473,30 +10869,42 @@
       </p:sp>
       <p:sp>
         <p:nvSpPr>
-          <p:cNvPr id="14" name="Shape 12"/>
-          <p:cNvSpPr/>
-          <p:nvPr/>
-        </p:nvSpPr>
-        <p:spPr>
-          <a:xfrm>
-            <a:off x="7927848" y="3319272"/>
-            <a:ext cx="792480" cy="749808"/>
-          </a:xfrm>
-          <a:prstGeom prst="roundRect">
-            <a:avLst>
-              <a:gd name="adj" fmla="val 14634"/>
-            </a:avLst>
-          </a:prstGeom>
-          <a:solidFill>
-            <a:srgbClr val="0068B7"/>
-          </a:solidFill>
-          <a:ln w="12700">
-            <a:solidFill>
-              <a:srgbClr val="0068B7"/>
-            </a:solidFill>
-            <a:prstDash val="solid"/>
-          </a:ln>
-        </p:spPr>
+          <p:cNvPr id="14" name="Text 12"/>
+          <p:cNvSpPr/>
+          <p:nvPr/>
+        </p:nvSpPr>
+        <p:spPr>
+          <a:xfrm>
+            <a:off x="7799832" y="2935224"/>
+            <a:ext cx="3145536" cy="256032"/>
+          </a:xfrm>
+          <a:prstGeom prst="rect">
+            <a:avLst/>
+          </a:prstGeom>
+          <a:noFill/>
+          <a:ln/>
+        </p:spPr>
+        <p:txBody>
+          <a:bodyPr wrap="square" lIns="0" tIns="0" rIns="0" bIns="0" rtlCol="0" anchor="ctr"/>
+          <a:lstStyle/>
+          <a:p>
+            <a:pPr indent="0" marL="0">
+              <a:buNone/>
+            </a:pPr>
+            <a:r>
+              <a:rPr lang="en-US" sz="1300" b="1" dirty="0">
+                <a:solidFill>
+                  <a:srgbClr val="0068B7"/>
+                </a:solidFill>
+                <a:latin typeface="Aptos" pitchFamily="34" charset="0"/>
+                <a:ea typeface="Aptos" pitchFamily="34" charset="-122"/>
+                <a:cs typeface="Aptos" pitchFamily="34" charset="-120"/>
+              </a:rPr>
+              <a:t>Concept checkpoints</a:t>
+            </a:r>
+            <a:endParaRPr lang="en-US" sz="1300" dirty="0"/>
+          </a:p>
+        </p:txBody>
       </p:sp>
       <p:sp>
         <p:nvSpPr>
@@ -12506,240 +10914,53 @@
         </p:nvSpPr>
         <p:spPr>
           <a:xfrm>
-            <a:off x="8001000" y="3511296"/>
-            <a:ext cx="646176" cy="310896"/>
-          </a:xfrm>
-          <a:prstGeom prst="rect">
-            <a:avLst/>
-          </a:prstGeom>
-          <a:noFill/>
-          <a:ln/>
-        </p:spPr>
-        <p:txBody>
-          <a:bodyPr wrap="square" lIns="0" tIns="0" rIns="0" bIns="0" rtlCol="0" anchor="ctr">
+            <a:off x="7818120" y="3300984"/>
+            <a:ext cx="3090672" cy="877824"/>
+          </a:xfrm>
+          <a:prstGeom prst="rect">
+            <a:avLst/>
+          </a:prstGeom>
+          <a:noFill/>
+          <a:ln/>
+        </p:spPr>
+        <p:txBody>
+          <a:bodyPr wrap="square" lIns="254" tIns="254" rIns="254" bIns="254" rtlCol="0" anchor="t">
             <a:normAutofit/>
           </a:bodyPr>
           <a:lstStyle/>
           <a:p>
-            <a:pPr algn="ctr" indent="0" marL="0">
-              <a:buNone/>
-            </a:pPr>
-            <a:r>
-              <a:rPr lang="en-US" sz="1500" b="1" dirty="0">
-                <a:solidFill>
-                  <a:srgbClr val="FFFFFF"/>
-                </a:solidFill>
-                <a:latin typeface="Aptos" pitchFamily="34" charset="0"/>
-                <a:ea typeface="Aptos" pitchFamily="34" charset="-122"/>
-                <a:cs typeface="Aptos" pitchFamily="34" charset="-120"/>
-              </a:rPr>
-              <a:t>Plan</a:t>
-            </a:r>
-            <a:endParaRPr lang="en-US" sz="1500" dirty="0"/>
+            <a:r>
+              <a:rPr lang="en-US" sz="1380" dirty="0">
+                <a:solidFill>
+                  <a:srgbClr val="17364A"/>
+                </a:solidFill>
+                <a:latin typeface="Aptos" pitchFamily="34" charset="0"/>
+                <a:ea typeface="Aptos" pitchFamily="34" charset="-122"/>
+                <a:cs typeface="Aptos" pitchFamily="34" charset="-120"/>
+              </a:rPr>
+              <a:t>CDC Public Health Data Strategy and Data Modernization resources:.</a:t>
+            </a:r>
+            <a:endParaRPr lang="en-US" sz="1380" dirty="0"/>
+          </a:p>
+          <a:p>
+            <a:r>
+              <a:rPr lang="en-US" sz="1380" dirty="0">
+                <a:solidFill>
+                  <a:srgbClr val="17364A"/>
+                </a:solidFill>
+                <a:latin typeface="Aptos" pitchFamily="34" charset="0"/>
+                <a:ea typeface="Aptos" pitchFamily="34" charset="-122"/>
+                <a:cs typeface="Aptos" pitchFamily="34" charset="-120"/>
+              </a:rPr>
+              <a:t>OWASP Top 10 for LLM Applications, when security or AI integrations are relevant</a:t>
+            </a:r>
+            <a:endParaRPr lang="en-US" sz="1380" dirty="0"/>
           </a:p>
         </p:txBody>
       </p:sp>
       <p:sp>
         <p:nvSpPr>
           <p:cNvPr id="16" name="Shape 14"/>
-          <p:cNvSpPr/>
-          <p:nvPr/>
-        </p:nvSpPr>
-        <p:spPr>
-          <a:xfrm>
-            <a:off x="8976360" y="3319272"/>
-            <a:ext cx="792480" cy="749808"/>
-          </a:xfrm>
-          <a:prstGeom prst="roundRect">
-            <a:avLst>
-              <a:gd name="adj" fmla="val 14634"/>
-            </a:avLst>
-          </a:prstGeom>
-          <a:solidFill>
-            <a:srgbClr val="2F8A28"/>
-          </a:solidFill>
-          <a:ln w="12700">
-            <a:solidFill>
-              <a:srgbClr val="2F8A28"/>
-            </a:solidFill>
-            <a:prstDash val="solid"/>
-          </a:ln>
-        </p:spPr>
-      </p:sp>
-      <p:sp>
-        <p:nvSpPr>
-          <p:cNvPr id="17" name="Text 15"/>
-          <p:cNvSpPr/>
-          <p:nvPr/>
-        </p:nvSpPr>
-        <p:spPr>
-          <a:xfrm>
-            <a:off x="9049512" y="3511296"/>
-            <a:ext cx="646176" cy="310896"/>
-          </a:xfrm>
-          <a:prstGeom prst="rect">
-            <a:avLst/>
-          </a:prstGeom>
-          <a:noFill/>
-          <a:ln/>
-        </p:spPr>
-        <p:txBody>
-          <a:bodyPr wrap="square" lIns="0" tIns="0" rIns="0" bIns="0" rtlCol="0" anchor="ctr">
-            <a:normAutofit/>
-          </a:bodyPr>
-          <a:lstStyle/>
-          <a:p>
-            <a:pPr algn="ctr" indent="0" marL="0">
-              <a:buNone/>
-            </a:pPr>
-            <a:r>
-              <a:rPr lang="en-US" sz="1500" b="1" dirty="0">
-                <a:solidFill>
-                  <a:srgbClr val="FFFFFF"/>
-                </a:solidFill>
-                <a:latin typeface="Aptos" pitchFamily="34" charset="0"/>
-                <a:ea typeface="Aptos" pitchFamily="34" charset="-122"/>
-                <a:cs typeface="Aptos" pitchFamily="34" charset="-120"/>
-              </a:rPr>
-              <a:t>Do</a:t>
-            </a:r>
-            <a:endParaRPr lang="en-US" sz="1500" dirty="0"/>
-          </a:p>
-        </p:txBody>
-      </p:sp>
-      <p:sp>
-        <p:nvSpPr>
-          <p:cNvPr id="18" name="Shape 16"/>
-          <p:cNvSpPr/>
-          <p:nvPr/>
-        </p:nvSpPr>
-        <p:spPr>
-          <a:xfrm>
-            <a:off x="10024872" y="3319272"/>
-            <a:ext cx="792480" cy="749808"/>
-          </a:xfrm>
-          <a:prstGeom prst="roundRect">
-            <a:avLst>
-              <a:gd name="adj" fmla="val 14634"/>
-            </a:avLst>
-          </a:prstGeom>
-          <a:solidFill>
-            <a:srgbClr val="D69A2D"/>
-          </a:solidFill>
-          <a:ln w="12700">
-            <a:solidFill>
-              <a:srgbClr val="D69A2D"/>
-            </a:solidFill>
-            <a:prstDash val="solid"/>
-          </a:ln>
-        </p:spPr>
-      </p:sp>
-      <p:sp>
-        <p:nvSpPr>
-          <p:cNvPr id="19" name="Text 17"/>
-          <p:cNvSpPr/>
-          <p:nvPr/>
-        </p:nvSpPr>
-        <p:spPr>
-          <a:xfrm>
-            <a:off x="10098024" y="3511296"/>
-            <a:ext cx="646176" cy="310896"/>
-          </a:xfrm>
-          <a:prstGeom prst="rect">
-            <a:avLst/>
-          </a:prstGeom>
-          <a:noFill/>
-          <a:ln/>
-        </p:spPr>
-        <p:txBody>
-          <a:bodyPr wrap="square" lIns="0" tIns="0" rIns="0" bIns="0" rtlCol="0" anchor="ctr">
-            <a:normAutofit/>
-          </a:bodyPr>
-          <a:lstStyle/>
-          <a:p>
-            <a:pPr algn="ctr" indent="0" marL="0">
-              <a:buNone/>
-            </a:pPr>
-            <a:r>
-              <a:rPr lang="en-US" sz="1500" b="1" dirty="0">
-                <a:solidFill>
-                  <a:srgbClr val="FFFFFF"/>
-                </a:solidFill>
-                <a:latin typeface="Aptos" pitchFamily="34" charset="0"/>
-                <a:ea typeface="Aptos" pitchFamily="34" charset="-122"/>
-                <a:cs typeface="Aptos" pitchFamily="34" charset="-120"/>
-              </a:rPr>
-              <a:t>Review</a:t>
-            </a:r>
-            <a:endParaRPr lang="en-US" sz="1500" dirty="0"/>
-          </a:p>
-        </p:txBody>
-      </p:sp>
-      <p:sp>
-        <p:nvSpPr>
-          <p:cNvPr id="20" name="Shape 18"/>
-          <p:cNvSpPr/>
-          <p:nvPr/>
-        </p:nvSpPr>
-        <p:spPr>
-          <a:xfrm>
-            <a:off x="8293608" y="4389120"/>
-            <a:ext cx="2157984" cy="0"/>
-          </a:xfrm>
-          <a:prstGeom prst="line">
-            <a:avLst/>
-          </a:prstGeom>
-          <a:noFill/>
-          <a:ln w="25400">
-            <a:solidFill>
-              <a:srgbClr val="8ABBD8"/>
-            </a:solidFill>
-            <a:prstDash val="solid"/>
-          </a:ln>
-        </p:spPr>
-      </p:sp>
-      <p:sp>
-        <p:nvSpPr>
-          <p:cNvPr id="21" name="Text 19"/>
-          <p:cNvSpPr/>
-          <p:nvPr/>
-        </p:nvSpPr>
-        <p:spPr>
-          <a:xfrm>
-            <a:off x="7909560" y="3977640"/>
-            <a:ext cx="2926080" cy="182880"/>
-          </a:xfrm>
-          <a:prstGeom prst="rect">
-            <a:avLst/>
-          </a:prstGeom>
-          <a:noFill/>
-          <a:ln/>
-        </p:spPr>
-        <p:txBody>
-          <a:bodyPr wrap="square" lIns="0" tIns="0" rIns="0" bIns="0" rtlCol="0" anchor="ctr"/>
-          <a:lstStyle/>
-          <a:p>
-            <a:pPr algn="ctr" indent="0" marL="0">
-              <a:buNone/>
-            </a:pPr>
-            <a:r>
-              <a:rPr lang="en-US" sz="1000" dirty="0">
-                <a:solidFill>
-                  <a:srgbClr val="003A63"/>
-                </a:solidFill>
-                <a:latin typeface="Aptos" pitchFamily="34" charset="0"/>
-                <a:ea typeface="Aptos" pitchFamily="34" charset="-122"/>
-                <a:cs typeface="Aptos" pitchFamily="34" charset="-120"/>
-              </a:rPr>
-              <a:t>Dependencies visible</a:t>
-            </a:r>
-            <a:endParaRPr lang="en-US" sz="1000" dirty="0"/>
-          </a:p>
-        </p:txBody>
-      </p:sp>
-      <p:sp>
-        <p:nvSpPr>
-          <p:cNvPr id="22" name="Shape 20"/>
           <p:cNvSpPr/>
           <p:nvPr/>
         </p:nvSpPr>
@@ -12766,7 +10987,7 @@
       </p:sp>
       <p:sp>
         <p:nvSpPr>
-          <p:cNvPr id="23" name="Text 21"/>
+          <p:cNvPr id="17" name="Text 15"/>
           <p:cNvSpPr/>
           <p:nvPr/>
         </p:nvSpPr>
@@ -12805,7 +11026,7 @@
       </p:sp>
       <p:sp>
         <p:nvSpPr>
-          <p:cNvPr id="24" name="Text 22"/>
+          <p:cNvPr id="18" name="Text 16"/>
           <p:cNvSpPr/>
           <p:nvPr/>
         </p:nvSpPr>
@@ -13285,13 +11506,11 @@
             </a:avLst>
           </a:prstGeom>
           <a:solidFill>
-            <a:srgbClr val="FFFFFF">
-              <a:alpha val="88000"/>
-            </a:srgbClr>
+            <a:srgbClr val="FFFFFF"/>
           </a:solidFill>
           <a:ln w="12700">
             <a:solidFill>
-              <a:srgbClr val="D6E8F2"/>
+              <a:srgbClr val="B9D7E6"/>
             </a:solidFill>
             <a:prstDash val="solid"/>
           </a:ln>
@@ -13299,30 +11518,42 @@
       </p:sp>
       <p:sp>
         <p:nvSpPr>
-          <p:cNvPr id="14" name="Shape 12"/>
-          <p:cNvSpPr/>
-          <p:nvPr/>
-        </p:nvSpPr>
-        <p:spPr>
-          <a:xfrm>
-            <a:off x="7927848" y="3319272"/>
-            <a:ext cx="792480" cy="749808"/>
-          </a:xfrm>
-          <a:prstGeom prst="roundRect">
-            <a:avLst>
-              <a:gd name="adj" fmla="val 14634"/>
-            </a:avLst>
-          </a:prstGeom>
-          <a:solidFill>
-            <a:srgbClr val="0068B7"/>
-          </a:solidFill>
-          <a:ln w="12700">
-            <a:solidFill>
-              <a:srgbClr val="0068B7"/>
-            </a:solidFill>
-            <a:prstDash val="solid"/>
-          </a:ln>
-        </p:spPr>
+          <p:cNvPr id="14" name="Text 12"/>
+          <p:cNvSpPr/>
+          <p:nvPr/>
+        </p:nvSpPr>
+        <p:spPr>
+          <a:xfrm>
+            <a:off x="7799832" y="2935224"/>
+            <a:ext cx="3145536" cy="256032"/>
+          </a:xfrm>
+          <a:prstGeom prst="rect">
+            <a:avLst/>
+          </a:prstGeom>
+          <a:noFill/>
+          <a:ln/>
+        </p:spPr>
+        <p:txBody>
+          <a:bodyPr wrap="square" lIns="0" tIns="0" rIns="0" bIns="0" rtlCol="0" anchor="ctr"/>
+          <a:lstStyle/>
+          <a:p>
+            <a:pPr indent="0" marL="0">
+              <a:buNone/>
+            </a:pPr>
+            <a:r>
+              <a:rPr lang="en-US" sz="1300" b="1" dirty="0">
+                <a:solidFill>
+                  <a:srgbClr val="0068B7"/>
+                </a:solidFill>
+                <a:latin typeface="Aptos" pitchFamily="34" charset="0"/>
+                <a:ea typeface="Aptos" pitchFamily="34" charset="-122"/>
+                <a:cs typeface="Aptos" pitchFamily="34" charset="-120"/>
+              </a:rPr>
+              <a:t>Concept checkpoints</a:t>
+            </a:r>
+            <a:endParaRPr lang="en-US" sz="1300" dirty="0"/>
+          </a:p>
+        </p:txBody>
       </p:sp>
       <p:sp>
         <p:nvSpPr>
@@ -13332,240 +11563,39 @@
         </p:nvSpPr>
         <p:spPr>
           <a:xfrm>
-            <a:off x="8001000" y="3511296"/>
-            <a:ext cx="646176" cy="310896"/>
-          </a:xfrm>
-          <a:prstGeom prst="rect">
-            <a:avLst/>
-          </a:prstGeom>
-          <a:noFill/>
-          <a:ln/>
-        </p:spPr>
-        <p:txBody>
-          <a:bodyPr wrap="square" lIns="0" tIns="0" rIns="0" bIns="0" rtlCol="0" anchor="ctr">
+            <a:off x="7818120" y="3300984"/>
+            <a:ext cx="3090672" cy="877824"/>
+          </a:xfrm>
+          <a:prstGeom prst="rect">
+            <a:avLst/>
+          </a:prstGeom>
+          <a:noFill/>
+          <a:ln/>
+        </p:spPr>
+        <p:txBody>
+          <a:bodyPr wrap="square" lIns="254" tIns="254" rIns="254" bIns="254" rtlCol="0" anchor="t">
             <a:normAutofit/>
           </a:bodyPr>
           <a:lstStyle/>
           <a:p>
-            <a:pPr algn="ctr" indent="0" marL="0">
-              <a:buNone/>
-            </a:pPr>
-            <a:r>
-              <a:rPr lang="en-US" sz="1500" b="1" dirty="0">
-                <a:solidFill>
-                  <a:srgbClr val="FFFFFF"/>
-                </a:solidFill>
-                <a:latin typeface="Aptos" pitchFamily="34" charset="0"/>
-                <a:ea typeface="Aptos" pitchFamily="34" charset="-122"/>
-                <a:cs typeface="Aptos" pitchFamily="34" charset="-120"/>
-              </a:rPr>
-              <a:t>Plan</a:t>
-            </a:r>
-            <a:endParaRPr lang="en-US" sz="1500" dirty="0"/>
+            <a:r>
+              <a:rPr lang="en-US" sz="1380" dirty="0">
+                <a:solidFill>
+                  <a:srgbClr val="17364A"/>
+                </a:solidFill>
+                <a:latin typeface="Aptos" pitchFamily="34" charset="0"/>
+                <a:ea typeface="Aptos" pitchFamily="34" charset="-122"/>
+                <a:cs typeface="Aptos" pitchFamily="34" charset="-120"/>
+              </a:rPr>
+              <a:t>Agency privacy, cybersecurity, data governance, procurement, and records management policies</a:t>
+            </a:r>
+            <a:endParaRPr lang="en-US" sz="1380" dirty="0"/>
           </a:p>
         </p:txBody>
       </p:sp>
       <p:sp>
         <p:nvSpPr>
           <p:cNvPr id="16" name="Shape 14"/>
-          <p:cNvSpPr/>
-          <p:nvPr/>
-        </p:nvSpPr>
-        <p:spPr>
-          <a:xfrm>
-            <a:off x="8976360" y="3319272"/>
-            <a:ext cx="792480" cy="749808"/>
-          </a:xfrm>
-          <a:prstGeom prst="roundRect">
-            <a:avLst>
-              <a:gd name="adj" fmla="val 14634"/>
-            </a:avLst>
-          </a:prstGeom>
-          <a:solidFill>
-            <a:srgbClr val="2F8A28"/>
-          </a:solidFill>
-          <a:ln w="12700">
-            <a:solidFill>
-              <a:srgbClr val="2F8A28"/>
-            </a:solidFill>
-            <a:prstDash val="solid"/>
-          </a:ln>
-        </p:spPr>
-      </p:sp>
-      <p:sp>
-        <p:nvSpPr>
-          <p:cNvPr id="17" name="Text 15"/>
-          <p:cNvSpPr/>
-          <p:nvPr/>
-        </p:nvSpPr>
-        <p:spPr>
-          <a:xfrm>
-            <a:off x="9049512" y="3511296"/>
-            <a:ext cx="646176" cy="310896"/>
-          </a:xfrm>
-          <a:prstGeom prst="rect">
-            <a:avLst/>
-          </a:prstGeom>
-          <a:noFill/>
-          <a:ln/>
-        </p:spPr>
-        <p:txBody>
-          <a:bodyPr wrap="square" lIns="0" tIns="0" rIns="0" bIns="0" rtlCol="0" anchor="ctr">
-            <a:normAutofit/>
-          </a:bodyPr>
-          <a:lstStyle/>
-          <a:p>
-            <a:pPr algn="ctr" indent="0" marL="0">
-              <a:buNone/>
-            </a:pPr>
-            <a:r>
-              <a:rPr lang="en-US" sz="1500" b="1" dirty="0">
-                <a:solidFill>
-                  <a:srgbClr val="FFFFFF"/>
-                </a:solidFill>
-                <a:latin typeface="Aptos" pitchFamily="34" charset="0"/>
-                <a:ea typeface="Aptos" pitchFamily="34" charset="-122"/>
-                <a:cs typeface="Aptos" pitchFamily="34" charset="-120"/>
-              </a:rPr>
-              <a:t>Do</a:t>
-            </a:r>
-            <a:endParaRPr lang="en-US" sz="1500" dirty="0"/>
-          </a:p>
-        </p:txBody>
-      </p:sp>
-      <p:sp>
-        <p:nvSpPr>
-          <p:cNvPr id="18" name="Shape 16"/>
-          <p:cNvSpPr/>
-          <p:nvPr/>
-        </p:nvSpPr>
-        <p:spPr>
-          <a:xfrm>
-            <a:off x="10024872" y="3319272"/>
-            <a:ext cx="792480" cy="749808"/>
-          </a:xfrm>
-          <a:prstGeom prst="roundRect">
-            <a:avLst>
-              <a:gd name="adj" fmla="val 14634"/>
-            </a:avLst>
-          </a:prstGeom>
-          <a:solidFill>
-            <a:srgbClr val="D69A2D"/>
-          </a:solidFill>
-          <a:ln w="12700">
-            <a:solidFill>
-              <a:srgbClr val="D69A2D"/>
-            </a:solidFill>
-            <a:prstDash val="solid"/>
-          </a:ln>
-        </p:spPr>
-      </p:sp>
-      <p:sp>
-        <p:nvSpPr>
-          <p:cNvPr id="19" name="Text 17"/>
-          <p:cNvSpPr/>
-          <p:nvPr/>
-        </p:nvSpPr>
-        <p:spPr>
-          <a:xfrm>
-            <a:off x="10098024" y="3511296"/>
-            <a:ext cx="646176" cy="310896"/>
-          </a:xfrm>
-          <a:prstGeom prst="rect">
-            <a:avLst/>
-          </a:prstGeom>
-          <a:noFill/>
-          <a:ln/>
-        </p:spPr>
-        <p:txBody>
-          <a:bodyPr wrap="square" lIns="0" tIns="0" rIns="0" bIns="0" rtlCol="0" anchor="ctr">
-            <a:normAutofit/>
-          </a:bodyPr>
-          <a:lstStyle/>
-          <a:p>
-            <a:pPr algn="ctr" indent="0" marL="0">
-              <a:buNone/>
-            </a:pPr>
-            <a:r>
-              <a:rPr lang="en-US" sz="1500" b="1" dirty="0">
-                <a:solidFill>
-                  <a:srgbClr val="FFFFFF"/>
-                </a:solidFill>
-                <a:latin typeface="Aptos" pitchFamily="34" charset="0"/>
-                <a:ea typeface="Aptos" pitchFamily="34" charset="-122"/>
-                <a:cs typeface="Aptos" pitchFamily="34" charset="-120"/>
-              </a:rPr>
-              <a:t>Review</a:t>
-            </a:r>
-            <a:endParaRPr lang="en-US" sz="1500" dirty="0"/>
-          </a:p>
-        </p:txBody>
-      </p:sp>
-      <p:sp>
-        <p:nvSpPr>
-          <p:cNvPr id="20" name="Shape 18"/>
-          <p:cNvSpPr/>
-          <p:nvPr/>
-        </p:nvSpPr>
-        <p:spPr>
-          <a:xfrm>
-            <a:off x="8293608" y="4389120"/>
-            <a:ext cx="2157984" cy="0"/>
-          </a:xfrm>
-          <a:prstGeom prst="line">
-            <a:avLst/>
-          </a:prstGeom>
-          <a:noFill/>
-          <a:ln w="25400">
-            <a:solidFill>
-              <a:srgbClr val="8ABBD8"/>
-            </a:solidFill>
-            <a:prstDash val="solid"/>
-          </a:ln>
-        </p:spPr>
-      </p:sp>
-      <p:sp>
-        <p:nvSpPr>
-          <p:cNvPr id="21" name="Text 19"/>
-          <p:cNvSpPr/>
-          <p:nvPr/>
-        </p:nvSpPr>
-        <p:spPr>
-          <a:xfrm>
-            <a:off x="7909560" y="3977640"/>
-            <a:ext cx="2926080" cy="182880"/>
-          </a:xfrm>
-          <a:prstGeom prst="rect">
-            <a:avLst/>
-          </a:prstGeom>
-          <a:noFill/>
-          <a:ln/>
-        </p:spPr>
-        <p:txBody>
-          <a:bodyPr wrap="square" lIns="0" tIns="0" rIns="0" bIns="0" rtlCol="0" anchor="ctr"/>
-          <a:lstStyle/>
-          <a:p>
-            <a:pPr algn="ctr" indent="0" marL="0">
-              <a:buNone/>
-            </a:pPr>
-            <a:r>
-              <a:rPr lang="en-US" sz="1000" dirty="0">
-                <a:solidFill>
-                  <a:srgbClr val="003A63"/>
-                </a:solidFill>
-                <a:latin typeface="Aptos" pitchFamily="34" charset="0"/>
-                <a:ea typeface="Aptos" pitchFamily="34" charset="-122"/>
-                <a:cs typeface="Aptos" pitchFamily="34" charset="-120"/>
-              </a:rPr>
-              <a:t>Dependencies visible</a:t>
-            </a:r>
-            <a:endParaRPr lang="en-US" sz="1000" dirty="0"/>
-          </a:p>
-        </p:txBody>
-      </p:sp>
-      <p:sp>
-        <p:nvSpPr>
-          <p:cNvPr id="22" name="Shape 20"/>
           <p:cNvSpPr/>
           <p:nvPr/>
         </p:nvSpPr>
@@ -13592,7 +11622,7 @@
       </p:sp>
       <p:sp>
         <p:nvSpPr>
-          <p:cNvPr id="23" name="Text 21"/>
+          <p:cNvPr id="17" name="Text 15"/>
           <p:cNvSpPr/>
           <p:nvPr/>
         </p:nvSpPr>
@@ -13631,7 +11661,7 @@
       </p:sp>
       <p:sp>
         <p:nvSpPr>
-          <p:cNvPr id="24" name="Text 22"/>
+          <p:cNvPr id="18" name="Text 16"/>
           <p:cNvSpPr/>
           <p:nvPr/>
         </p:nvSpPr>
@@ -14144,20 +12174,20 @@
         </p:nvSpPr>
         <p:spPr>
           <a:xfrm>
-            <a:off x="7818120" y="3977640"/>
-            <a:ext cx="972312" cy="749808"/>
+            <a:off x="8046720" y="3794760"/>
+            <a:ext cx="3063240" cy="1600200"/>
           </a:xfrm>
           <a:prstGeom prst="roundRect">
             <a:avLst>
-              <a:gd name="adj" fmla="val 14634"/>
+              <a:gd name="adj" fmla="val 6857"/>
             </a:avLst>
           </a:prstGeom>
           <a:solidFill>
-            <a:srgbClr val="0068B7"/>
+            <a:srgbClr val="FFFFFF"/>
           </a:solidFill>
           <a:ln w="12700">
             <a:solidFill>
-              <a:srgbClr val="0068B7"/>
+              <a:srgbClr val="B9D7E6"/>
             </a:solidFill>
             <a:prstDash val="solid"/>
           </a:ln>
@@ -14171,172 +12201,100 @@
         </p:nvSpPr>
         <p:spPr>
           <a:xfrm>
-            <a:off x="7891272" y="4169664"/>
-            <a:ext cx="826008" cy="310896"/>
-          </a:xfrm>
-          <a:prstGeom prst="rect">
-            <a:avLst/>
-          </a:prstGeom>
-          <a:noFill/>
-          <a:ln/>
-        </p:spPr>
-        <p:txBody>
-          <a:bodyPr wrap="square" lIns="0" tIns="0" rIns="0" bIns="0" rtlCol="0" anchor="ctr">
+            <a:off x="8211312" y="3941064"/>
+            <a:ext cx="2734056" cy="256032"/>
+          </a:xfrm>
+          <a:prstGeom prst="rect">
+            <a:avLst/>
+          </a:prstGeom>
+          <a:noFill/>
+          <a:ln/>
+        </p:spPr>
+        <p:txBody>
+          <a:bodyPr wrap="square" lIns="0" tIns="0" rIns="0" bIns="0" rtlCol="0" anchor="ctr"/>
+          <a:lstStyle/>
+          <a:p>
+            <a:pPr indent="0" marL="0">
+              <a:buNone/>
+            </a:pPr>
+            <a:r>
+              <a:rPr lang="en-US" sz="1300" b="1" dirty="0">
+                <a:solidFill>
+                  <a:srgbClr val="0068B7"/>
+                </a:solidFill>
+                <a:latin typeface="Aptos" pitchFamily="34" charset="0"/>
+                <a:ea typeface="Aptos" pitchFamily="34" charset="-122"/>
+                <a:cs typeface="Aptos" pitchFamily="34" charset="-120"/>
+              </a:rPr>
+              <a:t>Use the play links to</a:t>
+            </a:r>
+            <a:endParaRPr lang="en-US" sz="1300" dirty="0"/>
+          </a:p>
+        </p:txBody>
+      </p:sp>
+      <p:sp>
+        <p:nvSpPr>
+          <p:cNvPr id="15" name="Text 13"/>
+          <p:cNvSpPr/>
+          <p:nvPr/>
+        </p:nvSpPr>
+        <p:spPr>
+          <a:xfrm>
+            <a:off x="8229600" y="4306824"/>
+            <a:ext cx="2679192" cy="941832"/>
+          </a:xfrm>
+          <a:prstGeom prst="rect">
+            <a:avLst/>
+          </a:prstGeom>
+          <a:noFill/>
+          <a:ln/>
+        </p:spPr>
+        <p:txBody>
+          <a:bodyPr wrap="square" lIns="254" tIns="254" rIns="254" bIns="254" rtlCol="0" anchor="t">
             <a:normAutofit/>
           </a:bodyPr>
           <a:lstStyle/>
           <a:p>
-            <a:pPr algn="ctr" indent="0" marL="0">
-              <a:buNone/>
-            </a:pPr>
-            <a:r>
-              <a:rPr lang="en-US" sz="1500" b="1" dirty="0">
-                <a:solidFill>
-                  <a:srgbClr val="FFFFFF"/>
-                </a:solidFill>
-                <a:latin typeface="Aptos" pitchFamily="34" charset="0"/>
-                <a:ea typeface="Aptos" pitchFamily="34" charset="-122"/>
-                <a:cs typeface="Aptos" pitchFamily="34" charset="-120"/>
-              </a:rPr>
-              <a:t>Lesson</a:t>
-            </a:r>
-            <a:endParaRPr lang="en-US" sz="1500" dirty="0"/>
-          </a:p>
-        </p:txBody>
-      </p:sp>
-      <p:sp>
-        <p:nvSpPr>
-          <p:cNvPr id="15" name="Shape 13"/>
-          <p:cNvSpPr/>
-          <p:nvPr/>
-        </p:nvSpPr>
-        <p:spPr>
-          <a:xfrm>
-            <a:off x="9046464" y="3977640"/>
-            <a:ext cx="972312" cy="749808"/>
-          </a:xfrm>
-          <a:prstGeom prst="roundRect">
-            <a:avLst>
-              <a:gd name="adj" fmla="val 14634"/>
-            </a:avLst>
-          </a:prstGeom>
-          <a:solidFill>
-            <a:srgbClr val="2F8A28"/>
-          </a:solidFill>
-          <a:ln w="12700">
-            <a:solidFill>
-              <a:srgbClr val="2F8A28"/>
-            </a:solidFill>
-            <a:prstDash val="solid"/>
-          </a:ln>
-        </p:spPr>
-      </p:sp>
-      <p:sp>
-        <p:nvSpPr>
-          <p:cNvPr id="16" name="Text 14"/>
-          <p:cNvSpPr/>
-          <p:nvPr/>
-        </p:nvSpPr>
-        <p:spPr>
-          <a:xfrm>
-            <a:off x="9119616" y="4169664"/>
-            <a:ext cx="826008" cy="310896"/>
-          </a:xfrm>
-          <a:prstGeom prst="rect">
-            <a:avLst/>
-          </a:prstGeom>
-          <a:noFill/>
-          <a:ln/>
-        </p:spPr>
-        <p:txBody>
-          <a:bodyPr wrap="square" lIns="0" tIns="0" rIns="0" bIns="0" rtlCol="0" anchor="ctr">
-            <a:normAutofit/>
-          </a:bodyPr>
-          <a:lstStyle/>
-          <a:p>
-            <a:pPr algn="ctr" indent="0" marL="0">
-              <a:buNone/>
-            </a:pPr>
-            <a:r>
-              <a:rPr lang="en-US" sz="1500" b="1" dirty="0">
-                <a:solidFill>
-                  <a:srgbClr val="FFFFFF"/>
-                </a:solidFill>
-                <a:latin typeface="Aptos" pitchFamily="34" charset="0"/>
-                <a:ea typeface="Aptos" pitchFamily="34" charset="-122"/>
-                <a:cs typeface="Aptos" pitchFamily="34" charset="-120"/>
-              </a:rPr>
-              <a:t>Plays</a:t>
-            </a:r>
-            <a:endParaRPr lang="en-US" sz="1500" dirty="0"/>
-          </a:p>
-        </p:txBody>
-      </p:sp>
-      <p:sp>
-        <p:nvSpPr>
-          <p:cNvPr id="17" name="Shape 15"/>
-          <p:cNvSpPr/>
-          <p:nvPr/>
-        </p:nvSpPr>
-        <p:spPr>
-          <a:xfrm>
-            <a:off x="10274808" y="3977640"/>
-            <a:ext cx="972312" cy="749808"/>
-          </a:xfrm>
-          <a:prstGeom prst="roundRect">
-            <a:avLst>
-              <a:gd name="adj" fmla="val 14634"/>
-            </a:avLst>
-          </a:prstGeom>
-          <a:solidFill>
-            <a:srgbClr val="6A4CA3"/>
-          </a:solidFill>
-          <a:ln w="12700">
-            <a:solidFill>
-              <a:srgbClr val="6A4CA3"/>
-            </a:solidFill>
-            <a:prstDash val="solid"/>
-          </a:ln>
-        </p:spPr>
-      </p:sp>
-      <p:sp>
-        <p:nvSpPr>
-          <p:cNvPr id="18" name="Text 16"/>
-          <p:cNvSpPr/>
-          <p:nvPr/>
-        </p:nvSpPr>
-        <p:spPr>
-          <a:xfrm>
-            <a:off x="10347960" y="4169664"/>
-            <a:ext cx="826008" cy="310896"/>
-          </a:xfrm>
-          <a:prstGeom prst="rect">
-            <a:avLst/>
-          </a:prstGeom>
-          <a:noFill/>
-          <a:ln/>
-        </p:spPr>
-        <p:txBody>
-          <a:bodyPr wrap="square" lIns="0" tIns="0" rIns="0" bIns="0" rtlCol="0" anchor="ctr">
-            <a:normAutofit/>
-          </a:bodyPr>
-          <a:lstStyle/>
-          <a:p>
-            <a:pPr algn="ctr" indent="0" marL="0">
-              <a:buNone/>
-            </a:pPr>
-            <a:r>
-              <a:rPr lang="en-US" sz="1500" b="1" dirty="0">
-                <a:solidFill>
-                  <a:srgbClr val="FFFFFF"/>
-                </a:solidFill>
-                <a:latin typeface="Aptos" pitchFamily="34" charset="0"/>
-                <a:ea typeface="Aptos" pitchFamily="34" charset="-122"/>
-                <a:cs typeface="Aptos" pitchFamily="34" charset="-120"/>
-              </a:rPr>
-              <a:t>Action</a:t>
-            </a:r>
-            <a:endParaRPr lang="en-US" sz="1500" dirty="0"/>
+            <a:r>
+              <a:rPr lang="en-US" sz="1380" dirty="0">
+                <a:solidFill>
+                  <a:srgbClr val="17364A"/>
+                </a:solidFill>
+                <a:latin typeface="Aptos" pitchFamily="34" charset="0"/>
+                <a:ea typeface="Aptos" pitchFamily="34" charset="-122"/>
+                <a:cs typeface="Aptos" pitchFamily="34" charset="-120"/>
+              </a:rPr>
+              <a:t>Locate the decision point in the playbook sequence.</a:t>
+            </a:r>
+            <a:endParaRPr lang="en-US" sz="1380" dirty="0"/>
+          </a:p>
+          <a:p>
+            <a:r>
+              <a:rPr lang="en-US" sz="1380" dirty="0">
+                <a:solidFill>
+                  <a:srgbClr val="17364A"/>
+                </a:solidFill>
+                <a:latin typeface="Aptos" pitchFamily="34" charset="0"/>
+                <a:ea typeface="Aptos" pitchFamily="34" charset="-122"/>
+                <a:cs typeface="Aptos" pitchFamily="34" charset="-120"/>
+              </a:rPr>
+              <a:t>Identify who should participate in the work.</a:t>
+            </a:r>
+            <a:endParaRPr lang="en-US" sz="1380" dirty="0"/>
+          </a:p>
+          <a:p>
+            <a:r>
+              <a:rPr lang="en-US" sz="1380" dirty="0">
+                <a:solidFill>
+                  <a:srgbClr val="17364A"/>
+                </a:solidFill>
+                <a:latin typeface="Aptos" pitchFamily="34" charset="0"/>
+                <a:ea typeface="Aptos" pitchFamily="34" charset="-122"/>
+                <a:cs typeface="Aptos" pitchFamily="34" charset="-120"/>
+              </a:rPr>
+              <a:t>Document the review, approval, or implementation step.</a:t>
+            </a:r>
+            <a:endParaRPr lang="en-US" sz="1380" dirty="0"/>
           </a:p>
         </p:txBody>
       </p:sp>
@@ -14814,20 +12772,20 @@
         </p:nvSpPr>
         <p:spPr>
           <a:xfrm>
-            <a:off x="7818120" y="3977640"/>
-            <a:ext cx="972312" cy="749808"/>
+            <a:off x="8046720" y="3794760"/>
+            <a:ext cx="3063240" cy="1600200"/>
           </a:xfrm>
           <a:prstGeom prst="roundRect">
             <a:avLst>
-              <a:gd name="adj" fmla="val 14634"/>
+              <a:gd name="adj" fmla="val 6857"/>
             </a:avLst>
           </a:prstGeom>
           <a:solidFill>
-            <a:srgbClr val="0068B7"/>
+            <a:srgbClr val="FFFFFF"/>
           </a:solidFill>
           <a:ln w="12700">
             <a:solidFill>
-              <a:srgbClr val="0068B7"/>
+              <a:srgbClr val="B9D7E6"/>
             </a:solidFill>
             <a:prstDash val="solid"/>
           </a:ln>
@@ -14841,172 +12799,100 @@
         </p:nvSpPr>
         <p:spPr>
           <a:xfrm>
-            <a:off x="7891272" y="4169664"/>
-            <a:ext cx="826008" cy="310896"/>
-          </a:xfrm>
-          <a:prstGeom prst="rect">
-            <a:avLst/>
-          </a:prstGeom>
-          <a:noFill/>
-          <a:ln/>
-        </p:spPr>
-        <p:txBody>
-          <a:bodyPr wrap="square" lIns="0" tIns="0" rIns="0" bIns="0" rtlCol="0" anchor="ctr">
+            <a:off x="8211312" y="3941064"/>
+            <a:ext cx="2734056" cy="256032"/>
+          </a:xfrm>
+          <a:prstGeom prst="rect">
+            <a:avLst/>
+          </a:prstGeom>
+          <a:noFill/>
+          <a:ln/>
+        </p:spPr>
+        <p:txBody>
+          <a:bodyPr wrap="square" lIns="0" tIns="0" rIns="0" bIns="0" rtlCol="0" anchor="ctr"/>
+          <a:lstStyle/>
+          <a:p>
+            <a:pPr indent="0" marL="0">
+              <a:buNone/>
+            </a:pPr>
+            <a:r>
+              <a:rPr lang="en-US" sz="1300" b="1" dirty="0">
+                <a:solidFill>
+                  <a:srgbClr val="0068B7"/>
+                </a:solidFill>
+                <a:latin typeface="Aptos" pitchFamily="34" charset="0"/>
+                <a:ea typeface="Aptos" pitchFamily="34" charset="-122"/>
+                <a:cs typeface="Aptos" pitchFamily="34" charset="-120"/>
+              </a:rPr>
+              <a:t>Tool selection cues</a:t>
+            </a:r>
+            <a:endParaRPr lang="en-US" sz="1300" dirty="0"/>
+          </a:p>
+        </p:txBody>
+      </p:sp>
+      <p:sp>
+        <p:nvSpPr>
+          <p:cNvPr id="15" name="Text 13"/>
+          <p:cNvSpPr/>
+          <p:nvPr/>
+        </p:nvSpPr>
+        <p:spPr>
+          <a:xfrm>
+            <a:off x="8229600" y="4306824"/>
+            <a:ext cx="2679192" cy="941832"/>
+          </a:xfrm>
+          <a:prstGeom prst="rect">
+            <a:avLst/>
+          </a:prstGeom>
+          <a:noFill/>
+          <a:ln/>
+        </p:spPr>
+        <p:txBody>
+          <a:bodyPr wrap="square" lIns="254" tIns="254" rIns="254" bIns="254" rtlCol="0" anchor="t">
             <a:normAutofit/>
           </a:bodyPr>
           <a:lstStyle/>
           <a:p>
-            <a:pPr algn="ctr" indent="0" marL="0">
-              <a:buNone/>
-            </a:pPr>
-            <a:r>
-              <a:rPr lang="en-US" sz="1500" b="1" dirty="0">
-                <a:solidFill>
-                  <a:srgbClr val="FFFFFF"/>
-                </a:solidFill>
-                <a:latin typeface="Aptos" pitchFamily="34" charset="0"/>
-                <a:ea typeface="Aptos" pitchFamily="34" charset="-122"/>
-                <a:cs typeface="Aptos" pitchFamily="34" charset="-120"/>
-              </a:rPr>
-              <a:t>Concept</a:t>
-            </a:r>
-            <a:endParaRPr lang="en-US" sz="1500" dirty="0"/>
-          </a:p>
-        </p:txBody>
-      </p:sp>
-      <p:sp>
-        <p:nvSpPr>
-          <p:cNvPr id="15" name="Shape 13"/>
-          <p:cNvSpPr/>
-          <p:nvPr/>
-        </p:nvSpPr>
-        <p:spPr>
-          <a:xfrm>
-            <a:off x="9046464" y="3977640"/>
-            <a:ext cx="972312" cy="749808"/>
-          </a:xfrm>
-          <a:prstGeom prst="roundRect">
-            <a:avLst>
-              <a:gd name="adj" fmla="val 14634"/>
-            </a:avLst>
-          </a:prstGeom>
-          <a:solidFill>
-            <a:srgbClr val="2F8A28"/>
-          </a:solidFill>
-          <a:ln w="12700">
-            <a:solidFill>
-              <a:srgbClr val="2F8A28"/>
-            </a:solidFill>
-            <a:prstDash val="solid"/>
-          </a:ln>
-        </p:spPr>
-      </p:sp>
-      <p:sp>
-        <p:nvSpPr>
-          <p:cNvPr id="16" name="Text 14"/>
-          <p:cNvSpPr/>
-          <p:nvPr/>
-        </p:nvSpPr>
-        <p:spPr>
-          <a:xfrm>
-            <a:off x="9119616" y="4169664"/>
-            <a:ext cx="826008" cy="310896"/>
-          </a:xfrm>
-          <a:prstGeom prst="rect">
-            <a:avLst/>
-          </a:prstGeom>
-          <a:noFill/>
-          <a:ln/>
-        </p:spPr>
-        <p:txBody>
-          <a:bodyPr wrap="square" lIns="0" tIns="0" rIns="0" bIns="0" rtlCol="0" anchor="ctr">
-            <a:normAutofit/>
-          </a:bodyPr>
-          <a:lstStyle/>
-          <a:p>
-            <a:pPr algn="ctr" indent="0" marL="0">
-              <a:buNone/>
-            </a:pPr>
-            <a:r>
-              <a:rPr lang="en-US" sz="1500" b="1" dirty="0">
-                <a:solidFill>
-                  <a:srgbClr val="FFFFFF"/>
-                </a:solidFill>
-                <a:latin typeface="Aptos" pitchFamily="34" charset="0"/>
-                <a:ea typeface="Aptos" pitchFamily="34" charset="-122"/>
-                <a:cs typeface="Aptos" pitchFamily="34" charset="-120"/>
-              </a:rPr>
-              <a:t>Tool</a:t>
-            </a:r>
-            <a:endParaRPr lang="en-US" sz="1500" dirty="0"/>
-          </a:p>
-        </p:txBody>
-      </p:sp>
-      <p:sp>
-        <p:nvSpPr>
-          <p:cNvPr id="17" name="Shape 15"/>
-          <p:cNvSpPr/>
-          <p:nvPr/>
-        </p:nvSpPr>
-        <p:spPr>
-          <a:xfrm>
-            <a:off x="10274808" y="3977640"/>
-            <a:ext cx="972312" cy="749808"/>
-          </a:xfrm>
-          <a:prstGeom prst="roundRect">
-            <a:avLst>
-              <a:gd name="adj" fmla="val 14634"/>
-            </a:avLst>
-          </a:prstGeom>
-          <a:solidFill>
-            <a:srgbClr val="D69A2D"/>
-          </a:solidFill>
-          <a:ln w="12700">
-            <a:solidFill>
-              <a:srgbClr val="D69A2D"/>
-            </a:solidFill>
-            <a:prstDash val="solid"/>
-          </a:ln>
-        </p:spPr>
-      </p:sp>
-      <p:sp>
-        <p:nvSpPr>
-          <p:cNvPr id="18" name="Text 16"/>
-          <p:cNvSpPr/>
-          <p:nvPr/>
-        </p:nvSpPr>
-        <p:spPr>
-          <a:xfrm>
-            <a:off x="10347960" y="4169664"/>
-            <a:ext cx="826008" cy="310896"/>
-          </a:xfrm>
-          <a:prstGeom prst="rect">
-            <a:avLst/>
-          </a:prstGeom>
-          <a:noFill/>
-          <a:ln/>
-        </p:spPr>
-        <p:txBody>
-          <a:bodyPr wrap="square" lIns="0" tIns="0" rIns="0" bIns="0" rtlCol="0" anchor="ctr">
-            <a:normAutofit/>
-          </a:bodyPr>
-          <a:lstStyle/>
-          <a:p>
-            <a:pPr algn="ctr" indent="0" marL="0">
-              <a:buNone/>
-            </a:pPr>
-            <a:r>
-              <a:rPr lang="en-US" sz="1500" b="1" dirty="0">
-                <a:solidFill>
-                  <a:srgbClr val="FFFFFF"/>
-                </a:solidFill>
-                <a:latin typeface="Aptos" pitchFamily="34" charset="0"/>
-                <a:ea typeface="Aptos" pitchFamily="34" charset="-122"/>
-                <a:cs typeface="Aptos" pitchFamily="34" charset="-120"/>
-              </a:rPr>
-              <a:t>Artifact</a:t>
-            </a:r>
-            <a:endParaRPr lang="en-US" sz="1500" dirty="0"/>
+            <a:r>
+              <a:rPr lang="en-US" sz="1380" dirty="0">
+                <a:solidFill>
+                  <a:srgbClr val="17364A"/>
+                </a:solidFill>
+                <a:latin typeface="Aptos" pitchFamily="34" charset="0"/>
+                <a:ea typeface="Aptos" pitchFamily="34" charset="-122"/>
+                <a:cs typeface="Aptos" pitchFamily="34" charset="-120"/>
+              </a:rPr>
+              <a:t>Use a tool when no comparable local process exists.</a:t>
+            </a:r>
+            <a:endParaRPr lang="en-US" sz="1380" dirty="0"/>
+          </a:p>
+          <a:p>
+            <a:r>
+              <a:rPr lang="en-US" sz="1380" dirty="0">
+                <a:solidFill>
+                  <a:srgbClr val="17364A"/>
+                </a:solidFill>
+                <a:latin typeface="Aptos" pitchFamily="34" charset="0"/>
+                <a:ea typeface="Aptos" pitchFamily="34" charset="-122"/>
+                <a:cs typeface="Aptos" pitchFamily="34" charset="-120"/>
+              </a:rPr>
+              <a:t>Adapt existing department templates when they already fit the purpose.</a:t>
+            </a:r>
+            <a:endParaRPr lang="en-US" sz="1380" dirty="0"/>
+          </a:p>
+          <a:p>
+            <a:r>
+              <a:rPr lang="en-US" sz="1380" dirty="0">
+                <a:solidFill>
+                  <a:srgbClr val="17364A"/>
+                </a:solidFill>
+                <a:latin typeface="Aptos" pitchFamily="34" charset="0"/>
+                <a:ea typeface="Aptos" pitchFamily="34" charset="-122"/>
+                <a:cs typeface="Aptos" pitchFamily="34" charset="-120"/>
+              </a:rPr>
+              <a:t>Save the completed artifact as evidence of the decision.</a:t>
+            </a:r>
+            <a:endParaRPr lang="en-US" sz="1380" dirty="0"/>
           </a:p>
         </p:txBody>
       </p:sp>
@@ -15479,13 +13365,11 @@
             </a:avLst>
           </a:prstGeom>
           <a:solidFill>
-            <a:srgbClr val="FFFFFF">
-              <a:alpha val="88000"/>
-            </a:srgbClr>
+            <a:srgbClr val="FFFFFF"/>
           </a:solidFill>
           <a:ln w="12700">
             <a:solidFill>
-              <a:srgbClr val="D6E8F2"/>
+              <a:srgbClr val="B9D7E6"/>
             </a:solidFill>
             <a:prstDash val="solid"/>
           </a:ln>
@@ -15493,30 +13377,42 @@
       </p:sp>
       <p:sp>
         <p:nvSpPr>
-          <p:cNvPr id="14" name="Shape 12"/>
-          <p:cNvSpPr/>
-          <p:nvPr/>
-        </p:nvSpPr>
-        <p:spPr>
-          <a:xfrm>
-            <a:off x="7927848" y="3319272"/>
-            <a:ext cx="792480" cy="749808"/>
-          </a:xfrm>
-          <a:prstGeom prst="roundRect">
-            <a:avLst>
-              <a:gd name="adj" fmla="val 14634"/>
-            </a:avLst>
-          </a:prstGeom>
-          <a:solidFill>
-            <a:srgbClr val="0068B7"/>
-          </a:solidFill>
-          <a:ln w="12700">
-            <a:solidFill>
-              <a:srgbClr val="0068B7"/>
-            </a:solidFill>
-            <a:prstDash val="solid"/>
-          </a:ln>
-        </p:spPr>
+          <p:cNvPr id="14" name="Text 12"/>
+          <p:cNvSpPr/>
+          <p:nvPr/>
+        </p:nvSpPr>
+        <p:spPr>
+          <a:xfrm>
+            <a:off x="7799832" y="2935224"/>
+            <a:ext cx="3145536" cy="256032"/>
+          </a:xfrm>
+          <a:prstGeom prst="rect">
+            <a:avLst/>
+          </a:prstGeom>
+          <a:noFill/>
+          <a:ln/>
+        </p:spPr>
+        <p:txBody>
+          <a:bodyPr wrap="square" lIns="0" tIns="0" rIns="0" bIns="0" rtlCol="0" anchor="ctr"/>
+          <a:lstStyle/>
+          <a:p>
+            <a:pPr indent="0" marL="0">
+              <a:buNone/>
+            </a:pPr>
+            <a:r>
+              <a:rPr lang="en-US" sz="1300" b="1" dirty="0">
+                <a:solidFill>
+                  <a:srgbClr val="0068B7"/>
+                </a:solidFill>
+                <a:latin typeface="Aptos" pitchFamily="34" charset="0"/>
+                <a:ea typeface="Aptos" pitchFamily="34" charset="-122"/>
+                <a:cs typeface="Aptos" pitchFamily="34" charset="-120"/>
+              </a:rPr>
+              <a:t>Concept checkpoints</a:t>
+            </a:r>
+            <a:endParaRPr lang="en-US" sz="1300" dirty="0"/>
+          </a:p>
+        </p:txBody>
       </p:sp>
       <p:sp>
         <p:nvSpPr>
@@ -15526,240 +13422,67 @@
         </p:nvSpPr>
         <p:spPr>
           <a:xfrm>
-            <a:off x="8001000" y="3511296"/>
-            <a:ext cx="646176" cy="310896"/>
-          </a:xfrm>
-          <a:prstGeom prst="rect">
-            <a:avLst/>
-          </a:prstGeom>
-          <a:noFill/>
-          <a:ln/>
-        </p:spPr>
-        <p:txBody>
-          <a:bodyPr wrap="square" lIns="0" tIns="0" rIns="0" bIns="0" rtlCol="0" anchor="ctr">
+            <a:off x="7818120" y="3300984"/>
+            <a:ext cx="3090672" cy="877824"/>
+          </a:xfrm>
+          <a:prstGeom prst="rect">
+            <a:avLst/>
+          </a:prstGeom>
+          <a:noFill/>
+          <a:ln/>
+        </p:spPr>
+        <p:txBody>
+          <a:bodyPr wrap="square" lIns="254" tIns="254" rIns="254" bIns="254" rtlCol="0" anchor="t">
             <a:normAutofit/>
           </a:bodyPr>
           <a:lstStyle/>
           <a:p>
-            <a:pPr algn="ctr" indent="0" marL="0">
-              <a:buNone/>
-            </a:pPr>
-            <a:r>
-              <a:rPr lang="en-US" sz="1500" b="1" dirty="0">
-                <a:solidFill>
-                  <a:srgbClr val="FFFFFF"/>
-                </a:solidFill>
-                <a:latin typeface="Aptos" pitchFamily="34" charset="0"/>
-                <a:ea typeface="Aptos" pitchFamily="34" charset="-122"/>
-                <a:cs typeface="Aptos" pitchFamily="34" charset="-120"/>
-              </a:rPr>
-              <a:t>Plan</a:t>
-            </a:r>
-            <a:endParaRPr lang="en-US" sz="1500" dirty="0"/>
+            <a:r>
+              <a:rPr lang="en-US" sz="1380" dirty="0">
+                <a:solidFill>
+                  <a:srgbClr val="17364A"/>
+                </a:solidFill>
+                <a:latin typeface="Aptos" pitchFamily="34" charset="0"/>
+                <a:ea typeface="Aptos" pitchFamily="34" charset="-122"/>
+                <a:cs typeface="Aptos" pitchFamily="34" charset="-120"/>
+              </a:rPr>
+              <a:t>Explain the purpose of human factors, workflow integration, and usability testing in.</a:t>
+            </a:r>
+            <a:endParaRPr lang="en-US" sz="1380" dirty="0"/>
+          </a:p>
+          <a:p>
+            <a:r>
+              <a:rPr lang="en-US" sz="1380" dirty="0">
+                <a:solidFill>
+                  <a:srgbClr val="17364A"/>
+                </a:solidFill>
+                <a:latin typeface="Aptos" pitchFamily="34" charset="0"/>
+                <a:ea typeface="Aptos" pitchFamily="34" charset="-122"/>
+                <a:cs typeface="Aptos" pitchFamily="34" charset="-120"/>
+              </a:rPr>
+              <a:t>Identify the technical, operational, privacy, security, equity, and governance issues.</a:t>
+            </a:r>
+            <a:endParaRPr lang="en-US" sz="1380" dirty="0"/>
+          </a:p>
+          <a:p>
+            <a:r>
+              <a:rPr lang="en-US" sz="1380" dirty="0">
+                <a:solidFill>
+                  <a:srgbClr val="17364A"/>
+                </a:solidFill>
+                <a:latin typeface="Aptos" pitchFamily="34" charset="0"/>
+                <a:ea typeface="Aptos" pitchFamily="34" charset="-122"/>
+                <a:cs typeface="Aptos" pitchFamily="34" charset="-120"/>
+              </a:rPr>
+              <a:t>Recognize common failure modes that can affect safety, accuracy, trust, workflow fit, or.</a:t>
+            </a:r>
+            <a:endParaRPr lang="en-US" sz="1380" dirty="0"/>
           </a:p>
         </p:txBody>
       </p:sp>
       <p:sp>
         <p:nvSpPr>
           <p:cNvPr id="16" name="Shape 14"/>
-          <p:cNvSpPr/>
-          <p:nvPr/>
-        </p:nvSpPr>
-        <p:spPr>
-          <a:xfrm>
-            <a:off x="8976360" y="3319272"/>
-            <a:ext cx="792480" cy="749808"/>
-          </a:xfrm>
-          <a:prstGeom prst="roundRect">
-            <a:avLst>
-              <a:gd name="adj" fmla="val 14634"/>
-            </a:avLst>
-          </a:prstGeom>
-          <a:solidFill>
-            <a:srgbClr val="2F8A28"/>
-          </a:solidFill>
-          <a:ln w="12700">
-            <a:solidFill>
-              <a:srgbClr val="2F8A28"/>
-            </a:solidFill>
-            <a:prstDash val="solid"/>
-          </a:ln>
-        </p:spPr>
-      </p:sp>
-      <p:sp>
-        <p:nvSpPr>
-          <p:cNvPr id="17" name="Text 15"/>
-          <p:cNvSpPr/>
-          <p:nvPr/>
-        </p:nvSpPr>
-        <p:spPr>
-          <a:xfrm>
-            <a:off x="9049512" y="3511296"/>
-            <a:ext cx="646176" cy="310896"/>
-          </a:xfrm>
-          <a:prstGeom prst="rect">
-            <a:avLst/>
-          </a:prstGeom>
-          <a:noFill/>
-          <a:ln/>
-        </p:spPr>
-        <p:txBody>
-          <a:bodyPr wrap="square" lIns="0" tIns="0" rIns="0" bIns="0" rtlCol="0" anchor="ctr">
-            <a:normAutofit/>
-          </a:bodyPr>
-          <a:lstStyle/>
-          <a:p>
-            <a:pPr algn="ctr" indent="0" marL="0">
-              <a:buNone/>
-            </a:pPr>
-            <a:r>
-              <a:rPr lang="en-US" sz="1500" b="1" dirty="0">
-                <a:solidFill>
-                  <a:srgbClr val="FFFFFF"/>
-                </a:solidFill>
-                <a:latin typeface="Aptos" pitchFamily="34" charset="0"/>
-                <a:ea typeface="Aptos" pitchFamily="34" charset="-122"/>
-                <a:cs typeface="Aptos" pitchFamily="34" charset="-120"/>
-              </a:rPr>
-              <a:t>Do</a:t>
-            </a:r>
-            <a:endParaRPr lang="en-US" sz="1500" dirty="0"/>
-          </a:p>
-        </p:txBody>
-      </p:sp>
-      <p:sp>
-        <p:nvSpPr>
-          <p:cNvPr id="18" name="Shape 16"/>
-          <p:cNvSpPr/>
-          <p:nvPr/>
-        </p:nvSpPr>
-        <p:spPr>
-          <a:xfrm>
-            <a:off x="10024872" y="3319272"/>
-            <a:ext cx="792480" cy="749808"/>
-          </a:xfrm>
-          <a:prstGeom prst="roundRect">
-            <a:avLst>
-              <a:gd name="adj" fmla="val 14634"/>
-            </a:avLst>
-          </a:prstGeom>
-          <a:solidFill>
-            <a:srgbClr val="D69A2D"/>
-          </a:solidFill>
-          <a:ln w="12700">
-            <a:solidFill>
-              <a:srgbClr val="D69A2D"/>
-            </a:solidFill>
-            <a:prstDash val="solid"/>
-          </a:ln>
-        </p:spPr>
-      </p:sp>
-      <p:sp>
-        <p:nvSpPr>
-          <p:cNvPr id="19" name="Text 17"/>
-          <p:cNvSpPr/>
-          <p:nvPr/>
-        </p:nvSpPr>
-        <p:spPr>
-          <a:xfrm>
-            <a:off x="10098024" y="3511296"/>
-            <a:ext cx="646176" cy="310896"/>
-          </a:xfrm>
-          <a:prstGeom prst="rect">
-            <a:avLst/>
-          </a:prstGeom>
-          <a:noFill/>
-          <a:ln/>
-        </p:spPr>
-        <p:txBody>
-          <a:bodyPr wrap="square" lIns="0" tIns="0" rIns="0" bIns="0" rtlCol="0" anchor="ctr">
-            <a:normAutofit/>
-          </a:bodyPr>
-          <a:lstStyle/>
-          <a:p>
-            <a:pPr algn="ctr" indent="0" marL="0">
-              <a:buNone/>
-            </a:pPr>
-            <a:r>
-              <a:rPr lang="en-US" sz="1500" b="1" dirty="0">
-                <a:solidFill>
-                  <a:srgbClr val="FFFFFF"/>
-                </a:solidFill>
-                <a:latin typeface="Aptos" pitchFamily="34" charset="0"/>
-                <a:ea typeface="Aptos" pitchFamily="34" charset="-122"/>
-                <a:cs typeface="Aptos" pitchFamily="34" charset="-120"/>
-              </a:rPr>
-              <a:t>Review</a:t>
-            </a:r>
-            <a:endParaRPr lang="en-US" sz="1500" dirty="0"/>
-          </a:p>
-        </p:txBody>
-      </p:sp>
-      <p:sp>
-        <p:nvSpPr>
-          <p:cNvPr id="20" name="Shape 18"/>
-          <p:cNvSpPr/>
-          <p:nvPr/>
-        </p:nvSpPr>
-        <p:spPr>
-          <a:xfrm>
-            <a:off x="8293608" y="4389120"/>
-            <a:ext cx="2157984" cy="0"/>
-          </a:xfrm>
-          <a:prstGeom prst="line">
-            <a:avLst/>
-          </a:prstGeom>
-          <a:noFill/>
-          <a:ln w="25400">
-            <a:solidFill>
-              <a:srgbClr val="8ABBD8"/>
-            </a:solidFill>
-            <a:prstDash val="solid"/>
-          </a:ln>
-        </p:spPr>
-      </p:sp>
-      <p:sp>
-        <p:nvSpPr>
-          <p:cNvPr id="21" name="Text 19"/>
-          <p:cNvSpPr/>
-          <p:nvPr/>
-        </p:nvSpPr>
-        <p:spPr>
-          <a:xfrm>
-            <a:off x="7909560" y="3977640"/>
-            <a:ext cx="2926080" cy="182880"/>
-          </a:xfrm>
-          <a:prstGeom prst="rect">
-            <a:avLst/>
-          </a:prstGeom>
-          <a:noFill/>
-          <a:ln/>
-        </p:spPr>
-        <p:txBody>
-          <a:bodyPr wrap="square" lIns="0" tIns="0" rIns="0" bIns="0" rtlCol="0" anchor="ctr"/>
-          <a:lstStyle/>
-          <a:p>
-            <a:pPr algn="ctr" indent="0" marL="0">
-              <a:buNone/>
-            </a:pPr>
-            <a:r>
-              <a:rPr lang="en-US" sz="1000" dirty="0">
-                <a:solidFill>
-                  <a:srgbClr val="003A63"/>
-                </a:solidFill>
-                <a:latin typeface="Aptos" pitchFamily="34" charset="0"/>
-                <a:ea typeface="Aptos" pitchFamily="34" charset="-122"/>
-                <a:cs typeface="Aptos" pitchFamily="34" charset="-120"/>
-              </a:rPr>
-              <a:t>Dependencies visible</a:t>
-            </a:r>
-            <a:endParaRPr lang="en-US" sz="1000" dirty="0"/>
-          </a:p>
-        </p:txBody>
-      </p:sp>
-      <p:sp>
-        <p:nvSpPr>
-          <p:cNvPr id="22" name="Shape 20"/>
           <p:cNvSpPr/>
           <p:nvPr/>
         </p:nvSpPr>
@@ -15786,7 +13509,7 @@
       </p:sp>
       <p:sp>
         <p:nvSpPr>
-          <p:cNvPr id="23" name="Text 21"/>
+          <p:cNvPr id="17" name="Text 15"/>
           <p:cNvSpPr/>
           <p:nvPr/>
         </p:nvSpPr>
@@ -15825,7 +13548,7 @@
       </p:sp>
       <p:sp>
         <p:nvSpPr>
-          <p:cNvPr id="24" name="Text 22"/>
+          <p:cNvPr id="18" name="Text 16"/>
           <p:cNvSpPr/>
           <p:nvPr/>
         </p:nvSpPr>
@@ -16305,13 +14028,11 @@
             </a:avLst>
           </a:prstGeom>
           <a:solidFill>
-            <a:srgbClr val="FFFFFF">
-              <a:alpha val="88000"/>
-            </a:srgbClr>
+            <a:srgbClr val="FFFFFF"/>
           </a:solidFill>
           <a:ln w="12700">
             <a:solidFill>
-              <a:srgbClr val="D6E8F2"/>
+              <a:srgbClr val="B9D7E6"/>
             </a:solidFill>
             <a:prstDash val="solid"/>
           </a:ln>
@@ -16319,30 +14040,42 @@
       </p:sp>
       <p:sp>
         <p:nvSpPr>
-          <p:cNvPr id="14" name="Shape 12"/>
-          <p:cNvSpPr/>
-          <p:nvPr/>
-        </p:nvSpPr>
-        <p:spPr>
-          <a:xfrm>
-            <a:off x="7927848" y="3319272"/>
-            <a:ext cx="792480" cy="749808"/>
-          </a:xfrm>
-          <a:prstGeom prst="roundRect">
-            <a:avLst>
-              <a:gd name="adj" fmla="val 14634"/>
-            </a:avLst>
-          </a:prstGeom>
-          <a:solidFill>
-            <a:srgbClr val="0068B7"/>
-          </a:solidFill>
-          <a:ln w="12700">
-            <a:solidFill>
-              <a:srgbClr val="0068B7"/>
-            </a:solidFill>
-            <a:prstDash val="solid"/>
-          </a:ln>
-        </p:spPr>
+          <p:cNvPr id="14" name="Text 12"/>
+          <p:cNvSpPr/>
+          <p:nvPr/>
+        </p:nvSpPr>
+        <p:spPr>
+          <a:xfrm>
+            <a:off x="7799832" y="2935224"/>
+            <a:ext cx="3145536" cy="256032"/>
+          </a:xfrm>
+          <a:prstGeom prst="rect">
+            <a:avLst/>
+          </a:prstGeom>
+          <a:noFill/>
+          <a:ln/>
+        </p:spPr>
+        <p:txBody>
+          <a:bodyPr wrap="square" lIns="0" tIns="0" rIns="0" bIns="0" rtlCol="0" anchor="ctr"/>
+          <a:lstStyle/>
+          <a:p>
+            <a:pPr indent="0" marL="0">
+              <a:buNone/>
+            </a:pPr>
+            <a:r>
+              <a:rPr lang="en-US" sz="1300" b="1" dirty="0">
+                <a:solidFill>
+                  <a:srgbClr val="0068B7"/>
+                </a:solidFill>
+                <a:latin typeface="Aptos" pitchFamily="34" charset="0"/>
+                <a:ea typeface="Aptos" pitchFamily="34" charset="-122"/>
+                <a:cs typeface="Aptos" pitchFamily="34" charset="-120"/>
+              </a:rPr>
+              <a:t>Concept checkpoints</a:t>
+            </a:r>
+            <a:endParaRPr lang="en-US" sz="1300" dirty="0"/>
+          </a:p>
+        </p:txBody>
       </p:sp>
       <p:sp>
         <p:nvSpPr>
@@ -16352,240 +14085,39 @@
         </p:nvSpPr>
         <p:spPr>
           <a:xfrm>
-            <a:off x="8001000" y="3511296"/>
-            <a:ext cx="646176" cy="310896"/>
-          </a:xfrm>
-          <a:prstGeom prst="rect">
-            <a:avLst/>
-          </a:prstGeom>
-          <a:noFill/>
-          <a:ln/>
-        </p:spPr>
-        <p:txBody>
-          <a:bodyPr wrap="square" lIns="0" tIns="0" rIns="0" bIns="0" rtlCol="0" anchor="ctr">
+            <a:off x="7818120" y="3300984"/>
+            <a:ext cx="3090672" cy="877824"/>
+          </a:xfrm>
+          <a:prstGeom prst="rect">
+            <a:avLst/>
+          </a:prstGeom>
+          <a:noFill/>
+          <a:ln/>
+        </p:spPr>
+        <p:txBody>
+          <a:bodyPr wrap="square" lIns="254" tIns="254" rIns="254" bIns="254" rtlCol="0" anchor="t">
             <a:normAutofit/>
           </a:bodyPr>
           <a:lstStyle/>
           <a:p>
-            <a:pPr algn="ctr" indent="0" marL="0">
-              <a:buNone/>
-            </a:pPr>
-            <a:r>
-              <a:rPr lang="en-US" sz="1500" b="1" dirty="0">
-                <a:solidFill>
-                  <a:srgbClr val="FFFFFF"/>
-                </a:solidFill>
-                <a:latin typeface="Aptos" pitchFamily="34" charset="0"/>
-                <a:ea typeface="Aptos" pitchFamily="34" charset="-122"/>
-                <a:cs typeface="Aptos" pitchFamily="34" charset="-120"/>
-              </a:rPr>
-              <a:t>Plan</a:t>
-            </a:r>
-            <a:endParaRPr lang="en-US" sz="1500" dirty="0"/>
+            <a:r>
+              <a:rPr lang="en-US" sz="1380" dirty="0">
+                <a:solidFill>
+                  <a:srgbClr val="17364A"/>
+                </a:solidFill>
+                <a:latin typeface="Aptos" pitchFamily="34" charset="0"/>
+                <a:ea typeface="Aptos" pitchFamily="34" charset="-122"/>
+                <a:cs typeface="Aptos" pitchFamily="34" charset="-120"/>
+              </a:rPr>
+              <a:t>Produce a workflow usability test plan that can support readiness assessment, governance.</a:t>
+            </a:r>
+            <a:endParaRPr lang="en-US" sz="1380" dirty="0"/>
           </a:p>
         </p:txBody>
       </p:sp>
       <p:sp>
         <p:nvSpPr>
           <p:cNvPr id="16" name="Shape 14"/>
-          <p:cNvSpPr/>
-          <p:nvPr/>
-        </p:nvSpPr>
-        <p:spPr>
-          <a:xfrm>
-            <a:off x="8976360" y="3319272"/>
-            <a:ext cx="792480" cy="749808"/>
-          </a:xfrm>
-          <a:prstGeom prst="roundRect">
-            <a:avLst>
-              <a:gd name="adj" fmla="val 14634"/>
-            </a:avLst>
-          </a:prstGeom>
-          <a:solidFill>
-            <a:srgbClr val="2F8A28"/>
-          </a:solidFill>
-          <a:ln w="12700">
-            <a:solidFill>
-              <a:srgbClr val="2F8A28"/>
-            </a:solidFill>
-            <a:prstDash val="solid"/>
-          </a:ln>
-        </p:spPr>
-      </p:sp>
-      <p:sp>
-        <p:nvSpPr>
-          <p:cNvPr id="17" name="Text 15"/>
-          <p:cNvSpPr/>
-          <p:nvPr/>
-        </p:nvSpPr>
-        <p:spPr>
-          <a:xfrm>
-            <a:off x="9049512" y="3511296"/>
-            <a:ext cx="646176" cy="310896"/>
-          </a:xfrm>
-          <a:prstGeom prst="rect">
-            <a:avLst/>
-          </a:prstGeom>
-          <a:noFill/>
-          <a:ln/>
-        </p:spPr>
-        <p:txBody>
-          <a:bodyPr wrap="square" lIns="0" tIns="0" rIns="0" bIns="0" rtlCol="0" anchor="ctr">
-            <a:normAutofit/>
-          </a:bodyPr>
-          <a:lstStyle/>
-          <a:p>
-            <a:pPr algn="ctr" indent="0" marL="0">
-              <a:buNone/>
-            </a:pPr>
-            <a:r>
-              <a:rPr lang="en-US" sz="1500" b="1" dirty="0">
-                <a:solidFill>
-                  <a:srgbClr val="FFFFFF"/>
-                </a:solidFill>
-                <a:latin typeface="Aptos" pitchFamily="34" charset="0"/>
-                <a:ea typeface="Aptos" pitchFamily="34" charset="-122"/>
-                <a:cs typeface="Aptos" pitchFamily="34" charset="-120"/>
-              </a:rPr>
-              <a:t>Do</a:t>
-            </a:r>
-            <a:endParaRPr lang="en-US" sz="1500" dirty="0"/>
-          </a:p>
-        </p:txBody>
-      </p:sp>
-      <p:sp>
-        <p:nvSpPr>
-          <p:cNvPr id="18" name="Shape 16"/>
-          <p:cNvSpPr/>
-          <p:nvPr/>
-        </p:nvSpPr>
-        <p:spPr>
-          <a:xfrm>
-            <a:off x="10024872" y="3319272"/>
-            <a:ext cx="792480" cy="749808"/>
-          </a:xfrm>
-          <a:prstGeom prst="roundRect">
-            <a:avLst>
-              <a:gd name="adj" fmla="val 14634"/>
-            </a:avLst>
-          </a:prstGeom>
-          <a:solidFill>
-            <a:srgbClr val="D69A2D"/>
-          </a:solidFill>
-          <a:ln w="12700">
-            <a:solidFill>
-              <a:srgbClr val="D69A2D"/>
-            </a:solidFill>
-            <a:prstDash val="solid"/>
-          </a:ln>
-        </p:spPr>
-      </p:sp>
-      <p:sp>
-        <p:nvSpPr>
-          <p:cNvPr id="19" name="Text 17"/>
-          <p:cNvSpPr/>
-          <p:nvPr/>
-        </p:nvSpPr>
-        <p:spPr>
-          <a:xfrm>
-            <a:off x="10098024" y="3511296"/>
-            <a:ext cx="646176" cy="310896"/>
-          </a:xfrm>
-          <a:prstGeom prst="rect">
-            <a:avLst/>
-          </a:prstGeom>
-          <a:noFill/>
-          <a:ln/>
-        </p:spPr>
-        <p:txBody>
-          <a:bodyPr wrap="square" lIns="0" tIns="0" rIns="0" bIns="0" rtlCol="0" anchor="ctr">
-            <a:normAutofit/>
-          </a:bodyPr>
-          <a:lstStyle/>
-          <a:p>
-            <a:pPr algn="ctr" indent="0" marL="0">
-              <a:buNone/>
-            </a:pPr>
-            <a:r>
-              <a:rPr lang="en-US" sz="1500" b="1" dirty="0">
-                <a:solidFill>
-                  <a:srgbClr val="FFFFFF"/>
-                </a:solidFill>
-                <a:latin typeface="Aptos" pitchFamily="34" charset="0"/>
-                <a:ea typeface="Aptos" pitchFamily="34" charset="-122"/>
-                <a:cs typeface="Aptos" pitchFamily="34" charset="-120"/>
-              </a:rPr>
-              <a:t>Review</a:t>
-            </a:r>
-            <a:endParaRPr lang="en-US" sz="1500" dirty="0"/>
-          </a:p>
-        </p:txBody>
-      </p:sp>
-      <p:sp>
-        <p:nvSpPr>
-          <p:cNvPr id="20" name="Shape 18"/>
-          <p:cNvSpPr/>
-          <p:nvPr/>
-        </p:nvSpPr>
-        <p:spPr>
-          <a:xfrm>
-            <a:off x="8293608" y="4389120"/>
-            <a:ext cx="2157984" cy="0"/>
-          </a:xfrm>
-          <a:prstGeom prst="line">
-            <a:avLst/>
-          </a:prstGeom>
-          <a:noFill/>
-          <a:ln w="25400">
-            <a:solidFill>
-              <a:srgbClr val="8ABBD8"/>
-            </a:solidFill>
-            <a:prstDash val="solid"/>
-          </a:ln>
-        </p:spPr>
-      </p:sp>
-      <p:sp>
-        <p:nvSpPr>
-          <p:cNvPr id="21" name="Text 19"/>
-          <p:cNvSpPr/>
-          <p:nvPr/>
-        </p:nvSpPr>
-        <p:spPr>
-          <a:xfrm>
-            <a:off x="7909560" y="3977640"/>
-            <a:ext cx="2926080" cy="182880"/>
-          </a:xfrm>
-          <a:prstGeom prst="rect">
-            <a:avLst/>
-          </a:prstGeom>
-          <a:noFill/>
-          <a:ln/>
-        </p:spPr>
-        <p:txBody>
-          <a:bodyPr wrap="square" lIns="0" tIns="0" rIns="0" bIns="0" rtlCol="0" anchor="ctr"/>
-          <a:lstStyle/>
-          <a:p>
-            <a:pPr algn="ctr" indent="0" marL="0">
-              <a:buNone/>
-            </a:pPr>
-            <a:r>
-              <a:rPr lang="en-US" sz="1000" dirty="0">
-                <a:solidFill>
-                  <a:srgbClr val="003A63"/>
-                </a:solidFill>
-                <a:latin typeface="Aptos" pitchFamily="34" charset="0"/>
-                <a:ea typeface="Aptos" pitchFamily="34" charset="-122"/>
-                <a:cs typeface="Aptos" pitchFamily="34" charset="-120"/>
-              </a:rPr>
-              <a:t>Dependencies visible</a:t>
-            </a:r>
-            <a:endParaRPr lang="en-US" sz="1000" dirty="0"/>
-          </a:p>
-        </p:txBody>
-      </p:sp>
-      <p:sp>
-        <p:nvSpPr>
-          <p:cNvPr id="22" name="Shape 20"/>
           <p:cNvSpPr/>
           <p:nvPr/>
         </p:nvSpPr>
@@ -16612,7 +14144,7 @@
       </p:sp>
       <p:sp>
         <p:nvSpPr>
-          <p:cNvPr id="23" name="Text 21"/>
+          <p:cNvPr id="17" name="Text 15"/>
           <p:cNvSpPr/>
           <p:nvPr/>
         </p:nvSpPr>
@@ -16651,7 +14183,7 @@
       </p:sp>
       <p:sp>
         <p:nvSpPr>
-          <p:cNvPr id="24" name="Text 22"/>
+          <p:cNvPr id="18" name="Text 16"/>
           <p:cNvSpPr/>
           <p:nvPr/>
         </p:nvSpPr>
@@ -17159,13 +14691,11 @@
             </a:avLst>
           </a:prstGeom>
           <a:solidFill>
-            <a:srgbClr val="FFFFFF">
-              <a:alpha val="88000"/>
-            </a:srgbClr>
+            <a:srgbClr val="FFFFFF"/>
           </a:solidFill>
           <a:ln w="12700">
             <a:solidFill>
-              <a:srgbClr val="D6E8F2"/>
+              <a:srgbClr val="B9D7E6"/>
             </a:solidFill>
             <a:prstDash val="solid"/>
           </a:ln>
@@ -17173,30 +14703,42 @@
       </p:sp>
       <p:sp>
         <p:nvSpPr>
-          <p:cNvPr id="14" name="Shape 12"/>
-          <p:cNvSpPr/>
-          <p:nvPr/>
-        </p:nvSpPr>
-        <p:spPr>
-          <a:xfrm>
-            <a:off x="7927848" y="3319272"/>
-            <a:ext cx="792480" cy="749808"/>
-          </a:xfrm>
-          <a:prstGeom prst="roundRect">
-            <a:avLst>
-              <a:gd name="adj" fmla="val 14634"/>
-            </a:avLst>
-          </a:prstGeom>
-          <a:solidFill>
-            <a:srgbClr val="0068B7"/>
-          </a:solidFill>
-          <a:ln w="12700">
-            <a:solidFill>
-              <a:srgbClr val="0068B7"/>
-            </a:solidFill>
-            <a:prstDash val="solid"/>
-          </a:ln>
-        </p:spPr>
+          <p:cNvPr id="14" name="Text 12"/>
+          <p:cNvSpPr/>
+          <p:nvPr/>
+        </p:nvSpPr>
+        <p:spPr>
+          <a:xfrm>
+            <a:off x="7799832" y="2935224"/>
+            <a:ext cx="3145536" cy="256032"/>
+          </a:xfrm>
+          <a:prstGeom prst="rect">
+            <a:avLst/>
+          </a:prstGeom>
+          <a:noFill/>
+          <a:ln/>
+        </p:spPr>
+        <p:txBody>
+          <a:bodyPr wrap="square" lIns="0" tIns="0" rIns="0" bIns="0" rtlCol="0" anchor="ctr"/>
+          <a:lstStyle/>
+          <a:p>
+            <a:pPr indent="0" marL="0">
+              <a:buNone/>
+            </a:pPr>
+            <a:r>
+              <a:rPr lang="en-US" sz="1300" b="1" dirty="0">
+                <a:solidFill>
+                  <a:srgbClr val="0068B7"/>
+                </a:solidFill>
+                <a:latin typeface="Aptos" pitchFamily="34" charset="0"/>
+                <a:ea typeface="Aptos" pitchFamily="34" charset="-122"/>
+                <a:cs typeface="Aptos" pitchFamily="34" charset="-120"/>
+              </a:rPr>
+              <a:t>Concept checkpoints</a:t>
+            </a:r>
+            <a:endParaRPr lang="en-US" sz="1300" dirty="0"/>
+          </a:p>
+        </p:txBody>
       </p:sp>
       <p:sp>
         <p:nvSpPr>
@@ -17206,240 +14748,53 @@
         </p:nvSpPr>
         <p:spPr>
           <a:xfrm>
-            <a:off x="8001000" y="3511296"/>
-            <a:ext cx="646176" cy="310896"/>
-          </a:xfrm>
-          <a:prstGeom prst="rect">
-            <a:avLst/>
-          </a:prstGeom>
-          <a:noFill/>
-          <a:ln/>
-        </p:spPr>
-        <p:txBody>
-          <a:bodyPr wrap="square" lIns="0" tIns="0" rIns="0" bIns="0" rtlCol="0" anchor="ctr">
+            <a:off x="7818120" y="3300984"/>
+            <a:ext cx="3090672" cy="877824"/>
+          </a:xfrm>
+          <a:prstGeom prst="rect">
+            <a:avLst/>
+          </a:prstGeom>
+          <a:noFill/>
+          <a:ln/>
+        </p:spPr>
+        <p:txBody>
+          <a:bodyPr wrap="square" lIns="254" tIns="254" rIns="254" bIns="254" rtlCol="0" anchor="t">
             <a:normAutofit/>
           </a:bodyPr>
           <a:lstStyle/>
           <a:p>
-            <a:pPr algn="ctr" indent="0" marL="0">
-              <a:buNone/>
-            </a:pPr>
-            <a:r>
-              <a:rPr lang="en-US" sz="1500" b="1" dirty="0">
-                <a:solidFill>
-                  <a:srgbClr val="FFFFFF"/>
-                </a:solidFill>
-                <a:latin typeface="Aptos" pitchFamily="34" charset="0"/>
-                <a:ea typeface="Aptos" pitchFamily="34" charset="-122"/>
-                <a:cs typeface="Aptos" pitchFamily="34" charset="-120"/>
-              </a:rPr>
-              <a:t>Plan</a:t>
-            </a:r>
-            <a:endParaRPr lang="en-US" sz="1500" dirty="0"/>
+            <a:r>
+              <a:rPr lang="en-US" sz="1380" dirty="0">
+                <a:solidFill>
+                  <a:srgbClr val="17364A"/>
+                </a:solidFill>
+                <a:latin typeface="Aptos" pitchFamily="34" charset="0"/>
+                <a:ea typeface="Aptos" pitchFamily="34" charset="-122"/>
+                <a:cs typeface="Aptos" pitchFamily="34" charset="-120"/>
+              </a:rPr>
+              <a:t>Human factors and usability testing help agencies understand how staff actually use.</a:t>
+            </a:r>
+            <a:endParaRPr lang="en-US" sz="1380" dirty="0"/>
+          </a:p>
+          <a:p>
+            <a:r>
+              <a:rPr lang="en-US" sz="1380" dirty="0">
+                <a:solidFill>
+                  <a:srgbClr val="17364A"/>
+                </a:solidFill>
+                <a:latin typeface="Aptos" pitchFamily="34" charset="0"/>
+                <a:ea typeface="Aptos" pitchFamily="34" charset="-122"/>
+                <a:cs typeface="Aptos" pitchFamily="34" charset="-120"/>
+              </a:rPr>
+              <a:t>This module teaches learners to evaluate workflow fit, interface design, alert burden,.</a:t>
+            </a:r>
+            <a:endParaRPr lang="en-US" sz="1380" dirty="0"/>
           </a:p>
         </p:txBody>
       </p:sp>
       <p:sp>
         <p:nvSpPr>
           <p:cNvPr id="16" name="Shape 14"/>
-          <p:cNvSpPr/>
-          <p:nvPr/>
-        </p:nvSpPr>
-        <p:spPr>
-          <a:xfrm>
-            <a:off x="8976360" y="3319272"/>
-            <a:ext cx="792480" cy="749808"/>
-          </a:xfrm>
-          <a:prstGeom prst="roundRect">
-            <a:avLst>
-              <a:gd name="adj" fmla="val 14634"/>
-            </a:avLst>
-          </a:prstGeom>
-          <a:solidFill>
-            <a:srgbClr val="2F8A28"/>
-          </a:solidFill>
-          <a:ln w="12700">
-            <a:solidFill>
-              <a:srgbClr val="2F8A28"/>
-            </a:solidFill>
-            <a:prstDash val="solid"/>
-          </a:ln>
-        </p:spPr>
-      </p:sp>
-      <p:sp>
-        <p:nvSpPr>
-          <p:cNvPr id="17" name="Text 15"/>
-          <p:cNvSpPr/>
-          <p:nvPr/>
-        </p:nvSpPr>
-        <p:spPr>
-          <a:xfrm>
-            <a:off x="9049512" y="3511296"/>
-            <a:ext cx="646176" cy="310896"/>
-          </a:xfrm>
-          <a:prstGeom prst="rect">
-            <a:avLst/>
-          </a:prstGeom>
-          <a:noFill/>
-          <a:ln/>
-        </p:spPr>
-        <p:txBody>
-          <a:bodyPr wrap="square" lIns="0" tIns="0" rIns="0" bIns="0" rtlCol="0" anchor="ctr">
-            <a:normAutofit/>
-          </a:bodyPr>
-          <a:lstStyle/>
-          <a:p>
-            <a:pPr algn="ctr" indent="0" marL="0">
-              <a:buNone/>
-            </a:pPr>
-            <a:r>
-              <a:rPr lang="en-US" sz="1500" b="1" dirty="0">
-                <a:solidFill>
-                  <a:srgbClr val="FFFFFF"/>
-                </a:solidFill>
-                <a:latin typeface="Aptos" pitchFamily="34" charset="0"/>
-                <a:ea typeface="Aptos" pitchFamily="34" charset="-122"/>
-                <a:cs typeface="Aptos" pitchFamily="34" charset="-120"/>
-              </a:rPr>
-              <a:t>Do</a:t>
-            </a:r>
-            <a:endParaRPr lang="en-US" sz="1500" dirty="0"/>
-          </a:p>
-        </p:txBody>
-      </p:sp>
-      <p:sp>
-        <p:nvSpPr>
-          <p:cNvPr id="18" name="Shape 16"/>
-          <p:cNvSpPr/>
-          <p:nvPr/>
-        </p:nvSpPr>
-        <p:spPr>
-          <a:xfrm>
-            <a:off x="10024872" y="3319272"/>
-            <a:ext cx="792480" cy="749808"/>
-          </a:xfrm>
-          <a:prstGeom prst="roundRect">
-            <a:avLst>
-              <a:gd name="adj" fmla="val 14634"/>
-            </a:avLst>
-          </a:prstGeom>
-          <a:solidFill>
-            <a:srgbClr val="D69A2D"/>
-          </a:solidFill>
-          <a:ln w="12700">
-            <a:solidFill>
-              <a:srgbClr val="D69A2D"/>
-            </a:solidFill>
-            <a:prstDash val="solid"/>
-          </a:ln>
-        </p:spPr>
-      </p:sp>
-      <p:sp>
-        <p:nvSpPr>
-          <p:cNvPr id="19" name="Text 17"/>
-          <p:cNvSpPr/>
-          <p:nvPr/>
-        </p:nvSpPr>
-        <p:spPr>
-          <a:xfrm>
-            <a:off x="10098024" y="3511296"/>
-            <a:ext cx="646176" cy="310896"/>
-          </a:xfrm>
-          <a:prstGeom prst="rect">
-            <a:avLst/>
-          </a:prstGeom>
-          <a:noFill/>
-          <a:ln/>
-        </p:spPr>
-        <p:txBody>
-          <a:bodyPr wrap="square" lIns="0" tIns="0" rIns="0" bIns="0" rtlCol="0" anchor="ctr">
-            <a:normAutofit/>
-          </a:bodyPr>
-          <a:lstStyle/>
-          <a:p>
-            <a:pPr algn="ctr" indent="0" marL="0">
-              <a:buNone/>
-            </a:pPr>
-            <a:r>
-              <a:rPr lang="en-US" sz="1500" b="1" dirty="0">
-                <a:solidFill>
-                  <a:srgbClr val="FFFFFF"/>
-                </a:solidFill>
-                <a:latin typeface="Aptos" pitchFamily="34" charset="0"/>
-                <a:ea typeface="Aptos" pitchFamily="34" charset="-122"/>
-                <a:cs typeface="Aptos" pitchFamily="34" charset="-120"/>
-              </a:rPr>
-              <a:t>Review</a:t>
-            </a:r>
-            <a:endParaRPr lang="en-US" sz="1500" dirty="0"/>
-          </a:p>
-        </p:txBody>
-      </p:sp>
-      <p:sp>
-        <p:nvSpPr>
-          <p:cNvPr id="20" name="Shape 18"/>
-          <p:cNvSpPr/>
-          <p:nvPr/>
-        </p:nvSpPr>
-        <p:spPr>
-          <a:xfrm>
-            <a:off x="8293608" y="4389120"/>
-            <a:ext cx="2157984" cy="0"/>
-          </a:xfrm>
-          <a:prstGeom prst="line">
-            <a:avLst/>
-          </a:prstGeom>
-          <a:noFill/>
-          <a:ln w="25400">
-            <a:solidFill>
-              <a:srgbClr val="8ABBD8"/>
-            </a:solidFill>
-            <a:prstDash val="solid"/>
-          </a:ln>
-        </p:spPr>
-      </p:sp>
-      <p:sp>
-        <p:nvSpPr>
-          <p:cNvPr id="21" name="Text 19"/>
-          <p:cNvSpPr/>
-          <p:nvPr/>
-        </p:nvSpPr>
-        <p:spPr>
-          <a:xfrm>
-            <a:off x="7909560" y="3977640"/>
-            <a:ext cx="2926080" cy="182880"/>
-          </a:xfrm>
-          <a:prstGeom prst="rect">
-            <a:avLst/>
-          </a:prstGeom>
-          <a:noFill/>
-          <a:ln/>
-        </p:spPr>
-        <p:txBody>
-          <a:bodyPr wrap="square" lIns="0" tIns="0" rIns="0" bIns="0" rtlCol="0" anchor="ctr"/>
-          <a:lstStyle/>
-          <a:p>
-            <a:pPr algn="ctr" indent="0" marL="0">
-              <a:buNone/>
-            </a:pPr>
-            <a:r>
-              <a:rPr lang="en-US" sz="1000" dirty="0">
-                <a:solidFill>
-                  <a:srgbClr val="003A63"/>
-                </a:solidFill>
-                <a:latin typeface="Aptos" pitchFamily="34" charset="0"/>
-                <a:ea typeface="Aptos" pitchFamily="34" charset="-122"/>
-                <a:cs typeface="Aptos" pitchFamily="34" charset="-120"/>
-              </a:rPr>
-              <a:t>Dependencies visible</a:t>
-            </a:r>
-            <a:endParaRPr lang="en-US" sz="1000" dirty="0"/>
-          </a:p>
-        </p:txBody>
-      </p:sp>
-      <p:sp>
-        <p:nvSpPr>
-          <p:cNvPr id="22" name="Shape 20"/>
           <p:cNvSpPr/>
           <p:nvPr/>
         </p:nvSpPr>
@@ -17466,7 +14821,7 @@
       </p:sp>
       <p:sp>
         <p:nvSpPr>
-          <p:cNvPr id="23" name="Text 21"/>
+          <p:cNvPr id="17" name="Text 15"/>
           <p:cNvSpPr/>
           <p:nvPr/>
         </p:nvSpPr>
@@ -17505,7 +14860,7 @@
       </p:sp>
       <p:sp>
         <p:nvSpPr>
-          <p:cNvPr id="24" name="Text 22"/>
+          <p:cNvPr id="18" name="Text 16"/>
           <p:cNvSpPr/>
           <p:nvPr/>
         </p:nvSpPr>
@@ -18013,13 +15368,11 @@
             </a:avLst>
           </a:prstGeom>
           <a:solidFill>
-            <a:srgbClr val="FFFFFF">
-              <a:alpha val="88000"/>
-            </a:srgbClr>
+            <a:srgbClr val="FFFFFF"/>
           </a:solidFill>
           <a:ln w="12700">
             <a:solidFill>
-              <a:srgbClr val="D6E8F2"/>
+              <a:srgbClr val="B9D7E6"/>
             </a:solidFill>
             <a:prstDash val="solid"/>
           </a:ln>
@@ -18027,30 +15380,42 @@
       </p:sp>
       <p:sp>
         <p:nvSpPr>
-          <p:cNvPr id="14" name="Shape 12"/>
-          <p:cNvSpPr/>
-          <p:nvPr/>
-        </p:nvSpPr>
-        <p:spPr>
-          <a:xfrm>
-            <a:off x="7927848" y="3319272"/>
-            <a:ext cx="792480" cy="749808"/>
-          </a:xfrm>
-          <a:prstGeom prst="roundRect">
-            <a:avLst>
-              <a:gd name="adj" fmla="val 14634"/>
-            </a:avLst>
-          </a:prstGeom>
-          <a:solidFill>
-            <a:srgbClr val="0068B7"/>
-          </a:solidFill>
-          <a:ln w="12700">
-            <a:solidFill>
-              <a:srgbClr val="0068B7"/>
-            </a:solidFill>
-            <a:prstDash val="solid"/>
-          </a:ln>
-        </p:spPr>
+          <p:cNvPr id="14" name="Text 12"/>
+          <p:cNvSpPr/>
+          <p:nvPr/>
+        </p:nvSpPr>
+        <p:spPr>
+          <a:xfrm>
+            <a:off x="7799832" y="2935224"/>
+            <a:ext cx="3145536" cy="256032"/>
+          </a:xfrm>
+          <a:prstGeom prst="rect">
+            <a:avLst/>
+          </a:prstGeom>
+          <a:noFill/>
+          <a:ln/>
+        </p:spPr>
+        <p:txBody>
+          <a:bodyPr wrap="square" lIns="0" tIns="0" rIns="0" bIns="0" rtlCol="0" anchor="ctr"/>
+          <a:lstStyle/>
+          <a:p>
+            <a:pPr indent="0" marL="0">
+              <a:buNone/>
+            </a:pPr>
+            <a:r>
+              <a:rPr lang="en-US" sz="1300" b="1" dirty="0">
+                <a:solidFill>
+                  <a:srgbClr val="0068B7"/>
+                </a:solidFill>
+                <a:latin typeface="Aptos" pitchFamily="34" charset="0"/>
+                <a:ea typeface="Aptos" pitchFamily="34" charset="-122"/>
+                <a:cs typeface="Aptos" pitchFamily="34" charset="-120"/>
+              </a:rPr>
+              <a:t>Concept checkpoints</a:t>
+            </a:r>
+            <a:endParaRPr lang="en-US" sz="1300" dirty="0"/>
+          </a:p>
+        </p:txBody>
       </p:sp>
       <p:sp>
         <p:nvSpPr>
@@ -18060,240 +15425,67 @@
         </p:nvSpPr>
         <p:spPr>
           <a:xfrm>
-            <a:off x="8001000" y="3511296"/>
-            <a:ext cx="646176" cy="310896"/>
-          </a:xfrm>
-          <a:prstGeom prst="rect">
-            <a:avLst/>
-          </a:prstGeom>
-          <a:noFill/>
-          <a:ln/>
-        </p:spPr>
-        <p:txBody>
-          <a:bodyPr wrap="square" lIns="0" tIns="0" rIns="0" bIns="0" rtlCol="0" anchor="ctr">
+            <a:off x="7818120" y="3300984"/>
+            <a:ext cx="3090672" cy="877824"/>
+          </a:xfrm>
+          <a:prstGeom prst="rect">
+            <a:avLst/>
+          </a:prstGeom>
+          <a:noFill/>
+          <a:ln/>
+        </p:spPr>
+        <p:txBody>
+          <a:bodyPr wrap="square" lIns="254" tIns="254" rIns="254" bIns="254" rtlCol="0" anchor="t">
             <a:normAutofit/>
           </a:bodyPr>
           <a:lstStyle/>
           <a:p>
-            <a:pPr algn="ctr" indent="0" marL="0">
-              <a:buNone/>
-            </a:pPr>
-            <a:r>
-              <a:rPr lang="en-US" sz="1500" b="1" dirty="0">
-                <a:solidFill>
-                  <a:srgbClr val="FFFFFF"/>
-                </a:solidFill>
-                <a:latin typeface="Aptos" pitchFamily="34" charset="0"/>
-                <a:ea typeface="Aptos" pitchFamily="34" charset="-122"/>
-                <a:cs typeface="Aptos" pitchFamily="34" charset="-120"/>
-              </a:rPr>
-              <a:t>Plan</a:t>
-            </a:r>
-            <a:endParaRPr lang="en-US" sz="1500" dirty="0"/>
+            <a:r>
+              <a:rPr lang="en-US" sz="1380" dirty="0">
+                <a:solidFill>
+                  <a:srgbClr val="17364A"/>
+                </a:solidFill>
+                <a:latin typeface="Aptos" pitchFamily="34" charset="0"/>
+                <a:ea typeface="Aptos" pitchFamily="34" charset="-122"/>
+                <a:cs typeface="Aptos" pitchFamily="34" charset="-120"/>
+              </a:rPr>
+              <a:t>Human Factors, Workflow Integration, and Usability Testing matters because AI systems are.</a:t>
+            </a:r>
+            <a:endParaRPr lang="en-US" sz="1380" dirty="0"/>
+          </a:p>
+          <a:p>
+            <a:r>
+              <a:rPr lang="en-US" sz="1380" dirty="0">
+                <a:solidFill>
+                  <a:srgbClr val="17364A"/>
+                </a:solidFill>
+                <a:latin typeface="Aptos" pitchFamily="34" charset="0"/>
+                <a:ea typeface="Aptos" pitchFamily="34" charset="-122"/>
+                <a:cs typeface="Aptos" pitchFamily="34" charset="-120"/>
+              </a:rPr>
+              <a:t>The topic also affects accountability.</a:t>
+            </a:r>
+            <a:endParaRPr lang="en-US" sz="1380" dirty="0"/>
+          </a:p>
+          <a:p>
+            <a:r>
+              <a:rPr lang="en-US" sz="1380" dirty="0">
+                <a:solidFill>
+                  <a:srgbClr val="17364A"/>
+                </a:solidFill>
+                <a:latin typeface="Aptos" pitchFamily="34" charset="0"/>
+                <a:ea typeface="Aptos" pitchFamily="34" charset="-122"/>
+                <a:cs typeface="Aptos" pitchFamily="34" charset="-120"/>
+              </a:rPr>
+              <a:t>Public health agencies must be able to explain how data are used, why a tool was approved,.</a:t>
+            </a:r>
+            <a:endParaRPr lang="en-US" sz="1380" dirty="0"/>
           </a:p>
         </p:txBody>
       </p:sp>
       <p:sp>
         <p:nvSpPr>
           <p:cNvPr id="16" name="Shape 14"/>
-          <p:cNvSpPr/>
-          <p:nvPr/>
-        </p:nvSpPr>
-        <p:spPr>
-          <a:xfrm>
-            <a:off x="8976360" y="3319272"/>
-            <a:ext cx="792480" cy="749808"/>
-          </a:xfrm>
-          <a:prstGeom prst="roundRect">
-            <a:avLst>
-              <a:gd name="adj" fmla="val 14634"/>
-            </a:avLst>
-          </a:prstGeom>
-          <a:solidFill>
-            <a:srgbClr val="2F8A28"/>
-          </a:solidFill>
-          <a:ln w="12700">
-            <a:solidFill>
-              <a:srgbClr val="2F8A28"/>
-            </a:solidFill>
-            <a:prstDash val="solid"/>
-          </a:ln>
-        </p:spPr>
-      </p:sp>
-      <p:sp>
-        <p:nvSpPr>
-          <p:cNvPr id="17" name="Text 15"/>
-          <p:cNvSpPr/>
-          <p:nvPr/>
-        </p:nvSpPr>
-        <p:spPr>
-          <a:xfrm>
-            <a:off x="9049512" y="3511296"/>
-            <a:ext cx="646176" cy="310896"/>
-          </a:xfrm>
-          <a:prstGeom prst="rect">
-            <a:avLst/>
-          </a:prstGeom>
-          <a:noFill/>
-          <a:ln/>
-        </p:spPr>
-        <p:txBody>
-          <a:bodyPr wrap="square" lIns="0" tIns="0" rIns="0" bIns="0" rtlCol="0" anchor="ctr">
-            <a:normAutofit/>
-          </a:bodyPr>
-          <a:lstStyle/>
-          <a:p>
-            <a:pPr algn="ctr" indent="0" marL="0">
-              <a:buNone/>
-            </a:pPr>
-            <a:r>
-              <a:rPr lang="en-US" sz="1500" b="1" dirty="0">
-                <a:solidFill>
-                  <a:srgbClr val="FFFFFF"/>
-                </a:solidFill>
-                <a:latin typeface="Aptos" pitchFamily="34" charset="0"/>
-                <a:ea typeface="Aptos" pitchFamily="34" charset="-122"/>
-                <a:cs typeface="Aptos" pitchFamily="34" charset="-120"/>
-              </a:rPr>
-              <a:t>Do</a:t>
-            </a:r>
-            <a:endParaRPr lang="en-US" sz="1500" dirty="0"/>
-          </a:p>
-        </p:txBody>
-      </p:sp>
-      <p:sp>
-        <p:nvSpPr>
-          <p:cNvPr id="18" name="Shape 16"/>
-          <p:cNvSpPr/>
-          <p:nvPr/>
-        </p:nvSpPr>
-        <p:spPr>
-          <a:xfrm>
-            <a:off x="10024872" y="3319272"/>
-            <a:ext cx="792480" cy="749808"/>
-          </a:xfrm>
-          <a:prstGeom prst="roundRect">
-            <a:avLst>
-              <a:gd name="adj" fmla="val 14634"/>
-            </a:avLst>
-          </a:prstGeom>
-          <a:solidFill>
-            <a:srgbClr val="D69A2D"/>
-          </a:solidFill>
-          <a:ln w="12700">
-            <a:solidFill>
-              <a:srgbClr val="D69A2D"/>
-            </a:solidFill>
-            <a:prstDash val="solid"/>
-          </a:ln>
-        </p:spPr>
-      </p:sp>
-      <p:sp>
-        <p:nvSpPr>
-          <p:cNvPr id="19" name="Text 17"/>
-          <p:cNvSpPr/>
-          <p:nvPr/>
-        </p:nvSpPr>
-        <p:spPr>
-          <a:xfrm>
-            <a:off x="10098024" y="3511296"/>
-            <a:ext cx="646176" cy="310896"/>
-          </a:xfrm>
-          <a:prstGeom prst="rect">
-            <a:avLst/>
-          </a:prstGeom>
-          <a:noFill/>
-          <a:ln/>
-        </p:spPr>
-        <p:txBody>
-          <a:bodyPr wrap="square" lIns="0" tIns="0" rIns="0" bIns="0" rtlCol="0" anchor="ctr">
-            <a:normAutofit/>
-          </a:bodyPr>
-          <a:lstStyle/>
-          <a:p>
-            <a:pPr algn="ctr" indent="0" marL="0">
-              <a:buNone/>
-            </a:pPr>
-            <a:r>
-              <a:rPr lang="en-US" sz="1500" b="1" dirty="0">
-                <a:solidFill>
-                  <a:srgbClr val="FFFFFF"/>
-                </a:solidFill>
-                <a:latin typeface="Aptos" pitchFamily="34" charset="0"/>
-                <a:ea typeface="Aptos" pitchFamily="34" charset="-122"/>
-                <a:cs typeface="Aptos" pitchFamily="34" charset="-120"/>
-              </a:rPr>
-              <a:t>Review</a:t>
-            </a:r>
-            <a:endParaRPr lang="en-US" sz="1500" dirty="0"/>
-          </a:p>
-        </p:txBody>
-      </p:sp>
-      <p:sp>
-        <p:nvSpPr>
-          <p:cNvPr id="20" name="Shape 18"/>
-          <p:cNvSpPr/>
-          <p:nvPr/>
-        </p:nvSpPr>
-        <p:spPr>
-          <a:xfrm>
-            <a:off x="8293608" y="4389120"/>
-            <a:ext cx="2157984" cy="0"/>
-          </a:xfrm>
-          <a:prstGeom prst="line">
-            <a:avLst/>
-          </a:prstGeom>
-          <a:noFill/>
-          <a:ln w="25400">
-            <a:solidFill>
-              <a:srgbClr val="8ABBD8"/>
-            </a:solidFill>
-            <a:prstDash val="solid"/>
-          </a:ln>
-        </p:spPr>
-      </p:sp>
-      <p:sp>
-        <p:nvSpPr>
-          <p:cNvPr id="21" name="Text 19"/>
-          <p:cNvSpPr/>
-          <p:nvPr/>
-        </p:nvSpPr>
-        <p:spPr>
-          <a:xfrm>
-            <a:off x="7909560" y="3977640"/>
-            <a:ext cx="2926080" cy="182880"/>
-          </a:xfrm>
-          <a:prstGeom prst="rect">
-            <a:avLst/>
-          </a:prstGeom>
-          <a:noFill/>
-          <a:ln/>
-        </p:spPr>
-        <p:txBody>
-          <a:bodyPr wrap="square" lIns="0" tIns="0" rIns="0" bIns="0" rtlCol="0" anchor="ctr"/>
-          <a:lstStyle/>
-          <a:p>
-            <a:pPr algn="ctr" indent="0" marL="0">
-              <a:buNone/>
-            </a:pPr>
-            <a:r>
-              <a:rPr lang="en-US" sz="1000" dirty="0">
-                <a:solidFill>
-                  <a:srgbClr val="003A63"/>
-                </a:solidFill>
-                <a:latin typeface="Aptos" pitchFamily="34" charset="0"/>
-                <a:ea typeface="Aptos" pitchFamily="34" charset="-122"/>
-                <a:cs typeface="Aptos" pitchFamily="34" charset="-120"/>
-              </a:rPr>
-              <a:t>Dependencies visible</a:t>
-            </a:r>
-            <a:endParaRPr lang="en-US" sz="1000" dirty="0"/>
-          </a:p>
-        </p:txBody>
-      </p:sp>
-      <p:sp>
-        <p:nvSpPr>
-          <p:cNvPr id="22" name="Shape 20"/>
           <p:cNvSpPr/>
           <p:nvPr/>
         </p:nvSpPr>
@@ -18320,7 +15512,7 @@
       </p:sp>
       <p:sp>
         <p:nvSpPr>
-          <p:cNvPr id="23" name="Text 21"/>
+          <p:cNvPr id="17" name="Text 15"/>
           <p:cNvSpPr/>
           <p:nvPr/>
         </p:nvSpPr>
@@ -18359,7 +15551,7 @@
       </p:sp>
       <p:sp>
         <p:nvSpPr>
-          <p:cNvPr id="24" name="Text 22"/>
+          <p:cNvPr id="18" name="Text 16"/>
           <p:cNvSpPr/>
           <p:nvPr/>
         </p:nvSpPr>
@@ -18867,13 +16059,11 @@
             </a:avLst>
           </a:prstGeom>
           <a:solidFill>
-            <a:srgbClr val="FFFFFF">
-              <a:alpha val="88000"/>
-            </a:srgbClr>
+            <a:srgbClr val="FFFFFF"/>
           </a:solidFill>
           <a:ln w="12700">
             <a:solidFill>
-              <a:srgbClr val="D6E8F2"/>
+              <a:srgbClr val="B9D7E6"/>
             </a:solidFill>
             <a:prstDash val="solid"/>
           </a:ln>
@@ -18881,30 +16071,42 @@
       </p:sp>
       <p:sp>
         <p:nvSpPr>
-          <p:cNvPr id="14" name="Shape 12"/>
-          <p:cNvSpPr/>
-          <p:nvPr/>
-        </p:nvSpPr>
-        <p:spPr>
-          <a:xfrm>
-            <a:off x="7927848" y="3319272"/>
-            <a:ext cx="792480" cy="749808"/>
-          </a:xfrm>
-          <a:prstGeom prst="roundRect">
-            <a:avLst>
-              <a:gd name="adj" fmla="val 14634"/>
-            </a:avLst>
-          </a:prstGeom>
-          <a:solidFill>
-            <a:srgbClr val="0068B7"/>
-          </a:solidFill>
-          <a:ln w="12700">
-            <a:solidFill>
-              <a:srgbClr val="0068B7"/>
-            </a:solidFill>
-            <a:prstDash val="solid"/>
-          </a:ln>
-        </p:spPr>
+          <p:cNvPr id="14" name="Text 12"/>
+          <p:cNvSpPr/>
+          <p:nvPr/>
+        </p:nvSpPr>
+        <p:spPr>
+          <a:xfrm>
+            <a:off x="7799832" y="2935224"/>
+            <a:ext cx="3145536" cy="256032"/>
+          </a:xfrm>
+          <a:prstGeom prst="rect">
+            <a:avLst/>
+          </a:prstGeom>
+          <a:noFill/>
+          <a:ln/>
+        </p:spPr>
+        <p:txBody>
+          <a:bodyPr wrap="square" lIns="0" tIns="0" rIns="0" bIns="0" rtlCol="0" anchor="ctr"/>
+          <a:lstStyle/>
+          <a:p>
+            <a:pPr indent="0" marL="0">
+              <a:buNone/>
+            </a:pPr>
+            <a:r>
+              <a:rPr lang="en-US" sz="1300" b="1" dirty="0">
+                <a:solidFill>
+                  <a:srgbClr val="0068B7"/>
+                </a:solidFill>
+                <a:latin typeface="Aptos" pitchFamily="34" charset="0"/>
+                <a:ea typeface="Aptos" pitchFamily="34" charset="-122"/>
+                <a:cs typeface="Aptos" pitchFamily="34" charset="-120"/>
+              </a:rPr>
+              <a:t>Concept checkpoints</a:t>
+            </a:r>
+            <a:endParaRPr lang="en-US" sz="1300" dirty="0"/>
+          </a:p>
+        </p:txBody>
       </p:sp>
       <p:sp>
         <p:nvSpPr>
@@ -18914,240 +16116,67 @@
         </p:nvSpPr>
         <p:spPr>
           <a:xfrm>
-            <a:off x="8001000" y="3511296"/>
-            <a:ext cx="646176" cy="310896"/>
-          </a:xfrm>
-          <a:prstGeom prst="rect">
-            <a:avLst/>
-          </a:prstGeom>
-          <a:noFill/>
-          <a:ln/>
-        </p:spPr>
-        <p:txBody>
-          <a:bodyPr wrap="square" lIns="0" tIns="0" rIns="0" bIns="0" rtlCol="0" anchor="ctr">
+            <a:off x="7818120" y="3300984"/>
+            <a:ext cx="3090672" cy="877824"/>
+          </a:xfrm>
+          <a:prstGeom prst="rect">
+            <a:avLst/>
+          </a:prstGeom>
+          <a:noFill/>
+          <a:ln/>
+        </p:spPr>
+        <p:txBody>
+          <a:bodyPr wrap="square" lIns="254" tIns="254" rIns="254" bIns="254" rtlCol="0" anchor="t">
             <a:normAutofit/>
           </a:bodyPr>
           <a:lstStyle/>
           <a:p>
-            <a:pPr algn="ctr" indent="0" marL="0">
-              <a:buNone/>
-            </a:pPr>
-            <a:r>
-              <a:rPr lang="en-US" sz="1500" b="1" dirty="0">
-                <a:solidFill>
-                  <a:srgbClr val="FFFFFF"/>
-                </a:solidFill>
-                <a:latin typeface="Aptos" pitchFamily="34" charset="0"/>
-                <a:ea typeface="Aptos" pitchFamily="34" charset="-122"/>
-                <a:cs typeface="Aptos" pitchFamily="34" charset="-120"/>
-              </a:rPr>
-              <a:t>Plan</a:t>
-            </a:r>
-            <a:endParaRPr lang="en-US" sz="1500" dirty="0"/>
+            <a:r>
+              <a:rPr lang="en-US" sz="1380" dirty="0">
+                <a:solidFill>
+                  <a:srgbClr val="17364A"/>
+                </a:solidFill>
+                <a:latin typeface="Aptos" pitchFamily="34" charset="0"/>
+                <a:ea typeface="Aptos" pitchFamily="34" charset="-122"/>
+                <a:cs typeface="Aptos" pitchFamily="34" charset="-120"/>
+              </a:rPr>
+              <a:t>Human factors is the discipline of designing systems around human abilities, limits,.</a:t>
+            </a:r>
+            <a:endParaRPr lang="en-US" sz="1380" dirty="0"/>
+          </a:p>
+          <a:p>
+            <a:r>
+              <a:rPr lang="en-US" sz="1380" dirty="0">
+                <a:solidFill>
+                  <a:srgbClr val="17364A"/>
+                </a:solidFill>
+                <a:latin typeface="Aptos" pitchFamily="34" charset="0"/>
+                <a:ea typeface="Aptos" pitchFamily="34" charset="-122"/>
+                <a:cs typeface="Aptos" pitchFamily="34" charset="-120"/>
+              </a:rPr>
+              <a:t>In AI-supported public health work, human factors help agencies ensure that AI outputs are.</a:t>
+            </a:r>
+            <a:endParaRPr lang="en-US" sz="1380" dirty="0"/>
+          </a:p>
+          <a:p>
+            <a:r>
+              <a:rPr lang="en-US" sz="1380" dirty="0">
+                <a:solidFill>
+                  <a:srgbClr val="17364A"/>
+                </a:solidFill>
+                <a:latin typeface="Aptos" pitchFamily="34" charset="0"/>
+                <a:ea typeface="Aptos" pitchFamily="34" charset="-122"/>
+                <a:cs typeface="Aptos" pitchFamily="34" charset="-120"/>
+              </a:rPr>
+              <a:t>It can reveal confusion, workarounds, over-trust, alert fatigue, documentation burden, or.</a:t>
+            </a:r>
+            <a:endParaRPr lang="en-US" sz="1380" dirty="0"/>
           </a:p>
         </p:txBody>
       </p:sp>
       <p:sp>
         <p:nvSpPr>
           <p:cNvPr id="16" name="Shape 14"/>
-          <p:cNvSpPr/>
-          <p:nvPr/>
-        </p:nvSpPr>
-        <p:spPr>
-          <a:xfrm>
-            <a:off x="8976360" y="3319272"/>
-            <a:ext cx="792480" cy="749808"/>
-          </a:xfrm>
-          <a:prstGeom prst="roundRect">
-            <a:avLst>
-              <a:gd name="adj" fmla="val 14634"/>
-            </a:avLst>
-          </a:prstGeom>
-          <a:solidFill>
-            <a:srgbClr val="2F8A28"/>
-          </a:solidFill>
-          <a:ln w="12700">
-            <a:solidFill>
-              <a:srgbClr val="2F8A28"/>
-            </a:solidFill>
-            <a:prstDash val="solid"/>
-          </a:ln>
-        </p:spPr>
-      </p:sp>
-      <p:sp>
-        <p:nvSpPr>
-          <p:cNvPr id="17" name="Text 15"/>
-          <p:cNvSpPr/>
-          <p:nvPr/>
-        </p:nvSpPr>
-        <p:spPr>
-          <a:xfrm>
-            <a:off x="9049512" y="3511296"/>
-            <a:ext cx="646176" cy="310896"/>
-          </a:xfrm>
-          <a:prstGeom prst="rect">
-            <a:avLst/>
-          </a:prstGeom>
-          <a:noFill/>
-          <a:ln/>
-        </p:spPr>
-        <p:txBody>
-          <a:bodyPr wrap="square" lIns="0" tIns="0" rIns="0" bIns="0" rtlCol="0" anchor="ctr">
-            <a:normAutofit/>
-          </a:bodyPr>
-          <a:lstStyle/>
-          <a:p>
-            <a:pPr algn="ctr" indent="0" marL="0">
-              <a:buNone/>
-            </a:pPr>
-            <a:r>
-              <a:rPr lang="en-US" sz="1500" b="1" dirty="0">
-                <a:solidFill>
-                  <a:srgbClr val="FFFFFF"/>
-                </a:solidFill>
-                <a:latin typeface="Aptos" pitchFamily="34" charset="0"/>
-                <a:ea typeface="Aptos" pitchFamily="34" charset="-122"/>
-                <a:cs typeface="Aptos" pitchFamily="34" charset="-120"/>
-              </a:rPr>
-              <a:t>Do</a:t>
-            </a:r>
-            <a:endParaRPr lang="en-US" sz="1500" dirty="0"/>
-          </a:p>
-        </p:txBody>
-      </p:sp>
-      <p:sp>
-        <p:nvSpPr>
-          <p:cNvPr id="18" name="Shape 16"/>
-          <p:cNvSpPr/>
-          <p:nvPr/>
-        </p:nvSpPr>
-        <p:spPr>
-          <a:xfrm>
-            <a:off x="10024872" y="3319272"/>
-            <a:ext cx="792480" cy="749808"/>
-          </a:xfrm>
-          <a:prstGeom prst="roundRect">
-            <a:avLst>
-              <a:gd name="adj" fmla="val 14634"/>
-            </a:avLst>
-          </a:prstGeom>
-          <a:solidFill>
-            <a:srgbClr val="D69A2D"/>
-          </a:solidFill>
-          <a:ln w="12700">
-            <a:solidFill>
-              <a:srgbClr val="D69A2D"/>
-            </a:solidFill>
-            <a:prstDash val="solid"/>
-          </a:ln>
-        </p:spPr>
-      </p:sp>
-      <p:sp>
-        <p:nvSpPr>
-          <p:cNvPr id="19" name="Text 17"/>
-          <p:cNvSpPr/>
-          <p:nvPr/>
-        </p:nvSpPr>
-        <p:spPr>
-          <a:xfrm>
-            <a:off x="10098024" y="3511296"/>
-            <a:ext cx="646176" cy="310896"/>
-          </a:xfrm>
-          <a:prstGeom prst="rect">
-            <a:avLst/>
-          </a:prstGeom>
-          <a:noFill/>
-          <a:ln/>
-        </p:spPr>
-        <p:txBody>
-          <a:bodyPr wrap="square" lIns="0" tIns="0" rIns="0" bIns="0" rtlCol="0" anchor="ctr">
-            <a:normAutofit/>
-          </a:bodyPr>
-          <a:lstStyle/>
-          <a:p>
-            <a:pPr algn="ctr" indent="0" marL="0">
-              <a:buNone/>
-            </a:pPr>
-            <a:r>
-              <a:rPr lang="en-US" sz="1500" b="1" dirty="0">
-                <a:solidFill>
-                  <a:srgbClr val="FFFFFF"/>
-                </a:solidFill>
-                <a:latin typeface="Aptos" pitchFamily="34" charset="0"/>
-                <a:ea typeface="Aptos" pitchFamily="34" charset="-122"/>
-                <a:cs typeface="Aptos" pitchFamily="34" charset="-120"/>
-              </a:rPr>
-              <a:t>Review</a:t>
-            </a:r>
-            <a:endParaRPr lang="en-US" sz="1500" dirty="0"/>
-          </a:p>
-        </p:txBody>
-      </p:sp>
-      <p:sp>
-        <p:nvSpPr>
-          <p:cNvPr id="20" name="Shape 18"/>
-          <p:cNvSpPr/>
-          <p:nvPr/>
-        </p:nvSpPr>
-        <p:spPr>
-          <a:xfrm>
-            <a:off x="8293608" y="4389120"/>
-            <a:ext cx="2157984" cy="0"/>
-          </a:xfrm>
-          <a:prstGeom prst="line">
-            <a:avLst/>
-          </a:prstGeom>
-          <a:noFill/>
-          <a:ln w="25400">
-            <a:solidFill>
-              <a:srgbClr val="8ABBD8"/>
-            </a:solidFill>
-            <a:prstDash val="solid"/>
-          </a:ln>
-        </p:spPr>
-      </p:sp>
-      <p:sp>
-        <p:nvSpPr>
-          <p:cNvPr id="21" name="Text 19"/>
-          <p:cNvSpPr/>
-          <p:nvPr/>
-        </p:nvSpPr>
-        <p:spPr>
-          <a:xfrm>
-            <a:off x="7909560" y="3977640"/>
-            <a:ext cx="2926080" cy="182880"/>
-          </a:xfrm>
-          <a:prstGeom prst="rect">
-            <a:avLst/>
-          </a:prstGeom>
-          <a:noFill/>
-          <a:ln/>
-        </p:spPr>
-        <p:txBody>
-          <a:bodyPr wrap="square" lIns="0" tIns="0" rIns="0" bIns="0" rtlCol="0" anchor="ctr"/>
-          <a:lstStyle/>
-          <a:p>
-            <a:pPr algn="ctr" indent="0" marL="0">
-              <a:buNone/>
-            </a:pPr>
-            <a:r>
-              <a:rPr lang="en-US" sz="1000" dirty="0">
-                <a:solidFill>
-                  <a:srgbClr val="003A63"/>
-                </a:solidFill>
-                <a:latin typeface="Aptos" pitchFamily="34" charset="0"/>
-                <a:ea typeface="Aptos" pitchFamily="34" charset="-122"/>
-                <a:cs typeface="Aptos" pitchFamily="34" charset="-120"/>
-              </a:rPr>
-              <a:t>Dependencies visible</a:t>
-            </a:r>
-            <a:endParaRPr lang="en-US" sz="1000" dirty="0"/>
-          </a:p>
-        </p:txBody>
-      </p:sp>
-      <p:sp>
-        <p:nvSpPr>
-          <p:cNvPr id="22" name="Shape 20"/>
           <p:cNvSpPr/>
           <p:nvPr/>
         </p:nvSpPr>
@@ -19174,7 +16203,7 @@
       </p:sp>
       <p:sp>
         <p:nvSpPr>
-          <p:cNvPr id="23" name="Text 21"/>
+          <p:cNvPr id="17" name="Text 15"/>
           <p:cNvSpPr/>
           <p:nvPr/>
         </p:nvSpPr>
@@ -19213,7 +16242,7 @@
       </p:sp>
       <p:sp>
         <p:nvSpPr>
-          <p:cNvPr id="24" name="Text 22"/>
+          <p:cNvPr id="18" name="Text 16"/>
           <p:cNvSpPr/>
           <p:nvPr/>
         </p:nvSpPr>

--- a/downloads/presentations/modules/ops-220.pptx
+++ b/downloads/presentations/modules/ops-220.pptx
@@ -3255,49 +3255,58 @@
           <a:ln/>
         </p:spPr>
         <p:txBody>
-          <a:bodyPr wrap="square" lIns="635" tIns="635" rIns="635" bIns="635" rtlCol="0" anchor="t">
+          <a:bodyPr wrap="square" lIns="1016" tIns="1016" rIns="1016" bIns="1016" rtlCol="0" anchor="t">
             <a:normAutofit/>
           </a:bodyPr>
           <a:lstStyle/>
           <a:p>
+            <a:pPr indent="0" marL="0">
+              <a:buNone/>
+            </a:pPr>
             <a:r>
               <a:rPr lang="en-US" sz="2100" dirty="0">
                 <a:solidFill>
-                  <a:srgbClr val="17364A"/>
-                </a:solidFill>
-                <a:latin typeface="Aptos" pitchFamily="34" charset="0"/>
-                <a:ea typeface="Aptos" pitchFamily="34" charset="-122"/>
-                <a:cs typeface="Aptos" pitchFamily="34" charset="-120"/>
-              </a:rPr>
-              <a:t>A disease investigator may receive an AI-generated case summary in the surveillance system.</a:t>
+                  <a:srgbClr val="003A63"/>
+                </a:solidFill>
+                <a:latin typeface="Aptos" pitchFamily="34" charset="0"/>
+                <a:ea typeface="Aptos" pitchFamily="34" charset="-122"/>
+                <a:cs typeface="Aptos" pitchFamily="34" charset="-120"/>
+              </a:rPr>
+              <a:t>• A disease investigator may receive an AI-generated case summary in the surveillance system.</a:t>
             </a:r>
             <a:endParaRPr lang="en-US" sz="2100" dirty="0"/>
           </a:p>
           <a:p>
+            <a:pPr indent="0" marL="0">
+              <a:buNone/>
+            </a:pPr>
             <a:r>
               <a:rPr lang="en-US" sz="2100" dirty="0">
                 <a:solidFill>
-                  <a:srgbClr val="17364A"/>
-                </a:solidFill>
-                <a:latin typeface="Aptos" pitchFamily="34" charset="0"/>
-                <a:ea typeface="Aptos" pitchFamily="34" charset="-122"/>
-                <a:cs typeface="Aptos" pitchFamily="34" charset="-120"/>
-              </a:rPr>
-              <a:t>If the summary hides uncertainty or makes unsupported claims look official, the investigator may.</a:t>
+                  <a:srgbClr val="003A63"/>
+                </a:solidFill>
+                <a:latin typeface="Aptos" pitchFamily="34" charset="0"/>
+                <a:ea typeface="Aptos" pitchFamily="34" charset="-122"/>
+                <a:cs typeface="Aptos" pitchFamily="34" charset="-120"/>
+              </a:rPr>
+              <a:t>• If the summary hides uncertainty or makes unsupported claims look official, the investigator.</a:t>
             </a:r>
             <a:endParaRPr lang="en-US" sz="2100" dirty="0"/>
           </a:p>
           <a:p>
+            <a:pPr indent="0" marL="0">
+              <a:buNone/>
+            </a:pPr>
             <a:r>
               <a:rPr lang="en-US" sz="2100" dirty="0">
                 <a:solidFill>
-                  <a:srgbClr val="17364A"/>
-                </a:solidFill>
-                <a:latin typeface="Aptos" pitchFamily="34" charset="0"/>
-                <a:ea typeface="Aptos" pitchFamily="34" charset="-122"/>
-                <a:cs typeface="Aptos" pitchFamily="34" charset="-120"/>
-              </a:rPr>
-              <a:t>If the summary is too long, poorly organized, or disconnected from source fields, it may not reduce.</a:t>
+                  <a:srgbClr val="003A63"/>
+                </a:solidFill>
+                <a:latin typeface="Aptos" pitchFamily="34" charset="0"/>
+                <a:ea typeface="Aptos" pitchFamily="34" charset="-122"/>
+                <a:cs typeface="Aptos" pitchFamily="34" charset="-120"/>
+              </a:rPr>
+              <a:t>• If the summary is too long, poorly organized, or disconnected from source fields, it may not.</a:t>
             </a:r>
             <a:endParaRPr lang="en-US" sz="2100" dirty="0"/>
           </a:p>
@@ -3377,17 +3386,17 @@
         </p:nvSpPr>
         <p:spPr>
           <a:xfrm>
-            <a:off x="7799832" y="1828800"/>
-            <a:ext cx="3145536" cy="685800"/>
-          </a:xfrm>
-          <a:prstGeom prst="rect">
-            <a:avLst/>
-          </a:prstGeom>
-          <a:noFill/>
-          <a:ln/>
-        </p:spPr>
-        <p:txBody>
-          <a:bodyPr wrap="square" lIns="0" tIns="0" rIns="0" bIns="0" rtlCol="0" anchor="t">
+            <a:off x="7799832" y="1801368"/>
+            <a:ext cx="3145536" cy="758952"/>
+          </a:xfrm>
+          <a:prstGeom prst="rect">
+            <a:avLst/>
+          </a:prstGeom>
+          <a:noFill/>
+          <a:ln/>
+        </p:spPr>
+        <p:txBody>
+          <a:bodyPr wrap="square" lIns="254" tIns="254" rIns="254" bIns="254" rtlCol="0" anchor="t">
             <a:normAutofit/>
           </a:bodyPr>
           <a:lstStyle/>
@@ -3396,7 +3405,7 @@
               <a:buNone/>
             </a:pPr>
             <a:r>
-              <a:rPr lang="en-US" sz="1550" dirty="0">
+              <a:rPr lang="en-US" sz="1320" dirty="0">
                 <a:solidFill>
                   <a:srgbClr val="17364A"/>
                 </a:solidFill>
@@ -3406,7 +3415,7 @@
               </a:rPr>
               <a:t>A disease investigator may receive an AI-generated case summary in the surveillance system.</a:t>
             </a:r>
-            <a:endParaRPr lang="en-US" sz="1550" dirty="0"/>
+            <a:endParaRPr lang="en-US" sz="1320" dirty="0"/>
           </a:p>
         </p:txBody>
       </p:sp>
@@ -3494,13 +3503,16 @@
           <a:ln/>
         </p:spPr>
         <p:txBody>
-          <a:bodyPr wrap="square" lIns="254" tIns="254" rIns="254" bIns="254" rtlCol="0" anchor="t">
+          <a:bodyPr wrap="square" lIns="508" tIns="508" rIns="508" bIns="508" rtlCol="0" anchor="t">
             <a:normAutofit/>
           </a:bodyPr>
           <a:lstStyle/>
           <a:p>
-            <a:r>
-              <a:rPr lang="en-US" sz="1380" dirty="0">
+            <a:pPr indent="0" marL="0">
+              <a:buNone/>
+            </a:pPr>
+            <a:r>
+              <a:rPr lang="en-US" sz="1220" dirty="0">
                 <a:solidFill>
                   <a:srgbClr val="17364A"/>
                 </a:solidFill>
@@ -3508,13 +3520,16 @@
                 <a:ea typeface="Aptos" pitchFamily="34" charset="-122"/>
                 <a:cs typeface="Aptos" pitchFamily="34" charset="-120"/>
               </a:rPr>
-              <a:t>If the summary hides uncertainty or makes unsupported claims look official, the.</a:t>
-            </a:r>
-            <a:endParaRPr lang="en-US" sz="1380" dirty="0"/>
-          </a:p>
-          <a:p>
-            <a:r>
-              <a:rPr lang="en-US" sz="1380" dirty="0">
+              <a:t>If the summary hides uncertainty or makes unsupported claims look.</a:t>
+            </a:r>
+            <a:endParaRPr lang="en-US" sz="1220" dirty="0"/>
+          </a:p>
+          <a:p>
+            <a:pPr indent="0" marL="0">
+              <a:buNone/>
+            </a:pPr>
+            <a:r>
+              <a:rPr lang="en-US" sz="1220" dirty="0">
                 <a:solidFill>
                   <a:srgbClr val="17364A"/>
                 </a:solidFill>
@@ -3522,13 +3537,16 @@
                 <a:ea typeface="Aptos" pitchFamily="34" charset="-122"/>
                 <a:cs typeface="Aptos" pitchFamily="34" charset="-120"/>
               </a:rPr>
-              <a:t>If the summary is too long, poorly organized, or disconnected from source fields, it may.</a:t>
-            </a:r>
-            <a:endParaRPr lang="en-US" sz="1380" dirty="0"/>
-          </a:p>
-          <a:p>
-            <a:r>
-              <a:rPr lang="en-US" sz="1380" dirty="0">
+              <a:t>If the summary is too long, poorly organized, or disconnected from.</a:t>
+            </a:r>
+            <a:endParaRPr lang="en-US" sz="1220" dirty="0"/>
+          </a:p>
+          <a:p>
+            <a:pPr indent="0" marL="0">
+              <a:buNone/>
+            </a:pPr>
+            <a:r>
+              <a:rPr lang="en-US" sz="1220" dirty="0">
                 <a:solidFill>
                   <a:srgbClr val="17364A"/>
                 </a:solidFill>
@@ -3536,9 +3554,9 @@
                 <a:ea typeface="Aptos" pitchFamily="34" charset="-122"/>
                 <a:cs typeface="Aptos" pitchFamily="34" charset="-120"/>
               </a:rPr>
-              <a:t>Usability testing would observe investigators using the summary and identify changes.</a:t>
-            </a:r>
-            <a:endParaRPr lang="en-US" sz="1380" dirty="0"/>
+              <a:t>Usability testing would observe investigators using the summary.</a:t>
+            </a:r>
+            <a:endParaRPr lang="en-US" sz="1220" dirty="0"/>
           </a:p>
         </p:txBody>
       </p:sp>
@@ -3616,17 +3634,17 @@
         </p:nvSpPr>
         <p:spPr>
           <a:xfrm>
-            <a:off x="7799832" y="5001768"/>
-            <a:ext cx="3145536" cy="502920"/>
-          </a:xfrm>
-          <a:prstGeom prst="rect">
-            <a:avLst/>
-          </a:prstGeom>
-          <a:noFill/>
-          <a:ln/>
-        </p:spPr>
-        <p:txBody>
-          <a:bodyPr wrap="square" lIns="0" tIns="0" rIns="0" bIns="0" rtlCol="0" anchor="t">
+            <a:off x="7799832" y="4974336"/>
+            <a:ext cx="3145536" cy="576072"/>
+          </a:xfrm>
+          <a:prstGeom prst="rect">
+            <a:avLst/>
+          </a:prstGeom>
+          <a:noFill/>
+          <a:ln/>
+        </p:spPr>
+        <p:txBody>
+          <a:bodyPr wrap="square" lIns="254" tIns="254" rIns="254" bIns="254" rtlCol="0" anchor="t">
             <a:normAutofit/>
           </a:bodyPr>
           <a:lstStyle/>
@@ -3635,7 +3653,7 @@
               <a:buNone/>
             </a:pPr>
             <a:r>
-              <a:rPr lang="en-US" sz="1550" dirty="0">
+              <a:rPr lang="en-US" sz="1320" dirty="0">
                 <a:solidFill>
                   <a:srgbClr val="17364A"/>
                 </a:solidFill>
@@ -3643,9 +3661,9 @@
                 <a:ea typeface="Aptos" pitchFamily="34" charset="-122"/>
                 <a:cs typeface="Aptos" pitchFamily="34" charset="-120"/>
               </a:rPr>
-              <a:t>Use the concept to clarify workflow changes, dependencies, staffing, procurement requirements, training needs, and implementation checkpoints.</a:t>
-            </a:r>
-            <a:endParaRPr lang="en-US" sz="1550" dirty="0"/>
+              <a:t>Use the concept to clarify workflow changes, dependencies, staffing, procurement requirements, training needs, and.</a:t>
+            </a:r>
+            <a:endParaRPr lang="en-US" sz="1320" dirty="0"/>
           </a:p>
         </p:txBody>
       </p:sp>
@@ -3946,49 +3964,58 @@
           <a:ln/>
         </p:spPr>
         <p:txBody>
-          <a:bodyPr wrap="square" lIns="635" tIns="635" rIns="635" bIns="635" rtlCol="0" anchor="t">
+          <a:bodyPr wrap="square" lIns="1016" tIns="1016" rIns="1016" bIns="1016" rtlCol="0" anchor="t">
             <a:normAutofit/>
           </a:bodyPr>
           <a:lstStyle/>
           <a:p>
+            <a:pPr indent="0" marL="0">
+              <a:buNone/>
+            </a:pPr>
             <a:r>
               <a:rPr lang="en-US" sz="2100" dirty="0">
                 <a:solidFill>
-                  <a:srgbClr val="17364A"/>
-                </a:solidFill>
-                <a:latin typeface="Aptos" pitchFamily="34" charset="0"/>
-                <a:ea typeface="Aptos" pitchFamily="34" charset="-122"/>
-                <a:cs typeface="Aptos" pitchFamily="34" charset="-120"/>
-              </a:rPr>
-              <a:t>Workflow integration begins with current-state mapping.</a:t>
+                  <a:srgbClr val="003A63"/>
+                </a:solidFill>
+                <a:latin typeface="Aptos" pitchFamily="34" charset="0"/>
+                <a:ea typeface="Aptos" pitchFamily="34" charset="-122"/>
+                <a:cs typeface="Aptos" pitchFamily="34" charset="-120"/>
+              </a:rPr>
+              <a:t>• Workflow integration begins with current-state mapping.</a:t>
             </a:r>
             <a:endParaRPr lang="en-US" sz="2100" dirty="0"/>
           </a:p>
           <a:p>
+            <a:pPr indent="0" marL="0">
+              <a:buNone/>
+            </a:pPr>
             <a:r>
               <a:rPr lang="en-US" sz="2100" dirty="0">
                 <a:solidFill>
-                  <a:srgbClr val="17364A"/>
-                </a:solidFill>
-                <a:latin typeface="Aptos" pitchFamily="34" charset="0"/>
-                <a:ea typeface="Aptos" pitchFamily="34" charset="-122"/>
-                <a:cs typeface="Aptos" pitchFamily="34" charset="-120"/>
-              </a:rPr>
-              <a:t>Agencies should document how work happens today, including informal workarounds, duplicate entry,.</a:t>
+                  <a:srgbClr val="003A63"/>
+                </a:solidFill>
+                <a:latin typeface="Aptos" pitchFamily="34" charset="0"/>
+                <a:ea typeface="Aptos" pitchFamily="34" charset="-122"/>
+                <a:cs typeface="Aptos" pitchFamily="34" charset="-120"/>
+              </a:rPr>
+              <a:t>• Agencies should document how work happens today, including informal workarounds, duplicate.</a:t>
             </a:r>
             <a:endParaRPr lang="en-US" sz="2100" dirty="0"/>
           </a:p>
           <a:p>
+            <a:pPr indent="0" marL="0">
+              <a:buNone/>
+            </a:pPr>
             <a:r>
               <a:rPr lang="en-US" sz="2100" dirty="0">
                 <a:solidFill>
-                  <a:srgbClr val="17364A"/>
-                </a:solidFill>
-                <a:latin typeface="Aptos" pitchFamily="34" charset="0"/>
-                <a:ea typeface="Aptos" pitchFamily="34" charset="-122"/>
-                <a:cs typeface="Aptos" pitchFamily="34" charset="-120"/>
-              </a:rPr>
-              <a:t>AI should be introduced only after the team understands which step is being improved and how the change.</a:t>
+                  <a:srgbClr val="003A63"/>
+                </a:solidFill>
+                <a:latin typeface="Aptos" pitchFamily="34" charset="0"/>
+                <a:ea typeface="Aptos" pitchFamily="34" charset="-122"/>
+                <a:cs typeface="Aptos" pitchFamily="34" charset="-120"/>
+              </a:rPr>
+              <a:t>• AI should be introduced only after the team understands which step is being improved and how.</a:t>
             </a:r>
             <a:endParaRPr lang="en-US" sz="2100" dirty="0"/>
           </a:p>
@@ -4068,17 +4095,17 @@
         </p:nvSpPr>
         <p:spPr>
           <a:xfrm>
-            <a:off x="7799832" y="1828800"/>
-            <a:ext cx="3145536" cy="685800"/>
-          </a:xfrm>
-          <a:prstGeom prst="rect">
-            <a:avLst/>
-          </a:prstGeom>
-          <a:noFill/>
-          <a:ln/>
-        </p:spPr>
-        <p:txBody>
-          <a:bodyPr wrap="square" lIns="0" tIns="0" rIns="0" bIns="0" rtlCol="0" anchor="t">
+            <a:off x="7799832" y="1801368"/>
+            <a:ext cx="3145536" cy="758952"/>
+          </a:xfrm>
+          <a:prstGeom prst="rect">
+            <a:avLst/>
+          </a:prstGeom>
+          <a:noFill/>
+          <a:ln/>
+        </p:spPr>
+        <p:txBody>
+          <a:bodyPr wrap="square" lIns="254" tIns="254" rIns="254" bIns="254" rtlCol="0" anchor="t">
             <a:normAutofit/>
           </a:bodyPr>
           <a:lstStyle/>
@@ -4087,7 +4114,7 @@
               <a:buNone/>
             </a:pPr>
             <a:r>
-              <a:rPr lang="en-US" sz="1550" dirty="0">
+              <a:rPr lang="en-US" sz="1320" dirty="0">
                 <a:solidFill>
                   <a:srgbClr val="17364A"/>
                 </a:solidFill>
@@ -4097,7 +4124,7 @@
               </a:rPr>
               <a:t>Workflow integration begins with current-state mapping.</a:t>
             </a:r>
-            <a:endParaRPr lang="en-US" sz="1550" dirty="0"/>
+            <a:endParaRPr lang="en-US" sz="1320" dirty="0"/>
           </a:p>
         </p:txBody>
       </p:sp>
@@ -4185,13 +4212,16 @@
           <a:ln/>
         </p:spPr>
         <p:txBody>
-          <a:bodyPr wrap="square" lIns="254" tIns="254" rIns="254" bIns="254" rtlCol="0" anchor="t">
+          <a:bodyPr wrap="square" lIns="508" tIns="508" rIns="508" bIns="508" rtlCol="0" anchor="t">
             <a:normAutofit/>
           </a:bodyPr>
           <a:lstStyle/>
           <a:p>
-            <a:r>
-              <a:rPr lang="en-US" sz="1380" dirty="0">
+            <a:pPr indent="0" marL="0">
+              <a:buNone/>
+            </a:pPr>
+            <a:r>
+              <a:rPr lang="en-US" sz="1220" dirty="0">
                 <a:solidFill>
                   <a:srgbClr val="17364A"/>
                 </a:solidFill>
@@ -4199,13 +4229,16 @@
                 <a:ea typeface="Aptos" pitchFamily="34" charset="-122"/>
                 <a:cs typeface="Aptos" pitchFamily="34" charset="-120"/>
               </a:rPr>
-              <a:t>Agencies should document how work happens today, including informal workarounds, duplicate.</a:t>
-            </a:r>
-            <a:endParaRPr lang="en-US" sz="1380" dirty="0"/>
-          </a:p>
-          <a:p>
-            <a:r>
-              <a:rPr lang="en-US" sz="1380" dirty="0">
+              <a:t>Agencies should document how work happens today, including.</a:t>
+            </a:r>
+            <a:endParaRPr lang="en-US" sz="1220" dirty="0"/>
+          </a:p>
+          <a:p>
+            <a:pPr indent="0" marL="0">
+              <a:buNone/>
+            </a:pPr>
+            <a:r>
+              <a:rPr lang="en-US" sz="1220" dirty="0">
                 <a:solidFill>
                   <a:srgbClr val="17364A"/>
                 </a:solidFill>
@@ -4213,13 +4246,16 @@
                 <a:ea typeface="Aptos" pitchFamily="34" charset="-122"/>
                 <a:cs typeface="Aptos" pitchFamily="34" charset="-120"/>
               </a:rPr>
-              <a:t>AI should be introduced only after the team understands which step is being improved and.</a:t>
-            </a:r>
-            <a:endParaRPr lang="en-US" sz="1380" dirty="0"/>
-          </a:p>
-          <a:p>
-            <a:r>
-              <a:rPr lang="en-US" sz="1380" dirty="0">
+              <a:t>AI should be introduced only after the team understands which step.</a:t>
+            </a:r>
+            <a:endParaRPr lang="en-US" sz="1220" dirty="0"/>
+          </a:p>
+          <a:p>
+            <a:pPr indent="0" marL="0">
+              <a:buNone/>
+            </a:pPr>
+            <a:r>
+              <a:rPr lang="en-US" sz="1220" dirty="0">
                 <a:solidFill>
                   <a:srgbClr val="17364A"/>
                 </a:solidFill>
@@ -4227,9 +4263,9 @@
                 <a:ea typeface="Aptos" pitchFamily="34" charset="-122"/>
                 <a:cs typeface="Aptos" pitchFamily="34" charset="-120"/>
               </a:rPr>
-              <a:t>Future-state design should define how staff will see, review, correct, accept, reject, or.</a:t>
-            </a:r>
-            <a:endParaRPr lang="en-US" sz="1380" dirty="0"/>
+              <a:t>Future-state design should define how staff will see, review,.</a:t>
+            </a:r>
+            <a:endParaRPr lang="en-US" sz="1220" dirty="0"/>
           </a:p>
         </p:txBody>
       </p:sp>
@@ -4307,17 +4343,17 @@
         </p:nvSpPr>
         <p:spPr>
           <a:xfrm>
-            <a:off x="7799832" y="5001768"/>
-            <a:ext cx="3145536" cy="502920"/>
-          </a:xfrm>
-          <a:prstGeom prst="rect">
-            <a:avLst/>
-          </a:prstGeom>
-          <a:noFill/>
-          <a:ln/>
-        </p:spPr>
-        <p:txBody>
-          <a:bodyPr wrap="square" lIns="0" tIns="0" rIns="0" bIns="0" rtlCol="0" anchor="t">
+            <a:off x="7799832" y="4974336"/>
+            <a:ext cx="3145536" cy="576072"/>
+          </a:xfrm>
+          <a:prstGeom prst="rect">
+            <a:avLst/>
+          </a:prstGeom>
+          <a:noFill/>
+          <a:ln/>
+        </p:spPr>
+        <p:txBody>
+          <a:bodyPr wrap="square" lIns="254" tIns="254" rIns="254" bIns="254" rtlCol="0" anchor="t">
             <a:normAutofit/>
           </a:bodyPr>
           <a:lstStyle/>
@@ -4326,7 +4362,7 @@
               <a:buNone/>
             </a:pPr>
             <a:r>
-              <a:rPr lang="en-US" sz="1550" dirty="0">
+              <a:rPr lang="en-US" sz="1320" dirty="0">
                 <a:solidFill>
                   <a:srgbClr val="17364A"/>
                 </a:solidFill>
@@ -4334,9 +4370,9 @@
                 <a:ea typeface="Aptos" pitchFamily="34" charset="-122"/>
                 <a:cs typeface="Aptos" pitchFamily="34" charset="-120"/>
               </a:rPr>
-              <a:t>Use the concept to clarify workflow changes, dependencies, staffing, procurement requirements, training needs, and implementation checkpoints.</a:t>
-            </a:r>
-            <a:endParaRPr lang="en-US" sz="1550" dirty="0"/>
+              <a:t>Use the concept to clarify workflow changes, dependencies, staffing, procurement requirements, training needs, and.</a:t>
+            </a:r>
+            <a:endParaRPr lang="en-US" sz="1320" dirty="0"/>
           </a:p>
         </p:txBody>
       </p:sp>
@@ -4637,49 +4673,58 @@
           <a:ln/>
         </p:spPr>
         <p:txBody>
-          <a:bodyPr wrap="square" lIns="635" tIns="635" rIns="635" bIns="635" rtlCol="0" anchor="t">
+          <a:bodyPr wrap="square" lIns="1016" tIns="1016" rIns="1016" bIns="1016" rtlCol="0" anchor="t">
             <a:normAutofit/>
           </a:bodyPr>
           <a:lstStyle/>
           <a:p>
+            <a:pPr indent="0" marL="0">
+              <a:buNone/>
+            </a:pPr>
             <a:r>
               <a:rPr lang="en-US" sz="2100" dirty="0">
                 <a:solidFill>
-                  <a:srgbClr val="17364A"/>
-                </a:solidFill>
-                <a:latin typeface="Aptos" pitchFamily="34" charset="0"/>
-                <a:ea typeface="Aptos" pitchFamily="34" charset="-122"/>
-                <a:cs typeface="Aptos" pitchFamily="34" charset="-120"/>
-              </a:rPr>
-              <a:t>A common failure mode is treating the topic as a technical detail rather than a public health control.</a:t>
+                  <a:srgbClr val="003A63"/>
+                </a:solidFill>
+                <a:latin typeface="Aptos" pitchFamily="34" charset="0"/>
+                <a:ea typeface="Aptos" pitchFamily="34" charset="-122"/>
+                <a:cs typeface="Aptos" pitchFamily="34" charset="-120"/>
+              </a:rPr>
+              <a:t>• A common failure mode is treating the topic as a technical detail rather than a public health.</a:t>
             </a:r>
             <a:endParaRPr lang="en-US" sz="2100" dirty="0"/>
           </a:p>
           <a:p>
+            <a:pPr indent="0" marL="0">
+              <a:buNone/>
+            </a:pPr>
             <a:r>
               <a:rPr lang="en-US" sz="2100" dirty="0">
                 <a:solidFill>
-                  <a:srgbClr val="17364A"/>
-                </a:solidFill>
-                <a:latin typeface="Aptos" pitchFamily="34" charset="0"/>
-                <a:ea typeface="Aptos" pitchFamily="34" charset="-122"/>
-                <a:cs typeface="Aptos" pitchFamily="34" charset="-120"/>
-              </a:rPr>
-              <a:t>When staff do not connect technical decisions to authority, workflow, equity, privacy, security, and.</a:t>
+                  <a:srgbClr val="003A63"/>
+                </a:solidFill>
+                <a:latin typeface="Aptos" pitchFamily="34" charset="0"/>
+                <a:ea typeface="Aptos" pitchFamily="34" charset="-122"/>
+                <a:cs typeface="Aptos" pitchFamily="34" charset="-120"/>
+              </a:rPr>
+              <a:t>• When staff do not connect technical decisions to authority, workflow, equity, privacy,.</a:t>
             </a:r>
             <a:endParaRPr lang="en-US" sz="2100" dirty="0"/>
           </a:p>
           <a:p>
+            <a:pPr indent="0" marL="0">
+              <a:buNone/>
+            </a:pPr>
             <a:r>
               <a:rPr lang="en-US" sz="2100" dirty="0">
                 <a:solidFill>
-                  <a:srgbClr val="17364A"/>
-                </a:solidFill>
-                <a:latin typeface="Aptos" pitchFamily="34" charset="0"/>
-                <a:ea typeface="Aptos" pitchFamily="34" charset="-122"/>
-                <a:cs typeface="Aptos" pitchFamily="34" charset="-120"/>
-              </a:rPr>
-              <a:t>Another risk is relying on vendor claims without agency-defined evidence.</a:t>
+                  <a:srgbClr val="003A63"/>
+                </a:solidFill>
+                <a:latin typeface="Aptos" pitchFamily="34" charset="0"/>
+                <a:ea typeface="Aptos" pitchFamily="34" charset="-122"/>
+                <a:cs typeface="Aptos" pitchFamily="34" charset="-120"/>
+              </a:rPr>
+              <a:t>• Another risk is relying on vendor claims without agency-defined evidence.</a:t>
             </a:r>
             <a:endParaRPr lang="en-US" sz="2100" dirty="0"/>
           </a:p>
@@ -4759,17 +4804,17 @@
         </p:nvSpPr>
         <p:spPr>
           <a:xfrm>
-            <a:off x="7799832" y="1828800"/>
-            <a:ext cx="3145536" cy="685800"/>
-          </a:xfrm>
-          <a:prstGeom prst="rect">
-            <a:avLst/>
-          </a:prstGeom>
-          <a:noFill/>
-          <a:ln/>
-        </p:spPr>
-        <p:txBody>
-          <a:bodyPr wrap="square" lIns="0" tIns="0" rIns="0" bIns="0" rtlCol="0" anchor="t">
+            <a:off x="7799832" y="1801368"/>
+            <a:ext cx="3145536" cy="758952"/>
+          </a:xfrm>
+          <a:prstGeom prst="rect">
+            <a:avLst/>
+          </a:prstGeom>
+          <a:noFill/>
+          <a:ln/>
+        </p:spPr>
+        <p:txBody>
+          <a:bodyPr wrap="square" lIns="254" tIns="254" rIns="254" bIns="254" rtlCol="0" anchor="t">
             <a:normAutofit/>
           </a:bodyPr>
           <a:lstStyle/>
@@ -4778,7 +4823,7 @@
               <a:buNone/>
             </a:pPr>
             <a:r>
-              <a:rPr lang="en-US" sz="1550" dirty="0">
+              <a:rPr lang="en-US" sz="1320" dirty="0">
                 <a:solidFill>
                   <a:srgbClr val="17364A"/>
                 </a:solidFill>
@@ -4788,7 +4833,7 @@
               </a:rPr>
               <a:t>A common failure mode is treating the topic as a technical detail rather than a public health control.</a:t>
             </a:r>
-            <a:endParaRPr lang="en-US" sz="1550" dirty="0"/>
+            <a:endParaRPr lang="en-US" sz="1320" dirty="0"/>
           </a:p>
         </p:txBody>
       </p:sp>
@@ -4876,13 +4921,16 @@
           <a:ln/>
         </p:spPr>
         <p:txBody>
-          <a:bodyPr wrap="square" lIns="254" tIns="254" rIns="254" bIns="254" rtlCol="0" anchor="t">
+          <a:bodyPr wrap="square" lIns="508" tIns="508" rIns="508" bIns="508" rtlCol="0" anchor="t">
             <a:normAutofit/>
           </a:bodyPr>
           <a:lstStyle/>
           <a:p>
-            <a:r>
-              <a:rPr lang="en-US" sz="1380" dirty="0">
+            <a:pPr indent="0" marL="0">
+              <a:buNone/>
+            </a:pPr>
+            <a:r>
+              <a:rPr lang="en-US" sz="1220" dirty="0">
                 <a:solidFill>
                   <a:srgbClr val="17364A"/>
                 </a:solidFill>
@@ -4890,13 +4938,16 @@
                 <a:ea typeface="Aptos" pitchFamily="34" charset="-122"/>
                 <a:cs typeface="Aptos" pitchFamily="34" charset="-120"/>
               </a:rPr>
-              <a:t>When staff do not connect technical decisions to authority, workflow, equity, privacy,.</a:t>
-            </a:r>
-            <a:endParaRPr lang="en-US" sz="1380" dirty="0"/>
-          </a:p>
-          <a:p>
-            <a:r>
-              <a:rPr lang="en-US" sz="1380" dirty="0">
+              <a:t>When staff do not connect technical decisions to authority,.</a:t>
+            </a:r>
+            <a:endParaRPr lang="en-US" sz="1220" dirty="0"/>
+          </a:p>
+          <a:p>
+            <a:pPr indent="0" marL="0">
+              <a:buNone/>
+            </a:pPr>
+            <a:r>
+              <a:rPr lang="en-US" sz="1220" dirty="0">
                 <a:solidFill>
                   <a:srgbClr val="17364A"/>
                 </a:solidFill>
@@ -4904,13 +4955,16 @@
                 <a:ea typeface="Aptos" pitchFamily="34" charset="-122"/>
                 <a:cs typeface="Aptos" pitchFamily="34" charset="-120"/>
               </a:rPr>
-              <a:t>Vendors may provide demonstrations, dashboards, or summary metrics that do not match the.</a:t>
-            </a:r>
-            <a:endParaRPr lang="en-US" sz="1380" dirty="0"/>
-          </a:p>
-          <a:p>
-            <a:r>
-              <a:rPr lang="en-US" sz="1380" dirty="0">
+              <a:t>Vendors may provide demonstrations, dashboards, or summary metrics.</a:t>
+            </a:r>
+            <a:endParaRPr lang="en-US" sz="1220" dirty="0"/>
+          </a:p>
+          <a:p>
+            <a:pPr indent="0" marL="0">
+              <a:buNone/>
+            </a:pPr>
+            <a:r>
+              <a:rPr lang="en-US" sz="1220" dirty="0">
                 <a:solidFill>
                   <a:srgbClr val="17364A"/>
                 </a:solidFill>
@@ -4918,9 +4972,9 @@
                 <a:ea typeface="Aptos" pitchFamily="34" charset="-122"/>
                 <a:cs typeface="Aptos" pitchFamily="34" charset="-120"/>
               </a:rPr>
-              <a:t>A guardrail is to require documentation, test results, acceptance criteria, and.</a:t>
-            </a:r>
-            <a:endParaRPr lang="en-US" sz="1380" dirty="0"/>
+              <a:t>A guardrail is to require documentation, test results, acceptance.</a:t>
+            </a:r>
+            <a:endParaRPr lang="en-US" sz="1220" dirty="0"/>
           </a:p>
         </p:txBody>
       </p:sp>
@@ -4998,17 +5052,17 @@
         </p:nvSpPr>
         <p:spPr>
           <a:xfrm>
-            <a:off x="7799832" y="5001768"/>
-            <a:ext cx="3145536" cy="502920"/>
-          </a:xfrm>
-          <a:prstGeom prst="rect">
-            <a:avLst/>
-          </a:prstGeom>
-          <a:noFill/>
-          <a:ln/>
-        </p:spPr>
-        <p:txBody>
-          <a:bodyPr wrap="square" lIns="0" tIns="0" rIns="0" bIns="0" rtlCol="0" anchor="t">
+            <a:off x="7799832" y="4974336"/>
+            <a:ext cx="3145536" cy="576072"/>
+          </a:xfrm>
+          <a:prstGeom prst="rect">
+            <a:avLst/>
+          </a:prstGeom>
+          <a:noFill/>
+          <a:ln/>
+        </p:spPr>
+        <p:txBody>
+          <a:bodyPr wrap="square" lIns="254" tIns="254" rIns="254" bIns="254" rtlCol="0" anchor="t">
             <a:normAutofit/>
           </a:bodyPr>
           <a:lstStyle/>
@@ -5017,7 +5071,7 @@
               <a:buNone/>
             </a:pPr>
             <a:r>
-              <a:rPr lang="en-US" sz="1550" dirty="0">
+              <a:rPr lang="en-US" sz="1320" dirty="0">
                 <a:solidFill>
                   <a:srgbClr val="17364A"/>
                 </a:solidFill>
@@ -5025,9 +5079,9 @@
                 <a:ea typeface="Aptos" pitchFamily="34" charset="-122"/>
                 <a:cs typeface="Aptos" pitchFamily="34" charset="-120"/>
               </a:rPr>
-              <a:t>Identify what could go wrong, who could be affected, what safeguards are needed, and what evidence should be reviewed before use expands.</a:t>
-            </a:r>
-            <a:endParaRPr lang="en-US" sz="1550" dirty="0"/>
+              <a:t>Identify what could go wrong, who could be affected, what safeguards are needed, and what evidence should be reviewed.</a:t>
+            </a:r>
+            <a:endParaRPr lang="en-US" sz="1320" dirty="0"/>
           </a:p>
         </p:txBody>
       </p:sp>
@@ -5328,49 +5382,58 @@
           <a:ln/>
         </p:spPr>
         <p:txBody>
-          <a:bodyPr wrap="square" lIns="635" tIns="635" rIns="635" bIns="635" rtlCol="0" anchor="t">
+          <a:bodyPr wrap="square" lIns="1016" tIns="1016" rIns="1016" bIns="1016" rtlCol="0" anchor="t">
             <a:normAutofit/>
           </a:bodyPr>
           <a:lstStyle/>
           <a:p>
+            <a:pPr indent="0" marL="0">
+              <a:buNone/>
+            </a:pPr>
             <a:r>
               <a:rPr lang="en-US" sz="2100" dirty="0">
                 <a:solidFill>
-                  <a:srgbClr val="17364A"/>
-                </a:solidFill>
-                <a:latin typeface="Aptos" pitchFamily="34" charset="0"/>
-                <a:ea typeface="Aptos" pitchFamily="34" charset="-122"/>
-                <a:cs typeface="Aptos" pitchFamily="34" charset="-120"/>
-              </a:rPr>
-              <a:t>Generative AI, predictive analytics, RAG, automation, and agentic workflows all depend on the controls.</a:t>
+                  <a:srgbClr val="003A63"/>
+                </a:solidFill>
+                <a:latin typeface="Aptos" pitchFamily="34" charset="0"/>
+                <a:ea typeface="Aptos" pitchFamily="34" charset="-122"/>
+                <a:cs typeface="Aptos" pitchFamily="34" charset="-120"/>
+              </a:rPr>
+              <a:t>• Generative AI, predictive analytics, RAG, automation, and agentic workflows all depend on the.</a:t>
             </a:r>
             <a:endParaRPr lang="en-US" sz="2100" dirty="0"/>
           </a:p>
           <a:p>
+            <a:pPr indent="0" marL="0">
+              <a:buNone/>
+            </a:pPr>
             <a:r>
               <a:rPr lang="en-US" sz="2100" dirty="0">
                 <a:solidFill>
-                  <a:srgbClr val="17364A"/>
-                </a:solidFill>
-                <a:latin typeface="Aptos" pitchFamily="34" charset="0"/>
-                <a:ea typeface="Aptos" pitchFamily="34" charset="-122"/>
-                <a:cs typeface="Aptos" pitchFamily="34" charset="-120"/>
-              </a:rPr>
-              <a:t>The controls should be scaled to the risk of the use case.</a:t>
+                  <a:srgbClr val="003A63"/>
+                </a:solidFill>
+                <a:latin typeface="Aptos" pitchFamily="34" charset="0"/>
+                <a:ea typeface="Aptos" pitchFamily="34" charset="-122"/>
+                <a:cs typeface="Aptos" pitchFamily="34" charset="-120"/>
+              </a:rPr>
+              <a:t>• The controls should be scaled to the risk of the use case.</a:t>
             </a:r>
             <a:endParaRPr lang="en-US" sz="2100" dirty="0"/>
           </a:p>
           <a:p>
+            <a:pPr indent="0" marL="0">
+              <a:buNone/>
+            </a:pPr>
             <a:r>
               <a:rPr lang="en-US" sz="2100" dirty="0">
                 <a:solidFill>
-                  <a:srgbClr val="17364A"/>
-                </a:solidFill>
-                <a:latin typeface="Aptos" pitchFamily="34" charset="0"/>
-                <a:ea typeface="Aptos" pitchFamily="34" charset="-122"/>
-                <a:cs typeface="Aptos" pitchFamily="34" charset="-120"/>
-              </a:rPr>
-              <a:t>A tool that drafts internal training text may require lighter review than a tool that updates case.</a:t>
+                  <a:srgbClr val="003A63"/>
+                </a:solidFill>
+                <a:latin typeface="Aptos" pitchFamily="34" charset="0"/>
+                <a:ea typeface="Aptos" pitchFamily="34" charset="-122"/>
+                <a:cs typeface="Aptos" pitchFamily="34" charset="-120"/>
+              </a:rPr>
+              <a:t>• A tool that drafts internal training text may require lighter review than a tool that updates.</a:t>
             </a:r>
             <a:endParaRPr lang="en-US" sz="2100" dirty="0"/>
           </a:p>
@@ -5450,17 +5513,17 @@
         </p:nvSpPr>
         <p:spPr>
           <a:xfrm>
-            <a:off x="7799832" y="1828800"/>
-            <a:ext cx="3145536" cy="685800"/>
-          </a:xfrm>
-          <a:prstGeom prst="rect">
-            <a:avLst/>
-          </a:prstGeom>
-          <a:noFill/>
-          <a:ln/>
-        </p:spPr>
-        <p:txBody>
-          <a:bodyPr wrap="square" lIns="0" tIns="0" rIns="0" bIns="0" rtlCol="0" anchor="t">
+            <a:off x="7799832" y="1801368"/>
+            <a:ext cx="3145536" cy="758952"/>
+          </a:xfrm>
+          <a:prstGeom prst="rect">
+            <a:avLst/>
+          </a:prstGeom>
+          <a:noFill/>
+          <a:ln/>
+        </p:spPr>
+        <p:txBody>
+          <a:bodyPr wrap="square" lIns="254" tIns="254" rIns="254" bIns="254" rtlCol="0" anchor="t">
             <a:normAutofit/>
           </a:bodyPr>
           <a:lstStyle/>
@@ -5469,7 +5532,7 @@
               <a:buNone/>
             </a:pPr>
             <a:r>
-              <a:rPr lang="en-US" sz="1550" dirty="0">
+              <a:rPr lang="en-US" sz="1320" dirty="0">
                 <a:solidFill>
                   <a:srgbClr val="17364A"/>
                 </a:solidFill>
@@ -5479,7 +5542,7 @@
               </a:rPr>
               <a:t>Generative AI, predictive analytics, RAG, automation, and agentic workflows all depend on the controls.</a:t>
             </a:r>
-            <a:endParaRPr lang="en-US" sz="1550" dirty="0"/>
+            <a:endParaRPr lang="en-US" sz="1320" dirty="0"/>
           </a:p>
         </p:txBody>
       </p:sp>
@@ -5567,13 +5630,16 @@
           <a:ln/>
         </p:spPr>
         <p:txBody>
-          <a:bodyPr wrap="square" lIns="254" tIns="254" rIns="254" bIns="254" rtlCol="0" anchor="t">
+          <a:bodyPr wrap="square" lIns="508" tIns="508" rIns="508" bIns="508" rtlCol="0" anchor="t">
             <a:normAutofit/>
           </a:bodyPr>
           <a:lstStyle/>
           <a:p>
-            <a:r>
-              <a:rPr lang="en-US" sz="1380" dirty="0">
+            <a:pPr indent="0" marL="0">
+              <a:buNone/>
+            </a:pPr>
+            <a:r>
+              <a:rPr lang="en-US" sz="1220" dirty="0">
                 <a:solidFill>
                   <a:srgbClr val="17364A"/>
                 </a:solidFill>
@@ -5581,13 +5647,16 @@
                 <a:ea typeface="Aptos" pitchFamily="34" charset="-122"/>
                 <a:cs typeface="Aptos" pitchFamily="34" charset="-120"/>
               </a:rPr>
-              <a:t>Generative AI, predictive analytics, RAG, automation, and agentic workflows all depend on.</a:t>
-            </a:r>
-            <a:endParaRPr lang="en-US" sz="1380" dirty="0"/>
-          </a:p>
-          <a:p>
-            <a:r>
-              <a:rPr lang="en-US" sz="1380" dirty="0">
+              <a:t>Generative AI, predictive analytics, RAG, automation, and agentic.</a:t>
+            </a:r>
+            <a:endParaRPr lang="en-US" sz="1220" dirty="0"/>
+          </a:p>
+          <a:p>
+            <a:pPr indent="0" marL="0">
+              <a:buNone/>
+            </a:pPr>
+            <a:r>
+              <a:rPr lang="en-US" sz="1220" dirty="0">
                 <a:solidFill>
                   <a:srgbClr val="17364A"/>
                 </a:solidFill>
@@ -5595,13 +5664,16 @@
                 <a:ea typeface="Aptos" pitchFamily="34" charset="-122"/>
                 <a:cs typeface="Aptos" pitchFamily="34" charset="-120"/>
               </a:rPr>
-              <a:t>A tool that drafts internal training text may require lighter review than a tool that.</a:t>
-            </a:r>
-            <a:endParaRPr lang="en-US" sz="1380" dirty="0"/>
-          </a:p>
-          <a:p>
-            <a:r>
-              <a:rPr lang="en-US" sz="1380" dirty="0">
+              <a:t>A tool that drafts internal training text may require lighter.</a:t>
+            </a:r>
+            <a:endParaRPr lang="en-US" sz="1220" dirty="0"/>
+          </a:p>
+          <a:p>
+            <a:pPr indent="0" marL="0">
+              <a:buNone/>
+            </a:pPr>
+            <a:r>
+              <a:rPr lang="en-US" sz="1220" dirty="0">
                 <a:solidFill>
                   <a:srgbClr val="17364A"/>
                 </a:solidFill>
@@ -5609,9 +5681,9 @@
                 <a:ea typeface="Aptos" pitchFamily="34" charset="-122"/>
                 <a:cs typeface="Aptos" pitchFamily="34" charset="-120"/>
               </a:rPr>
-              <a:t>The module should be applied during readiness assessment, procurement, implementation.</a:t>
-            </a:r>
-            <a:endParaRPr lang="en-US" sz="1380" dirty="0"/>
+              <a:t>The module should be applied during readiness assessment,.</a:t>
+            </a:r>
+            <a:endParaRPr lang="en-US" sz="1220" dirty="0"/>
           </a:p>
         </p:txBody>
       </p:sp>
@@ -5689,17 +5761,17 @@
         </p:nvSpPr>
         <p:spPr>
           <a:xfrm>
-            <a:off x="7799832" y="5001768"/>
-            <a:ext cx="3145536" cy="502920"/>
-          </a:xfrm>
-          <a:prstGeom prst="rect">
-            <a:avLst/>
-          </a:prstGeom>
-          <a:noFill/>
-          <a:ln/>
-        </p:spPr>
-        <p:txBody>
-          <a:bodyPr wrap="square" lIns="0" tIns="0" rIns="0" bIns="0" rtlCol="0" anchor="t">
+            <a:off x="7799832" y="4974336"/>
+            <a:ext cx="3145536" cy="576072"/>
+          </a:xfrm>
+          <a:prstGeom prst="rect">
+            <a:avLst/>
+          </a:prstGeom>
+          <a:noFill/>
+          <a:ln/>
+        </p:spPr>
+        <p:txBody>
+          <a:bodyPr wrap="square" lIns="254" tIns="254" rIns="254" bIns="254" rtlCol="0" anchor="t">
             <a:normAutofit/>
           </a:bodyPr>
           <a:lstStyle/>
@@ -5708,7 +5780,7 @@
               <a:buNone/>
             </a:pPr>
             <a:r>
-              <a:rPr lang="en-US" sz="1550" dirty="0">
+              <a:rPr lang="en-US" sz="1320" dirty="0">
                 <a:solidFill>
                   <a:srgbClr val="17364A"/>
                 </a:solidFill>
@@ -5716,9 +5788,9 @@
                 <a:ea typeface="Aptos" pitchFamily="34" charset="-122"/>
                 <a:cs typeface="Aptos" pitchFamily="34" charset="-120"/>
               </a:rPr>
-              <a:t>Use the concept to clarify workflow changes, dependencies, staffing, procurement requirements, training needs, and implementation checkpoints.</a:t>
-            </a:r>
-            <a:endParaRPr lang="en-US" sz="1550" dirty="0"/>
+              <a:t>Use the concept to clarify workflow changes, dependencies, staffing, procurement requirements, training needs, and.</a:t>
+            </a:r>
+            <a:endParaRPr lang="en-US" sz="1320" dirty="0"/>
           </a:p>
         </p:txBody>
       </p:sp>
@@ -6019,49 +6091,58 @@
           <a:ln/>
         </p:spPr>
         <p:txBody>
-          <a:bodyPr wrap="square" lIns="635" tIns="635" rIns="635" bIns="635" rtlCol="0" anchor="t">
+          <a:bodyPr wrap="square" lIns="1016" tIns="1016" rIns="1016" bIns="1016" rtlCol="0" anchor="t">
             <a:normAutofit/>
           </a:bodyPr>
           <a:lstStyle/>
           <a:p>
+            <a:pPr indent="0" marL="0">
+              <a:buNone/>
+            </a:pPr>
             <a:r>
               <a:rPr lang="en-US" sz="2100" dirty="0">
                 <a:solidFill>
-                  <a:srgbClr val="17364A"/>
-                </a:solidFill>
-                <a:latin typeface="Aptos" pitchFamily="34" charset="0"/>
-                <a:ea typeface="Aptos" pitchFamily="34" charset="-122"/>
-                <a:cs typeface="Aptos" pitchFamily="34" charset="-120"/>
-              </a:rPr>
-              <a:t>Where does this topic appear in one current or proposed AI workflow in your agency?</a:t>
+                  <a:srgbClr val="003A63"/>
+                </a:solidFill>
+                <a:latin typeface="Aptos" pitchFamily="34" charset="0"/>
+                <a:ea typeface="Aptos" pitchFamily="34" charset="-122"/>
+                <a:cs typeface="Aptos" pitchFamily="34" charset="-120"/>
+              </a:rPr>
+              <a:t>• Where does this topic appear in one current or proposed AI workflow in your agency?</a:t>
             </a:r>
             <a:endParaRPr lang="en-US" sz="2100" dirty="0"/>
           </a:p>
           <a:p>
+            <a:pPr indent="0" marL="0">
+              <a:buNone/>
+            </a:pPr>
             <a:r>
               <a:rPr lang="en-US" sz="2100" dirty="0">
                 <a:solidFill>
-                  <a:srgbClr val="17364A"/>
-                </a:solidFill>
-                <a:latin typeface="Aptos" pitchFamily="34" charset="0"/>
-                <a:ea typeface="Aptos" pitchFamily="34" charset="-122"/>
-                <a:cs typeface="Aptos" pitchFamily="34" charset="-120"/>
-              </a:rPr>
-              <a:t>What decisions, data sources, users, or partners would be affected if this area is poorly designed?</a:t>
+                  <a:srgbClr val="003A63"/>
+                </a:solidFill>
+                <a:latin typeface="Aptos" pitchFamily="34" charset="0"/>
+                <a:ea typeface="Aptos" pitchFamily="34" charset="-122"/>
+                <a:cs typeface="Aptos" pitchFamily="34" charset="-120"/>
+              </a:rPr>
+              <a:t>• What decisions, data sources, users, or partners would be affected if this area is poorly.</a:t>
             </a:r>
             <a:endParaRPr lang="en-US" sz="2100" dirty="0"/>
           </a:p>
           <a:p>
+            <a:pPr indent="0" marL="0">
+              <a:buNone/>
+            </a:pPr>
             <a:r>
               <a:rPr lang="en-US" sz="2100" dirty="0">
                 <a:solidFill>
-                  <a:srgbClr val="17364A"/>
-                </a:solidFill>
-                <a:latin typeface="Aptos" pitchFamily="34" charset="0"/>
-                <a:ea typeface="Aptos" pitchFamily="34" charset="-122"/>
-                <a:cs typeface="Aptos" pitchFamily="34" charset="-120"/>
-              </a:rPr>
-              <a:t>What evidence would governance reviewers need before approving the workflow?</a:t>
+                  <a:srgbClr val="003A63"/>
+                </a:solidFill>
+                <a:latin typeface="Aptos" pitchFamily="34" charset="0"/>
+                <a:ea typeface="Aptos" pitchFamily="34" charset="-122"/>
+                <a:cs typeface="Aptos" pitchFamily="34" charset="-120"/>
+              </a:rPr>
+              <a:t>• What evidence would governance reviewers need before approving the workflow?</a:t>
             </a:r>
             <a:endParaRPr lang="en-US" sz="2100" dirty="0"/>
           </a:p>
@@ -6141,17 +6222,17 @@
         </p:nvSpPr>
         <p:spPr>
           <a:xfrm>
-            <a:off x="7799832" y="1828800"/>
-            <a:ext cx="3145536" cy="685800"/>
-          </a:xfrm>
-          <a:prstGeom prst="rect">
-            <a:avLst/>
-          </a:prstGeom>
-          <a:noFill/>
-          <a:ln/>
-        </p:spPr>
-        <p:txBody>
-          <a:bodyPr wrap="square" lIns="0" tIns="0" rIns="0" bIns="0" rtlCol="0" anchor="t">
+            <a:off x="7799832" y="1801368"/>
+            <a:ext cx="3145536" cy="758952"/>
+          </a:xfrm>
+          <a:prstGeom prst="rect">
+            <a:avLst/>
+          </a:prstGeom>
+          <a:noFill/>
+          <a:ln/>
+        </p:spPr>
+        <p:txBody>
+          <a:bodyPr wrap="square" lIns="254" tIns="254" rIns="254" bIns="254" rtlCol="0" anchor="t">
             <a:normAutofit/>
           </a:bodyPr>
           <a:lstStyle/>
@@ -6160,7 +6241,7 @@
               <a:buNone/>
             </a:pPr>
             <a:r>
-              <a:rPr lang="en-US" sz="1550" dirty="0">
+              <a:rPr lang="en-US" sz="1320" dirty="0">
                 <a:solidFill>
                   <a:srgbClr val="17364A"/>
                 </a:solidFill>
@@ -6170,7 +6251,7 @@
               </a:rPr>
               <a:t>Where does this topic appear in one current or proposed AI workflow in your agency?</a:t>
             </a:r>
-            <a:endParaRPr lang="en-US" sz="1550" dirty="0"/>
+            <a:endParaRPr lang="en-US" sz="1320" dirty="0"/>
           </a:p>
         </p:txBody>
       </p:sp>
@@ -6258,13 +6339,16 @@
           <a:ln/>
         </p:spPr>
         <p:txBody>
-          <a:bodyPr wrap="square" lIns="254" tIns="254" rIns="254" bIns="254" rtlCol="0" anchor="t">
+          <a:bodyPr wrap="square" lIns="508" tIns="508" rIns="508" bIns="508" rtlCol="0" anchor="t">
             <a:normAutofit/>
           </a:bodyPr>
           <a:lstStyle/>
           <a:p>
-            <a:r>
-              <a:rPr lang="en-US" sz="1380" dirty="0">
+            <a:pPr indent="0" marL="0">
+              <a:buNone/>
+            </a:pPr>
+            <a:r>
+              <a:rPr lang="en-US" sz="1220" dirty="0">
                 <a:solidFill>
                   <a:srgbClr val="17364A"/>
                 </a:solidFill>
@@ -6272,13 +6356,16 @@
                 <a:ea typeface="Aptos" pitchFamily="34" charset="-122"/>
                 <a:cs typeface="Aptos" pitchFamily="34" charset="-120"/>
               </a:rPr>
-              <a:t>Where does this topic appear in one current or proposed AI workflow in your agency?</a:t>
-            </a:r>
-            <a:endParaRPr lang="en-US" sz="1380" dirty="0"/>
-          </a:p>
-          <a:p>
-            <a:r>
-              <a:rPr lang="en-US" sz="1380" dirty="0">
+              <a:t>Where does this topic appear in one current or proposed AI.</a:t>
+            </a:r>
+            <a:endParaRPr lang="en-US" sz="1220" dirty="0"/>
+          </a:p>
+          <a:p>
+            <a:pPr indent="0" marL="0">
+              <a:buNone/>
+            </a:pPr>
+            <a:r>
+              <a:rPr lang="en-US" sz="1220" dirty="0">
                 <a:solidFill>
                   <a:srgbClr val="17364A"/>
                 </a:solidFill>
@@ -6286,13 +6373,16 @@
                 <a:ea typeface="Aptos" pitchFamily="34" charset="-122"/>
                 <a:cs typeface="Aptos" pitchFamily="34" charset="-120"/>
               </a:rPr>
-              <a:t>What decisions, data sources, users, or partners would be affected if this area is poorly.</a:t>
-            </a:r>
-            <a:endParaRPr lang="en-US" sz="1380" dirty="0"/>
-          </a:p>
-          <a:p>
-            <a:r>
-              <a:rPr lang="en-US" sz="1380" dirty="0">
+              <a:t>What decisions, data sources, users, or partners would be affected.</a:t>
+            </a:r>
+            <a:endParaRPr lang="en-US" sz="1220" dirty="0"/>
+          </a:p>
+          <a:p>
+            <a:pPr indent="0" marL="0">
+              <a:buNone/>
+            </a:pPr>
+            <a:r>
+              <a:rPr lang="en-US" sz="1220" dirty="0">
                 <a:solidFill>
                   <a:srgbClr val="17364A"/>
                 </a:solidFill>
@@ -6300,9 +6390,9 @@
                 <a:ea typeface="Aptos" pitchFamily="34" charset="-122"/>
                 <a:cs typeface="Aptos" pitchFamily="34" charset="-120"/>
               </a:rPr>
-              <a:t>What evidence would governance reviewers need before approving the workflow?</a:t>
-            </a:r>
-            <a:endParaRPr lang="en-US" sz="1380" dirty="0"/>
+              <a:t>What evidence would governance reviewers need before approving the.</a:t>
+            </a:r>
+            <a:endParaRPr lang="en-US" sz="1220" dirty="0"/>
           </a:p>
         </p:txBody>
       </p:sp>
@@ -6380,17 +6470,17 @@
         </p:nvSpPr>
         <p:spPr>
           <a:xfrm>
-            <a:off x="7799832" y="5001768"/>
-            <a:ext cx="3145536" cy="502920"/>
-          </a:xfrm>
-          <a:prstGeom prst="rect">
-            <a:avLst/>
-          </a:prstGeom>
-          <a:noFill/>
-          <a:ln/>
-        </p:spPr>
-        <p:txBody>
-          <a:bodyPr wrap="square" lIns="0" tIns="0" rIns="0" bIns="0" rtlCol="0" anchor="t">
+            <a:off x="7799832" y="4974336"/>
+            <a:ext cx="3145536" cy="576072"/>
+          </a:xfrm>
+          <a:prstGeom prst="rect">
+            <a:avLst/>
+          </a:prstGeom>
+          <a:noFill/>
+          <a:ln/>
+        </p:spPr>
+        <p:txBody>
+          <a:bodyPr wrap="square" lIns="254" tIns="254" rIns="254" bIns="254" rtlCol="0" anchor="t">
             <a:normAutofit/>
           </a:bodyPr>
           <a:lstStyle/>
@@ -6399,7 +6489,7 @@
               <a:buNone/>
             </a:pPr>
             <a:r>
-              <a:rPr lang="en-US" sz="1550" dirty="0">
+              <a:rPr lang="en-US" sz="1320" dirty="0">
                 <a:solidFill>
                   <a:srgbClr val="17364A"/>
                 </a:solidFill>
@@ -6407,9 +6497,9 @@
                 <a:ea typeface="Aptos" pitchFamily="34" charset="-122"/>
                 <a:cs typeface="Aptos" pitchFamily="34" charset="-120"/>
               </a:rPr>
-              <a:t>Use the concept to clarify workflow changes, dependencies, staffing, procurement requirements, training needs, and implementation checkpoints.</a:t>
-            </a:r>
-            <a:endParaRPr lang="en-US" sz="1550" dirty="0"/>
+              <a:t>Use the concept to clarify workflow changes, dependencies, staffing, procurement requirements, training needs, and.</a:t>
+            </a:r>
+            <a:endParaRPr lang="en-US" sz="1320" dirty="0"/>
           </a:p>
         </p:txBody>
       </p:sp>
@@ -6710,35 +6800,41 @@
           <a:ln/>
         </p:spPr>
         <p:txBody>
-          <a:bodyPr wrap="square" lIns="635" tIns="635" rIns="635" bIns="635" rtlCol="0" anchor="t">
+          <a:bodyPr wrap="square" lIns="1016" tIns="1016" rIns="1016" bIns="1016" rtlCol="0" anchor="t">
             <a:normAutofit/>
           </a:bodyPr>
           <a:lstStyle/>
           <a:p>
+            <a:pPr indent="0" marL="0">
+              <a:buNone/>
+            </a:pPr>
             <a:r>
               <a:rPr lang="en-US" sz="2100" dirty="0">
                 <a:solidFill>
-                  <a:srgbClr val="17364A"/>
-                </a:solidFill>
-                <a:latin typeface="Aptos" pitchFamily="34" charset="0"/>
-                <a:ea typeface="Aptos" pitchFamily="34" charset="-122"/>
-                <a:cs typeface="Aptos" pitchFamily="34" charset="-120"/>
-              </a:rPr>
-              <a:t>Which safeguards should be required before pilot testing?</a:t>
+                  <a:srgbClr val="003A63"/>
+                </a:solidFill>
+                <a:latin typeface="Aptos" pitchFamily="34" charset="0"/>
+                <a:ea typeface="Aptos" pitchFamily="34" charset="-122"/>
+                <a:cs typeface="Aptos" pitchFamily="34" charset="-120"/>
+              </a:rPr>
+              <a:t>• Which safeguards should be required before pilot testing?</a:t>
             </a:r>
             <a:endParaRPr lang="en-US" sz="2100" dirty="0"/>
           </a:p>
           <a:p>
+            <a:pPr indent="0" marL="0">
+              <a:buNone/>
+            </a:pPr>
             <a:r>
               <a:rPr lang="en-US" sz="2100" dirty="0">
                 <a:solidFill>
-                  <a:srgbClr val="17364A"/>
-                </a:solidFill>
-                <a:latin typeface="Aptos" pitchFamily="34" charset="0"/>
-                <a:ea typeface="Aptos" pitchFamily="34" charset="-122"/>
-                <a:cs typeface="Aptos" pitchFamily="34" charset="-120"/>
-              </a:rPr>
-              <a:t>Who owns ongoing monitoring and review?</a:t>
+                  <a:srgbClr val="003A63"/>
+                </a:solidFill>
+                <a:latin typeface="Aptos" pitchFamily="34" charset="0"/>
+                <a:ea typeface="Aptos" pitchFamily="34" charset="-122"/>
+                <a:cs typeface="Aptos" pitchFamily="34" charset="-120"/>
+              </a:rPr>
+              <a:t>• Who owns ongoing monitoring and review?</a:t>
             </a:r>
             <a:endParaRPr lang="en-US" sz="2100" dirty="0"/>
           </a:p>
@@ -6818,17 +6914,17 @@
         </p:nvSpPr>
         <p:spPr>
           <a:xfrm>
-            <a:off x="7799832" y="1828800"/>
-            <a:ext cx="3145536" cy="685800"/>
-          </a:xfrm>
-          <a:prstGeom prst="rect">
-            <a:avLst/>
-          </a:prstGeom>
-          <a:noFill/>
-          <a:ln/>
-        </p:spPr>
-        <p:txBody>
-          <a:bodyPr wrap="square" lIns="0" tIns="0" rIns="0" bIns="0" rtlCol="0" anchor="t">
+            <a:off x="7799832" y="1801368"/>
+            <a:ext cx="3145536" cy="758952"/>
+          </a:xfrm>
+          <a:prstGeom prst="rect">
+            <a:avLst/>
+          </a:prstGeom>
+          <a:noFill/>
+          <a:ln/>
+        </p:spPr>
+        <p:txBody>
+          <a:bodyPr wrap="square" lIns="254" tIns="254" rIns="254" bIns="254" rtlCol="0" anchor="t">
             <a:normAutofit/>
           </a:bodyPr>
           <a:lstStyle/>
@@ -6837,7 +6933,7 @@
               <a:buNone/>
             </a:pPr>
             <a:r>
-              <a:rPr lang="en-US" sz="1550" dirty="0">
+              <a:rPr lang="en-US" sz="1320" dirty="0">
                 <a:solidFill>
                   <a:srgbClr val="17364A"/>
                 </a:solidFill>
@@ -6847,7 +6943,7 @@
               </a:rPr>
               <a:t>Which safeguards should be required before pilot testing?</a:t>
             </a:r>
-            <a:endParaRPr lang="en-US" sz="1550" dirty="0"/>
+            <a:endParaRPr lang="en-US" sz="1320" dirty="0"/>
           </a:p>
         </p:txBody>
       </p:sp>
@@ -6935,13 +7031,16 @@
           <a:ln/>
         </p:spPr>
         <p:txBody>
-          <a:bodyPr wrap="square" lIns="254" tIns="254" rIns="254" bIns="254" rtlCol="0" anchor="t">
+          <a:bodyPr wrap="square" lIns="508" tIns="508" rIns="508" bIns="508" rtlCol="0" anchor="t">
             <a:normAutofit/>
           </a:bodyPr>
           <a:lstStyle/>
           <a:p>
-            <a:r>
-              <a:rPr lang="en-US" sz="1380" dirty="0">
+            <a:pPr indent="0" marL="0">
+              <a:buNone/>
+            </a:pPr>
+            <a:r>
+              <a:rPr lang="en-US" sz="1220" dirty="0">
                 <a:solidFill>
                   <a:srgbClr val="17364A"/>
                 </a:solidFill>
@@ -6951,11 +7050,14 @@
               </a:rPr>
               <a:t>Which safeguards should be required before pilot testing?</a:t>
             </a:r>
-            <a:endParaRPr lang="en-US" sz="1380" dirty="0"/>
-          </a:p>
-          <a:p>
-            <a:r>
-              <a:rPr lang="en-US" sz="1380" dirty="0">
+            <a:endParaRPr lang="en-US" sz="1220" dirty="0"/>
+          </a:p>
+          <a:p>
+            <a:pPr indent="0" marL="0">
+              <a:buNone/>
+            </a:pPr>
+            <a:r>
+              <a:rPr lang="en-US" sz="1220" dirty="0">
                 <a:solidFill>
                   <a:srgbClr val="17364A"/>
                 </a:solidFill>
@@ -6965,7 +7067,7 @@
               </a:rPr>
               <a:t>Who owns ongoing monitoring and review?</a:t>
             </a:r>
-            <a:endParaRPr lang="en-US" sz="1380" dirty="0"/>
+            <a:endParaRPr lang="en-US" sz="1220" dirty="0"/>
           </a:p>
         </p:txBody>
       </p:sp>
@@ -7043,17 +7145,17 @@
         </p:nvSpPr>
         <p:spPr>
           <a:xfrm>
-            <a:off x="7799832" y="5001768"/>
-            <a:ext cx="3145536" cy="502920"/>
-          </a:xfrm>
-          <a:prstGeom prst="rect">
-            <a:avLst/>
-          </a:prstGeom>
-          <a:noFill/>
-          <a:ln/>
-        </p:spPr>
-        <p:txBody>
-          <a:bodyPr wrap="square" lIns="0" tIns="0" rIns="0" bIns="0" rtlCol="0" anchor="t">
+            <a:off x="7799832" y="4974336"/>
+            <a:ext cx="3145536" cy="576072"/>
+          </a:xfrm>
+          <a:prstGeom prst="rect">
+            <a:avLst/>
+          </a:prstGeom>
+          <a:noFill/>
+          <a:ln/>
+        </p:spPr>
+        <p:txBody>
+          <a:bodyPr wrap="square" lIns="254" tIns="254" rIns="254" bIns="254" rtlCol="0" anchor="t">
             <a:normAutofit/>
           </a:bodyPr>
           <a:lstStyle/>
@@ -7062,7 +7164,7 @@
               <a:buNone/>
             </a:pPr>
             <a:r>
-              <a:rPr lang="en-US" sz="1550" dirty="0">
+              <a:rPr lang="en-US" sz="1320" dirty="0">
                 <a:solidFill>
                   <a:srgbClr val="17364A"/>
                 </a:solidFill>
@@ -7070,9 +7172,9 @@
                 <a:ea typeface="Aptos" pitchFamily="34" charset="-122"/>
                 <a:cs typeface="Aptos" pitchFamily="34" charset="-120"/>
               </a:rPr>
-              <a:t>Use the concept to clarify workflow changes, dependencies, staffing, procurement requirements, training needs, and implementation checkpoints.</a:t>
-            </a:r>
-            <a:endParaRPr lang="en-US" sz="1550" dirty="0"/>
+              <a:t>Use the concept to clarify workflow changes, dependencies, staffing, procurement requirements, training needs, and.</a:t>
+            </a:r>
+            <a:endParaRPr lang="en-US" sz="1320" dirty="0"/>
           </a:p>
         </p:txBody>
       </p:sp>
@@ -7373,49 +7475,58 @@
           <a:ln/>
         </p:spPr>
         <p:txBody>
-          <a:bodyPr wrap="square" lIns="635" tIns="635" rIns="635" bIns="635" rtlCol="0" anchor="t">
+          <a:bodyPr wrap="square" lIns="1016" tIns="1016" rIns="1016" bIns="1016" rtlCol="0" anchor="t">
             <a:normAutofit/>
           </a:bodyPr>
           <a:lstStyle/>
           <a:p>
+            <a:pPr indent="0" marL="0">
+              <a:buNone/>
+            </a:pPr>
             <a:r>
               <a:rPr lang="en-US" sz="2100" dirty="0">
                 <a:solidFill>
-                  <a:srgbClr val="17364A"/>
-                </a:solidFill>
-                <a:latin typeface="Aptos" pitchFamily="34" charset="0"/>
-                <a:ea typeface="Aptos" pitchFamily="34" charset="-122"/>
-                <a:cs typeface="Aptos" pitchFamily="34" charset="-120"/>
-              </a:rPr>
-              <a:t>Create a workflow usability test plan for one real or realistic public health AI workflow.</a:t>
+                  <a:srgbClr val="003A63"/>
+                </a:solidFill>
+                <a:latin typeface="Aptos" pitchFamily="34" charset="0"/>
+                <a:ea typeface="Aptos" pitchFamily="34" charset="-122"/>
+                <a:cs typeface="Aptos" pitchFamily="34" charset="-120"/>
+              </a:rPr>
+              <a:t>• Create a workflow usability test plan for one real or realistic public health AI workflow.</a:t>
             </a:r>
             <a:endParaRPr lang="en-US" sz="2100" dirty="0"/>
           </a:p>
           <a:p>
+            <a:pPr indent="0" marL="0">
+              <a:buNone/>
+            </a:pPr>
             <a:r>
               <a:rPr lang="en-US" sz="2100" dirty="0">
                 <a:solidFill>
-                  <a:srgbClr val="17364A"/>
-                </a:solidFill>
-                <a:latin typeface="Aptos" pitchFamily="34" charset="0"/>
-                <a:ea typeface="Aptos" pitchFamily="34" charset="-122"/>
-                <a:cs typeface="Aptos" pitchFamily="34" charset="-120"/>
-              </a:rPr>
-              <a:t>The artifact should describe the use case, affected users, data sources, system dependencies, risks,.</a:t>
+                  <a:srgbClr val="003A63"/>
+                </a:solidFill>
+                <a:latin typeface="Aptos" pitchFamily="34" charset="0"/>
+                <a:ea typeface="Aptos" pitchFamily="34" charset="-122"/>
+                <a:cs typeface="Aptos" pitchFamily="34" charset="-120"/>
+              </a:rPr>
+              <a:t>• The artifact should describe the use case, affected users, data sources, system dependencies,.</a:t>
             </a:r>
             <a:endParaRPr lang="en-US" sz="2100" dirty="0"/>
           </a:p>
           <a:p>
+            <a:pPr indent="0" marL="0">
+              <a:buNone/>
+            </a:pPr>
             <a:r>
               <a:rPr lang="en-US" sz="2100" dirty="0">
                 <a:solidFill>
-                  <a:srgbClr val="17364A"/>
-                </a:solidFill>
-                <a:latin typeface="Aptos" pitchFamily="34" charset="0"/>
-                <a:ea typeface="Aptos" pitchFamily="34" charset="-122"/>
-                <a:cs typeface="Aptos" pitchFamily="34" charset="-120"/>
-              </a:rPr>
-              <a:t>The exercise should produce a work product that could be used in a governance meeting, procurement.</a:t>
+                  <a:srgbClr val="003A63"/>
+                </a:solidFill>
+                <a:latin typeface="Aptos" pitchFamily="34" charset="0"/>
+                <a:ea typeface="Aptos" pitchFamily="34" charset="-122"/>
+                <a:cs typeface="Aptos" pitchFamily="34" charset="-120"/>
+              </a:rPr>
+              <a:t>• The exercise should produce a work product that could be used in a governance meeting,.</a:t>
             </a:r>
             <a:endParaRPr lang="en-US" sz="2100" dirty="0"/>
           </a:p>
@@ -7495,17 +7606,17 @@
         </p:nvSpPr>
         <p:spPr>
           <a:xfrm>
-            <a:off x="7799832" y="1828800"/>
-            <a:ext cx="3145536" cy="685800"/>
-          </a:xfrm>
-          <a:prstGeom prst="rect">
-            <a:avLst/>
-          </a:prstGeom>
-          <a:noFill/>
-          <a:ln/>
-        </p:spPr>
-        <p:txBody>
-          <a:bodyPr wrap="square" lIns="0" tIns="0" rIns="0" bIns="0" rtlCol="0" anchor="t">
+            <a:off x="7799832" y="1801368"/>
+            <a:ext cx="3145536" cy="758952"/>
+          </a:xfrm>
+          <a:prstGeom prst="rect">
+            <a:avLst/>
+          </a:prstGeom>
+          <a:noFill/>
+          <a:ln/>
+        </p:spPr>
+        <p:txBody>
+          <a:bodyPr wrap="square" lIns="254" tIns="254" rIns="254" bIns="254" rtlCol="0" anchor="t">
             <a:normAutofit/>
           </a:bodyPr>
           <a:lstStyle/>
@@ -7514,7 +7625,7 @@
               <a:buNone/>
             </a:pPr>
             <a:r>
-              <a:rPr lang="en-US" sz="1550" dirty="0">
+              <a:rPr lang="en-US" sz="1320" dirty="0">
                 <a:solidFill>
                   <a:srgbClr val="17364A"/>
                 </a:solidFill>
@@ -7524,7 +7635,7 @@
               </a:rPr>
               <a:t>Create a workflow usability test plan for one real or realistic public health AI workflow.</a:t>
             </a:r>
-            <a:endParaRPr lang="en-US" sz="1550" dirty="0"/>
+            <a:endParaRPr lang="en-US" sz="1320" dirty="0"/>
           </a:p>
         </p:txBody>
       </p:sp>
@@ -7612,13 +7723,16 @@
           <a:ln/>
         </p:spPr>
         <p:txBody>
-          <a:bodyPr wrap="square" lIns="254" tIns="254" rIns="254" bIns="254" rtlCol="0" anchor="t">
+          <a:bodyPr wrap="square" lIns="508" tIns="508" rIns="508" bIns="508" rtlCol="0" anchor="t">
             <a:normAutofit/>
           </a:bodyPr>
           <a:lstStyle/>
           <a:p>
-            <a:r>
-              <a:rPr lang="en-US" sz="1380" dirty="0">
+            <a:pPr indent="0" marL="0">
+              <a:buNone/>
+            </a:pPr>
+            <a:r>
+              <a:rPr lang="en-US" sz="1220" dirty="0">
                 <a:solidFill>
                   <a:srgbClr val="17364A"/>
                 </a:solidFill>
@@ -7626,13 +7740,16 @@
                 <a:ea typeface="Aptos" pitchFamily="34" charset="-122"/>
                 <a:cs typeface="Aptos" pitchFamily="34" charset="-120"/>
               </a:rPr>
-              <a:t>The artifact should describe the use case, affected users, data sources, system.</a:t>
-            </a:r>
-            <a:endParaRPr lang="en-US" sz="1380" dirty="0"/>
-          </a:p>
-          <a:p>
-            <a:r>
-              <a:rPr lang="en-US" sz="1380" dirty="0">
+              <a:t>The artifact should describe the use case, affected users, data.</a:t>
+            </a:r>
+            <a:endParaRPr lang="en-US" sz="1220" dirty="0"/>
+          </a:p>
+          <a:p>
+            <a:pPr indent="0" marL="0">
+              <a:buNone/>
+            </a:pPr>
+            <a:r>
+              <a:rPr lang="en-US" sz="1220" dirty="0">
                 <a:solidFill>
                   <a:srgbClr val="17364A"/>
                 </a:solidFill>
@@ -7640,13 +7757,16 @@
                 <a:ea typeface="Aptos" pitchFamily="34" charset="-122"/>
                 <a:cs typeface="Aptos" pitchFamily="34" charset="-120"/>
               </a:rPr>
-              <a:t>The exercise should produce a work product that could be used in a governance meeting,.</a:t>
-            </a:r>
-            <a:endParaRPr lang="en-US" sz="1380" dirty="0"/>
-          </a:p>
-          <a:p>
-            <a:r>
-              <a:rPr lang="en-US" sz="1380" dirty="0">
+              <a:t>The exercise should produce a work product that could be used in a.</a:t>
+            </a:r>
+            <a:endParaRPr lang="en-US" sz="1220" dirty="0"/>
+          </a:p>
+          <a:p>
+            <a:pPr indent="0" marL="0">
+              <a:buNone/>
+            </a:pPr>
+            <a:r>
+              <a:rPr lang="en-US" sz="1220" dirty="0">
                 <a:solidFill>
                   <a:srgbClr val="17364A"/>
                 </a:solidFill>
@@ -7654,9 +7774,9 @@
                 <a:ea typeface="Aptos" pitchFamily="34" charset="-122"/>
                 <a:cs typeface="Aptos" pitchFamily="34" charset="-120"/>
               </a:rPr>
-              <a:t>Learners should document assumptions and identify which staff or partners need to be.</a:t>
-            </a:r>
-            <a:endParaRPr lang="en-US" sz="1380" dirty="0"/>
+              <a:t>Learners should document assumptions and identify which staff or.</a:t>
+            </a:r>
+            <a:endParaRPr lang="en-US" sz="1220" dirty="0"/>
           </a:p>
         </p:txBody>
       </p:sp>
@@ -7734,17 +7854,17 @@
         </p:nvSpPr>
         <p:spPr>
           <a:xfrm>
-            <a:off x="7799832" y="5001768"/>
-            <a:ext cx="3145536" cy="502920"/>
-          </a:xfrm>
-          <a:prstGeom prst="rect">
-            <a:avLst/>
-          </a:prstGeom>
-          <a:noFill/>
-          <a:ln/>
-        </p:spPr>
-        <p:txBody>
-          <a:bodyPr wrap="square" lIns="0" tIns="0" rIns="0" bIns="0" rtlCol="0" anchor="t">
+            <a:off x="7799832" y="4974336"/>
+            <a:ext cx="3145536" cy="576072"/>
+          </a:xfrm>
+          <a:prstGeom prst="rect">
+            <a:avLst/>
+          </a:prstGeom>
+          <a:noFill/>
+          <a:ln/>
+        </p:spPr>
+        <p:txBody>
+          <a:bodyPr wrap="square" lIns="254" tIns="254" rIns="254" bIns="254" rtlCol="0" anchor="t">
             <a:normAutofit/>
           </a:bodyPr>
           <a:lstStyle/>
@@ -7753,7 +7873,7 @@
               <a:buNone/>
             </a:pPr>
             <a:r>
-              <a:rPr lang="en-US" sz="1550" dirty="0">
+              <a:rPr lang="en-US" sz="1320" dirty="0">
                 <a:solidFill>
                   <a:srgbClr val="17364A"/>
                 </a:solidFill>
@@ -7761,9 +7881,9 @@
                 <a:ea typeface="Aptos" pitchFamily="34" charset="-122"/>
                 <a:cs typeface="Aptos" pitchFamily="34" charset="-120"/>
               </a:rPr>
-              <a:t>Use the assignment to test whether you can explain the concept, apply it to a realistic public health situation, and identify what would need review before the work moves forward.</a:t>
-            </a:r>
-            <a:endParaRPr lang="en-US" sz="1550" dirty="0"/>
+              <a:t>Use the assignment to test whether you can explain the concept, apply it to a realistic public health situation, and.</a:t>
+            </a:r>
+            <a:endParaRPr lang="en-US" sz="1320" dirty="0"/>
           </a:p>
         </p:txBody>
       </p:sp>
@@ -8064,35 +8184,41 @@
           <a:ln/>
         </p:spPr>
         <p:txBody>
-          <a:bodyPr wrap="square" lIns="635" tIns="635" rIns="635" bIns="635" rtlCol="0" anchor="t">
+          <a:bodyPr wrap="square" lIns="1016" tIns="1016" rIns="1016" bIns="1016" rtlCol="0" anchor="t">
             <a:normAutofit/>
           </a:bodyPr>
           <a:lstStyle/>
           <a:p>
+            <a:pPr indent="0" marL="0">
+              <a:buNone/>
+            </a:pPr>
             <a:r>
               <a:rPr lang="en-US" sz="2100" dirty="0">
                 <a:solidFill>
-                  <a:srgbClr val="17364A"/>
-                </a:solidFill>
-                <a:latin typeface="Aptos" pitchFamily="34" charset="0"/>
-                <a:ea typeface="Aptos" pitchFamily="34" charset="-122"/>
-                <a:cs typeface="Aptos" pitchFamily="34" charset="-120"/>
-              </a:rPr>
-              <a:t>The expected artifact is a completed workflow usability test plan.</a:t>
+                  <a:srgbClr val="003A63"/>
+                </a:solidFill>
+                <a:latin typeface="Aptos" pitchFamily="34" charset="0"/>
+                <a:ea typeface="Aptos" pitchFamily="34" charset="-122"/>
+                <a:cs typeface="Aptos" pitchFamily="34" charset="-120"/>
+              </a:rPr>
+              <a:t>• The expected artifact is a completed workflow usability test plan.</a:t>
             </a:r>
             <a:endParaRPr lang="en-US" sz="2100" dirty="0"/>
           </a:p>
           <a:p>
+            <a:pPr indent="0" marL="0">
+              <a:buNone/>
+            </a:pPr>
             <a:r>
               <a:rPr lang="en-US" sz="2100" dirty="0">
                 <a:solidFill>
-                  <a:srgbClr val="17364A"/>
-                </a:solidFill>
-                <a:latin typeface="Aptos" pitchFamily="34" charset="0"/>
-                <a:ea typeface="Aptos" pitchFamily="34" charset="-122"/>
-                <a:cs typeface="Aptos" pitchFamily="34" charset="-120"/>
-              </a:rPr>
-              <a:t>It should be specific to a public health workflow and should include technical dependencies, governance.</a:t>
+                  <a:srgbClr val="003A63"/>
+                </a:solidFill>
+                <a:latin typeface="Aptos" pitchFamily="34" charset="0"/>
+                <a:ea typeface="Aptos" pitchFamily="34" charset="-122"/>
+                <a:cs typeface="Aptos" pitchFamily="34" charset="-120"/>
+              </a:rPr>
+              <a:t>• It should be specific to a public health workflow and should include technical dependencies,.</a:t>
             </a:r>
             <a:endParaRPr lang="en-US" sz="2100" dirty="0"/>
           </a:p>
@@ -8172,17 +8298,17 @@
         </p:nvSpPr>
         <p:spPr>
           <a:xfrm>
-            <a:off x="7799832" y="1828800"/>
-            <a:ext cx="3145536" cy="685800"/>
-          </a:xfrm>
-          <a:prstGeom prst="rect">
-            <a:avLst/>
-          </a:prstGeom>
-          <a:noFill/>
-          <a:ln/>
-        </p:spPr>
-        <p:txBody>
-          <a:bodyPr wrap="square" lIns="0" tIns="0" rIns="0" bIns="0" rtlCol="0" anchor="t">
+            <a:off x="7799832" y="1801368"/>
+            <a:ext cx="3145536" cy="758952"/>
+          </a:xfrm>
+          <a:prstGeom prst="rect">
+            <a:avLst/>
+          </a:prstGeom>
+          <a:noFill/>
+          <a:ln/>
+        </p:spPr>
+        <p:txBody>
+          <a:bodyPr wrap="square" lIns="254" tIns="254" rIns="254" bIns="254" rtlCol="0" anchor="t">
             <a:normAutofit/>
           </a:bodyPr>
           <a:lstStyle/>
@@ -8191,7 +8317,7 @@
               <a:buNone/>
             </a:pPr>
             <a:r>
-              <a:rPr lang="en-US" sz="1550" dirty="0">
+              <a:rPr lang="en-US" sz="1320" dirty="0">
                 <a:solidFill>
                   <a:srgbClr val="17364A"/>
                 </a:solidFill>
@@ -8201,7 +8327,7 @@
               </a:rPr>
               <a:t>The expected artifact is a completed workflow usability test plan.</a:t>
             </a:r>
-            <a:endParaRPr lang="en-US" sz="1550" dirty="0"/>
+            <a:endParaRPr lang="en-US" sz="1320" dirty="0"/>
           </a:p>
         </p:txBody>
       </p:sp>
@@ -8289,13 +8415,16 @@
           <a:ln/>
         </p:spPr>
         <p:txBody>
-          <a:bodyPr wrap="square" lIns="254" tIns="254" rIns="254" bIns="254" rtlCol="0" anchor="t">
+          <a:bodyPr wrap="square" lIns="508" tIns="508" rIns="508" bIns="508" rtlCol="0" anchor="t">
             <a:normAutofit/>
           </a:bodyPr>
           <a:lstStyle/>
           <a:p>
-            <a:r>
-              <a:rPr lang="en-US" sz="1380" dirty="0">
+            <a:pPr indent="0" marL="0">
+              <a:buNone/>
+            </a:pPr>
+            <a:r>
+              <a:rPr lang="en-US" sz="1220" dirty="0">
                 <a:solidFill>
                   <a:srgbClr val="17364A"/>
                 </a:solidFill>
@@ -8305,11 +8434,14 @@
               </a:rPr>
               <a:t>The expected artifact is a completed workflow usability test plan.</a:t>
             </a:r>
-            <a:endParaRPr lang="en-US" sz="1380" dirty="0"/>
-          </a:p>
-          <a:p>
-            <a:r>
-              <a:rPr lang="en-US" sz="1380" dirty="0">
+            <a:endParaRPr lang="en-US" sz="1220" dirty="0"/>
+          </a:p>
+          <a:p>
+            <a:pPr indent="0" marL="0">
+              <a:buNone/>
+            </a:pPr>
+            <a:r>
+              <a:rPr lang="en-US" sz="1220" dirty="0">
                 <a:solidFill>
                   <a:srgbClr val="17364A"/>
                 </a:solidFill>
@@ -8317,9 +8449,9 @@
                 <a:ea typeface="Aptos" pitchFamily="34" charset="-122"/>
                 <a:cs typeface="Aptos" pitchFamily="34" charset="-120"/>
               </a:rPr>
-              <a:t>It should be specific to a public health workflow and should include technical.</a:t>
-            </a:r>
-            <a:endParaRPr lang="en-US" sz="1380" dirty="0"/>
+              <a:t>It should be specific to a public health workflow and should.</a:t>
+            </a:r>
+            <a:endParaRPr lang="en-US" sz="1220" dirty="0"/>
           </a:p>
         </p:txBody>
       </p:sp>
@@ -8397,17 +8529,17 @@
         </p:nvSpPr>
         <p:spPr>
           <a:xfrm>
-            <a:off x="7799832" y="5001768"/>
-            <a:ext cx="3145536" cy="502920"/>
-          </a:xfrm>
-          <a:prstGeom prst="rect">
-            <a:avLst/>
-          </a:prstGeom>
-          <a:noFill/>
-          <a:ln/>
-        </p:spPr>
-        <p:txBody>
-          <a:bodyPr wrap="square" lIns="0" tIns="0" rIns="0" bIns="0" rtlCol="0" anchor="t">
+            <a:off x="7799832" y="4974336"/>
+            <a:ext cx="3145536" cy="576072"/>
+          </a:xfrm>
+          <a:prstGeom prst="rect">
+            <a:avLst/>
+          </a:prstGeom>
+          <a:noFill/>
+          <a:ln/>
+        </p:spPr>
+        <p:txBody>
+          <a:bodyPr wrap="square" lIns="254" tIns="254" rIns="254" bIns="254" rtlCol="0" anchor="t">
             <a:normAutofit/>
           </a:bodyPr>
           <a:lstStyle/>
@@ -8416,7 +8548,7 @@
               <a:buNone/>
             </a:pPr>
             <a:r>
-              <a:rPr lang="en-US" sz="1550" dirty="0">
+              <a:rPr lang="en-US" sz="1320" dirty="0">
                 <a:solidFill>
                   <a:srgbClr val="17364A"/>
                 </a:solidFill>
@@ -8424,9 +8556,9 @@
                 <a:ea typeface="Aptos" pitchFamily="34" charset="-122"/>
                 <a:cs typeface="Aptos" pitchFamily="34" charset="-120"/>
               </a:rPr>
-              <a:t>Use the concept to clarify workflow changes, dependencies, staffing, procurement requirements, training needs, and implementation checkpoints.</a:t>
-            </a:r>
-            <a:endParaRPr lang="en-US" sz="1550" dirty="0"/>
+              <a:t>Use the concept to clarify workflow changes, dependencies, staffing, procurement requirements, training needs, and.</a:t>
+            </a:r>
+            <a:endParaRPr lang="en-US" sz="1320" dirty="0"/>
           </a:p>
         </p:txBody>
       </p:sp>
@@ -8727,21 +8859,24 @@
           <a:ln/>
         </p:spPr>
         <p:txBody>
-          <a:bodyPr wrap="square" lIns="635" tIns="635" rIns="635" bIns="635" rtlCol="0" anchor="t">
+          <a:bodyPr wrap="square" lIns="1016" tIns="1016" rIns="1016" bIns="1016" rtlCol="0" anchor="t">
             <a:normAutofit/>
           </a:bodyPr>
           <a:lstStyle/>
           <a:p>
+            <a:pPr indent="0" marL="0">
+              <a:buNone/>
+            </a:pPr>
             <a:r>
               <a:rPr lang="en-US" sz="2100" dirty="0">
                 <a:solidFill>
-                  <a:srgbClr val="17364A"/>
-                </a:solidFill>
-                <a:latin typeface="Aptos" pitchFamily="34" charset="0"/>
-                <a:ea typeface="Aptos" pitchFamily="34" charset="-122"/>
-                <a:cs typeface="Aptos" pitchFamily="34" charset="-120"/>
-              </a:rPr>
-              <a:t>The expected artifact is a completed workflow usability test plan. It should be specific to a public.</a:t>
+                  <a:srgbClr val="003A63"/>
+                </a:solidFill>
+                <a:latin typeface="Aptos" pitchFamily="34" charset="0"/>
+                <a:ea typeface="Aptos" pitchFamily="34" charset="-122"/>
+                <a:cs typeface="Aptos" pitchFamily="34" charset="-120"/>
+              </a:rPr>
+              <a:t>• The expected artifact is a completed workflow usability test plan. It should be specific to a.</a:t>
             </a:r>
             <a:endParaRPr lang="en-US" sz="2100" dirty="0"/>
           </a:p>
@@ -8821,17 +8956,17 @@
         </p:nvSpPr>
         <p:spPr>
           <a:xfrm>
-            <a:off x="7799832" y="1828800"/>
-            <a:ext cx="3145536" cy="685800"/>
-          </a:xfrm>
-          <a:prstGeom prst="rect">
-            <a:avLst/>
-          </a:prstGeom>
-          <a:noFill/>
-          <a:ln/>
-        </p:spPr>
-        <p:txBody>
-          <a:bodyPr wrap="square" lIns="0" tIns="0" rIns="0" bIns="0" rtlCol="0" anchor="t">
+            <a:off x="7799832" y="1801368"/>
+            <a:ext cx="3145536" cy="758952"/>
+          </a:xfrm>
+          <a:prstGeom prst="rect">
+            <a:avLst/>
+          </a:prstGeom>
+          <a:noFill/>
+          <a:ln/>
+        </p:spPr>
+        <p:txBody>
+          <a:bodyPr wrap="square" lIns="254" tIns="254" rIns="254" bIns="254" rtlCol="0" anchor="t">
             <a:normAutofit/>
           </a:bodyPr>
           <a:lstStyle/>
@@ -8840,7 +8975,7 @@
               <a:buNone/>
             </a:pPr>
             <a:r>
-              <a:rPr lang="en-US" sz="1550" dirty="0">
+              <a:rPr lang="en-US" sz="1320" dirty="0">
                 <a:solidFill>
                   <a:srgbClr val="17364A"/>
                 </a:solidFill>
@@ -8850,7 +8985,7 @@
               </a:rPr>
               <a:t>The expected artifact is a completed workflow usability test plan. It should be specific to a public.</a:t>
             </a:r>
-            <a:endParaRPr lang="en-US" sz="1550" dirty="0"/>
+            <a:endParaRPr lang="en-US" sz="1320" dirty="0"/>
           </a:p>
         </p:txBody>
       </p:sp>
@@ -8938,13 +9073,16 @@
           <a:ln/>
         </p:spPr>
         <p:txBody>
-          <a:bodyPr wrap="square" lIns="254" tIns="254" rIns="254" bIns="254" rtlCol="0" anchor="t">
+          <a:bodyPr wrap="square" lIns="508" tIns="508" rIns="508" bIns="508" rtlCol="0" anchor="t">
             <a:normAutofit/>
           </a:bodyPr>
           <a:lstStyle/>
           <a:p>
-            <a:r>
-              <a:rPr lang="en-US" sz="1380" dirty="0">
+            <a:pPr indent="0" marL="0">
+              <a:buNone/>
+            </a:pPr>
+            <a:r>
+              <a:rPr lang="en-US" sz="1220" dirty="0">
                 <a:solidFill>
                   <a:srgbClr val="17364A"/>
                 </a:solidFill>
@@ -8954,11 +9092,14 @@
               </a:rPr>
               <a:t>The expected artifact is a completed workflow usability test plan.</a:t>
             </a:r>
-            <a:endParaRPr lang="en-US" sz="1380" dirty="0"/>
-          </a:p>
-          <a:p>
-            <a:r>
-              <a:rPr lang="en-US" sz="1380" dirty="0">
+            <a:endParaRPr lang="en-US" sz="1220" dirty="0"/>
+          </a:p>
+          <a:p>
+            <a:pPr indent="0" marL="0">
+              <a:buNone/>
+            </a:pPr>
+            <a:r>
+              <a:rPr lang="en-US" sz="1220" dirty="0">
                 <a:solidFill>
                   <a:srgbClr val="17364A"/>
                 </a:solidFill>
@@ -8966,9 +9107,9 @@
                 <a:ea typeface="Aptos" pitchFamily="34" charset="-122"/>
                 <a:cs typeface="Aptos" pitchFamily="34" charset="-120"/>
               </a:rPr>
-              <a:t>It should be specific to a public health workflow and should include technical.</a:t>
-            </a:r>
-            <a:endParaRPr lang="en-US" sz="1380" dirty="0"/>
+              <a:t>It should be specific to a public health workflow and should.</a:t>
+            </a:r>
+            <a:endParaRPr lang="en-US" sz="1220" dirty="0"/>
           </a:p>
         </p:txBody>
       </p:sp>
@@ -9046,17 +9187,17 @@
         </p:nvSpPr>
         <p:spPr>
           <a:xfrm>
-            <a:off x="7799832" y="5001768"/>
-            <a:ext cx="3145536" cy="502920"/>
-          </a:xfrm>
-          <a:prstGeom prst="rect">
-            <a:avLst/>
-          </a:prstGeom>
-          <a:noFill/>
-          <a:ln/>
-        </p:spPr>
-        <p:txBody>
-          <a:bodyPr wrap="square" lIns="0" tIns="0" rIns="0" bIns="0" rtlCol="0" anchor="t">
+            <a:off x="7799832" y="4974336"/>
+            <a:ext cx="3145536" cy="576072"/>
+          </a:xfrm>
+          <a:prstGeom prst="rect">
+            <a:avLst/>
+          </a:prstGeom>
+          <a:noFill/>
+          <a:ln/>
+        </p:spPr>
+        <p:txBody>
+          <a:bodyPr wrap="square" lIns="254" tIns="254" rIns="254" bIns="254" rtlCol="0" anchor="t">
             <a:normAutofit/>
           </a:bodyPr>
           <a:lstStyle/>
@@ -9065,7 +9206,7 @@
               <a:buNone/>
             </a:pPr>
             <a:r>
-              <a:rPr lang="en-US" sz="1550" dirty="0">
+              <a:rPr lang="en-US" sz="1320" dirty="0">
                 <a:solidFill>
                   <a:srgbClr val="17364A"/>
                 </a:solidFill>
@@ -9073,9 +9214,9 @@
                 <a:ea typeface="Aptos" pitchFamily="34" charset="-122"/>
                 <a:cs typeface="Aptos" pitchFamily="34" charset="-120"/>
               </a:rPr>
-              <a:t>Use the assignment to test whether you can explain the concept, apply it to a realistic public health situation, and identify what would need review before the work moves forward.</a:t>
-            </a:r>
-            <a:endParaRPr lang="en-US" sz="1550" dirty="0"/>
+              <a:t>Use the assignment to test whether you can explain the concept, apply it to a realistic public health situation, and.</a:t>
+            </a:r>
+            <a:endParaRPr lang="en-US" sz="1320" dirty="0"/>
           </a:p>
         </p:txBody>
       </p:sp>
@@ -9376,49 +9517,58 @@
           <a:ln/>
         </p:spPr>
         <p:txBody>
-          <a:bodyPr wrap="square" lIns="635" tIns="635" rIns="635" bIns="635" rtlCol="0" anchor="t">
+          <a:bodyPr wrap="square" lIns="1016" tIns="1016" rIns="1016" bIns="1016" rtlCol="0" anchor="t">
             <a:normAutofit/>
           </a:bodyPr>
           <a:lstStyle/>
           <a:p>
+            <a:pPr indent="0" marL="0">
+              <a:buNone/>
+            </a:pPr>
             <a:r>
               <a:rPr lang="en-US" sz="2100" dirty="0">
                 <a:solidFill>
-                  <a:srgbClr val="17364A"/>
-                </a:solidFill>
-                <a:latin typeface="Aptos" pitchFamily="34" charset="0"/>
-                <a:ea typeface="Aptos" pitchFamily="34" charset="-122"/>
-                <a:cs typeface="Aptos" pitchFamily="34" charset="-120"/>
-              </a:rPr>
-              <a:t>1. What is the best reason to address human factors, workflow integration, and usability testing before.</a:t>
+                  <a:srgbClr val="003A63"/>
+                </a:solidFill>
+                <a:latin typeface="Aptos" pitchFamily="34" charset="0"/>
+                <a:ea typeface="Aptos" pitchFamily="34" charset="-122"/>
+                <a:cs typeface="Aptos" pitchFamily="34" charset="-120"/>
+              </a:rPr>
+              <a:t>• 1. What is the best reason to address human factors, workflow integration, and usability.</a:t>
             </a:r>
             <a:endParaRPr lang="en-US" sz="2100" dirty="0"/>
           </a:p>
           <a:p>
+            <a:pPr indent="0" marL="0">
+              <a:buNone/>
+            </a:pPr>
             <a:r>
               <a:rPr lang="en-US" sz="2100" dirty="0">
                 <a:solidFill>
-                  <a:srgbClr val="17364A"/>
-                </a:solidFill>
-                <a:latin typeface="Aptos" pitchFamily="34" charset="0"/>
-                <a:ea typeface="Aptos" pitchFamily="34" charset="-122"/>
-                <a:cs typeface="Aptos" pitchFamily="34" charset="-120"/>
-              </a:rPr>
-              <a:t>2. Which practice best supports responsible implementation?</a:t>
+                  <a:srgbClr val="003A63"/>
+                </a:solidFill>
+                <a:latin typeface="Aptos" pitchFamily="34" charset="0"/>
+                <a:ea typeface="Aptos" pitchFamily="34" charset="-122"/>
+                <a:cs typeface="Aptos" pitchFamily="34" charset="-120"/>
+              </a:rPr>
+              <a:t>• 2. Which practice best supports responsible implementation?</a:t>
             </a:r>
             <a:endParaRPr lang="en-US" sz="2100" dirty="0"/>
           </a:p>
           <a:p>
+            <a:pPr indent="0" marL="0">
+              <a:buNone/>
+            </a:pPr>
             <a:r>
               <a:rPr lang="en-US" sz="2100" dirty="0">
                 <a:solidFill>
-                  <a:srgbClr val="17364A"/>
-                </a:solidFill>
-                <a:latin typeface="Aptos" pitchFamily="34" charset="0"/>
-                <a:ea typeface="Aptos" pitchFamily="34" charset="-122"/>
-                <a:cs typeface="Aptos" pitchFamily="34" charset="-120"/>
-              </a:rPr>
-              <a:t>3. Which statement best describes a common failure mode?</a:t>
+                  <a:srgbClr val="003A63"/>
+                </a:solidFill>
+                <a:latin typeface="Aptos" pitchFamily="34" charset="0"/>
+                <a:ea typeface="Aptos" pitchFamily="34" charset="-122"/>
+                <a:cs typeface="Aptos" pitchFamily="34" charset="-120"/>
+              </a:rPr>
+              <a:t>• 3. Which statement best describes a common failure mode?</a:t>
             </a:r>
             <a:endParaRPr lang="en-US" sz="2100" dirty="0"/>
           </a:p>
@@ -9498,17 +9648,17 @@
         </p:nvSpPr>
         <p:spPr>
           <a:xfrm>
-            <a:off x="7799832" y="1828800"/>
-            <a:ext cx="3145536" cy="685800"/>
-          </a:xfrm>
-          <a:prstGeom prst="rect">
-            <a:avLst/>
-          </a:prstGeom>
-          <a:noFill/>
-          <a:ln/>
-        </p:spPr>
-        <p:txBody>
-          <a:bodyPr wrap="square" lIns="0" tIns="0" rIns="0" bIns="0" rtlCol="0" anchor="t">
+            <a:off x="7799832" y="1801368"/>
+            <a:ext cx="3145536" cy="758952"/>
+          </a:xfrm>
+          <a:prstGeom prst="rect">
+            <a:avLst/>
+          </a:prstGeom>
+          <a:noFill/>
+          <a:ln/>
+        </p:spPr>
+        <p:txBody>
+          <a:bodyPr wrap="square" lIns="254" tIns="254" rIns="254" bIns="254" rtlCol="0" anchor="t">
             <a:normAutofit/>
           </a:bodyPr>
           <a:lstStyle/>
@@ -9517,7 +9667,7 @@
               <a:buNone/>
             </a:pPr>
             <a:r>
-              <a:rPr lang="en-US" sz="1550" dirty="0">
+              <a:rPr lang="en-US" sz="1320" dirty="0">
                 <a:solidFill>
                   <a:srgbClr val="17364A"/>
                 </a:solidFill>
@@ -9527,7 +9677,7 @@
               </a:rPr>
               <a:t>1. What is the best reason to address human factors, workflow integration, and usability testing before.</a:t>
             </a:r>
-            <a:endParaRPr lang="en-US" sz="1550" dirty="0"/>
+            <a:endParaRPr lang="en-US" sz="1320" dirty="0"/>
           </a:p>
         </p:txBody>
       </p:sp>
@@ -9615,13 +9765,16 @@
           <a:ln/>
         </p:spPr>
         <p:txBody>
-          <a:bodyPr wrap="square" lIns="254" tIns="254" rIns="254" bIns="254" rtlCol="0" anchor="t">
+          <a:bodyPr wrap="square" lIns="508" tIns="508" rIns="508" bIns="508" rtlCol="0" anchor="t">
             <a:normAutofit/>
           </a:bodyPr>
           <a:lstStyle/>
           <a:p>
-            <a:r>
-              <a:rPr lang="en-US" sz="1380" dirty="0">
+            <a:pPr indent="0" marL="0">
+              <a:buNone/>
+            </a:pPr>
+            <a:r>
+              <a:rPr lang="en-US" sz="1220" dirty="0">
                 <a:solidFill>
                   <a:srgbClr val="17364A"/>
                 </a:solidFill>
@@ -9631,11 +9784,14 @@
               </a:rPr>
               <a:t>1.</a:t>
             </a:r>
-            <a:endParaRPr lang="en-US" sz="1380" dirty="0"/>
-          </a:p>
-          <a:p>
-            <a:r>
-              <a:rPr lang="en-US" sz="1380" dirty="0">
+            <a:endParaRPr lang="en-US" sz="1220" dirty="0"/>
+          </a:p>
+          <a:p>
+            <a:pPr indent="0" marL="0">
+              <a:buNone/>
+            </a:pPr>
+            <a:r>
+              <a:rPr lang="en-US" sz="1220" dirty="0">
                 <a:solidFill>
                   <a:srgbClr val="17364A"/>
                 </a:solidFill>
@@ -9643,13 +9799,16 @@
                 <a:ea typeface="Aptos" pitchFamily="34" charset="-122"/>
                 <a:cs typeface="Aptos" pitchFamily="34" charset="-120"/>
               </a:rPr>
-              <a:t>What is the best reason to address human factors, workflow integration, and usability.</a:t>
-            </a:r>
-            <a:endParaRPr lang="en-US" sz="1380" dirty="0"/>
-          </a:p>
-          <a:p>
-            <a:r>
-              <a:rPr lang="en-US" sz="1380" dirty="0">
+              <a:t>What is the best reason to address human factors, workflow.</a:t>
+            </a:r>
+            <a:endParaRPr lang="en-US" sz="1220" dirty="0"/>
+          </a:p>
+          <a:p>
+            <a:pPr indent="0" marL="0">
+              <a:buNone/>
+            </a:pPr>
+            <a:r>
+              <a:rPr lang="en-US" sz="1220" dirty="0">
                 <a:solidFill>
                   <a:srgbClr val="17364A"/>
                 </a:solidFill>
@@ -9659,7 +9818,7 @@
               </a:rPr>
               <a:t>2.</a:t>
             </a:r>
-            <a:endParaRPr lang="en-US" sz="1380" dirty="0"/>
+            <a:endParaRPr lang="en-US" sz="1220" dirty="0"/>
           </a:p>
         </p:txBody>
       </p:sp>
@@ -9737,17 +9896,17 @@
         </p:nvSpPr>
         <p:spPr>
           <a:xfrm>
-            <a:off x="7799832" y="5001768"/>
-            <a:ext cx="3145536" cy="502920"/>
-          </a:xfrm>
-          <a:prstGeom prst="rect">
-            <a:avLst/>
-          </a:prstGeom>
-          <a:noFill/>
-          <a:ln/>
-        </p:spPr>
-        <p:txBody>
-          <a:bodyPr wrap="square" lIns="0" tIns="0" rIns="0" bIns="0" rtlCol="0" anchor="t">
+            <a:off x="7799832" y="4974336"/>
+            <a:ext cx="3145536" cy="576072"/>
+          </a:xfrm>
+          <a:prstGeom prst="rect">
+            <a:avLst/>
+          </a:prstGeom>
+          <a:noFill/>
+          <a:ln/>
+        </p:spPr>
+        <p:txBody>
+          <a:bodyPr wrap="square" lIns="254" tIns="254" rIns="254" bIns="254" rtlCol="0" anchor="t">
             <a:normAutofit/>
           </a:bodyPr>
           <a:lstStyle/>
@@ -9756,7 +9915,7 @@
               <a:buNone/>
             </a:pPr>
             <a:r>
-              <a:rPr lang="en-US" sz="1550" dirty="0">
+              <a:rPr lang="en-US" sz="1320" dirty="0">
                 <a:solidFill>
                   <a:srgbClr val="17364A"/>
                 </a:solidFill>
@@ -9764,9 +9923,9 @@
                 <a:ea typeface="Aptos" pitchFamily="34" charset="-122"/>
                 <a:cs typeface="Aptos" pitchFamily="34" charset="-120"/>
               </a:rPr>
-              <a:t>Use the assignment to test whether you can explain the concept, apply it to a realistic public health situation, and identify what would need review before the work moves forward.</a:t>
-            </a:r>
-            <a:endParaRPr lang="en-US" sz="1550" dirty="0"/>
+              <a:t>Use the assignment to test whether you can explain the concept, apply it to a realistic public health situation, and.</a:t>
+            </a:r>
+            <a:endParaRPr lang="en-US" sz="1320" dirty="0"/>
           </a:p>
         </p:txBody>
       </p:sp>
@@ -10067,49 +10226,58 @@
           <a:ln/>
         </p:spPr>
         <p:txBody>
-          <a:bodyPr wrap="square" lIns="635" tIns="635" rIns="635" bIns="635" rtlCol="0" anchor="t">
+          <a:bodyPr wrap="square" lIns="1016" tIns="1016" rIns="1016" bIns="1016" rtlCol="0" anchor="t">
             <a:normAutofit/>
           </a:bodyPr>
           <a:lstStyle/>
           <a:p>
+            <a:pPr indent="0" marL="0">
+              <a:buNone/>
+            </a:pPr>
             <a:r>
               <a:rPr lang="en-US" sz="2100" dirty="0">
                 <a:solidFill>
-                  <a:srgbClr val="17364A"/>
-                </a:solidFill>
-                <a:latin typeface="Aptos" pitchFamily="34" charset="0"/>
-                <a:ea typeface="Aptos" pitchFamily="34" charset="-122"/>
-                <a:cs typeface="Aptos" pitchFamily="34" charset="-120"/>
-              </a:rPr>
-              <a:t>AI tools succeed or fail inside real public health workflows.</a:t>
+                  <a:srgbClr val="003A63"/>
+                </a:solidFill>
+                <a:latin typeface="Aptos" pitchFamily="34" charset="0"/>
+                <a:ea typeface="Aptos" pitchFamily="34" charset="-122"/>
+                <a:cs typeface="Aptos" pitchFamily="34" charset="-120"/>
+              </a:rPr>
+              <a:t>• AI tools succeed or fail inside real public health workflows.</a:t>
             </a:r>
             <a:endParaRPr lang="en-US" sz="2100" dirty="0"/>
           </a:p>
           <a:p>
+            <a:pPr indent="0" marL="0">
+              <a:buNone/>
+            </a:pPr>
             <a:r>
               <a:rPr lang="en-US" sz="2100" dirty="0">
                 <a:solidFill>
-                  <a:srgbClr val="17364A"/>
-                </a:solidFill>
-                <a:latin typeface="Aptos" pitchFamily="34" charset="0"/>
-                <a:ea typeface="Aptos" pitchFamily="34" charset="-122"/>
-                <a:cs typeface="Aptos" pitchFamily="34" charset="-120"/>
-              </a:rPr>
-              <a:t>Human factors and usability testing help agencies understand how staff actually use systems, where errors may.</a:t>
+                  <a:srgbClr val="003A63"/>
+                </a:solidFill>
+                <a:latin typeface="Aptos" pitchFamily="34" charset="0"/>
+                <a:ea typeface="Aptos" pitchFamily="34" charset="-122"/>
+                <a:cs typeface="Aptos" pitchFamily="34" charset="-120"/>
+              </a:rPr>
+              <a:t>• Human factors and usability testing help agencies understand how staff actually use systems,.</a:t>
             </a:r>
             <a:endParaRPr lang="en-US" sz="2100" dirty="0"/>
           </a:p>
           <a:p>
+            <a:pPr indent="0" marL="0">
+              <a:buNone/>
+            </a:pPr>
             <a:r>
               <a:rPr lang="en-US" sz="2100" dirty="0">
                 <a:solidFill>
-                  <a:srgbClr val="17364A"/>
-                </a:solidFill>
-                <a:latin typeface="Aptos" pitchFamily="34" charset="0"/>
-                <a:ea typeface="Aptos" pitchFamily="34" charset="-122"/>
-                <a:cs typeface="Aptos" pitchFamily="34" charset="-120"/>
-              </a:rPr>
-              <a:t>This module teaches learners to evaluate workflow fit, interface design, alert burden, documentation burden, and.</a:t>
+                  <a:srgbClr val="003A63"/>
+                </a:solidFill>
+                <a:latin typeface="Aptos" pitchFamily="34" charset="0"/>
+                <a:ea typeface="Aptos" pitchFamily="34" charset="-122"/>
+                <a:cs typeface="Aptos" pitchFamily="34" charset="-120"/>
+              </a:rPr>
+              <a:t>• This module teaches learners to evaluate workflow fit, interface design, alert burden,.</a:t>
             </a:r>
             <a:endParaRPr lang="en-US" sz="2100" dirty="0"/>
           </a:p>
@@ -10189,17 +10357,17 @@
         </p:nvSpPr>
         <p:spPr>
           <a:xfrm>
-            <a:off x="8074152" y="1920240"/>
-            <a:ext cx="2825496" cy="1280160"/>
-          </a:xfrm>
-          <a:prstGeom prst="rect">
-            <a:avLst/>
-          </a:prstGeom>
-          <a:noFill/>
-          <a:ln/>
-        </p:spPr>
-        <p:txBody>
-          <a:bodyPr wrap="square" lIns="0" tIns="0" rIns="0" bIns="0" rtlCol="0" anchor="t">
+            <a:off x="8074152" y="1892808"/>
+            <a:ext cx="2825496" cy="1353312"/>
+          </a:xfrm>
+          <a:prstGeom prst="rect">
+            <a:avLst/>
+          </a:prstGeom>
+          <a:noFill/>
+          <a:ln/>
+        </p:spPr>
+        <p:txBody>
+          <a:bodyPr wrap="square" lIns="254" tIns="254" rIns="254" bIns="254" rtlCol="0" anchor="t">
             <a:normAutofit/>
           </a:bodyPr>
           <a:lstStyle/>
@@ -10208,7 +10376,7 @@
               <a:buNone/>
             </a:pPr>
             <a:r>
-              <a:rPr lang="en-US" sz="1550" dirty="0">
+              <a:rPr lang="en-US" sz="1320" dirty="0">
                 <a:solidFill>
                   <a:srgbClr val="17364A"/>
                 </a:solidFill>
@@ -10216,43 +10384,9 @@
                 <a:ea typeface="Aptos" pitchFamily="34" charset="-122"/>
                 <a:cs typeface="Aptos" pitchFamily="34" charset="-120"/>
               </a:rPr>
-              <a:t>Level: applied/foundational</a:t>
-            </a:r>
-            <a:endParaRPr lang="en-US" sz="1550" dirty="0"/>
-          </a:p>
-          <a:p>
-            <a:pPr indent="0" marL="0">
-              <a:buNone/>
-            </a:pPr>
-            <a:r>
-              <a:rPr lang="en-US" sz="1550" dirty="0">
-                <a:solidFill>
-                  <a:srgbClr val="17364A"/>
-                </a:solidFill>
-                <a:latin typeface="Aptos" pitchFamily="34" charset="0"/>
-                <a:ea typeface="Aptos" pitchFamily="34" charset="-122"/>
-                <a:cs typeface="Aptos" pitchFamily="34" charset="-120"/>
-              </a:rPr>
-              <a:t>Primary track: Operations and Data Quality Track</a:t>
-            </a:r>
-            <a:endParaRPr lang="en-US" sz="1550" dirty="0"/>
-          </a:p>
-          <a:p>
-            <a:pPr indent="0" marL="0">
-              <a:buNone/>
-            </a:pPr>
-            <a:r>
-              <a:rPr lang="en-US" sz="1550" dirty="0">
-                <a:solidFill>
-                  <a:srgbClr val="17364A"/>
-                </a:solidFill>
-                <a:latin typeface="Aptos" pitchFamily="34" charset="0"/>
-                <a:ea typeface="Aptos" pitchFamily="34" charset="-122"/>
-                <a:cs typeface="Aptos" pitchFamily="34" charset="-120"/>
-              </a:rPr>
-              <a:t>Appears in tracks: operations-data-quality</a:t>
-            </a:r>
-            <a:endParaRPr lang="en-US" sz="1550" dirty="0"/>
+              <a:t>Level: applied/foundational Primary track: Operations and Data Quality Track Appears in tracks: operations-data-quality</a:t>
+            </a:r>
+            <a:endParaRPr lang="en-US" sz="1320" dirty="0"/>
           </a:p>
         </p:txBody>
       </p:sp>
@@ -10340,13 +10474,16 @@
           <a:ln/>
         </p:spPr>
         <p:txBody>
-          <a:bodyPr wrap="square" lIns="254" tIns="254" rIns="254" bIns="254" rtlCol="0" anchor="t">
+          <a:bodyPr wrap="square" lIns="508" tIns="508" rIns="508" bIns="508" rtlCol="0" anchor="t">
             <a:normAutofit/>
           </a:bodyPr>
           <a:lstStyle/>
           <a:p>
-            <a:r>
-              <a:rPr lang="en-US" sz="1380" dirty="0">
+            <a:pPr indent="0" marL="0">
+              <a:buNone/>
+            </a:pPr>
+            <a:r>
+              <a:rPr lang="en-US" sz="1220" dirty="0">
                 <a:solidFill>
                   <a:srgbClr val="17364A"/>
                 </a:solidFill>
@@ -10356,11 +10493,14 @@
               </a:rPr>
               <a:t>Read the module for shared vocabulary and context.</a:t>
             </a:r>
-            <a:endParaRPr lang="en-US" sz="1380" dirty="0"/>
-          </a:p>
-          <a:p>
-            <a:r>
-              <a:rPr lang="en-US" sz="1380" dirty="0">
+            <a:endParaRPr lang="en-US" sz="1220" dirty="0"/>
+          </a:p>
+          <a:p>
+            <a:pPr indent="0" marL="0">
+              <a:buNone/>
+            </a:pPr>
+            <a:r>
+              <a:rPr lang="en-US" sz="1220" dirty="0">
                 <a:solidFill>
                   <a:srgbClr val="17364A"/>
                 </a:solidFill>
@@ -10370,11 +10510,14 @@
               </a:rPr>
               <a:t>Complete the practical exercise to apply the concept.</a:t>
             </a:r>
-            <a:endParaRPr lang="en-US" sz="1380" dirty="0"/>
-          </a:p>
-          <a:p>
-            <a:r>
-              <a:rPr lang="en-US" sz="1380" dirty="0">
+            <a:endParaRPr lang="en-US" sz="1220" dirty="0"/>
+          </a:p>
+          <a:p>
+            <a:pPr indent="0" marL="0">
+              <a:buNone/>
+            </a:pPr>
+            <a:r>
+              <a:rPr lang="en-US" sz="1220" dirty="0">
                 <a:solidFill>
                   <a:srgbClr val="17364A"/>
                 </a:solidFill>
@@ -10384,7 +10527,7 @@
               </a:rPr>
               <a:t>Use the notes and references for deeper review.</a:t>
             </a:r>
-            <a:endParaRPr lang="en-US" sz="1380" dirty="0"/>
+            <a:endParaRPr lang="en-US" sz="1220" dirty="0"/>
           </a:p>
         </p:txBody>
       </p:sp>
@@ -10685,49 +10828,58 @@
           <a:ln/>
         </p:spPr>
         <p:txBody>
-          <a:bodyPr wrap="square" lIns="635" tIns="635" rIns="635" bIns="635" rtlCol="0" anchor="t">
+          <a:bodyPr wrap="square" lIns="1016" tIns="1016" rIns="1016" bIns="1016" rtlCol="0" anchor="t">
             <a:normAutofit/>
           </a:bodyPr>
           <a:lstStyle/>
           <a:p>
+            <a:pPr indent="0" marL="0">
+              <a:buNone/>
+            </a:pPr>
             <a:r>
               <a:rPr lang="en-US" sz="2100" dirty="0">
                 <a:solidFill>
-                  <a:srgbClr val="17364A"/>
-                </a:solidFill>
-                <a:latin typeface="Aptos" pitchFamily="34" charset="0"/>
-                <a:ea typeface="Aptos" pitchFamily="34" charset="-122"/>
-                <a:cs typeface="Aptos" pitchFamily="34" charset="-120"/>
-              </a:rPr>
-              <a:t>NIST AI Risk Management Framework: https://www.nist.gov/itl/ai-risk-management-framework</a:t>
+                  <a:srgbClr val="003A63"/>
+                </a:solidFill>
+                <a:latin typeface="Aptos" pitchFamily="34" charset="0"/>
+                <a:ea typeface="Aptos" pitchFamily="34" charset="-122"/>
+                <a:cs typeface="Aptos" pitchFamily="34" charset="-120"/>
+              </a:rPr>
+              <a:t>• NIST AI Risk Management Framework: https://www.nist.gov/itl/ai-risk-management-framework</a:t>
             </a:r>
             <a:endParaRPr lang="en-US" sz="2100" dirty="0"/>
           </a:p>
           <a:p>
+            <a:pPr indent="0" marL="0">
+              <a:buNone/>
+            </a:pPr>
             <a:r>
               <a:rPr lang="en-US" sz="2100" dirty="0">
                 <a:solidFill>
-                  <a:srgbClr val="17364A"/>
-                </a:solidFill>
-                <a:latin typeface="Aptos" pitchFamily="34" charset="0"/>
-                <a:ea typeface="Aptos" pitchFamily="34" charset="-122"/>
-                <a:cs typeface="Aptos" pitchFamily="34" charset="-120"/>
-              </a:rPr>
-              <a:t>AHRQ human factors and usability resources</a:t>
+                  <a:srgbClr val="003A63"/>
+                </a:solidFill>
+                <a:latin typeface="Aptos" pitchFamily="34" charset="0"/>
+                <a:ea typeface="Aptos" pitchFamily="34" charset="-122"/>
+                <a:cs typeface="Aptos" pitchFamily="34" charset="-120"/>
+              </a:rPr>
+              <a:t>• AHRQ human factors and usability resources</a:t>
             </a:r>
             <a:endParaRPr lang="en-US" sz="2100" dirty="0"/>
           </a:p>
           <a:p>
+            <a:pPr indent="0" marL="0">
+              <a:buNone/>
+            </a:pPr>
             <a:r>
               <a:rPr lang="en-US" sz="2100" dirty="0">
                 <a:solidFill>
-                  <a:srgbClr val="17364A"/>
-                </a:solidFill>
-                <a:latin typeface="Aptos" pitchFamily="34" charset="0"/>
-                <a:ea typeface="Aptos" pitchFamily="34" charset="-122"/>
-                <a:cs typeface="Aptos" pitchFamily="34" charset="-120"/>
-              </a:rPr>
-              <a:t>NIST Generative AI Profile:.</a:t>
+                  <a:srgbClr val="003A63"/>
+                </a:solidFill>
+                <a:latin typeface="Aptos" pitchFamily="34" charset="0"/>
+                <a:ea typeface="Aptos" pitchFamily="34" charset="-122"/>
+                <a:cs typeface="Aptos" pitchFamily="34" charset="-120"/>
+              </a:rPr>
+              <a:t>• NIST Generative AI Profile:.</a:t>
             </a:r>
             <a:endParaRPr lang="en-US" sz="2100" dirty="0"/>
           </a:p>
@@ -10807,17 +10959,17 @@
         </p:nvSpPr>
         <p:spPr>
           <a:xfrm>
-            <a:off x="7799832" y="1828800"/>
-            <a:ext cx="3145536" cy="685800"/>
-          </a:xfrm>
-          <a:prstGeom prst="rect">
-            <a:avLst/>
-          </a:prstGeom>
-          <a:noFill/>
-          <a:ln/>
-        </p:spPr>
-        <p:txBody>
-          <a:bodyPr wrap="square" lIns="0" tIns="0" rIns="0" bIns="0" rtlCol="0" anchor="t">
+            <a:off x="7799832" y="1801368"/>
+            <a:ext cx="3145536" cy="758952"/>
+          </a:xfrm>
+          <a:prstGeom prst="rect">
+            <a:avLst/>
+          </a:prstGeom>
+          <a:noFill/>
+          <a:ln/>
+        </p:spPr>
+        <p:txBody>
+          <a:bodyPr wrap="square" lIns="254" tIns="254" rIns="254" bIns="254" rtlCol="0" anchor="t">
             <a:normAutofit/>
           </a:bodyPr>
           <a:lstStyle/>
@@ -10826,7 +10978,7 @@
               <a:buNone/>
             </a:pPr>
             <a:r>
-              <a:rPr lang="en-US" sz="1550" dirty="0">
+              <a:rPr lang="en-US" sz="1320" dirty="0">
                 <a:solidFill>
                   <a:srgbClr val="17364A"/>
                 </a:solidFill>
@@ -10836,7 +10988,7 @@
               </a:rPr>
               <a:t>NIST AI Risk Management Framework: https://www.nist.gov/itl/ai-risk-management-framework</a:t>
             </a:r>
-            <a:endParaRPr lang="en-US" sz="1550" dirty="0"/>
+            <a:endParaRPr lang="en-US" sz="1320" dirty="0"/>
           </a:p>
         </p:txBody>
       </p:sp>
@@ -10924,13 +11076,16 @@
           <a:ln/>
         </p:spPr>
         <p:txBody>
-          <a:bodyPr wrap="square" lIns="254" tIns="254" rIns="254" bIns="254" rtlCol="0" anchor="t">
+          <a:bodyPr wrap="square" lIns="508" tIns="508" rIns="508" bIns="508" rtlCol="0" anchor="t">
             <a:normAutofit/>
           </a:bodyPr>
           <a:lstStyle/>
           <a:p>
-            <a:r>
-              <a:rPr lang="en-US" sz="1380" dirty="0">
+            <a:pPr indent="0" marL="0">
+              <a:buNone/>
+            </a:pPr>
+            <a:r>
+              <a:rPr lang="en-US" sz="1220" dirty="0">
                 <a:solidFill>
                   <a:srgbClr val="17364A"/>
                 </a:solidFill>
@@ -10940,11 +11095,14 @@
               </a:rPr>
               <a:t>CDC Public Health Data Strategy and Data Modernization resources:.</a:t>
             </a:r>
-            <a:endParaRPr lang="en-US" sz="1380" dirty="0"/>
-          </a:p>
-          <a:p>
-            <a:r>
-              <a:rPr lang="en-US" sz="1380" dirty="0">
+            <a:endParaRPr lang="en-US" sz="1220" dirty="0"/>
+          </a:p>
+          <a:p>
+            <a:pPr indent="0" marL="0">
+              <a:buNone/>
+            </a:pPr>
+            <a:r>
+              <a:rPr lang="en-US" sz="1220" dirty="0">
                 <a:solidFill>
                   <a:srgbClr val="17364A"/>
                 </a:solidFill>
@@ -10952,9 +11110,9 @@
                 <a:ea typeface="Aptos" pitchFamily="34" charset="-122"/>
                 <a:cs typeface="Aptos" pitchFamily="34" charset="-120"/>
               </a:rPr>
-              <a:t>OWASP Top 10 for LLM Applications, when security or AI integrations are relevant</a:t>
-            </a:r>
-            <a:endParaRPr lang="en-US" sz="1380" dirty="0"/>
+              <a:t>OWASP Top 10 for LLM Applications, when security or AI.</a:t>
+            </a:r>
+            <a:endParaRPr lang="en-US" sz="1220" dirty="0"/>
           </a:p>
         </p:txBody>
       </p:sp>
@@ -11032,17 +11190,17 @@
         </p:nvSpPr>
         <p:spPr>
           <a:xfrm>
-            <a:off x="7799832" y="5001768"/>
-            <a:ext cx="3145536" cy="502920"/>
-          </a:xfrm>
-          <a:prstGeom prst="rect">
-            <a:avLst/>
-          </a:prstGeom>
-          <a:noFill/>
-          <a:ln/>
-        </p:spPr>
-        <p:txBody>
-          <a:bodyPr wrap="square" lIns="0" tIns="0" rIns="0" bIns="0" rtlCol="0" anchor="t">
+            <a:off x="7799832" y="4974336"/>
+            <a:ext cx="3145536" cy="576072"/>
+          </a:xfrm>
+          <a:prstGeom prst="rect">
+            <a:avLst/>
+          </a:prstGeom>
+          <a:noFill/>
+          <a:ln/>
+        </p:spPr>
+        <p:txBody>
+          <a:bodyPr wrap="square" lIns="254" tIns="254" rIns="254" bIns="254" rtlCol="0" anchor="t">
             <a:normAutofit/>
           </a:bodyPr>
           <a:lstStyle/>
@@ -11051,7 +11209,7 @@
               <a:buNone/>
             </a:pPr>
             <a:r>
-              <a:rPr lang="en-US" sz="1550" dirty="0">
+              <a:rPr lang="en-US" sz="1320" dirty="0">
                 <a:solidFill>
                   <a:srgbClr val="17364A"/>
                 </a:solidFill>
@@ -11059,9 +11217,9 @@
                 <a:ea typeface="Aptos" pitchFamily="34" charset="-122"/>
                 <a:cs typeface="Aptos" pitchFamily="34" charset="-120"/>
               </a:rPr>
-              <a:t>Use the concept to clarify workflow changes, dependencies, staffing, procurement requirements, training needs, and implementation checkpoints.</a:t>
-            </a:r>
-            <a:endParaRPr lang="en-US" sz="1550" dirty="0"/>
+              <a:t>Use the concept to clarify workflow changes, dependencies, staffing, procurement requirements, training needs, and.</a:t>
+            </a:r>
+            <a:endParaRPr lang="en-US" sz="1320" dirty="0"/>
           </a:p>
         </p:txBody>
       </p:sp>
@@ -11362,21 +11520,24 @@
           <a:ln/>
         </p:spPr>
         <p:txBody>
-          <a:bodyPr wrap="square" lIns="635" tIns="635" rIns="635" bIns="635" rtlCol="0" anchor="t">
+          <a:bodyPr wrap="square" lIns="1016" tIns="1016" rIns="1016" bIns="1016" rtlCol="0" anchor="t">
             <a:normAutofit/>
           </a:bodyPr>
           <a:lstStyle/>
           <a:p>
+            <a:pPr indent="0" marL="0">
+              <a:buNone/>
+            </a:pPr>
             <a:r>
               <a:rPr lang="en-US" sz="2100" dirty="0">
                 <a:solidFill>
-                  <a:srgbClr val="17364A"/>
-                </a:solidFill>
-                <a:latin typeface="Aptos" pitchFamily="34" charset="0"/>
-                <a:ea typeface="Aptos" pitchFamily="34" charset="-122"/>
-                <a:cs typeface="Aptos" pitchFamily="34" charset="-120"/>
-              </a:rPr>
-              <a:t>Agency privacy, cybersecurity, data governance, procurement, and records management policies</a:t>
+                  <a:srgbClr val="003A63"/>
+                </a:solidFill>
+                <a:latin typeface="Aptos" pitchFamily="34" charset="0"/>
+                <a:ea typeface="Aptos" pitchFamily="34" charset="-122"/>
+                <a:cs typeface="Aptos" pitchFamily="34" charset="-120"/>
+              </a:rPr>
+              <a:t>• Agency privacy, cybersecurity, data governance, procurement, and records management policies</a:t>
             </a:r>
             <a:endParaRPr lang="en-US" sz="2100" dirty="0"/>
           </a:p>
@@ -11456,17 +11617,17 @@
         </p:nvSpPr>
         <p:spPr>
           <a:xfrm>
-            <a:off x="7799832" y="1828800"/>
-            <a:ext cx="3145536" cy="685800"/>
-          </a:xfrm>
-          <a:prstGeom prst="rect">
-            <a:avLst/>
-          </a:prstGeom>
-          <a:noFill/>
-          <a:ln/>
-        </p:spPr>
-        <p:txBody>
-          <a:bodyPr wrap="square" lIns="0" tIns="0" rIns="0" bIns="0" rtlCol="0" anchor="t">
+            <a:off x="7799832" y="1801368"/>
+            <a:ext cx="3145536" cy="758952"/>
+          </a:xfrm>
+          <a:prstGeom prst="rect">
+            <a:avLst/>
+          </a:prstGeom>
+          <a:noFill/>
+          <a:ln/>
+        </p:spPr>
+        <p:txBody>
+          <a:bodyPr wrap="square" lIns="254" tIns="254" rIns="254" bIns="254" rtlCol="0" anchor="t">
             <a:normAutofit/>
           </a:bodyPr>
           <a:lstStyle/>
@@ -11475,7 +11636,7 @@
               <a:buNone/>
             </a:pPr>
             <a:r>
-              <a:rPr lang="en-US" sz="1550" dirty="0">
+              <a:rPr lang="en-US" sz="1320" dirty="0">
                 <a:solidFill>
                   <a:srgbClr val="17364A"/>
                 </a:solidFill>
@@ -11485,7 +11646,7 @@
               </a:rPr>
               <a:t>Agency privacy, cybersecurity, data governance, procurement, and records management policies</a:t>
             </a:r>
-            <a:endParaRPr lang="en-US" sz="1550" dirty="0"/>
+            <a:endParaRPr lang="en-US" sz="1320" dirty="0"/>
           </a:p>
         </p:txBody>
       </p:sp>
@@ -11573,13 +11734,16 @@
           <a:ln/>
         </p:spPr>
         <p:txBody>
-          <a:bodyPr wrap="square" lIns="254" tIns="254" rIns="254" bIns="254" rtlCol="0" anchor="t">
+          <a:bodyPr wrap="square" lIns="508" tIns="508" rIns="508" bIns="508" rtlCol="0" anchor="t">
             <a:normAutofit/>
           </a:bodyPr>
           <a:lstStyle/>
           <a:p>
-            <a:r>
-              <a:rPr lang="en-US" sz="1380" dirty="0">
+            <a:pPr indent="0" marL="0">
+              <a:buNone/>
+            </a:pPr>
+            <a:r>
+              <a:rPr lang="en-US" sz="1220" dirty="0">
                 <a:solidFill>
                   <a:srgbClr val="17364A"/>
                 </a:solidFill>
@@ -11587,9 +11751,9 @@
                 <a:ea typeface="Aptos" pitchFamily="34" charset="-122"/>
                 <a:cs typeface="Aptos" pitchFamily="34" charset="-120"/>
               </a:rPr>
-              <a:t>Agency privacy, cybersecurity, data governance, procurement, and records management policies</a:t>
-            </a:r>
-            <a:endParaRPr lang="en-US" sz="1380" dirty="0"/>
+              <a:t>Agency privacy, cybersecurity, data governance, procurement, and.</a:t>
+            </a:r>
+            <a:endParaRPr lang="en-US" sz="1220" dirty="0"/>
           </a:p>
         </p:txBody>
       </p:sp>
@@ -11667,17 +11831,17 @@
         </p:nvSpPr>
         <p:spPr>
           <a:xfrm>
-            <a:off x="7799832" y="5001768"/>
-            <a:ext cx="3145536" cy="502920"/>
-          </a:xfrm>
-          <a:prstGeom prst="rect">
-            <a:avLst/>
-          </a:prstGeom>
-          <a:noFill/>
-          <a:ln/>
-        </p:spPr>
-        <p:txBody>
-          <a:bodyPr wrap="square" lIns="0" tIns="0" rIns="0" bIns="0" rtlCol="0" anchor="t">
+            <a:off x="7799832" y="4974336"/>
+            <a:ext cx="3145536" cy="576072"/>
+          </a:xfrm>
+          <a:prstGeom prst="rect">
+            <a:avLst/>
+          </a:prstGeom>
+          <a:noFill/>
+          <a:ln/>
+        </p:spPr>
+        <p:txBody>
+          <a:bodyPr wrap="square" lIns="254" tIns="254" rIns="254" bIns="254" rtlCol="0" anchor="t">
             <a:normAutofit/>
           </a:bodyPr>
           <a:lstStyle/>
@@ -11686,7 +11850,7 @@
               <a:buNone/>
             </a:pPr>
             <a:r>
-              <a:rPr lang="en-US" sz="1550" dirty="0">
+              <a:rPr lang="en-US" sz="1320" dirty="0">
                 <a:solidFill>
                   <a:srgbClr val="17364A"/>
                 </a:solidFill>
@@ -11694,9 +11858,9 @@
                 <a:ea typeface="Aptos" pitchFamily="34" charset="-122"/>
                 <a:cs typeface="Aptos" pitchFamily="34" charset="-120"/>
               </a:rPr>
-              <a:t>Use the concept to clarify workflow changes, dependencies, staffing, procurement requirements, training needs, and implementation checkpoints.</a:t>
-            </a:r>
-            <a:endParaRPr lang="en-US" sz="1550" dirty="0"/>
+              <a:t>Use the concept to clarify workflow changes, dependencies, staffing, procurement requirements, training needs, and.</a:t>
+            </a:r>
+            <a:endParaRPr lang="en-US" sz="1320" dirty="0"/>
           </a:p>
         </p:txBody>
       </p:sp>
@@ -11997,63 +12161,75 @@
           <a:ln/>
         </p:spPr>
         <p:txBody>
-          <a:bodyPr wrap="square" lIns="635" tIns="635" rIns="635" bIns="635" rtlCol="0" anchor="t">
+          <a:bodyPr wrap="square" lIns="1016" tIns="1016" rIns="1016" bIns="1016" rtlCol="0" anchor="t">
             <a:normAutofit/>
           </a:bodyPr>
           <a:lstStyle/>
           <a:p>
+            <a:pPr indent="0" marL="0">
+              <a:buNone/>
+            </a:pPr>
             <a:r>
               <a:rPr lang="en-US" sz="1900" dirty="0">
                 <a:solidFill>
-                  <a:srgbClr val="17364A"/>
-                </a:solidFill>
-                <a:latin typeface="Aptos" pitchFamily="34" charset="0"/>
-                <a:ea typeface="Aptos" pitchFamily="34" charset="-122"/>
-                <a:cs typeface="Aptos" pitchFamily="34" charset="-120"/>
-              </a:rPr>
-              <a:t>Play 11: Build and Deploy AI Solutions - This lesson informs Play 11 by helping learners connect the lesson.</a:t>
+                  <a:srgbClr val="003A63"/>
+                </a:solidFill>
+                <a:latin typeface="Aptos" pitchFamily="34" charset="0"/>
+                <a:ea typeface="Aptos" pitchFamily="34" charset="-122"/>
+                <a:cs typeface="Aptos" pitchFamily="34" charset="-120"/>
+              </a:rPr>
+              <a:t>• Play 11: Build and Deploy AI Solutions - This lesson informs Play 11 by helping learners.</a:t>
             </a:r>
             <a:endParaRPr lang="en-US" sz="1900" dirty="0"/>
           </a:p>
           <a:p>
+            <a:pPr indent="0" marL="0">
+              <a:buNone/>
+            </a:pPr>
             <a:r>
               <a:rPr lang="en-US" sz="1900" dirty="0">
                 <a:solidFill>
-                  <a:srgbClr val="17364A"/>
-                </a:solidFill>
-                <a:latin typeface="Aptos" pitchFamily="34" charset="0"/>
-                <a:ea typeface="Aptos" pitchFamily="34" charset="-122"/>
-                <a:cs typeface="Aptos" pitchFamily="34" charset="-120"/>
-              </a:rPr>
-              <a:t>Play 2: Readiness Assessment - This lesson informs Play 2 by helping learners connect the lesson topic to.</a:t>
+                  <a:srgbClr val="003A63"/>
+                </a:solidFill>
+                <a:latin typeface="Aptos" pitchFamily="34" charset="0"/>
+                <a:ea typeface="Aptos" pitchFamily="34" charset="-122"/>
+                <a:cs typeface="Aptos" pitchFamily="34" charset="-120"/>
+              </a:rPr>
+              <a:t>• Play 2: Readiness Assessment - This lesson informs Play 2 by helping learners connect the.</a:t>
             </a:r>
             <a:endParaRPr lang="en-US" sz="1900" dirty="0"/>
           </a:p>
           <a:p>
+            <a:pPr indent="0" marL="0">
+              <a:buNone/>
+            </a:pPr>
             <a:r>
               <a:rPr lang="en-US" sz="1900" dirty="0">
                 <a:solidFill>
-                  <a:srgbClr val="17364A"/>
-                </a:solidFill>
-                <a:latin typeface="Aptos" pitchFamily="34" charset="0"/>
-                <a:ea typeface="Aptos" pitchFamily="34" charset="-122"/>
-                <a:cs typeface="Aptos" pitchFamily="34" charset="-120"/>
-              </a:rPr>
-              <a:t>Play 1: Vision &amp; Guardrails - This lesson informs Play 1 by helping learners connect the lesson topic to.</a:t>
+                  <a:srgbClr val="003A63"/>
+                </a:solidFill>
+                <a:latin typeface="Aptos" pitchFamily="34" charset="0"/>
+                <a:ea typeface="Aptos" pitchFamily="34" charset="-122"/>
+                <a:cs typeface="Aptos" pitchFamily="34" charset="-120"/>
+              </a:rPr>
+              <a:t>• Play 1: Vision &amp; Guardrails - This lesson informs Play 1 by helping learners connect the.</a:t>
             </a:r>
             <a:endParaRPr lang="en-US" sz="1900" dirty="0"/>
           </a:p>
           <a:p>
+            <a:pPr indent="0" marL="0">
+              <a:buNone/>
+            </a:pPr>
             <a:r>
               <a:rPr lang="en-US" sz="1900" dirty="0">
                 <a:solidFill>
-                  <a:srgbClr val="17364A"/>
-                </a:solidFill>
-                <a:latin typeface="Aptos" pitchFamily="34" charset="0"/>
-                <a:ea typeface="Aptos" pitchFamily="34" charset="-122"/>
-                <a:cs typeface="Aptos" pitchFamily="34" charset="-120"/>
-              </a:rPr>
-              <a:t>Play 7: Prioritize Use Cases - This lesson informs Play 7 by helping learners connect the lesson topic to.</a:t>
+                  <a:srgbClr val="003A63"/>
+                </a:solidFill>
+                <a:latin typeface="Aptos" pitchFamily="34" charset="0"/>
+                <a:ea typeface="Aptos" pitchFamily="34" charset="-122"/>
+                <a:cs typeface="Aptos" pitchFamily="34" charset="-120"/>
+              </a:rPr>
+              <a:t>• Play 7: Prioritize Use Cases - This lesson informs Play 7 by helping learners connect the.</a:t>
             </a:r>
             <a:endParaRPr lang="en-US" sz="1900" dirty="0"/>
           </a:p>
@@ -12133,17 +12309,17 @@
         </p:nvSpPr>
         <p:spPr>
           <a:xfrm>
-            <a:off x="8211312" y="1920240"/>
-            <a:ext cx="2734056" cy="1463040"/>
-          </a:xfrm>
-          <a:prstGeom prst="rect">
-            <a:avLst/>
-          </a:prstGeom>
-          <a:noFill/>
-          <a:ln/>
-        </p:spPr>
-        <p:txBody>
-          <a:bodyPr wrap="square" lIns="0" tIns="0" rIns="0" bIns="0" rtlCol="0" anchor="t">
+            <a:off x="8211312" y="1892808"/>
+            <a:ext cx="2734056" cy="1536192"/>
+          </a:xfrm>
+          <a:prstGeom prst="rect">
+            <a:avLst/>
+          </a:prstGeom>
+          <a:noFill/>
+          <a:ln/>
+        </p:spPr>
+        <p:txBody>
+          <a:bodyPr wrap="square" lIns="254" tIns="254" rIns="254" bIns="254" rtlCol="0" anchor="t">
             <a:normAutofit/>
           </a:bodyPr>
           <a:lstStyle/>
@@ -12152,7 +12328,7 @@
               <a:buNone/>
             </a:pPr>
             <a:r>
-              <a:rPr lang="en-US" sz="1550" dirty="0">
+              <a:rPr lang="en-US" sz="1320" dirty="0">
                 <a:solidFill>
                   <a:srgbClr val="17364A"/>
                 </a:solidFill>
@@ -12160,9 +12336,9 @@
                 <a:ea typeface="Aptos" pitchFamily="34" charset="-122"/>
                 <a:cs typeface="Aptos" pitchFamily="34" charset="-120"/>
               </a:rPr>
-              <a:t>Use the related plays to identify decisions, participants, timing, approvals, and documentation needed for responsible implementation.</a:t>
-            </a:r>
-            <a:endParaRPr lang="en-US" sz="1550" dirty="0"/>
+              <a:t>Use the related plays to identify decisions, participants, timing, approvals, and documentation needed for responsible.</a:t>
+            </a:r>
+            <a:endParaRPr lang="en-US" sz="1320" dirty="0"/>
           </a:p>
         </p:txBody>
       </p:sp>
@@ -12250,13 +12426,16 @@
           <a:ln/>
         </p:spPr>
         <p:txBody>
-          <a:bodyPr wrap="square" lIns="254" tIns="254" rIns="254" bIns="254" rtlCol="0" anchor="t">
+          <a:bodyPr wrap="square" lIns="508" tIns="508" rIns="508" bIns="508" rtlCol="0" anchor="t">
             <a:normAutofit/>
           </a:bodyPr>
           <a:lstStyle/>
           <a:p>
-            <a:r>
-              <a:rPr lang="en-US" sz="1380" dirty="0">
+            <a:pPr indent="0" marL="0">
+              <a:buNone/>
+            </a:pPr>
+            <a:r>
+              <a:rPr lang="en-US" sz="1220" dirty="0">
                 <a:solidFill>
                   <a:srgbClr val="17364A"/>
                 </a:solidFill>
@@ -12266,11 +12445,14 @@
               </a:rPr>
               <a:t>Locate the decision point in the playbook sequence.</a:t>
             </a:r>
-            <a:endParaRPr lang="en-US" sz="1380" dirty="0"/>
-          </a:p>
-          <a:p>
-            <a:r>
-              <a:rPr lang="en-US" sz="1380" dirty="0">
+            <a:endParaRPr lang="en-US" sz="1220" dirty="0"/>
+          </a:p>
+          <a:p>
+            <a:pPr indent="0" marL="0">
+              <a:buNone/>
+            </a:pPr>
+            <a:r>
+              <a:rPr lang="en-US" sz="1220" dirty="0">
                 <a:solidFill>
                   <a:srgbClr val="17364A"/>
                 </a:solidFill>
@@ -12280,11 +12462,14 @@
               </a:rPr>
               <a:t>Identify who should participate in the work.</a:t>
             </a:r>
-            <a:endParaRPr lang="en-US" sz="1380" dirty="0"/>
-          </a:p>
-          <a:p>
-            <a:r>
-              <a:rPr lang="en-US" sz="1380" dirty="0">
+            <a:endParaRPr lang="en-US" sz="1220" dirty="0"/>
+          </a:p>
+          <a:p>
+            <a:pPr indent="0" marL="0">
+              <a:buNone/>
+            </a:pPr>
+            <a:r>
+              <a:rPr lang="en-US" sz="1220" dirty="0">
                 <a:solidFill>
                   <a:srgbClr val="17364A"/>
                 </a:solidFill>
@@ -12294,7 +12479,7 @@
               </a:rPr>
               <a:t>Document the review, approval, or implementation step.</a:t>
             </a:r>
-            <a:endParaRPr lang="en-US" sz="1380" dirty="0"/>
+            <a:endParaRPr lang="en-US" sz="1220" dirty="0"/>
           </a:p>
         </p:txBody>
       </p:sp>
@@ -12595,63 +12780,75 @@
           <a:ln/>
         </p:spPr>
         <p:txBody>
-          <a:bodyPr wrap="square" lIns="635" tIns="635" rIns="635" bIns="635" rtlCol="0" anchor="t">
+          <a:bodyPr wrap="square" lIns="1016" tIns="1016" rIns="1016" bIns="1016" rtlCol="0" anchor="t">
             <a:normAutofit/>
           </a:bodyPr>
           <a:lstStyle/>
           <a:p>
+            <a:pPr indent="0" marL="0">
+              <a:buNone/>
+            </a:pPr>
             <a:r>
               <a:rPr lang="en-US" sz="1850" dirty="0">
                 <a:solidFill>
-                  <a:srgbClr val="17364A"/>
-                </a:solidFill>
-                <a:latin typeface="Aptos" pitchFamily="34" charset="0"/>
-                <a:ea typeface="Aptos" pitchFamily="34" charset="-122"/>
-                <a:cs typeface="Aptos" pitchFamily="34" charset="-120"/>
-              </a:rPr>
-              <a:t>Tool 4: AI Policy Landscape Scan (Worksheet) - Use AI Policy Landscape Scan to translate this lesson into a.</a:t>
+                  <a:srgbClr val="003A63"/>
+                </a:solidFill>
+                <a:latin typeface="Aptos" pitchFamily="34" charset="0"/>
+                <a:ea typeface="Aptos" pitchFamily="34" charset="-122"/>
+                <a:cs typeface="Aptos" pitchFamily="34" charset="-120"/>
+              </a:rPr>
+              <a:t>• Tool 4: AI Policy Landscape Scan (Worksheet) - Use AI Policy Landscape Scan to translate this.</a:t>
             </a:r>
             <a:endParaRPr lang="en-US" sz="1850" dirty="0"/>
           </a:p>
           <a:p>
+            <a:pPr indent="0" marL="0">
+              <a:buNone/>
+            </a:pPr>
             <a:r>
               <a:rPr lang="en-US" sz="1850" dirty="0">
                 <a:solidFill>
-                  <a:srgbClr val="17364A"/>
-                </a:solidFill>
-                <a:latin typeface="Aptos" pitchFamily="34" charset="0"/>
-                <a:ea typeface="Aptos" pitchFamily="34" charset="-122"/>
-                <a:cs typeface="Aptos" pitchFamily="34" charset="-120"/>
-              </a:rPr>
-              <a:t>Tool 5: AI Environmental and Resource Impact Review (Checklist) - Use this tool to complete or strengthen.</a:t>
+                  <a:srgbClr val="003A63"/>
+                </a:solidFill>
+                <a:latin typeface="Aptos" pitchFamily="34" charset="0"/>
+                <a:ea typeface="Aptos" pitchFamily="34" charset="-122"/>
+                <a:cs typeface="Aptos" pitchFamily="34" charset="-120"/>
+              </a:rPr>
+              <a:t>• Tool 5: AI Environmental and Resource Impact Review (Checklist) - Use this tool to complete or.</a:t>
             </a:r>
             <a:endParaRPr lang="en-US" sz="1850" dirty="0"/>
           </a:p>
           <a:p>
+            <a:pPr indent="0" marL="0">
+              <a:buNone/>
+            </a:pPr>
             <a:r>
               <a:rPr lang="en-US" sz="1850" dirty="0">
                 <a:solidFill>
-                  <a:srgbClr val="17364A"/>
-                </a:solidFill>
-                <a:latin typeface="Aptos" pitchFamily="34" charset="0"/>
-                <a:ea typeface="Aptos" pitchFamily="34" charset="-122"/>
-                <a:cs typeface="Aptos" pitchFamily="34" charset="-120"/>
-              </a:rPr>
-              <a:t>Tool 6: Human-Centered AI Decision Rule Checklist (Checklist) - Use Human-Centered AI Decision Rule.</a:t>
+                  <a:srgbClr val="003A63"/>
+                </a:solidFill>
+                <a:latin typeface="Aptos" pitchFamily="34" charset="0"/>
+                <a:ea typeface="Aptos" pitchFamily="34" charset="-122"/>
+                <a:cs typeface="Aptos" pitchFamily="34" charset="-120"/>
+              </a:rPr>
+              <a:t>• Tool 6: Human-Centered AI Decision Rule Checklist (Checklist) - Use Human-Centered AI Decision.</a:t>
             </a:r>
             <a:endParaRPr lang="en-US" sz="1850" dirty="0"/>
           </a:p>
           <a:p>
+            <a:pPr indent="0" marL="0">
+              <a:buNone/>
+            </a:pPr>
             <a:r>
               <a:rPr lang="en-US" sz="1850" dirty="0">
                 <a:solidFill>
-                  <a:srgbClr val="17364A"/>
-                </a:solidFill>
-                <a:latin typeface="Aptos" pitchFamily="34" charset="0"/>
-                <a:ea typeface="Aptos" pitchFamily="34" charset="-122"/>
-                <a:cs typeface="Aptos" pitchFamily="34" charset="-120"/>
-              </a:rPr>
-              <a:t>Tool 8: AI Project Charter (Planning) - Use AI Project Charter to translate this lesson into a documented.</a:t>
+                  <a:srgbClr val="003A63"/>
+                </a:solidFill>
+                <a:latin typeface="Aptos" pitchFamily="34" charset="0"/>
+                <a:ea typeface="Aptos" pitchFamily="34" charset="-122"/>
+                <a:cs typeface="Aptos" pitchFamily="34" charset="-120"/>
+              </a:rPr>
+              <a:t>• Tool 8: AI Project Charter (Planning) - Use AI Project Charter to translate this lesson into a.</a:t>
             </a:r>
             <a:endParaRPr lang="en-US" sz="1850" dirty="0"/>
           </a:p>
@@ -12731,17 +12928,17 @@
         </p:nvSpPr>
         <p:spPr>
           <a:xfrm>
-            <a:off x="8211312" y="1920240"/>
-            <a:ext cx="2734056" cy="1463040"/>
-          </a:xfrm>
-          <a:prstGeom prst="rect">
-            <a:avLst/>
-          </a:prstGeom>
-          <a:noFill/>
-          <a:ln/>
-        </p:spPr>
-        <p:txBody>
-          <a:bodyPr wrap="square" lIns="0" tIns="0" rIns="0" bIns="0" rtlCol="0" anchor="t">
+            <a:off x="8211312" y="1892808"/>
+            <a:ext cx="2734056" cy="1536192"/>
+          </a:xfrm>
+          <a:prstGeom prst="rect">
+            <a:avLst/>
+          </a:prstGeom>
+          <a:noFill/>
+          <a:ln/>
+        </p:spPr>
+        <p:txBody>
+          <a:bodyPr wrap="square" lIns="254" tIns="254" rIns="254" bIns="254" rtlCol="0" anchor="t">
             <a:normAutofit/>
           </a:bodyPr>
           <a:lstStyle/>
@@ -12750,7 +12947,7 @@
               <a:buNone/>
             </a:pPr>
             <a:r>
-              <a:rPr lang="en-US" sz="1550" dirty="0">
+              <a:rPr lang="en-US" sz="1320" dirty="0">
                 <a:solidFill>
                   <a:srgbClr val="17364A"/>
                 </a:solidFill>
@@ -12758,9 +12955,9 @@
                 <a:ea typeface="Aptos" pitchFamily="34" charset="-122"/>
                 <a:cs typeface="Aptos" pitchFamily="34" charset="-120"/>
               </a:rPr>
-              <a:t>Use linked tools when your department needs a structured worksheet, template, checklist, review process, or documentation artifact.</a:t>
-            </a:r>
-            <a:endParaRPr lang="en-US" sz="1550" dirty="0"/>
+              <a:t>Use linked tools when your department needs a structured worksheet, template, checklist, review process, or.</a:t>
+            </a:r>
+            <a:endParaRPr lang="en-US" sz="1320" dirty="0"/>
           </a:p>
         </p:txBody>
       </p:sp>
@@ -12848,13 +13045,16 @@
           <a:ln/>
         </p:spPr>
         <p:txBody>
-          <a:bodyPr wrap="square" lIns="254" tIns="254" rIns="254" bIns="254" rtlCol="0" anchor="t">
+          <a:bodyPr wrap="square" lIns="508" tIns="508" rIns="508" bIns="508" rtlCol="0" anchor="t">
             <a:normAutofit/>
           </a:bodyPr>
           <a:lstStyle/>
           <a:p>
-            <a:r>
-              <a:rPr lang="en-US" sz="1380" dirty="0">
+            <a:pPr indent="0" marL="0">
+              <a:buNone/>
+            </a:pPr>
+            <a:r>
+              <a:rPr lang="en-US" sz="1220" dirty="0">
                 <a:solidFill>
                   <a:srgbClr val="17364A"/>
                 </a:solidFill>
@@ -12864,11 +13064,14 @@
               </a:rPr>
               <a:t>Use a tool when no comparable local process exists.</a:t>
             </a:r>
-            <a:endParaRPr lang="en-US" sz="1380" dirty="0"/>
-          </a:p>
-          <a:p>
-            <a:r>
-              <a:rPr lang="en-US" sz="1380" dirty="0">
+            <a:endParaRPr lang="en-US" sz="1220" dirty="0"/>
+          </a:p>
+          <a:p>
+            <a:pPr indent="0" marL="0">
+              <a:buNone/>
+            </a:pPr>
+            <a:r>
+              <a:rPr lang="en-US" sz="1220" dirty="0">
                 <a:solidFill>
                   <a:srgbClr val="17364A"/>
                 </a:solidFill>
@@ -12876,13 +13079,16 @@
                 <a:ea typeface="Aptos" pitchFamily="34" charset="-122"/>
                 <a:cs typeface="Aptos" pitchFamily="34" charset="-120"/>
               </a:rPr>
-              <a:t>Adapt existing department templates when they already fit the purpose.</a:t>
-            </a:r>
-            <a:endParaRPr lang="en-US" sz="1380" dirty="0"/>
-          </a:p>
-          <a:p>
-            <a:r>
-              <a:rPr lang="en-US" sz="1380" dirty="0">
+              <a:t>Adapt existing department templates when they already fit the.</a:t>
+            </a:r>
+            <a:endParaRPr lang="en-US" sz="1220" dirty="0"/>
+          </a:p>
+          <a:p>
+            <a:pPr indent="0" marL="0">
+              <a:buNone/>
+            </a:pPr>
+            <a:r>
+              <a:rPr lang="en-US" sz="1220" dirty="0">
                 <a:solidFill>
                   <a:srgbClr val="17364A"/>
                 </a:solidFill>
@@ -12892,7 +13098,7 @@
               </a:rPr>
               <a:t>Save the completed artifact as evidence of the decision.</a:t>
             </a:r>
-            <a:endParaRPr lang="en-US" sz="1380" dirty="0"/>
+            <a:endParaRPr lang="en-US" sz="1220" dirty="0"/>
           </a:p>
         </p:txBody>
       </p:sp>
@@ -13193,49 +13399,58 @@
           <a:ln/>
         </p:spPr>
         <p:txBody>
-          <a:bodyPr wrap="square" lIns="635" tIns="635" rIns="635" bIns="635" rtlCol="0" anchor="t">
+          <a:bodyPr wrap="square" lIns="1016" tIns="1016" rIns="1016" bIns="1016" rtlCol="0" anchor="t">
             <a:normAutofit/>
           </a:bodyPr>
           <a:lstStyle/>
           <a:p>
+            <a:pPr indent="0" marL="0">
+              <a:buNone/>
+            </a:pPr>
             <a:r>
               <a:rPr lang="en-US" sz="2100" dirty="0">
                 <a:solidFill>
-                  <a:srgbClr val="17364A"/>
-                </a:solidFill>
-                <a:latin typeface="Aptos" pitchFamily="34" charset="0"/>
-                <a:ea typeface="Aptos" pitchFamily="34" charset="-122"/>
-                <a:cs typeface="Aptos" pitchFamily="34" charset="-120"/>
-              </a:rPr>
-              <a:t>Explain the purpose of human factors, workflow integration, and usability testing in public health AI.</a:t>
+                  <a:srgbClr val="003A63"/>
+                </a:solidFill>
+                <a:latin typeface="Aptos" pitchFamily="34" charset="0"/>
+                <a:ea typeface="Aptos" pitchFamily="34" charset="-122"/>
+                <a:cs typeface="Aptos" pitchFamily="34" charset="-120"/>
+              </a:rPr>
+              <a:t>• Explain the purpose of human factors, workflow integration, and usability testing in public.</a:t>
             </a:r>
             <a:endParaRPr lang="en-US" sz="2100" dirty="0"/>
           </a:p>
           <a:p>
+            <a:pPr indent="0" marL="0">
+              <a:buNone/>
+            </a:pPr>
             <a:r>
               <a:rPr lang="en-US" sz="2100" dirty="0">
                 <a:solidFill>
-                  <a:srgbClr val="17364A"/>
-                </a:solidFill>
-                <a:latin typeface="Aptos" pitchFamily="34" charset="0"/>
-                <a:ea typeface="Aptos" pitchFamily="34" charset="-122"/>
-                <a:cs typeface="Aptos" pitchFamily="34" charset="-120"/>
-              </a:rPr>
-              <a:t>Identify the technical, operational, privacy, security, equity, and governance issues associated with.</a:t>
+                  <a:srgbClr val="003A63"/>
+                </a:solidFill>
+                <a:latin typeface="Aptos" pitchFamily="34" charset="0"/>
+                <a:ea typeface="Aptos" pitchFamily="34" charset="-122"/>
+                <a:cs typeface="Aptos" pitchFamily="34" charset="-120"/>
+              </a:rPr>
+              <a:t>• Identify the technical, operational, privacy, security, equity, and governance issues.</a:t>
             </a:r>
             <a:endParaRPr lang="en-US" sz="2100" dirty="0"/>
           </a:p>
           <a:p>
+            <a:pPr indent="0" marL="0">
+              <a:buNone/>
+            </a:pPr>
             <a:r>
               <a:rPr lang="en-US" sz="2100" dirty="0">
                 <a:solidFill>
-                  <a:srgbClr val="17364A"/>
-                </a:solidFill>
-                <a:latin typeface="Aptos" pitchFamily="34" charset="0"/>
-                <a:ea typeface="Aptos" pitchFamily="34" charset="-122"/>
-                <a:cs typeface="Aptos" pitchFamily="34" charset="-120"/>
-              </a:rPr>
-              <a:t>Apply the topic to a real or realistic public health workflow, system, or implementation scenario.</a:t>
+                  <a:srgbClr val="003A63"/>
+                </a:solidFill>
+                <a:latin typeface="Aptos" pitchFamily="34" charset="0"/>
+                <a:ea typeface="Aptos" pitchFamily="34" charset="-122"/>
+                <a:cs typeface="Aptos" pitchFamily="34" charset="-120"/>
+              </a:rPr>
+              <a:t>• Apply the topic to a real or realistic public health workflow, system, or implementation.</a:t>
             </a:r>
             <a:endParaRPr lang="en-US" sz="2100" dirty="0"/>
           </a:p>
@@ -13315,17 +13530,17 @@
         </p:nvSpPr>
         <p:spPr>
           <a:xfrm>
-            <a:off x="7799832" y="1828800"/>
-            <a:ext cx="3145536" cy="685800"/>
-          </a:xfrm>
-          <a:prstGeom prst="rect">
-            <a:avLst/>
-          </a:prstGeom>
-          <a:noFill/>
-          <a:ln/>
-        </p:spPr>
-        <p:txBody>
-          <a:bodyPr wrap="square" lIns="0" tIns="0" rIns="0" bIns="0" rtlCol="0" anchor="t">
+            <a:off x="7799832" y="1801368"/>
+            <a:ext cx="3145536" cy="758952"/>
+          </a:xfrm>
+          <a:prstGeom prst="rect">
+            <a:avLst/>
+          </a:prstGeom>
+          <a:noFill/>
+          <a:ln/>
+        </p:spPr>
+        <p:txBody>
+          <a:bodyPr wrap="square" lIns="254" tIns="254" rIns="254" bIns="254" rtlCol="0" anchor="t">
             <a:normAutofit/>
           </a:bodyPr>
           <a:lstStyle/>
@@ -13334,7 +13549,7 @@
               <a:buNone/>
             </a:pPr>
             <a:r>
-              <a:rPr lang="en-US" sz="1550" dirty="0">
+              <a:rPr lang="en-US" sz="1320" dirty="0">
                 <a:solidFill>
                   <a:srgbClr val="17364A"/>
                 </a:solidFill>
@@ -13344,7 +13559,7 @@
               </a:rPr>
               <a:t>Explain the purpose of human factors, workflow integration, and usability testing in public health AI.</a:t>
             </a:r>
-            <a:endParaRPr lang="en-US" sz="1550" dirty="0"/>
+            <a:endParaRPr lang="en-US" sz="1320" dirty="0"/>
           </a:p>
         </p:txBody>
       </p:sp>
@@ -13432,13 +13647,16 @@
           <a:ln/>
         </p:spPr>
         <p:txBody>
-          <a:bodyPr wrap="square" lIns="254" tIns="254" rIns="254" bIns="254" rtlCol="0" anchor="t">
+          <a:bodyPr wrap="square" lIns="508" tIns="508" rIns="508" bIns="508" rtlCol="0" anchor="t">
             <a:normAutofit/>
           </a:bodyPr>
           <a:lstStyle/>
           <a:p>
-            <a:r>
-              <a:rPr lang="en-US" sz="1380" dirty="0">
+            <a:pPr indent="0" marL="0">
+              <a:buNone/>
+            </a:pPr>
+            <a:r>
+              <a:rPr lang="en-US" sz="1220" dirty="0">
                 <a:solidFill>
                   <a:srgbClr val="17364A"/>
                 </a:solidFill>
@@ -13446,13 +13664,16 @@
                 <a:ea typeface="Aptos" pitchFamily="34" charset="-122"/>
                 <a:cs typeface="Aptos" pitchFamily="34" charset="-120"/>
               </a:rPr>
-              <a:t>Explain the purpose of human factors, workflow integration, and usability testing in.</a:t>
-            </a:r>
-            <a:endParaRPr lang="en-US" sz="1380" dirty="0"/>
-          </a:p>
-          <a:p>
-            <a:r>
-              <a:rPr lang="en-US" sz="1380" dirty="0">
+              <a:t>Explain the purpose of human factors, workflow integration, and.</a:t>
+            </a:r>
+            <a:endParaRPr lang="en-US" sz="1220" dirty="0"/>
+          </a:p>
+          <a:p>
+            <a:pPr indent="0" marL="0">
+              <a:buNone/>
+            </a:pPr>
+            <a:r>
+              <a:rPr lang="en-US" sz="1220" dirty="0">
                 <a:solidFill>
                   <a:srgbClr val="17364A"/>
                 </a:solidFill>
@@ -13460,13 +13681,16 @@
                 <a:ea typeface="Aptos" pitchFamily="34" charset="-122"/>
                 <a:cs typeface="Aptos" pitchFamily="34" charset="-120"/>
               </a:rPr>
-              <a:t>Identify the technical, operational, privacy, security, equity, and governance issues.</a:t>
-            </a:r>
-            <a:endParaRPr lang="en-US" sz="1380" dirty="0"/>
-          </a:p>
-          <a:p>
-            <a:r>
-              <a:rPr lang="en-US" sz="1380" dirty="0">
+              <a:t>Identify the technical, operational, privacy, security, equity,.</a:t>
+            </a:r>
+            <a:endParaRPr lang="en-US" sz="1220" dirty="0"/>
+          </a:p>
+          <a:p>
+            <a:pPr indent="0" marL="0">
+              <a:buNone/>
+            </a:pPr>
+            <a:r>
+              <a:rPr lang="en-US" sz="1220" dirty="0">
                 <a:solidFill>
                   <a:srgbClr val="17364A"/>
                 </a:solidFill>
@@ -13474,9 +13698,9 @@
                 <a:ea typeface="Aptos" pitchFamily="34" charset="-122"/>
                 <a:cs typeface="Aptos" pitchFamily="34" charset="-120"/>
               </a:rPr>
-              <a:t>Recognize common failure modes that can affect safety, accuracy, trust, workflow fit, or.</a:t>
-            </a:r>
-            <a:endParaRPr lang="en-US" sz="1380" dirty="0"/>
+              <a:t>Recognize common failure modes that can affect safety, accuracy,.</a:t>
+            </a:r>
+            <a:endParaRPr lang="en-US" sz="1220" dirty="0"/>
           </a:p>
         </p:txBody>
       </p:sp>
@@ -13554,17 +13778,17 @@
         </p:nvSpPr>
         <p:spPr>
           <a:xfrm>
-            <a:off x="7799832" y="5001768"/>
-            <a:ext cx="3145536" cy="502920"/>
-          </a:xfrm>
-          <a:prstGeom prst="rect">
-            <a:avLst/>
-          </a:prstGeom>
-          <a:noFill/>
-          <a:ln/>
-        </p:spPr>
-        <p:txBody>
-          <a:bodyPr wrap="square" lIns="0" tIns="0" rIns="0" bIns="0" rtlCol="0" anchor="t">
+            <a:off x="7799832" y="4974336"/>
+            <a:ext cx="3145536" cy="576072"/>
+          </a:xfrm>
+          <a:prstGeom prst="rect">
+            <a:avLst/>
+          </a:prstGeom>
+          <a:noFill/>
+          <a:ln/>
+        </p:spPr>
+        <p:txBody>
+          <a:bodyPr wrap="square" lIns="254" tIns="254" rIns="254" bIns="254" rtlCol="0" anchor="t">
             <a:normAutofit/>
           </a:bodyPr>
           <a:lstStyle/>
@@ -13573,7 +13797,7 @@
               <a:buNone/>
             </a:pPr>
             <a:r>
-              <a:rPr lang="en-US" sz="1550" dirty="0">
+              <a:rPr lang="en-US" sz="1320" dirty="0">
                 <a:solidFill>
                   <a:srgbClr val="17364A"/>
                 </a:solidFill>
@@ -13581,9 +13805,9 @@
                 <a:ea typeface="Aptos" pitchFamily="34" charset="-122"/>
                 <a:cs typeface="Aptos" pitchFamily="34" charset="-120"/>
               </a:rPr>
-              <a:t>Use the assignment to test whether you can explain the concept, apply it to a realistic public health situation, and identify what would need review before the work moves forward.</a:t>
-            </a:r>
-            <a:endParaRPr lang="en-US" sz="1550" dirty="0"/>
+              <a:t>Use the assignment to test whether you can explain the concept, apply it to a realistic public health situation, and.</a:t>
+            </a:r>
+            <a:endParaRPr lang="en-US" sz="1320" dirty="0"/>
           </a:p>
         </p:txBody>
       </p:sp>
@@ -13884,21 +14108,24 @@
           <a:ln/>
         </p:spPr>
         <p:txBody>
-          <a:bodyPr wrap="square" lIns="635" tIns="635" rIns="635" bIns="635" rtlCol="0" anchor="t">
+          <a:bodyPr wrap="square" lIns="1016" tIns="1016" rIns="1016" bIns="1016" rtlCol="0" anchor="t">
             <a:normAutofit/>
           </a:bodyPr>
           <a:lstStyle/>
           <a:p>
+            <a:pPr indent="0" marL="0">
+              <a:buNone/>
+            </a:pPr>
             <a:r>
               <a:rPr lang="en-US" sz="2100" dirty="0">
                 <a:solidFill>
-                  <a:srgbClr val="17364A"/>
-                </a:solidFill>
-                <a:latin typeface="Aptos" pitchFamily="34" charset="0"/>
-                <a:ea typeface="Aptos" pitchFamily="34" charset="-122"/>
-                <a:cs typeface="Aptos" pitchFamily="34" charset="-120"/>
-              </a:rPr>
-              <a:t>Produce a workflow usability test plan that can support readiness assessment, governance review,.</a:t>
+                  <a:srgbClr val="003A63"/>
+                </a:solidFill>
+                <a:latin typeface="Aptos" pitchFamily="34" charset="0"/>
+                <a:ea typeface="Aptos" pitchFamily="34" charset="-122"/>
+                <a:cs typeface="Aptos" pitchFamily="34" charset="-120"/>
+              </a:rPr>
+              <a:t>• Produce a workflow usability test plan that can support readiness assessment, governance.</a:t>
             </a:r>
             <a:endParaRPr lang="en-US" sz="2100" dirty="0"/>
           </a:p>
@@ -13978,17 +14205,17 @@
         </p:nvSpPr>
         <p:spPr>
           <a:xfrm>
-            <a:off x="7799832" y="1828800"/>
-            <a:ext cx="3145536" cy="685800"/>
-          </a:xfrm>
-          <a:prstGeom prst="rect">
-            <a:avLst/>
-          </a:prstGeom>
-          <a:noFill/>
-          <a:ln/>
-        </p:spPr>
-        <p:txBody>
-          <a:bodyPr wrap="square" lIns="0" tIns="0" rIns="0" bIns="0" rtlCol="0" anchor="t">
+            <a:off x="7799832" y="1801368"/>
+            <a:ext cx="3145536" cy="758952"/>
+          </a:xfrm>
+          <a:prstGeom prst="rect">
+            <a:avLst/>
+          </a:prstGeom>
+          <a:noFill/>
+          <a:ln/>
+        </p:spPr>
+        <p:txBody>
+          <a:bodyPr wrap="square" lIns="254" tIns="254" rIns="254" bIns="254" rtlCol="0" anchor="t">
             <a:normAutofit/>
           </a:bodyPr>
           <a:lstStyle/>
@@ -13997,7 +14224,7 @@
               <a:buNone/>
             </a:pPr>
             <a:r>
-              <a:rPr lang="en-US" sz="1550" dirty="0">
+              <a:rPr lang="en-US" sz="1320" dirty="0">
                 <a:solidFill>
                   <a:srgbClr val="17364A"/>
                 </a:solidFill>
@@ -14007,7 +14234,7 @@
               </a:rPr>
               <a:t>Produce a workflow usability test plan that can support readiness assessment, governance review,.</a:t>
             </a:r>
-            <a:endParaRPr lang="en-US" sz="1550" dirty="0"/>
+            <a:endParaRPr lang="en-US" sz="1320" dirty="0"/>
           </a:p>
         </p:txBody>
       </p:sp>
@@ -14095,13 +14322,16 @@
           <a:ln/>
         </p:spPr>
         <p:txBody>
-          <a:bodyPr wrap="square" lIns="254" tIns="254" rIns="254" bIns="254" rtlCol="0" anchor="t">
+          <a:bodyPr wrap="square" lIns="508" tIns="508" rIns="508" bIns="508" rtlCol="0" anchor="t">
             <a:normAutofit/>
           </a:bodyPr>
           <a:lstStyle/>
           <a:p>
-            <a:r>
-              <a:rPr lang="en-US" sz="1380" dirty="0">
+            <a:pPr indent="0" marL="0">
+              <a:buNone/>
+            </a:pPr>
+            <a:r>
+              <a:rPr lang="en-US" sz="1220" dirty="0">
                 <a:solidFill>
                   <a:srgbClr val="17364A"/>
                 </a:solidFill>
@@ -14109,9 +14339,9 @@
                 <a:ea typeface="Aptos" pitchFamily="34" charset="-122"/>
                 <a:cs typeface="Aptos" pitchFamily="34" charset="-120"/>
               </a:rPr>
-              <a:t>Produce a workflow usability test plan that can support readiness assessment, governance.</a:t>
-            </a:r>
-            <a:endParaRPr lang="en-US" sz="1380" dirty="0"/>
+              <a:t>Produce a workflow usability test plan that can support readiness.</a:t>
+            </a:r>
+            <a:endParaRPr lang="en-US" sz="1220" dirty="0"/>
           </a:p>
         </p:txBody>
       </p:sp>
@@ -14189,17 +14419,17 @@
         </p:nvSpPr>
         <p:spPr>
           <a:xfrm>
-            <a:off x="7799832" y="5001768"/>
-            <a:ext cx="3145536" cy="502920"/>
-          </a:xfrm>
-          <a:prstGeom prst="rect">
-            <a:avLst/>
-          </a:prstGeom>
-          <a:noFill/>
-          <a:ln/>
-        </p:spPr>
-        <p:txBody>
-          <a:bodyPr wrap="square" lIns="0" tIns="0" rIns="0" bIns="0" rtlCol="0" anchor="t">
+            <a:off x="7799832" y="4974336"/>
+            <a:ext cx="3145536" cy="576072"/>
+          </a:xfrm>
+          <a:prstGeom prst="rect">
+            <a:avLst/>
+          </a:prstGeom>
+          <a:noFill/>
+          <a:ln/>
+        </p:spPr>
+        <p:txBody>
+          <a:bodyPr wrap="square" lIns="254" tIns="254" rIns="254" bIns="254" rtlCol="0" anchor="t">
             <a:normAutofit/>
           </a:bodyPr>
           <a:lstStyle/>
@@ -14208,7 +14438,7 @@
               <a:buNone/>
             </a:pPr>
             <a:r>
-              <a:rPr lang="en-US" sz="1550" dirty="0">
+              <a:rPr lang="en-US" sz="1320" dirty="0">
                 <a:solidFill>
                   <a:srgbClr val="17364A"/>
                 </a:solidFill>
@@ -14216,9 +14446,9 @@
                 <a:ea typeface="Aptos" pitchFamily="34" charset="-122"/>
                 <a:cs typeface="Aptos" pitchFamily="34" charset="-120"/>
               </a:rPr>
-              <a:t>Use the assignment to test whether you can explain the concept, apply it to a realistic public health situation, and identify what would need review before the work moves forward.</a:t>
-            </a:r>
-            <a:endParaRPr lang="en-US" sz="1550" dirty="0"/>
+              <a:t>Use the assignment to test whether you can explain the concept, apply it to a realistic public health situation, and.</a:t>
+            </a:r>
+            <a:endParaRPr lang="en-US" sz="1320" dirty="0"/>
           </a:p>
         </p:txBody>
       </p:sp>
@@ -14519,49 +14749,58 @@
           <a:ln/>
         </p:spPr>
         <p:txBody>
-          <a:bodyPr wrap="square" lIns="635" tIns="635" rIns="635" bIns="635" rtlCol="0" anchor="t">
+          <a:bodyPr wrap="square" lIns="1016" tIns="1016" rIns="1016" bIns="1016" rtlCol="0" anchor="t">
             <a:normAutofit/>
           </a:bodyPr>
           <a:lstStyle/>
           <a:p>
+            <a:pPr indent="0" marL="0">
+              <a:buNone/>
+            </a:pPr>
             <a:r>
               <a:rPr lang="en-US" sz="2100" dirty="0">
                 <a:solidFill>
-                  <a:srgbClr val="17364A"/>
-                </a:solidFill>
-                <a:latin typeface="Aptos" pitchFamily="34" charset="0"/>
-                <a:ea typeface="Aptos" pitchFamily="34" charset="-122"/>
-                <a:cs typeface="Aptos" pitchFamily="34" charset="-120"/>
-              </a:rPr>
-              <a:t>AI tools succeed or fail inside real public health workflows.</a:t>
+                  <a:srgbClr val="003A63"/>
+                </a:solidFill>
+                <a:latin typeface="Aptos" pitchFamily="34" charset="0"/>
+                <a:ea typeface="Aptos" pitchFamily="34" charset="-122"/>
+                <a:cs typeface="Aptos" pitchFamily="34" charset="-120"/>
+              </a:rPr>
+              <a:t>• AI tools succeed or fail inside real public health workflows.</a:t>
             </a:r>
             <a:endParaRPr lang="en-US" sz="2100" dirty="0"/>
           </a:p>
           <a:p>
+            <a:pPr indent="0" marL="0">
+              <a:buNone/>
+            </a:pPr>
             <a:r>
               <a:rPr lang="en-US" sz="2100" dirty="0">
                 <a:solidFill>
-                  <a:srgbClr val="17364A"/>
-                </a:solidFill>
-                <a:latin typeface="Aptos" pitchFamily="34" charset="0"/>
-                <a:ea typeface="Aptos" pitchFamily="34" charset="-122"/>
-                <a:cs typeface="Aptos" pitchFamily="34" charset="-120"/>
-              </a:rPr>
-              <a:t>Human factors and usability testing help agencies understand how staff actually use systems, where.</a:t>
+                  <a:srgbClr val="003A63"/>
+                </a:solidFill>
+                <a:latin typeface="Aptos" pitchFamily="34" charset="0"/>
+                <a:ea typeface="Aptos" pitchFamily="34" charset="-122"/>
+                <a:cs typeface="Aptos" pitchFamily="34" charset="-120"/>
+              </a:rPr>
+              <a:t>• Human factors and usability testing help agencies understand how staff actually use systems,.</a:t>
             </a:r>
             <a:endParaRPr lang="en-US" sz="2100" dirty="0"/>
           </a:p>
           <a:p>
+            <a:pPr indent="0" marL="0">
+              <a:buNone/>
+            </a:pPr>
             <a:r>
               <a:rPr lang="en-US" sz="2100" dirty="0">
                 <a:solidFill>
-                  <a:srgbClr val="17364A"/>
-                </a:solidFill>
-                <a:latin typeface="Aptos" pitchFamily="34" charset="0"/>
-                <a:ea typeface="Aptos" pitchFamily="34" charset="-122"/>
-                <a:cs typeface="Aptos" pitchFamily="34" charset="-120"/>
-              </a:rPr>
-              <a:t>This module teaches learners to evaluate workflow fit, interface design, alert burden, documentation.</a:t>
+                  <a:srgbClr val="003A63"/>
+                </a:solidFill>
+                <a:latin typeface="Aptos" pitchFamily="34" charset="0"/>
+                <a:ea typeface="Aptos" pitchFamily="34" charset="-122"/>
+                <a:cs typeface="Aptos" pitchFamily="34" charset="-120"/>
+              </a:rPr>
+              <a:t>• This module teaches learners to evaluate workflow fit, interface design, alert burden,.</a:t>
             </a:r>
             <a:endParaRPr lang="en-US" sz="2100" dirty="0"/>
           </a:p>
@@ -14641,17 +14880,17 @@
         </p:nvSpPr>
         <p:spPr>
           <a:xfrm>
-            <a:off x="7799832" y="1828800"/>
-            <a:ext cx="3145536" cy="685800"/>
-          </a:xfrm>
-          <a:prstGeom prst="rect">
-            <a:avLst/>
-          </a:prstGeom>
-          <a:noFill/>
-          <a:ln/>
-        </p:spPr>
-        <p:txBody>
-          <a:bodyPr wrap="square" lIns="0" tIns="0" rIns="0" bIns="0" rtlCol="0" anchor="t">
+            <a:off x="7799832" y="1801368"/>
+            <a:ext cx="3145536" cy="758952"/>
+          </a:xfrm>
+          <a:prstGeom prst="rect">
+            <a:avLst/>
+          </a:prstGeom>
+          <a:noFill/>
+          <a:ln/>
+        </p:spPr>
+        <p:txBody>
+          <a:bodyPr wrap="square" lIns="254" tIns="254" rIns="254" bIns="254" rtlCol="0" anchor="t">
             <a:normAutofit/>
           </a:bodyPr>
           <a:lstStyle/>
@@ -14660,7 +14899,7 @@
               <a:buNone/>
             </a:pPr>
             <a:r>
-              <a:rPr lang="en-US" sz="1550" dirty="0">
+              <a:rPr lang="en-US" sz="1320" dirty="0">
                 <a:solidFill>
                   <a:srgbClr val="17364A"/>
                 </a:solidFill>
@@ -14670,7 +14909,7 @@
               </a:rPr>
               <a:t>AI tools succeed or fail inside real public health workflows.</a:t>
             </a:r>
-            <a:endParaRPr lang="en-US" sz="1550" dirty="0"/>
+            <a:endParaRPr lang="en-US" sz="1320" dirty="0"/>
           </a:p>
         </p:txBody>
       </p:sp>
@@ -14758,13 +14997,16 @@
           <a:ln/>
         </p:spPr>
         <p:txBody>
-          <a:bodyPr wrap="square" lIns="254" tIns="254" rIns="254" bIns="254" rtlCol="0" anchor="t">
+          <a:bodyPr wrap="square" lIns="508" tIns="508" rIns="508" bIns="508" rtlCol="0" anchor="t">
             <a:normAutofit/>
           </a:bodyPr>
           <a:lstStyle/>
           <a:p>
-            <a:r>
-              <a:rPr lang="en-US" sz="1380" dirty="0">
+            <a:pPr indent="0" marL="0">
+              <a:buNone/>
+            </a:pPr>
+            <a:r>
+              <a:rPr lang="en-US" sz="1220" dirty="0">
                 <a:solidFill>
                   <a:srgbClr val="17364A"/>
                 </a:solidFill>
@@ -14772,13 +15014,16 @@
                 <a:ea typeface="Aptos" pitchFamily="34" charset="-122"/>
                 <a:cs typeface="Aptos" pitchFamily="34" charset="-120"/>
               </a:rPr>
-              <a:t>Human factors and usability testing help agencies understand how staff actually use.</a:t>
-            </a:r>
-            <a:endParaRPr lang="en-US" sz="1380" dirty="0"/>
-          </a:p>
-          <a:p>
-            <a:r>
-              <a:rPr lang="en-US" sz="1380" dirty="0">
+              <a:t>Human factors and usability testing help agencies understand how.</a:t>
+            </a:r>
+            <a:endParaRPr lang="en-US" sz="1220" dirty="0"/>
+          </a:p>
+          <a:p>
+            <a:pPr indent="0" marL="0">
+              <a:buNone/>
+            </a:pPr>
+            <a:r>
+              <a:rPr lang="en-US" sz="1220" dirty="0">
                 <a:solidFill>
                   <a:srgbClr val="17364A"/>
                 </a:solidFill>
@@ -14786,9 +15031,9 @@
                 <a:ea typeface="Aptos" pitchFamily="34" charset="-122"/>
                 <a:cs typeface="Aptos" pitchFamily="34" charset="-120"/>
               </a:rPr>
-              <a:t>This module teaches learners to evaluate workflow fit, interface design, alert burden,.</a:t>
-            </a:r>
-            <a:endParaRPr lang="en-US" sz="1380" dirty="0"/>
+              <a:t>This module teaches learners to evaluate workflow fit, interface.</a:t>
+            </a:r>
+            <a:endParaRPr lang="en-US" sz="1220" dirty="0"/>
           </a:p>
         </p:txBody>
       </p:sp>
@@ -14866,17 +15111,17 @@
         </p:nvSpPr>
         <p:spPr>
           <a:xfrm>
-            <a:off x="7799832" y="5001768"/>
-            <a:ext cx="3145536" cy="502920"/>
-          </a:xfrm>
-          <a:prstGeom prst="rect">
-            <a:avLst/>
-          </a:prstGeom>
-          <a:noFill/>
-          <a:ln/>
-        </p:spPr>
-        <p:txBody>
-          <a:bodyPr wrap="square" lIns="0" tIns="0" rIns="0" bIns="0" rtlCol="0" anchor="t">
+            <a:off x="7799832" y="4974336"/>
+            <a:ext cx="3145536" cy="576072"/>
+          </a:xfrm>
+          <a:prstGeom prst="rect">
+            <a:avLst/>
+          </a:prstGeom>
+          <a:noFill/>
+          <a:ln/>
+        </p:spPr>
+        <p:txBody>
+          <a:bodyPr wrap="square" lIns="254" tIns="254" rIns="254" bIns="254" rtlCol="0" anchor="t">
             <a:normAutofit/>
           </a:bodyPr>
           <a:lstStyle/>
@@ -14885,7 +15130,7 @@
               <a:buNone/>
             </a:pPr>
             <a:r>
-              <a:rPr lang="en-US" sz="1550" dirty="0">
+              <a:rPr lang="en-US" sz="1320" dirty="0">
                 <a:solidFill>
                   <a:srgbClr val="17364A"/>
                 </a:solidFill>
@@ -14893,9 +15138,9 @@
                 <a:ea typeface="Aptos" pitchFamily="34" charset="-122"/>
                 <a:cs typeface="Aptos" pitchFamily="34" charset="-120"/>
               </a:rPr>
-              <a:t>Use the concept to clarify workflow changes, dependencies, staffing, procurement requirements, training needs, and implementation checkpoints.</a:t>
-            </a:r>
-            <a:endParaRPr lang="en-US" sz="1550" dirty="0"/>
+              <a:t>Use the concept to clarify workflow changes, dependencies, staffing, procurement requirements, training needs, and.</a:t>
+            </a:r>
+            <a:endParaRPr lang="en-US" sz="1320" dirty="0"/>
           </a:p>
         </p:txBody>
       </p:sp>
@@ -15196,49 +15441,58 @@
           <a:ln/>
         </p:spPr>
         <p:txBody>
-          <a:bodyPr wrap="square" lIns="635" tIns="635" rIns="635" bIns="635" rtlCol="0" anchor="t">
+          <a:bodyPr wrap="square" lIns="1016" tIns="1016" rIns="1016" bIns="1016" rtlCol="0" anchor="t">
             <a:normAutofit/>
           </a:bodyPr>
           <a:lstStyle/>
           <a:p>
+            <a:pPr indent="0" marL="0">
+              <a:buNone/>
+            </a:pPr>
             <a:r>
               <a:rPr lang="en-US" sz="2100" dirty="0">
                 <a:solidFill>
-                  <a:srgbClr val="17364A"/>
-                </a:solidFill>
-                <a:latin typeface="Aptos" pitchFamily="34" charset="0"/>
-                <a:ea typeface="Aptos" pitchFamily="34" charset="-122"/>
-                <a:cs typeface="Aptos" pitchFamily="34" charset="-120"/>
-              </a:rPr>
-              <a:t>Human Factors, Workflow Integration, and Usability Testing matters because AI systems are embedded in.</a:t>
+                  <a:srgbClr val="003A63"/>
+                </a:solidFill>
+                <a:latin typeface="Aptos" pitchFamily="34" charset="0"/>
+                <a:ea typeface="Aptos" pitchFamily="34" charset="-122"/>
+                <a:cs typeface="Aptos" pitchFamily="34" charset="-120"/>
+              </a:rPr>
+              <a:t>• Human Factors, Workflow Integration, and Usability Testing matters because AI systems are.</a:t>
             </a:r>
             <a:endParaRPr lang="en-US" sz="2100" dirty="0"/>
           </a:p>
           <a:p>
+            <a:pPr indent="0" marL="0">
+              <a:buNone/>
+            </a:pPr>
             <a:r>
               <a:rPr lang="en-US" sz="2100" dirty="0">
                 <a:solidFill>
-                  <a:srgbClr val="17364A"/>
-                </a:solidFill>
-                <a:latin typeface="Aptos" pitchFamily="34" charset="0"/>
-                <a:ea typeface="Aptos" pitchFamily="34" charset="-122"/>
-                <a:cs typeface="Aptos" pitchFamily="34" charset="-120"/>
-              </a:rPr>
-              <a:t>The topic affects whether AI outputs are accurate, explainable, safe, equitable, secure, and sustainable.</a:t>
+                  <a:srgbClr val="003A63"/>
+                </a:solidFill>
+                <a:latin typeface="Aptos" pitchFamily="34" charset="0"/>
+                <a:ea typeface="Aptos" pitchFamily="34" charset="-122"/>
+                <a:cs typeface="Aptos" pitchFamily="34" charset="-120"/>
+              </a:rPr>
+              <a:t>• The topic affects whether AI outputs are accurate, explainable, safe, equitable, secure, and.</a:t>
             </a:r>
             <a:endParaRPr lang="en-US" sz="2100" dirty="0"/>
           </a:p>
           <a:p>
+            <a:pPr indent="0" marL="0">
+              <a:buNone/>
+            </a:pPr>
             <a:r>
               <a:rPr lang="en-US" sz="2100" dirty="0">
                 <a:solidFill>
-                  <a:srgbClr val="17364A"/>
-                </a:solidFill>
-                <a:latin typeface="Aptos" pitchFamily="34" charset="0"/>
-                <a:ea typeface="Aptos" pitchFamily="34" charset="-122"/>
-                <a:cs typeface="Aptos" pitchFamily="34" charset="-120"/>
-              </a:rPr>
-              <a:t>Agencies that ignore this area may create tools that work in a demonstration but fail in actual practice.</a:t>
+                  <a:srgbClr val="003A63"/>
+                </a:solidFill>
+                <a:latin typeface="Aptos" pitchFamily="34" charset="0"/>
+                <a:ea typeface="Aptos" pitchFamily="34" charset="-122"/>
+                <a:cs typeface="Aptos" pitchFamily="34" charset="-120"/>
+              </a:rPr>
+              <a:t>• Agencies that ignore this area may create tools that work in a demonstration but fail in.</a:t>
             </a:r>
             <a:endParaRPr lang="en-US" sz="2100" dirty="0"/>
           </a:p>
@@ -15318,17 +15572,17 @@
         </p:nvSpPr>
         <p:spPr>
           <a:xfrm>
-            <a:off x="7799832" y="1828800"/>
-            <a:ext cx="3145536" cy="685800"/>
-          </a:xfrm>
-          <a:prstGeom prst="rect">
-            <a:avLst/>
-          </a:prstGeom>
-          <a:noFill/>
-          <a:ln/>
-        </p:spPr>
-        <p:txBody>
-          <a:bodyPr wrap="square" lIns="0" tIns="0" rIns="0" bIns="0" rtlCol="0" anchor="t">
+            <a:off x="7799832" y="1801368"/>
+            <a:ext cx="3145536" cy="758952"/>
+          </a:xfrm>
+          <a:prstGeom prst="rect">
+            <a:avLst/>
+          </a:prstGeom>
+          <a:noFill/>
+          <a:ln/>
+        </p:spPr>
+        <p:txBody>
+          <a:bodyPr wrap="square" lIns="254" tIns="254" rIns="254" bIns="254" rtlCol="0" anchor="t">
             <a:normAutofit/>
           </a:bodyPr>
           <a:lstStyle/>
@@ -15337,7 +15591,7 @@
               <a:buNone/>
             </a:pPr>
             <a:r>
-              <a:rPr lang="en-US" sz="1550" dirty="0">
+              <a:rPr lang="en-US" sz="1320" dirty="0">
                 <a:solidFill>
                   <a:srgbClr val="17364A"/>
                 </a:solidFill>
@@ -15347,7 +15601,7 @@
               </a:rPr>
               <a:t>Human Factors, Workflow Integration, and Usability Testing matters because AI systems are embedded in.</a:t>
             </a:r>
-            <a:endParaRPr lang="en-US" sz="1550" dirty="0"/>
+            <a:endParaRPr lang="en-US" sz="1320" dirty="0"/>
           </a:p>
         </p:txBody>
       </p:sp>
@@ -15435,13 +15689,16 @@
           <a:ln/>
         </p:spPr>
         <p:txBody>
-          <a:bodyPr wrap="square" lIns="254" tIns="254" rIns="254" bIns="254" rtlCol="0" anchor="t">
+          <a:bodyPr wrap="square" lIns="508" tIns="508" rIns="508" bIns="508" rtlCol="0" anchor="t">
             <a:normAutofit/>
           </a:bodyPr>
           <a:lstStyle/>
           <a:p>
-            <a:r>
-              <a:rPr lang="en-US" sz="1380" dirty="0">
+            <a:pPr indent="0" marL="0">
+              <a:buNone/>
+            </a:pPr>
+            <a:r>
+              <a:rPr lang="en-US" sz="1220" dirty="0">
                 <a:solidFill>
                   <a:srgbClr val="17364A"/>
                 </a:solidFill>
@@ -15449,13 +15706,16 @@
                 <a:ea typeface="Aptos" pitchFamily="34" charset="-122"/>
                 <a:cs typeface="Aptos" pitchFamily="34" charset="-120"/>
               </a:rPr>
-              <a:t>Human Factors, Workflow Integration, and Usability Testing matters because AI systems are.</a:t>
-            </a:r>
-            <a:endParaRPr lang="en-US" sz="1380" dirty="0"/>
-          </a:p>
-          <a:p>
-            <a:r>
-              <a:rPr lang="en-US" sz="1380" dirty="0">
+              <a:t>Human Factors, Workflow Integration, and Usability Testing matters.</a:t>
+            </a:r>
+            <a:endParaRPr lang="en-US" sz="1220" dirty="0"/>
+          </a:p>
+          <a:p>
+            <a:pPr indent="0" marL="0">
+              <a:buNone/>
+            </a:pPr>
+            <a:r>
+              <a:rPr lang="en-US" sz="1220" dirty="0">
                 <a:solidFill>
                   <a:srgbClr val="17364A"/>
                 </a:solidFill>
@@ -15465,11 +15725,14 @@
               </a:rPr>
               <a:t>The topic also affects accountability.</a:t>
             </a:r>
-            <a:endParaRPr lang="en-US" sz="1380" dirty="0"/>
-          </a:p>
-          <a:p>
-            <a:r>
-              <a:rPr lang="en-US" sz="1380" dirty="0">
+            <a:endParaRPr lang="en-US" sz="1220" dirty="0"/>
+          </a:p>
+          <a:p>
+            <a:pPr indent="0" marL="0">
+              <a:buNone/>
+            </a:pPr>
+            <a:r>
+              <a:rPr lang="en-US" sz="1220" dirty="0">
                 <a:solidFill>
                   <a:srgbClr val="17364A"/>
                 </a:solidFill>
@@ -15477,9 +15740,9 @@
                 <a:ea typeface="Aptos" pitchFamily="34" charset="-122"/>
                 <a:cs typeface="Aptos" pitchFamily="34" charset="-120"/>
               </a:rPr>
-              <a:t>Public health agencies must be able to explain how data are used, why a tool was approved,.</a:t>
-            </a:r>
-            <a:endParaRPr lang="en-US" sz="1380" dirty="0"/>
+              <a:t>Public health agencies must be able to explain how data are used,.</a:t>
+            </a:r>
+            <a:endParaRPr lang="en-US" sz="1220" dirty="0"/>
           </a:p>
         </p:txBody>
       </p:sp>
@@ -15557,17 +15820,17 @@
         </p:nvSpPr>
         <p:spPr>
           <a:xfrm>
-            <a:off x="7799832" y="5001768"/>
-            <a:ext cx="3145536" cy="502920"/>
-          </a:xfrm>
-          <a:prstGeom prst="rect">
-            <a:avLst/>
-          </a:prstGeom>
-          <a:noFill/>
-          <a:ln/>
-        </p:spPr>
-        <p:txBody>
-          <a:bodyPr wrap="square" lIns="0" tIns="0" rIns="0" bIns="0" rtlCol="0" anchor="t">
+            <a:off x="7799832" y="4974336"/>
+            <a:ext cx="3145536" cy="576072"/>
+          </a:xfrm>
+          <a:prstGeom prst="rect">
+            <a:avLst/>
+          </a:prstGeom>
+          <a:noFill/>
+          <a:ln/>
+        </p:spPr>
+        <p:txBody>
+          <a:bodyPr wrap="square" lIns="254" tIns="254" rIns="254" bIns="254" rtlCol="0" anchor="t">
             <a:normAutofit/>
           </a:bodyPr>
           <a:lstStyle/>
@@ -15576,7 +15839,7 @@
               <a:buNone/>
             </a:pPr>
             <a:r>
-              <a:rPr lang="en-US" sz="1550" dirty="0">
+              <a:rPr lang="en-US" sz="1320" dirty="0">
                 <a:solidFill>
                   <a:srgbClr val="17364A"/>
                 </a:solidFill>
@@ -15584,9 +15847,9 @@
                 <a:ea typeface="Aptos" pitchFamily="34" charset="-122"/>
                 <a:cs typeface="Aptos" pitchFamily="34" charset="-120"/>
               </a:rPr>
-              <a:t>Use the concept to clarify workflow changes, dependencies, staffing, procurement requirements, training needs, and implementation checkpoints.</a:t>
-            </a:r>
-            <a:endParaRPr lang="en-US" sz="1550" dirty="0"/>
+              <a:t>Use the concept to clarify workflow changes, dependencies, staffing, procurement requirements, training needs, and.</a:t>
+            </a:r>
+            <a:endParaRPr lang="en-US" sz="1320" dirty="0"/>
           </a:p>
         </p:txBody>
       </p:sp>
@@ -15887,49 +16150,58 @@
           <a:ln/>
         </p:spPr>
         <p:txBody>
-          <a:bodyPr wrap="square" lIns="635" tIns="635" rIns="635" bIns="635" rtlCol="0" anchor="t">
+          <a:bodyPr wrap="square" lIns="1016" tIns="1016" rIns="1016" bIns="1016" rtlCol="0" anchor="t">
             <a:normAutofit/>
           </a:bodyPr>
           <a:lstStyle/>
           <a:p>
+            <a:pPr indent="0" marL="0">
+              <a:buNone/>
+            </a:pPr>
             <a:r>
               <a:rPr lang="en-US" sz="2100" dirty="0">
                 <a:solidFill>
-                  <a:srgbClr val="17364A"/>
-                </a:solidFill>
-                <a:latin typeface="Aptos" pitchFamily="34" charset="0"/>
-                <a:ea typeface="Aptos" pitchFamily="34" charset="-122"/>
-                <a:cs typeface="Aptos" pitchFamily="34" charset="-120"/>
-              </a:rPr>
-              <a:t>Human factors is the discipline of designing systems around human abilities, limits, environments, and.</a:t>
+                  <a:srgbClr val="003A63"/>
+                </a:solidFill>
+                <a:latin typeface="Aptos" pitchFamily="34" charset="0"/>
+                <a:ea typeface="Aptos" pitchFamily="34" charset="-122"/>
+                <a:cs typeface="Aptos" pitchFamily="34" charset="-120"/>
+              </a:rPr>
+              <a:t>• Human factors is the discipline of designing systems around human abilities, limits,.</a:t>
             </a:r>
             <a:endParaRPr lang="en-US" sz="2100" dirty="0"/>
           </a:p>
           <a:p>
+            <a:pPr indent="0" marL="0">
+              <a:buNone/>
+            </a:pPr>
             <a:r>
               <a:rPr lang="en-US" sz="2100" dirty="0">
                 <a:solidFill>
-                  <a:srgbClr val="17364A"/>
-                </a:solidFill>
-                <a:latin typeface="Aptos" pitchFamily="34" charset="0"/>
-                <a:ea typeface="Aptos" pitchFamily="34" charset="-122"/>
-                <a:cs typeface="Aptos" pitchFamily="34" charset="-120"/>
-              </a:rPr>
-              <a:t>In AI-supported public health work, human factors help agencies ensure that AI outputs are.</a:t>
+                  <a:srgbClr val="003A63"/>
+                </a:solidFill>
+                <a:latin typeface="Aptos" pitchFamily="34" charset="0"/>
+                <a:ea typeface="Aptos" pitchFamily="34" charset="-122"/>
+                <a:cs typeface="Aptos" pitchFamily="34" charset="-120"/>
+              </a:rPr>
+              <a:t>• In AI-supported public health work, human factors help agencies ensure that AI outputs are.</a:t>
             </a:r>
             <a:endParaRPr lang="en-US" sz="2100" dirty="0"/>
           </a:p>
           <a:p>
+            <a:pPr indent="0" marL="0">
+              <a:buNone/>
+            </a:pPr>
             <a:r>
               <a:rPr lang="en-US" sz="2100" dirty="0">
                 <a:solidFill>
-                  <a:srgbClr val="17364A"/>
-                </a:solidFill>
-                <a:latin typeface="Aptos" pitchFamily="34" charset="0"/>
-                <a:ea typeface="Aptos" pitchFamily="34" charset="-122"/>
-                <a:cs typeface="Aptos" pitchFamily="34" charset="-120"/>
-              </a:rPr>
-              <a:t>Usability testing is structured observation of how users interact with a tool or workflow.</a:t>
+                  <a:srgbClr val="003A63"/>
+                </a:solidFill>
+                <a:latin typeface="Aptos" pitchFamily="34" charset="0"/>
+                <a:ea typeface="Aptos" pitchFamily="34" charset="-122"/>
+                <a:cs typeface="Aptos" pitchFamily="34" charset="-120"/>
+              </a:rPr>
+              <a:t>• Usability testing is structured observation of how users interact with a tool or workflow.</a:t>
             </a:r>
             <a:endParaRPr lang="en-US" sz="2100" dirty="0"/>
           </a:p>
@@ -16009,17 +16281,17 @@
         </p:nvSpPr>
         <p:spPr>
           <a:xfrm>
-            <a:off x="7799832" y="1828800"/>
-            <a:ext cx="3145536" cy="685800"/>
-          </a:xfrm>
-          <a:prstGeom prst="rect">
-            <a:avLst/>
-          </a:prstGeom>
-          <a:noFill/>
-          <a:ln/>
-        </p:spPr>
-        <p:txBody>
-          <a:bodyPr wrap="square" lIns="0" tIns="0" rIns="0" bIns="0" rtlCol="0" anchor="t">
+            <a:off x="7799832" y="1801368"/>
+            <a:ext cx="3145536" cy="758952"/>
+          </a:xfrm>
+          <a:prstGeom prst="rect">
+            <a:avLst/>
+          </a:prstGeom>
+          <a:noFill/>
+          <a:ln/>
+        </p:spPr>
+        <p:txBody>
+          <a:bodyPr wrap="square" lIns="254" tIns="254" rIns="254" bIns="254" rtlCol="0" anchor="t">
             <a:normAutofit/>
           </a:bodyPr>
           <a:lstStyle/>
@@ -16028,7 +16300,7 @@
               <a:buNone/>
             </a:pPr>
             <a:r>
-              <a:rPr lang="en-US" sz="1550" dirty="0">
+              <a:rPr lang="en-US" sz="1320" dirty="0">
                 <a:solidFill>
                   <a:srgbClr val="17364A"/>
                 </a:solidFill>
@@ -16038,7 +16310,7 @@
               </a:rPr>
               <a:t>Human factors is the discipline of designing systems around human abilities, limits, environments, and.</a:t>
             </a:r>
-            <a:endParaRPr lang="en-US" sz="1550" dirty="0"/>
+            <a:endParaRPr lang="en-US" sz="1320" dirty="0"/>
           </a:p>
         </p:txBody>
       </p:sp>
@@ -16126,13 +16398,16 @@
           <a:ln/>
         </p:spPr>
         <p:txBody>
-          <a:bodyPr wrap="square" lIns="254" tIns="254" rIns="254" bIns="254" rtlCol="0" anchor="t">
+          <a:bodyPr wrap="square" lIns="508" tIns="508" rIns="508" bIns="508" rtlCol="0" anchor="t">
             <a:normAutofit/>
           </a:bodyPr>
           <a:lstStyle/>
           <a:p>
-            <a:r>
-              <a:rPr lang="en-US" sz="1380" dirty="0">
+            <a:pPr indent="0" marL="0">
+              <a:buNone/>
+            </a:pPr>
+            <a:r>
+              <a:rPr lang="en-US" sz="1220" dirty="0">
                 <a:solidFill>
                   <a:srgbClr val="17364A"/>
                 </a:solidFill>
@@ -16140,13 +16415,16 @@
                 <a:ea typeface="Aptos" pitchFamily="34" charset="-122"/>
                 <a:cs typeface="Aptos" pitchFamily="34" charset="-120"/>
               </a:rPr>
-              <a:t>Human factors is the discipline of designing systems around human abilities, limits,.</a:t>
-            </a:r>
-            <a:endParaRPr lang="en-US" sz="1380" dirty="0"/>
-          </a:p>
-          <a:p>
-            <a:r>
-              <a:rPr lang="en-US" sz="1380" dirty="0">
+              <a:t>Human factors is the discipline of designing systems around human.</a:t>
+            </a:r>
+            <a:endParaRPr lang="en-US" sz="1220" dirty="0"/>
+          </a:p>
+          <a:p>
+            <a:pPr indent="0" marL="0">
+              <a:buNone/>
+            </a:pPr>
+            <a:r>
+              <a:rPr lang="en-US" sz="1220" dirty="0">
                 <a:solidFill>
                   <a:srgbClr val="17364A"/>
                 </a:solidFill>
@@ -16154,13 +16432,16 @@
                 <a:ea typeface="Aptos" pitchFamily="34" charset="-122"/>
                 <a:cs typeface="Aptos" pitchFamily="34" charset="-120"/>
               </a:rPr>
-              <a:t>In AI-supported public health work, human factors help agencies ensure that AI outputs are.</a:t>
-            </a:r>
-            <a:endParaRPr lang="en-US" sz="1380" dirty="0"/>
-          </a:p>
-          <a:p>
-            <a:r>
-              <a:rPr lang="en-US" sz="1380" dirty="0">
+              <a:t>In AI-supported public health work, human factors help agencies.</a:t>
+            </a:r>
+            <a:endParaRPr lang="en-US" sz="1220" dirty="0"/>
+          </a:p>
+          <a:p>
+            <a:pPr indent="0" marL="0">
+              <a:buNone/>
+            </a:pPr>
+            <a:r>
+              <a:rPr lang="en-US" sz="1220" dirty="0">
                 <a:solidFill>
                   <a:srgbClr val="17364A"/>
                 </a:solidFill>
@@ -16168,9 +16449,9 @@
                 <a:ea typeface="Aptos" pitchFamily="34" charset="-122"/>
                 <a:cs typeface="Aptos" pitchFamily="34" charset="-120"/>
               </a:rPr>
-              <a:t>It can reveal confusion, workarounds, over-trust, alert fatigue, documentation burden, or.</a:t>
-            </a:r>
-            <a:endParaRPr lang="en-US" sz="1380" dirty="0"/>
+              <a:t>It can reveal confusion, workarounds, over-trust, alert fatigue,.</a:t>
+            </a:r>
+            <a:endParaRPr lang="en-US" sz="1220" dirty="0"/>
           </a:p>
         </p:txBody>
       </p:sp>
@@ -16248,17 +16529,17 @@
         </p:nvSpPr>
         <p:spPr>
           <a:xfrm>
-            <a:off x="7799832" y="5001768"/>
-            <a:ext cx="3145536" cy="502920"/>
-          </a:xfrm>
-          <a:prstGeom prst="rect">
-            <a:avLst/>
-          </a:prstGeom>
-          <a:noFill/>
-          <a:ln/>
-        </p:spPr>
-        <p:txBody>
-          <a:bodyPr wrap="square" lIns="0" tIns="0" rIns="0" bIns="0" rtlCol="0" anchor="t">
+            <a:off x="7799832" y="4974336"/>
+            <a:ext cx="3145536" cy="576072"/>
+          </a:xfrm>
+          <a:prstGeom prst="rect">
+            <a:avLst/>
+          </a:prstGeom>
+          <a:noFill/>
+          <a:ln/>
+        </p:spPr>
+        <p:txBody>
+          <a:bodyPr wrap="square" lIns="254" tIns="254" rIns="254" bIns="254" rtlCol="0" anchor="t">
             <a:normAutofit/>
           </a:bodyPr>
           <a:lstStyle/>
@@ -16267,7 +16548,7 @@
               <a:buNone/>
             </a:pPr>
             <a:r>
-              <a:rPr lang="en-US" sz="1550" dirty="0">
+              <a:rPr lang="en-US" sz="1320" dirty="0">
                 <a:solidFill>
                   <a:srgbClr val="17364A"/>
                 </a:solidFill>
@@ -16275,9 +16556,9 @@
                 <a:ea typeface="Aptos" pitchFamily="34" charset="-122"/>
                 <a:cs typeface="Aptos" pitchFamily="34" charset="-120"/>
               </a:rPr>
-              <a:t>Use the concept to clarify workflow changes, dependencies, staffing, procurement requirements, training needs, and implementation checkpoints.</a:t>
-            </a:r>
-            <a:endParaRPr lang="en-US" sz="1550" dirty="0"/>
+              <a:t>Use the concept to clarify workflow changes, dependencies, staffing, procurement requirements, training needs, and.</a:t>
+            </a:r>
+            <a:endParaRPr lang="en-US" sz="1320" dirty="0"/>
           </a:p>
         </p:txBody>
       </p:sp>

--- a/downloads/presentations/modules/ops-220.pptx
+++ b/downloads/presentations/modules/ops-220.pptx
@@ -3321,11 +3321,11 @@
         <p:spPr>
           <a:xfrm>
             <a:off x="7635240" y="1325880"/>
-            <a:ext cx="3474720" cy="1325880"/>
+            <a:ext cx="3474720" cy="1207008"/>
           </a:xfrm>
           <a:prstGeom prst="roundRect">
             <a:avLst>
-              <a:gd name="adj" fmla="val 8276"/>
+              <a:gd name="adj" fmla="val 9091"/>
             </a:avLst>
           </a:prstGeom>
           <a:solidFill>
@@ -3387,7 +3387,7 @@
         <p:spPr>
           <a:xfrm>
             <a:off x="7799832" y="1801368"/>
-            <a:ext cx="3145536" cy="758952"/>
+            <a:ext cx="3145536" cy="640080"/>
           </a:xfrm>
           <a:prstGeom prst="rect">
             <a:avLst/>
@@ -3413,7 +3413,7 @@
                 <a:ea typeface="Aptos" pitchFamily="34" charset="-122"/>
                 <a:cs typeface="Aptos" pitchFamily="34" charset="-120"/>
               </a:rPr>
-              <a:t>A disease investigator may receive an AI-generated case summary in the surveillance system.</a:t>
+              <a:t>A disease investigator may receive an AI-generated case summary in the surveillance.</a:t>
             </a:r>
             <a:endParaRPr lang="en-US" sz="1320" dirty="0"/>
           </a:p>
@@ -3427,12 +3427,12 @@
         </p:nvSpPr>
         <p:spPr>
           <a:xfrm>
-            <a:off x="7635240" y="2788920"/>
-            <a:ext cx="3474720" cy="1536192"/>
+            <a:off x="7635240" y="2670048"/>
+            <a:ext cx="3474720" cy="1377086"/>
           </a:xfrm>
           <a:prstGeom prst="roundRect">
             <a:avLst>
-              <a:gd name="adj" fmla="val 7143"/>
+              <a:gd name="adj" fmla="val 7968"/>
             </a:avLst>
           </a:prstGeom>
           <a:solidFill>
@@ -3454,7 +3454,7 @@
         </p:nvSpPr>
         <p:spPr>
           <a:xfrm>
-            <a:off x="7799832" y="2935224"/>
+            <a:off x="7799832" y="2816352"/>
             <a:ext cx="3145536" cy="256032"/>
           </a:xfrm>
           <a:prstGeom prst="rect">
@@ -3493,8 +3493,8 @@
         </p:nvSpPr>
         <p:spPr>
           <a:xfrm>
-            <a:off x="7818120" y="3300984"/>
-            <a:ext cx="3090672" cy="877824"/>
+            <a:off x="7818120" y="3182112"/>
+            <a:ext cx="3090672" cy="718718"/>
           </a:xfrm>
           <a:prstGeom prst="rect">
             <a:avLst/>
@@ -3568,12 +3568,12 @@
         </p:nvSpPr>
         <p:spPr>
           <a:xfrm>
-            <a:off x="7635240" y="4498848"/>
-            <a:ext cx="3474720" cy="1143000"/>
+            <a:off x="7635240" y="4184294"/>
+            <a:ext cx="3474720" cy="1466698"/>
           </a:xfrm>
           <a:prstGeom prst="roundRect">
             <a:avLst>
-              <a:gd name="adj" fmla="val 9600"/>
+              <a:gd name="adj" fmla="val 7481"/>
             </a:avLst>
           </a:prstGeom>
           <a:solidFill>
@@ -3595,7 +3595,7 @@
         </p:nvSpPr>
         <p:spPr>
           <a:xfrm>
-            <a:off x="7799832" y="4645152"/>
+            <a:off x="7799832" y="4330598"/>
             <a:ext cx="3145536" cy="256032"/>
           </a:xfrm>
           <a:prstGeom prst="rect">
@@ -3634,8 +3634,8 @@
         </p:nvSpPr>
         <p:spPr>
           <a:xfrm>
-            <a:off x="7799832" y="4974336"/>
-            <a:ext cx="3145536" cy="576072"/>
+            <a:off x="7799832" y="4659782"/>
+            <a:ext cx="3145536" cy="899770"/>
           </a:xfrm>
           <a:prstGeom prst="rect">
             <a:avLst/>
@@ -3661,7 +3661,7 @@
                 <a:ea typeface="Aptos" pitchFamily="34" charset="-122"/>
                 <a:cs typeface="Aptos" pitchFamily="34" charset="-120"/>
               </a:rPr>
-              <a:t>Use the concept to clarify workflow changes, dependencies, staffing, procurement requirements, training needs, and.</a:t>
+              <a:t>Use the concept to clarify workflow changes, dependencies, staffing, procurement requirements, training needs, and implementation checkpoints.</a:t>
             </a:r>
             <a:endParaRPr lang="en-US" sz="1320" dirty="0"/>
           </a:p>
@@ -4030,11 +4030,11 @@
         <p:spPr>
           <a:xfrm>
             <a:off x="7635240" y="1325880"/>
-            <a:ext cx="3474720" cy="1325880"/>
+            <a:ext cx="3474720" cy="1207008"/>
           </a:xfrm>
           <a:prstGeom prst="roundRect">
             <a:avLst>
-              <a:gd name="adj" fmla="val 8276"/>
+              <a:gd name="adj" fmla="val 9091"/>
             </a:avLst>
           </a:prstGeom>
           <a:solidFill>
@@ -4096,7 +4096,7 @@
         <p:spPr>
           <a:xfrm>
             <a:off x="7799832" y="1801368"/>
-            <a:ext cx="3145536" cy="758952"/>
+            <a:ext cx="3145536" cy="640080"/>
           </a:xfrm>
           <a:prstGeom prst="rect">
             <a:avLst/>
@@ -4136,12 +4136,12 @@
         </p:nvSpPr>
         <p:spPr>
           <a:xfrm>
-            <a:off x="7635240" y="2788920"/>
-            <a:ext cx="3474720" cy="1536192"/>
+            <a:off x="7635240" y="2670048"/>
+            <a:ext cx="3474720" cy="1377086"/>
           </a:xfrm>
           <a:prstGeom prst="roundRect">
             <a:avLst>
-              <a:gd name="adj" fmla="val 7143"/>
+              <a:gd name="adj" fmla="val 7968"/>
             </a:avLst>
           </a:prstGeom>
           <a:solidFill>
@@ -4163,8 +4163,8 @@
         </p:nvSpPr>
         <p:spPr>
           <a:xfrm>
-            <a:off x="7799832" y="2935224"/>
-            <a:ext cx="3145536" cy="256032"/>
+            <a:off x="7799832" y="2798064"/>
+            <a:ext cx="3145536" cy="237744"/>
           </a:xfrm>
           <a:prstGeom prst="rect">
             <a:avLst/>
@@ -4180,7 +4180,7 @@
               <a:buNone/>
             </a:pPr>
             <a:r>
-              <a:rPr lang="en-US" sz="1300" b="1" dirty="0">
+              <a:rPr lang="en-US" sz="1250" b="1" dirty="0">
                 <a:solidFill>
                   <a:srgbClr val="0068B7"/>
                 </a:solidFill>
@@ -4188,101 +4188,317 @@
                 <a:ea typeface="Aptos" pitchFamily="34" charset="-122"/>
                 <a:cs typeface="Aptos" pitchFamily="34" charset="-120"/>
               </a:rPr>
-              <a:t>Concept checkpoints</a:t>
-            </a:r>
-            <a:endParaRPr lang="en-US" sz="1300" dirty="0"/>
-          </a:p>
-        </p:txBody>
-      </p:sp>
-      <p:sp>
-        <p:nvSpPr>
-          <p:cNvPr id="15" name="Text 13"/>
-          <p:cNvSpPr/>
-          <p:nvPr/>
-        </p:nvSpPr>
-        <p:spPr>
-          <a:xfrm>
-            <a:off x="7818120" y="3300984"/>
-            <a:ext cx="3090672" cy="877824"/>
-          </a:xfrm>
-          <a:prstGeom prst="rect">
-            <a:avLst/>
-          </a:prstGeom>
-          <a:noFill/>
-          <a:ln/>
-        </p:spPr>
-        <p:txBody>
-          <a:bodyPr wrap="square" lIns="508" tIns="508" rIns="508" bIns="508" rtlCol="0" anchor="t">
+              <a:t>Implementation path</a:t>
+            </a:r>
+            <a:endParaRPr lang="en-US" sz="1250" dirty="0"/>
+          </a:p>
+        </p:txBody>
+      </p:sp>
+      <p:sp>
+        <p:nvSpPr>
+          <p:cNvPr id="15" name="Shape 13"/>
+          <p:cNvSpPr/>
+          <p:nvPr/>
+        </p:nvSpPr>
+        <p:spPr>
+          <a:xfrm>
+            <a:off x="8763000" y="3351276"/>
+            <a:ext cx="164592" cy="0"/>
+          </a:xfrm>
+          <a:prstGeom prst="line">
+            <a:avLst/>
+          </a:prstGeom>
+          <a:noFill/>
+          <a:ln w="15240">
+            <a:solidFill>
+              <a:srgbClr val="8ABBD8"/>
+            </a:solidFill>
+            <a:prstDash val="solid"/>
+          </a:ln>
+        </p:spPr>
+      </p:sp>
+      <p:sp>
+        <p:nvSpPr>
+          <p:cNvPr id="16" name="Shape 14"/>
+          <p:cNvSpPr/>
+          <p:nvPr/>
+        </p:nvSpPr>
+        <p:spPr>
+          <a:xfrm>
+            <a:off x="7872984" y="3200400"/>
+            <a:ext cx="890016" cy="301752"/>
+          </a:xfrm>
+          <a:prstGeom prst="roundRect">
+            <a:avLst>
+              <a:gd name="adj" fmla="val 24242"/>
+            </a:avLst>
+          </a:prstGeom>
+          <a:solidFill>
+            <a:srgbClr val="0068B7"/>
+          </a:solidFill>
+          <a:ln w="12700">
+            <a:solidFill>
+              <a:srgbClr val="0068B7"/>
+            </a:solidFill>
+            <a:prstDash val="solid"/>
+          </a:ln>
+        </p:spPr>
+      </p:sp>
+      <p:sp>
+        <p:nvSpPr>
+          <p:cNvPr id="17" name="Text 15"/>
+          <p:cNvSpPr/>
+          <p:nvPr/>
+        </p:nvSpPr>
+        <p:spPr>
+          <a:xfrm>
+            <a:off x="7909560" y="3273552"/>
+            <a:ext cx="816864" cy="146304"/>
+          </a:xfrm>
+          <a:prstGeom prst="rect">
+            <a:avLst/>
+          </a:prstGeom>
+          <a:noFill/>
+          <a:ln/>
+        </p:spPr>
+        <p:txBody>
+          <a:bodyPr wrap="square" lIns="0" tIns="0" rIns="0" bIns="0" rtlCol="0" anchor="ctr">
             <a:normAutofit/>
           </a:bodyPr>
           <a:lstStyle/>
           <a:p>
-            <a:pPr indent="0" marL="0">
-              <a:buNone/>
-            </a:pPr>
-            <a:r>
-              <a:rPr lang="en-US" sz="1220" dirty="0">
-                <a:solidFill>
-                  <a:srgbClr val="17364A"/>
-                </a:solidFill>
-                <a:latin typeface="Aptos" pitchFamily="34" charset="0"/>
-                <a:ea typeface="Aptos" pitchFamily="34" charset="-122"/>
-                <a:cs typeface="Aptos" pitchFamily="34" charset="-120"/>
-              </a:rPr>
-              <a:t>Agencies should document how work happens today, including.</a:t>
-            </a:r>
-            <a:endParaRPr lang="en-US" sz="1220" dirty="0"/>
-          </a:p>
-          <a:p>
-            <a:pPr indent="0" marL="0">
-              <a:buNone/>
-            </a:pPr>
-            <a:r>
-              <a:rPr lang="en-US" sz="1220" dirty="0">
-                <a:solidFill>
-                  <a:srgbClr val="17364A"/>
-                </a:solidFill>
-                <a:latin typeface="Aptos" pitchFamily="34" charset="0"/>
-                <a:ea typeface="Aptos" pitchFamily="34" charset="-122"/>
-                <a:cs typeface="Aptos" pitchFamily="34" charset="-120"/>
-              </a:rPr>
-              <a:t>AI should be introduced only after the team understands which step.</a:t>
-            </a:r>
-            <a:endParaRPr lang="en-US" sz="1220" dirty="0"/>
-          </a:p>
-          <a:p>
-            <a:pPr indent="0" marL="0">
-              <a:buNone/>
-            </a:pPr>
-            <a:r>
-              <a:rPr lang="en-US" sz="1220" dirty="0">
-                <a:solidFill>
-                  <a:srgbClr val="17364A"/>
-                </a:solidFill>
-                <a:latin typeface="Aptos" pitchFamily="34" charset="0"/>
-                <a:ea typeface="Aptos" pitchFamily="34" charset="-122"/>
-                <a:cs typeface="Aptos" pitchFamily="34" charset="-120"/>
-              </a:rPr>
-              <a:t>Future-state design should define how staff will see, review,.</a:t>
-            </a:r>
-            <a:endParaRPr lang="en-US" sz="1220" dirty="0"/>
-          </a:p>
-        </p:txBody>
-      </p:sp>
-      <p:sp>
-        <p:nvSpPr>
-          <p:cNvPr id="16" name="Shape 14"/>
-          <p:cNvSpPr/>
-          <p:nvPr/>
-        </p:nvSpPr>
-        <p:spPr>
-          <a:xfrm>
-            <a:off x="7635240" y="4498848"/>
-            <a:ext cx="3474720" cy="1143000"/>
+            <a:pPr algn="ctr" indent="0" marL="0">
+              <a:buNone/>
+            </a:pPr>
+            <a:r>
+              <a:rPr lang="en-US" sz="880" b="1" dirty="0">
+                <a:solidFill>
+                  <a:srgbClr val="FFFFFF"/>
+                </a:solidFill>
+                <a:latin typeface="Aptos" pitchFamily="34" charset="0"/>
+                <a:ea typeface="Aptos" pitchFamily="34" charset="-122"/>
+                <a:cs typeface="Aptos" pitchFamily="34" charset="-120"/>
+              </a:rPr>
+              <a:t>Need</a:t>
+            </a:r>
+            <a:endParaRPr lang="en-US" sz="880" dirty="0"/>
+          </a:p>
+        </p:txBody>
+      </p:sp>
+      <p:sp>
+        <p:nvSpPr>
+          <p:cNvPr id="18" name="Shape 16"/>
+          <p:cNvSpPr/>
+          <p:nvPr/>
+        </p:nvSpPr>
+        <p:spPr>
+          <a:xfrm>
+            <a:off x="9817608" y="3351276"/>
+            <a:ext cx="164592" cy="0"/>
+          </a:xfrm>
+          <a:prstGeom prst="line">
+            <a:avLst/>
+          </a:prstGeom>
+          <a:noFill/>
+          <a:ln w="15240">
+            <a:solidFill>
+              <a:srgbClr val="8ABBD8"/>
+            </a:solidFill>
+            <a:prstDash val="solid"/>
+          </a:ln>
+        </p:spPr>
+      </p:sp>
+      <p:sp>
+        <p:nvSpPr>
+          <p:cNvPr id="19" name="Shape 17"/>
+          <p:cNvSpPr/>
+          <p:nvPr/>
+        </p:nvSpPr>
+        <p:spPr>
+          <a:xfrm>
+            <a:off x="8927592" y="3200400"/>
+            <a:ext cx="890016" cy="301752"/>
           </a:xfrm>
           <a:prstGeom prst="roundRect">
             <a:avLst>
-              <a:gd name="adj" fmla="val 9600"/>
+              <a:gd name="adj" fmla="val 24242"/>
+            </a:avLst>
+          </a:prstGeom>
+          <a:solidFill>
+            <a:srgbClr val="2F8A28"/>
+          </a:solidFill>
+          <a:ln w="12700">
+            <a:solidFill>
+              <a:srgbClr val="2F8A28"/>
+            </a:solidFill>
+            <a:prstDash val="solid"/>
+          </a:ln>
+        </p:spPr>
+      </p:sp>
+      <p:sp>
+        <p:nvSpPr>
+          <p:cNvPr id="20" name="Text 18"/>
+          <p:cNvSpPr/>
+          <p:nvPr/>
+        </p:nvSpPr>
+        <p:spPr>
+          <a:xfrm>
+            <a:off x="8964168" y="3273552"/>
+            <a:ext cx="816864" cy="146304"/>
+          </a:xfrm>
+          <a:prstGeom prst="rect">
+            <a:avLst/>
+          </a:prstGeom>
+          <a:noFill/>
+          <a:ln/>
+        </p:spPr>
+        <p:txBody>
+          <a:bodyPr wrap="square" lIns="0" tIns="0" rIns="0" bIns="0" rtlCol="0" anchor="ctr">
+            <a:normAutofit/>
+          </a:bodyPr>
+          <a:lstStyle/>
+          <a:p>
+            <a:pPr algn="ctr" indent="0" marL="0">
+              <a:buNone/>
+            </a:pPr>
+            <a:r>
+              <a:rPr lang="en-US" sz="880" b="1" dirty="0">
+                <a:solidFill>
+                  <a:srgbClr val="FFFFFF"/>
+                </a:solidFill>
+                <a:latin typeface="Aptos" pitchFamily="34" charset="0"/>
+                <a:ea typeface="Aptos" pitchFamily="34" charset="-122"/>
+                <a:cs typeface="Aptos" pitchFamily="34" charset="-120"/>
+              </a:rPr>
+              <a:t>Build</a:t>
+            </a:r>
+            <a:endParaRPr lang="en-US" sz="880" dirty="0"/>
+          </a:p>
+        </p:txBody>
+      </p:sp>
+      <p:sp>
+        <p:nvSpPr>
+          <p:cNvPr id="21" name="Shape 19"/>
+          <p:cNvSpPr/>
+          <p:nvPr/>
+        </p:nvSpPr>
+        <p:spPr>
+          <a:xfrm>
+            <a:off x="9982200" y="3200400"/>
+            <a:ext cx="890016" cy="301752"/>
+          </a:xfrm>
+          <a:prstGeom prst="roundRect">
+            <a:avLst>
+              <a:gd name="adj" fmla="val 24242"/>
+            </a:avLst>
+          </a:prstGeom>
+          <a:solidFill>
+            <a:srgbClr val="6A4CA3"/>
+          </a:solidFill>
+          <a:ln w="12700">
+            <a:solidFill>
+              <a:srgbClr val="6A4CA3"/>
+            </a:solidFill>
+            <a:prstDash val="solid"/>
+          </a:ln>
+        </p:spPr>
+      </p:sp>
+      <p:sp>
+        <p:nvSpPr>
+          <p:cNvPr id="22" name="Text 20"/>
+          <p:cNvSpPr/>
+          <p:nvPr/>
+        </p:nvSpPr>
+        <p:spPr>
+          <a:xfrm>
+            <a:off x="10018776" y="3273552"/>
+            <a:ext cx="816864" cy="146304"/>
+          </a:xfrm>
+          <a:prstGeom prst="rect">
+            <a:avLst/>
+          </a:prstGeom>
+          <a:noFill/>
+          <a:ln/>
+        </p:spPr>
+        <p:txBody>
+          <a:bodyPr wrap="square" lIns="0" tIns="0" rIns="0" bIns="0" rtlCol="0" anchor="ctr">
+            <a:normAutofit/>
+          </a:bodyPr>
+          <a:lstStyle/>
+          <a:p>
+            <a:pPr algn="ctr" indent="0" marL="0">
+              <a:buNone/>
+            </a:pPr>
+            <a:r>
+              <a:rPr lang="en-US" sz="880" b="1" dirty="0">
+                <a:solidFill>
+                  <a:srgbClr val="FFFFFF"/>
+                </a:solidFill>
+                <a:latin typeface="Aptos" pitchFamily="34" charset="0"/>
+                <a:ea typeface="Aptos" pitchFamily="34" charset="-122"/>
+                <a:cs typeface="Aptos" pitchFamily="34" charset="-120"/>
+              </a:rPr>
+              <a:t>Adopt</a:t>
+            </a:r>
+            <a:endParaRPr lang="en-US" sz="880" dirty="0"/>
+          </a:p>
+        </p:txBody>
+      </p:sp>
+      <p:sp>
+        <p:nvSpPr>
+          <p:cNvPr id="23" name="Text 21"/>
+          <p:cNvSpPr/>
+          <p:nvPr/>
+        </p:nvSpPr>
+        <p:spPr>
+          <a:xfrm>
+            <a:off x="7854696" y="3694176"/>
+            <a:ext cx="3035808" cy="206654"/>
+          </a:xfrm>
+          <a:prstGeom prst="rect">
+            <a:avLst/>
+          </a:prstGeom>
+          <a:noFill/>
+          <a:ln/>
+        </p:spPr>
+        <p:txBody>
+          <a:bodyPr wrap="square" lIns="254" tIns="254" rIns="254" bIns="254" rtlCol="0" anchor="t">
+            <a:normAutofit/>
+          </a:bodyPr>
+          <a:lstStyle/>
+          <a:p>
+            <a:pPr indent="0" marL="0">
+              <a:buNone/>
+            </a:pPr>
+            <a:r>
+              <a:rPr lang="en-US" sz="1120" dirty="0">
+                <a:solidFill>
+                  <a:srgbClr val="17364A"/>
+                </a:solidFill>
+                <a:latin typeface="Aptos" pitchFamily="34" charset="0"/>
+                <a:ea typeface="Aptos" pitchFamily="34" charset="-122"/>
+                <a:cs typeface="Aptos" pitchFamily="34" charset="-120"/>
+              </a:rPr>
+              <a:t>Implementation work should make dependencies, approvals, training, and sustainment visible before launch.</a:t>
+            </a:r>
+            <a:endParaRPr lang="en-US" sz="1120" dirty="0"/>
+          </a:p>
+        </p:txBody>
+      </p:sp>
+      <p:sp>
+        <p:nvSpPr>
+          <p:cNvPr id="24" name="Shape 22"/>
+          <p:cNvSpPr/>
+          <p:nvPr/>
+        </p:nvSpPr>
+        <p:spPr>
+          <a:xfrm>
+            <a:off x="7635240" y="4184294"/>
+            <a:ext cx="3474720" cy="1466698"/>
+          </a:xfrm>
+          <a:prstGeom prst="roundRect">
+            <a:avLst>
+              <a:gd name="adj" fmla="val 7481"/>
             </a:avLst>
           </a:prstGeom>
           <a:solidFill>
@@ -4298,13 +4514,13 @@
       </p:sp>
       <p:sp>
         <p:nvSpPr>
-          <p:cNvPr id="17" name="Text 15"/>
-          <p:cNvSpPr/>
-          <p:nvPr/>
-        </p:nvSpPr>
-        <p:spPr>
-          <a:xfrm>
-            <a:off x="7799832" y="4645152"/>
+          <p:cNvPr id="25" name="Text 23"/>
+          <p:cNvSpPr/>
+          <p:nvPr/>
+        </p:nvSpPr>
+        <p:spPr>
+          <a:xfrm>
+            <a:off x="7799832" y="4330598"/>
             <a:ext cx="3145536" cy="256032"/>
           </a:xfrm>
           <a:prstGeom prst="rect">
@@ -4337,14 +4553,14 @@
       </p:sp>
       <p:sp>
         <p:nvSpPr>
-          <p:cNvPr id="18" name="Text 16"/>
-          <p:cNvSpPr/>
-          <p:nvPr/>
-        </p:nvSpPr>
-        <p:spPr>
-          <a:xfrm>
-            <a:off x="7799832" y="4974336"/>
-            <a:ext cx="3145536" cy="576072"/>
+          <p:cNvPr id="26" name="Text 24"/>
+          <p:cNvSpPr/>
+          <p:nvPr/>
+        </p:nvSpPr>
+        <p:spPr>
+          <a:xfrm>
+            <a:off x="7799832" y="4659782"/>
+            <a:ext cx="3145536" cy="899770"/>
           </a:xfrm>
           <a:prstGeom prst="rect">
             <a:avLst/>
@@ -4370,7 +4586,7 @@
                 <a:ea typeface="Aptos" pitchFamily="34" charset="-122"/>
                 <a:cs typeface="Aptos" pitchFamily="34" charset="-120"/>
               </a:rPr>
-              <a:t>Use the concept to clarify workflow changes, dependencies, staffing, procurement requirements, training needs, and.</a:t>
+              <a:t>Use the concept to clarify workflow changes, dependencies, staffing, procurement requirements, training needs, and implementation checkpoints.</a:t>
             </a:r>
             <a:endParaRPr lang="en-US" sz="1320" dirty="0"/>
           </a:p>
@@ -4739,11 +4955,11 @@
         <p:spPr>
           <a:xfrm>
             <a:off x="7635240" y="1325880"/>
-            <a:ext cx="3474720" cy="1325880"/>
+            <a:ext cx="3474720" cy="1255471"/>
           </a:xfrm>
           <a:prstGeom prst="roundRect">
             <a:avLst>
-              <a:gd name="adj" fmla="val 8276"/>
+              <a:gd name="adj" fmla="val 8740"/>
             </a:avLst>
           </a:prstGeom>
           <a:solidFill>
@@ -4805,7 +5021,7 @@
         <p:spPr>
           <a:xfrm>
             <a:off x="7799832" y="1801368"/>
-            <a:ext cx="3145536" cy="758952"/>
+            <a:ext cx="3145536" cy="688543"/>
           </a:xfrm>
           <a:prstGeom prst="rect">
             <a:avLst/>
@@ -4845,7 +5061,7 @@
         </p:nvSpPr>
         <p:spPr>
           <a:xfrm>
-            <a:off x="7635240" y="2788920"/>
+            <a:off x="7635240" y="2718511"/>
             <a:ext cx="3474720" cy="1536192"/>
           </a:xfrm>
           <a:prstGeom prst="roundRect">
@@ -4872,7 +5088,7 @@
         </p:nvSpPr>
         <p:spPr>
           <a:xfrm>
-            <a:off x="7799832" y="2935224"/>
+            <a:off x="7799832" y="2864815"/>
             <a:ext cx="3145536" cy="256032"/>
           </a:xfrm>
           <a:prstGeom prst="rect">
@@ -4911,7 +5127,7 @@
         </p:nvSpPr>
         <p:spPr>
           <a:xfrm>
-            <a:off x="7818120" y="3300984"/>
+            <a:off x="7818120" y="3230575"/>
             <a:ext cx="3090672" cy="877824"/>
           </a:xfrm>
           <a:prstGeom prst="rect">
@@ -4986,12 +5202,12 @@
         </p:nvSpPr>
         <p:spPr>
           <a:xfrm>
-            <a:off x="7635240" y="4498848"/>
-            <a:ext cx="3474720" cy="1143000"/>
+            <a:off x="7635240" y="4391863"/>
+            <a:ext cx="3474720" cy="1255471"/>
           </a:xfrm>
           <a:prstGeom prst="roundRect">
             <a:avLst>
-              <a:gd name="adj" fmla="val 9600"/>
+              <a:gd name="adj" fmla="val 8740"/>
             </a:avLst>
           </a:prstGeom>
           <a:solidFill>
@@ -5013,7 +5229,7 @@
         </p:nvSpPr>
         <p:spPr>
           <a:xfrm>
-            <a:off x="7799832" y="4645152"/>
+            <a:off x="7799832" y="4538167"/>
             <a:ext cx="3145536" cy="256032"/>
           </a:xfrm>
           <a:prstGeom prst="rect">
@@ -5052,8 +5268,8 @@
         </p:nvSpPr>
         <p:spPr>
           <a:xfrm>
-            <a:off x="7799832" y="4974336"/>
-            <a:ext cx="3145536" cy="576072"/>
+            <a:off x="7799832" y="4867351"/>
+            <a:ext cx="3145536" cy="688543"/>
           </a:xfrm>
           <a:prstGeom prst="rect">
             <a:avLst/>
@@ -5079,7 +5295,7 @@
                 <a:ea typeface="Aptos" pitchFamily="34" charset="-122"/>
                 <a:cs typeface="Aptos" pitchFamily="34" charset="-120"/>
               </a:rPr>
-              <a:t>Identify what could go wrong, who could be affected, what safeguards are needed, and what evidence should be reviewed.</a:t>
+              <a:t>Identify what could go wrong, who could be affected, what safeguards are needed, and what evidence should be reviewed before use.</a:t>
             </a:r>
             <a:endParaRPr lang="en-US" sz="1320" dirty="0"/>
           </a:p>
@@ -5448,11 +5664,11 @@
         <p:spPr>
           <a:xfrm>
             <a:off x="7635240" y="1325880"/>
-            <a:ext cx="3474720" cy="1325880"/>
+            <a:ext cx="3474720" cy="1255471"/>
           </a:xfrm>
           <a:prstGeom prst="roundRect">
             <a:avLst>
-              <a:gd name="adj" fmla="val 8276"/>
+              <a:gd name="adj" fmla="val 8740"/>
             </a:avLst>
           </a:prstGeom>
           <a:solidFill>
@@ -5514,7 +5730,7 @@
         <p:spPr>
           <a:xfrm>
             <a:off x="7799832" y="1801368"/>
-            <a:ext cx="3145536" cy="758952"/>
+            <a:ext cx="3145536" cy="688543"/>
           </a:xfrm>
           <a:prstGeom prst="rect">
             <a:avLst/>
@@ -5554,12 +5770,12 @@
         </p:nvSpPr>
         <p:spPr>
           <a:xfrm>
-            <a:off x="7635240" y="2788920"/>
-            <a:ext cx="3474720" cy="1536192"/>
+            <a:off x="7635240" y="2718511"/>
+            <a:ext cx="3474720" cy="1328623"/>
           </a:xfrm>
           <a:prstGeom prst="roundRect">
             <a:avLst>
-              <a:gd name="adj" fmla="val 7143"/>
+              <a:gd name="adj" fmla="val 8259"/>
             </a:avLst>
           </a:prstGeom>
           <a:solidFill>
@@ -5581,7 +5797,7 @@
         </p:nvSpPr>
         <p:spPr>
           <a:xfrm>
-            <a:off x="7799832" y="2935224"/>
+            <a:off x="7799832" y="2864815"/>
             <a:ext cx="3145536" cy="256032"/>
           </a:xfrm>
           <a:prstGeom prst="rect">
@@ -5620,8 +5836,8 @@
         </p:nvSpPr>
         <p:spPr>
           <a:xfrm>
-            <a:off x="7818120" y="3300984"/>
-            <a:ext cx="3090672" cy="877824"/>
+            <a:off x="7818120" y="3230575"/>
+            <a:ext cx="3090672" cy="670255"/>
           </a:xfrm>
           <a:prstGeom prst="rect">
             <a:avLst/>
@@ -5695,12 +5911,12 @@
         </p:nvSpPr>
         <p:spPr>
           <a:xfrm>
-            <a:off x="7635240" y="4498848"/>
-            <a:ext cx="3474720" cy="1143000"/>
+            <a:off x="7635240" y="4184294"/>
+            <a:ext cx="3474720" cy="1466698"/>
           </a:xfrm>
           <a:prstGeom prst="roundRect">
             <a:avLst>
-              <a:gd name="adj" fmla="val 9600"/>
+              <a:gd name="adj" fmla="val 7481"/>
             </a:avLst>
           </a:prstGeom>
           <a:solidFill>
@@ -5722,7 +5938,7 @@
         </p:nvSpPr>
         <p:spPr>
           <a:xfrm>
-            <a:off x="7799832" y="4645152"/>
+            <a:off x="7799832" y="4330598"/>
             <a:ext cx="3145536" cy="256032"/>
           </a:xfrm>
           <a:prstGeom prst="rect">
@@ -5761,8 +5977,8 @@
         </p:nvSpPr>
         <p:spPr>
           <a:xfrm>
-            <a:off x="7799832" y="4974336"/>
-            <a:ext cx="3145536" cy="576072"/>
+            <a:off x="7799832" y="4659782"/>
+            <a:ext cx="3145536" cy="899770"/>
           </a:xfrm>
           <a:prstGeom prst="rect">
             <a:avLst/>
@@ -5788,7 +6004,7 @@
                 <a:ea typeface="Aptos" pitchFamily="34" charset="-122"/>
                 <a:cs typeface="Aptos" pitchFamily="34" charset="-120"/>
               </a:rPr>
-              <a:t>Use the concept to clarify workflow changes, dependencies, staffing, procurement requirements, training needs, and.</a:t>
+              <a:t>Use the concept to clarify workflow changes, dependencies, staffing, procurement requirements, training needs, and implementation checkpoints.</a:t>
             </a:r>
             <a:endParaRPr lang="en-US" sz="1320" dirty="0"/>
           </a:p>
@@ -6157,11 +6373,11 @@
         <p:spPr>
           <a:xfrm>
             <a:off x="7635240" y="1325880"/>
-            <a:ext cx="3474720" cy="1325880"/>
+            <a:ext cx="3474720" cy="1207008"/>
           </a:xfrm>
           <a:prstGeom prst="roundRect">
             <a:avLst>
-              <a:gd name="adj" fmla="val 8276"/>
+              <a:gd name="adj" fmla="val 9091"/>
             </a:avLst>
           </a:prstGeom>
           <a:solidFill>
@@ -6223,7 +6439,7 @@
         <p:spPr>
           <a:xfrm>
             <a:off x="7799832" y="1801368"/>
-            <a:ext cx="3145536" cy="758952"/>
+            <a:ext cx="3145536" cy="640080"/>
           </a:xfrm>
           <a:prstGeom prst="rect">
             <a:avLst/>
@@ -6263,12 +6479,12 @@
         </p:nvSpPr>
         <p:spPr>
           <a:xfrm>
-            <a:off x="7635240" y="2788920"/>
-            <a:ext cx="3474720" cy="1536192"/>
+            <a:off x="7635240" y="2670048"/>
+            <a:ext cx="3474720" cy="1377086"/>
           </a:xfrm>
           <a:prstGeom prst="roundRect">
             <a:avLst>
-              <a:gd name="adj" fmla="val 7143"/>
+              <a:gd name="adj" fmla="val 7968"/>
             </a:avLst>
           </a:prstGeom>
           <a:solidFill>
@@ -6290,7 +6506,7 @@
         </p:nvSpPr>
         <p:spPr>
           <a:xfrm>
-            <a:off x="7799832" y="2935224"/>
+            <a:off x="7799832" y="2816352"/>
             <a:ext cx="3145536" cy="256032"/>
           </a:xfrm>
           <a:prstGeom prst="rect">
@@ -6329,8 +6545,8 @@
         </p:nvSpPr>
         <p:spPr>
           <a:xfrm>
-            <a:off x="7818120" y="3300984"/>
-            <a:ext cx="3090672" cy="877824"/>
+            <a:off x="7818120" y="3182112"/>
+            <a:ext cx="3090672" cy="718718"/>
           </a:xfrm>
           <a:prstGeom prst="rect">
             <a:avLst/>
@@ -6404,12 +6620,12 @@
         </p:nvSpPr>
         <p:spPr>
           <a:xfrm>
-            <a:off x="7635240" y="4498848"/>
-            <a:ext cx="3474720" cy="1143000"/>
+            <a:off x="7635240" y="4184294"/>
+            <a:ext cx="3474720" cy="1466698"/>
           </a:xfrm>
           <a:prstGeom prst="roundRect">
             <a:avLst>
-              <a:gd name="adj" fmla="val 9600"/>
+              <a:gd name="adj" fmla="val 7481"/>
             </a:avLst>
           </a:prstGeom>
           <a:solidFill>
@@ -6431,7 +6647,7 @@
         </p:nvSpPr>
         <p:spPr>
           <a:xfrm>
-            <a:off x="7799832" y="4645152"/>
+            <a:off x="7799832" y="4330598"/>
             <a:ext cx="3145536" cy="256032"/>
           </a:xfrm>
           <a:prstGeom prst="rect">
@@ -6470,8 +6686,8 @@
         </p:nvSpPr>
         <p:spPr>
           <a:xfrm>
-            <a:off x="7799832" y="4974336"/>
-            <a:ext cx="3145536" cy="576072"/>
+            <a:off x="7799832" y="4659782"/>
+            <a:ext cx="3145536" cy="899770"/>
           </a:xfrm>
           <a:prstGeom prst="rect">
             <a:avLst/>
@@ -6497,7 +6713,7 @@
                 <a:ea typeface="Aptos" pitchFamily="34" charset="-122"/>
                 <a:cs typeface="Aptos" pitchFamily="34" charset="-120"/>
               </a:rPr>
-              <a:t>Use the concept to clarify workflow changes, dependencies, staffing, procurement requirements, training needs, and.</a:t>
+              <a:t>Use the concept to clarify workflow changes, dependencies, staffing, procurement requirements, training needs, and implementation checkpoints.</a:t>
             </a:r>
             <a:endParaRPr lang="en-US" sz="1320" dirty="0"/>
           </a:p>
@@ -6849,11 +7065,11 @@
         <p:spPr>
           <a:xfrm>
             <a:off x="7635240" y="1325880"/>
-            <a:ext cx="3474720" cy="1325880"/>
+            <a:ext cx="3474720" cy="1207008"/>
           </a:xfrm>
           <a:prstGeom prst="roundRect">
             <a:avLst>
-              <a:gd name="adj" fmla="val 8276"/>
+              <a:gd name="adj" fmla="val 9091"/>
             </a:avLst>
           </a:prstGeom>
           <a:solidFill>
@@ -6915,7 +7131,7 @@
         <p:spPr>
           <a:xfrm>
             <a:off x="7799832" y="1801368"/>
-            <a:ext cx="3145536" cy="758952"/>
+            <a:ext cx="3145536" cy="640080"/>
           </a:xfrm>
           <a:prstGeom prst="rect">
             <a:avLst/>
@@ -6955,12 +7171,12 @@
         </p:nvSpPr>
         <p:spPr>
           <a:xfrm>
-            <a:off x="7635240" y="2788920"/>
-            <a:ext cx="3474720" cy="1536192"/>
+            <a:off x="7635240" y="2670048"/>
+            <a:ext cx="3474720" cy="1377086"/>
           </a:xfrm>
           <a:prstGeom prst="roundRect">
             <a:avLst>
-              <a:gd name="adj" fmla="val 7143"/>
+              <a:gd name="adj" fmla="val 7968"/>
             </a:avLst>
           </a:prstGeom>
           <a:solidFill>
@@ -6982,7 +7198,7 @@
         </p:nvSpPr>
         <p:spPr>
           <a:xfrm>
-            <a:off x="7799832" y="2935224"/>
+            <a:off x="7799832" y="2816352"/>
             <a:ext cx="3145536" cy="256032"/>
           </a:xfrm>
           <a:prstGeom prst="rect">
@@ -7021,8 +7237,8 @@
         </p:nvSpPr>
         <p:spPr>
           <a:xfrm>
-            <a:off x="7818120" y="3300984"/>
-            <a:ext cx="3090672" cy="877824"/>
+            <a:off x="7818120" y="3182112"/>
+            <a:ext cx="3090672" cy="718718"/>
           </a:xfrm>
           <a:prstGeom prst="rect">
             <a:avLst/>
@@ -7079,12 +7295,12 @@
         </p:nvSpPr>
         <p:spPr>
           <a:xfrm>
-            <a:off x="7635240" y="4498848"/>
-            <a:ext cx="3474720" cy="1143000"/>
+            <a:off x="7635240" y="4184294"/>
+            <a:ext cx="3474720" cy="1466698"/>
           </a:xfrm>
           <a:prstGeom prst="roundRect">
             <a:avLst>
-              <a:gd name="adj" fmla="val 9600"/>
+              <a:gd name="adj" fmla="val 7481"/>
             </a:avLst>
           </a:prstGeom>
           <a:solidFill>
@@ -7106,7 +7322,7 @@
         </p:nvSpPr>
         <p:spPr>
           <a:xfrm>
-            <a:off x="7799832" y="4645152"/>
+            <a:off x="7799832" y="4330598"/>
             <a:ext cx="3145536" cy="256032"/>
           </a:xfrm>
           <a:prstGeom prst="rect">
@@ -7145,8 +7361,8 @@
         </p:nvSpPr>
         <p:spPr>
           <a:xfrm>
-            <a:off x="7799832" y="4974336"/>
-            <a:ext cx="3145536" cy="576072"/>
+            <a:off x="7799832" y="4659782"/>
+            <a:ext cx="3145536" cy="899770"/>
           </a:xfrm>
           <a:prstGeom prst="rect">
             <a:avLst/>
@@ -7172,7 +7388,7 @@
                 <a:ea typeface="Aptos" pitchFamily="34" charset="-122"/>
                 <a:cs typeface="Aptos" pitchFamily="34" charset="-120"/>
               </a:rPr>
-              <a:t>Use the concept to clarify workflow changes, dependencies, staffing, procurement requirements, training needs, and.</a:t>
+              <a:t>Use the concept to clarify workflow changes, dependencies, staffing, procurement requirements, training needs, and implementation checkpoints.</a:t>
             </a:r>
             <a:endParaRPr lang="en-US" sz="1320" dirty="0"/>
           </a:p>
@@ -7541,11 +7757,11 @@
         <p:spPr>
           <a:xfrm>
             <a:off x="7635240" y="1325880"/>
-            <a:ext cx="3474720" cy="1325880"/>
+            <a:ext cx="3474720" cy="1207008"/>
           </a:xfrm>
           <a:prstGeom prst="roundRect">
             <a:avLst>
-              <a:gd name="adj" fmla="val 8276"/>
+              <a:gd name="adj" fmla="val 9091"/>
             </a:avLst>
           </a:prstGeom>
           <a:solidFill>
@@ -7607,7 +7823,7 @@
         <p:spPr>
           <a:xfrm>
             <a:off x="7799832" y="1801368"/>
-            <a:ext cx="3145536" cy="758952"/>
+            <a:ext cx="3145536" cy="640080"/>
           </a:xfrm>
           <a:prstGeom prst="rect">
             <a:avLst/>
@@ -7633,7 +7849,7 @@
                 <a:ea typeface="Aptos" pitchFamily="34" charset="-122"/>
                 <a:cs typeface="Aptos" pitchFamily="34" charset="-120"/>
               </a:rPr>
-              <a:t>Create a workflow usability test plan for one real or realistic public health AI workflow.</a:t>
+              <a:t>Create a workflow usability test plan for one real or realistic public health AI.</a:t>
             </a:r>
             <a:endParaRPr lang="en-US" sz="1320" dirty="0"/>
           </a:p>
@@ -7647,12 +7863,12 @@
         </p:nvSpPr>
         <p:spPr>
           <a:xfrm>
-            <a:off x="7635240" y="2788920"/>
-            <a:ext cx="3474720" cy="1536192"/>
+            <a:off x="7635240" y="2670048"/>
+            <a:ext cx="3474720" cy="1377086"/>
           </a:xfrm>
           <a:prstGeom prst="roundRect">
             <a:avLst>
-              <a:gd name="adj" fmla="val 7143"/>
+              <a:gd name="adj" fmla="val 7968"/>
             </a:avLst>
           </a:prstGeom>
           <a:solidFill>
@@ -7674,7 +7890,7 @@
         </p:nvSpPr>
         <p:spPr>
           <a:xfrm>
-            <a:off x="7799832" y="2935224"/>
+            <a:off x="7799832" y="2816352"/>
             <a:ext cx="3145536" cy="256032"/>
           </a:xfrm>
           <a:prstGeom prst="rect">
@@ -7713,8 +7929,8 @@
         </p:nvSpPr>
         <p:spPr>
           <a:xfrm>
-            <a:off x="7818120" y="3300984"/>
-            <a:ext cx="3090672" cy="877824"/>
+            <a:off x="7818120" y="3182112"/>
+            <a:ext cx="3090672" cy="718718"/>
           </a:xfrm>
           <a:prstGeom prst="rect">
             <a:avLst/>
@@ -7788,12 +8004,12 @@
         </p:nvSpPr>
         <p:spPr>
           <a:xfrm>
-            <a:off x="7635240" y="4498848"/>
-            <a:ext cx="3474720" cy="1143000"/>
+            <a:off x="7635240" y="4184294"/>
+            <a:ext cx="3474720" cy="1466698"/>
           </a:xfrm>
           <a:prstGeom prst="roundRect">
             <a:avLst>
-              <a:gd name="adj" fmla="val 9600"/>
+              <a:gd name="adj" fmla="val 7481"/>
             </a:avLst>
           </a:prstGeom>
           <a:solidFill>
@@ -7815,7 +8031,7 @@
         </p:nvSpPr>
         <p:spPr>
           <a:xfrm>
-            <a:off x="7799832" y="4645152"/>
+            <a:off x="7799832" y="4330598"/>
             <a:ext cx="3145536" cy="256032"/>
           </a:xfrm>
           <a:prstGeom prst="rect">
@@ -7854,8 +8070,8 @@
         </p:nvSpPr>
         <p:spPr>
           <a:xfrm>
-            <a:off x="7799832" y="4974336"/>
-            <a:ext cx="3145536" cy="576072"/>
+            <a:off x="7799832" y="4659782"/>
+            <a:ext cx="3145536" cy="899770"/>
           </a:xfrm>
           <a:prstGeom prst="rect">
             <a:avLst/>
@@ -7881,7 +8097,7 @@
                 <a:ea typeface="Aptos" pitchFamily="34" charset="-122"/>
                 <a:cs typeface="Aptos" pitchFamily="34" charset="-120"/>
               </a:rPr>
-              <a:t>Use the assignment to test whether you can explain the concept, apply it to a realistic public health situation, and.</a:t>
+              <a:t>Use the assignment to test whether you can explain the concept, apply it to a realistic public health situation, and identify what would need review before the work moves forward.</a:t>
             </a:r>
             <a:endParaRPr lang="en-US" sz="1320" dirty="0"/>
           </a:p>
@@ -8233,11 +8449,11 @@
         <p:spPr>
           <a:xfrm>
             <a:off x="7635240" y="1325880"/>
-            <a:ext cx="3474720" cy="1325880"/>
+            <a:ext cx="3474720" cy="1207008"/>
           </a:xfrm>
           <a:prstGeom prst="roundRect">
             <a:avLst>
-              <a:gd name="adj" fmla="val 8276"/>
+              <a:gd name="adj" fmla="val 9091"/>
             </a:avLst>
           </a:prstGeom>
           <a:solidFill>
@@ -8299,7 +8515,7 @@
         <p:spPr>
           <a:xfrm>
             <a:off x="7799832" y="1801368"/>
-            <a:ext cx="3145536" cy="758952"/>
+            <a:ext cx="3145536" cy="640080"/>
           </a:xfrm>
           <a:prstGeom prst="rect">
             <a:avLst/>
@@ -8339,12 +8555,12 @@
         </p:nvSpPr>
         <p:spPr>
           <a:xfrm>
-            <a:off x="7635240" y="2788920"/>
-            <a:ext cx="3474720" cy="1536192"/>
+            <a:off x="7635240" y="2670048"/>
+            <a:ext cx="3474720" cy="1377086"/>
           </a:xfrm>
           <a:prstGeom prst="roundRect">
             <a:avLst>
-              <a:gd name="adj" fmla="val 7143"/>
+              <a:gd name="adj" fmla="val 7968"/>
             </a:avLst>
           </a:prstGeom>
           <a:solidFill>
@@ -8366,7 +8582,7 @@
         </p:nvSpPr>
         <p:spPr>
           <a:xfrm>
-            <a:off x="7799832" y="2935224"/>
+            <a:off x="7799832" y="2816352"/>
             <a:ext cx="3145536" cy="256032"/>
           </a:xfrm>
           <a:prstGeom prst="rect">
@@ -8405,8 +8621,8 @@
         </p:nvSpPr>
         <p:spPr>
           <a:xfrm>
-            <a:off x="7818120" y="3300984"/>
-            <a:ext cx="3090672" cy="877824"/>
+            <a:off x="7818120" y="3182112"/>
+            <a:ext cx="3090672" cy="718718"/>
           </a:xfrm>
           <a:prstGeom prst="rect">
             <a:avLst/>
@@ -8463,12 +8679,12 @@
         </p:nvSpPr>
         <p:spPr>
           <a:xfrm>
-            <a:off x="7635240" y="4498848"/>
-            <a:ext cx="3474720" cy="1143000"/>
+            <a:off x="7635240" y="4184294"/>
+            <a:ext cx="3474720" cy="1466698"/>
           </a:xfrm>
           <a:prstGeom prst="roundRect">
             <a:avLst>
-              <a:gd name="adj" fmla="val 9600"/>
+              <a:gd name="adj" fmla="val 7481"/>
             </a:avLst>
           </a:prstGeom>
           <a:solidFill>
@@ -8490,7 +8706,7 @@
         </p:nvSpPr>
         <p:spPr>
           <a:xfrm>
-            <a:off x="7799832" y="4645152"/>
+            <a:off x="7799832" y="4330598"/>
             <a:ext cx="3145536" cy="256032"/>
           </a:xfrm>
           <a:prstGeom prst="rect">
@@ -8529,8 +8745,8 @@
         </p:nvSpPr>
         <p:spPr>
           <a:xfrm>
-            <a:off x="7799832" y="4974336"/>
-            <a:ext cx="3145536" cy="576072"/>
+            <a:off x="7799832" y="4659782"/>
+            <a:ext cx="3145536" cy="899770"/>
           </a:xfrm>
           <a:prstGeom prst="rect">
             <a:avLst/>
@@ -8556,7 +8772,7 @@
                 <a:ea typeface="Aptos" pitchFamily="34" charset="-122"/>
                 <a:cs typeface="Aptos" pitchFamily="34" charset="-120"/>
               </a:rPr>
-              <a:t>Use the concept to clarify workflow changes, dependencies, staffing, procurement requirements, training needs, and.</a:t>
+              <a:t>Use the concept to clarify workflow changes, dependencies, staffing, procurement requirements, training needs, and implementation checkpoints.</a:t>
             </a:r>
             <a:endParaRPr lang="en-US" sz="1320" dirty="0"/>
           </a:p>
@@ -8891,11 +9107,11 @@
         <p:spPr>
           <a:xfrm>
             <a:off x="7635240" y="1325880"/>
-            <a:ext cx="3474720" cy="1325880"/>
+            <a:ext cx="3474720" cy="1255471"/>
           </a:xfrm>
           <a:prstGeom prst="roundRect">
             <a:avLst>
-              <a:gd name="adj" fmla="val 8276"/>
+              <a:gd name="adj" fmla="val 8740"/>
             </a:avLst>
           </a:prstGeom>
           <a:solidFill>
@@ -8957,7 +9173,7 @@
         <p:spPr>
           <a:xfrm>
             <a:off x="7799832" y="1801368"/>
-            <a:ext cx="3145536" cy="758952"/>
+            <a:ext cx="3145536" cy="688543"/>
           </a:xfrm>
           <a:prstGeom prst="rect">
             <a:avLst/>
@@ -8997,12 +9213,12 @@
         </p:nvSpPr>
         <p:spPr>
           <a:xfrm>
-            <a:off x="7635240" y="2788920"/>
-            <a:ext cx="3474720" cy="1536192"/>
+            <a:off x="7635240" y="2718511"/>
+            <a:ext cx="3474720" cy="1328623"/>
           </a:xfrm>
           <a:prstGeom prst="roundRect">
             <a:avLst>
-              <a:gd name="adj" fmla="val 7143"/>
+              <a:gd name="adj" fmla="val 8259"/>
             </a:avLst>
           </a:prstGeom>
           <a:solidFill>
@@ -9024,7 +9240,7 @@
         </p:nvSpPr>
         <p:spPr>
           <a:xfrm>
-            <a:off x="7799832" y="2935224"/>
+            <a:off x="7799832" y="2864815"/>
             <a:ext cx="3145536" cy="256032"/>
           </a:xfrm>
           <a:prstGeom prst="rect">
@@ -9063,8 +9279,8 @@
         </p:nvSpPr>
         <p:spPr>
           <a:xfrm>
-            <a:off x="7818120" y="3300984"/>
-            <a:ext cx="3090672" cy="877824"/>
+            <a:off x="7818120" y="3230575"/>
+            <a:ext cx="3090672" cy="670255"/>
           </a:xfrm>
           <a:prstGeom prst="rect">
             <a:avLst/>
@@ -9121,12 +9337,12 @@
         </p:nvSpPr>
         <p:spPr>
           <a:xfrm>
-            <a:off x="7635240" y="4498848"/>
-            <a:ext cx="3474720" cy="1143000"/>
+            <a:off x="7635240" y="4184294"/>
+            <a:ext cx="3474720" cy="1466698"/>
           </a:xfrm>
           <a:prstGeom prst="roundRect">
             <a:avLst>
-              <a:gd name="adj" fmla="val 9600"/>
+              <a:gd name="adj" fmla="val 7481"/>
             </a:avLst>
           </a:prstGeom>
           <a:solidFill>
@@ -9148,7 +9364,7 @@
         </p:nvSpPr>
         <p:spPr>
           <a:xfrm>
-            <a:off x="7799832" y="4645152"/>
+            <a:off x="7799832" y="4330598"/>
             <a:ext cx="3145536" cy="256032"/>
           </a:xfrm>
           <a:prstGeom prst="rect">
@@ -9187,8 +9403,8 @@
         </p:nvSpPr>
         <p:spPr>
           <a:xfrm>
-            <a:off x="7799832" y="4974336"/>
-            <a:ext cx="3145536" cy="576072"/>
+            <a:off x="7799832" y="4659782"/>
+            <a:ext cx="3145536" cy="899770"/>
           </a:xfrm>
           <a:prstGeom prst="rect">
             <a:avLst/>
@@ -9214,7 +9430,7 @@
                 <a:ea typeface="Aptos" pitchFamily="34" charset="-122"/>
                 <a:cs typeface="Aptos" pitchFamily="34" charset="-120"/>
               </a:rPr>
-              <a:t>Use the assignment to test whether you can explain the concept, apply it to a realistic public health situation, and.</a:t>
+              <a:t>Use the assignment to test whether you can explain the concept, apply it to a realistic public health situation, and identify what would need review before the work moves forward.</a:t>
             </a:r>
             <a:endParaRPr lang="en-US" sz="1320" dirty="0"/>
           </a:p>
@@ -9583,11 +9799,11 @@
         <p:spPr>
           <a:xfrm>
             <a:off x="7635240" y="1325880"/>
-            <a:ext cx="3474720" cy="1325880"/>
+            <a:ext cx="3474720" cy="1255471"/>
           </a:xfrm>
           <a:prstGeom prst="roundRect">
             <a:avLst>
-              <a:gd name="adj" fmla="val 8276"/>
+              <a:gd name="adj" fmla="val 8740"/>
             </a:avLst>
           </a:prstGeom>
           <a:solidFill>
@@ -9649,7 +9865,7 @@
         <p:spPr>
           <a:xfrm>
             <a:off x="7799832" y="1801368"/>
-            <a:ext cx="3145536" cy="758952"/>
+            <a:ext cx="3145536" cy="688543"/>
           </a:xfrm>
           <a:prstGeom prst="rect">
             <a:avLst/>
@@ -9689,12 +9905,12 @@
         </p:nvSpPr>
         <p:spPr>
           <a:xfrm>
-            <a:off x="7635240" y="2788920"/>
-            <a:ext cx="3474720" cy="1536192"/>
+            <a:off x="7635240" y="2718511"/>
+            <a:ext cx="3474720" cy="1328623"/>
           </a:xfrm>
           <a:prstGeom prst="roundRect">
             <a:avLst>
-              <a:gd name="adj" fmla="val 7143"/>
+              <a:gd name="adj" fmla="val 8259"/>
             </a:avLst>
           </a:prstGeom>
           <a:solidFill>
@@ -9716,7 +9932,7 @@
         </p:nvSpPr>
         <p:spPr>
           <a:xfrm>
-            <a:off x="7799832" y="2935224"/>
+            <a:off x="7799832" y="2864815"/>
             <a:ext cx="3145536" cy="256032"/>
           </a:xfrm>
           <a:prstGeom prst="rect">
@@ -9755,8 +9971,8 @@
         </p:nvSpPr>
         <p:spPr>
           <a:xfrm>
-            <a:off x="7818120" y="3300984"/>
-            <a:ext cx="3090672" cy="877824"/>
+            <a:off x="7818120" y="3230575"/>
+            <a:ext cx="3090672" cy="670255"/>
           </a:xfrm>
           <a:prstGeom prst="rect">
             <a:avLst/>
@@ -9830,12 +10046,12 @@
         </p:nvSpPr>
         <p:spPr>
           <a:xfrm>
-            <a:off x="7635240" y="4498848"/>
-            <a:ext cx="3474720" cy="1143000"/>
+            <a:off x="7635240" y="4184294"/>
+            <a:ext cx="3474720" cy="1466698"/>
           </a:xfrm>
           <a:prstGeom prst="roundRect">
             <a:avLst>
-              <a:gd name="adj" fmla="val 9600"/>
+              <a:gd name="adj" fmla="val 7481"/>
             </a:avLst>
           </a:prstGeom>
           <a:solidFill>
@@ -9857,7 +10073,7 @@
         </p:nvSpPr>
         <p:spPr>
           <a:xfrm>
-            <a:off x="7799832" y="4645152"/>
+            <a:off x="7799832" y="4330598"/>
             <a:ext cx="3145536" cy="256032"/>
           </a:xfrm>
           <a:prstGeom prst="rect">
@@ -9896,8 +10112,8 @@
         </p:nvSpPr>
         <p:spPr>
           <a:xfrm>
-            <a:off x="7799832" y="4974336"/>
-            <a:ext cx="3145536" cy="576072"/>
+            <a:off x="7799832" y="4659782"/>
+            <a:ext cx="3145536" cy="899770"/>
           </a:xfrm>
           <a:prstGeom prst="rect">
             <a:avLst/>
@@ -9923,7 +10139,7 @@
                 <a:ea typeface="Aptos" pitchFamily="34" charset="-122"/>
                 <a:cs typeface="Aptos" pitchFamily="34" charset="-120"/>
               </a:rPr>
-              <a:t>Use the assignment to test whether you can explain the concept, apply it to a realistic public health situation, and.</a:t>
+              <a:t>Use the assignment to test whether you can explain the concept, apply it to a realistic public health situation, and identify what would need review before the work moves forward.</a:t>
             </a:r>
             <a:endParaRPr lang="en-US" sz="1320" dirty="0"/>
           </a:p>
@@ -10894,11 +11110,11 @@
         <p:spPr>
           <a:xfrm>
             <a:off x="7635240" y="1325880"/>
-            <a:ext cx="3474720" cy="1325880"/>
+            <a:ext cx="3474720" cy="1207008"/>
           </a:xfrm>
           <a:prstGeom prst="roundRect">
             <a:avLst>
-              <a:gd name="adj" fmla="val 8276"/>
+              <a:gd name="adj" fmla="val 9091"/>
             </a:avLst>
           </a:prstGeom>
           <a:solidFill>
@@ -10960,7 +11176,7 @@
         <p:spPr>
           <a:xfrm>
             <a:off x="7799832" y="1801368"/>
-            <a:ext cx="3145536" cy="758952"/>
+            <a:ext cx="3145536" cy="640080"/>
           </a:xfrm>
           <a:prstGeom prst="rect">
             <a:avLst/>
@@ -11000,12 +11216,12 @@
         </p:nvSpPr>
         <p:spPr>
           <a:xfrm>
-            <a:off x="7635240" y="2788920"/>
-            <a:ext cx="3474720" cy="1536192"/>
+            <a:off x="7635240" y="2670048"/>
+            <a:ext cx="3474720" cy="1377086"/>
           </a:xfrm>
           <a:prstGeom prst="roundRect">
             <a:avLst>
-              <a:gd name="adj" fmla="val 7143"/>
+              <a:gd name="adj" fmla="val 7968"/>
             </a:avLst>
           </a:prstGeom>
           <a:solidFill>
@@ -11027,7 +11243,7 @@
         </p:nvSpPr>
         <p:spPr>
           <a:xfrm>
-            <a:off x="7799832" y="2935224"/>
+            <a:off x="7799832" y="2816352"/>
             <a:ext cx="3145536" cy="256032"/>
           </a:xfrm>
           <a:prstGeom prst="rect">
@@ -11066,8 +11282,8 @@
         </p:nvSpPr>
         <p:spPr>
           <a:xfrm>
-            <a:off x="7818120" y="3300984"/>
-            <a:ext cx="3090672" cy="877824"/>
+            <a:off x="7818120" y="3182112"/>
+            <a:ext cx="3090672" cy="718718"/>
           </a:xfrm>
           <a:prstGeom prst="rect">
             <a:avLst/>
@@ -11124,12 +11340,12 @@
         </p:nvSpPr>
         <p:spPr>
           <a:xfrm>
-            <a:off x="7635240" y="4498848"/>
-            <a:ext cx="3474720" cy="1143000"/>
+            <a:off x="7635240" y="4184294"/>
+            <a:ext cx="3474720" cy="1466698"/>
           </a:xfrm>
           <a:prstGeom prst="roundRect">
             <a:avLst>
-              <a:gd name="adj" fmla="val 9600"/>
+              <a:gd name="adj" fmla="val 7481"/>
             </a:avLst>
           </a:prstGeom>
           <a:solidFill>
@@ -11151,7 +11367,7 @@
         </p:nvSpPr>
         <p:spPr>
           <a:xfrm>
-            <a:off x="7799832" y="4645152"/>
+            <a:off x="7799832" y="4330598"/>
             <a:ext cx="3145536" cy="256032"/>
           </a:xfrm>
           <a:prstGeom prst="rect">
@@ -11190,8 +11406,8 @@
         </p:nvSpPr>
         <p:spPr>
           <a:xfrm>
-            <a:off x="7799832" y="4974336"/>
-            <a:ext cx="3145536" cy="576072"/>
+            <a:off x="7799832" y="4659782"/>
+            <a:ext cx="3145536" cy="899770"/>
           </a:xfrm>
           <a:prstGeom prst="rect">
             <a:avLst/>
@@ -11217,7 +11433,7 @@
                 <a:ea typeface="Aptos" pitchFamily="34" charset="-122"/>
                 <a:cs typeface="Aptos" pitchFamily="34" charset="-120"/>
               </a:rPr>
-              <a:t>Use the concept to clarify workflow changes, dependencies, staffing, procurement requirements, training needs, and.</a:t>
+              <a:t>Use the concept to clarify workflow changes, dependencies, staffing, procurement requirements, training needs, and implementation checkpoints.</a:t>
             </a:r>
             <a:endParaRPr lang="en-US" sz="1320" dirty="0"/>
           </a:p>
@@ -11552,11 +11768,11 @@
         <p:spPr>
           <a:xfrm>
             <a:off x="7635240" y="1325880"/>
-            <a:ext cx="3474720" cy="1325880"/>
+            <a:ext cx="3474720" cy="1207008"/>
           </a:xfrm>
           <a:prstGeom prst="roundRect">
             <a:avLst>
-              <a:gd name="adj" fmla="val 8276"/>
+              <a:gd name="adj" fmla="val 9091"/>
             </a:avLst>
           </a:prstGeom>
           <a:solidFill>
@@ -11618,7 +11834,7 @@
         <p:spPr>
           <a:xfrm>
             <a:off x="7799832" y="1801368"/>
-            <a:ext cx="3145536" cy="758952"/>
+            <a:ext cx="3145536" cy="640080"/>
           </a:xfrm>
           <a:prstGeom prst="rect">
             <a:avLst/>
@@ -11644,7 +11860,7 @@
                 <a:ea typeface="Aptos" pitchFamily="34" charset="-122"/>
                 <a:cs typeface="Aptos" pitchFamily="34" charset="-120"/>
               </a:rPr>
-              <a:t>Agency privacy, cybersecurity, data governance, procurement, and records management policies</a:t>
+              <a:t>Agency privacy, cybersecurity, data governance, procurement, and records management.</a:t>
             </a:r>
             <a:endParaRPr lang="en-US" sz="1320" dirty="0"/>
           </a:p>
@@ -11658,12 +11874,12 @@
         </p:nvSpPr>
         <p:spPr>
           <a:xfrm>
-            <a:off x="7635240" y="2788920"/>
-            <a:ext cx="3474720" cy="1536192"/>
+            <a:off x="7635240" y="2670048"/>
+            <a:ext cx="3474720" cy="1377086"/>
           </a:xfrm>
           <a:prstGeom prst="roundRect">
             <a:avLst>
-              <a:gd name="adj" fmla="val 7143"/>
+              <a:gd name="adj" fmla="val 7968"/>
             </a:avLst>
           </a:prstGeom>
           <a:solidFill>
@@ -11685,7 +11901,7 @@
         </p:nvSpPr>
         <p:spPr>
           <a:xfrm>
-            <a:off x="7799832" y="2935224"/>
+            <a:off x="7799832" y="2816352"/>
             <a:ext cx="3145536" cy="256032"/>
           </a:xfrm>
           <a:prstGeom prst="rect">
@@ -11724,8 +11940,8 @@
         </p:nvSpPr>
         <p:spPr>
           <a:xfrm>
-            <a:off x="7818120" y="3300984"/>
-            <a:ext cx="3090672" cy="877824"/>
+            <a:off x="7818120" y="3182112"/>
+            <a:ext cx="3090672" cy="718718"/>
           </a:xfrm>
           <a:prstGeom prst="rect">
             <a:avLst/>
@@ -11765,12 +11981,12 @@
         </p:nvSpPr>
         <p:spPr>
           <a:xfrm>
-            <a:off x="7635240" y="4498848"/>
-            <a:ext cx="3474720" cy="1143000"/>
+            <a:off x="7635240" y="4184294"/>
+            <a:ext cx="3474720" cy="1466698"/>
           </a:xfrm>
           <a:prstGeom prst="roundRect">
             <a:avLst>
-              <a:gd name="adj" fmla="val 9600"/>
+              <a:gd name="adj" fmla="val 7481"/>
             </a:avLst>
           </a:prstGeom>
           <a:solidFill>
@@ -11792,7 +12008,7 @@
         </p:nvSpPr>
         <p:spPr>
           <a:xfrm>
-            <a:off x="7799832" y="4645152"/>
+            <a:off x="7799832" y="4330598"/>
             <a:ext cx="3145536" cy="256032"/>
           </a:xfrm>
           <a:prstGeom prst="rect">
@@ -11831,8 +12047,8 @@
         </p:nvSpPr>
         <p:spPr>
           <a:xfrm>
-            <a:off x="7799832" y="4974336"/>
-            <a:ext cx="3145536" cy="576072"/>
+            <a:off x="7799832" y="4659782"/>
+            <a:ext cx="3145536" cy="899770"/>
           </a:xfrm>
           <a:prstGeom prst="rect">
             <a:avLst/>
@@ -11858,7 +12074,7 @@
                 <a:ea typeface="Aptos" pitchFamily="34" charset="-122"/>
                 <a:cs typeface="Aptos" pitchFamily="34" charset="-120"/>
               </a:rPr>
-              <a:t>Use the concept to clarify workflow changes, dependencies, staffing, procurement requirements, training needs, and.</a:t>
+              <a:t>Use the concept to clarify workflow changes, dependencies, staffing, procurement requirements, training needs, and implementation checkpoints.</a:t>
             </a:r>
             <a:endParaRPr lang="en-US" sz="1320" dirty="0"/>
           </a:p>
@@ -12336,7 +12552,7 @@
                 <a:ea typeface="Aptos" pitchFamily="34" charset="-122"/>
                 <a:cs typeface="Aptos" pitchFamily="34" charset="-120"/>
               </a:rPr>
-              <a:t>Use the related plays to identify decisions, participants, timing, approvals, and documentation needed for responsible.</a:t>
+              <a:t>Use the related plays to identify decisions, participants, timing, approvals, and documentation needed for responsible implementation.</a:t>
             </a:r>
             <a:endParaRPr lang="en-US" sz="1320" dirty="0"/>
           </a:p>
@@ -12955,7 +13171,7 @@
                 <a:ea typeface="Aptos" pitchFamily="34" charset="-122"/>
                 <a:cs typeface="Aptos" pitchFamily="34" charset="-120"/>
               </a:rPr>
-              <a:t>Use linked tools when your department needs a structured worksheet, template, checklist, review process, or.</a:t>
+              <a:t>Use linked tools when your department needs a structured worksheet, template, checklist, review process, or documentation artifact.</a:t>
             </a:r>
             <a:endParaRPr lang="en-US" sz="1320" dirty="0"/>
           </a:p>
@@ -13465,11 +13681,11 @@
         <p:spPr>
           <a:xfrm>
             <a:off x="7635240" y="1325880"/>
-            <a:ext cx="3474720" cy="1325880"/>
+            <a:ext cx="3474720" cy="1255471"/>
           </a:xfrm>
           <a:prstGeom prst="roundRect">
             <a:avLst>
-              <a:gd name="adj" fmla="val 8276"/>
+              <a:gd name="adj" fmla="val 8740"/>
             </a:avLst>
           </a:prstGeom>
           <a:solidFill>
@@ -13531,7 +13747,7 @@
         <p:spPr>
           <a:xfrm>
             <a:off x="7799832" y="1801368"/>
-            <a:ext cx="3145536" cy="758952"/>
+            <a:ext cx="3145536" cy="688543"/>
           </a:xfrm>
           <a:prstGeom prst="rect">
             <a:avLst/>
@@ -13571,12 +13787,12 @@
         </p:nvSpPr>
         <p:spPr>
           <a:xfrm>
-            <a:off x="7635240" y="2788920"/>
-            <a:ext cx="3474720" cy="1536192"/>
+            <a:off x="7635240" y="2718511"/>
+            <a:ext cx="3474720" cy="1328623"/>
           </a:xfrm>
           <a:prstGeom prst="roundRect">
             <a:avLst>
-              <a:gd name="adj" fmla="val 7143"/>
+              <a:gd name="adj" fmla="val 8259"/>
             </a:avLst>
           </a:prstGeom>
           <a:solidFill>
@@ -13598,7 +13814,7 @@
         </p:nvSpPr>
         <p:spPr>
           <a:xfrm>
-            <a:off x="7799832" y="2935224"/>
+            <a:off x="7799832" y="2864815"/>
             <a:ext cx="3145536" cy="256032"/>
           </a:xfrm>
           <a:prstGeom prst="rect">
@@ -13637,8 +13853,8 @@
         </p:nvSpPr>
         <p:spPr>
           <a:xfrm>
-            <a:off x="7818120" y="3300984"/>
-            <a:ext cx="3090672" cy="877824"/>
+            <a:off x="7818120" y="3230575"/>
+            <a:ext cx="3090672" cy="670255"/>
           </a:xfrm>
           <a:prstGeom prst="rect">
             <a:avLst/>
@@ -13712,12 +13928,12 @@
         </p:nvSpPr>
         <p:spPr>
           <a:xfrm>
-            <a:off x="7635240" y="4498848"/>
-            <a:ext cx="3474720" cy="1143000"/>
+            <a:off x="7635240" y="4184294"/>
+            <a:ext cx="3474720" cy="1466698"/>
           </a:xfrm>
           <a:prstGeom prst="roundRect">
             <a:avLst>
-              <a:gd name="adj" fmla="val 9600"/>
+              <a:gd name="adj" fmla="val 7481"/>
             </a:avLst>
           </a:prstGeom>
           <a:solidFill>
@@ -13739,7 +13955,7 @@
         </p:nvSpPr>
         <p:spPr>
           <a:xfrm>
-            <a:off x="7799832" y="4645152"/>
+            <a:off x="7799832" y="4330598"/>
             <a:ext cx="3145536" cy="256032"/>
           </a:xfrm>
           <a:prstGeom prst="rect">
@@ -13778,8 +13994,8 @@
         </p:nvSpPr>
         <p:spPr>
           <a:xfrm>
-            <a:off x="7799832" y="4974336"/>
-            <a:ext cx="3145536" cy="576072"/>
+            <a:off x="7799832" y="4659782"/>
+            <a:ext cx="3145536" cy="899770"/>
           </a:xfrm>
           <a:prstGeom prst="rect">
             <a:avLst/>
@@ -13805,7 +14021,7 @@
                 <a:ea typeface="Aptos" pitchFamily="34" charset="-122"/>
                 <a:cs typeface="Aptos" pitchFamily="34" charset="-120"/>
               </a:rPr>
-              <a:t>Use the assignment to test whether you can explain the concept, apply it to a realistic public health situation, and.</a:t>
+              <a:t>Use the assignment to test whether you can explain the concept, apply it to a realistic public health situation, and identify what would need review before the work moves forward.</a:t>
             </a:r>
             <a:endParaRPr lang="en-US" sz="1320" dirty="0"/>
           </a:p>
@@ -14140,11 +14356,11 @@
         <p:spPr>
           <a:xfrm>
             <a:off x="7635240" y="1325880"/>
-            <a:ext cx="3474720" cy="1325880"/>
+            <a:ext cx="3474720" cy="1255471"/>
           </a:xfrm>
           <a:prstGeom prst="roundRect">
             <a:avLst>
-              <a:gd name="adj" fmla="val 8276"/>
+              <a:gd name="adj" fmla="val 8740"/>
             </a:avLst>
           </a:prstGeom>
           <a:solidFill>
@@ -14206,7 +14422,7 @@
         <p:spPr>
           <a:xfrm>
             <a:off x="7799832" y="1801368"/>
-            <a:ext cx="3145536" cy="758952"/>
+            <a:ext cx="3145536" cy="688543"/>
           </a:xfrm>
           <a:prstGeom prst="rect">
             <a:avLst/>
@@ -14246,12 +14462,12 @@
         </p:nvSpPr>
         <p:spPr>
           <a:xfrm>
-            <a:off x="7635240" y="2788920"/>
-            <a:ext cx="3474720" cy="1536192"/>
+            <a:off x="7635240" y="2718511"/>
+            <a:ext cx="3474720" cy="1328623"/>
           </a:xfrm>
           <a:prstGeom prst="roundRect">
             <a:avLst>
-              <a:gd name="adj" fmla="val 7143"/>
+              <a:gd name="adj" fmla="val 8259"/>
             </a:avLst>
           </a:prstGeom>
           <a:solidFill>
@@ -14273,7 +14489,7 @@
         </p:nvSpPr>
         <p:spPr>
           <a:xfrm>
-            <a:off x="7799832" y="2935224"/>
+            <a:off x="7799832" y="2864815"/>
             <a:ext cx="3145536" cy="256032"/>
           </a:xfrm>
           <a:prstGeom prst="rect">
@@ -14312,8 +14528,8 @@
         </p:nvSpPr>
         <p:spPr>
           <a:xfrm>
-            <a:off x="7818120" y="3300984"/>
-            <a:ext cx="3090672" cy="877824"/>
+            <a:off x="7818120" y="3230575"/>
+            <a:ext cx="3090672" cy="670255"/>
           </a:xfrm>
           <a:prstGeom prst="rect">
             <a:avLst/>
@@ -14353,12 +14569,12 @@
         </p:nvSpPr>
         <p:spPr>
           <a:xfrm>
-            <a:off x="7635240" y="4498848"/>
-            <a:ext cx="3474720" cy="1143000"/>
+            <a:off x="7635240" y="4184294"/>
+            <a:ext cx="3474720" cy="1466698"/>
           </a:xfrm>
           <a:prstGeom prst="roundRect">
             <a:avLst>
-              <a:gd name="adj" fmla="val 9600"/>
+              <a:gd name="adj" fmla="val 7481"/>
             </a:avLst>
           </a:prstGeom>
           <a:solidFill>
@@ -14380,7 +14596,7 @@
         </p:nvSpPr>
         <p:spPr>
           <a:xfrm>
-            <a:off x="7799832" y="4645152"/>
+            <a:off x="7799832" y="4330598"/>
             <a:ext cx="3145536" cy="256032"/>
           </a:xfrm>
           <a:prstGeom prst="rect">
@@ -14419,8 +14635,8 @@
         </p:nvSpPr>
         <p:spPr>
           <a:xfrm>
-            <a:off x="7799832" y="4974336"/>
-            <a:ext cx="3145536" cy="576072"/>
+            <a:off x="7799832" y="4659782"/>
+            <a:ext cx="3145536" cy="899770"/>
           </a:xfrm>
           <a:prstGeom prst="rect">
             <a:avLst/>
@@ -14446,7 +14662,7 @@
                 <a:ea typeface="Aptos" pitchFamily="34" charset="-122"/>
                 <a:cs typeface="Aptos" pitchFamily="34" charset="-120"/>
               </a:rPr>
-              <a:t>Use the assignment to test whether you can explain the concept, apply it to a realistic public health situation, and.</a:t>
+              <a:t>Use the assignment to test whether you can explain the concept, apply it to a realistic public health situation, and identify what would need review before the work moves forward.</a:t>
             </a:r>
             <a:endParaRPr lang="en-US" sz="1320" dirty="0"/>
           </a:p>
@@ -14815,11 +15031,11 @@
         <p:spPr>
           <a:xfrm>
             <a:off x="7635240" y="1325880"/>
-            <a:ext cx="3474720" cy="1325880"/>
+            <a:ext cx="3474720" cy="1207008"/>
           </a:xfrm>
           <a:prstGeom prst="roundRect">
             <a:avLst>
-              <a:gd name="adj" fmla="val 8276"/>
+              <a:gd name="adj" fmla="val 9091"/>
             </a:avLst>
           </a:prstGeom>
           <a:solidFill>
@@ -14881,7 +15097,7 @@
         <p:spPr>
           <a:xfrm>
             <a:off x="7799832" y="1801368"/>
-            <a:ext cx="3145536" cy="758952"/>
+            <a:ext cx="3145536" cy="640080"/>
           </a:xfrm>
           <a:prstGeom prst="rect">
             <a:avLst/>
@@ -14921,12 +15137,12 @@
         </p:nvSpPr>
         <p:spPr>
           <a:xfrm>
-            <a:off x="7635240" y="2788920"/>
-            <a:ext cx="3474720" cy="1536192"/>
+            <a:off x="7635240" y="2670048"/>
+            <a:ext cx="3474720" cy="1377086"/>
           </a:xfrm>
           <a:prstGeom prst="roundRect">
             <a:avLst>
-              <a:gd name="adj" fmla="val 7143"/>
+              <a:gd name="adj" fmla="val 7968"/>
             </a:avLst>
           </a:prstGeom>
           <a:solidFill>
@@ -14948,8 +15164,8 @@
         </p:nvSpPr>
         <p:spPr>
           <a:xfrm>
-            <a:off x="7799832" y="2935224"/>
-            <a:ext cx="3145536" cy="256032"/>
+            <a:off x="7799832" y="2798064"/>
+            <a:ext cx="3145536" cy="237744"/>
           </a:xfrm>
           <a:prstGeom prst="rect">
             <a:avLst/>
@@ -14965,7 +15181,7 @@
               <a:buNone/>
             </a:pPr>
             <a:r>
-              <a:rPr lang="en-US" sz="1300" b="1" dirty="0">
+              <a:rPr lang="en-US" sz="1250" b="1" dirty="0">
                 <a:solidFill>
                   <a:srgbClr val="0068B7"/>
                 </a:solidFill>
@@ -14973,84 +15189,317 @@
                 <a:ea typeface="Aptos" pitchFamily="34" charset="-122"/>
                 <a:cs typeface="Aptos" pitchFamily="34" charset="-120"/>
               </a:rPr>
-              <a:t>Concept checkpoints</a:t>
-            </a:r>
-            <a:endParaRPr lang="en-US" sz="1300" dirty="0"/>
-          </a:p>
-        </p:txBody>
-      </p:sp>
-      <p:sp>
-        <p:nvSpPr>
-          <p:cNvPr id="15" name="Text 13"/>
-          <p:cNvSpPr/>
-          <p:nvPr/>
-        </p:nvSpPr>
-        <p:spPr>
-          <a:xfrm>
-            <a:off x="7818120" y="3300984"/>
-            <a:ext cx="3090672" cy="877824"/>
-          </a:xfrm>
-          <a:prstGeom prst="rect">
-            <a:avLst/>
-          </a:prstGeom>
-          <a:noFill/>
-          <a:ln/>
-        </p:spPr>
-        <p:txBody>
-          <a:bodyPr wrap="square" lIns="508" tIns="508" rIns="508" bIns="508" rtlCol="0" anchor="t">
+              <a:t>Implementation path</a:t>
+            </a:r>
+            <a:endParaRPr lang="en-US" sz="1250" dirty="0"/>
+          </a:p>
+        </p:txBody>
+      </p:sp>
+      <p:sp>
+        <p:nvSpPr>
+          <p:cNvPr id="15" name="Shape 13"/>
+          <p:cNvSpPr/>
+          <p:nvPr/>
+        </p:nvSpPr>
+        <p:spPr>
+          <a:xfrm>
+            <a:off x="8763000" y="3351276"/>
+            <a:ext cx="164592" cy="0"/>
+          </a:xfrm>
+          <a:prstGeom prst="line">
+            <a:avLst/>
+          </a:prstGeom>
+          <a:noFill/>
+          <a:ln w="15240">
+            <a:solidFill>
+              <a:srgbClr val="8ABBD8"/>
+            </a:solidFill>
+            <a:prstDash val="solid"/>
+          </a:ln>
+        </p:spPr>
+      </p:sp>
+      <p:sp>
+        <p:nvSpPr>
+          <p:cNvPr id="16" name="Shape 14"/>
+          <p:cNvSpPr/>
+          <p:nvPr/>
+        </p:nvSpPr>
+        <p:spPr>
+          <a:xfrm>
+            <a:off x="7872984" y="3200400"/>
+            <a:ext cx="890016" cy="301752"/>
+          </a:xfrm>
+          <a:prstGeom prst="roundRect">
+            <a:avLst>
+              <a:gd name="adj" fmla="val 24242"/>
+            </a:avLst>
+          </a:prstGeom>
+          <a:solidFill>
+            <a:srgbClr val="0068B7"/>
+          </a:solidFill>
+          <a:ln w="12700">
+            <a:solidFill>
+              <a:srgbClr val="0068B7"/>
+            </a:solidFill>
+            <a:prstDash val="solid"/>
+          </a:ln>
+        </p:spPr>
+      </p:sp>
+      <p:sp>
+        <p:nvSpPr>
+          <p:cNvPr id="17" name="Text 15"/>
+          <p:cNvSpPr/>
+          <p:nvPr/>
+        </p:nvSpPr>
+        <p:spPr>
+          <a:xfrm>
+            <a:off x="7909560" y="3273552"/>
+            <a:ext cx="816864" cy="146304"/>
+          </a:xfrm>
+          <a:prstGeom prst="rect">
+            <a:avLst/>
+          </a:prstGeom>
+          <a:noFill/>
+          <a:ln/>
+        </p:spPr>
+        <p:txBody>
+          <a:bodyPr wrap="square" lIns="0" tIns="0" rIns="0" bIns="0" rtlCol="0" anchor="ctr">
             <a:normAutofit/>
           </a:bodyPr>
           <a:lstStyle/>
           <a:p>
-            <a:pPr indent="0" marL="0">
-              <a:buNone/>
-            </a:pPr>
-            <a:r>
-              <a:rPr lang="en-US" sz="1220" dirty="0">
-                <a:solidFill>
-                  <a:srgbClr val="17364A"/>
-                </a:solidFill>
-                <a:latin typeface="Aptos" pitchFamily="34" charset="0"/>
-                <a:ea typeface="Aptos" pitchFamily="34" charset="-122"/>
-                <a:cs typeface="Aptos" pitchFamily="34" charset="-120"/>
-              </a:rPr>
-              <a:t>Human factors and usability testing help agencies understand how.</a:t>
-            </a:r>
-            <a:endParaRPr lang="en-US" sz="1220" dirty="0"/>
-          </a:p>
-          <a:p>
-            <a:pPr indent="0" marL="0">
-              <a:buNone/>
-            </a:pPr>
-            <a:r>
-              <a:rPr lang="en-US" sz="1220" dirty="0">
-                <a:solidFill>
-                  <a:srgbClr val="17364A"/>
-                </a:solidFill>
-                <a:latin typeface="Aptos" pitchFamily="34" charset="0"/>
-                <a:ea typeface="Aptos" pitchFamily="34" charset="-122"/>
-                <a:cs typeface="Aptos" pitchFamily="34" charset="-120"/>
-              </a:rPr>
-              <a:t>This module teaches learners to evaluate workflow fit, interface.</a:t>
-            </a:r>
-            <a:endParaRPr lang="en-US" sz="1220" dirty="0"/>
-          </a:p>
-        </p:txBody>
-      </p:sp>
-      <p:sp>
-        <p:nvSpPr>
-          <p:cNvPr id="16" name="Shape 14"/>
-          <p:cNvSpPr/>
-          <p:nvPr/>
-        </p:nvSpPr>
-        <p:spPr>
-          <a:xfrm>
-            <a:off x="7635240" y="4498848"/>
-            <a:ext cx="3474720" cy="1143000"/>
+            <a:pPr algn="ctr" indent="0" marL="0">
+              <a:buNone/>
+            </a:pPr>
+            <a:r>
+              <a:rPr lang="en-US" sz="880" b="1" dirty="0">
+                <a:solidFill>
+                  <a:srgbClr val="FFFFFF"/>
+                </a:solidFill>
+                <a:latin typeface="Aptos" pitchFamily="34" charset="0"/>
+                <a:ea typeface="Aptos" pitchFamily="34" charset="-122"/>
+                <a:cs typeface="Aptos" pitchFamily="34" charset="-120"/>
+              </a:rPr>
+              <a:t>Need</a:t>
+            </a:r>
+            <a:endParaRPr lang="en-US" sz="880" dirty="0"/>
+          </a:p>
+        </p:txBody>
+      </p:sp>
+      <p:sp>
+        <p:nvSpPr>
+          <p:cNvPr id="18" name="Shape 16"/>
+          <p:cNvSpPr/>
+          <p:nvPr/>
+        </p:nvSpPr>
+        <p:spPr>
+          <a:xfrm>
+            <a:off x="9817608" y="3351276"/>
+            <a:ext cx="164592" cy="0"/>
+          </a:xfrm>
+          <a:prstGeom prst="line">
+            <a:avLst/>
+          </a:prstGeom>
+          <a:noFill/>
+          <a:ln w="15240">
+            <a:solidFill>
+              <a:srgbClr val="8ABBD8"/>
+            </a:solidFill>
+            <a:prstDash val="solid"/>
+          </a:ln>
+        </p:spPr>
+      </p:sp>
+      <p:sp>
+        <p:nvSpPr>
+          <p:cNvPr id="19" name="Shape 17"/>
+          <p:cNvSpPr/>
+          <p:nvPr/>
+        </p:nvSpPr>
+        <p:spPr>
+          <a:xfrm>
+            <a:off x="8927592" y="3200400"/>
+            <a:ext cx="890016" cy="301752"/>
           </a:xfrm>
           <a:prstGeom prst="roundRect">
             <a:avLst>
-              <a:gd name="adj" fmla="val 9600"/>
+              <a:gd name="adj" fmla="val 24242"/>
+            </a:avLst>
+          </a:prstGeom>
+          <a:solidFill>
+            <a:srgbClr val="2F8A28"/>
+          </a:solidFill>
+          <a:ln w="12700">
+            <a:solidFill>
+              <a:srgbClr val="2F8A28"/>
+            </a:solidFill>
+            <a:prstDash val="solid"/>
+          </a:ln>
+        </p:spPr>
+      </p:sp>
+      <p:sp>
+        <p:nvSpPr>
+          <p:cNvPr id="20" name="Text 18"/>
+          <p:cNvSpPr/>
+          <p:nvPr/>
+        </p:nvSpPr>
+        <p:spPr>
+          <a:xfrm>
+            <a:off x="8964168" y="3273552"/>
+            <a:ext cx="816864" cy="146304"/>
+          </a:xfrm>
+          <a:prstGeom prst="rect">
+            <a:avLst/>
+          </a:prstGeom>
+          <a:noFill/>
+          <a:ln/>
+        </p:spPr>
+        <p:txBody>
+          <a:bodyPr wrap="square" lIns="0" tIns="0" rIns="0" bIns="0" rtlCol="0" anchor="ctr">
+            <a:normAutofit/>
+          </a:bodyPr>
+          <a:lstStyle/>
+          <a:p>
+            <a:pPr algn="ctr" indent="0" marL="0">
+              <a:buNone/>
+            </a:pPr>
+            <a:r>
+              <a:rPr lang="en-US" sz="880" b="1" dirty="0">
+                <a:solidFill>
+                  <a:srgbClr val="FFFFFF"/>
+                </a:solidFill>
+                <a:latin typeface="Aptos" pitchFamily="34" charset="0"/>
+                <a:ea typeface="Aptos" pitchFamily="34" charset="-122"/>
+                <a:cs typeface="Aptos" pitchFamily="34" charset="-120"/>
+              </a:rPr>
+              <a:t>Build</a:t>
+            </a:r>
+            <a:endParaRPr lang="en-US" sz="880" dirty="0"/>
+          </a:p>
+        </p:txBody>
+      </p:sp>
+      <p:sp>
+        <p:nvSpPr>
+          <p:cNvPr id="21" name="Shape 19"/>
+          <p:cNvSpPr/>
+          <p:nvPr/>
+        </p:nvSpPr>
+        <p:spPr>
+          <a:xfrm>
+            <a:off x="9982200" y="3200400"/>
+            <a:ext cx="890016" cy="301752"/>
+          </a:xfrm>
+          <a:prstGeom prst="roundRect">
+            <a:avLst>
+              <a:gd name="adj" fmla="val 24242"/>
+            </a:avLst>
+          </a:prstGeom>
+          <a:solidFill>
+            <a:srgbClr val="6A4CA3"/>
+          </a:solidFill>
+          <a:ln w="12700">
+            <a:solidFill>
+              <a:srgbClr val="6A4CA3"/>
+            </a:solidFill>
+            <a:prstDash val="solid"/>
+          </a:ln>
+        </p:spPr>
+      </p:sp>
+      <p:sp>
+        <p:nvSpPr>
+          <p:cNvPr id="22" name="Text 20"/>
+          <p:cNvSpPr/>
+          <p:nvPr/>
+        </p:nvSpPr>
+        <p:spPr>
+          <a:xfrm>
+            <a:off x="10018776" y="3273552"/>
+            <a:ext cx="816864" cy="146304"/>
+          </a:xfrm>
+          <a:prstGeom prst="rect">
+            <a:avLst/>
+          </a:prstGeom>
+          <a:noFill/>
+          <a:ln/>
+        </p:spPr>
+        <p:txBody>
+          <a:bodyPr wrap="square" lIns="0" tIns="0" rIns="0" bIns="0" rtlCol="0" anchor="ctr">
+            <a:normAutofit/>
+          </a:bodyPr>
+          <a:lstStyle/>
+          <a:p>
+            <a:pPr algn="ctr" indent="0" marL="0">
+              <a:buNone/>
+            </a:pPr>
+            <a:r>
+              <a:rPr lang="en-US" sz="880" b="1" dirty="0">
+                <a:solidFill>
+                  <a:srgbClr val="FFFFFF"/>
+                </a:solidFill>
+                <a:latin typeface="Aptos" pitchFamily="34" charset="0"/>
+                <a:ea typeface="Aptos" pitchFamily="34" charset="-122"/>
+                <a:cs typeface="Aptos" pitchFamily="34" charset="-120"/>
+              </a:rPr>
+              <a:t>Adopt</a:t>
+            </a:r>
+            <a:endParaRPr lang="en-US" sz="880" dirty="0"/>
+          </a:p>
+        </p:txBody>
+      </p:sp>
+      <p:sp>
+        <p:nvSpPr>
+          <p:cNvPr id="23" name="Text 21"/>
+          <p:cNvSpPr/>
+          <p:nvPr/>
+        </p:nvSpPr>
+        <p:spPr>
+          <a:xfrm>
+            <a:off x="7854696" y="3694176"/>
+            <a:ext cx="3035808" cy="206654"/>
+          </a:xfrm>
+          <a:prstGeom prst="rect">
+            <a:avLst/>
+          </a:prstGeom>
+          <a:noFill/>
+          <a:ln/>
+        </p:spPr>
+        <p:txBody>
+          <a:bodyPr wrap="square" lIns="254" tIns="254" rIns="254" bIns="254" rtlCol="0" anchor="t">
+            <a:normAutofit/>
+          </a:bodyPr>
+          <a:lstStyle/>
+          <a:p>
+            <a:pPr indent="0" marL="0">
+              <a:buNone/>
+            </a:pPr>
+            <a:r>
+              <a:rPr lang="en-US" sz="1120" dirty="0">
+                <a:solidFill>
+                  <a:srgbClr val="17364A"/>
+                </a:solidFill>
+                <a:latin typeface="Aptos" pitchFamily="34" charset="0"/>
+                <a:ea typeface="Aptos" pitchFamily="34" charset="-122"/>
+                <a:cs typeface="Aptos" pitchFamily="34" charset="-120"/>
+              </a:rPr>
+              <a:t>Implementation work should make dependencies, approvals, training, and sustainment visible before launch.</a:t>
+            </a:r>
+            <a:endParaRPr lang="en-US" sz="1120" dirty="0"/>
+          </a:p>
+        </p:txBody>
+      </p:sp>
+      <p:sp>
+        <p:nvSpPr>
+          <p:cNvPr id="24" name="Shape 22"/>
+          <p:cNvSpPr/>
+          <p:nvPr/>
+        </p:nvSpPr>
+        <p:spPr>
+          <a:xfrm>
+            <a:off x="7635240" y="4184294"/>
+            <a:ext cx="3474720" cy="1466698"/>
+          </a:xfrm>
+          <a:prstGeom prst="roundRect">
+            <a:avLst>
+              <a:gd name="adj" fmla="val 7481"/>
             </a:avLst>
           </a:prstGeom>
           <a:solidFill>
@@ -15066,13 +15515,13 @@
       </p:sp>
       <p:sp>
         <p:nvSpPr>
-          <p:cNvPr id="17" name="Text 15"/>
-          <p:cNvSpPr/>
-          <p:nvPr/>
-        </p:nvSpPr>
-        <p:spPr>
-          <a:xfrm>
-            <a:off x="7799832" y="4645152"/>
+          <p:cNvPr id="25" name="Text 23"/>
+          <p:cNvSpPr/>
+          <p:nvPr/>
+        </p:nvSpPr>
+        <p:spPr>
+          <a:xfrm>
+            <a:off x="7799832" y="4330598"/>
             <a:ext cx="3145536" cy="256032"/>
           </a:xfrm>
           <a:prstGeom prst="rect">
@@ -15105,14 +15554,14 @@
       </p:sp>
       <p:sp>
         <p:nvSpPr>
-          <p:cNvPr id="18" name="Text 16"/>
-          <p:cNvSpPr/>
-          <p:nvPr/>
-        </p:nvSpPr>
-        <p:spPr>
-          <a:xfrm>
-            <a:off x="7799832" y="4974336"/>
-            <a:ext cx="3145536" cy="576072"/>
+          <p:cNvPr id="26" name="Text 24"/>
+          <p:cNvSpPr/>
+          <p:nvPr/>
+        </p:nvSpPr>
+        <p:spPr>
+          <a:xfrm>
+            <a:off x="7799832" y="4659782"/>
+            <a:ext cx="3145536" cy="899770"/>
           </a:xfrm>
           <a:prstGeom prst="rect">
             <a:avLst/>
@@ -15138,7 +15587,7 @@
                 <a:ea typeface="Aptos" pitchFamily="34" charset="-122"/>
                 <a:cs typeface="Aptos" pitchFamily="34" charset="-120"/>
               </a:rPr>
-              <a:t>Use the concept to clarify workflow changes, dependencies, staffing, procurement requirements, training needs, and.</a:t>
+              <a:t>Use the concept to clarify workflow changes, dependencies, staffing, procurement requirements, training needs, and implementation checkpoints.</a:t>
             </a:r>
             <a:endParaRPr lang="en-US" sz="1320" dirty="0"/>
           </a:p>
@@ -15507,11 +15956,11 @@
         <p:spPr>
           <a:xfrm>
             <a:off x="7635240" y="1325880"/>
-            <a:ext cx="3474720" cy="1325880"/>
+            <a:ext cx="3474720" cy="1255471"/>
           </a:xfrm>
           <a:prstGeom prst="roundRect">
             <a:avLst>
-              <a:gd name="adj" fmla="val 8276"/>
+              <a:gd name="adj" fmla="val 8740"/>
             </a:avLst>
           </a:prstGeom>
           <a:solidFill>
@@ -15573,7 +16022,7 @@
         <p:spPr>
           <a:xfrm>
             <a:off x="7799832" y="1801368"/>
-            <a:ext cx="3145536" cy="758952"/>
+            <a:ext cx="3145536" cy="688543"/>
           </a:xfrm>
           <a:prstGeom prst="rect">
             <a:avLst/>
@@ -15613,12 +16062,12 @@
         </p:nvSpPr>
         <p:spPr>
           <a:xfrm>
-            <a:off x="7635240" y="2788920"/>
-            <a:ext cx="3474720" cy="1536192"/>
+            <a:off x="7635240" y="2718511"/>
+            <a:ext cx="3474720" cy="1328623"/>
           </a:xfrm>
           <a:prstGeom prst="roundRect">
             <a:avLst>
-              <a:gd name="adj" fmla="val 7143"/>
+              <a:gd name="adj" fmla="val 8259"/>
             </a:avLst>
           </a:prstGeom>
           <a:solidFill>
@@ -15640,8 +16089,8 @@
         </p:nvSpPr>
         <p:spPr>
           <a:xfrm>
-            <a:off x="7799832" y="2935224"/>
-            <a:ext cx="3145536" cy="256032"/>
+            <a:off x="7799832" y="2846527"/>
+            <a:ext cx="3145536" cy="237744"/>
           </a:xfrm>
           <a:prstGeom prst="rect">
             <a:avLst/>
@@ -15657,7 +16106,7 @@
               <a:buNone/>
             </a:pPr>
             <a:r>
-              <a:rPr lang="en-US" sz="1300" b="1" dirty="0">
+              <a:rPr lang="en-US" sz="1250" b="1" dirty="0">
                 <a:solidFill>
                   <a:srgbClr val="0068B7"/>
                 </a:solidFill>
@@ -15665,101 +16114,317 @@
                 <a:ea typeface="Aptos" pitchFamily="34" charset="-122"/>
                 <a:cs typeface="Aptos" pitchFamily="34" charset="-120"/>
               </a:rPr>
-              <a:t>Concept checkpoints</a:t>
-            </a:r>
-            <a:endParaRPr lang="en-US" sz="1300" dirty="0"/>
-          </a:p>
-        </p:txBody>
-      </p:sp>
-      <p:sp>
-        <p:nvSpPr>
-          <p:cNvPr id="15" name="Text 13"/>
-          <p:cNvSpPr/>
-          <p:nvPr/>
-        </p:nvSpPr>
-        <p:spPr>
-          <a:xfrm>
-            <a:off x="7818120" y="3300984"/>
-            <a:ext cx="3090672" cy="877824"/>
-          </a:xfrm>
-          <a:prstGeom prst="rect">
-            <a:avLst/>
-          </a:prstGeom>
-          <a:noFill/>
-          <a:ln/>
-        </p:spPr>
-        <p:txBody>
-          <a:bodyPr wrap="square" lIns="508" tIns="508" rIns="508" bIns="508" rtlCol="0" anchor="t">
+              <a:t>Implementation path</a:t>
+            </a:r>
+            <a:endParaRPr lang="en-US" sz="1250" dirty="0"/>
+          </a:p>
+        </p:txBody>
+      </p:sp>
+      <p:sp>
+        <p:nvSpPr>
+          <p:cNvPr id="15" name="Shape 13"/>
+          <p:cNvSpPr/>
+          <p:nvPr/>
+        </p:nvSpPr>
+        <p:spPr>
+          <a:xfrm>
+            <a:off x="8763000" y="3399739"/>
+            <a:ext cx="164592" cy="0"/>
+          </a:xfrm>
+          <a:prstGeom prst="line">
+            <a:avLst/>
+          </a:prstGeom>
+          <a:noFill/>
+          <a:ln w="15240">
+            <a:solidFill>
+              <a:srgbClr val="8ABBD8"/>
+            </a:solidFill>
+            <a:prstDash val="solid"/>
+          </a:ln>
+        </p:spPr>
+      </p:sp>
+      <p:sp>
+        <p:nvSpPr>
+          <p:cNvPr id="16" name="Shape 14"/>
+          <p:cNvSpPr/>
+          <p:nvPr/>
+        </p:nvSpPr>
+        <p:spPr>
+          <a:xfrm>
+            <a:off x="7872984" y="3248863"/>
+            <a:ext cx="890016" cy="301752"/>
+          </a:xfrm>
+          <a:prstGeom prst="roundRect">
+            <a:avLst>
+              <a:gd name="adj" fmla="val 24242"/>
+            </a:avLst>
+          </a:prstGeom>
+          <a:solidFill>
+            <a:srgbClr val="0068B7"/>
+          </a:solidFill>
+          <a:ln w="12700">
+            <a:solidFill>
+              <a:srgbClr val="0068B7"/>
+            </a:solidFill>
+            <a:prstDash val="solid"/>
+          </a:ln>
+        </p:spPr>
+      </p:sp>
+      <p:sp>
+        <p:nvSpPr>
+          <p:cNvPr id="17" name="Text 15"/>
+          <p:cNvSpPr/>
+          <p:nvPr/>
+        </p:nvSpPr>
+        <p:spPr>
+          <a:xfrm>
+            <a:off x="7909560" y="3322015"/>
+            <a:ext cx="816864" cy="146304"/>
+          </a:xfrm>
+          <a:prstGeom prst="rect">
+            <a:avLst/>
+          </a:prstGeom>
+          <a:noFill/>
+          <a:ln/>
+        </p:spPr>
+        <p:txBody>
+          <a:bodyPr wrap="square" lIns="0" tIns="0" rIns="0" bIns="0" rtlCol="0" anchor="ctr">
             <a:normAutofit/>
           </a:bodyPr>
           <a:lstStyle/>
           <a:p>
-            <a:pPr indent="0" marL="0">
-              <a:buNone/>
-            </a:pPr>
-            <a:r>
-              <a:rPr lang="en-US" sz="1220" dirty="0">
-                <a:solidFill>
-                  <a:srgbClr val="17364A"/>
-                </a:solidFill>
-                <a:latin typeface="Aptos" pitchFamily="34" charset="0"/>
-                <a:ea typeface="Aptos" pitchFamily="34" charset="-122"/>
-                <a:cs typeface="Aptos" pitchFamily="34" charset="-120"/>
-              </a:rPr>
-              <a:t>Human Factors, Workflow Integration, and Usability Testing matters.</a:t>
-            </a:r>
-            <a:endParaRPr lang="en-US" sz="1220" dirty="0"/>
-          </a:p>
-          <a:p>
-            <a:pPr indent="0" marL="0">
-              <a:buNone/>
-            </a:pPr>
-            <a:r>
-              <a:rPr lang="en-US" sz="1220" dirty="0">
-                <a:solidFill>
-                  <a:srgbClr val="17364A"/>
-                </a:solidFill>
-                <a:latin typeface="Aptos" pitchFamily="34" charset="0"/>
-                <a:ea typeface="Aptos" pitchFamily="34" charset="-122"/>
-                <a:cs typeface="Aptos" pitchFamily="34" charset="-120"/>
-              </a:rPr>
-              <a:t>The topic also affects accountability.</a:t>
-            </a:r>
-            <a:endParaRPr lang="en-US" sz="1220" dirty="0"/>
-          </a:p>
-          <a:p>
-            <a:pPr indent="0" marL="0">
-              <a:buNone/>
-            </a:pPr>
-            <a:r>
-              <a:rPr lang="en-US" sz="1220" dirty="0">
-                <a:solidFill>
-                  <a:srgbClr val="17364A"/>
-                </a:solidFill>
-                <a:latin typeface="Aptos" pitchFamily="34" charset="0"/>
-                <a:ea typeface="Aptos" pitchFamily="34" charset="-122"/>
-                <a:cs typeface="Aptos" pitchFamily="34" charset="-120"/>
-              </a:rPr>
-              <a:t>Public health agencies must be able to explain how data are used,.</a:t>
-            </a:r>
-            <a:endParaRPr lang="en-US" sz="1220" dirty="0"/>
-          </a:p>
-        </p:txBody>
-      </p:sp>
-      <p:sp>
-        <p:nvSpPr>
-          <p:cNvPr id="16" name="Shape 14"/>
-          <p:cNvSpPr/>
-          <p:nvPr/>
-        </p:nvSpPr>
-        <p:spPr>
-          <a:xfrm>
-            <a:off x="7635240" y="4498848"/>
-            <a:ext cx="3474720" cy="1143000"/>
+            <a:pPr algn="ctr" indent="0" marL="0">
+              <a:buNone/>
+            </a:pPr>
+            <a:r>
+              <a:rPr lang="en-US" sz="880" b="1" dirty="0">
+                <a:solidFill>
+                  <a:srgbClr val="FFFFFF"/>
+                </a:solidFill>
+                <a:latin typeface="Aptos" pitchFamily="34" charset="0"/>
+                <a:ea typeface="Aptos" pitchFamily="34" charset="-122"/>
+                <a:cs typeface="Aptos" pitchFamily="34" charset="-120"/>
+              </a:rPr>
+              <a:t>Need</a:t>
+            </a:r>
+            <a:endParaRPr lang="en-US" sz="880" dirty="0"/>
+          </a:p>
+        </p:txBody>
+      </p:sp>
+      <p:sp>
+        <p:nvSpPr>
+          <p:cNvPr id="18" name="Shape 16"/>
+          <p:cNvSpPr/>
+          <p:nvPr/>
+        </p:nvSpPr>
+        <p:spPr>
+          <a:xfrm>
+            <a:off x="9817608" y="3399739"/>
+            <a:ext cx="164592" cy="0"/>
+          </a:xfrm>
+          <a:prstGeom prst="line">
+            <a:avLst/>
+          </a:prstGeom>
+          <a:noFill/>
+          <a:ln w="15240">
+            <a:solidFill>
+              <a:srgbClr val="8ABBD8"/>
+            </a:solidFill>
+            <a:prstDash val="solid"/>
+          </a:ln>
+        </p:spPr>
+      </p:sp>
+      <p:sp>
+        <p:nvSpPr>
+          <p:cNvPr id="19" name="Shape 17"/>
+          <p:cNvSpPr/>
+          <p:nvPr/>
+        </p:nvSpPr>
+        <p:spPr>
+          <a:xfrm>
+            <a:off x="8927592" y="3248863"/>
+            <a:ext cx="890016" cy="301752"/>
           </a:xfrm>
           <a:prstGeom prst="roundRect">
             <a:avLst>
-              <a:gd name="adj" fmla="val 9600"/>
+              <a:gd name="adj" fmla="val 24242"/>
+            </a:avLst>
+          </a:prstGeom>
+          <a:solidFill>
+            <a:srgbClr val="2F8A28"/>
+          </a:solidFill>
+          <a:ln w="12700">
+            <a:solidFill>
+              <a:srgbClr val="2F8A28"/>
+            </a:solidFill>
+            <a:prstDash val="solid"/>
+          </a:ln>
+        </p:spPr>
+      </p:sp>
+      <p:sp>
+        <p:nvSpPr>
+          <p:cNvPr id="20" name="Text 18"/>
+          <p:cNvSpPr/>
+          <p:nvPr/>
+        </p:nvSpPr>
+        <p:spPr>
+          <a:xfrm>
+            <a:off x="8964168" y="3322015"/>
+            <a:ext cx="816864" cy="146304"/>
+          </a:xfrm>
+          <a:prstGeom prst="rect">
+            <a:avLst/>
+          </a:prstGeom>
+          <a:noFill/>
+          <a:ln/>
+        </p:spPr>
+        <p:txBody>
+          <a:bodyPr wrap="square" lIns="0" tIns="0" rIns="0" bIns="0" rtlCol="0" anchor="ctr">
+            <a:normAutofit/>
+          </a:bodyPr>
+          <a:lstStyle/>
+          <a:p>
+            <a:pPr algn="ctr" indent="0" marL="0">
+              <a:buNone/>
+            </a:pPr>
+            <a:r>
+              <a:rPr lang="en-US" sz="880" b="1" dirty="0">
+                <a:solidFill>
+                  <a:srgbClr val="FFFFFF"/>
+                </a:solidFill>
+                <a:latin typeface="Aptos" pitchFamily="34" charset="0"/>
+                <a:ea typeface="Aptos" pitchFamily="34" charset="-122"/>
+                <a:cs typeface="Aptos" pitchFamily="34" charset="-120"/>
+              </a:rPr>
+              <a:t>Build</a:t>
+            </a:r>
+            <a:endParaRPr lang="en-US" sz="880" dirty="0"/>
+          </a:p>
+        </p:txBody>
+      </p:sp>
+      <p:sp>
+        <p:nvSpPr>
+          <p:cNvPr id="21" name="Shape 19"/>
+          <p:cNvSpPr/>
+          <p:nvPr/>
+        </p:nvSpPr>
+        <p:spPr>
+          <a:xfrm>
+            <a:off x="9982200" y="3248863"/>
+            <a:ext cx="890016" cy="301752"/>
+          </a:xfrm>
+          <a:prstGeom prst="roundRect">
+            <a:avLst>
+              <a:gd name="adj" fmla="val 24242"/>
+            </a:avLst>
+          </a:prstGeom>
+          <a:solidFill>
+            <a:srgbClr val="6A4CA3"/>
+          </a:solidFill>
+          <a:ln w="12700">
+            <a:solidFill>
+              <a:srgbClr val="6A4CA3"/>
+            </a:solidFill>
+            <a:prstDash val="solid"/>
+          </a:ln>
+        </p:spPr>
+      </p:sp>
+      <p:sp>
+        <p:nvSpPr>
+          <p:cNvPr id="22" name="Text 20"/>
+          <p:cNvSpPr/>
+          <p:nvPr/>
+        </p:nvSpPr>
+        <p:spPr>
+          <a:xfrm>
+            <a:off x="10018776" y="3322015"/>
+            <a:ext cx="816864" cy="146304"/>
+          </a:xfrm>
+          <a:prstGeom prst="rect">
+            <a:avLst/>
+          </a:prstGeom>
+          <a:noFill/>
+          <a:ln/>
+        </p:spPr>
+        <p:txBody>
+          <a:bodyPr wrap="square" lIns="0" tIns="0" rIns="0" bIns="0" rtlCol="0" anchor="ctr">
+            <a:normAutofit/>
+          </a:bodyPr>
+          <a:lstStyle/>
+          <a:p>
+            <a:pPr algn="ctr" indent="0" marL="0">
+              <a:buNone/>
+            </a:pPr>
+            <a:r>
+              <a:rPr lang="en-US" sz="880" b="1" dirty="0">
+                <a:solidFill>
+                  <a:srgbClr val="FFFFFF"/>
+                </a:solidFill>
+                <a:latin typeface="Aptos" pitchFamily="34" charset="0"/>
+                <a:ea typeface="Aptos" pitchFamily="34" charset="-122"/>
+                <a:cs typeface="Aptos" pitchFamily="34" charset="-120"/>
+              </a:rPr>
+              <a:t>Adopt</a:t>
+            </a:r>
+            <a:endParaRPr lang="en-US" sz="880" dirty="0"/>
+          </a:p>
+        </p:txBody>
+      </p:sp>
+      <p:sp>
+        <p:nvSpPr>
+          <p:cNvPr id="23" name="Text 21"/>
+          <p:cNvSpPr/>
+          <p:nvPr/>
+        </p:nvSpPr>
+        <p:spPr>
+          <a:xfrm>
+            <a:off x="7854696" y="3742639"/>
+            <a:ext cx="3035808" cy="158191"/>
+          </a:xfrm>
+          <a:prstGeom prst="rect">
+            <a:avLst/>
+          </a:prstGeom>
+          <a:noFill/>
+          <a:ln/>
+        </p:spPr>
+        <p:txBody>
+          <a:bodyPr wrap="square" lIns="254" tIns="254" rIns="254" bIns="254" rtlCol="0" anchor="t">
+            <a:normAutofit/>
+          </a:bodyPr>
+          <a:lstStyle/>
+          <a:p>
+            <a:pPr indent="0" marL="0">
+              <a:buNone/>
+            </a:pPr>
+            <a:r>
+              <a:rPr lang="en-US" sz="1120" dirty="0">
+                <a:solidFill>
+                  <a:srgbClr val="17364A"/>
+                </a:solidFill>
+                <a:latin typeface="Aptos" pitchFamily="34" charset="0"/>
+                <a:ea typeface="Aptos" pitchFamily="34" charset="-122"/>
+                <a:cs typeface="Aptos" pitchFamily="34" charset="-120"/>
+              </a:rPr>
+              <a:t>Implementation work should make dependencies, approvals, training, and sustainment visible before launch.</a:t>
+            </a:r>
+            <a:endParaRPr lang="en-US" sz="1120" dirty="0"/>
+          </a:p>
+        </p:txBody>
+      </p:sp>
+      <p:sp>
+        <p:nvSpPr>
+          <p:cNvPr id="24" name="Shape 22"/>
+          <p:cNvSpPr/>
+          <p:nvPr/>
+        </p:nvSpPr>
+        <p:spPr>
+          <a:xfrm>
+            <a:off x="7635240" y="4184294"/>
+            <a:ext cx="3474720" cy="1466698"/>
+          </a:xfrm>
+          <a:prstGeom prst="roundRect">
+            <a:avLst>
+              <a:gd name="adj" fmla="val 7481"/>
             </a:avLst>
           </a:prstGeom>
           <a:solidFill>
@@ -15775,13 +16440,13 @@
       </p:sp>
       <p:sp>
         <p:nvSpPr>
-          <p:cNvPr id="17" name="Text 15"/>
-          <p:cNvSpPr/>
-          <p:nvPr/>
-        </p:nvSpPr>
-        <p:spPr>
-          <a:xfrm>
-            <a:off x="7799832" y="4645152"/>
+          <p:cNvPr id="25" name="Text 23"/>
+          <p:cNvSpPr/>
+          <p:nvPr/>
+        </p:nvSpPr>
+        <p:spPr>
+          <a:xfrm>
+            <a:off x="7799832" y="4330598"/>
             <a:ext cx="3145536" cy="256032"/>
           </a:xfrm>
           <a:prstGeom prst="rect">
@@ -15814,14 +16479,14 @@
       </p:sp>
       <p:sp>
         <p:nvSpPr>
-          <p:cNvPr id="18" name="Text 16"/>
-          <p:cNvSpPr/>
-          <p:nvPr/>
-        </p:nvSpPr>
-        <p:spPr>
-          <a:xfrm>
-            <a:off x="7799832" y="4974336"/>
-            <a:ext cx="3145536" cy="576072"/>
+          <p:cNvPr id="26" name="Text 24"/>
+          <p:cNvSpPr/>
+          <p:nvPr/>
+        </p:nvSpPr>
+        <p:spPr>
+          <a:xfrm>
+            <a:off x="7799832" y="4659782"/>
+            <a:ext cx="3145536" cy="899770"/>
           </a:xfrm>
           <a:prstGeom prst="rect">
             <a:avLst/>
@@ -15847,7 +16512,7 @@
                 <a:ea typeface="Aptos" pitchFamily="34" charset="-122"/>
                 <a:cs typeface="Aptos" pitchFamily="34" charset="-120"/>
               </a:rPr>
-              <a:t>Use the concept to clarify workflow changes, dependencies, staffing, procurement requirements, training needs, and.</a:t>
+              <a:t>Use the concept to clarify workflow changes, dependencies, staffing, procurement requirements, training needs, and implementation checkpoints.</a:t>
             </a:r>
             <a:endParaRPr lang="en-US" sz="1320" dirty="0"/>
           </a:p>
@@ -16216,11 +16881,11 @@
         <p:spPr>
           <a:xfrm>
             <a:off x="7635240" y="1325880"/>
-            <a:ext cx="3474720" cy="1325880"/>
+            <a:ext cx="3474720" cy="1255471"/>
           </a:xfrm>
           <a:prstGeom prst="roundRect">
             <a:avLst>
-              <a:gd name="adj" fmla="val 8276"/>
+              <a:gd name="adj" fmla="val 8740"/>
             </a:avLst>
           </a:prstGeom>
           <a:solidFill>
@@ -16282,7 +16947,7 @@
         <p:spPr>
           <a:xfrm>
             <a:off x="7799832" y="1801368"/>
-            <a:ext cx="3145536" cy="758952"/>
+            <a:ext cx="3145536" cy="688543"/>
           </a:xfrm>
           <a:prstGeom prst="rect">
             <a:avLst/>
@@ -16322,12 +16987,12 @@
         </p:nvSpPr>
         <p:spPr>
           <a:xfrm>
-            <a:off x="7635240" y="2788920"/>
-            <a:ext cx="3474720" cy="1536192"/>
+            <a:off x="7635240" y="2718511"/>
+            <a:ext cx="3474720" cy="1328623"/>
           </a:xfrm>
           <a:prstGeom prst="roundRect">
             <a:avLst>
-              <a:gd name="adj" fmla="val 7143"/>
+              <a:gd name="adj" fmla="val 8259"/>
             </a:avLst>
           </a:prstGeom>
           <a:solidFill>
@@ -16349,7 +17014,7 @@
         </p:nvSpPr>
         <p:spPr>
           <a:xfrm>
-            <a:off x="7799832" y="2935224"/>
+            <a:off x="7799832" y="2864815"/>
             <a:ext cx="3145536" cy="256032"/>
           </a:xfrm>
           <a:prstGeom prst="rect">
@@ -16388,8 +17053,8 @@
         </p:nvSpPr>
         <p:spPr>
           <a:xfrm>
-            <a:off x="7818120" y="3300984"/>
-            <a:ext cx="3090672" cy="877824"/>
+            <a:off x="7818120" y="3230575"/>
+            <a:ext cx="3090672" cy="670255"/>
           </a:xfrm>
           <a:prstGeom prst="rect">
             <a:avLst/>
@@ -16463,12 +17128,12 @@
         </p:nvSpPr>
         <p:spPr>
           <a:xfrm>
-            <a:off x="7635240" y="4498848"/>
-            <a:ext cx="3474720" cy="1143000"/>
+            <a:off x="7635240" y="4184294"/>
+            <a:ext cx="3474720" cy="1466698"/>
           </a:xfrm>
           <a:prstGeom prst="roundRect">
             <a:avLst>
-              <a:gd name="adj" fmla="val 9600"/>
+              <a:gd name="adj" fmla="val 7481"/>
             </a:avLst>
           </a:prstGeom>
           <a:solidFill>
@@ -16490,7 +17155,7 @@
         </p:nvSpPr>
         <p:spPr>
           <a:xfrm>
-            <a:off x="7799832" y="4645152"/>
+            <a:off x="7799832" y="4330598"/>
             <a:ext cx="3145536" cy="256032"/>
           </a:xfrm>
           <a:prstGeom prst="rect">
@@ -16529,8 +17194,8 @@
         </p:nvSpPr>
         <p:spPr>
           <a:xfrm>
-            <a:off x="7799832" y="4974336"/>
-            <a:ext cx="3145536" cy="576072"/>
+            <a:off x="7799832" y="4659782"/>
+            <a:ext cx="3145536" cy="899770"/>
           </a:xfrm>
           <a:prstGeom prst="rect">
             <a:avLst/>
@@ -16556,7 +17221,7 @@
                 <a:ea typeface="Aptos" pitchFamily="34" charset="-122"/>
                 <a:cs typeface="Aptos" pitchFamily="34" charset="-120"/>
               </a:rPr>
-              <a:t>Use the concept to clarify workflow changes, dependencies, staffing, procurement requirements, training needs, and.</a:t>
+              <a:t>Use the concept to clarify workflow changes, dependencies, staffing, procurement requirements, training needs, and implementation checkpoints.</a:t>
             </a:r>
             <a:endParaRPr lang="en-US" sz="1320" dirty="0"/>
           </a:p>

--- a/downloads/presentations/modules/ops-220.pptx
+++ b/downloads/presentations/modules/ops-220.pptx
@@ -3245,8 +3245,8 @@
         </p:nvSpPr>
         <p:spPr>
           <a:xfrm>
-            <a:off x="868680" y="1508760"/>
-            <a:ext cx="6309360" cy="4160520"/>
+            <a:off x="822960" y="1463040"/>
+            <a:ext cx="6565392" cy="4343400"/>
           </a:xfrm>
           <a:prstGeom prst="rect">
             <a:avLst/>
@@ -3264,7 +3264,7 @@
               <a:buNone/>
             </a:pPr>
             <a:r>
-              <a:rPr lang="en-US" sz="2100" dirty="0">
+              <a:rPr lang="en-US" sz="1920" dirty="0">
                 <a:solidFill>
                   <a:srgbClr val="003A63"/>
                 </a:solidFill>
@@ -3272,16 +3272,16 @@
                 <a:ea typeface="Aptos" pitchFamily="34" charset="-122"/>
                 <a:cs typeface="Aptos" pitchFamily="34" charset="-120"/>
               </a:rPr>
-              <a:t>• A disease investigator may receive an AI-generated case summary in the surveillance system.</a:t>
-            </a:r>
-            <a:endParaRPr lang="en-US" sz="2100" dirty="0"/>
-          </a:p>
-          <a:p>
-            <a:pPr indent="0" marL="0">
-              <a:buNone/>
-            </a:pPr>
-            <a:r>
-              <a:rPr lang="en-US" sz="2100" dirty="0">
+              <a:t>• A disease investigator may receive an AI-generated case summary in the.</a:t>
+            </a:r>
+            <a:endParaRPr lang="en-US" sz="1920" dirty="0"/>
+          </a:p>
+          <a:p>
+            <a:pPr indent="0" marL="0">
+              <a:buNone/>
+            </a:pPr>
+            <a:r>
+              <a:rPr lang="en-US" sz="1920" dirty="0">
                 <a:solidFill>
                   <a:srgbClr val="003A63"/>
                 </a:solidFill>
@@ -3289,16 +3289,16 @@
                 <a:ea typeface="Aptos" pitchFamily="34" charset="-122"/>
                 <a:cs typeface="Aptos" pitchFamily="34" charset="-120"/>
               </a:rPr>
-              <a:t>• If the summary hides uncertainty or makes unsupported claims look official, the investigator.</a:t>
-            </a:r>
-            <a:endParaRPr lang="en-US" sz="2100" dirty="0"/>
-          </a:p>
-          <a:p>
-            <a:pPr indent="0" marL="0">
-              <a:buNone/>
-            </a:pPr>
-            <a:r>
-              <a:rPr lang="en-US" sz="2100" dirty="0">
+              <a:t>• If the summary hides uncertainty or makes unsupported claims look official,.</a:t>
+            </a:r>
+            <a:endParaRPr lang="en-US" sz="1920" dirty="0"/>
+          </a:p>
+          <a:p>
+            <a:pPr indent="0" marL="0">
+              <a:buNone/>
+            </a:pPr>
+            <a:r>
+              <a:rPr lang="en-US" sz="1920" dirty="0">
                 <a:solidFill>
                   <a:srgbClr val="003A63"/>
                 </a:solidFill>
@@ -3306,9 +3306,9 @@
                 <a:ea typeface="Aptos" pitchFamily="34" charset="-122"/>
                 <a:cs typeface="Aptos" pitchFamily="34" charset="-120"/>
               </a:rPr>
-              <a:t>• If the summary is too long, poorly organized, or disconnected from source fields, it may not.</a:t>
-            </a:r>
-            <a:endParaRPr lang="en-US" sz="2100" dirty="0"/>
+              <a:t>• If the summary is too long, poorly organized, or disconnected from source.</a:t>
+            </a:r>
+            <a:endParaRPr lang="en-US" sz="1920" dirty="0"/>
           </a:p>
         </p:txBody>
       </p:sp>
@@ -3320,12 +3320,12 @@
         </p:nvSpPr>
         <p:spPr>
           <a:xfrm>
-            <a:off x="7635240" y="1325880"/>
-            <a:ext cx="3474720" cy="1207008"/>
+            <a:off x="7543800" y="1325880"/>
+            <a:ext cx="3611880" cy="1261872"/>
           </a:xfrm>
           <a:prstGeom prst="roundRect">
             <a:avLst>
-              <a:gd name="adj" fmla="val 9091"/>
+              <a:gd name="adj" fmla="val 8696"/>
             </a:avLst>
           </a:prstGeom>
           <a:solidFill>
@@ -3347,8 +3347,8 @@
         </p:nvSpPr>
         <p:spPr>
           <a:xfrm>
-            <a:off x="7799832" y="1472184"/>
-            <a:ext cx="3145536" cy="256032"/>
+            <a:off x="7708392" y="1453896"/>
+            <a:ext cx="3282696" cy="228600"/>
           </a:xfrm>
           <a:prstGeom prst="rect">
             <a:avLst/>
@@ -3364,7 +3364,7 @@
               <a:buNone/>
             </a:pPr>
             <a:r>
-              <a:rPr lang="en-US" sz="1300" b="1" dirty="0">
+              <a:rPr lang="en-US" sz="1220" b="1" dirty="0">
                 <a:solidFill>
                   <a:srgbClr val="0068B7"/>
                 </a:solidFill>
@@ -3374,7 +3374,7 @@
               </a:rPr>
               <a:t>Implementation cue</a:t>
             </a:r>
-            <a:endParaRPr lang="en-US" sz="1300" dirty="0"/>
+            <a:endParaRPr lang="en-US" sz="1220" dirty="0"/>
           </a:p>
         </p:txBody>
       </p:sp>
@@ -3386,8 +3386,8 @@
         </p:nvSpPr>
         <p:spPr>
           <a:xfrm>
-            <a:off x="7799832" y="1801368"/>
-            <a:ext cx="3145536" cy="640080"/>
+            <a:off x="7708392" y="1764792"/>
+            <a:ext cx="3282696" cy="749808"/>
           </a:xfrm>
           <a:prstGeom prst="rect">
             <a:avLst/>
@@ -3405,7 +3405,7 @@
               <a:buNone/>
             </a:pPr>
             <a:r>
-              <a:rPr lang="en-US" sz="1320" dirty="0">
+              <a:rPr lang="en-US" sz="1220" dirty="0">
                 <a:solidFill>
                   <a:srgbClr val="17364A"/>
                 </a:solidFill>
@@ -3413,9 +3413,9 @@
                 <a:ea typeface="Aptos" pitchFamily="34" charset="-122"/>
                 <a:cs typeface="Aptos" pitchFamily="34" charset="-120"/>
               </a:rPr>
-              <a:t>A disease investigator may receive an AI-generated case summary in the surveillance.</a:t>
-            </a:r>
-            <a:endParaRPr lang="en-US" sz="1320" dirty="0"/>
+              <a:t>A disease investigator may receive an AI-generated case summary in the.</a:t>
+            </a:r>
+            <a:endParaRPr lang="en-US" sz="1220" dirty="0"/>
           </a:p>
         </p:txBody>
       </p:sp>
@@ -3427,12 +3427,12 @@
         </p:nvSpPr>
         <p:spPr>
           <a:xfrm>
-            <a:off x="7635240" y="2670048"/>
-            <a:ext cx="3474720" cy="1377086"/>
+            <a:off x="7543800" y="2724912"/>
+            <a:ext cx="3611880" cy="1527048"/>
           </a:xfrm>
           <a:prstGeom prst="roundRect">
             <a:avLst>
-              <a:gd name="adj" fmla="val 7968"/>
+              <a:gd name="adj" fmla="val 7186"/>
             </a:avLst>
           </a:prstGeom>
           <a:solidFill>
@@ -3454,8 +3454,8 @@
         </p:nvSpPr>
         <p:spPr>
           <a:xfrm>
-            <a:off x="7799832" y="2816352"/>
-            <a:ext cx="3145536" cy="256032"/>
+            <a:off x="7708392" y="2852928"/>
+            <a:ext cx="3282696" cy="228600"/>
           </a:xfrm>
           <a:prstGeom prst="rect">
             <a:avLst/>
@@ -3471,7 +3471,7 @@
               <a:buNone/>
             </a:pPr>
             <a:r>
-              <a:rPr lang="en-US" sz="1300" b="1" dirty="0">
+              <a:rPr lang="en-US" sz="1220" b="1" dirty="0">
                 <a:solidFill>
                   <a:srgbClr val="0068B7"/>
                 </a:solidFill>
@@ -3481,7 +3481,7 @@
               </a:rPr>
               <a:t>Concept checkpoints</a:t>
             </a:r>
-            <a:endParaRPr lang="en-US" sz="1300" dirty="0"/>
+            <a:endParaRPr lang="en-US" sz="1220" dirty="0"/>
           </a:p>
         </p:txBody>
       </p:sp>
@@ -3493,8 +3493,8 @@
         </p:nvSpPr>
         <p:spPr>
           <a:xfrm>
-            <a:off x="7818120" y="3182112"/>
-            <a:ext cx="3090672" cy="718718"/>
+            <a:off x="7726680" y="3182112"/>
+            <a:ext cx="3227832" cy="960120"/>
           </a:xfrm>
           <a:prstGeom prst="rect">
             <a:avLst/>
@@ -3512,7 +3512,7 @@
               <a:buNone/>
             </a:pPr>
             <a:r>
-              <a:rPr lang="en-US" sz="1220" dirty="0">
+              <a:rPr lang="en-US" sz="1140" dirty="0">
                 <a:solidFill>
                   <a:srgbClr val="17364A"/>
                 </a:solidFill>
@@ -3520,16 +3520,16 @@
                 <a:ea typeface="Aptos" pitchFamily="34" charset="-122"/>
                 <a:cs typeface="Aptos" pitchFamily="34" charset="-120"/>
               </a:rPr>
-              <a:t>If the summary hides uncertainty or makes unsupported claims look.</a:t>
-            </a:r>
-            <a:endParaRPr lang="en-US" sz="1220" dirty="0"/>
-          </a:p>
-          <a:p>
-            <a:pPr indent="0" marL="0">
-              <a:buNone/>
-            </a:pPr>
-            <a:r>
-              <a:rPr lang="en-US" sz="1220" dirty="0">
+              <a:t>If the summary hides uncertainty or makes.</a:t>
+            </a:r>
+            <a:endParaRPr lang="en-US" sz="1140" dirty="0"/>
+          </a:p>
+          <a:p>
+            <a:pPr indent="0" marL="0">
+              <a:buNone/>
+            </a:pPr>
+            <a:r>
+              <a:rPr lang="en-US" sz="1140" dirty="0">
                 <a:solidFill>
                   <a:srgbClr val="17364A"/>
                 </a:solidFill>
@@ -3537,16 +3537,16 @@
                 <a:ea typeface="Aptos" pitchFamily="34" charset="-122"/>
                 <a:cs typeface="Aptos" pitchFamily="34" charset="-120"/>
               </a:rPr>
-              <a:t>If the summary is too long, poorly organized, or disconnected from.</a:t>
-            </a:r>
-            <a:endParaRPr lang="en-US" sz="1220" dirty="0"/>
-          </a:p>
-          <a:p>
-            <a:pPr indent="0" marL="0">
-              <a:buNone/>
-            </a:pPr>
-            <a:r>
-              <a:rPr lang="en-US" sz="1220" dirty="0">
+              <a:t>If the summary is too long, poorly organized, or.</a:t>
+            </a:r>
+            <a:endParaRPr lang="en-US" sz="1140" dirty="0"/>
+          </a:p>
+          <a:p>
+            <a:pPr indent="0" marL="0">
+              <a:buNone/>
+            </a:pPr>
+            <a:r>
+              <a:rPr lang="en-US" sz="1140" dirty="0">
                 <a:solidFill>
                   <a:srgbClr val="17364A"/>
                 </a:solidFill>
@@ -3554,9 +3554,9 @@
                 <a:ea typeface="Aptos" pitchFamily="34" charset="-122"/>
                 <a:cs typeface="Aptos" pitchFamily="34" charset="-120"/>
               </a:rPr>
-              <a:t>Usability testing would observe investigators using the summary.</a:t>
-            </a:r>
-            <a:endParaRPr lang="en-US" sz="1220" dirty="0"/>
+              <a:t>Usability testing would observe investigators.</a:t>
+            </a:r>
+            <a:endParaRPr lang="en-US" sz="1140" dirty="0"/>
           </a:p>
         </p:txBody>
       </p:sp>
@@ -3568,12 +3568,12 @@
         </p:nvSpPr>
         <p:spPr>
           <a:xfrm>
-            <a:off x="7635240" y="4184294"/>
-            <a:ext cx="3474720" cy="1466698"/>
+            <a:off x="7543800" y="4389120"/>
+            <a:ext cx="3611880" cy="1261872"/>
           </a:xfrm>
           <a:prstGeom prst="roundRect">
             <a:avLst>
-              <a:gd name="adj" fmla="val 7481"/>
+              <a:gd name="adj" fmla="val 8696"/>
             </a:avLst>
           </a:prstGeom>
           <a:solidFill>
@@ -3595,8 +3595,8 @@
         </p:nvSpPr>
         <p:spPr>
           <a:xfrm>
-            <a:off x="7799832" y="4330598"/>
-            <a:ext cx="3145536" cy="256032"/>
+            <a:off x="7708392" y="4517136"/>
+            <a:ext cx="3282696" cy="228600"/>
           </a:xfrm>
           <a:prstGeom prst="rect">
             <a:avLst/>
@@ -3612,7 +3612,7 @@
               <a:buNone/>
             </a:pPr>
             <a:r>
-              <a:rPr lang="en-US" sz="1300" b="1" dirty="0">
+              <a:rPr lang="en-US" sz="1220" b="1" dirty="0">
                 <a:solidFill>
                   <a:srgbClr val="0068B7"/>
                 </a:solidFill>
@@ -3622,7 +3622,7 @@
               </a:rPr>
               <a:t>Next action</a:t>
             </a:r>
-            <a:endParaRPr lang="en-US" sz="1300" dirty="0"/>
+            <a:endParaRPr lang="en-US" sz="1220" dirty="0"/>
           </a:p>
         </p:txBody>
       </p:sp>
@@ -3634,8 +3634,8 @@
         </p:nvSpPr>
         <p:spPr>
           <a:xfrm>
-            <a:off x="7799832" y="4659782"/>
-            <a:ext cx="3145536" cy="899770"/>
+            <a:off x="7708392" y="4828032"/>
+            <a:ext cx="3282696" cy="749808"/>
           </a:xfrm>
           <a:prstGeom prst="rect">
             <a:avLst/>
@@ -3653,7 +3653,7 @@
               <a:buNone/>
             </a:pPr>
             <a:r>
-              <a:rPr lang="en-US" sz="1320" dirty="0">
+              <a:rPr lang="en-US" sz="1220" dirty="0">
                 <a:solidFill>
                   <a:srgbClr val="17364A"/>
                 </a:solidFill>
@@ -3661,9 +3661,9 @@
                 <a:ea typeface="Aptos" pitchFamily="34" charset="-122"/>
                 <a:cs typeface="Aptos" pitchFamily="34" charset="-120"/>
               </a:rPr>
-              <a:t>Use the concept to clarify workflow changes, dependencies, staffing, procurement requirements, training needs, and implementation checkpoints.</a:t>
-            </a:r>
-            <a:endParaRPr lang="en-US" sz="1320" dirty="0"/>
+              <a:t>Use the concept to clarify workflow changes, dependencies, staffing, procurement.</a:t>
+            </a:r>
+            <a:endParaRPr lang="en-US" sz="1220" dirty="0"/>
           </a:p>
         </p:txBody>
       </p:sp>
@@ -3954,8 +3954,8 @@
         </p:nvSpPr>
         <p:spPr>
           <a:xfrm>
-            <a:off x="868680" y="1508760"/>
-            <a:ext cx="6309360" cy="4160520"/>
+            <a:off x="822960" y="1463040"/>
+            <a:ext cx="6565392" cy="4343400"/>
           </a:xfrm>
           <a:prstGeom prst="rect">
             <a:avLst/>
@@ -3973,7 +3973,7 @@
               <a:buNone/>
             </a:pPr>
             <a:r>
-              <a:rPr lang="en-US" sz="2100" dirty="0">
+              <a:rPr lang="en-US" sz="1920" dirty="0">
                 <a:solidFill>
                   <a:srgbClr val="003A63"/>
                 </a:solidFill>
@@ -3983,14 +3983,14 @@
               </a:rPr>
               <a:t>• Workflow integration begins with current-state mapping.</a:t>
             </a:r>
-            <a:endParaRPr lang="en-US" sz="2100" dirty="0"/>
-          </a:p>
-          <a:p>
-            <a:pPr indent="0" marL="0">
-              <a:buNone/>
-            </a:pPr>
-            <a:r>
-              <a:rPr lang="en-US" sz="2100" dirty="0">
+            <a:endParaRPr lang="en-US" sz="1920" dirty="0"/>
+          </a:p>
+          <a:p>
+            <a:pPr indent="0" marL="0">
+              <a:buNone/>
+            </a:pPr>
+            <a:r>
+              <a:rPr lang="en-US" sz="1920" dirty="0">
                 <a:solidFill>
                   <a:srgbClr val="003A63"/>
                 </a:solidFill>
@@ -3998,16 +3998,16 @@
                 <a:ea typeface="Aptos" pitchFamily="34" charset="-122"/>
                 <a:cs typeface="Aptos" pitchFamily="34" charset="-120"/>
               </a:rPr>
-              <a:t>• Agencies should document how work happens today, including informal workarounds, duplicate.</a:t>
-            </a:r>
-            <a:endParaRPr lang="en-US" sz="2100" dirty="0"/>
-          </a:p>
-          <a:p>
-            <a:pPr indent="0" marL="0">
-              <a:buNone/>
-            </a:pPr>
-            <a:r>
-              <a:rPr lang="en-US" sz="2100" dirty="0">
+              <a:t>• Agencies should document how work happens today, including informal.</a:t>
+            </a:r>
+            <a:endParaRPr lang="en-US" sz="1920" dirty="0"/>
+          </a:p>
+          <a:p>
+            <a:pPr indent="0" marL="0">
+              <a:buNone/>
+            </a:pPr>
+            <a:r>
+              <a:rPr lang="en-US" sz="1920" dirty="0">
                 <a:solidFill>
                   <a:srgbClr val="003A63"/>
                 </a:solidFill>
@@ -4015,9 +4015,9 @@
                 <a:ea typeface="Aptos" pitchFamily="34" charset="-122"/>
                 <a:cs typeface="Aptos" pitchFamily="34" charset="-120"/>
               </a:rPr>
-              <a:t>• AI should be introduced only after the team understands which step is being improved and how.</a:t>
-            </a:r>
-            <a:endParaRPr lang="en-US" sz="2100" dirty="0"/>
+              <a:t>• AI should be introduced only after the team understands which step is being.</a:t>
+            </a:r>
+            <a:endParaRPr lang="en-US" sz="1920" dirty="0"/>
           </a:p>
         </p:txBody>
       </p:sp>
@@ -4029,12 +4029,12 @@
         </p:nvSpPr>
         <p:spPr>
           <a:xfrm>
-            <a:off x="7635240" y="1325880"/>
-            <a:ext cx="3474720" cy="1207008"/>
+            <a:off x="7543800" y="1325880"/>
+            <a:ext cx="3611880" cy="1261872"/>
           </a:xfrm>
           <a:prstGeom prst="roundRect">
             <a:avLst>
-              <a:gd name="adj" fmla="val 9091"/>
+              <a:gd name="adj" fmla="val 8696"/>
             </a:avLst>
           </a:prstGeom>
           <a:solidFill>
@@ -4056,8 +4056,8 @@
         </p:nvSpPr>
         <p:spPr>
           <a:xfrm>
-            <a:off x="7799832" y="1472184"/>
-            <a:ext cx="3145536" cy="256032"/>
+            <a:off x="7708392" y="1453896"/>
+            <a:ext cx="3282696" cy="228600"/>
           </a:xfrm>
           <a:prstGeom prst="rect">
             <a:avLst/>
@@ -4073,7 +4073,7 @@
               <a:buNone/>
             </a:pPr>
             <a:r>
-              <a:rPr lang="en-US" sz="1300" b="1" dirty="0">
+              <a:rPr lang="en-US" sz="1220" b="1" dirty="0">
                 <a:solidFill>
                   <a:srgbClr val="0068B7"/>
                 </a:solidFill>
@@ -4083,7 +4083,7 @@
               </a:rPr>
               <a:t>Implementation cue</a:t>
             </a:r>
-            <a:endParaRPr lang="en-US" sz="1300" dirty="0"/>
+            <a:endParaRPr lang="en-US" sz="1220" dirty="0"/>
           </a:p>
         </p:txBody>
       </p:sp>
@@ -4095,8 +4095,8 @@
         </p:nvSpPr>
         <p:spPr>
           <a:xfrm>
-            <a:off x="7799832" y="1801368"/>
-            <a:ext cx="3145536" cy="640080"/>
+            <a:off x="7708392" y="1764792"/>
+            <a:ext cx="3282696" cy="749808"/>
           </a:xfrm>
           <a:prstGeom prst="rect">
             <a:avLst/>
@@ -4114,7 +4114,7 @@
               <a:buNone/>
             </a:pPr>
             <a:r>
-              <a:rPr lang="en-US" sz="1320" dirty="0">
+              <a:rPr lang="en-US" sz="1220" dirty="0">
                 <a:solidFill>
                   <a:srgbClr val="17364A"/>
                 </a:solidFill>
@@ -4124,7 +4124,7 @@
               </a:rPr>
               <a:t>Workflow integration begins with current-state mapping.</a:t>
             </a:r>
-            <a:endParaRPr lang="en-US" sz="1320" dirty="0"/>
+            <a:endParaRPr lang="en-US" sz="1220" dirty="0"/>
           </a:p>
         </p:txBody>
       </p:sp>
@@ -4136,12 +4136,12 @@
         </p:nvSpPr>
         <p:spPr>
           <a:xfrm>
-            <a:off x="7635240" y="2670048"/>
-            <a:ext cx="3474720" cy="1377086"/>
+            <a:off x="7543800" y="2724912"/>
+            <a:ext cx="3611880" cy="1527048"/>
           </a:xfrm>
           <a:prstGeom prst="roundRect">
             <a:avLst>
-              <a:gd name="adj" fmla="val 7968"/>
+              <a:gd name="adj" fmla="val 7186"/>
             </a:avLst>
           </a:prstGeom>
           <a:solidFill>
@@ -4163,24 +4163,26 @@
         </p:nvSpPr>
         <p:spPr>
           <a:xfrm>
-            <a:off x="7799832" y="2798064"/>
-            <a:ext cx="3145536" cy="237744"/>
-          </a:xfrm>
-          <a:prstGeom prst="rect">
-            <a:avLst/>
-          </a:prstGeom>
-          <a:noFill/>
-          <a:ln/>
-        </p:spPr>
-        <p:txBody>
-          <a:bodyPr wrap="square" lIns="0" tIns="0" rIns="0" bIns="0" rtlCol="0" anchor="ctr"/>
-          <a:lstStyle/>
-          <a:p>
-            <a:pPr indent="0" marL="0">
-              <a:buNone/>
-            </a:pPr>
-            <a:r>
-              <a:rPr lang="en-US" sz="1250" b="1" dirty="0">
+            <a:off x="7708392" y="2852928"/>
+            <a:ext cx="3282696" cy="219456"/>
+          </a:xfrm>
+          <a:prstGeom prst="rect">
+            <a:avLst/>
+          </a:prstGeom>
+          <a:noFill/>
+          <a:ln/>
+        </p:spPr>
+        <p:txBody>
+          <a:bodyPr wrap="square" lIns="0" tIns="0" rIns="0" bIns="0" rtlCol="0" anchor="ctr">
+            <a:normAutofit/>
+          </a:bodyPr>
+          <a:lstStyle/>
+          <a:p>
+            <a:pPr indent="0" marL="0">
+              <a:buNone/>
+            </a:pPr>
+            <a:r>
+              <a:rPr lang="en-US" sz="1160" b="1" dirty="0">
                 <a:solidFill>
                   <a:srgbClr val="0068B7"/>
                 </a:solidFill>
@@ -4190,7 +4192,7 @@
               </a:rPr>
               <a:t>Implementation path</a:t>
             </a:r>
-            <a:endParaRPr lang="en-US" sz="1250" dirty="0"/>
+            <a:endParaRPr lang="en-US" sz="1160" dirty="0"/>
           </a:p>
         </p:txBody>
       </p:sp>
@@ -4202,7 +4204,7 @@
         </p:nvSpPr>
         <p:spPr>
           <a:xfrm>
-            <a:off x="8763000" y="3351276"/>
+            <a:off x="8717280" y="3406140"/>
             <a:ext cx="164592" cy="0"/>
           </a:xfrm>
           <a:prstGeom prst="line">
@@ -4225,8 +4227,8 @@
         </p:nvSpPr>
         <p:spPr>
           <a:xfrm>
-            <a:off x="7872984" y="3200400"/>
-            <a:ext cx="890016" cy="301752"/>
+            <a:off x="7781544" y="3255264"/>
+            <a:ext cx="935736" cy="301752"/>
           </a:xfrm>
           <a:prstGeom prst="roundRect">
             <a:avLst>
@@ -4252,8 +4254,8 @@
         </p:nvSpPr>
         <p:spPr>
           <a:xfrm>
-            <a:off x="7909560" y="3273552"/>
-            <a:ext cx="816864" cy="146304"/>
+            <a:off x="7818120" y="3328416"/>
+            <a:ext cx="862584" cy="146304"/>
           </a:xfrm>
           <a:prstGeom prst="rect">
             <a:avLst/>
@@ -4293,7 +4295,7 @@
         </p:nvSpPr>
         <p:spPr>
           <a:xfrm>
-            <a:off x="9817608" y="3351276"/>
+            <a:off x="9817608" y="3406140"/>
             <a:ext cx="164592" cy="0"/>
           </a:xfrm>
           <a:prstGeom prst="line">
@@ -4316,8 +4318,8 @@
         </p:nvSpPr>
         <p:spPr>
           <a:xfrm>
-            <a:off x="8927592" y="3200400"/>
-            <a:ext cx="890016" cy="301752"/>
+            <a:off x="8881872" y="3255264"/>
+            <a:ext cx="935736" cy="301752"/>
           </a:xfrm>
           <a:prstGeom prst="roundRect">
             <a:avLst>
@@ -4343,8 +4345,8 @@
         </p:nvSpPr>
         <p:spPr>
           <a:xfrm>
-            <a:off x="8964168" y="3273552"/>
-            <a:ext cx="816864" cy="146304"/>
+            <a:off x="8918448" y="3328416"/>
+            <a:ext cx="862584" cy="146304"/>
           </a:xfrm>
           <a:prstGeom prst="rect">
             <a:avLst/>
@@ -4384,8 +4386,8 @@
         </p:nvSpPr>
         <p:spPr>
           <a:xfrm>
-            <a:off x="9982200" y="3200400"/>
-            <a:ext cx="890016" cy="301752"/>
+            <a:off x="9982200" y="3255264"/>
+            <a:ext cx="935736" cy="301752"/>
           </a:xfrm>
           <a:prstGeom prst="roundRect">
             <a:avLst>
@@ -4411,8 +4413,8 @@
         </p:nvSpPr>
         <p:spPr>
           <a:xfrm>
-            <a:off x="10018776" y="3273552"/>
-            <a:ext cx="816864" cy="146304"/>
+            <a:off x="10018776" y="3328416"/>
+            <a:ext cx="862584" cy="146304"/>
           </a:xfrm>
           <a:prstGeom prst="rect">
             <a:avLst/>
@@ -4452,8 +4454,8 @@
         </p:nvSpPr>
         <p:spPr>
           <a:xfrm>
-            <a:off x="7854696" y="3694176"/>
-            <a:ext cx="3035808" cy="206654"/>
+            <a:off x="7763256" y="3749040"/>
+            <a:ext cx="3172968" cy="356616"/>
           </a:xfrm>
           <a:prstGeom prst="rect">
             <a:avLst/>
@@ -4471,7 +4473,7 @@
               <a:buNone/>
             </a:pPr>
             <a:r>
-              <a:rPr lang="en-US" sz="1120" dirty="0">
+              <a:rPr lang="en-US" sz="1040" dirty="0">
                 <a:solidFill>
                   <a:srgbClr val="17364A"/>
                 </a:solidFill>
@@ -4479,9 +4481,9 @@
                 <a:ea typeface="Aptos" pitchFamily="34" charset="-122"/>
                 <a:cs typeface="Aptos" pitchFamily="34" charset="-120"/>
               </a:rPr>
-              <a:t>Implementation work should make dependencies, approvals, training, and sustainment visible before launch.</a:t>
-            </a:r>
-            <a:endParaRPr lang="en-US" sz="1120" dirty="0"/>
+              <a:t>Implementation work should make dependencies, approvals, training, and.</a:t>
+            </a:r>
+            <a:endParaRPr lang="en-US" sz="1040" dirty="0"/>
           </a:p>
         </p:txBody>
       </p:sp>
@@ -4493,12 +4495,12 @@
         </p:nvSpPr>
         <p:spPr>
           <a:xfrm>
-            <a:off x="7635240" y="4184294"/>
-            <a:ext cx="3474720" cy="1466698"/>
+            <a:off x="7543800" y="4389120"/>
+            <a:ext cx="3611880" cy="1261872"/>
           </a:xfrm>
           <a:prstGeom prst="roundRect">
             <a:avLst>
-              <a:gd name="adj" fmla="val 7481"/>
+              <a:gd name="adj" fmla="val 8696"/>
             </a:avLst>
           </a:prstGeom>
           <a:solidFill>
@@ -4520,8 +4522,8 @@
         </p:nvSpPr>
         <p:spPr>
           <a:xfrm>
-            <a:off x="7799832" y="4330598"/>
-            <a:ext cx="3145536" cy="256032"/>
+            <a:off x="7708392" y="4517136"/>
+            <a:ext cx="3282696" cy="228600"/>
           </a:xfrm>
           <a:prstGeom prst="rect">
             <a:avLst/>
@@ -4537,7 +4539,7 @@
               <a:buNone/>
             </a:pPr>
             <a:r>
-              <a:rPr lang="en-US" sz="1300" b="1" dirty="0">
+              <a:rPr lang="en-US" sz="1220" b="1" dirty="0">
                 <a:solidFill>
                   <a:srgbClr val="0068B7"/>
                 </a:solidFill>
@@ -4547,7 +4549,7 @@
               </a:rPr>
               <a:t>Next action</a:t>
             </a:r>
-            <a:endParaRPr lang="en-US" sz="1300" dirty="0"/>
+            <a:endParaRPr lang="en-US" sz="1220" dirty="0"/>
           </a:p>
         </p:txBody>
       </p:sp>
@@ -4559,8 +4561,8 @@
         </p:nvSpPr>
         <p:spPr>
           <a:xfrm>
-            <a:off x="7799832" y="4659782"/>
-            <a:ext cx="3145536" cy="899770"/>
+            <a:off x="7708392" y="4828032"/>
+            <a:ext cx="3282696" cy="749808"/>
           </a:xfrm>
           <a:prstGeom prst="rect">
             <a:avLst/>
@@ -4578,7 +4580,7 @@
               <a:buNone/>
             </a:pPr>
             <a:r>
-              <a:rPr lang="en-US" sz="1320" dirty="0">
+              <a:rPr lang="en-US" sz="1220" dirty="0">
                 <a:solidFill>
                   <a:srgbClr val="17364A"/>
                 </a:solidFill>
@@ -4586,9 +4588,9 @@
                 <a:ea typeface="Aptos" pitchFamily="34" charset="-122"/>
                 <a:cs typeface="Aptos" pitchFamily="34" charset="-120"/>
               </a:rPr>
-              <a:t>Use the concept to clarify workflow changes, dependencies, staffing, procurement requirements, training needs, and implementation checkpoints.</a:t>
-            </a:r>
-            <a:endParaRPr lang="en-US" sz="1320" dirty="0"/>
+              <a:t>Use the concept to clarify workflow changes, dependencies, staffing, procurement.</a:t>
+            </a:r>
+            <a:endParaRPr lang="en-US" sz="1220" dirty="0"/>
           </a:p>
         </p:txBody>
       </p:sp>
@@ -4879,8 +4881,8 @@
         </p:nvSpPr>
         <p:spPr>
           <a:xfrm>
-            <a:off x="868680" y="1508760"/>
-            <a:ext cx="6309360" cy="4160520"/>
+            <a:off x="822960" y="1463040"/>
+            <a:ext cx="6565392" cy="4343400"/>
           </a:xfrm>
           <a:prstGeom prst="rect">
             <a:avLst/>
@@ -4898,7 +4900,7 @@
               <a:buNone/>
             </a:pPr>
             <a:r>
-              <a:rPr lang="en-US" sz="2100" dirty="0">
+              <a:rPr lang="en-US" sz="1920" dirty="0">
                 <a:solidFill>
                   <a:srgbClr val="003A63"/>
                 </a:solidFill>
@@ -4906,16 +4908,16 @@
                 <a:ea typeface="Aptos" pitchFamily="34" charset="-122"/>
                 <a:cs typeface="Aptos" pitchFamily="34" charset="-120"/>
               </a:rPr>
-              <a:t>• A common failure mode is treating the topic as a technical detail rather than a public health.</a:t>
-            </a:r>
-            <a:endParaRPr lang="en-US" sz="2100" dirty="0"/>
-          </a:p>
-          <a:p>
-            <a:pPr indent="0" marL="0">
-              <a:buNone/>
-            </a:pPr>
-            <a:r>
-              <a:rPr lang="en-US" sz="2100" dirty="0">
+              <a:t>• A common failure mode is treating the topic as a technical detail rather.</a:t>
+            </a:r>
+            <a:endParaRPr lang="en-US" sz="1920" dirty="0"/>
+          </a:p>
+          <a:p>
+            <a:pPr indent="0" marL="0">
+              <a:buNone/>
+            </a:pPr>
+            <a:r>
+              <a:rPr lang="en-US" sz="1920" dirty="0">
                 <a:solidFill>
                   <a:srgbClr val="003A63"/>
                 </a:solidFill>
@@ -4923,16 +4925,16 @@
                 <a:ea typeface="Aptos" pitchFamily="34" charset="-122"/>
                 <a:cs typeface="Aptos" pitchFamily="34" charset="-120"/>
               </a:rPr>
-              <a:t>• When staff do not connect technical decisions to authority, workflow, equity, privacy,.</a:t>
-            </a:r>
-            <a:endParaRPr lang="en-US" sz="2100" dirty="0"/>
-          </a:p>
-          <a:p>
-            <a:pPr indent="0" marL="0">
-              <a:buNone/>
-            </a:pPr>
-            <a:r>
-              <a:rPr lang="en-US" sz="2100" dirty="0">
+              <a:t>• When staff do not connect technical decisions to authority, workflow,.</a:t>
+            </a:r>
+            <a:endParaRPr lang="en-US" sz="1920" dirty="0"/>
+          </a:p>
+          <a:p>
+            <a:pPr indent="0" marL="0">
+              <a:buNone/>
+            </a:pPr>
+            <a:r>
+              <a:rPr lang="en-US" sz="1920" dirty="0">
                 <a:solidFill>
                   <a:srgbClr val="003A63"/>
                 </a:solidFill>
@@ -4942,7 +4944,7 @@
               </a:rPr>
               <a:t>• Another risk is relying on vendor claims without agency-defined evidence.</a:t>
             </a:r>
-            <a:endParaRPr lang="en-US" sz="2100" dirty="0"/>
+            <a:endParaRPr lang="en-US" sz="1920" dirty="0"/>
           </a:p>
         </p:txBody>
       </p:sp>
@@ -4954,12 +4956,12 @@
         </p:nvSpPr>
         <p:spPr>
           <a:xfrm>
-            <a:off x="7635240" y="1325880"/>
-            <a:ext cx="3474720" cy="1255471"/>
+            <a:off x="7543800" y="1325880"/>
+            <a:ext cx="3611880" cy="1261872"/>
           </a:xfrm>
           <a:prstGeom prst="roundRect">
             <a:avLst>
-              <a:gd name="adj" fmla="val 8740"/>
+              <a:gd name="adj" fmla="val 8696"/>
             </a:avLst>
           </a:prstGeom>
           <a:solidFill>
@@ -4981,8 +4983,8 @@
         </p:nvSpPr>
         <p:spPr>
           <a:xfrm>
-            <a:off x="7799832" y="1472184"/>
-            <a:ext cx="3145536" cy="256032"/>
+            <a:off x="7708392" y="1453896"/>
+            <a:ext cx="3282696" cy="228600"/>
           </a:xfrm>
           <a:prstGeom prst="rect">
             <a:avLst/>
@@ -4998,7 +5000,7 @@
               <a:buNone/>
             </a:pPr>
             <a:r>
-              <a:rPr lang="en-US" sz="1300" b="1" dirty="0">
+              <a:rPr lang="en-US" sz="1220" b="1" dirty="0">
                 <a:solidFill>
                   <a:srgbClr val="0068B7"/>
                 </a:solidFill>
@@ -5008,7 +5010,7 @@
               </a:rPr>
               <a:t>Risk check</a:t>
             </a:r>
-            <a:endParaRPr lang="en-US" sz="1300" dirty="0"/>
+            <a:endParaRPr lang="en-US" sz="1220" dirty="0"/>
           </a:p>
         </p:txBody>
       </p:sp>
@@ -5020,8 +5022,8 @@
         </p:nvSpPr>
         <p:spPr>
           <a:xfrm>
-            <a:off x="7799832" y="1801368"/>
-            <a:ext cx="3145536" cy="688543"/>
+            <a:off x="7708392" y="1764792"/>
+            <a:ext cx="3282696" cy="749808"/>
           </a:xfrm>
           <a:prstGeom prst="rect">
             <a:avLst/>
@@ -5039,7 +5041,7 @@
               <a:buNone/>
             </a:pPr>
             <a:r>
-              <a:rPr lang="en-US" sz="1320" dirty="0">
+              <a:rPr lang="en-US" sz="1220" dirty="0">
                 <a:solidFill>
                   <a:srgbClr val="17364A"/>
                 </a:solidFill>
@@ -5047,9 +5049,9 @@
                 <a:ea typeface="Aptos" pitchFamily="34" charset="-122"/>
                 <a:cs typeface="Aptos" pitchFamily="34" charset="-120"/>
               </a:rPr>
-              <a:t>A common failure mode is treating the topic as a technical detail rather than a public health control.</a:t>
-            </a:r>
-            <a:endParaRPr lang="en-US" sz="1320" dirty="0"/>
+              <a:t>A common failure mode is treating the topic as a technical detail rather than a.</a:t>
+            </a:r>
+            <a:endParaRPr lang="en-US" sz="1220" dirty="0"/>
           </a:p>
         </p:txBody>
       </p:sp>
@@ -5061,12 +5063,12 @@
         </p:nvSpPr>
         <p:spPr>
           <a:xfrm>
-            <a:off x="7635240" y="2718511"/>
-            <a:ext cx="3474720" cy="1536192"/>
+            <a:off x="7543800" y="2724912"/>
+            <a:ext cx="3611880" cy="1527048"/>
           </a:xfrm>
           <a:prstGeom prst="roundRect">
             <a:avLst>
-              <a:gd name="adj" fmla="val 7143"/>
+              <a:gd name="adj" fmla="val 7186"/>
             </a:avLst>
           </a:prstGeom>
           <a:solidFill>
@@ -5088,8 +5090,8 @@
         </p:nvSpPr>
         <p:spPr>
           <a:xfrm>
-            <a:off x="7799832" y="2864815"/>
-            <a:ext cx="3145536" cy="256032"/>
+            <a:off x="7708392" y="2852928"/>
+            <a:ext cx="3282696" cy="228600"/>
           </a:xfrm>
           <a:prstGeom prst="rect">
             <a:avLst/>
@@ -5105,7 +5107,7 @@
               <a:buNone/>
             </a:pPr>
             <a:r>
-              <a:rPr lang="en-US" sz="1300" b="1" dirty="0">
+              <a:rPr lang="en-US" sz="1220" b="1" dirty="0">
                 <a:solidFill>
                   <a:srgbClr val="0068B7"/>
                 </a:solidFill>
@@ -5115,7 +5117,7 @@
               </a:rPr>
               <a:t>Concept checkpoints</a:t>
             </a:r>
-            <a:endParaRPr lang="en-US" sz="1300" dirty="0"/>
+            <a:endParaRPr lang="en-US" sz="1220" dirty="0"/>
           </a:p>
         </p:txBody>
       </p:sp>
@@ -5127,8 +5129,8 @@
         </p:nvSpPr>
         <p:spPr>
           <a:xfrm>
-            <a:off x="7818120" y="3230575"/>
-            <a:ext cx="3090672" cy="877824"/>
+            <a:off x="7726680" y="3182112"/>
+            <a:ext cx="3227832" cy="960120"/>
           </a:xfrm>
           <a:prstGeom prst="rect">
             <a:avLst/>
@@ -5146,7 +5148,7 @@
               <a:buNone/>
             </a:pPr>
             <a:r>
-              <a:rPr lang="en-US" sz="1220" dirty="0">
+              <a:rPr lang="en-US" sz="1140" dirty="0">
                 <a:solidFill>
                   <a:srgbClr val="17364A"/>
                 </a:solidFill>
@@ -5154,16 +5156,16 @@
                 <a:ea typeface="Aptos" pitchFamily="34" charset="-122"/>
                 <a:cs typeface="Aptos" pitchFamily="34" charset="-120"/>
               </a:rPr>
-              <a:t>When staff do not connect technical decisions to authority,.</a:t>
-            </a:r>
-            <a:endParaRPr lang="en-US" sz="1220" dirty="0"/>
-          </a:p>
-          <a:p>
-            <a:pPr indent="0" marL="0">
-              <a:buNone/>
-            </a:pPr>
-            <a:r>
-              <a:rPr lang="en-US" sz="1220" dirty="0">
+              <a:t>When staff do not connect technical decisions to.</a:t>
+            </a:r>
+            <a:endParaRPr lang="en-US" sz="1140" dirty="0"/>
+          </a:p>
+          <a:p>
+            <a:pPr indent="0" marL="0">
+              <a:buNone/>
+            </a:pPr>
+            <a:r>
+              <a:rPr lang="en-US" sz="1140" dirty="0">
                 <a:solidFill>
                   <a:srgbClr val="17364A"/>
                 </a:solidFill>
@@ -5171,16 +5173,16 @@
                 <a:ea typeface="Aptos" pitchFamily="34" charset="-122"/>
                 <a:cs typeface="Aptos" pitchFamily="34" charset="-120"/>
               </a:rPr>
-              <a:t>Vendors may provide demonstrations, dashboards, or summary metrics.</a:t>
-            </a:r>
-            <a:endParaRPr lang="en-US" sz="1220" dirty="0"/>
-          </a:p>
-          <a:p>
-            <a:pPr indent="0" marL="0">
-              <a:buNone/>
-            </a:pPr>
-            <a:r>
-              <a:rPr lang="en-US" sz="1220" dirty="0">
+              <a:t>Vendors may provide demonstrations, dashboards, or.</a:t>
+            </a:r>
+            <a:endParaRPr lang="en-US" sz="1140" dirty="0"/>
+          </a:p>
+          <a:p>
+            <a:pPr indent="0" marL="0">
+              <a:buNone/>
+            </a:pPr>
+            <a:r>
+              <a:rPr lang="en-US" sz="1140" dirty="0">
                 <a:solidFill>
                   <a:srgbClr val="17364A"/>
                 </a:solidFill>
@@ -5188,9 +5190,9 @@
                 <a:ea typeface="Aptos" pitchFamily="34" charset="-122"/>
                 <a:cs typeface="Aptos" pitchFamily="34" charset="-120"/>
               </a:rPr>
-              <a:t>A guardrail is to require documentation, test results, acceptance.</a:t>
-            </a:r>
-            <a:endParaRPr lang="en-US" sz="1220" dirty="0"/>
+              <a:t>A guardrail is to require documentation, test.</a:t>
+            </a:r>
+            <a:endParaRPr lang="en-US" sz="1140" dirty="0"/>
           </a:p>
         </p:txBody>
       </p:sp>
@@ -5202,12 +5204,12 @@
         </p:nvSpPr>
         <p:spPr>
           <a:xfrm>
-            <a:off x="7635240" y="4391863"/>
-            <a:ext cx="3474720" cy="1255471"/>
+            <a:off x="7543800" y="4389120"/>
+            <a:ext cx="3611880" cy="1261872"/>
           </a:xfrm>
           <a:prstGeom prst="roundRect">
             <a:avLst>
-              <a:gd name="adj" fmla="val 8740"/>
+              <a:gd name="adj" fmla="val 8696"/>
             </a:avLst>
           </a:prstGeom>
           <a:solidFill>
@@ -5229,8 +5231,8 @@
         </p:nvSpPr>
         <p:spPr>
           <a:xfrm>
-            <a:off x="7799832" y="4538167"/>
-            <a:ext cx="3145536" cy="256032"/>
+            <a:off x="7708392" y="4517136"/>
+            <a:ext cx="3282696" cy="228600"/>
           </a:xfrm>
           <a:prstGeom prst="rect">
             <a:avLst/>
@@ -5246,7 +5248,7 @@
               <a:buNone/>
             </a:pPr>
             <a:r>
-              <a:rPr lang="en-US" sz="1300" b="1" dirty="0">
+              <a:rPr lang="en-US" sz="1220" b="1" dirty="0">
                 <a:solidFill>
                   <a:srgbClr val="0068B7"/>
                 </a:solidFill>
@@ -5256,7 +5258,7 @@
               </a:rPr>
               <a:t>Safeguard to plan</a:t>
             </a:r>
-            <a:endParaRPr lang="en-US" sz="1300" dirty="0"/>
+            <a:endParaRPr lang="en-US" sz="1220" dirty="0"/>
           </a:p>
         </p:txBody>
       </p:sp>
@@ -5268,8 +5270,8 @@
         </p:nvSpPr>
         <p:spPr>
           <a:xfrm>
-            <a:off x="7799832" y="4867351"/>
-            <a:ext cx="3145536" cy="688543"/>
+            <a:off x="7708392" y="4828032"/>
+            <a:ext cx="3282696" cy="749808"/>
           </a:xfrm>
           <a:prstGeom prst="rect">
             <a:avLst/>
@@ -5287,7 +5289,7 @@
               <a:buNone/>
             </a:pPr>
             <a:r>
-              <a:rPr lang="en-US" sz="1320" dirty="0">
+              <a:rPr lang="en-US" sz="1220" dirty="0">
                 <a:solidFill>
                   <a:srgbClr val="17364A"/>
                 </a:solidFill>
@@ -5295,9 +5297,9 @@
                 <a:ea typeface="Aptos" pitchFamily="34" charset="-122"/>
                 <a:cs typeface="Aptos" pitchFamily="34" charset="-120"/>
               </a:rPr>
-              <a:t>Identify what could go wrong, who could be affected, what safeguards are needed, and what evidence should be reviewed before use.</a:t>
-            </a:r>
-            <a:endParaRPr lang="en-US" sz="1320" dirty="0"/>
+              <a:t>Identify what could go wrong, who could be affected, what safeguards are needed,.</a:t>
+            </a:r>
+            <a:endParaRPr lang="en-US" sz="1220" dirty="0"/>
           </a:p>
         </p:txBody>
       </p:sp>
@@ -5588,8 +5590,8 @@
         </p:nvSpPr>
         <p:spPr>
           <a:xfrm>
-            <a:off x="868680" y="1508760"/>
-            <a:ext cx="6309360" cy="4160520"/>
+            <a:off x="822960" y="1463040"/>
+            <a:ext cx="6565392" cy="4343400"/>
           </a:xfrm>
           <a:prstGeom prst="rect">
             <a:avLst/>
@@ -5607,7 +5609,7 @@
               <a:buNone/>
             </a:pPr>
             <a:r>
-              <a:rPr lang="en-US" sz="2100" dirty="0">
+              <a:rPr lang="en-US" sz="1920" dirty="0">
                 <a:solidFill>
                   <a:srgbClr val="003A63"/>
                 </a:solidFill>
@@ -5615,16 +5617,16 @@
                 <a:ea typeface="Aptos" pitchFamily="34" charset="-122"/>
                 <a:cs typeface="Aptos" pitchFamily="34" charset="-120"/>
               </a:rPr>
-              <a:t>• Generative AI, predictive analytics, RAG, automation, and agentic workflows all depend on the.</a:t>
-            </a:r>
-            <a:endParaRPr lang="en-US" sz="2100" dirty="0"/>
-          </a:p>
-          <a:p>
-            <a:pPr indent="0" marL="0">
-              <a:buNone/>
-            </a:pPr>
-            <a:r>
-              <a:rPr lang="en-US" sz="2100" dirty="0">
+              <a:t>• Generative AI, predictive analytics, RAG, automation, and agentic workflows.</a:t>
+            </a:r>
+            <a:endParaRPr lang="en-US" sz="1920" dirty="0"/>
+          </a:p>
+          <a:p>
+            <a:pPr indent="0" marL="0">
+              <a:buNone/>
+            </a:pPr>
+            <a:r>
+              <a:rPr lang="en-US" sz="1920" dirty="0">
                 <a:solidFill>
                   <a:srgbClr val="003A63"/>
                 </a:solidFill>
@@ -5634,14 +5636,14 @@
               </a:rPr>
               <a:t>• The controls should be scaled to the risk of the use case.</a:t>
             </a:r>
-            <a:endParaRPr lang="en-US" sz="2100" dirty="0"/>
-          </a:p>
-          <a:p>
-            <a:pPr indent="0" marL="0">
-              <a:buNone/>
-            </a:pPr>
-            <a:r>
-              <a:rPr lang="en-US" sz="2100" dirty="0">
+            <a:endParaRPr lang="en-US" sz="1920" dirty="0"/>
+          </a:p>
+          <a:p>
+            <a:pPr indent="0" marL="0">
+              <a:buNone/>
+            </a:pPr>
+            <a:r>
+              <a:rPr lang="en-US" sz="1920" dirty="0">
                 <a:solidFill>
                   <a:srgbClr val="003A63"/>
                 </a:solidFill>
@@ -5649,9 +5651,9 @@
                 <a:ea typeface="Aptos" pitchFamily="34" charset="-122"/>
                 <a:cs typeface="Aptos" pitchFamily="34" charset="-120"/>
               </a:rPr>
-              <a:t>• A tool that drafts internal training text may require lighter review than a tool that updates.</a:t>
-            </a:r>
-            <a:endParaRPr lang="en-US" sz="2100" dirty="0"/>
+              <a:t>• A tool that drafts internal training text may require lighter review than a.</a:t>
+            </a:r>
+            <a:endParaRPr lang="en-US" sz="1920" dirty="0"/>
           </a:p>
         </p:txBody>
       </p:sp>
@@ -5663,12 +5665,12 @@
         </p:nvSpPr>
         <p:spPr>
           <a:xfrm>
-            <a:off x="7635240" y="1325880"/>
-            <a:ext cx="3474720" cy="1255471"/>
+            <a:off x="7543800" y="1325880"/>
+            <a:ext cx="3611880" cy="1261872"/>
           </a:xfrm>
           <a:prstGeom prst="roundRect">
             <a:avLst>
-              <a:gd name="adj" fmla="val 8740"/>
+              <a:gd name="adj" fmla="val 8696"/>
             </a:avLst>
           </a:prstGeom>
           <a:solidFill>
@@ -5690,8 +5692,8 @@
         </p:nvSpPr>
         <p:spPr>
           <a:xfrm>
-            <a:off x="7799832" y="1472184"/>
-            <a:ext cx="3145536" cy="256032"/>
+            <a:off x="7708392" y="1453896"/>
+            <a:ext cx="3282696" cy="228600"/>
           </a:xfrm>
           <a:prstGeom prst="rect">
             <a:avLst/>
@@ -5707,7 +5709,7 @@
               <a:buNone/>
             </a:pPr>
             <a:r>
-              <a:rPr lang="en-US" sz="1300" b="1" dirty="0">
+              <a:rPr lang="en-US" sz="1220" b="1" dirty="0">
                 <a:solidFill>
                   <a:srgbClr val="0068B7"/>
                 </a:solidFill>
@@ -5717,7 +5719,7 @@
               </a:rPr>
               <a:t>Implementation cue</a:t>
             </a:r>
-            <a:endParaRPr lang="en-US" sz="1300" dirty="0"/>
+            <a:endParaRPr lang="en-US" sz="1220" dirty="0"/>
           </a:p>
         </p:txBody>
       </p:sp>
@@ -5729,8 +5731,8 @@
         </p:nvSpPr>
         <p:spPr>
           <a:xfrm>
-            <a:off x="7799832" y="1801368"/>
-            <a:ext cx="3145536" cy="688543"/>
+            <a:off x="7708392" y="1764792"/>
+            <a:ext cx="3282696" cy="749808"/>
           </a:xfrm>
           <a:prstGeom prst="rect">
             <a:avLst/>
@@ -5748,7 +5750,7 @@
               <a:buNone/>
             </a:pPr>
             <a:r>
-              <a:rPr lang="en-US" sz="1320" dirty="0">
+              <a:rPr lang="en-US" sz="1220" dirty="0">
                 <a:solidFill>
                   <a:srgbClr val="17364A"/>
                 </a:solidFill>
@@ -5756,9 +5758,9 @@
                 <a:ea typeface="Aptos" pitchFamily="34" charset="-122"/>
                 <a:cs typeface="Aptos" pitchFamily="34" charset="-120"/>
               </a:rPr>
-              <a:t>Generative AI, predictive analytics, RAG, automation, and agentic workflows all depend on the controls.</a:t>
-            </a:r>
-            <a:endParaRPr lang="en-US" sz="1320" dirty="0"/>
+              <a:t>Generative AI, predictive analytics, RAG, automation, and agentic workflows all.</a:t>
+            </a:r>
+            <a:endParaRPr lang="en-US" sz="1220" dirty="0"/>
           </a:p>
         </p:txBody>
       </p:sp>
@@ -5770,12 +5772,12 @@
         </p:nvSpPr>
         <p:spPr>
           <a:xfrm>
-            <a:off x="7635240" y="2718511"/>
-            <a:ext cx="3474720" cy="1328623"/>
+            <a:off x="7543800" y="2724912"/>
+            <a:ext cx="3611880" cy="1527048"/>
           </a:xfrm>
           <a:prstGeom prst="roundRect">
             <a:avLst>
-              <a:gd name="adj" fmla="val 8259"/>
+              <a:gd name="adj" fmla="val 7186"/>
             </a:avLst>
           </a:prstGeom>
           <a:solidFill>
@@ -5797,8 +5799,8 @@
         </p:nvSpPr>
         <p:spPr>
           <a:xfrm>
-            <a:off x="7799832" y="2864815"/>
-            <a:ext cx="3145536" cy="256032"/>
+            <a:off x="7708392" y="2852928"/>
+            <a:ext cx="3282696" cy="228600"/>
           </a:xfrm>
           <a:prstGeom prst="rect">
             <a:avLst/>
@@ -5814,7 +5816,7 @@
               <a:buNone/>
             </a:pPr>
             <a:r>
-              <a:rPr lang="en-US" sz="1300" b="1" dirty="0">
+              <a:rPr lang="en-US" sz="1220" b="1" dirty="0">
                 <a:solidFill>
                   <a:srgbClr val="0068B7"/>
                 </a:solidFill>
@@ -5824,7 +5826,7 @@
               </a:rPr>
               <a:t>Concept checkpoints</a:t>
             </a:r>
-            <a:endParaRPr lang="en-US" sz="1300" dirty="0"/>
+            <a:endParaRPr lang="en-US" sz="1220" dirty="0"/>
           </a:p>
         </p:txBody>
       </p:sp>
@@ -5836,8 +5838,8 @@
         </p:nvSpPr>
         <p:spPr>
           <a:xfrm>
-            <a:off x="7818120" y="3230575"/>
-            <a:ext cx="3090672" cy="670255"/>
+            <a:off x="7726680" y="3182112"/>
+            <a:ext cx="3227832" cy="960120"/>
           </a:xfrm>
           <a:prstGeom prst="rect">
             <a:avLst/>
@@ -5855,7 +5857,7 @@
               <a:buNone/>
             </a:pPr>
             <a:r>
-              <a:rPr lang="en-US" sz="1220" dirty="0">
+              <a:rPr lang="en-US" sz="1140" dirty="0">
                 <a:solidFill>
                   <a:srgbClr val="17364A"/>
                 </a:solidFill>
@@ -5863,16 +5865,16 @@
                 <a:ea typeface="Aptos" pitchFamily="34" charset="-122"/>
                 <a:cs typeface="Aptos" pitchFamily="34" charset="-120"/>
               </a:rPr>
-              <a:t>Generative AI, predictive analytics, RAG, automation, and agentic.</a:t>
-            </a:r>
-            <a:endParaRPr lang="en-US" sz="1220" dirty="0"/>
-          </a:p>
-          <a:p>
-            <a:pPr indent="0" marL="0">
-              <a:buNone/>
-            </a:pPr>
-            <a:r>
-              <a:rPr lang="en-US" sz="1220" dirty="0">
+              <a:t>Generative AI, predictive analytics, RAG,.</a:t>
+            </a:r>
+            <a:endParaRPr lang="en-US" sz="1140" dirty="0"/>
+          </a:p>
+          <a:p>
+            <a:pPr indent="0" marL="0">
+              <a:buNone/>
+            </a:pPr>
+            <a:r>
+              <a:rPr lang="en-US" sz="1140" dirty="0">
                 <a:solidFill>
                   <a:srgbClr val="17364A"/>
                 </a:solidFill>
@@ -5880,16 +5882,16 @@
                 <a:ea typeface="Aptos" pitchFamily="34" charset="-122"/>
                 <a:cs typeface="Aptos" pitchFamily="34" charset="-120"/>
               </a:rPr>
-              <a:t>A tool that drafts internal training text may require lighter.</a:t>
-            </a:r>
-            <a:endParaRPr lang="en-US" sz="1220" dirty="0"/>
-          </a:p>
-          <a:p>
-            <a:pPr indent="0" marL="0">
-              <a:buNone/>
-            </a:pPr>
-            <a:r>
-              <a:rPr lang="en-US" sz="1220" dirty="0">
+              <a:t>A tool that drafts internal training text may.</a:t>
+            </a:r>
+            <a:endParaRPr lang="en-US" sz="1140" dirty="0"/>
+          </a:p>
+          <a:p>
+            <a:pPr indent="0" marL="0">
+              <a:buNone/>
+            </a:pPr>
+            <a:r>
+              <a:rPr lang="en-US" sz="1140" dirty="0">
                 <a:solidFill>
                   <a:srgbClr val="17364A"/>
                 </a:solidFill>
@@ -5897,9 +5899,9 @@
                 <a:ea typeface="Aptos" pitchFamily="34" charset="-122"/>
                 <a:cs typeface="Aptos" pitchFamily="34" charset="-120"/>
               </a:rPr>
-              <a:t>The module should be applied during readiness assessment,.</a:t>
-            </a:r>
-            <a:endParaRPr lang="en-US" sz="1220" dirty="0"/>
+              <a:t>The module should be applied during readiness.</a:t>
+            </a:r>
+            <a:endParaRPr lang="en-US" sz="1140" dirty="0"/>
           </a:p>
         </p:txBody>
       </p:sp>
@@ -5911,12 +5913,12 @@
         </p:nvSpPr>
         <p:spPr>
           <a:xfrm>
-            <a:off x="7635240" y="4184294"/>
-            <a:ext cx="3474720" cy="1466698"/>
+            <a:off x="7543800" y="4389120"/>
+            <a:ext cx="3611880" cy="1261872"/>
           </a:xfrm>
           <a:prstGeom prst="roundRect">
             <a:avLst>
-              <a:gd name="adj" fmla="val 7481"/>
+              <a:gd name="adj" fmla="val 8696"/>
             </a:avLst>
           </a:prstGeom>
           <a:solidFill>
@@ -5938,8 +5940,8 @@
         </p:nvSpPr>
         <p:spPr>
           <a:xfrm>
-            <a:off x="7799832" y="4330598"/>
-            <a:ext cx="3145536" cy="256032"/>
+            <a:off x="7708392" y="4517136"/>
+            <a:ext cx="3282696" cy="228600"/>
           </a:xfrm>
           <a:prstGeom prst="rect">
             <a:avLst/>
@@ -5955,7 +5957,7 @@
               <a:buNone/>
             </a:pPr>
             <a:r>
-              <a:rPr lang="en-US" sz="1300" b="1" dirty="0">
+              <a:rPr lang="en-US" sz="1220" b="1" dirty="0">
                 <a:solidFill>
                   <a:srgbClr val="0068B7"/>
                 </a:solidFill>
@@ -5965,7 +5967,7 @@
               </a:rPr>
               <a:t>Next action</a:t>
             </a:r>
-            <a:endParaRPr lang="en-US" sz="1300" dirty="0"/>
+            <a:endParaRPr lang="en-US" sz="1220" dirty="0"/>
           </a:p>
         </p:txBody>
       </p:sp>
@@ -5977,8 +5979,8 @@
         </p:nvSpPr>
         <p:spPr>
           <a:xfrm>
-            <a:off x="7799832" y="4659782"/>
-            <a:ext cx="3145536" cy="899770"/>
+            <a:off x="7708392" y="4828032"/>
+            <a:ext cx="3282696" cy="749808"/>
           </a:xfrm>
           <a:prstGeom prst="rect">
             <a:avLst/>
@@ -5996,7 +5998,7 @@
               <a:buNone/>
             </a:pPr>
             <a:r>
-              <a:rPr lang="en-US" sz="1320" dirty="0">
+              <a:rPr lang="en-US" sz="1220" dirty="0">
                 <a:solidFill>
                   <a:srgbClr val="17364A"/>
                 </a:solidFill>
@@ -6004,9 +6006,9 @@
                 <a:ea typeface="Aptos" pitchFamily="34" charset="-122"/>
                 <a:cs typeface="Aptos" pitchFamily="34" charset="-120"/>
               </a:rPr>
-              <a:t>Use the concept to clarify workflow changes, dependencies, staffing, procurement requirements, training needs, and implementation checkpoints.</a:t>
-            </a:r>
-            <a:endParaRPr lang="en-US" sz="1320" dirty="0"/>
+              <a:t>Use the concept to clarify workflow changes, dependencies, staffing, procurement.</a:t>
+            </a:r>
+            <a:endParaRPr lang="en-US" sz="1220" dirty="0"/>
           </a:p>
         </p:txBody>
       </p:sp>
@@ -6297,8 +6299,8 @@
         </p:nvSpPr>
         <p:spPr>
           <a:xfrm>
-            <a:off x="868680" y="1508760"/>
-            <a:ext cx="6309360" cy="4160520"/>
+            <a:off x="822960" y="1463040"/>
+            <a:ext cx="6565392" cy="4343400"/>
           </a:xfrm>
           <a:prstGeom prst="rect">
             <a:avLst/>
@@ -6316,7 +6318,7 @@
               <a:buNone/>
             </a:pPr>
             <a:r>
-              <a:rPr lang="en-US" sz="2100" dirty="0">
+              <a:rPr lang="en-US" sz="1920" dirty="0">
                 <a:solidFill>
                   <a:srgbClr val="003A63"/>
                 </a:solidFill>
@@ -6324,16 +6326,16 @@
                 <a:ea typeface="Aptos" pitchFamily="34" charset="-122"/>
                 <a:cs typeface="Aptos" pitchFamily="34" charset="-120"/>
               </a:rPr>
-              <a:t>• Where does this topic appear in one current or proposed AI workflow in your agency?</a:t>
-            </a:r>
-            <a:endParaRPr lang="en-US" sz="2100" dirty="0"/>
-          </a:p>
-          <a:p>
-            <a:pPr indent="0" marL="0">
-              <a:buNone/>
-            </a:pPr>
-            <a:r>
-              <a:rPr lang="en-US" sz="2100" dirty="0">
+              <a:t>• Where does this topic appear in one current or proposed AI workflow in your.</a:t>
+            </a:r>
+            <a:endParaRPr lang="en-US" sz="1920" dirty="0"/>
+          </a:p>
+          <a:p>
+            <a:pPr indent="0" marL="0">
+              <a:buNone/>
+            </a:pPr>
+            <a:r>
+              <a:rPr lang="en-US" sz="1920" dirty="0">
                 <a:solidFill>
                   <a:srgbClr val="003A63"/>
                 </a:solidFill>
@@ -6341,16 +6343,16 @@
                 <a:ea typeface="Aptos" pitchFamily="34" charset="-122"/>
                 <a:cs typeface="Aptos" pitchFamily="34" charset="-120"/>
               </a:rPr>
-              <a:t>• What decisions, data sources, users, or partners would be affected if this area is poorly.</a:t>
-            </a:r>
-            <a:endParaRPr lang="en-US" sz="2100" dirty="0"/>
-          </a:p>
-          <a:p>
-            <a:pPr indent="0" marL="0">
-              <a:buNone/>
-            </a:pPr>
-            <a:r>
-              <a:rPr lang="en-US" sz="2100" dirty="0">
+              <a:t>• What decisions, data sources, users, or partners would be affected if this.</a:t>
+            </a:r>
+            <a:endParaRPr lang="en-US" sz="1920" dirty="0"/>
+          </a:p>
+          <a:p>
+            <a:pPr indent="0" marL="0">
+              <a:buNone/>
+            </a:pPr>
+            <a:r>
+              <a:rPr lang="en-US" sz="1920" dirty="0">
                 <a:solidFill>
                   <a:srgbClr val="003A63"/>
                 </a:solidFill>
@@ -6360,7 +6362,7 @@
               </a:rPr>
               <a:t>• What evidence would governance reviewers need before approving the workflow?</a:t>
             </a:r>
-            <a:endParaRPr lang="en-US" sz="2100" dirty="0"/>
+            <a:endParaRPr lang="en-US" sz="1920" dirty="0"/>
           </a:p>
         </p:txBody>
       </p:sp>
@@ -6372,12 +6374,12 @@
         </p:nvSpPr>
         <p:spPr>
           <a:xfrm>
-            <a:off x="7635240" y="1325880"/>
-            <a:ext cx="3474720" cy="1207008"/>
+            <a:off x="7543800" y="1325880"/>
+            <a:ext cx="3611880" cy="1261872"/>
           </a:xfrm>
           <a:prstGeom prst="roundRect">
             <a:avLst>
-              <a:gd name="adj" fmla="val 9091"/>
+              <a:gd name="adj" fmla="val 8696"/>
             </a:avLst>
           </a:prstGeom>
           <a:solidFill>
@@ -6399,8 +6401,8 @@
         </p:nvSpPr>
         <p:spPr>
           <a:xfrm>
-            <a:off x="7799832" y="1472184"/>
-            <a:ext cx="3145536" cy="256032"/>
+            <a:off x="7708392" y="1453896"/>
+            <a:ext cx="3282696" cy="228600"/>
           </a:xfrm>
           <a:prstGeom prst="rect">
             <a:avLst/>
@@ -6416,7 +6418,7 @@
               <a:buNone/>
             </a:pPr>
             <a:r>
-              <a:rPr lang="en-US" sz="1300" b="1" dirty="0">
+              <a:rPr lang="en-US" sz="1220" b="1" dirty="0">
                 <a:solidFill>
                   <a:srgbClr val="0068B7"/>
                 </a:solidFill>
@@ -6426,7 +6428,7 @@
               </a:rPr>
               <a:t>Implementation cue</a:t>
             </a:r>
-            <a:endParaRPr lang="en-US" sz="1300" dirty="0"/>
+            <a:endParaRPr lang="en-US" sz="1220" dirty="0"/>
           </a:p>
         </p:txBody>
       </p:sp>
@@ -6438,8 +6440,8 @@
         </p:nvSpPr>
         <p:spPr>
           <a:xfrm>
-            <a:off x="7799832" y="1801368"/>
-            <a:ext cx="3145536" cy="640080"/>
+            <a:off x="7708392" y="1764792"/>
+            <a:ext cx="3282696" cy="749808"/>
           </a:xfrm>
           <a:prstGeom prst="rect">
             <a:avLst/>
@@ -6457,7 +6459,7 @@
               <a:buNone/>
             </a:pPr>
             <a:r>
-              <a:rPr lang="en-US" sz="1320" dirty="0">
+              <a:rPr lang="en-US" sz="1220" dirty="0">
                 <a:solidFill>
                   <a:srgbClr val="17364A"/>
                 </a:solidFill>
@@ -6465,9 +6467,9 @@
                 <a:ea typeface="Aptos" pitchFamily="34" charset="-122"/>
                 <a:cs typeface="Aptos" pitchFamily="34" charset="-120"/>
               </a:rPr>
-              <a:t>Where does this topic appear in one current or proposed AI workflow in your agency?</a:t>
-            </a:r>
-            <a:endParaRPr lang="en-US" sz="1320" dirty="0"/>
+              <a:t>Where does this topic appear in one current or proposed AI workflow in your.</a:t>
+            </a:r>
+            <a:endParaRPr lang="en-US" sz="1220" dirty="0"/>
           </a:p>
         </p:txBody>
       </p:sp>
@@ -6479,12 +6481,12 @@
         </p:nvSpPr>
         <p:spPr>
           <a:xfrm>
-            <a:off x="7635240" y="2670048"/>
-            <a:ext cx="3474720" cy="1377086"/>
+            <a:off x="7543800" y="2724912"/>
+            <a:ext cx="3611880" cy="1527048"/>
           </a:xfrm>
           <a:prstGeom prst="roundRect">
             <a:avLst>
-              <a:gd name="adj" fmla="val 7968"/>
+              <a:gd name="adj" fmla="val 7186"/>
             </a:avLst>
           </a:prstGeom>
           <a:solidFill>
@@ -6506,8 +6508,8 @@
         </p:nvSpPr>
         <p:spPr>
           <a:xfrm>
-            <a:off x="7799832" y="2816352"/>
-            <a:ext cx="3145536" cy="256032"/>
+            <a:off x="7708392" y="2852928"/>
+            <a:ext cx="3282696" cy="228600"/>
           </a:xfrm>
           <a:prstGeom prst="rect">
             <a:avLst/>
@@ -6523,7 +6525,7 @@
               <a:buNone/>
             </a:pPr>
             <a:r>
-              <a:rPr lang="en-US" sz="1300" b="1" dirty="0">
+              <a:rPr lang="en-US" sz="1220" b="1" dirty="0">
                 <a:solidFill>
                   <a:srgbClr val="0068B7"/>
                 </a:solidFill>
@@ -6533,7 +6535,7 @@
               </a:rPr>
               <a:t>Concept checkpoints</a:t>
             </a:r>
-            <a:endParaRPr lang="en-US" sz="1300" dirty="0"/>
+            <a:endParaRPr lang="en-US" sz="1220" dirty="0"/>
           </a:p>
         </p:txBody>
       </p:sp>
@@ -6545,8 +6547,8 @@
         </p:nvSpPr>
         <p:spPr>
           <a:xfrm>
-            <a:off x="7818120" y="3182112"/>
-            <a:ext cx="3090672" cy="718718"/>
+            <a:off x="7726680" y="3182112"/>
+            <a:ext cx="3227832" cy="960120"/>
           </a:xfrm>
           <a:prstGeom prst="rect">
             <a:avLst/>
@@ -6564,7 +6566,7 @@
               <a:buNone/>
             </a:pPr>
             <a:r>
-              <a:rPr lang="en-US" sz="1220" dirty="0">
+              <a:rPr lang="en-US" sz="1140" dirty="0">
                 <a:solidFill>
                   <a:srgbClr val="17364A"/>
                 </a:solidFill>
@@ -6572,16 +6574,16 @@
                 <a:ea typeface="Aptos" pitchFamily="34" charset="-122"/>
                 <a:cs typeface="Aptos" pitchFamily="34" charset="-120"/>
               </a:rPr>
-              <a:t>Where does this topic appear in one current or proposed AI.</a:t>
-            </a:r>
-            <a:endParaRPr lang="en-US" sz="1220" dirty="0"/>
-          </a:p>
-          <a:p>
-            <a:pPr indent="0" marL="0">
-              <a:buNone/>
-            </a:pPr>
-            <a:r>
-              <a:rPr lang="en-US" sz="1220" dirty="0">
+              <a:t>Where does this topic appear in one current or.</a:t>
+            </a:r>
+            <a:endParaRPr lang="en-US" sz="1140" dirty="0"/>
+          </a:p>
+          <a:p>
+            <a:pPr indent="0" marL="0">
+              <a:buNone/>
+            </a:pPr>
+            <a:r>
+              <a:rPr lang="en-US" sz="1140" dirty="0">
                 <a:solidFill>
                   <a:srgbClr val="17364A"/>
                 </a:solidFill>
@@ -6589,16 +6591,16 @@
                 <a:ea typeface="Aptos" pitchFamily="34" charset="-122"/>
                 <a:cs typeface="Aptos" pitchFamily="34" charset="-120"/>
               </a:rPr>
-              <a:t>What decisions, data sources, users, or partners would be affected.</a:t>
-            </a:r>
-            <a:endParaRPr lang="en-US" sz="1220" dirty="0"/>
-          </a:p>
-          <a:p>
-            <a:pPr indent="0" marL="0">
-              <a:buNone/>
-            </a:pPr>
-            <a:r>
-              <a:rPr lang="en-US" sz="1220" dirty="0">
+              <a:t>What decisions, data sources, users, or partners.</a:t>
+            </a:r>
+            <a:endParaRPr lang="en-US" sz="1140" dirty="0"/>
+          </a:p>
+          <a:p>
+            <a:pPr indent="0" marL="0">
+              <a:buNone/>
+            </a:pPr>
+            <a:r>
+              <a:rPr lang="en-US" sz="1140" dirty="0">
                 <a:solidFill>
                   <a:srgbClr val="17364A"/>
                 </a:solidFill>
@@ -6606,9 +6608,9 @@
                 <a:ea typeface="Aptos" pitchFamily="34" charset="-122"/>
                 <a:cs typeface="Aptos" pitchFamily="34" charset="-120"/>
               </a:rPr>
-              <a:t>What evidence would governance reviewers need before approving the.</a:t>
-            </a:r>
-            <a:endParaRPr lang="en-US" sz="1220" dirty="0"/>
+              <a:t>What evidence would governance reviewers need.</a:t>
+            </a:r>
+            <a:endParaRPr lang="en-US" sz="1140" dirty="0"/>
           </a:p>
         </p:txBody>
       </p:sp>
@@ -6620,12 +6622,12 @@
         </p:nvSpPr>
         <p:spPr>
           <a:xfrm>
-            <a:off x="7635240" y="4184294"/>
-            <a:ext cx="3474720" cy="1466698"/>
+            <a:off x="7543800" y="4389120"/>
+            <a:ext cx="3611880" cy="1261872"/>
           </a:xfrm>
           <a:prstGeom prst="roundRect">
             <a:avLst>
-              <a:gd name="adj" fmla="val 7481"/>
+              <a:gd name="adj" fmla="val 8696"/>
             </a:avLst>
           </a:prstGeom>
           <a:solidFill>
@@ -6647,8 +6649,8 @@
         </p:nvSpPr>
         <p:spPr>
           <a:xfrm>
-            <a:off x="7799832" y="4330598"/>
-            <a:ext cx="3145536" cy="256032"/>
+            <a:off x="7708392" y="4517136"/>
+            <a:ext cx="3282696" cy="228600"/>
           </a:xfrm>
           <a:prstGeom prst="rect">
             <a:avLst/>
@@ -6664,7 +6666,7 @@
               <a:buNone/>
             </a:pPr>
             <a:r>
-              <a:rPr lang="en-US" sz="1300" b="1" dirty="0">
+              <a:rPr lang="en-US" sz="1220" b="1" dirty="0">
                 <a:solidFill>
                   <a:srgbClr val="0068B7"/>
                 </a:solidFill>
@@ -6674,7 +6676,7 @@
               </a:rPr>
               <a:t>Next action</a:t>
             </a:r>
-            <a:endParaRPr lang="en-US" sz="1300" dirty="0"/>
+            <a:endParaRPr lang="en-US" sz="1220" dirty="0"/>
           </a:p>
         </p:txBody>
       </p:sp>
@@ -6686,8 +6688,8 @@
         </p:nvSpPr>
         <p:spPr>
           <a:xfrm>
-            <a:off x="7799832" y="4659782"/>
-            <a:ext cx="3145536" cy="899770"/>
+            <a:off x="7708392" y="4828032"/>
+            <a:ext cx="3282696" cy="749808"/>
           </a:xfrm>
           <a:prstGeom prst="rect">
             <a:avLst/>
@@ -6705,7 +6707,7 @@
               <a:buNone/>
             </a:pPr>
             <a:r>
-              <a:rPr lang="en-US" sz="1320" dirty="0">
+              <a:rPr lang="en-US" sz="1220" dirty="0">
                 <a:solidFill>
                   <a:srgbClr val="17364A"/>
                 </a:solidFill>
@@ -6713,9 +6715,9 @@
                 <a:ea typeface="Aptos" pitchFamily="34" charset="-122"/>
                 <a:cs typeface="Aptos" pitchFamily="34" charset="-120"/>
               </a:rPr>
-              <a:t>Use the concept to clarify workflow changes, dependencies, staffing, procurement requirements, training needs, and implementation checkpoints.</a:t>
-            </a:r>
-            <a:endParaRPr lang="en-US" sz="1320" dirty="0"/>
+              <a:t>Use the concept to clarify workflow changes, dependencies, staffing, procurement.</a:t>
+            </a:r>
+            <a:endParaRPr lang="en-US" sz="1220" dirty="0"/>
           </a:p>
         </p:txBody>
       </p:sp>
@@ -7006,8 +7008,8 @@
         </p:nvSpPr>
         <p:spPr>
           <a:xfrm>
-            <a:off x="868680" y="1508760"/>
-            <a:ext cx="6309360" cy="4160520"/>
+            <a:off x="822960" y="1463040"/>
+            <a:ext cx="6565392" cy="4343400"/>
           </a:xfrm>
           <a:prstGeom prst="rect">
             <a:avLst/>
@@ -7025,7 +7027,7 @@
               <a:buNone/>
             </a:pPr>
             <a:r>
-              <a:rPr lang="en-US" sz="2100" dirty="0">
+              <a:rPr lang="en-US" sz="1920" dirty="0">
                 <a:solidFill>
                   <a:srgbClr val="003A63"/>
                 </a:solidFill>
@@ -7035,14 +7037,14 @@
               </a:rPr>
               <a:t>• Which safeguards should be required before pilot testing?</a:t>
             </a:r>
-            <a:endParaRPr lang="en-US" sz="2100" dirty="0"/>
-          </a:p>
-          <a:p>
-            <a:pPr indent="0" marL="0">
-              <a:buNone/>
-            </a:pPr>
-            <a:r>
-              <a:rPr lang="en-US" sz="2100" dirty="0">
+            <a:endParaRPr lang="en-US" sz="1920" dirty="0"/>
+          </a:p>
+          <a:p>
+            <a:pPr indent="0" marL="0">
+              <a:buNone/>
+            </a:pPr>
+            <a:r>
+              <a:rPr lang="en-US" sz="1920" dirty="0">
                 <a:solidFill>
                   <a:srgbClr val="003A63"/>
                 </a:solidFill>
@@ -7052,7 +7054,7 @@
               </a:rPr>
               <a:t>• Who owns ongoing monitoring and review?</a:t>
             </a:r>
-            <a:endParaRPr lang="en-US" sz="2100" dirty="0"/>
+            <a:endParaRPr lang="en-US" sz="1920" dirty="0"/>
           </a:p>
         </p:txBody>
       </p:sp>
@@ -7064,12 +7066,12 @@
         </p:nvSpPr>
         <p:spPr>
           <a:xfrm>
-            <a:off x="7635240" y="1325880"/>
-            <a:ext cx="3474720" cy="1207008"/>
+            <a:off x="7543800" y="1325880"/>
+            <a:ext cx="3611880" cy="1261872"/>
           </a:xfrm>
           <a:prstGeom prst="roundRect">
             <a:avLst>
-              <a:gd name="adj" fmla="val 9091"/>
+              <a:gd name="adj" fmla="val 8696"/>
             </a:avLst>
           </a:prstGeom>
           <a:solidFill>
@@ -7091,8 +7093,8 @@
         </p:nvSpPr>
         <p:spPr>
           <a:xfrm>
-            <a:off x="7799832" y="1472184"/>
-            <a:ext cx="3145536" cy="256032"/>
+            <a:off x="7708392" y="1453896"/>
+            <a:ext cx="3282696" cy="228600"/>
           </a:xfrm>
           <a:prstGeom prst="rect">
             <a:avLst/>
@@ -7108,7 +7110,7 @@
               <a:buNone/>
             </a:pPr>
             <a:r>
-              <a:rPr lang="en-US" sz="1300" b="1" dirty="0">
+              <a:rPr lang="en-US" sz="1220" b="1" dirty="0">
                 <a:solidFill>
                   <a:srgbClr val="0068B7"/>
                 </a:solidFill>
@@ -7118,7 +7120,7 @@
               </a:rPr>
               <a:t>Implementation cue</a:t>
             </a:r>
-            <a:endParaRPr lang="en-US" sz="1300" dirty="0"/>
+            <a:endParaRPr lang="en-US" sz="1220" dirty="0"/>
           </a:p>
         </p:txBody>
       </p:sp>
@@ -7130,8 +7132,8 @@
         </p:nvSpPr>
         <p:spPr>
           <a:xfrm>
-            <a:off x="7799832" y="1801368"/>
-            <a:ext cx="3145536" cy="640080"/>
+            <a:off x="7708392" y="1764792"/>
+            <a:ext cx="3282696" cy="749808"/>
           </a:xfrm>
           <a:prstGeom prst="rect">
             <a:avLst/>
@@ -7149,7 +7151,7 @@
               <a:buNone/>
             </a:pPr>
             <a:r>
-              <a:rPr lang="en-US" sz="1320" dirty="0">
+              <a:rPr lang="en-US" sz="1220" dirty="0">
                 <a:solidFill>
                   <a:srgbClr val="17364A"/>
                 </a:solidFill>
@@ -7159,7 +7161,7 @@
               </a:rPr>
               <a:t>Which safeguards should be required before pilot testing?</a:t>
             </a:r>
-            <a:endParaRPr lang="en-US" sz="1320" dirty="0"/>
+            <a:endParaRPr lang="en-US" sz="1220" dirty="0"/>
           </a:p>
         </p:txBody>
       </p:sp>
@@ -7171,12 +7173,12 @@
         </p:nvSpPr>
         <p:spPr>
           <a:xfrm>
-            <a:off x="7635240" y="2670048"/>
-            <a:ext cx="3474720" cy="1377086"/>
+            <a:off x="7543800" y="2724912"/>
+            <a:ext cx="3611880" cy="1527048"/>
           </a:xfrm>
           <a:prstGeom prst="roundRect">
             <a:avLst>
-              <a:gd name="adj" fmla="val 7968"/>
+              <a:gd name="adj" fmla="val 7186"/>
             </a:avLst>
           </a:prstGeom>
           <a:solidFill>
@@ -7198,8 +7200,8 @@
         </p:nvSpPr>
         <p:spPr>
           <a:xfrm>
-            <a:off x="7799832" y="2816352"/>
-            <a:ext cx="3145536" cy="256032"/>
+            <a:off x="7708392" y="2852928"/>
+            <a:ext cx="3282696" cy="228600"/>
           </a:xfrm>
           <a:prstGeom prst="rect">
             <a:avLst/>
@@ -7215,7 +7217,7 @@
               <a:buNone/>
             </a:pPr>
             <a:r>
-              <a:rPr lang="en-US" sz="1300" b="1" dirty="0">
+              <a:rPr lang="en-US" sz="1220" b="1" dirty="0">
                 <a:solidFill>
                   <a:srgbClr val="0068B7"/>
                 </a:solidFill>
@@ -7225,7 +7227,7 @@
               </a:rPr>
               <a:t>Concept checkpoints</a:t>
             </a:r>
-            <a:endParaRPr lang="en-US" sz="1300" dirty="0"/>
+            <a:endParaRPr lang="en-US" sz="1220" dirty="0"/>
           </a:p>
         </p:txBody>
       </p:sp>
@@ -7237,8 +7239,8 @@
         </p:nvSpPr>
         <p:spPr>
           <a:xfrm>
-            <a:off x="7818120" y="3182112"/>
-            <a:ext cx="3090672" cy="718718"/>
+            <a:off x="7726680" y="3182112"/>
+            <a:ext cx="3227832" cy="960120"/>
           </a:xfrm>
           <a:prstGeom prst="rect">
             <a:avLst/>
@@ -7256,7 +7258,7 @@
               <a:buNone/>
             </a:pPr>
             <a:r>
-              <a:rPr lang="en-US" sz="1220" dirty="0">
+              <a:rPr lang="en-US" sz="1140" dirty="0">
                 <a:solidFill>
                   <a:srgbClr val="17364A"/>
                 </a:solidFill>
@@ -7264,16 +7266,16 @@
                 <a:ea typeface="Aptos" pitchFamily="34" charset="-122"/>
                 <a:cs typeface="Aptos" pitchFamily="34" charset="-120"/>
               </a:rPr>
-              <a:t>Which safeguards should be required before pilot testing?</a:t>
-            </a:r>
-            <a:endParaRPr lang="en-US" sz="1220" dirty="0"/>
-          </a:p>
-          <a:p>
-            <a:pPr indent="0" marL="0">
-              <a:buNone/>
-            </a:pPr>
-            <a:r>
-              <a:rPr lang="en-US" sz="1220" dirty="0">
+              <a:t>Which safeguards should be required before pilot.</a:t>
+            </a:r>
+            <a:endParaRPr lang="en-US" sz="1140" dirty="0"/>
+          </a:p>
+          <a:p>
+            <a:pPr indent="0" marL="0">
+              <a:buNone/>
+            </a:pPr>
+            <a:r>
+              <a:rPr lang="en-US" sz="1140" dirty="0">
                 <a:solidFill>
                   <a:srgbClr val="17364A"/>
                 </a:solidFill>
@@ -7283,7 +7285,7 @@
               </a:rPr>
               <a:t>Who owns ongoing monitoring and review?</a:t>
             </a:r>
-            <a:endParaRPr lang="en-US" sz="1220" dirty="0"/>
+            <a:endParaRPr lang="en-US" sz="1140" dirty="0"/>
           </a:p>
         </p:txBody>
       </p:sp>
@@ -7295,12 +7297,12 @@
         </p:nvSpPr>
         <p:spPr>
           <a:xfrm>
-            <a:off x="7635240" y="4184294"/>
-            <a:ext cx="3474720" cy="1466698"/>
+            <a:off x="7543800" y="4389120"/>
+            <a:ext cx="3611880" cy="1261872"/>
           </a:xfrm>
           <a:prstGeom prst="roundRect">
             <a:avLst>
-              <a:gd name="adj" fmla="val 7481"/>
+              <a:gd name="adj" fmla="val 8696"/>
             </a:avLst>
           </a:prstGeom>
           <a:solidFill>
@@ -7322,8 +7324,8 @@
         </p:nvSpPr>
         <p:spPr>
           <a:xfrm>
-            <a:off x="7799832" y="4330598"/>
-            <a:ext cx="3145536" cy="256032"/>
+            <a:off x="7708392" y="4517136"/>
+            <a:ext cx="3282696" cy="228600"/>
           </a:xfrm>
           <a:prstGeom prst="rect">
             <a:avLst/>
@@ -7339,7 +7341,7 @@
               <a:buNone/>
             </a:pPr>
             <a:r>
-              <a:rPr lang="en-US" sz="1300" b="1" dirty="0">
+              <a:rPr lang="en-US" sz="1220" b="1" dirty="0">
                 <a:solidFill>
                   <a:srgbClr val="0068B7"/>
                 </a:solidFill>
@@ -7349,7 +7351,7 @@
               </a:rPr>
               <a:t>Next action</a:t>
             </a:r>
-            <a:endParaRPr lang="en-US" sz="1300" dirty="0"/>
+            <a:endParaRPr lang="en-US" sz="1220" dirty="0"/>
           </a:p>
         </p:txBody>
       </p:sp>
@@ -7361,8 +7363,8 @@
         </p:nvSpPr>
         <p:spPr>
           <a:xfrm>
-            <a:off x="7799832" y="4659782"/>
-            <a:ext cx="3145536" cy="899770"/>
+            <a:off x="7708392" y="4828032"/>
+            <a:ext cx="3282696" cy="749808"/>
           </a:xfrm>
           <a:prstGeom prst="rect">
             <a:avLst/>
@@ -7380,7 +7382,7 @@
               <a:buNone/>
             </a:pPr>
             <a:r>
-              <a:rPr lang="en-US" sz="1320" dirty="0">
+              <a:rPr lang="en-US" sz="1220" dirty="0">
                 <a:solidFill>
                   <a:srgbClr val="17364A"/>
                 </a:solidFill>
@@ -7388,9 +7390,9 @@
                 <a:ea typeface="Aptos" pitchFamily="34" charset="-122"/>
                 <a:cs typeface="Aptos" pitchFamily="34" charset="-120"/>
               </a:rPr>
-              <a:t>Use the concept to clarify workflow changes, dependencies, staffing, procurement requirements, training needs, and implementation checkpoints.</a:t>
-            </a:r>
-            <a:endParaRPr lang="en-US" sz="1320" dirty="0"/>
+              <a:t>Use the concept to clarify workflow changes, dependencies, staffing, procurement.</a:t>
+            </a:r>
+            <a:endParaRPr lang="en-US" sz="1220" dirty="0"/>
           </a:p>
         </p:txBody>
       </p:sp>
@@ -7681,8 +7683,8 @@
         </p:nvSpPr>
         <p:spPr>
           <a:xfrm>
-            <a:off x="868680" y="1508760"/>
-            <a:ext cx="6309360" cy="4160520"/>
+            <a:off x="822960" y="1463040"/>
+            <a:ext cx="6565392" cy="4343400"/>
           </a:xfrm>
           <a:prstGeom prst="rect">
             <a:avLst/>
@@ -7700,7 +7702,7 @@
               <a:buNone/>
             </a:pPr>
             <a:r>
-              <a:rPr lang="en-US" sz="2100" dirty="0">
+              <a:rPr lang="en-US" sz="1920" dirty="0">
                 <a:solidFill>
                   <a:srgbClr val="003A63"/>
                 </a:solidFill>
@@ -7708,16 +7710,16 @@
                 <a:ea typeface="Aptos" pitchFamily="34" charset="-122"/>
                 <a:cs typeface="Aptos" pitchFamily="34" charset="-120"/>
               </a:rPr>
-              <a:t>• Create a workflow usability test plan for one real or realistic public health AI workflow.</a:t>
-            </a:r>
-            <a:endParaRPr lang="en-US" sz="2100" dirty="0"/>
-          </a:p>
-          <a:p>
-            <a:pPr indent="0" marL="0">
-              <a:buNone/>
-            </a:pPr>
-            <a:r>
-              <a:rPr lang="en-US" sz="2100" dirty="0">
+              <a:t>• Create a workflow usability test plan for one real or realistic public.</a:t>
+            </a:r>
+            <a:endParaRPr lang="en-US" sz="1920" dirty="0"/>
+          </a:p>
+          <a:p>
+            <a:pPr indent="0" marL="0">
+              <a:buNone/>
+            </a:pPr>
+            <a:r>
+              <a:rPr lang="en-US" sz="1920" dirty="0">
                 <a:solidFill>
                   <a:srgbClr val="003A63"/>
                 </a:solidFill>
@@ -7725,16 +7727,16 @@
                 <a:ea typeface="Aptos" pitchFamily="34" charset="-122"/>
                 <a:cs typeface="Aptos" pitchFamily="34" charset="-120"/>
               </a:rPr>
-              <a:t>• The artifact should describe the use case, affected users, data sources, system dependencies,.</a:t>
-            </a:r>
-            <a:endParaRPr lang="en-US" sz="2100" dirty="0"/>
-          </a:p>
-          <a:p>
-            <a:pPr indent="0" marL="0">
-              <a:buNone/>
-            </a:pPr>
-            <a:r>
-              <a:rPr lang="en-US" sz="2100" dirty="0">
+              <a:t>• The artifact should describe the use case, affected users, data sources,.</a:t>
+            </a:r>
+            <a:endParaRPr lang="en-US" sz="1920" dirty="0"/>
+          </a:p>
+          <a:p>
+            <a:pPr indent="0" marL="0">
+              <a:buNone/>
+            </a:pPr>
+            <a:r>
+              <a:rPr lang="en-US" sz="1920" dirty="0">
                 <a:solidFill>
                   <a:srgbClr val="003A63"/>
                 </a:solidFill>
@@ -7742,9 +7744,9 @@
                 <a:ea typeface="Aptos" pitchFamily="34" charset="-122"/>
                 <a:cs typeface="Aptos" pitchFamily="34" charset="-120"/>
               </a:rPr>
-              <a:t>• The exercise should produce a work product that could be used in a governance meeting,.</a:t>
-            </a:r>
-            <a:endParaRPr lang="en-US" sz="2100" dirty="0"/>
+              <a:t>• The exercise should produce a work product that could be used in a.</a:t>
+            </a:r>
+            <a:endParaRPr lang="en-US" sz="1920" dirty="0"/>
           </a:p>
         </p:txBody>
       </p:sp>
@@ -7756,12 +7758,12 @@
         </p:nvSpPr>
         <p:spPr>
           <a:xfrm>
-            <a:off x="7635240" y="1325880"/>
-            <a:ext cx="3474720" cy="1207008"/>
+            <a:off x="7543800" y="1325880"/>
+            <a:ext cx="3611880" cy="1261872"/>
           </a:xfrm>
           <a:prstGeom prst="roundRect">
             <a:avLst>
-              <a:gd name="adj" fmla="val 9091"/>
+              <a:gd name="adj" fmla="val 8696"/>
             </a:avLst>
           </a:prstGeom>
           <a:solidFill>
@@ -7783,8 +7785,8 @@
         </p:nvSpPr>
         <p:spPr>
           <a:xfrm>
-            <a:off x="7799832" y="1472184"/>
-            <a:ext cx="3145536" cy="256032"/>
+            <a:off x="7708392" y="1453896"/>
+            <a:ext cx="3282696" cy="228600"/>
           </a:xfrm>
           <a:prstGeom prst="rect">
             <a:avLst/>
@@ -7800,7 +7802,7 @@
               <a:buNone/>
             </a:pPr>
             <a:r>
-              <a:rPr lang="en-US" sz="1300" b="1" dirty="0">
+              <a:rPr lang="en-US" sz="1220" b="1" dirty="0">
                 <a:solidFill>
                   <a:srgbClr val="0068B7"/>
                 </a:solidFill>
@@ -7810,7 +7812,7 @@
               </a:rPr>
               <a:t>Implementation cue</a:t>
             </a:r>
-            <a:endParaRPr lang="en-US" sz="1300" dirty="0"/>
+            <a:endParaRPr lang="en-US" sz="1220" dirty="0"/>
           </a:p>
         </p:txBody>
       </p:sp>
@@ -7822,8 +7824,8 @@
         </p:nvSpPr>
         <p:spPr>
           <a:xfrm>
-            <a:off x="7799832" y="1801368"/>
-            <a:ext cx="3145536" cy="640080"/>
+            <a:off x="7708392" y="1764792"/>
+            <a:ext cx="3282696" cy="749808"/>
           </a:xfrm>
           <a:prstGeom prst="rect">
             <a:avLst/>
@@ -7841,7 +7843,7 @@
               <a:buNone/>
             </a:pPr>
             <a:r>
-              <a:rPr lang="en-US" sz="1320" dirty="0">
+              <a:rPr lang="en-US" sz="1220" dirty="0">
                 <a:solidFill>
                   <a:srgbClr val="17364A"/>
                 </a:solidFill>
@@ -7851,7 +7853,7 @@
               </a:rPr>
               <a:t>Create a workflow usability test plan for one real or realistic public health AI.</a:t>
             </a:r>
-            <a:endParaRPr lang="en-US" sz="1320" dirty="0"/>
+            <a:endParaRPr lang="en-US" sz="1220" dirty="0"/>
           </a:p>
         </p:txBody>
       </p:sp>
@@ -7863,12 +7865,12 @@
         </p:nvSpPr>
         <p:spPr>
           <a:xfrm>
-            <a:off x="7635240" y="2670048"/>
-            <a:ext cx="3474720" cy="1377086"/>
+            <a:off x="7543800" y="2724912"/>
+            <a:ext cx="3611880" cy="1527048"/>
           </a:xfrm>
           <a:prstGeom prst="roundRect">
             <a:avLst>
-              <a:gd name="adj" fmla="val 7968"/>
+              <a:gd name="adj" fmla="val 7186"/>
             </a:avLst>
           </a:prstGeom>
           <a:solidFill>
@@ -7890,8 +7892,8 @@
         </p:nvSpPr>
         <p:spPr>
           <a:xfrm>
-            <a:off x="7799832" y="2816352"/>
-            <a:ext cx="3145536" cy="256032"/>
+            <a:off x="7708392" y="2852928"/>
+            <a:ext cx="3282696" cy="228600"/>
           </a:xfrm>
           <a:prstGeom prst="rect">
             <a:avLst/>
@@ -7907,7 +7909,7 @@
               <a:buNone/>
             </a:pPr>
             <a:r>
-              <a:rPr lang="en-US" sz="1300" b="1" dirty="0">
+              <a:rPr lang="en-US" sz="1220" b="1" dirty="0">
                 <a:solidFill>
                   <a:srgbClr val="0068B7"/>
                 </a:solidFill>
@@ -7917,7 +7919,7 @@
               </a:rPr>
               <a:t>Concept checkpoints</a:t>
             </a:r>
-            <a:endParaRPr lang="en-US" sz="1300" dirty="0"/>
+            <a:endParaRPr lang="en-US" sz="1220" dirty="0"/>
           </a:p>
         </p:txBody>
       </p:sp>
@@ -7929,8 +7931,8 @@
         </p:nvSpPr>
         <p:spPr>
           <a:xfrm>
-            <a:off x="7818120" y="3182112"/>
-            <a:ext cx="3090672" cy="718718"/>
+            <a:off x="7726680" y="3182112"/>
+            <a:ext cx="3227832" cy="960120"/>
           </a:xfrm>
           <a:prstGeom prst="rect">
             <a:avLst/>
@@ -7948,7 +7950,7 @@
               <a:buNone/>
             </a:pPr>
             <a:r>
-              <a:rPr lang="en-US" sz="1220" dirty="0">
+              <a:rPr lang="en-US" sz="1140" dirty="0">
                 <a:solidFill>
                   <a:srgbClr val="17364A"/>
                 </a:solidFill>
@@ -7956,16 +7958,16 @@
                 <a:ea typeface="Aptos" pitchFamily="34" charset="-122"/>
                 <a:cs typeface="Aptos" pitchFamily="34" charset="-120"/>
               </a:rPr>
-              <a:t>The artifact should describe the use case, affected users, data.</a:t>
-            </a:r>
-            <a:endParaRPr lang="en-US" sz="1220" dirty="0"/>
-          </a:p>
-          <a:p>
-            <a:pPr indent="0" marL="0">
-              <a:buNone/>
-            </a:pPr>
-            <a:r>
-              <a:rPr lang="en-US" sz="1220" dirty="0">
+              <a:t>The artifact should describe the use case,.</a:t>
+            </a:r>
+            <a:endParaRPr lang="en-US" sz="1140" dirty="0"/>
+          </a:p>
+          <a:p>
+            <a:pPr indent="0" marL="0">
+              <a:buNone/>
+            </a:pPr>
+            <a:r>
+              <a:rPr lang="en-US" sz="1140" dirty="0">
                 <a:solidFill>
                   <a:srgbClr val="17364A"/>
                 </a:solidFill>
@@ -7973,16 +7975,16 @@
                 <a:ea typeface="Aptos" pitchFamily="34" charset="-122"/>
                 <a:cs typeface="Aptos" pitchFamily="34" charset="-120"/>
               </a:rPr>
-              <a:t>The exercise should produce a work product that could be used in a.</a:t>
-            </a:r>
-            <a:endParaRPr lang="en-US" sz="1220" dirty="0"/>
-          </a:p>
-          <a:p>
-            <a:pPr indent="0" marL="0">
-              <a:buNone/>
-            </a:pPr>
-            <a:r>
-              <a:rPr lang="en-US" sz="1220" dirty="0">
+              <a:t>The exercise should produce a work product that.</a:t>
+            </a:r>
+            <a:endParaRPr lang="en-US" sz="1140" dirty="0"/>
+          </a:p>
+          <a:p>
+            <a:pPr indent="0" marL="0">
+              <a:buNone/>
+            </a:pPr>
+            <a:r>
+              <a:rPr lang="en-US" sz="1140" dirty="0">
                 <a:solidFill>
                   <a:srgbClr val="17364A"/>
                 </a:solidFill>
@@ -7990,9 +7992,9 @@
                 <a:ea typeface="Aptos" pitchFamily="34" charset="-122"/>
                 <a:cs typeface="Aptos" pitchFamily="34" charset="-120"/>
               </a:rPr>
-              <a:t>Learners should document assumptions and identify which staff or.</a:t>
-            </a:r>
-            <a:endParaRPr lang="en-US" sz="1220" dirty="0"/>
+              <a:t>Learners should document assumptions and identify.</a:t>
+            </a:r>
+            <a:endParaRPr lang="en-US" sz="1140" dirty="0"/>
           </a:p>
         </p:txBody>
       </p:sp>
@@ -8004,12 +8006,12 @@
         </p:nvSpPr>
         <p:spPr>
           <a:xfrm>
-            <a:off x="7635240" y="4184294"/>
-            <a:ext cx="3474720" cy="1466698"/>
+            <a:off x="7543800" y="4389120"/>
+            <a:ext cx="3611880" cy="1261872"/>
           </a:xfrm>
           <a:prstGeom prst="roundRect">
             <a:avLst>
-              <a:gd name="adj" fmla="val 7481"/>
+              <a:gd name="adj" fmla="val 8696"/>
             </a:avLst>
           </a:prstGeom>
           <a:solidFill>
@@ -8031,8 +8033,8 @@
         </p:nvSpPr>
         <p:spPr>
           <a:xfrm>
-            <a:off x="7799832" y="4330598"/>
-            <a:ext cx="3145536" cy="256032"/>
+            <a:off x="7708392" y="4517136"/>
+            <a:ext cx="3282696" cy="228600"/>
           </a:xfrm>
           <a:prstGeom prst="rect">
             <a:avLst/>
@@ -8048,7 +8050,7 @@
               <a:buNone/>
             </a:pPr>
             <a:r>
-              <a:rPr lang="en-US" sz="1300" b="1" dirty="0">
+              <a:rPr lang="en-US" sz="1220" b="1" dirty="0">
                 <a:solidFill>
                   <a:srgbClr val="0068B7"/>
                 </a:solidFill>
@@ -8058,7 +8060,7 @@
               </a:rPr>
               <a:t>Next action</a:t>
             </a:r>
-            <a:endParaRPr lang="en-US" sz="1300" dirty="0"/>
+            <a:endParaRPr lang="en-US" sz="1220" dirty="0"/>
           </a:p>
         </p:txBody>
       </p:sp>
@@ -8070,8 +8072,8 @@
         </p:nvSpPr>
         <p:spPr>
           <a:xfrm>
-            <a:off x="7799832" y="4659782"/>
-            <a:ext cx="3145536" cy="899770"/>
+            <a:off x="7708392" y="4828032"/>
+            <a:ext cx="3282696" cy="749808"/>
           </a:xfrm>
           <a:prstGeom prst="rect">
             <a:avLst/>
@@ -8089,7 +8091,7 @@
               <a:buNone/>
             </a:pPr>
             <a:r>
-              <a:rPr lang="en-US" sz="1320" dirty="0">
+              <a:rPr lang="en-US" sz="1220" dirty="0">
                 <a:solidFill>
                   <a:srgbClr val="17364A"/>
                 </a:solidFill>
@@ -8097,9 +8099,9 @@
                 <a:ea typeface="Aptos" pitchFamily="34" charset="-122"/>
                 <a:cs typeface="Aptos" pitchFamily="34" charset="-120"/>
               </a:rPr>
-              <a:t>Use the assignment to test whether you can explain the concept, apply it to a realistic public health situation, and identify what would need review before the work moves forward.</a:t>
-            </a:r>
-            <a:endParaRPr lang="en-US" sz="1320" dirty="0"/>
+              <a:t>Use the assignment to test whether you can explain the concept, apply it to a.</a:t>
+            </a:r>
+            <a:endParaRPr lang="en-US" sz="1220" dirty="0"/>
           </a:p>
         </p:txBody>
       </p:sp>
@@ -8390,8 +8392,8 @@
         </p:nvSpPr>
         <p:spPr>
           <a:xfrm>
-            <a:off x="868680" y="1508760"/>
-            <a:ext cx="6309360" cy="4160520"/>
+            <a:off x="822960" y="1463040"/>
+            <a:ext cx="6565392" cy="4343400"/>
           </a:xfrm>
           <a:prstGeom prst="rect">
             <a:avLst/>
@@ -8409,7 +8411,7 @@
               <a:buNone/>
             </a:pPr>
             <a:r>
-              <a:rPr lang="en-US" sz="2100" dirty="0">
+              <a:rPr lang="en-US" sz="1920" dirty="0">
                 <a:solidFill>
                   <a:srgbClr val="003A63"/>
                 </a:solidFill>
@@ -8419,14 +8421,14 @@
               </a:rPr>
               <a:t>• The expected artifact is a completed workflow usability test plan.</a:t>
             </a:r>
-            <a:endParaRPr lang="en-US" sz="2100" dirty="0"/>
-          </a:p>
-          <a:p>
-            <a:pPr indent="0" marL="0">
-              <a:buNone/>
-            </a:pPr>
-            <a:r>
-              <a:rPr lang="en-US" sz="2100" dirty="0">
+            <a:endParaRPr lang="en-US" sz="1920" dirty="0"/>
+          </a:p>
+          <a:p>
+            <a:pPr indent="0" marL="0">
+              <a:buNone/>
+            </a:pPr>
+            <a:r>
+              <a:rPr lang="en-US" sz="1920" dirty="0">
                 <a:solidFill>
                   <a:srgbClr val="003A63"/>
                 </a:solidFill>
@@ -8434,9 +8436,9 @@
                 <a:ea typeface="Aptos" pitchFamily="34" charset="-122"/>
                 <a:cs typeface="Aptos" pitchFamily="34" charset="-120"/>
               </a:rPr>
-              <a:t>• It should be specific to a public health workflow and should include technical dependencies,.</a:t>
-            </a:r>
-            <a:endParaRPr lang="en-US" sz="2100" dirty="0"/>
+              <a:t>• It should be specific to a public health workflow and should include.</a:t>
+            </a:r>
+            <a:endParaRPr lang="en-US" sz="1920" dirty="0"/>
           </a:p>
         </p:txBody>
       </p:sp>
@@ -8448,12 +8450,12 @@
         </p:nvSpPr>
         <p:spPr>
           <a:xfrm>
-            <a:off x="7635240" y="1325880"/>
-            <a:ext cx="3474720" cy="1207008"/>
+            <a:off x="7543800" y="1325880"/>
+            <a:ext cx="3611880" cy="1261872"/>
           </a:xfrm>
           <a:prstGeom prst="roundRect">
             <a:avLst>
-              <a:gd name="adj" fmla="val 9091"/>
+              <a:gd name="adj" fmla="val 8696"/>
             </a:avLst>
           </a:prstGeom>
           <a:solidFill>
@@ -8475,8 +8477,8 @@
         </p:nvSpPr>
         <p:spPr>
           <a:xfrm>
-            <a:off x="7799832" y="1472184"/>
-            <a:ext cx="3145536" cy="256032"/>
+            <a:off x="7708392" y="1453896"/>
+            <a:ext cx="3282696" cy="228600"/>
           </a:xfrm>
           <a:prstGeom prst="rect">
             <a:avLst/>
@@ -8492,7 +8494,7 @@
               <a:buNone/>
             </a:pPr>
             <a:r>
-              <a:rPr lang="en-US" sz="1300" b="1" dirty="0">
+              <a:rPr lang="en-US" sz="1220" b="1" dirty="0">
                 <a:solidFill>
                   <a:srgbClr val="0068B7"/>
                 </a:solidFill>
@@ -8502,7 +8504,7 @@
               </a:rPr>
               <a:t>Implementation cue</a:t>
             </a:r>
-            <a:endParaRPr lang="en-US" sz="1300" dirty="0"/>
+            <a:endParaRPr lang="en-US" sz="1220" dirty="0"/>
           </a:p>
         </p:txBody>
       </p:sp>
@@ -8514,8 +8516,8 @@
         </p:nvSpPr>
         <p:spPr>
           <a:xfrm>
-            <a:off x="7799832" y="1801368"/>
-            <a:ext cx="3145536" cy="640080"/>
+            <a:off x="7708392" y="1764792"/>
+            <a:ext cx="3282696" cy="749808"/>
           </a:xfrm>
           <a:prstGeom prst="rect">
             <a:avLst/>
@@ -8533,7 +8535,7 @@
               <a:buNone/>
             </a:pPr>
             <a:r>
-              <a:rPr lang="en-US" sz="1320" dirty="0">
+              <a:rPr lang="en-US" sz="1220" dirty="0">
                 <a:solidFill>
                   <a:srgbClr val="17364A"/>
                 </a:solidFill>
@@ -8543,7 +8545,7 @@
               </a:rPr>
               <a:t>The expected artifact is a completed workflow usability test plan.</a:t>
             </a:r>
-            <a:endParaRPr lang="en-US" sz="1320" dirty="0"/>
+            <a:endParaRPr lang="en-US" sz="1220" dirty="0"/>
           </a:p>
         </p:txBody>
       </p:sp>
@@ -8555,12 +8557,12 @@
         </p:nvSpPr>
         <p:spPr>
           <a:xfrm>
-            <a:off x="7635240" y="2670048"/>
-            <a:ext cx="3474720" cy="1377086"/>
+            <a:off x="7543800" y="2724912"/>
+            <a:ext cx="3611880" cy="1527048"/>
           </a:xfrm>
           <a:prstGeom prst="roundRect">
             <a:avLst>
-              <a:gd name="adj" fmla="val 7968"/>
+              <a:gd name="adj" fmla="val 7186"/>
             </a:avLst>
           </a:prstGeom>
           <a:solidFill>
@@ -8582,8 +8584,8 @@
         </p:nvSpPr>
         <p:spPr>
           <a:xfrm>
-            <a:off x="7799832" y="2816352"/>
-            <a:ext cx="3145536" cy="256032"/>
+            <a:off x="7708392" y="2852928"/>
+            <a:ext cx="3282696" cy="228600"/>
           </a:xfrm>
           <a:prstGeom prst="rect">
             <a:avLst/>
@@ -8599,7 +8601,7 @@
               <a:buNone/>
             </a:pPr>
             <a:r>
-              <a:rPr lang="en-US" sz="1300" b="1" dirty="0">
+              <a:rPr lang="en-US" sz="1220" b="1" dirty="0">
                 <a:solidFill>
                   <a:srgbClr val="0068B7"/>
                 </a:solidFill>
@@ -8609,7 +8611,7 @@
               </a:rPr>
               <a:t>Concept checkpoints</a:t>
             </a:r>
-            <a:endParaRPr lang="en-US" sz="1300" dirty="0"/>
+            <a:endParaRPr lang="en-US" sz="1220" dirty="0"/>
           </a:p>
         </p:txBody>
       </p:sp>
@@ -8621,8 +8623,8 @@
         </p:nvSpPr>
         <p:spPr>
           <a:xfrm>
-            <a:off x="7818120" y="3182112"/>
-            <a:ext cx="3090672" cy="718718"/>
+            <a:off x="7726680" y="3182112"/>
+            <a:ext cx="3227832" cy="960120"/>
           </a:xfrm>
           <a:prstGeom prst="rect">
             <a:avLst/>
@@ -8640,7 +8642,7 @@
               <a:buNone/>
             </a:pPr>
             <a:r>
-              <a:rPr lang="en-US" sz="1220" dirty="0">
+              <a:rPr lang="en-US" sz="1140" dirty="0">
                 <a:solidFill>
                   <a:srgbClr val="17364A"/>
                 </a:solidFill>
@@ -8648,16 +8650,16 @@
                 <a:ea typeface="Aptos" pitchFamily="34" charset="-122"/>
                 <a:cs typeface="Aptos" pitchFamily="34" charset="-120"/>
               </a:rPr>
-              <a:t>The expected artifact is a completed workflow usability test plan.</a:t>
-            </a:r>
-            <a:endParaRPr lang="en-US" sz="1220" dirty="0"/>
-          </a:p>
-          <a:p>
-            <a:pPr indent="0" marL="0">
-              <a:buNone/>
-            </a:pPr>
-            <a:r>
-              <a:rPr lang="en-US" sz="1220" dirty="0">
+              <a:t>The expected artifact is a completed workflow.</a:t>
+            </a:r>
+            <a:endParaRPr lang="en-US" sz="1140" dirty="0"/>
+          </a:p>
+          <a:p>
+            <a:pPr indent="0" marL="0">
+              <a:buNone/>
+            </a:pPr>
+            <a:r>
+              <a:rPr lang="en-US" sz="1140" dirty="0">
                 <a:solidFill>
                   <a:srgbClr val="17364A"/>
                 </a:solidFill>
@@ -8665,9 +8667,9 @@
                 <a:ea typeface="Aptos" pitchFamily="34" charset="-122"/>
                 <a:cs typeface="Aptos" pitchFamily="34" charset="-120"/>
               </a:rPr>
-              <a:t>It should be specific to a public health workflow and should.</a:t>
-            </a:r>
-            <a:endParaRPr lang="en-US" sz="1220" dirty="0"/>
+              <a:t>It should be specific to a public health workflow.</a:t>
+            </a:r>
+            <a:endParaRPr lang="en-US" sz="1140" dirty="0"/>
           </a:p>
         </p:txBody>
       </p:sp>
@@ -8679,12 +8681,12 @@
         </p:nvSpPr>
         <p:spPr>
           <a:xfrm>
-            <a:off x="7635240" y="4184294"/>
-            <a:ext cx="3474720" cy="1466698"/>
+            <a:off x="7543800" y="4389120"/>
+            <a:ext cx="3611880" cy="1261872"/>
           </a:xfrm>
           <a:prstGeom prst="roundRect">
             <a:avLst>
-              <a:gd name="adj" fmla="val 7481"/>
+              <a:gd name="adj" fmla="val 8696"/>
             </a:avLst>
           </a:prstGeom>
           <a:solidFill>
@@ -8706,8 +8708,8 @@
         </p:nvSpPr>
         <p:spPr>
           <a:xfrm>
-            <a:off x="7799832" y="4330598"/>
-            <a:ext cx="3145536" cy="256032"/>
+            <a:off x="7708392" y="4517136"/>
+            <a:ext cx="3282696" cy="228600"/>
           </a:xfrm>
           <a:prstGeom prst="rect">
             <a:avLst/>
@@ -8723,7 +8725,7 @@
               <a:buNone/>
             </a:pPr>
             <a:r>
-              <a:rPr lang="en-US" sz="1300" b="1" dirty="0">
+              <a:rPr lang="en-US" sz="1220" b="1" dirty="0">
                 <a:solidFill>
                   <a:srgbClr val="0068B7"/>
                 </a:solidFill>
@@ -8733,7 +8735,7 @@
               </a:rPr>
               <a:t>Next action</a:t>
             </a:r>
-            <a:endParaRPr lang="en-US" sz="1300" dirty="0"/>
+            <a:endParaRPr lang="en-US" sz="1220" dirty="0"/>
           </a:p>
         </p:txBody>
       </p:sp>
@@ -8745,8 +8747,8 @@
         </p:nvSpPr>
         <p:spPr>
           <a:xfrm>
-            <a:off x="7799832" y="4659782"/>
-            <a:ext cx="3145536" cy="899770"/>
+            <a:off x="7708392" y="4828032"/>
+            <a:ext cx="3282696" cy="749808"/>
           </a:xfrm>
           <a:prstGeom prst="rect">
             <a:avLst/>
@@ -8764,7 +8766,7 @@
               <a:buNone/>
             </a:pPr>
             <a:r>
-              <a:rPr lang="en-US" sz="1320" dirty="0">
+              <a:rPr lang="en-US" sz="1220" dirty="0">
                 <a:solidFill>
                   <a:srgbClr val="17364A"/>
                 </a:solidFill>
@@ -8772,9 +8774,9 @@
                 <a:ea typeface="Aptos" pitchFamily="34" charset="-122"/>
                 <a:cs typeface="Aptos" pitchFamily="34" charset="-120"/>
               </a:rPr>
-              <a:t>Use the concept to clarify workflow changes, dependencies, staffing, procurement requirements, training needs, and implementation checkpoints.</a:t>
-            </a:r>
-            <a:endParaRPr lang="en-US" sz="1320" dirty="0"/>
+              <a:t>Use the concept to clarify workflow changes, dependencies, staffing, procurement.</a:t>
+            </a:r>
+            <a:endParaRPr lang="en-US" sz="1220" dirty="0"/>
           </a:p>
         </p:txBody>
       </p:sp>
@@ -9065,8 +9067,8 @@
         </p:nvSpPr>
         <p:spPr>
           <a:xfrm>
-            <a:off x="868680" y="1508760"/>
-            <a:ext cx="6309360" cy="4160520"/>
+            <a:off x="822960" y="1463040"/>
+            <a:ext cx="6565392" cy="4343400"/>
           </a:xfrm>
           <a:prstGeom prst="rect">
             <a:avLst/>
@@ -9084,7 +9086,7 @@
               <a:buNone/>
             </a:pPr>
             <a:r>
-              <a:rPr lang="en-US" sz="2100" dirty="0">
+              <a:rPr lang="en-US" sz="1920" dirty="0">
                 <a:solidFill>
                   <a:srgbClr val="003A63"/>
                 </a:solidFill>
@@ -9092,9 +9094,9 @@
                 <a:ea typeface="Aptos" pitchFamily="34" charset="-122"/>
                 <a:cs typeface="Aptos" pitchFamily="34" charset="-120"/>
               </a:rPr>
-              <a:t>• The expected artifact is a completed workflow usability test plan. It should be specific to a.</a:t>
-            </a:r>
-            <a:endParaRPr lang="en-US" sz="2100" dirty="0"/>
+              <a:t>• The expected artifact is a completed workflow usability test plan. It should.</a:t>
+            </a:r>
+            <a:endParaRPr lang="en-US" sz="1920" dirty="0"/>
           </a:p>
         </p:txBody>
       </p:sp>
@@ -9106,12 +9108,12 @@
         </p:nvSpPr>
         <p:spPr>
           <a:xfrm>
-            <a:off x="7635240" y="1325880"/>
-            <a:ext cx="3474720" cy="1255471"/>
+            <a:off x="7543800" y="1325880"/>
+            <a:ext cx="3611880" cy="1261872"/>
           </a:xfrm>
           <a:prstGeom prst="roundRect">
             <a:avLst>
-              <a:gd name="adj" fmla="val 8740"/>
+              <a:gd name="adj" fmla="val 8696"/>
             </a:avLst>
           </a:prstGeom>
           <a:solidFill>
@@ -9133,8 +9135,8 @@
         </p:nvSpPr>
         <p:spPr>
           <a:xfrm>
-            <a:off x="7799832" y="1472184"/>
-            <a:ext cx="3145536" cy="256032"/>
+            <a:off x="7708392" y="1453896"/>
+            <a:ext cx="3282696" cy="228600"/>
           </a:xfrm>
           <a:prstGeom prst="rect">
             <a:avLst/>
@@ -9150,7 +9152,7 @@
               <a:buNone/>
             </a:pPr>
             <a:r>
-              <a:rPr lang="en-US" sz="1300" b="1" dirty="0">
+              <a:rPr lang="en-US" sz="1220" b="1" dirty="0">
                 <a:solidFill>
                   <a:srgbClr val="0068B7"/>
                 </a:solidFill>
@@ -9160,7 +9162,7 @@
               </a:rPr>
               <a:t>Implementation cue</a:t>
             </a:r>
-            <a:endParaRPr lang="en-US" sz="1300" dirty="0"/>
+            <a:endParaRPr lang="en-US" sz="1220" dirty="0"/>
           </a:p>
         </p:txBody>
       </p:sp>
@@ -9172,8 +9174,8 @@
         </p:nvSpPr>
         <p:spPr>
           <a:xfrm>
-            <a:off x="7799832" y="1801368"/>
-            <a:ext cx="3145536" cy="688543"/>
+            <a:off x="7708392" y="1764792"/>
+            <a:ext cx="3282696" cy="749808"/>
           </a:xfrm>
           <a:prstGeom prst="rect">
             <a:avLst/>
@@ -9191,7 +9193,7 @@
               <a:buNone/>
             </a:pPr>
             <a:r>
-              <a:rPr lang="en-US" sz="1320" dirty="0">
+              <a:rPr lang="en-US" sz="1220" dirty="0">
                 <a:solidFill>
                   <a:srgbClr val="17364A"/>
                 </a:solidFill>
@@ -9199,9 +9201,9 @@
                 <a:ea typeface="Aptos" pitchFamily="34" charset="-122"/>
                 <a:cs typeface="Aptos" pitchFamily="34" charset="-120"/>
               </a:rPr>
-              <a:t>The expected artifact is a completed workflow usability test plan. It should be specific to a public.</a:t>
-            </a:r>
-            <a:endParaRPr lang="en-US" sz="1320" dirty="0"/>
+              <a:t>The expected artifact is a completed workflow usability test plan. It should be.</a:t>
+            </a:r>
+            <a:endParaRPr lang="en-US" sz="1220" dirty="0"/>
           </a:p>
         </p:txBody>
       </p:sp>
@@ -9213,12 +9215,12 @@
         </p:nvSpPr>
         <p:spPr>
           <a:xfrm>
-            <a:off x="7635240" y="2718511"/>
-            <a:ext cx="3474720" cy="1328623"/>
+            <a:off x="7543800" y="2724912"/>
+            <a:ext cx="3611880" cy="1527048"/>
           </a:xfrm>
           <a:prstGeom prst="roundRect">
             <a:avLst>
-              <a:gd name="adj" fmla="val 8259"/>
+              <a:gd name="adj" fmla="val 7186"/>
             </a:avLst>
           </a:prstGeom>
           <a:solidFill>
@@ -9240,8 +9242,8 @@
         </p:nvSpPr>
         <p:spPr>
           <a:xfrm>
-            <a:off x="7799832" y="2864815"/>
-            <a:ext cx="3145536" cy="256032"/>
+            <a:off x="7708392" y="2852928"/>
+            <a:ext cx="3282696" cy="228600"/>
           </a:xfrm>
           <a:prstGeom prst="rect">
             <a:avLst/>
@@ -9257,7 +9259,7 @@
               <a:buNone/>
             </a:pPr>
             <a:r>
-              <a:rPr lang="en-US" sz="1300" b="1" dirty="0">
+              <a:rPr lang="en-US" sz="1220" b="1" dirty="0">
                 <a:solidFill>
                   <a:srgbClr val="0068B7"/>
                 </a:solidFill>
@@ -9267,7 +9269,7 @@
               </a:rPr>
               <a:t>Concept checkpoints</a:t>
             </a:r>
-            <a:endParaRPr lang="en-US" sz="1300" dirty="0"/>
+            <a:endParaRPr lang="en-US" sz="1220" dirty="0"/>
           </a:p>
         </p:txBody>
       </p:sp>
@@ -9279,8 +9281,8 @@
         </p:nvSpPr>
         <p:spPr>
           <a:xfrm>
-            <a:off x="7818120" y="3230575"/>
-            <a:ext cx="3090672" cy="670255"/>
+            <a:off x="7726680" y="3182112"/>
+            <a:ext cx="3227832" cy="960120"/>
           </a:xfrm>
           <a:prstGeom prst="rect">
             <a:avLst/>
@@ -9298,7 +9300,7 @@
               <a:buNone/>
             </a:pPr>
             <a:r>
-              <a:rPr lang="en-US" sz="1220" dirty="0">
+              <a:rPr lang="en-US" sz="1140" dirty="0">
                 <a:solidFill>
                   <a:srgbClr val="17364A"/>
                 </a:solidFill>
@@ -9306,16 +9308,16 @@
                 <a:ea typeface="Aptos" pitchFamily="34" charset="-122"/>
                 <a:cs typeface="Aptos" pitchFamily="34" charset="-120"/>
               </a:rPr>
-              <a:t>The expected artifact is a completed workflow usability test plan.</a:t>
-            </a:r>
-            <a:endParaRPr lang="en-US" sz="1220" dirty="0"/>
-          </a:p>
-          <a:p>
-            <a:pPr indent="0" marL="0">
-              <a:buNone/>
-            </a:pPr>
-            <a:r>
-              <a:rPr lang="en-US" sz="1220" dirty="0">
+              <a:t>The expected artifact is a completed workflow.</a:t>
+            </a:r>
+            <a:endParaRPr lang="en-US" sz="1140" dirty="0"/>
+          </a:p>
+          <a:p>
+            <a:pPr indent="0" marL="0">
+              <a:buNone/>
+            </a:pPr>
+            <a:r>
+              <a:rPr lang="en-US" sz="1140" dirty="0">
                 <a:solidFill>
                   <a:srgbClr val="17364A"/>
                 </a:solidFill>
@@ -9323,9 +9325,9 @@
                 <a:ea typeface="Aptos" pitchFamily="34" charset="-122"/>
                 <a:cs typeface="Aptos" pitchFamily="34" charset="-120"/>
               </a:rPr>
-              <a:t>It should be specific to a public health workflow and should.</a:t>
-            </a:r>
-            <a:endParaRPr lang="en-US" sz="1220" dirty="0"/>
+              <a:t>It should be specific to a public health workflow.</a:t>
+            </a:r>
+            <a:endParaRPr lang="en-US" sz="1140" dirty="0"/>
           </a:p>
         </p:txBody>
       </p:sp>
@@ -9337,12 +9339,12 @@
         </p:nvSpPr>
         <p:spPr>
           <a:xfrm>
-            <a:off x="7635240" y="4184294"/>
-            <a:ext cx="3474720" cy="1466698"/>
+            <a:off x="7543800" y="4389120"/>
+            <a:ext cx="3611880" cy="1261872"/>
           </a:xfrm>
           <a:prstGeom prst="roundRect">
             <a:avLst>
-              <a:gd name="adj" fmla="val 7481"/>
+              <a:gd name="adj" fmla="val 8696"/>
             </a:avLst>
           </a:prstGeom>
           <a:solidFill>
@@ -9364,8 +9366,8 @@
         </p:nvSpPr>
         <p:spPr>
           <a:xfrm>
-            <a:off x="7799832" y="4330598"/>
-            <a:ext cx="3145536" cy="256032"/>
+            <a:off x="7708392" y="4517136"/>
+            <a:ext cx="3282696" cy="228600"/>
           </a:xfrm>
           <a:prstGeom prst="rect">
             <a:avLst/>
@@ -9381,7 +9383,7 @@
               <a:buNone/>
             </a:pPr>
             <a:r>
-              <a:rPr lang="en-US" sz="1300" b="1" dirty="0">
+              <a:rPr lang="en-US" sz="1220" b="1" dirty="0">
                 <a:solidFill>
                   <a:srgbClr val="0068B7"/>
                 </a:solidFill>
@@ -9391,7 +9393,7 @@
               </a:rPr>
               <a:t>Next action</a:t>
             </a:r>
-            <a:endParaRPr lang="en-US" sz="1300" dirty="0"/>
+            <a:endParaRPr lang="en-US" sz="1220" dirty="0"/>
           </a:p>
         </p:txBody>
       </p:sp>
@@ -9403,8 +9405,8 @@
         </p:nvSpPr>
         <p:spPr>
           <a:xfrm>
-            <a:off x="7799832" y="4659782"/>
-            <a:ext cx="3145536" cy="899770"/>
+            <a:off x="7708392" y="4828032"/>
+            <a:ext cx="3282696" cy="749808"/>
           </a:xfrm>
           <a:prstGeom prst="rect">
             <a:avLst/>
@@ -9422,7 +9424,7 @@
               <a:buNone/>
             </a:pPr>
             <a:r>
-              <a:rPr lang="en-US" sz="1320" dirty="0">
+              <a:rPr lang="en-US" sz="1220" dirty="0">
                 <a:solidFill>
                   <a:srgbClr val="17364A"/>
                 </a:solidFill>
@@ -9430,9 +9432,9 @@
                 <a:ea typeface="Aptos" pitchFamily="34" charset="-122"/>
                 <a:cs typeface="Aptos" pitchFamily="34" charset="-120"/>
               </a:rPr>
-              <a:t>Use the assignment to test whether you can explain the concept, apply it to a realistic public health situation, and identify what would need review before the work moves forward.</a:t>
-            </a:r>
-            <a:endParaRPr lang="en-US" sz="1320" dirty="0"/>
+              <a:t>Use the assignment to test whether you can explain the concept, apply it to a.</a:t>
+            </a:r>
+            <a:endParaRPr lang="en-US" sz="1220" dirty="0"/>
           </a:p>
         </p:txBody>
       </p:sp>
@@ -9723,8 +9725,8 @@
         </p:nvSpPr>
         <p:spPr>
           <a:xfrm>
-            <a:off x="868680" y="1508760"/>
-            <a:ext cx="6309360" cy="4160520"/>
+            <a:off x="822960" y="1463040"/>
+            <a:ext cx="6565392" cy="4343400"/>
           </a:xfrm>
           <a:prstGeom prst="rect">
             <a:avLst/>
@@ -9742,7 +9744,7 @@
               <a:buNone/>
             </a:pPr>
             <a:r>
-              <a:rPr lang="en-US" sz="2100" dirty="0">
+              <a:rPr lang="en-US" sz="1920" dirty="0">
                 <a:solidFill>
                   <a:srgbClr val="003A63"/>
                 </a:solidFill>
@@ -9750,16 +9752,16 @@
                 <a:ea typeface="Aptos" pitchFamily="34" charset="-122"/>
                 <a:cs typeface="Aptos" pitchFamily="34" charset="-120"/>
               </a:rPr>
-              <a:t>• 1. What is the best reason to address human factors, workflow integration, and usability.</a:t>
-            </a:r>
-            <a:endParaRPr lang="en-US" sz="2100" dirty="0"/>
-          </a:p>
-          <a:p>
-            <a:pPr indent="0" marL="0">
-              <a:buNone/>
-            </a:pPr>
-            <a:r>
-              <a:rPr lang="en-US" sz="2100" dirty="0">
+              <a:t>• 1. What is the best reason to address human factors, workflow integration,.</a:t>
+            </a:r>
+            <a:endParaRPr lang="en-US" sz="1920" dirty="0"/>
+          </a:p>
+          <a:p>
+            <a:pPr indent="0" marL="0">
+              <a:buNone/>
+            </a:pPr>
+            <a:r>
+              <a:rPr lang="en-US" sz="1920" dirty="0">
                 <a:solidFill>
                   <a:srgbClr val="003A63"/>
                 </a:solidFill>
@@ -9769,14 +9771,14 @@
               </a:rPr>
               <a:t>• 2. Which practice best supports responsible implementation?</a:t>
             </a:r>
-            <a:endParaRPr lang="en-US" sz="2100" dirty="0"/>
-          </a:p>
-          <a:p>
-            <a:pPr indent="0" marL="0">
-              <a:buNone/>
-            </a:pPr>
-            <a:r>
-              <a:rPr lang="en-US" sz="2100" dirty="0">
+            <a:endParaRPr lang="en-US" sz="1920" dirty="0"/>
+          </a:p>
+          <a:p>
+            <a:pPr indent="0" marL="0">
+              <a:buNone/>
+            </a:pPr>
+            <a:r>
+              <a:rPr lang="en-US" sz="1920" dirty="0">
                 <a:solidFill>
                   <a:srgbClr val="003A63"/>
                 </a:solidFill>
@@ -9786,7 +9788,7 @@
               </a:rPr>
               <a:t>• 3. Which statement best describes a common failure mode?</a:t>
             </a:r>
-            <a:endParaRPr lang="en-US" sz="2100" dirty="0"/>
+            <a:endParaRPr lang="en-US" sz="1920" dirty="0"/>
           </a:p>
         </p:txBody>
       </p:sp>
@@ -9798,12 +9800,12 @@
         </p:nvSpPr>
         <p:spPr>
           <a:xfrm>
-            <a:off x="7635240" y="1325880"/>
-            <a:ext cx="3474720" cy="1255471"/>
+            <a:off x="7543800" y="1325880"/>
+            <a:ext cx="3611880" cy="1261872"/>
           </a:xfrm>
           <a:prstGeom prst="roundRect">
             <a:avLst>
-              <a:gd name="adj" fmla="val 8740"/>
+              <a:gd name="adj" fmla="val 8696"/>
             </a:avLst>
           </a:prstGeom>
           <a:solidFill>
@@ -9825,8 +9827,8 @@
         </p:nvSpPr>
         <p:spPr>
           <a:xfrm>
-            <a:off x="7799832" y="1472184"/>
-            <a:ext cx="3145536" cy="256032"/>
+            <a:off x="7708392" y="1453896"/>
+            <a:ext cx="3282696" cy="228600"/>
           </a:xfrm>
           <a:prstGeom prst="rect">
             <a:avLst/>
@@ -9842,7 +9844,7 @@
               <a:buNone/>
             </a:pPr>
             <a:r>
-              <a:rPr lang="en-US" sz="1300" b="1" dirty="0">
+              <a:rPr lang="en-US" sz="1220" b="1" dirty="0">
                 <a:solidFill>
                   <a:srgbClr val="0068B7"/>
                 </a:solidFill>
@@ -9852,7 +9854,7 @@
               </a:rPr>
               <a:t>Implementation cue</a:t>
             </a:r>
-            <a:endParaRPr lang="en-US" sz="1300" dirty="0"/>
+            <a:endParaRPr lang="en-US" sz="1220" dirty="0"/>
           </a:p>
         </p:txBody>
       </p:sp>
@@ -9864,8 +9866,8 @@
         </p:nvSpPr>
         <p:spPr>
           <a:xfrm>
-            <a:off x="7799832" y="1801368"/>
-            <a:ext cx="3145536" cy="688543"/>
+            <a:off x="7708392" y="1764792"/>
+            <a:ext cx="3282696" cy="749808"/>
           </a:xfrm>
           <a:prstGeom prst="rect">
             <a:avLst/>
@@ -9883,7 +9885,7 @@
               <a:buNone/>
             </a:pPr>
             <a:r>
-              <a:rPr lang="en-US" sz="1320" dirty="0">
+              <a:rPr lang="en-US" sz="1220" dirty="0">
                 <a:solidFill>
                   <a:srgbClr val="17364A"/>
                 </a:solidFill>
@@ -9891,9 +9893,9 @@
                 <a:ea typeface="Aptos" pitchFamily="34" charset="-122"/>
                 <a:cs typeface="Aptos" pitchFamily="34" charset="-120"/>
               </a:rPr>
-              <a:t>1. What is the best reason to address human factors, workflow integration, and usability testing before.</a:t>
-            </a:r>
-            <a:endParaRPr lang="en-US" sz="1320" dirty="0"/>
+              <a:t>1. What is the best reason to address human factors, workflow integration, and.</a:t>
+            </a:r>
+            <a:endParaRPr lang="en-US" sz="1220" dirty="0"/>
           </a:p>
         </p:txBody>
       </p:sp>
@@ -9905,12 +9907,12 @@
         </p:nvSpPr>
         <p:spPr>
           <a:xfrm>
-            <a:off x="7635240" y="2718511"/>
-            <a:ext cx="3474720" cy="1328623"/>
+            <a:off x="7543800" y="2724912"/>
+            <a:ext cx="3611880" cy="1527048"/>
           </a:xfrm>
           <a:prstGeom prst="roundRect">
             <a:avLst>
-              <a:gd name="adj" fmla="val 8259"/>
+              <a:gd name="adj" fmla="val 7186"/>
             </a:avLst>
           </a:prstGeom>
           <a:solidFill>
@@ -9932,8 +9934,8 @@
         </p:nvSpPr>
         <p:spPr>
           <a:xfrm>
-            <a:off x="7799832" y="2864815"/>
-            <a:ext cx="3145536" cy="256032"/>
+            <a:off x="7708392" y="2852928"/>
+            <a:ext cx="3282696" cy="228600"/>
           </a:xfrm>
           <a:prstGeom prst="rect">
             <a:avLst/>
@@ -9949,7 +9951,7 @@
               <a:buNone/>
             </a:pPr>
             <a:r>
-              <a:rPr lang="en-US" sz="1300" b="1" dirty="0">
+              <a:rPr lang="en-US" sz="1220" b="1" dirty="0">
                 <a:solidFill>
                   <a:srgbClr val="0068B7"/>
                 </a:solidFill>
@@ -9959,7 +9961,7 @@
               </a:rPr>
               <a:t>Concept checkpoints</a:t>
             </a:r>
-            <a:endParaRPr lang="en-US" sz="1300" dirty="0"/>
+            <a:endParaRPr lang="en-US" sz="1220" dirty="0"/>
           </a:p>
         </p:txBody>
       </p:sp>
@@ -9971,8 +9973,8 @@
         </p:nvSpPr>
         <p:spPr>
           <a:xfrm>
-            <a:off x="7818120" y="3230575"/>
-            <a:ext cx="3090672" cy="670255"/>
+            <a:off x="7726680" y="3182112"/>
+            <a:ext cx="3227832" cy="960120"/>
           </a:xfrm>
           <a:prstGeom prst="rect">
             <a:avLst/>
@@ -9990,7 +9992,7 @@
               <a:buNone/>
             </a:pPr>
             <a:r>
-              <a:rPr lang="en-US" sz="1220" dirty="0">
+              <a:rPr lang="en-US" sz="1140" dirty="0">
                 <a:solidFill>
                   <a:srgbClr val="17364A"/>
                 </a:solidFill>
@@ -10000,14 +10002,14 @@
               </a:rPr>
               <a:t>1.</a:t>
             </a:r>
-            <a:endParaRPr lang="en-US" sz="1220" dirty="0"/>
-          </a:p>
-          <a:p>
-            <a:pPr indent="0" marL="0">
-              <a:buNone/>
-            </a:pPr>
-            <a:r>
-              <a:rPr lang="en-US" sz="1220" dirty="0">
+            <a:endParaRPr lang="en-US" sz="1140" dirty="0"/>
+          </a:p>
+          <a:p>
+            <a:pPr indent="0" marL="0">
+              <a:buNone/>
+            </a:pPr>
+            <a:r>
+              <a:rPr lang="en-US" sz="1140" dirty="0">
                 <a:solidFill>
                   <a:srgbClr val="17364A"/>
                 </a:solidFill>
@@ -10015,16 +10017,16 @@
                 <a:ea typeface="Aptos" pitchFamily="34" charset="-122"/>
                 <a:cs typeface="Aptos" pitchFamily="34" charset="-120"/>
               </a:rPr>
-              <a:t>What is the best reason to address human factors, workflow.</a:t>
-            </a:r>
-            <a:endParaRPr lang="en-US" sz="1220" dirty="0"/>
-          </a:p>
-          <a:p>
-            <a:pPr indent="0" marL="0">
-              <a:buNone/>
-            </a:pPr>
-            <a:r>
-              <a:rPr lang="en-US" sz="1220" dirty="0">
+              <a:t>What is the best reason to address human factors,.</a:t>
+            </a:r>
+            <a:endParaRPr lang="en-US" sz="1140" dirty="0"/>
+          </a:p>
+          <a:p>
+            <a:pPr indent="0" marL="0">
+              <a:buNone/>
+            </a:pPr>
+            <a:r>
+              <a:rPr lang="en-US" sz="1140" dirty="0">
                 <a:solidFill>
                   <a:srgbClr val="17364A"/>
                 </a:solidFill>
@@ -10034,7 +10036,7 @@
               </a:rPr>
               <a:t>2.</a:t>
             </a:r>
-            <a:endParaRPr lang="en-US" sz="1220" dirty="0"/>
+            <a:endParaRPr lang="en-US" sz="1140" dirty="0"/>
           </a:p>
         </p:txBody>
       </p:sp>
@@ -10046,12 +10048,12 @@
         </p:nvSpPr>
         <p:spPr>
           <a:xfrm>
-            <a:off x="7635240" y="4184294"/>
-            <a:ext cx="3474720" cy="1466698"/>
+            <a:off x="7543800" y="4389120"/>
+            <a:ext cx="3611880" cy="1261872"/>
           </a:xfrm>
           <a:prstGeom prst="roundRect">
             <a:avLst>
-              <a:gd name="adj" fmla="val 7481"/>
+              <a:gd name="adj" fmla="val 8696"/>
             </a:avLst>
           </a:prstGeom>
           <a:solidFill>
@@ -10073,8 +10075,8 @@
         </p:nvSpPr>
         <p:spPr>
           <a:xfrm>
-            <a:off x="7799832" y="4330598"/>
-            <a:ext cx="3145536" cy="256032"/>
+            <a:off x="7708392" y="4517136"/>
+            <a:ext cx="3282696" cy="228600"/>
           </a:xfrm>
           <a:prstGeom prst="rect">
             <a:avLst/>
@@ -10090,7 +10092,7 @@
               <a:buNone/>
             </a:pPr>
             <a:r>
-              <a:rPr lang="en-US" sz="1300" b="1" dirty="0">
+              <a:rPr lang="en-US" sz="1220" b="1" dirty="0">
                 <a:solidFill>
                   <a:srgbClr val="0068B7"/>
                 </a:solidFill>
@@ -10100,7 +10102,7 @@
               </a:rPr>
               <a:t>Next action</a:t>
             </a:r>
-            <a:endParaRPr lang="en-US" sz="1300" dirty="0"/>
+            <a:endParaRPr lang="en-US" sz="1220" dirty="0"/>
           </a:p>
         </p:txBody>
       </p:sp>
@@ -10112,8 +10114,8 @@
         </p:nvSpPr>
         <p:spPr>
           <a:xfrm>
-            <a:off x="7799832" y="4659782"/>
-            <a:ext cx="3145536" cy="899770"/>
+            <a:off x="7708392" y="4828032"/>
+            <a:ext cx="3282696" cy="749808"/>
           </a:xfrm>
           <a:prstGeom prst="rect">
             <a:avLst/>
@@ -10131,7 +10133,7 @@
               <a:buNone/>
             </a:pPr>
             <a:r>
-              <a:rPr lang="en-US" sz="1320" dirty="0">
+              <a:rPr lang="en-US" sz="1220" dirty="0">
                 <a:solidFill>
                   <a:srgbClr val="17364A"/>
                 </a:solidFill>
@@ -10139,9 +10141,9 @@
                 <a:ea typeface="Aptos" pitchFamily="34" charset="-122"/>
                 <a:cs typeface="Aptos" pitchFamily="34" charset="-120"/>
               </a:rPr>
-              <a:t>Use the assignment to test whether you can explain the concept, apply it to a realistic public health situation, and identify what would need review before the work moves forward.</a:t>
-            </a:r>
-            <a:endParaRPr lang="en-US" sz="1320" dirty="0"/>
+              <a:t>Use the assignment to test whether you can explain the concept, apply it to a.</a:t>
+            </a:r>
+            <a:endParaRPr lang="en-US" sz="1220" dirty="0"/>
           </a:p>
         </p:txBody>
       </p:sp>
@@ -10476,7 +10478,7 @@
                 <a:ea typeface="Aptos" pitchFamily="34" charset="-122"/>
                 <a:cs typeface="Aptos" pitchFamily="34" charset="-120"/>
               </a:rPr>
-              <a:t>• Human factors and usability testing help agencies understand how staff actually use systems,.</a:t>
+              <a:t>• Human factors and usability testing help agencies understand how staff.</a:t>
             </a:r>
             <a:endParaRPr lang="en-US" sz="2100" dirty="0"/>
           </a:p>
@@ -10493,7 +10495,7 @@
                 <a:ea typeface="Aptos" pitchFamily="34" charset="-122"/>
                 <a:cs typeface="Aptos" pitchFamily="34" charset="-120"/>
               </a:rPr>
-              <a:t>• This module teaches learners to evaluate workflow fit, interface design, alert burden,.</a:t>
+              <a:t>• This module teaches learners to evaluate workflow fit, interface design,.</a:t>
             </a:r>
             <a:endParaRPr lang="en-US" sz="2100" dirty="0"/>
           </a:p>
@@ -10534,8 +10536,8 @@
         </p:nvSpPr>
         <p:spPr>
           <a:xfrm>
-            <a:off x="8074152" y="1563624"/>
-            <a:ext cx="2825496" cy="256032"/>
+            <a:off x="8074152" y="1545336"/>
+            <a:ext cx="2825496" cy="228600"/>
           </a:xfrm>
           <a:prstGeom prst="rect">
             <a:avLst/>
@@ -10551,7 +10553,7 @@
               <a:buNone/>
             </a:pPr>
             <a:r>
-              <a:rPr lang="en-US" sz="1300" b="1" dirty="0">
+              <a:rPr lang="en-US" sz="1220" b="1" dirty="0">
                 <a:solidFill>
                   <a:srgbClr val="0068B7"/>
                 </a:solidFill>
@@ -10561,7 +10563,7 @@
               </a:rPr>
               <a:t>Module details</a:t>
             </a:r>
-            <a:endParaRPr lang="en-US" sz="1300" dirty="0"/>
+            <a:endParaRPr lang="en-US" sz="1220" dirty="0"/>
           </a:p>
         </p:txBody>
       </p:sp>
@@ -10573,8 +10575,8 @@
         </p:nvSpPr>
         <p:spPr>
           <a:xfrm>
-            <a:off x="8074152" y="1892808"/>
-            <a:ext cx="2825496" cy="1353312"/>
+            <a:off x="8074152" y="1856232"/>
+            <a:ext cx="2825496" cy="1408176"/>
           </a:xfrm>
           <a:prstGeom prst="rect">
             <a:avLst/>
@@ -10592,7 +10594,7 @@
               <a:buNone/>
             </a:pPr>
             <a:r>
-              <a:rPr lang="en-US" sz="1320" dirty="0">
+              <a:rPr lang="en-US" sz="1220" dirty="0">
                 <a:solidFill>
                   <a:srgbClr val="17364A"/>
                 </a:solidFill>
@@ -10600,9 +10602,9 @@
                 <a:ea typeface="Aptos" pitchFamily="34" charset="-122"/>
                 <a:cs typeface="Aptos" pitchFamily="34" charset="-120"/>
               </a:rPr>
-              <a:t>Level: applied/foundational Primary track: Operations and Data Quality Track Appears in tracks: operations-data-quality</a:t>
-            </a:r>
-            <a:endParaRPr lang="en-US" sz="1320" dirty="0"/>
+              <a:t>Level: applied/foundational Primary track: Operations and Data Quality Track.</a:t>
+            </a:r>
+            <a:endParaRPr lang="en-US" sz="1220" dirty="0"/>
           </a:p>
         </p:txBody>
       </p:sp>
@@ -10641,8 +10643,8 @@
         </p:nvSpPr>
         <p:spPr>
           <a:xfrm>
-            <a:off x="8074152" y="3822192"/>
-            <a:ext cx="2825496" cy="256032"/>
+            <a:off x="8074152" y="3803904"/>
+            <a:ext cx="2825496" cy="228600"/>
           </a:xfrm>
           <a:prstGeom prst="rect">
             <a:avLst/>
@@ -10658,7 +10660,7 @@
               <a:buNone/>
             </a:pPr>
             <a:r>
-              <a:rPr lang="en-US" sz="1300" b="1" dirty="0">
+              <a:rPr lang="en-US" sz="1220" b="1" dirty="0">
                 <a:solidFill>
                   <a:srgbClr val="0068B7"/>
                 </a:solidFill>
@@ -10668,7 +10670,7 @@
               </a:rPr>
               <a:t>Learning sequence</a:t>
             </a:r>
-            <a:endParaRPr lang="en-US" sz="1300" dirty="0"/>
+            <a:endParaRPr lang="en-US" sz="1220" dirty="0"/>
           </a:p>
         </p:txBody>
       </p:sp>
@@ -10680,8 +10682,8 @@
         </p:nvSpPr>
         <p:spPr>
           <a:xfrm>
-            <a:off x="8092440" y="4187952"/>
-            <a:ext cx="2770632" cy="1033272"/>
+            <a:off x="8092440" y="4133088"/>
+            <a:ext cx="2770632" cy="1124712"/>
           </a:xfrm>
           <a:prstGeom prst="rect">
             <a:avLst/>
@@ -10699,7 +10701,7 @@
               <a:buNone/>
             </a:pPr>
             <a:r>
-              <a:rPr lang="en-US" sz="1220" dirty="0">
+              <a:rPr lang="en-US" sz="1140" dirty="0">
                 <a:solidFill>
                   <a:srgbClr val="17364A"/>
                 </a:solidFill>
@@ -10709,14 +10711,14 @@
               </a:rPr>
               <a:t>Read the module for shared vocabulary and context.</a:t>
             </a:r>
-            <a:endParaRPr lang="en-US" sz="1220" dirty="0"/>
-          </a:p>
-          <a:p>
-            <a:pPr indent="0" marL="0">
-              <a:buNone/>
-            </a:pPr>
-            <a:r>
-              <a:rPr lang="en-US" sz="1220" dirty="0">
+            <a:endParaRPr lang="en-US" sz="1140" dirty="0"/>
+          </a:p>
+          <a:p>
+            <a:pPr indent="0" marL="0">
+              <a:buNone/>
+            </a:pPr>
+            <a:r>
+              <a:rPr lang="en-US" sz="1140" dirty="0">
                 <a:solidFill>
                   <a:srgbClr val="17364A"/>
                 </a:solidFill>
@@ -10724,16 +10726,16 @@
                 <a:ea typeface="Aptos" pitchFamily="34" charset="-122"/>
                 <a:cs typeface="Aptos" pitchFamily="34" charset="-120"/>
               </a:rPr>
-              <a:t>Complete the practical exercise to apply the concept.</a:t>
-            </a:r>
-            <a:endParaRPr lang="en-US" sz="1220" dirty="0"/>
-          </a:p>
-          <a:p>
-            <a:pPr indent="0" marL="0">
-              <a:buNone/>
-            </a:pPr>
-            <a:r>
-              <a:rPr lang="en-US" sz="1220" dirty="0">
+              <a:t>Complete the practical exercise to apply the.</a:t>
+            </a:r>
+            <a:endParaRPr lang="en-US" sz="1140" dirty="0"/>
+          </a:p>
+          <a:p>
+            <a:pPr indent="0" marL="0">
+              <a:buNone/>
+            </a:pPr>
+            <a:r>
+              <a:rPr lang="en-US" sz="1140" dirty="0">
                 <a:solidFill>
                   <a:srgbClr val="17364A"/>
                 </a:solidFill>
@@ -10743,7 +10745,7 @@
               </a:rPr>
               <a:t>Use the notes and references for deeper review.</a:t>
             </a:r>
-            <a:endParaRPr lang="en-US" sz="1220" dirty="0"/>
+            <a:endParaRPr lang="en-US" sz="1140" dirty="0"/>
           </a:p>
         </p:txBody>
       </p:sp>
@@ -11034,8 +11036,8 @@
         </p:nvSpPr>
         <p:spPr>
           <a:xfrm>
-            <a:off x="868680" y="1508760"/>
-            <a:ext cx="6309360" cy="4160520"/>
+            <a:off x="822960" y="1463040"/>
+            <a:ext cx="6565392" cy="4343400"/>
           </a:xfrm>
           <a:prstGeom prst="rect">
             <a:avLst/>
@@ -11053,7 +11055,7 @@
               <a:buNone/>
             </a:pPr>
             <a:r>
-              <a:rPr lang="en-US" sz="2100" dirty="0">
+              <a:rPr lang="en-US" sz="1920" dirty="0">
                 <a:solidFill>
                   <a:srgbClr val="003A63"/>
                 </a:solidFill>
@@ -11061,16 +11063,16 @@
                 <a:ea typeface="Aptos" pitchFamily="34" charset="-122"/>
                 <a:cs typeface="Aptos" pitchFamily="34" charset="-120"/>
               </a:rPr>
-              <a:t>• NIST AI Risk Management Framework: https://www.nist.gov/itl/ai-risk-management-framework</a:t>
-            </a:r>
-            <a:endParaRPr lang="en-US" sz="2100" dirty="0"/>
-          </a:p>
-          <a:p>
-            <a:pPr indent="0" marL="0">
-              <a:buNone/>
-            </a:pPr>
-            <a:r>
-              <a:rPr lang="en-US" sz="2100" dirty="0">
+              <a:t>• NIST AI Risk Management Framework:.</a:t>
+            </a:r>
+            <a:endParaRPr lang="en-US" sz="1920" dirty="0"/>
+          </a:p>
+          <a:p>
+            <a:pPr indent="0" marL="0">
+              <a:buNone/>
+            </a:pPr>
+            <a:r>
+              <a:rPr lang="en-US" sz="1920" dirty="0">
                 <a:solidFill>
                   <a:srgbClr val="003A63"/>
                 </a:solidFill>
@@ -11080,14 +11082,14 @@
               </a:rPr>
               <a:t>• AHRQ human factors and usability resources</a:t>
             </a:r>
-            <a:endParaRPr lang="en-US" sz="2100" dirty="0"/>
-          </a:p>
-          <a:p>
-            <a:pPr indent="0" marL="0">
-              <a:buNone/>
-            </a:pPr>
-            <a:r>
-              <a:rPr lang="en-US" sz="2100" dirty="0">
+            <a:endParaRPr lang="en-US" sz="1920" dirty="0"/>
+          </a:p>
+          <a:p>
+            <a:pPr indent="0" marL="0">
+              <a:buNone/>
+            </a:pPr>
+            <a:r>
+              <a:rPr lang="en-US" sz="1920" dirty="0">
                 <a:solidFill>
                   <a:srgbClr val="003A63"/>
                 </a:solidFill>
@@ -11097,7 +11099,7 @@
               </a:rPr>
               <a:t>• NIST Generative AI Profile:.</a:t>
             </a:r>
-            <a:endParaRPr lang="en-US" sz="2100" dirty="0"/>
+            <a:endParaRPr lang="en-US" sz="1920" dirty="0"/>
           </a:p>
         </p:txBody>
       </p:sp>
@@ -11109,12 +11111,12 @@
         </p:nvSpPr>
         <p:spPr>
           <a:xfrm>
-            <a:off x="7635240" y="1325880"/>
-            <a:ext cx="3474720" cy="1207008"/>
+            <a:off x="7543800" y="1325880"/>
+            <a:ext cx="3611880" cy="1261872"/>
           </a:xfrm>
           <a:prstGeom prst="roundRect">
             <a:avLst>
-              <a:gd name="adj" fmla="val 9091"/>
+              <a:gd name="adj" fmla="val 8696"/>
             </a:avLst>
           </a:prstGeom>
           <a:solidFill>
@@ -11136,8 +11138,8 @@
         </p:nvSpPr>
         <p:spPr>
           <a:xfrm>
-            <a:off x="7799832" y="1472184"/>
-            <a:ext cx="3145536" cy="256032"/>
+            <a:off x="7708392" y="1453896"/>
+            <a:ext cx="3282696" cy="228600"/>
           </a:xfrm>
           <a:prstGeom prst="rect">
             <a:avLst/>
@@ -11153,7 +11155,7 @@
               <a:buNone/>
             </a:pPr>
             <a:r>
-              <a:rPr lang="en-US" sz="1300" b="1" dirty="0">
+              <a:rPr lang="en-US" sz="1220" b="1" dirty="0">
                 <a:solidFill>
                   <a:srgbClr val="0068B7"/>
                 </a:solidFill>
@@ -11163,7 +11165,7 @@
               </a:rPr>
               <a:t>Implementation cue</a:t>
             </a:r>
-            <a:endParaRPr lang="en-US" sz="1300" dirty="0"/>
+            <a:endParaRPr lang="en-US" sz="1220" dirty="0"/>
           </a:p>
         </p:txBody>
       </p:sp>
@@ -11175,8 +11177,8 @@
         </p:nvSpPr>
         <p:spPr>
           <a:xfrm>
-            <a:off x="7799832" y="1801368"/>
-            <a:ext cx="3145536" cy="640080"/>
+            <a:off x="7708392" y="1764792"/>
+            <a:ext cx="3282696" cy="749808"/>
           </a:xfrm>
           <a:prstGeom prst="rect">
             <a:avLst/>
@@ -11194,7 +11196,7 @@
               <a:buNone/>
             </a:pPr>
             <a:r>
-              <a:rPr lang="en-US" sz="1320" dirty="0">
+              <a:rPr lang="en-US" sz="1220" dirty="0">
                 <a:solidFill>
                   <a:srgbClr val="17364A"/>
                 </a:solidFill>
@@ -11202,9 +11204,9 @@
                 <a:ea typeface="Aptos" pitchFamily="34" charset="-122"/>
                 <a:cs typeface="Aptos" pitchFamily="34" charset="-120"/>
               </a:rPr>
-              <a:t>NIST AI Risk Management Framework: https://www.nist.gov/itl/ai-risk-management-framework</a:t>
-            </a:r>
-            <a:endParaRPr lang="en-US" sz="1320" dirty="0"/>
+              <a:t>NIST AI Risk Management Framework:.</a:t>
+            </a:r>
+            <a:endParaRPr lang="en-US" sz="1220" dirty="0"/>
           </a:p>
         </p:txBody>
       </p:sp>
@@ -11216,12 +11218,12 @@
         </p:nvSpPr>
         <p:spPr>
           <a:xfrm>
-            <a:off x="7635240" y="2670048"/>
-            <a:ext cx="3474720" cy="1377086"/>
+            <a:off x="7543800" y="2724912"/>
+            <a:ext cx="3611880" cy="1527048"/>
           </a:xfrm>
           <a:prstGeom prst="roundRect">
             <a:avLst>
-              <a:gd name="adj" fmla="val 7968"/>
+              <a:gd name="adj" fmla="val 7186"/>
             </a:avLst>
           </a:prstGeom>
           <a:solidFill>
@@ -11243,8 +11245,8 @@
         </p:nvSpPr>
         <p:spPr>
           <a:xfrm>
-            <a:off x="7799832" y="2816352"/>
-            <a:ext cx="3145536" cy="256032"/>
+            <a:off x="7708392" y="2852928"/>
+            <a:ext cx="3282696" cy="228600"/>
           </a:xfrm>
           <a:prstGeom prst="rect">
             <a:avLst/>
@@ -11260,7 +11262,7 @@
               <a:buNone/>
             </a:pPr>
             <a:r>
-              <a:rPr lang="en-US" sz="1300" b="1" dirty="0">
+              <a:rPr lang="en-US" sz="1220" b="1" dirty="0">
                 <a:solidFill>
                   <a:srgbClr val="0068B7"/>
                 </a:solidFill>
@@ -11270,7 +11272,7 @@
               </a:rPr>
               <a:t>Concept checkpoints</a:t>
             </a:r>
-            <a:endParaRPr lang="en-US" sz="1300" dirty="0"/>
+            <a:endParaRPr lang="en-US" sz="1220" dirty="0"/>
           </a:p>
         </p:txBody>
       </p:sp>
@@ -11282,8 +11284,8 @@
         </p:nvSpPr>
         <p:spPr>
           <a:xfrm>
-            <a:off x="7818120" y="3182112"/>
-            <a:ext cx="3090672" cy="718718"/>
+            <a:off x="7726680" y="3182112"/>
+            <a:ext cx="3227832" cy="960120"/>
           </a:xfrm>
           <a:prstGeom prst="rect">
             <a:avLst/>
@@ -11301,7 +11303,7 @@
               <a:buNone/>
             </a:pPr>
             <a:r>
-              <a:rPr lang="en-US" sz="1220" dirty="0">
+              <a:rPr lang="en-US" sz="1140" dirty="0">
                 <a:solidFill>
                   <a:srgbClr val="17364A"/>
                 </a:solidFill>
@@ -11309,16 +11311,16 @@
                 <a:ea typeface="Aptos" pitchFamily="34" charset="-122"/>
                 <a:cs typeface="Aptos" pitchFamily="34" charset="-120"/>
               </a:rPr>
-              <a:t>CDC Public Health Data Strategy and Data Modernization resources:.</a:t>
-            </a:r>
-            <a:endParaRPr lang="en-US" sz="1220" dirty="0"/>
-          </a:p>
-          <a:p>
-            <a:pPr indent="0" marL="0">
-              <a:buNone/>
-            </a:pPr>
-            <a:r>
-              <a:rPr lang="en-US" sz="1220" dirty="0">
+              <a:t>CDC Public Health Data Strategy and Data.</a:t>
+            </a:r>
+            <a:endParaRPr lang="en-US" sz="1140" dirty="0"/>
+          </a:p>
+          <a:p>
+            <a:pPr indent="0" marL="0">
+              <a:buNone/>
+            </a:pPr>
+            <a:r>
+              <a:rPr lang="en-US" sz="1140" dirty="0">
                 <a:solidFill>
                   <a:srgbClr val="17364A"/>
                 </a:solidFill>
@@ -11326,9 +11328,9 @@
                 <a:ea typeface="Aptos" pitchFamily="34" charset="-122"/>
                 <a:cs typeface="Aptos" pitchFamily="34" charset="-120"/>
               </a:rPr>
-              <a:t>OWASP Top 10 for LLM Applications, when security or AI.</a:t>
-            </a:r>
-            <a:endParaRPr lang="en-US" sz="1220" dirty="0"/>
+              <a:t>OWASP Top 10 for LLM Applications, when security.</a:t>
+            </a:r>
+            <a:endParaRPr lang="en-US" sz="1140" dirty="0"/>
           </a:p>
         </p:txBody>
       </p:sp>
@@ -11340,12 +11342,12 @@
         </p:nvSpPr>
         <p:spPr>
           <a:xfrm>
-            <a:off x="7635240" y="4184294"/>
-            <a:ext cx="3474720" cy="1466698"/>
+            <a:off x="7543800" y="4389120"/>
+            <a:ext cx="3611880" cy="1261872"/>
           </a:xfrm>
           <a:prstGeom prst="roundRect">
             <a:avLst>
-              <a:gd name="adj" fmla="val 7481"/>
+              <a:gd name="adj" fmla="val 8696"/>
             </a:avLst>
           </a:prstGeom>
           <a:solidFill>
@@ -11367,8 +11369,8 @@
         </p:nvSpPr>
         <p:spPr>
           <a:xfrm>
-            <a:off x="7799832" y="4330598"/>
-            <a:ext cx="3145536" cy="256032"/>
+            <a:off x="7708392" y="4517136"/>
+            <a:ext cx="3282696" cy="228600"/>
           </a:xfrm>
           <a:prstGeom prst="rect">
             <a:avLst/>
@@ -11384,7 +11386,7 @@
               <a:buNone/>
             </a:pPr>
             <a:r>
-              <a:rPr lang="en-US" sz="1300" b="1" dirty="0">
+              <a:rPr lang="en-US" sz="1220" b="1" dirty="0">
                 <a:solidFill>
                   <a:srgbClr val="0068B7"/>
                 </a:solidFill>
@@ -11394,7 +11396,7 @@
               </a:rPr>
               <a:t>Next action</a:t>
             </a:r>
-            <a:endParaRPr lang="en-US" sz="1300" dirty="0"/>
+            <a:endParaRPr lang="en-US" sz="1220" dirty="0"/>
           </a:p>
         </p:txBody>
       </p:sp>
@@ -11406,8 +11408,8 @@
         </p:nvSpPr>
         <p:spPr>
           <a:xfrm>
-            <a:off x="7799832" y="4659782"/>
-            <a:ext cx="3145536" cy="899770"/>
+            <a:off x="7708392" y="4828032"/>
+            <a:ext cx="3282696" cy="749808"/>
           </a:xfrm>
           <a:prstGeom prst="rect">
             <a:avLst/>
@@ -11425,7 +11427,7 @@
               <a:buNone/>
             </a:pPr>
             <a:r>
-              <a:rPr lang="en-US" sz="1320" dirty="0">
+              <a:rPr lang="en-US" sz="1220" dirty="0">
                 <a:solidFill>
                   <a:srgbClr val="17364A"/>
                 </a:solidFill>
@@ -11433,9 +11435,9 @@
                 <a:ea typeface="Aptos" pitchFamily="34" charset="-122"/>
                 <a:cs typeface="Aptos" pitchFamily="34" charset="-120"/>
               </a:rPr>
-              <a:t>Use the concept to clarify workflow changes, dependencies, staffing, procurement requirements, training needs, and implementation checkpoints.</a:t>
-            </a:r>
-            <a:endParaRPr lang="en-US" sz="1320" dirty="0"/>
+              <a:t>Use the concept to clarify workflow changes, dependencies, staffing, procurement.</a:t>
+            </a:r>
+            <a:endParaRPr lang="en-US" sz="1220" dirty="0"/>
           </a:p>
         </p:txBody>
       </p:sp>
@@ -11726,8 +11728,8 @@
         </p:nvSpPr>
         <p:spPr>
           <a:xfrm>
-            <a:off x="868680" y="1508760"/>
-            <a:ext cx="6309360" cy="4160520"/>
+            <a:off x="822960" y="1463040"/>
+            <a:ext cx="6565392" cy="4343400"/>
           </a:xfrm>
           <a:prstGeom prst="rect">
             <a:avLst/>
@@ -11745,7 +11747,7 @@
               <a:buNone/>
             </a:pPr>
             <a:r>
-              <a:rPr lang="en-US" sz="2100" dirty="0">
+              <a:rPr lang="en-US" sz="1920" dirty="0">
                 <a:solidFill>
                   <a:srgbClr val="003A63"/>
                 </a:solidFill>
@@ -11753,9 +11755,9 @@
                 <a:ea typeface="Aptos" pitchFamily="34" charset="-122"/>
                 <a:cs typeface="Aptos" pitchFamily="34" charset="-120"/>
               </a:rPr>
-              <a:t>• Agency privacy, cybersecurity, data governance, procurement, and records management policies</a:t>
-            </a:r>
-            <a:endParaRPr lang="en-US" sz="2100" dirty="0"/>
+              <a:t>• Agency privacy, cybersecurity, data governance, procurement, and records.</a:t>
+            </a:r>
+            <a:endParaRPr lang="en-US" sz="1920" dirty="0"/>
           </a:p>
         </p:txBody>
       </p:sp>
@@ -11767,12 +11769,12 @@
         </p:nvSpPr>
         <p:spPr>
           <a:xfrm>
-            <a:off x="7635240" y="1325880"/>
-            <a:ext cx="3474720" cy="1207008"/>
+            <a:off x="7543800" y="1325880"/>
+            <a:ext cx="3611880" cy="1261872"/>
           </a:xfrm>
           <a:prstGeom prst="roundRect">
             <a:avLst>
-              <a:gd name="adj" fmla="val 9091"/>
+              <a:gd name="adj" fmla="val 8696"/>
             </a:avLst>
           </a:prstGeom>
           <a:solidFill>
@@ -11794,8 +11796,8 @@
         </p:nvSpPr>
         <p:spPr>
           <a:xfrm>
-            <a:off x="7799832" y="1472184"/>
-            <a:ext cx="3145536" cy="256032"/>
+            <a:off x="7708392" y="1453896"/>
+            <a:ext cx="3282696" cy="228600"/>
           </a:xfrm>
           <a:prstGeom prst="rect">
             <a:avLst/>
@@ -11811,7 +11813,7 @@
               <a:buNone/>
             </a:pPr>
             <a:r>
-              <a:rPr lang="en-US" sz="1300" b="1" dirty="0">
+              <a:rPr lang="en-US" sz="1220" b="1" dirty="0">
                 <a:solidFill>
                   <a:srgbClr val="0068B7"/>
                 </a:solidFill>
@@ -11821,7 +11823,7 @@
               </a:rPr>
               <a:t>Implementation cue</a:t>
             </a:r>
-            <a:endParaRPr lang="en-US" sz="1300" dirty="0"/>
+            <a:endParaRPr lang="en-US" sz="1220" dirty="0"/>
           </a:p>
         </p:txBody>
       </p:sp>
@@ -11833,8 +11835,8 @@
         </p:nvSpPr>
         <p:spPr>
           <a:xfrm>
-            <a:off x="7799832" y="1801368"/>
-            <a:ext cx="3145536" cy="640080"/>
+            <a:off x="7708392" y="1764792"/>
+            <a:ext cx="3282696" cy="749808"/>
           </a:xfrm>
           <a:prstGeom prst="rect">
             <a:avLst/>
@@ -11852,7 +11854,7 @@
               <a:buNone/>
             </a:pPr>
             <a:r>
-              <a:rPr lang="en-US" sz="1320" dirty="0">
+              <a:rPr lang="en-US" sz="1220" dirty="0">
                 <a:solidFill>
                   <a:srgbClr val="17364A"/>
                 </a:solidFill>
@@ -11860,9 +11862,9 @@
                 <a:ea typeface="Aptos" pitchFamily="34" charset="-122"/>
                 <a:cs typeface="Aptos" pitchFamily="34" charset="-120"/>
               </a:rPr>
-              <a:t>Agency privacy, cybersecurity, data governance, procurement, and records management.</a:t>
-            </a:r>
-            <a:endParaRPr lang="en-US" sz="1320" dirty="0"/>
+              <a:t>Agency privacy, cybersecurity, data governance, procurement, and records.</a:t>
+            </a:r>
+            <a:endParaRPr lang="en-US" sz="1220" dirty="0"/>
           </a:p>
         </p:txBody>
       </p:sp>
@@ -11874,12 +11876,12 @@
         </p:nvSpPr>
         <p:spPr>
           <a:xfrm>
-            <a:off x="7635240" y="2670048"/>
-            <a:ext cx="3474720" cy="1377086"/>
+            <a:off x="7543800" y="2724912"/>
+            <a:ext cx="3611880" cy="1527048"/>
           </a:xfrm>
           <a:prstGeom prst="roundRect">
             <a:avLst>
-              <a:gd name="adj" fmla="val 7968"/>
+              <a:gd name="adj" fmla="val 7186"/>
             </a:avLst>
           </a:prstGeom>
           <a:solidFill>
@@ -11901,8 +11903,8 @@
         </p:nvSpPr>
         <p:spPr>
           <a:xfrm>
-            <a:off x="7799832" y="2816352"/>
-            <a:ext cx="3145536" cy="256032"/>
+            <a:off x="7708392" y="2852928"/>
+            <a:ext cx="3282696" cy="228600"/>
           </a:xfrm>
           <a:prstGeom prst="rect">
             <a:avLst/>
@@ -11918,7 +11920,7 @@
               <a:buNone/>
             </a:pPr>
             <a:r>
-              <a:rPr lang="en-US" sz="1300" b="1" dirty="0">
+              <a:rPr lang="en-US" sz="1220" b="1" dirty="0">
                 <a:solidFill>
                   <a:srgbClr val="0068B7"/>
                 </a:solidFill>
@@ -11928,7 +11930,7 @@
               </a:rPr>
               <a:t>Concept checkpoints</a:t>
             </a:r>
-            <a:endParaRPr lang="en-US" sz="1300" dirty="0"/>
+            <a:endParaRPr lang="en-US" sz="1220" dirty="0"/>
           </a:p>
         </p:txBody>
       </p:sp>
@@ -11940,8 +11942,8 @@
         </p:nvSpPr>
         <p:spPr>
           <a:xfrm>
-            <a:off x="7818120" y="3182112"/>
-            <a:ext cx="3090672" cy="718718"/>
+            <a:off x="7726680" y="3182112"/>
+            <a:ext cx="3227832" cy="960120"/>
           </a:xfrm>
           <a:prstGeom prst="rect">
             <a:avLst/>
@@ -11959,7 +11961,7 @@
               <a:buNone/>
             </a:pPr>
             <a:r>
-              <a:rPr lang="en-US" sz="1220" dirty="0">
+              <a:rPr lang="en-US" sz="1140" dirty="0">
                 <a:solidFill>
                   <a:srgbClr val="17364A"/>
                 </a:solidFill>
@@ -11967,9 +11969,9 @@
                 <a:ea typeface="Aptos" pitchFamily="34" charset="-122"/>
                 <a:cs typeface="Aptos" pitchFamily="34" charset="-120"/>
               </a:rPr>
-              <a:t>Agency privacy, cybersecurity, data governance, procurement, and.</a:t>
-            </a:r>
-            <a:endParaRPr lang="en-US" sz="1220" dirty="0"/>
+              <a:t>Agency privacy, cybersecurity, data governance,.</a:t>
+            </a:r>
+            <a:endParaRPr lang="en-US" sz="1140" dirty="0"/>
           </a:p>
         </p:txBody>
       </p:sp>
@@ -11981,12 +11983,12 @@
         </p:nvSpPr>
         <p:spPr>
           <a:xfrm>
-            <a:off x="7635240" y="4184294"/>
-            <a:ext cx="3474720" cy="1466698"/>
+            <a:off x="7543800" y="4389120"/>
+            <a:ext cx="3611880" cy="1261872"/>
           </a:xfrm>
           <a:prstGeom prst="roundRect">
             <a:avLst>
-              <a:gd name="adj" fmla="val 7481"/>
+              <a:gd name="adj" fmla="val 8696"/>
             </a:avLst>
           </a:prstGeom>
           <a:solidFill>
@@ -12008,8 +12010,8 @@
         </p:nvSpPr>
         <p:spPr>
           <a:xfrm>
-            <a:off x="7799832" y="4330598"/>
-            <a:ext cx="3145536" cy="256032"/>
+            <a:off x="7708392" y="4517136"/>
+            <a:ext cx="3282696" cy="228600"/>
           </a:xfrm>
           <a:prstGeom prst="rect">
             <a:avLst/>
@@ -12025,7 +12027,7 @@
               <a:buNone/>
             </a:pPr>
             <a:r>
-              <a:rPr lang="en-US" sz="1300" b="1" dirty="0">
+              <a:rPr lang="en-US" sz="1220" b="1" dirty="0">
                 <a:solidFill>
                   <a:srgbClr val="0068B7"/>
                 </a:solidFill>
@@ -12035,7 +12037,7 @@
               </a:rPr>
               <a:t>Next action</a:t>
             </a:r>
-            <a:endParaRPr lang="en-US" sz="1300" dirty="0"/>
+            <a:endParaRPr lang="en-US" sz="1220" dirty="0"/>
           </a:p>
         </p:txBody>
       </p:sp>
@@ -12047,8 +12049,8 @@
         </p:nvSpPr>
         <p:spPr>
           <a:xfrm>
-            <a:off x="7799832" y="4659782"/>
-            <a:ext cx="3145536" cy="899770"/>
+            <a:off x="7708392" y="4828032"/>
+            <a:ext cx="3282696" cy="749808"/>
           </a:xfrm>
           <a:prstGeom prst="rect">
             <a:avLst/>
@@ -12066,7 +12068,7 @@
               <a:buNone/>
             </a:pPr>
             <a:r>
-              <a:rPr lang="en-US" sz="1320" dirty="0">
+              <a:rPr lang="en-US" sz="1220" dirty="0">
                 <a:solidFill>
                   <a:srgbClr val="17364A"/>
                 </a:solidFill>
@@ -12074,9 +12076,9 @@
                 <a:ea typeface="Aptos" pitchFamily="34" charset="-122"/>
                 <a:cs typeface="Aptos" pitchFamily="34" charset="-120"/>
               </a:rPr>
-              <a:t>Use the concept to clarify workflow changes, dependencies, staffing, procurement requirements, training needs, and implementation checkpoints.</a:t>
-            </a:r>
-            <a:endParaRPr lang="en-US" sz="1320" dirty="0"/>
+              <a:t>Use the concept to clarify workflow changes, dependencies, staffing, procurement.</a:t>
+            </a:r>
+            <a:endParaRPr lang="en-US" sz="1220" dirty="0"/>
           </a:p>
         </p:txBody>
       </p:sp>
@@ -12394,7 +12396,7 @@
                 <a:ea typeface="Aptos" pitchFamily="34" charset="-122"/>
                 <a:cs typeface="Aptos" pitchFamily="34" charset="-120"/>
               </a:rPr>
-              <a:t>• Play 11: Build and Deploy AI Solutions - This lesson informs Play 11 by helping learners.</a:t>
+              <a:t>• Play 11: Build and Deploy AI Solutions - This lesson informs Play 11 by.</a:t>
             </a:r>
             <a:endParaRPr lang="en-US" sz="1900" dirty="0"/>
           </a:p>
@@ -12411,7 +12413,7 @@
                 <a:ea typeface="Aptos" pitchFamily="34" charset="-122"/>
                 <a:cs typeface="Aptos" pitchFamily="34" charset="-120"/>
               </a:rPr>
-              <a:t>• Play 2: Readiness Assessment - This lesson informs Play 2 by helping learners connect the.</a:t>
+              <a:t>• Play 2: Readiness Assessment - This lesson informs Play 2 by helping.</a:t>
             </a:r>
             <a:endParaRPr lang="en-US" sz="1900" dirty="0"/>
           </a:p>
@@ -12428,7 +12430,7 @@
                 <a:ea typeface="Aptos" pitchFamily="34" charset="-122"/>
                 <a:cs typeface="Aptos" pitchFamily="34" charset="-120"/>
               </a:rPr>
-              <a:t>• Play 1: Vision &amp; Guardrails - This lesson informs Play 1 by helping learners connect the.</a:t>
+              <a:t>• Play 1: Vision &amp; Guardrails - This lesson informs Play 1 by helping learners.</a:t>
             </a:r>
             <a:endParaRPr lang="en-US" sz="1900" dirty="0"/>
           </a:p>
@@ -12445,7 +12447,7 @@
                 <a:ea typeface="Aptos" pitchFamily="34" charset="-122"/>
                 <a:cs typeface="Aptos" pitchFamily="34" charset="-120"/>
               </a:rPr>
-              <a:t>• Play 7: Prioritize Use Cases - This lesson informs Play 7 by helping learners connect the.</a:t>
+              <a:t>• Play 7: Prioritize Use Cases - This lesson informs Play 7 by helping.</a:t>
             </a:r>
             <a:endParaRPr lang="en-US" sz="1900" dirty="0"/>
           </a:p>
@@ -12486,8 +12488,8 @@
         </p:nvSpPr>
         <p:spPr>
           <a:xfrm>
-            <a:off x="8211312" y="1563624"/>
-            <a:ext cx="2734056" cy="256032"/>
+            <a:off x="8211312" y="1545336"/>
+            <a:ext cx="2734056" cy="228600"/>
           </a:xfrm>
           <a:prstGeom prst="rect">
             <a:avLst/>
@@ -12503,7 +12505,7 @@
               <a:buNone/>
             </a:pPr>
             <a:r>
-              <a:rPr lang="en-US" sz="1300" b="1" dirty="0">
+              <a:rPr lang="en-US" sz="1220" b="1" dirty="0">
                 <a:solidFill>
                   <a:srgbClr val="0068B7"/>
                 </a:solidFill>
@@ -12513,7 +12515,7 @@
               </a:rPr>
               <a:t>Apply the lesson</a:t>
             </a:r>
-            <a:endParaRPr lang="en-US" sz="1300" dirty="0"/>
+            <a:endParaRPr lang="en-US" sz="1220" dirty="0"/>
           </a:p>
         </p:txBody>
       </p:sp>
@@ -12525,8 +12527,8 @@
         </p:nvSpPr>
         <p:spPr>
           <a:xfrm>
-            <a:off x="8211312" y="1892808"/>
-            <a:ext cx="2734056" cy="1536192"/>
+            <a:off x="8211312" y="1856232"/>
+            <a:ext cx="2734056" cy="1591056"/>
           </a:xfrm>
           <a:prstGeom prst="rect">
             <a:avLst/>
@@ -12544,7 +12546,7 @@
               <a:buNone/>
             </a:pPr>
             <a:r>
-              <a:rPr lang="en-US" sz="1320" dirty="0">
+              <a:rPr lang="en-US" sz="1220" dirty="0">
                 <a:solidFill>
                   <a:srgbClr val="17364A"/>
                 </a:solidFill>
@@ -12552,9 +12554,9 @@
                 <a:ea typeface="Aptos" pitchFamily="34" charset="-122"/>
                 <a:cs typeface="Aptos" pitchFamily="34" charset="-120"/>
               </a:rPr>
-              <a:t>Use the related plays to identify decisions, participants, timing, approvals, and documentation needed for responsible implementation.</a:t>
-            </a:r>
-            <a:endParaRPr lang="en-US" sz="1320" dirty="0"/>
+              <a:t>Use the related plays to identify decisions, participants, timing, approvals,.</a:t>
+            </a:r>
+            <a:endParaRPr lang="en-US" sz="1220" dirty="0"/>
           </a:p>
         </p:txBody>
       </p:sp>
@@ -12593,8 +12595,8 @@
         </p:nvSpPr>
         <p:spPr>
           <a:xfrm>
-            <a:off x="8211312" y="3941064"/>
-            <a:ext cx="2734056" cy="256032"/>
+            <a:off x="8211312" y="3922776"/>
+            <a:ext cx="2734056" cy="228600"/>
           </a:xfrm>
           <a:prstGeom prst="rect">
             <a:avLst/>
@@ -12610,7 +12612,7 @@
               <a:buNone/>
             </a:pPr>
             <a:r>
-              <a:rPr lang="en-US" sz="1300" b="1" dirty="0">
+              <a:rPr lang="en-US" sz="1220" b="1" dirty="0">
                 <a:solidFill>
                   <a:srgbClr val="0068B7"/>
                 </a:solidFill>
@@ -12620,7 +12622,7 @@
               </a:rPr>
               <a:t>Use the play links to</a:t>
             </a:r>
-            <a:endParaRPr lang="en-US" sz="1300" dirty="0"/>
+            <a:endParaRPr lang="en-US" sz="1220" dirty="0"/>
           </a:p>
         </p:txBody>
       </p:sp>
@@ -12632,8 +12634,8 @@
         </p:nvSpPr>
         <p:spPr>
           <a:xfrm>
-            <a:off x="8229600" y="4306824"/>
-            <a:ext cx="2679192" cy="941832"/>
+            <a:off x="8229600" y="4251960"/>
+            <a:ext cx="2679192" cy="1033272"/>
           </a:xfrm>
           <a:prstGeom prst="rect">
             <a:avLst/>
@@ -12651,7 +12653,7 @@
               <a:buNone/>
             </a:pPr>
             <a:r>
-              <a:rPr lang="en-US" sz="1220" dirty="0">
+              <a:rPr lang="en-US" sz="1140" dirty="0">
                 <a:solidFill>
                   <a:srgbClr val="17364A"/>
                 </a:solidFill>
@@ -12661,14 +12663,14 @@
               </a:rPr>
               <a:t>Locate the decision point in the playbook sequence.</a:t>
             </a:r>
-            <a:endParaRPr lang="en-US" sz="1220" dirty="0"/>
-          </a:p>
-          <a:p>
-            <a:pPr indent="0" marL="0">
-              <a:buNone/>
-            </a:pPr>
-            <a:r>
-              <a:rPr lang="en-US" sz="1220" dirty="0">
+            <a:endParaRPr lang="en-US" sz="1140" dirty="0"/>
+          </a:p>
+          <a:p>
+            <a:pPr indent="0" marL="0">
+              <a:buNone/>
+            </a:pPr>
+            <a:r>
+              <a:rPr lang="en-US" sz="1140" dirty="0">
                 <a:solidFill>
                   <a:srgbClr val="17364A"/>
                 </a:solidFill>
@@ -12678,14 +12680,14 @@
               </a:rPr>
               <a:t>Identify who should participate in the work.</a:t>
             </a:r>
-            <a:endParaRPr lang="en-US" sz="1220" dirty="0"/>
-          </a:p>
-          <a:p>
-            <a:pPr indent="0" marL="0">
-              <a:buNone/>
-            </a:pPr>
-            <a:r>
-              <a:rPr lang="en-US" sz="1220" dirty="0">
+            <a:endParaRPr lang="en-US" sz="1140" dirty="0"/>
+          </a:p>
+          <a:p>
+            <a:pPr indent="0" marL="0">
+              <a:buNone/>
+            </a:pPr>
+            <a:r>
+              <a:rPr lang="en-US" sz="1140" dirty="0">
                 <a:solidFill>
                   <a:srgbClr val="17364A"/>
                 </a:solidFill>
@@ -12693,9 +12695,9 @@
                 <a:ea typeface="Aptos" pitchFamily="34" charset="-122"/>
                 <a:cs typeface="Aptos" pitchFamily="34" charset="-120"/>
               </a:rPr>
-              <a:t>Document the review, approval, or implementation step.</a:t>
-            </a:r>
-            <a:endParaRPr lang="en-US" sz="1220" dirty="0"/>
+              <a:t>Document the review, approval, or implementation.</a:t>
+            </a:r>
+            <a:endParaRPr lang="en-US" sz="1140" dirty="0"/>
           </a:p>
         </p:txBody>
       </p:sp>
@@ -13013,7 +13015,7 @@
                 <a:ea typeface="Aptos" pitchFamily="34" charset="-122"/>
                 <a:cs typeface="Aptos" pitchFamily="34" charset="-120"/>
               </a:rPr>
-              <a:t>• Tool 4: AI Policy Landscape Scan (Worksheet) - Use AI Policy Landscape Scan to translate this.</a:t>
+              <a:t>• Tool 4: AI Policy Landscape Scan (Worksheet) - Use AI Policy Landscape Scan.</a:t>
             </a:r>
             <a:endParaRPr lang="en-US" sz="1850" dirty="0"/>
           </a:p>
@@ -13030,7 +13032,7 @@
                 <a:ea typeface="Aptos" pitchFamily="34" charset="-122"/>
                 <a:cs typeface="Aptos" pitchFamily="34" charset="-120"/>
               </a:rPr>
-              <a:t>• Tool 5: AI Environmental and Resource Impact Review (Checklist) - Use this tool to complete or.</a:t>
+              <a:t>• Tool 5: AI Environmental and Resource Impact Review (Checklist) - Use this.</a:t>
             </a:r>
             <a:endParaRPr lang="en-US" sz="1850" dirty="0"/>
           </a:p>
@@ -13047,7 +13049,7 @@
                 <a:ea typeface="Aptos" pitchFamily="34" charset="-122"/>
                 <a:cs typeface="Aptos" pitchFamily="34" charset="-120"/>
               </a:rPr>
-              <a:t>• Tool 6: Human-Centered AI Decision Rule Checklist (Checklist) - Use Human-Centered AI Decision.</a:t>
+              <a:t>• Tool 6: Human-Centered AI Decision Rule Checklist (Checklist) - Use.</a:t>
             </a:r>
             <a:endParaRPr lang="en-US" sz="1850" dirty="0"/>
           </a:p>
@@ -13064,7 +13066,7 @@
                 <a:ea typeface="Aptos" pitchFamily="34" charset="-122"/>
                 <a:cs typeface="Aptos" pitchFamily="34" charset="-120"/>
               </a:rPr>
-              <a:t>• Tool 8: AI Project Charter (Planning) - Use AI Project Charter to translate this lesson into a.</a:t>
+              <a:t>• Tool 8: AI Project Charter (Planning) - Use AI Project Charter to translate.</a:t>
             </a:r>
             <a:endParaRPr lang="en-US" sz="1850" dirty="0"/>
           </a:p>
@@ -13105,8 +13107,8 @@
         </p:nvSpPr>
         <p:spPr>
           <a:xfrm>
-            <a:off x="8211312" y="1563624"/>
-            <a:ext cx="2734056" cy="256032"/>
+            <a:off x="8211312" y="1545336"/>
+            <a:ext cx="2734056" cy="228600"/>
           </a:xfrm>
           <a:prstGeom prst="rect">
             <a:avLst/>
@@ -13122,7 +13124,7 @@
               <a:buNone/>
             </a:pPr>
             <a:r>
-              <a:rPr lang="en-US" sz="1300" b="1" dirty="0">
+              <a:rPr lang="en-US" sz="1220" b="1" dirty="0">
                 <a:solidFill>
                   <a:srgbClr val="0068B7"/>
                 </a:solidFill>
@@ -13132,7 +13134,7 @@
               </a:rPr>
               <a:t>Use the tools</a:t>
             </a:r>
-            <a:endParaRPr lang="en-US" sz="1300" dirty="0"/>
+            <a:endParaRPr lang="en-US" sz="1220" dirty="0"/>
           </a:p>
         </p:txBody>
       </p:sp>
@@ -13144,8 +13146,8 @@
         </p:nvSpPr>
         <p:spPr>
           <a:xfrm>
-            <a:off x="8211312" y="1892808"/>
-            <a:ext cx="2734056" cy="1536192"/>
+            <a:off x="8211312" y="1856232"/>
+            <a:ext cx="2734056" cy="1591056"/>
           </a:xfrm>
           <a:prstGeom prst="rect">
             <a:avLst/>
@@ -13163,7 +13165,7 @@
               <a:buNone/>
             </a:pPr>
             <a:r>
-              <a:rPr lang="en-US" sz="1320" dirty="0">
+              <a:rPr lang="en-US" sz="1220" dirty="0">
                 <a:solidFill>
                   <a:srgbClr val="17364A"/>
                 </a:solidFill>
@@ -13171,9 +13173,9 @@
                 <a:ea typeface="Aptos" pitchFamily="34" charset="-122"/>
                 <a:cs typeface="Aptos" pitchFamily="34" charset="-120"/>
               </a:rPr>
-              <a:t>Use linked tools when your department needs a structured worksheet, template, checklist, review process, or documentation artifact.</a:t>
-            </a:r>
-            <a:endParaRPr lang="en-US" sz="1320" dirty="0"/>
+              <a:t>Use linked tools when your department needs a structured worksheet, template,.</a:t>
+            </a:r>
+            <a:endParaRPr lang="en-US" sz="1220" dirty="0"/>
           </a:p>
         </p:txBody>
       </p:sp>
@@ -13212,8 +13214,8 @@
         </p:nvSpPr>
         <p:spPr>
           <a:xfrm>
-            <a:off x="8211312" y="3941064"/>
-            <a:ext cx="2734056" cy="256032"/>
+            <a:off x="8211312" y="3922776"/>
+            <a:ext cx="2734056" cy="228600"/>
           </a:xfrm>
           <a:prstGeom prst="rect">
             <a:avLst/>
@@ -13229,7 +13231,7 @@
               <a:buNone/>
             </a:pPr>
             <a:r>
-              <a:rPr lang="en-US" sz="1300" b="1" dirty="0">
+              <a:rPr lang="en-US" sz="1220" b="1" dirty="0">
                 <a:solidFill>
                   <a:srgbClr val="0068B7"/>
                 </a:solidFill>
@@ -13239,7 +13241,7 @@
               </a:rPr>
               <a:t>Tool selection cues</a:t>
             </a:r>
-            <a:endParaRPr lang="en-US" sz="1300" dirty="0"/>
+            <a:endParaRPr lang="en-US" sz="1220" dirty="0"/>
           </a:p>
         </p:txBody>
       </p:sp>
@@ -13251,8 +13253,8 @@
         </p:nvSpPr>
         <p:spPr>
           <a:xfrm>
-            <a:off x="8229600" y="4306824"/>
-            <a:ext cx="2679192" cy="941832"/>
+            <a:off x="8229600" y="4251960"/>
+            <a:ext cx="2679192" cy="1033272"/>
           </a:xfrm>
           <a:prstGeom prst="rect">
             <a:avLst/>
@@ -13270,7 +13272,7 @@
               <a:buNone/>
             </a:pPr>
             <a:r>
-              <a:rPr lang="en-US" sz="1220" dirty="0">
+              <a:rPr lang="en-US" sz="1140" dirty="0">
                 <a:solidFill>
                   <a:srgbClr val="17364A"/>
                 </a:solidFill>
@@ -13280,14 +13282,14 @@
               </a:rPr>
               <a:t>Use a tool when no comparable local process exists.</a:t>
             </a:r>
-            <a:endParaRPr lang="en-US" sz="1220" dirty="0"/>
-          </a:p>
-          <a:p>
-            <a:pPr indent="0" marL="0">
-              <a:buNone/>
-            </a:pPr>
-            <a:r>
-              <a:rPr lang="en-US" sz="1220" dirty="0">
+            <a:endParaRPr lang="en-US" sz="1140" dirty="0"/>
+          </a:p>
+          <a:p>
+            <a:pPr indent="0" marL="0">
+              <a:buNone/>
+            </a:pPr>
+            <a:r>
+              <a:rPr lang="en-US" sz="1140" dirty="0">
                 <a:solidFill>
                   <a:srgbClr val="17364A"/>
                 </a:solidFill>
@@ -13295,16 +13297,16 @@
                 <a:ea typeface="Aptos" pitchFamily="34" charset="-122"/>
                 <a:cs typeface="Aptos" pitchFamily="34" charset="-120"/>
               </a:rPr>
-              <a:t>Adapt existing department templates when they already fit the.</a:t>
-            </a:r>
-            <a:endParaRPr lang="en-US" sz="1220" dirty="0"/>
-          </a:p>
-          <a:p>
-            <a:pPr indent="0" marL="0">
-              <a:buNone/>
-            </a:pPr>
-            <a:r>
-              <a:rPr lang="en-US" sz="1220" dirty="0">
+              <a:t>Adapt existing department templates when they.</a:t>
+            </a:r>
+            <a:endParaRPr lang="en-US" sz="1140" dirty="0"/>
+          </a:p>
+          <a:p>
+            <a:pPr indent="0" marL="0">
+              <a:buNone/>
+            </a:pPr>
+            <a:r>
+              <a:rPr lang="en-US" sz="1140" dirty="0">
                 <a:solidFill>
                   <a:srgbClr val="17364A"/>
                 </a:solidFill>
@@ -13312,9 +13314,9 @@
                 <a:ea typeface="Aptos" pitchFamily="34" charset="-122"/>
                 <a:cs typeface="Aptos" pitchFamily="34" charset="-120"/>
               </a:rPr>
-              <a:t>Save the completed artifact as evidence of the decision.</a:t>
-            </a:r>
-            <a:endParaRPr lang="en-US" sz="1220" dirty="0"/>
+              <a:t>Save the completed artifact as evidence of the.</a:t>
+            </a:r>
+            <a:endParaRPr lang="en-US" sz="1140" dirty="0"/>
           </a:p>
         </p:txBody>
       </p:sp>
@@ -13605,8 +13607,8 @@
         </p:nvSpPr>
         <p:spPr>
           <a:xfrm>
-            <a:off x="868680" y="1508760"/>
-            <a:ext cx="6309360" cy="4160520"/>
+            <a:off x="822960" y="1463040"/>
+            <a:ext cx="6565392" cy="4343400"/>
           </a:xfrm>
           <a:prstGeom prst="rect">
             <a:avLst/>
@@ -13624,7 +13626,7 @@
               <a:buNone/>
             </a:pPr>
             <a:r>
-              <a:rPr lang="en-US" sz="2100" dirty="0">
+              <a:rPr lang="en-US" sz="1920" dirty="0">
                 <a:solidFill>
                   <a:srgbClr val="003A63"/>
                 </a:solidFill>
@@ -13632,16 +13634,16 @@
                 <a:ea typeface="Aptos" pitchFamily="34" charset="-122"/>
                 <a:cs typeface="Aptos" pitchFamily="34" charset="-120"/>
               </a:rPr>
-              <a:t>• Explain the purpose of human factors, workflow integration, and usability testing in public.</a:t>
-            </a:r>
-            <a:endParaRPr lang="en-US" sz="2100" dirty="0"/>
-          </a:p>
-          <a:p>
-            <a:pPr indent="0" marL="0">
-              <a:buNone/>
-            </a:pPr>
-            <a:r>
-              <a:rPr lang="en-US" sz="2100" dirty="0">
+              <a:t>• Explain the purpose of human factors, workflow integration, and usability.</a:t>
+            </a:r>
+            <a:endParaRPr lang="en-US" sz="1920" dirty="0"/>
+          </a:p>
+          <a:p>
+            <a:pPr indent="0" marL="0">
+              <a:buNone/>
+            </a:pPr>
+            <a:r>
+              <a:rPr lang="en-US" sz="1920" dirty="0">
                 <a:solidFill>
                   <a:srgbClr val="003A63"/>
                 </a:solidFill>
@@ -13649,16 +13651,16 @@
                 <a:ea typeface="Aptos" pitchFamily="34" charset="-122"/>
                 <a:cs typeface="Aptos" pitchFamily="34" charset="-120"/>
               </a:rPr>
-              <a:t>• Identify the technical, operational, privacy, security, equity, and governance issues.</a:t>
-            </a:r>
-            <a:endParaRPr lang="en-US" sz="2100" dirty="0"/>
-          </a:p>
-          <a:p>
-            <a:pPr indent="0" marL="0">
-              <a:buNone/>
-            </a:pPr>
-            <a:r>
-              <a:rPr lang="en-US" sz="2100" dirty="0">
+              <a:t>• Identify the technical, operational, privacy, security, equity, and.</a:t>
+            </a:r>
+            <a:endParaRPr lang="en-US" sz="1920" dirty="0"/>
+          </a:p>
+          <a:p>
+            <a:pPr indent="0" marL="0">
+              <a:buNone/>
+            </a:pPr>
+            <a:r>
+              <a:rPr lang="en-US" sz="1920" dirty="0">
                 <a:solidFill>
                   <a:srgbClr val="003A63"/>
                 </a:solidFill>
@@ -13666,9 +13668,9 @@
                 <a:ea typeface="Aptos" pitchFamily="34" charset="-122"/>
                 <a:cs typeface="Aptos" pitchFamily="34" charset="-120"/>
               </a:rPr>
-              <a:t>• Apply the topic to a real or realistic public health workflow, system, or implementation.</a:t>
-            </a:r>
-            <a:endParaRPr lang="en-US" sz="2100" dirty="0"/>
+              <a:t>• Apply the topic to a real or realistic public health workflow, system, or.</a:t>
+            </a:r>
+            <a:endParaRPr lang="en-US" sz="1920" dirty="0"/>
           </a:p>
         </p:txBody>
       </p:sp>
@@ -13680,12 +13682,12 @@
         </p:nvSpPr>
         <p:spPr>
           <a:xfrm>
-            <a:off x="7635240" y="1325880"/>
-            <a:ext cx="3474720" cy="1255471"/>
+            <a:off x="7543800" y="1325880"/>
+            <a:ext cx="3611880" cy="1261872"/>
           </a:xfrm>
           <a:prstGeom prst="roundRect">
             <a:avLst>
-              <a:gd name="adj" fmla="val 8740"/>
+              <a:gd name="adj" fmla="val 8696"/>
             </a:avLst>
           </a:prstGeom>
           <a:solidFill>
@@ -13707,8 +13709,8 @@
         </p:nvSpPr>
         <p:spPr>
           <a:xfrm>
-            <a:off x="7799832" y="1472184"/>
-            <a:ext cx="3145536" cy="256032"/>
+            <a:off x="7708392" y="1453896"/>
+            <a:ext cx="3282696" cy="228600"/>
           </a:xfrm>
           <a:prstGeom prst="rect">
             <a:avLst/>
@@ -13724,7 +13726,7 @@
               <a:buNone/>
             </a:pPr>
             <a:r>
-              <a:rPr lang="en-US" sz="1300" b="1" dirty="0">
+              <a:rPr lang="en-US" sz="1220" b="1" dirty="0">
                 <a:solidFill>
                   <a:srgbClr val="0068B7"/>
                 </a:solidFill>
@@ -13734,7 +13736,7 @@
               </a:rPr>
               <a:t>Implementation cue</a:t>
             </a:r>
-            <a:endParaRPr lang="en-US" sz="1300" dirty="0"/>
+            <a:endParaRPr lang="en-US" sz="1220" dirty="0"/>
           </a:p>
         </p:txBody>
       </p:sp>
@@ -13746,8 +13748,8 @@
         </p:nvSpPr>
         <p:spPr>
           <a:xfrm>
-            <a:off x="7799832" y="1801368"/>
-            <a:ext cx="3145536" cy="688543"/>
+            <a:off x="7708392" y="1764792"/>
+            <a:ext cx="3282696" cy="749808"/>
           </a:xfrm>
           <a:prstGeom prst="rect">
             <a:avLst/>
@@ -13765,7 +13767,7 @@
               <a:buNone/>
             </a:pPr>
             <a:r>
-              <a:rPr lang="en-US" sz="1320" dirty="0">
+              <a:rPr lang="en-US" sz="1220" dirty="0">
                 <a:solidFill>
                   <a:srgbClr val="17364A"/>
                 </a:solidFill>
@@ -13773,9 +13775,9 @@
                 <a:ea typeface="Aptos" pitchFamily="34" charset="-122"/>
                 <a:cs typeface="Aptos" pitchFamily="34" charset="-120"/>
               </a:rPr>
-              <a:t>Explain the purpose of human factors, workflow integration, and usability testing in public health AI.</a:t>
-            </a:r>
-            <a:endParaRPr lang="en-US" sz="1320" dirty="0"/>
+              <a:t>Explain the purpose of human factors, workflow integration, and usability.</a:t>
+            </a:r>
+            <a:endParaRPr lang="en-US" sz="1220" dirty="0"/>
           </a:p>
         </p:txBody>
       </p:sp>
@@ -13787,12 +13789,12 @@
         </p:nvSpPr>
         <p:spPr>
           <a:xfrm>
-            <a:off x="7635240" y="2718511"/>
-            <a:ext cx="3474720" cy="1328623"/>
+            <a:off x="7543800" y="2724912"/>
+            <a:ext cx="3611880" cy="1527048"/>
           </a:xfrm>
           <a:prstGeom prst="roundRect">
             <a:avLst>
-              <a:gd name="adj" fmla="val 8259"/>
+              <a:gd name="adj" fmla="val 7186"/>
             </a:avLst>
           </a:prstGeom>
           <a:solidFill>
@@ -13814,8 +13816,8 @@
         </p:nvSpPr>
         <p:spPr>
           <a:xfrm>
-            <a:off x="7799832" y="2864815"/>
-            <a:ext cx="3145536" cy="256032"/>
+            <a:off x="7708392" y="2852928"/>
+            <a:ext cx="3282696" cy="228600"/>
           </a:xfrm>
           <a:prstGeom prst="rect">
             <a:avLst/>
@@ -13831,7 +13833,7 @@
               <a:buNone/>
             </a:pPr>
             <a:r>
-              <a:rPr lang="en-US" sz="1300" b="1" dirty="0">
+              <a:rPr lang="en-US" sz="1220" b="1" dirty="0">
                 <a:solidFill>
                   <a:srgbClr val="0068B7"/>
                 </a:solidFill>
@@ -13841,7 +13843,7 @@
               </a:rPr>
               <a:t>Concept checkpoints</a:t>
             </a:r>
-            <a:endParaRPr lang="en-US" sz="1300" dirty="0"/>
+            <a:endParaRPr lang="en-US" sz="1220" dirty="0"/>
           </a:p>
         </p:txBody>
       </p:sp>
@@ -13853,8 +13855,8 @@
         </p:nvSpPr>
         <p:spPr>
           <a:xfrm>
-            <a:off x="7818120" y="3230575"/>
-            <a:ext cx="3090672" cy="670255"/>
+            <a:off x="7726680" y="3182112"/>
+            <a:ext cx="3227832" cy="960120"/>
           </a:xfrm>
           <a:prstGeom prst="rect">
             <a:avLst/>
@@ -13872,7 +13874,7 @@
               <a:buNone/>
             </a:pPr>
             <a:r>
-              <a:rPr lang="en-US" sz="1220" dirty="0">
+              <a:rPr lang="en-US" sz="1140" dirty="0">
                 <a:solidFill>
                   <a:srgbClr val="17364A"/>
                 </a:solidFill>
@@ -13880,16 +13882,16 @@
                 <a:ea typeface="Aptos" pitchFamily="34" charset="-122"/>
                 <a:cs typeface="Aptos" pitchFamily="34" charset="-120"/>
               </a:rPr>
-              <a:t>Explain the purpose of human factors, workflow integration, and.</a:t>
-            </a:r>
-            <a:endParaRPr lang="en-US" sz="1220" dirty="0"/>
-          </a:p>
-          <a:p>
-            <a:pPr indent="0" marL="0">
-              <a:buNone/>
-            </a:pPr>
-            <a:r>
-              <a:rPr lang="en-US" sz="1220" dirty="0">
+              <a:t>Explain the purpose of human factors, workflow.</a:t>
+            </a:r>
+            <a:endParaRPr lang="en-US" sz="1140" dirty="0"/>
+          </a:p>
+          <a:p>
+            <a:pPr indent="0" marL="0">
+              <a:buNone/>
+            </a:pPr>
+            <a:r>
+              <a:rPr lang="en-US" sz="1140" dirty="0">
                 <a:solidFill>
                   <a:srgbClr val="17364A"/>
                 </a:solidFill>
@@ -13897,16 +13899,16 @@
                 <a:ea typeface="Aptos" pitchFamily="34" charset="-122"/>
                 <a:cs typeface="Aptos" pitchFamily="34" charset="-120"/>
               </a:rPr>
-              <a:t>Identify the technical, operational, privacy, security, equity,.</a:t>
-            </a:r>
-            <a:endParaRPr lang="en-US" sz="1220" dirty="0"/>
-          </a:p>
-          <a:p>
-            <a:pPr indent="0" marL="0">
-              <a:buNone/>
-            </a:pPr>
-            <a:r>
-              <a:rPr lang="en-US" sz="1220" dirty="0">
+              <a:t>Identify the technical, operational, privacy,.</a:t>
+            </a:r>
+            <a:endParaRPr lang="en-US" sz="1140" dirty="0"/>
+          </a:p>
+          <a:p>
+            <a:pPr indent="0" marL="0">
+              <a:buNone/>
+            </a:pPr>
+            <a:r>
+              <a:rPr lang="en-US" sz="1140" dirty="0">
                 <a:solidFill>
                   <a:srgbClr val="17364A"/>
                 </a:solidFill>
@@ -13914,9 +13916,9 @@
                 <a:ea typeface="Aptos" pitchFamily="34" charset="-122"/>
                 <a:cs typeface="Aptos" pitchFamily="34" charset="-120"/>
               </a:rPr>
-              <a:t>Recognize common failure modes that can affect safety, accuracy,.</a:t>
-            </a:r>
-            <a:endParaRPr lang="en-US" sz="1220" dirty="0"/>
+              <a:t>Recognize common failure modes that can affect.</a:t>
+            </a:r>
+            <a:endParaRPr lang="en-US" sz="1140" dirty="0"/>
           </a:p>
         </p:txBody>
       </p:sp>
@@ -13928,12 +13930,12 @@
         </p:nvSpPr>
         <p:spPr>
           <a:xfrm>
-            <a:off x="7635240" y="4184294"/>
-            <a:ext cx="3474720" cy="1466698"/>
+            <a:off x="7543800" y="4389120"/>
+            <a:ext cx="3611880" cy="1261872"/>
           </a:xfrm>
           <a:prstGeom prst="roundRect">
             <a:avLst>
-              <a:gd name="adj" fmla="val 7481"/>
+              <a:gd name="adj" fmla="val 8696"/>
             </a:avLst>
           </a:prstGeom>
           <a:solidFill>
@@ -13955,8 +13957,8 @@
         </p:nvSpPr>
         <p:spPr>
           <a:xfrm>
-            <a:off x="7799832" y="4330598"/>
-            <a:ext cx="3145536" cy="256032"/>
+            <a:off x="7708392" y="4517136"/>
+            <a:ext cx="3282696" cy="228600"/>
           </a:xfrm>
           <a:prstGeom prst="rect">
             <a:avLst/>
@@ -13972,7 +13974,7 @@
               <a:buNone/>
             </a:pPr>
             <a:r>
-              <a:rPr lang="en-US" sz="1300" b="1" dirty="0">
+              <a:rPr lang="en-US" sz="1220" b="1" dirty="0">
                 <a:solidFill>
                   <a:srgbClr val="0068B7"/>
                 </a:solidFill>
@@ -13982,7 +13984,7 @@
               </a:rPr>
               <a:t>Next action</a:t>
             </a:r>
-            <a:endParaRPr lang="en-US" sz="1300" dirty="0"/>
+            <a:endParaRPr lang="en-US" sz="1220" dirty="0"/>
           </a:p>
         </p:txBody>
       </p:sp>
@@ -13994,8 +13996,8 @@
         </p:nvSpPr>
         <p:spPr>
           <a:xfrm>
-            <a:off x="7799832" y="4659782"/>
-            <a:ext cx="3145536" cy="899770"/>
+            <a:off x="7708392" y="4828032"/>
+            <a:ext cx="3282696" cy="749808"/>
           </a:xfrm>
           <a:prstGeom prst="rect">
             <a:avLst/>
@@ -14013,7 +14015,7 @@
               <a:buNone/>
             </a:pPr>
             <a:r>
-              <a:rPr lang="en-US" sz="1320" dirty="0">
+              <a:rPr lang="en-US" sz="1220" dirty="0">
                 <a:solidFill>
                   <a:srgbClr val="17364A"/>
                 </a:solidFill>
@@ -14021,9 +14023,9 @@
                 <a:ea typeface="Aptos" pitchFamily="34" charset="-122"/>
                 <a:cs typeface="Aptos" pitchFamily="34" charset="-120"/>
               </a:rPr>
-              <a:t>Use the assignment to test whether you can explain the concept, apply it to a realistic public health situation, and identify what would need review before the work moves forward.</a:t>
-            </a:r>
-            <a:endParaRPr lang="en-US" sz="1320" dirty="0"/>
+              <a:t>Use the assignment to test whether you can explain the concept, apply it to a.</a:t>
+            </a:r>
+            <a:endParaRPr lang="en-US" sz="1220" dirty="0"/>
           </a:p>
         </p:txBody>
       </p:sp>
@@ -14314,8 +14316,8 @@
         </p:nvSpPr>
         <p:spPr>
           <a:xfrm>
-            <a:off x="868680" y="1508760"/>
-            <a:ext cx="6309360" cy="4160520"/>
+            <a:off x="822960" y="1463040"/>
+            <a:ext cx="6565392" cy="4343400"/>
           </a:xfrm>
           <a:prstGeom prst="rect">
             <a:avLst/>
@@ -14333,7 +14335,7 @@
               <a:buNone/>
             </a:pPr>
             <a:r>
-              <a:rPr lang="en-US" sz="2100" dirty="0">
+              <a:rPr lang="en-US" sz="1920" dirty="0">
                 <a:solidFill>
                   <a:srgbClr val="003A63"/>
                 </a:solidFill>
@@ -14341,9 +14343,9 @@
                 <a:ea typeface="Aptos" pitchFamily="34" charset="-122"/>
                 <a:cs typeface="Aptos" pitchFamily="34" charset="-120"/>
               </a:rPr>
-              <a:t>• Produce a workflow usability test plan that can support readiness assessment, governance.</a:t>
-            </a:r>
-            <a:endParaRPr lang="en-US" sz="2100" dirty="0"/>
+              <a:t>• Produce a workflow usability test plan that can support readiness.</a:t>
+            </a:r>
+            <a:endParaRPr lang="en-US" sz="1920" dirty="0"/>
           </a:p>
         </p:txBody>
       </p:sp>
@@ -14355,12 +14357,12 @@
         </p:nvSpPr>
         <p:spPr>
           <a:xfrm>
-            <a:off x="7635240" y="1325880"/>
-            <a:ext cx="3474720" cy="1255471"/>
+            <a:off x="7543800" y="1325880"/>
+            <a:ext cx="3611880" cy="1261872"/>
           </a:xfrm>
           <a:prstGeom prst="roundRect">
             <a:avLst>
-              <a:gd name="adj" fmla="val 8740"/>
+              <a:gd name="adj" fmla="val 8696"/>
             </a:avLst>
           </a:prstGeom>
           <a:solidFill>
@@ -14382,8 +14384,8 @@
         </p:nvSpPr>
         <p:spPr>
           <a:xfrm>
-            <a:off x="7799832" y="1472184"/>
-            <a:ext cx="3145536" cy="256032"/>
+            <a:off x="7708392" y="1453896"/>
+            <a:ext cx="3282696" cy="228600"/>
           </a:xfrm>
           <a:prstGeom prst="rect">
             <a:avLst/>
@@ -14399,7 +14401,7 @@
               <a:buNone/>
             </a:pPr>
             <a:r>
-              <a:rPr lang="en-US" sz="1300" b="1" dirty="0">
+              <a:rPr lang="en-US" sz="1220" b="1" dirty="0">
                 <a:solidFill>
                   <a:srgbClr val="0068B7"/>
                 </a:solidFill>
@@ -14409,7 +14411,7 @@
               </a:rPr>
               <a:t>Implementation cue</a:t>
             </a:r>
-            <a:endParaRPr lang="en-US" sz="1300" dirty="0"/>
+            <a:endParaRPr lang="en-US" sz="1220" dirty="0"/>
           </a:p>
         </p:txBody>
       </p:sp>
@@ -14421,8 +14423,8 @@
         </p:nvSpPr>
         <p:spPr>
           <a:xfrm>
-            <a:off x="7799832" y="1801368"/>
-            <a:ext cx="3145536" cy="688543"/>
+            <a:off x="7708392" y="1764792"/>
+            <a:ext cx="3282696" cy="749808"/>
           </a:xfrm>
           <a:prstGeom prst="rect">
             <a:avLst/>
@@ -14440,7 +14442,7 @@
               <a:buNone/>
             </a:pPr>
             <a:r>
-              <a:rPr lang="en-US" sz="1320" dirty="0">
+              <a:rPr lang="en-US" sz="1220" dirty="0">
                 <a:solidFill>
                   <a:srgbClr val="17364A"/>
                 </a:solidFill>
@@ -14448,9 +14450,9 @@
                 <a:ea typeface="Aptos" pitchFamily="34" charset="-122"/>
                 <a:cs typeface="Aptos" pitchFamily="34" charset="-120"/>
               </a:rPr>
-              <a:t>Produce a workflow usability test plan that can support readiness assessment, governance review,.</a:t>
-            </a:r>
-            <a:endParaRPr lang="en-US" sz="1320" dirty="0"/>
+              <a:t>Produce a workflow usability test plan that can support readiness assessment,.</a:t>
+            </a:r>
+            <a:endParaRPr lang="en-US" sz="1220" dirty="0"/>
           </a:p>
         </p:txBody>
       </p:sp>
@@ -14462,12 +14464,12 @@
         </p:nvSpPr>
         <p:spPr>
           <a:xfrm>
-            <a:off x="7635240" y="2718511"/>
-            <a:ext cx="3474720" cy="1328623"/>
+            <a:off x="7543800" y="2724912"/>
+            <a:ext cx="3611880" cy="1527048"/>
           </a:xfrm>
           <a:prstGeom prst="roundRect">
             <a:avLst>
-              <a:gd name="adj" fmla="val 8259"/>
+              <a:gd name="adj" fmla="val 7186"/>
             </a:avLst>
           </a:prstGeom>
           <a:solidFill>
@@ -14489,8 +14491,8 @@
         </p:nvSpPr>
         <p:spPr>
           <a:xfrm>
-            <a:off x="7799832" y="2864815"/>
-            <a:ext cx="3145536" cy="256032"/>
+            <a:off x="7708392" y="2852928"/>
+            <a:ext cx="3282696" cy="228600"/>
           </a:xfrm>
           <a:prstGeom prst="rect">
             <a:avLst/>
@@ -14506,7 +14508,7 @@
               <a:buNone/>
             </a:pPr>
             <a:r>
-              <a:rPr lang="en-US" sz="1300" b="1" dirty="0">
+              <a:rPr lang="en-US" sz="1220" b="1" dirty="0">
                 <a:solidFill>
                   <a:srgbClr val="0068B7"/>
                 </a:solidFill>
@@ -14516,7 +14518,7 @@
               </a:rPr>
               <a:t>Concept checkpoints</a:t>
             </a:r>
-            <a:endParaRPr lang="en-US" sz="1300" dirty="0"/>
+            <a:endParaRPr lang="en-US" sz="1220" dirty="0"/>
           </a:p>
         </p:txBody>
       </p:sp>
@@ -14528,8 +14530,8 @@
         </p:nvSpPr>
         <p:spPr>
           <a:xfrm>
-            <a:off x="7818120" y="3230575"/>
-            <a:ext cx="3090672" cy="670255"/>
+            <a:off x="7726680" y="3182112"/>
+            <a:ext cx="3227832" cy="960120"/>
           </a:xfrm>
           <a:prstGeom prst="rect">
             <a:avLst/>
@@ -14547,7 +14549,7 @@
               <a:buNone/>
             </a:pPr>
             <a:r>
-              <a:rPr lang="en-US" sz="1220" dirty="0">
+              <a:rPr lang="en-US" sz="1140" dirty="0">
                 <a:solidFill>
                   <a:srgbClr val="17364A"/>
                 </a:solidFill>
@@ -14555,9 +14557,9 @@
                 <a:ea typeface="Aptos" pitchFamily="34" charset="-122"/>
                 <a:cs typeface="Aptos" pitchFamily="34" charset="-120"/>
               </a:rPr>
-              <a:t>Produce a workflow usability test plan that can support readiness.</a:t>
-            </a:r>
-            <a:endParaRPr lang="en-US" sz="1220" dirty="0"/>
+              <a:t>Produce a workflow usability test plan that can.</a:t>
+            </a:r>
+            <a:endParaRPr lang="en-US" sz="1140" dirty="0"/>
           </a:p>
         </p:txBody>
       </p:sp>
@@ -14569,12 +14571,12 @@
         </p:nvSpPr>
         <p:spPr>
           <a:xfrm>
-            <a:off x="7635240" y="4184294"/>
-            <a:ext cx="3474720" cy="1466698"/>
+            <a:off x="7543800" y="4389120"/>
+            <a:ext cx="3611880" cy="1261872"/>
           </a:xfrm>
           <a:prstGeom prst="roundRect">
             <a:avLst>
-              <a:gd name="adj" fmla="val 7481"/>
+              <a:gd name="adj" fmla="val 8696"/>
             </a:avLst>
           </a:prstGeom>
           <a:solidFill>
@@ -14596,8 +14598,8 @@
         </p:nvSpPr>
         <p:spPr>
           <a:xfrm>
-            <a:off x="7799832" y="4330598"/>
-            <a:ext cx="3145536" cy="256032"/>
+            <a:off x="7708392" y="4517136"/>
+            <a:ext cx="3282696" cy="228600"/>
           </a:xfrm>
           <a:prstGeom prst="rect">
             <a:avLst/>
@@ -14613,7 +14615,7 @@
               <a:buNone/>
             </a:pPr>
             <a:r>
-              <a:rPr lang="en-US" sz="1300" b="1" dirty="0">
+              <a:rPr lang="en-US" sz="1220" b="1" dirty="0">
                 <a:solidFill>
                   <a:srgbClr val="0068B7"/>
                 </a:solidFill>
@@ -14623,7 +14625,7 @@
               </a:rPr>
               <a:t>Next action</a:t>
             </a:r>
-            <a:endParaRPr lang="en-US" sz="1300" dirty="0"/>
+            <a:endParaRPr lang="en-US" sz="1220" dirty="0"/>
           </a:p>
         </p:txBody>
       </p:sp>
@@ -14635,8 +14637,8 @@
         </p:nvSpPr>
         <p:spPr>
           <a:xfrm>
-            <a:off x="7799832" y="4659782"/>
-            <a:ext cx="3145536" cy="899770"/>
+            <a:off x="7708392" y="4828032"/>
+            <a:ext cx="3282696" cy="749808"/>
           </a:xfrm>
           <a:prstGeom prst="rect">
             <a:avLst/>
@@ -14654,7 +14656,7 @@
               <a:buNone/>
             </a:pPr>
             <a:r>
-              <a:rPr lang="en-US" sz="1320" dirty="0">
+              <a:rPr lang="en-US" sz="1220" dirty="0">
                 <a:solidFill>
                   <a:srgbClr val="17364A"/>
                 </a:solidFill>
@@ -14662,9 +14664,9 @@
                 <a:ea typeface="Aptos" pitchFamily="34" charset="-122"/>
                 <a:cs typeface="Aptos" pitchFamily="34" charset="-120"/>
               </a:rPr>
-              <a:t>Use the assignment to test whether you can explain the concept, apply it to a realistic public health situation, and identify what would need review before the work moves forward.</a:t>
-            </a:r>
-            <a:endParaRPr lang="en-US" sz="1320" dirty="0"/>
+              <a:t>Use the assignment to test whether you can explain the concept, apply it to a.</a:t>
+            </a:r>
+            <a:endParaRPr lang="en-US" sz="1220" dirty="0"/>
           </a:p>
         </p:txBody>
       </p:sp>
@@ -14955,8 +14957,8 @@
         </p:nvSpPr>
         <p:spPr>
           <a:xfrm>
-            <a:off x="868680" y="1508760"/>
-            <a:ext cx="6309360" cy="4160520"/>
+            <a:off x="822960" y="1463040"/>
+            <a:ext cx="6565392" cy="4343400"/>
           </a:xfrm>
           <a:prstGeom prst="rect">
             <a:avLst/>
@@ -14974,7 +14976,7 @@
               <a:buNone/>
             </a:pPr>
             <a:r>
-              <a:rPr lang="en-US" sz="2100" dirty="0">
+              <a:rPr lang="en-US" sz="1920" dirty="0">
                 <a:solidFill>
                   <a:srgbClr val="003A63"/>
                 </a:solidFill>
@@ -14984,14 +14986,14 @@
               </a:rPr>
               <a:t>• AI tools succeed or fail inside real public health workflows.</a:t>
             </a:r>
-            <a:endParaRPr lang="en-US" sz="2100" dirty="0"/>
-          </a:p>
-          <a:p>
-            <a:pPr indent="0" marL="0">
-              <a:buNone/>
-            </a:pPr>
-            <a:r>
-              <a:rPr lang="en-US" sz="2100" dirty="0">
+            <a:endParaRPr lang="en-US" sz="1920" dirty="0"/>
+          </a:p>
+          <a:p>
+            <a:pPr indent="0" marL="0">
+              <a:buNone/>
+            </a:pPr>
+            <a:r>
+              <a:rPr lang="en-US" sz="1920" dirty="0">
                 <a:solidFill>
                   <a:srgbClr val="003A63"/>
                 </a:solidFill>
@@ -14999,16 +15001,16 @@
                 <a:ea typeface="Aptos" pitchFamily="34" charset="-122"/>
                 <a:cs typeface="Aptos" pitchFamily="34" charset="-120"/>
               </a:rPr>
-              <a:t>• Human factors and usability testing help agencies understand how staff actually use systems,.</a:t>
-            </a:r>
-            <a:endParaRPr lang="en-US" sz="2100" dirty="0"/>
-          </a:p>
-          <a:p>
-            <a:pPr indent="0" marL="0">
-              <a:buNone/>
-            </a:pPr>
-            <a:r>
-              <a:rPr lang="en-US" sz="2100" dirty="0">
+              <a:t>• Human factors and usability testing help agencies understand how staff.</a:t>
+            </a:r>
+            <a:endParaRPr lang="en-US" sz="1920" dirty="0"/>
+          </a:p>
+          <a:p>
+            <a:pPr indent="0" marL="0">
+              <a:buNone/>
+            </a:pPr>
+            <a:r>
+              <a:rPr lang="en-US" sz="1920" dirty="0">
                 <a:solidFill>
                   <a:srgbClr val="003A63"/>
                 </a:solidFill>
@@ -15016,9 +15018,9 @@
                 <a:ea typeface="Aptos" pitchFamily="34" charset="-122"/>
                 <a:cs typeface="Aptos" pitchFamily="34" charset="-120"/>
               </a:rPr>
-              <a:t>• This module teaches learners to evaluate workflow fit, interface design, alert burden,.</a:t>
-            </a:r>
-            <a:endParaRPr lang="en-US" sz="2100" dirty="0"/>
+              <a:t>• This module teaches learners to evaluate workflow fit, interface design,.</a:t>
+            </a:r>
+            <a:endParaRPr lang="en-US" sz="1920" dirty="0"/>
           </a:p>
         </p:txBody>
       </p:sp>
@@ -15030,12 +15032,12 @@
         </p:nvSpPr>
         <p:spPr>
           <a:xfrm>
-            <a:off x="7635240" y="1325880"/>
-            <a:ext cx="3474720" cy="1207008"/>
+            <a:off x="7543800" y="1325880"/>
+            <a:ext cx="3611880" cy="1261872"/>
           </a:xfrm>
           <a:prstGeom prst="roundRect">
             <a:avLst>
-              <a:gd name="adj" fmla="val 9091"/>
+              <a:gd name="adj" fmla="val 8696"/>
             </a:avLst>
           </a:prstGeom>
           <a:solidFill>
@@ -15057,8 +15059,8 @@
         </p:nvSpPr>
         <p:spPr>
           <a:xfrm>
-            <a:off x="7799832" y="1472184"/>
-            <a:ext cx="3145536" cy="256032"/>
+            <a:off x="7708392" y="1453896"/>
+            <a:ext cx="3282696" cy="228600"/>
           </a:xfrm>
           <a:prstGeom prst="rect">
             <a:avLst/>
@@ -15074,7 +15076,7 @@
               <a:buNone/>
             </a:pPr>
             <a:r>
-              <a:rPr lang="en-US" sz="1300" b="1" dirty="0">
+              <a:rPr lang="en-US" sz="1220" b="1" dirty="0">
                 <a:solidFill>
                   <a:srgbClr val="0068B7"/>
                 </a:solidFill>
@@ -15084,7 +15086,7 @@
               </a:rPr>
               <a:t>Implementation cue</a:t>
             </a:r>
-            <a:endParaRPr lang="en-US" sz="1300" dirty="0"/>
+            <a:endParaRPr lang="en-US" sz="1220" dirty="0"/>
           </a:p>
         </p:txBody>
       </p:sp>
@@ -15096,8 +15098,8 @@
         </p:nvSpPr>
         <p:spPr>
           <a:xfrm>
-            <a:off x="7799832" y="1801368"/>
-            <a:ext cx="3145536" cy="640080"/>
+            <a:off x="7708392" y="1764792"/>
+            <a:ext cx="3282696" cy="749808"/>
           </a:xfrm>
           <a:prstGeom prst="rect">
             <a:avLst/>
@@ -15115,7 +15117,7 @@
               <a:buNone/>
             </a:pPr>
             <a:r>
-              <a:rPr lang="en-US" sz="1320" dirty="0">
+              <a:rPr lang="en-US" sz="1220" dirty="0">
                 <a:solidFill>
                   <a:srgbClr val="17364A"/>
                 </a:solidFill>
@@ -15125,7 +15127,7 @@
               </a:rPr>
               <a:t>AI tools succeed or fail inside real public health workflows.</a:t>
             </a:r>
-            <a:endParaRPr lang="en-US" sz="1320" dirty="0"/>
+            <a:endParaRPr lang="en-US" sz="1220" dirty="0"/>
           </a:p>
         </p:txBody>
       </p:sp>
@@ -15137,12 +15139,12 @@
         </p:nvSpPr>
         <p:spPr>
           <a:xfrm>
-            <a:off x="7635240" y="2670048"/>
-            <a:ext cx="3474720" cy="1377086"/>
+            <a:off x="7543800" y="2724912"/>
+            <a:ext cx="3611880" cy="1527048"/>
           </a:xfrm>
           <a:prstGeom prst="roundRect">
             <a:avLst>
-              <a:gd name="adj" fmla="val 7968"/>
+              <a:gd name="adj" fmla="val 7186"/>
             </a:avLst>
           </a:prstGeom>
           <a:solidFill>
@@ -15164,24 +15166,26 @@
         </p:nvSpPr>
         <p:spPr>
           <a:xfrm>
-            <a:off x="7799832" y="2798064"/>
-            <a:ext cx="3145536" cy="237744"/>
-          </a:xfrm>
-          <a:prstGeom prst="rect">
-            <a:avLst/>
-          </a:prstGeom>
-          <a:noFill/>
-          <a:ln/>
-        </p:spPr>
-        <p:txBody>
-          <a:bodyPr wrap="square" lIns="0" tIns="0" rIns="0" bIns="0" rtlCol="0" anchor="ctr"/>
-          <a:lstStyle/>
-          <a:p>
-            <a:pPr indent="0" marL="0">
-              <a:buNone/>
-            </a:pPr>
-            <a:r>
-              <a:rPr lang="en-US" sz="1250" b="1" dirty="0">
+            <a:off x="7708392" y="2852928"/>
+            <a:ext cx="3282696" cy="219456"/>
+          </a:xfrm>
+          <a:prstGeom prst="rect">
+            <a:avLst/>
+          </a:prstGeom>
+          <a:noFill/>
+          <a:ln/>
+        </p:spPr>
+        <p:txBody>
+          <a:bodyPr wrap="square" lIns="0" tIns="0" rIns="0" bIns="0" rtlCol="0" anchor="ctr">
+            <a:normAutofit/>
+          </a:bodyPr>
+          <a:lstStyle/>
+          <a:p>
+            <a:pPr indent="0" marL="0">
+              <a:buNone/>
+            </a:pPr>
+            <a:r>
+              <a:rPr lang="en-US" sz="1160" b="1" dirty="0">
                 <a:solidFill>
                   <a:srgbClr val="0068B7"/>
                 </a:solidFill>
@@ -15191,7 +15195,7 @@
               </a:rPr>
               <a:t>Implementation path</a:t>
             </a:r>
-            <a:endParaRPr lang="en-US" sz="1250" dirty="0"/>
+            <a:endParaRPr lang="en-US" sz="1160" dirty="0"/>
           </a:p>
         </p:txBody>
       </p:sp>
@@ -15203,7 +15207,7 @@
         </p:nvSpPr>
         <p:spPr>
           <a:xfrm>
-            <a:off x="8763000" y="3351276"/>
+            <a:off x="8717280" y="3406140"/>
             <a:ext cx="164592" cy="0"/>
           </a:xfrm>
           <a:prstGeom prst="line">
@@ -15226,8 +15230,8 @@
         </p:nvSpPr>
         <p:spPr>
           <a:xfrm>
-            <a:off x="7872984" y="3200400"/>
-            <a:ext cx="890016" cy="301752"/>
+            <a:off x="7781544" y="3255264"/>
+            <a:ext cx="935736" cy="301752"/>
           </a:xfrm>
           <a:prstGeom prst="roundRect">
             <a:avLst>
@@ -15253,8 +15257,8 @@
         </p:nvSpPr>
         <p:spPr>
           <a:xfrm>
-            <a:off x="7909560" y="3273552"/>
-            <a:ext cx="816864" cy="146304"/>
+            <a:off x="7818120" y="3328416"/>
+            <a:ext cx="862584" cy="146304"/>
           </a:xfrm>
           <a:prstGeom prst="rect">
             <a:avLst/>
@@ -15294,7 +15298,7 @@
         </p:nvSpPr>
         <p:spPr>
           <a:xfrm>
-            <a:off x="9817608" y="3351276"/>
+            <a:off x="9817608" y="3406140"/>
             <a:ext cx="164592" cy="0"/>
           </a:xfrm>
           <a:prstGeom prst="line">
@@ -15317,8 +15321,8 @@
         </p:nvSpPr>
         <p:spPr>
           <a:xfrm>
-            <a:off x="8927592" y="3200400"/>
-            <a:ext cx="890016" cy="301752"/>
+            <a:off x="8881872" y="3255264"/>
+            <a:ext cx="935736" cy="301752"/>
           </a:xfrm>
           <a:prstGeom prst="roundRect">
             <a:avLst>
@@ -15344,8 +15348,8 @@
         </p:nvSpPr>
         <p:spPr>
           <a:xfrm>
-            <a:off x="8964168" y="3273552"/>
-            <a:ext cx="816864" cy="146304"/>
+            <a:off x="8918448" y="3328416"/>
+            <a:ext cx="862584" cy="146304"/>
           </a:xfrm>
           <a:prstGeom prst="rect">
             <a:avLst/>
@@ -15385,8 +15389,8 @@
         </p:nvSpPr>
         <p:spPr>
           <a:xfrm>
-            <a:off x="9982200" y="3200400"/>
-            <a:ext cx="890016" cy="301752"/>
+            <a:off x="9982200" y="3255264"/>
+            <a:ext cx="935736" cy="301752"/>
           </a:xfrm>
           <a:prstGeom prst="roundRect">
             <a:avLst>
@@ -15412,8 +15416,8 @@
         </p:nvSpPr>
         <p:spPr>
           <a:xfrm>
-            <a:off x="10018776" y="3273552"/>
-            <a:ext cx="816864" cy="146304"/>
+            <a:off x="10018776" y="3328416"/>
+            <a:ext cx="862584" cy="146304"/>
           </a:xfrm>
           <a:prstGeom prst="rect">
             <a:avLst/>
@@ -15453,8 +15457,8 @@
         </p:nvSpPr>
         <p:spPr>
           <a:xfrm>
-            <a:off x="7854696" y="3694176"/>
-            <a:ext cx="3035808" cy="206654"/>
+            <a:off x="7763256" y="3749040"/>
+            <a:ext cx="3172968" cy="356616"/>
           </a:xfrm>
           <a:prstGeom prst="rect">
             <a:avLst/>
@@ -15472,7 +15476,7 @@
               <a:buNone/>
             </a:pPr>
             <a:r>
-              <a:rPr lang="en-US" sz="1120" dirty="0">
+              <a:rPr lang="en-US" sz="1040" dirty="0">
                 <a:solidFill>
                   <a:srgbClr val="17364A"/>
                 </a:solidFill>
@@ -15480,9 +15484,9 @@
                 <a:ea typeface="Aptos" pitchFamily="34" charset="-122"/>
                 <a:cs typeface="Aptos" pitchFamily="34" charset="-120"/>
               </a:rPr>
-              <a:t>Implementation work should make dependencies, approvals, training, and sustainment visible before launch.</a:t>
-            </a:r>
-            <a:endParaRPr lang="en-US" sz="1120" dirty="0"/>
+              <a:t>Implementation work should make dependencies, approvals, training, and.</a:t>
+            </a:r>
+            <a:endParaRPr lang="en-US" sz="1040" dirty="0"/>
           </a:p>
         </p:txBody>
       </p:sp>
@@ -15494,12 +15498,12 @@
         </p:nvSpPr>
         <p:spPr>
           <a:xfrm>
-            <a:off x="7635240" y="4184294"/>
-            <a:ext cx="3474720" cy="1466698"/>
+            <a:off x="7543800" y="4389120"/>
+            <a:ext cx="3611880" cy="1261872"/>
           </a:xfrm>
           <a:prstGeom prst="roundRect">
             <a:avLst>
-              <a:gd name="adj" fmla="val 7481"/>
+              <a:gd name="adj" fmla="val 8696"/>
             </a:avLst>
           </a:prstGeom>
           <a:solidFill>
@@ -15521,8 +15525,8 @@
         </p:nvSpPr>
         <p:spPr>
           <a:xfrm>
-            <a:off x="7799832" y="4330598"/>
-            <a:ext cx="3145536" cy="256032"/>
+            <a:off x="7708392" y="4517136"/>
+            <a:ext cx="3282696" cy="228600"/>
           </a:xfrm>
           <a:prstGeom prst="rect">
             <a:avLst/>
@@ -15538,7 +15542,7 @@
               <a:buNone/>
             </a:pPr>
             <a:r>
-              <a:rPr lang="en-US" sz="1300" b="1" dirty="0">
+              <a:rPr lang="en-US" sz="1220" b="1" dirty="0">
                 <a:solidFill>
                   <a:srgbClr val="0068B7"/>
                 </a:solidFill>
@@ -15548,7 +15552,7 @@
               </a:rPr>
               <a:t>Next action</a:t>
             </a:r>
-            <a:endParaRPr lang="en-US" sz="1300" dirty="0"/>
+            <a:endParaRPr lang="en-US" sz="1220" dirty="0"/>
           </a:p>
         </p:txBody>
       </p:sp>
@@ -15560,8 +15564,8 @@
         </p:nvSpPr>
         <p:spPr>
           <a:xfrm>
-            <a:off x="7799832" y="4659782"/>
-            <a:ext cx="3145536" cy="899770"/>
+            <a:off x="7708392" y="4828032"/>
+            <a:ext cx="3282696" cy="749808"/>
           </a:xfrm>
           <a:prstGeom prst="rect">
             <a:avLst/>
@@ -15579,7 +15583,7 @@
               <a:buNone/>
             </a:pPr>
             <a:r>
-              <a:rPr lang="en-US" sz="1320" dirty="0">
+              <a:rPr lang="en-US" sz="1220" dirty="0">
                 <a:solidFill>
                   <a:srgbClr val="17364A"/>
                 </a:solidFill>
@@ -15587,9 +15591,9 @@
                 <a:ea typeface="Aptos" pitchFamily="34" charset="-122"/>
                 <a:cs typeface="Aptos" pitchFamily="34" charset="-120"/>
               </a:rPr>
-              <a:t>Use the concept to clarify workflow changes, dependencies, staffing, procurement requirements, training needs, and implementation checkpoints.</a:t>
-            </a:r>
-            <a:endParaRPr lang="en-US" sz="1320" dirty="0"/>
+              <a:t>Use the concept to clarify workflow changes, dependencies, staffing, procurement.</a:t>
+            </a:r>
+            <a:endParaRPr lang="en-US" sz="1220" dirty="0"/>
           </a:p>
         </p:txBody>
       </p:sp>
@@ -15880,8 +15884,8 @@
         </p:nvSpPr>
         <p:spPr>
           <a:xfrm>
-            <a:off x="868680" y="1508760"/>
-            <a:ext cx="6309360" cy="4160520"/>
+            <a:off x="822960" y="1463040"/>
+            <a:ext cx="6565392" cy="4343400"/>
           </a:xfrm>
           <a:prstGeom prst="rect">
             <a:avLst/>
@@ -15899,7 +15903,7 @@
               <a:buNone/>
             </a:pPr>
             <a:r>
-              <a:rPr lang="en-US" sz="2100" dirty="0">
+              <a:rPr lang="en-US" sz="1920" dirty="0">
                 <a:solidFill>
                   <a:srgbClr val="003A63"/>
                 </a:solidFill>
@@ -15907,16 +15911,16 @@
                 <a:ea typeface="Aptos" pitchFamily="34" charset="-122"/>
                 <a:cs typeface="Aptos" pitchFamily="34" charset="-120"/>
               </a:rPr>
-              <a:t>• Human Factors, Workflow Integration, and Usability Testing matters because AI systems are.</a:t>
-            </a:r>
-            <a:endParaRPr lang="en-US" sz="2100" dirty="0"/>
-          </a:p>
-          <a:p>
-            <a:pPr indent="0" marL="0">
-              <a:buNone/>
-            </a:pPr>
-            <a:r>
-              <a:rPr lang="en-US" sz="2100" dirty="0">
+              <a:t>• Human Factors, Workflow Integration, and Usability Testing matters because.</a:t>
+            </a:r>
+            <a:endParaRPr lang="en-US" sz="1920" dirty="0"/>
+          </a:p>
+          <a:p>
+            <a:pPr indent="0" marL="0">
+              <a:buNone/>
+            </a:pPr>
+            <a:r>
+              <a:rPr lang="en-US" sz="1920" dirty="0">
                 <a:solidFill>
                   <a:srgbClr val="003A63"/>
                 </a:solidFill>
@@ -15924,16 +15928,16 @@
                 <a:ea typeface="Aptos" pitchFamily="34" charset="-122"/>
                 <a:cs typeface="Aptos" pitchFamily="34" charset="-120"/>
               </a:rPr>
-              <a:t>• The topic affects whether AI outputs are accurate, explainable, safe, equitable, secure, and.</a:t>
-            </a:r>
-            <a:endParaRPr lang="en-US" sz="2100" dirty="0"/>
-          </a:p>
-          <a:p>
-            <a:pPr indent="0" marL="0">
-              <a:buNone/>
-            </a:pPr>
-            <a:r>
-              <a:rPr lang="en-US" sz="2100" dirty="0">
+              <a:t>• The topic affects whether AI outputs are accurate, explainable, safe,.</a:t>
+            </a:r>
+            <a:endParaRPr lang="en-US" sz="1920" dirty="0"/>
+          </a:p>
+          <a:p>
+            <a:pPr indent="0" marL="0">
+              <a:buNone/>
+            </a:pPr>
+            <a:r>
+              <a:rPr lang="en-US" sz="1920" dirty="0">
                 <a:solidFill>
                   <a:srgbClr val="003A63"/>
                 </a:solidFill>
@@ -15941,9 +15945,9 @@
                 <a:ea typeface="Aptos" pitchFamily="34" charset="-122"/>
                 <a:cs typeface="Aptos" pitchFamily="34" charset="-120"/>
               </a:rPr>
-              <a:t>• Agencies that ignore this area may create tools that work in a demonstration but fail in.</a:t>
-            </a:r>
-            <a:endParaRPr lang="en-US" sz="2100" dirty="0"/>
+              <a:t>• Agencies that ignore this area may create tools that work in a demonstration.</a:t>
+            </a:r>
+            <a:endParaRPr lang="en-US" sz="1920" dirty="0"/>
           </a:p>
         </p:txBody>
       </p:sp>
@@ -15955,12 +15959,12 @@
         </p:nvSpPr>
         <p:spPr>
           <a:xfrm>
-            <a:off x="7635240" y="1325880"/>
-            <a:ext cx="3474720" cy="1255471"/>
+            <a:off x="7543800" y="1325880"/>
+            <a:ext cx="3611880" cy="1261872"/>
           </a:xfrm>
           <a:prstGeom prst="roundRect">
             <a:avLst>
-              <a:gd name="adj" fmla="val 8740"/>
+              <a:gd name="adj" fmla="val 8696"/>
             </a:avLst>
           </a:prstGeom>
           <a:solidFill>
@@ -15982,8 +15986,8 @@
         </p:nvSpPr>
         <p:spPr>
           <a:xfrm>
-            <a:off x="7799832" y="1472184"/>
-            <a:ext cx="3145536" cy="256032"/>
+            <a:off x="7708392" y="1453896"/>
+            <a:ext cx="3282696" cy="228600"/>
           </a:xfrm>
           <a:prstGeom prst="rect">
             <a:avLst/>
@@ -15999,7 +16003,7 @@
               <a:buNone/>
             </a:pPr>
             <a:r>
-              <a:rPr lang="en-US" sz="1300" b="1" dirty="0">
+              <a:rPr lang="en-US" sz="1220" b="1" dirty="0">
                 <a:solidFill>
                   <a:srgbClr val="0068B7"/>
                 </a:solidFill>
@@ -16009,7 +16013,7 @@
               </a:rPr>
               <a:t>Implementation cue</a:t>
             </a:r>
-            <a:endParaRPr lang="en-US" sz="1300" dirty="0"/>
+            <a:endParaRPr lang="en-US" sz="1220" dirty="0"/>
           </a:p>
         </p:txBody>
       </p:sp>
@@ -16021,8 +16025,8 @@
         </p:nvSpPr>
         <p:spPr>
           <a:xfrm>
-            <a:off x="7799832" y="1801368"/>
-            <a:ext cx="3145536" cy="688543"/>
+            <a:off x="7708392" y="1764792"/>
+            <a:ext cx="3282696" cy="749808"/>
           </a:xfrm>
           <a:prstGeom prst="rect">
             <a:avLst/>
@@ -16040,7 +16044,7 @@
               <a:buNone/>
             </a:pPr>
             <a:r>
-              <a:rPr lang="en-US" sz="1320" dirty="0">
+              <a:rPr lang="en-US" sz="1220" dirty="0">
                 <a:solidFill>
                   <a:srgbClr val="17364A"/>
                 </a:solidFill>
@@ -16048,9 +16052,9 @@
                 <a:ea typeface="Aptos" pitchFamily="34" charset="-122"/>
                 <a:cs typeface="Aptos" pitchFamily="34" charset="-120"/>
               </a:rPr>
-              <a:t>Human Factors, Workflow Integration, and Usability Testing matters because AI systems are embedded in.</a:t>
-            </a:r>
-            <a:endParaRPr lang="en-US" sz="1320" dirty="0"/>
+              <a:t>Human Factors, Workflow Integration, and Usability Testing matters because AI.</a:t>
+            </a:r>
+            <a:endParaRPr lang="en-US" sz="1220" dirty="0"/>
           </a:p>
         </p:txBody>
       </p:sp>
@@ -16062,12 +16066,12 @@
         </p:nvSpPr>
         <p:spPr>
           <a:xfrm>
-            <a:off x="7635240" y="2718511"/>
-            <a:ext cx="3474720" cy="1328623"/>
+            <a:off x="7543800" y="2724912"/>
+            <a:ext cx="3611880" cy="1527048"/>
           </a:xfrm>
           <a:prstGeom prst="roundRect">
             <a:avLst>
-              <a:gd name="adj" fmla="val 8259"/>
+              <a:gd name="adj" fmla="val 7186"/>
             </a:avLst>
           </a:prstGeom>
           <a:solidFill>
@@ -16089,24 +16093,26 @@
         </p:nvSpPr>
         <p:spPr>
           <a:xfrm>
-            <a:off x="7799832" y="2846527"/>
-            <a:ext cx="3145536" cy="237744"/>
-          </a:xfrm>
-          <a:prstGeom prst="rect">
-            <a:avLst/>
-          </a:prstGeom>
-          <a:noFill/>
-          <a:ln/>
-        </p:spPr>
-        <p:txBody>
-          <a:bodyPr wrap="square" lIns="0" tIns="0" rIns="0" bIns="0" rtlCol="0" anchor="ctr"/>
-          <a:lstStyle/>
-          <a:p>
-            <a:pPr indent="0" marL="0">
-              <a:buNone/>
-            </a:pPr>
-            <a:r>
-              <a:rPr lang="en-US" sz="1250" b="1" dirty="0">
+            <a:off x="7708392" y="2852928"/>
+            <a:ext cx="3282696" cy="219456"/>
+          </a:xfrm>
+          <a:prstGeom prst="rect">
+            <a:avLst/>
+          </a:prstGeom>
+          <a:noFill/>
+          <a:ln/>
+        </p:spPr>
+        <p:txBody>
+          <a:bodyPr wrap="square" lIns="0" tIns="0" rIns="0" bIns="0" rtlCol="0" anchor="ctr">
+            <a:normAutofit/>
+          </a:bodyPr>
+          <a:lstStyle/>
+          <a:p>
+            <a:pPr indent="0" marL="0">
+              <a:buNone/>
+            </a:pPr>
+            <a:r>
+              <a:rPr lang="en-US" sz="1160" b="1" dirty="0">
                 <a:solidFill>
                   <a:srgbClr val="0068B7"/>
                 </a:solidFill>
@@ -16116,7 +16122,7 @@
               </a:rPr>
               <a:t>Implementation path</a:t>
             </a:r>
-            <a:endParaRPr lang="en-US" sz="1250" dirty="0"/>
+            <a:endParaRPr lang="en-US" sz="1160" dirty="0"/>
           </a:p>
         </p:txBody>
       </p:sp>
@@ -16128,7 +16134,7 @@
         </p:nvSpPr>
         <p:spPr>
           <a:xfrm>
-            <a:off x="8763000" y="3399739"/>
+            <a:off x="8717280" y="3406140"/>
             <a:ext cx="164592" cy="0"/>
           </a:xfrm>
           <a:prstGeom prst="line">
@@ -16151,8 +16157,8 @@
         </p:nvSpPr>
         <p:spPr>
           <a:xfrm>
-            <a:off x="7872984" y="3248863"/>
-            <a:ext cx="890016" cy="301752"/>
+            <a:off x="7781544" y="3255264"/>
+            <a:ext cx="935736" cy="301752"/>
           </a:xfrm>
           <a:prstGeom prst="roundRect">
             <a:avLst>
@@ -16178,8 +16184,8 @@
         </p:nvSpPr>
         <p:spPr>
           <a:xfrm>
-            <a:off x="7909560" y="3322015"/>
-            <a:ext cx="816864" cy="146304"/>
+            <a:off x="7818120" y="3328416"/>
+            <a:ext cx="862584" cy="146304"/>
           </a:xfrm>
           <a:prstGeom prst="rect">
             <a:avLst/>
@@ -16219,7 +16225,7 @@
         </p:nvSpPr>
         <p:spPr>
           <a:xfrm>
-            <a:off x="9817608" y="3399739"/>
+            <a:off x="9817608" y="3406140"/>
             <a:ext cx="164592" cy="0"/>
           </a:xfrm>
           <a:prstGeom prst="line">
@@ -16242,8 +16248,8 @@
         </p:nvSpPr>
         <p:spPr>
           <a:xfrm>
-            <a:off x="8927592" y="3248863"/>
-            <a:ext cx="890016" cy="301752"/>
+            <a:off x="8881872" y="3255264"/>
+            <a:ext cx="935736" cy="301752"/>
           </a:xfrm>
           <a:prstGeom prst="roundRect">
             <a:avLst>
@@ -16269,8 +16275,8 @@
         </p:nvSpPr>
         <p:spPr>
           <a:xfrm>
-            <a:off x="8964168" y="3322015"/>
-            <a:ext cx="816864" cy="146304"/>
+            <a:off x="8918448" y="3328416"/>
+            <a:ext cx="862584" cy="146304"/>
           </a:xfrm>
           <a:prstGeom prst="rect">
             <a:avLst/>
@@ -16310,8 +16316,8 @@
         </p:nvSpPr>
         <p:spPr>
           <a:xfrm>
-            <a:off x="9982200" y="3248863"/>
-            <a:ext cx="890016" cy="301752"/>
+            <a:off x="9982200" y="3255264"/>
+            <a:ext cx="935736" cy="301752"/>
           </a:xfrm>
           <a:prstGeom prst="roundRect">
             <a:avLst>
@@ -16337,8 +16343,8 @@
         </p:nvSpPr>
         <p:spPr>
           <a:xfrm>
-            <a:off x="10018776" y="3322015"/>
-            <a:ext cx="816864" cy="146304"/>
+            <a:off x="10018776" y="3328416"/>
+            <a:ext cx="862584" cy="146304"/>
           </a:xfrm>
           <a:prstGeom prst="rect">
             <a:avLst/>
@@ -16378,8 +16384,8 @@
         </p:nvSpPr>
         <p:spPr>
           <a:xfrm>
-            <a:off x="7854696" y="3742639"/>
-            <a:ext cx="3035808" cy="158191"/>
+            <a:off x="7763256" y="3749040"/>
+            <a:ext cx="3172968" cy="356616"/>
           </a:xfrm>
           <a:prstGeom prst="rect">
             <a:avLst/>
@@ -16397,7 +16403,7 @@
               <a:buNone/>
             </a:pPr>
             <a:r>
-              <a:rPr lang="en-US" sz="1120" dirty="0">
+              <a:rPr lang="en-US" sz="1040" dirty="0">
                 <a:solidFill>
                   <a:srgbClr val="17364A"/>
                 </a:solidFill>
@@ -16405,9 +16411,9 @@
                 <a:ea typeface="Aptos" pitchFamily="34" charset="-122"/>
                 <a:cs typeface="Aptos" pitchFamily="34" charset="-120"/>
               </a:rPr>
-              <a:t>Implementation work should make dependencies, approvals, training, and sustainment visible before launch.</a:t>
-            </a:r>
-            <a:endParaRPr lang="en-US" sz="1120" dirty="0"/>
+              <a:t>Implementation work should make dependencies, approvals, training, and.</a:t>
+            </a:r>
+            <a:endParaRPr lang="en-US" sz="1040" dirty="0"/>
           </a:p>
         </p:txBody>
       </p:sp>
@@ -16419,12 +16425,12 @@
         </p:nvSpPr>
         <p:spPr>
           <a:xfrm>
-            <a:off x="7635240" y="4184294"/>
-            <a:ext cx="3474720" cy="1466698"/>
+            <a:off x="7543800" y="4389120"/>
+            <a:ext cx="3611880" cy="1261872"/>
           </a:xfrm>
           <a:prstGeom prst="roundRect">
             <a:avLst>
-              <a:gd name="adj" fmla="val 7481"/>
+              <a:gd name="adj" fmla="val 8696"/>
             </a:avLst>
           </a:prstGeom>
           <a:solidFill>
@@ -16446,8 +16452,8 @@
         </p:nvSpPr>
         <p:spPr>
           <a:xfrm>
-            <a:off x="7799832" y="4330598"/>
-            <a:ext cx="3145536" cy="256032"/>
+            <a:off x="7708392" y="4517136"/>
+            <a:ext cx="3282696" cy="228600"/>
           </a:xfrm>
           <a:prstGeom prst="rect">
             <a:avLst/>
@@ -16463,7 +16469,7 @@
               <a:buNone/>
             </a:pPr>
             <a:r>
-              <a:rPr lang="en-US" sz="1300" b="1" dirty="0">
+              <a:rPr lang="en-US" sz="1220" b="1" dirty="0">
                 <a:solidFill>
                   <a:srgbClr val="0068B7"/>
                 </a:solidFill>
@@ -16473,7 +16479,7 @@
               </a:rPr>
               <a:t>Next action</a:t>
             </a:r>
-            <a:endParaRPr lang="en-US" sz="1300" dirty="0"/>
+            <a:endParaRPr lang="en-US" sz="1220" dirty="0"/>
           </a:p>
         </p:txBody>
       </p:sp>
@@ -16485,8 +16491,8 @@
         </p:nvSpPr>
         <p:spPr>
           <a:xfrm>
-            <a:off x="7799832" y="4659782"/>
-            <a:ext cx="3145536" cy="899770"/>
+            <a:off x="7708392" y="4828032"/>
+            <a:ext cx="3282696" cy="749808"/>
           </a:xfrm>
           <a:prstGeom prst="rect">
             <a:avLst/>
@@ -16504,7 +16510,7 @@
               <a:buNone/>
             </a:pPr>
             <a:r>
-              <a:rPr lang="en-US" sz="1320" dirty="0">
+              <a:rPr lang="en-US" sz="1220" dirty="0">
                 <a:solidFill>
                   <a:srgbClr val="17364A"/>
                 </a:solidFill>
@@ -16512,9 +16518,9 @@
                 <a:ea typeface="Aptos" pitchFamily="34" charset="-122"/>
                 <a:cs typeface="Aptos" pitchFamily="34" charset="-120"/>
               </a:rPr>
-              <a:t>Use the concept to clarify workflow changes, dependencies, staffing, procurement requirements, training needs, and implementation checkpoints.</a:t>
-            </a:r>
-            <a:endParaRPr lang="en-US" sz="1320" dirty="0"/>
+              <a:t>Use the concept to clarify workflow changes, dependencies, staffing, procurement.</a:t>
+            </a:r>
+            <a:endParaRPr lang="en-US" sz="1220" dirty="0"/>
           </a:p>
         </p:txBody>
       </p:sp>
@@ -16805,8 +16811,8 @@
         </p:nvSpPr>
         <p:spPr>
           <a:xfrm>
-            <a:off x="868680" y="1508760"/>
-            <a:ext cx="6309360" cy="4160520"/>
+            <a:off x="822960" y="1463040"/>
+            <a:ext cx="6565392" cy="4343400"/>
           </a:xfrm>
           <a:prstGeom prst="rect">
             <a:avLst/>
@@ -16824,7 +16830,7 @@
               <a:buNone/>
             </a:pPr>
             <a:r>
-              <a:rPr lang="en-US" sz="2100" dirty="0">
+              <a:rPr lang="en-US" sz="1920" dirty="0">
                 <a:solidFill>
                   <a:srgbClr val="003A63"/>
                 </a:solidFill>
@@ -16832,16 +16838,16 @@
                 <a:ea typeface="Aptos" pitchFamily="34" charset="-122"/>
                 <a:cs typeface="Aptos" pitchFamily="34" charset="-120"/>
               </a:rPr>
-              <a:t>• Human factors is the discipline of designing systems around human abilities, limits,.</a:t>
-            </a:r>
-            <a:endParaRPr lang="en-US" sz="2100" dirty="0"/>
-          </a:p>
-          <a:p>
-            <a:pPr indent="0" marL="0">
-              <a:buNone/>
-            </a:pPr>
-            <a:r>
-              <a:rPr lang="en-US" sz="2100" dirty="0">
+              <a:t>• Human factors is the discipline of designing systems around human abilities,.</a:t>
+            </a:r>
+            <a:endParaRPr lang="en-US" sz="1920" dirty="0"/>
+          </a:p>
+          <a:p>
+            <a:pPr indent="0" marL="0">
+              <a:buNone/>
+            </a:pPr>
+            <a:r>
+              <a:rPr lang="en-US" sz="1920" dirty="0">
                 <a:solidFill>
                   <a:srgbClr val="003A63"/>
                 </a:solidFill>
@@ -16849,16 +16855,16 @@
                 <a:ea typeface="Aptos" pitchFamily="34" charset="-122"/>
                 <a:cs typeface="Aptos" pitchFamily="34" charset="-120"/>
               </a:rPr>
-              <a:t>• In AI-supported public health work, human factors help agencies ensure that AI outputs are.</a:t>
-            </a:r>
-            <a:endParaRPr lang="en-US" sz="2100" dirty="0"/>
-          </a:p>
-          <a:p>
-            <a:pPr indent="0" marL="0">
-              <a:buNone/>
-            </a:pPr>
-            <a:r>
-              <a:rPr lang="en-US" sz="2100" dirty="0">
+              <a:t>• In AI-supported public health work, human factors help agencies ensure that.</a:t>
+            </a:r>
+            <a:endParaRPr lang="en-US" sz="1920" dirty="0"/>
+          </a:p>
+          <a:p>
+            <a:pPr indent="0" marL="0">
+              <a:buNone/>
+            </a:pPr>
+            <a:r>
+              <a:rPr lang="en-US" sz="1920" dirty="0">
                 <a:solidFill>
                   <a:srgbClr val="003A63"/>
                 </a:solidFill>
@@ -16866,9 +16872,9 @@
                 <a:ea typeface="Aptos" pitchFamily="34" charset="-122"/>
                 <a:cs typeface="Aptos" pitchFamily="34" charset="-120"/>
               </a:rPr>
-              <a:t>• Usability testing is structured observation of how users interact with a tool or workflow.</a:t>
-            </a:r>
-            <a:endParaRPr lang="en-US" sz="2100" dirty="0"/>
+              <a:t>• Usability testing is structured observation of how users interact with a.</a:t>
+            </a:r>
+            <a:endParaRPr lang="en-US" sz="1920" dirty="0"/>
           </a:p>
         </p:txBody>
       </p:sp>
@@ -16880,12 +16886,12 @@
         </p:nvSpPr>
         <p:spPr>
           <a:xfrm>
-            <a:off x="7635240" y="1325880"/>
-            <a:ext cx="3474720" cy="1255471"/>
+            <a:off x="7543800" y="1325880"/>
+            <a:ext cx="3611880" cy="1261872"/>
           </a:xfrm>
           <a:prstGeom prst="roundRect">
             <a:avLst>
-              <a:gd name="adj" fmla="val 8740"/>
+              <a:gd name="adj" fmla="val 8696"/>
             </a:avLst>
           </a:prstGeom>
           <a:solidFill>
@@ -16907,8 +16913,8 @@
         </p:nvSpPr>
         <p:spPr>
           <a:xfrm>
-            <a:off x="7799832" y="1472184"/>
-            <a:ext cx="3145536" cy="256032"/>
+            <a:off x="7708392" y="1453896"/>
+            <a:ext cx="3282696" cy="228600"/>
           </a:xfrm>
           <a:prstGeom prst="rect">
             <a:avLst/>
@@ -16924,7 +16930,7 @@
               <a:buNone/>
             </a:pPr>
             <a:r>
-              <a:rPr lang="en-US" sz="1300" b="1" dirty="0">
+              <a:rPr lang="en-US" sz="1220" b="1" dirty="0">
                 <a:solidFill>
                   <a:srgbClr val="0068B7"/>
                 </a:solidFill>
@@ -16934,7 +16940,7 @@
               </a:rPr>
               <a:t>Implementation cue</a:t>
             </a:r>
-            <a:endParaRPr lang="en-US" sz="1300" dirty="0"/>
+            <a:endParaRPr lang="en-US" sz="1220" dirty="0"/>
           </a:p>
         </p:txBody>
       </p:sp>
@@ -16946,8 +16952,8 @@
         </p:nvSpPr>
         <p:spPr>
           <a:xfrm>
-            <a:off x="7799832" y="1801368"/>
-            <a:ext cx="3145536" cy="688543"/>
+            <a:off x="7708392" y="1764792"/>
+            <a:ext cx="3282696" cy="749808"/>
           </a:xfrm>
           <a:prstGeom prst="rect">
             <a:avLst/>
@@ -16965,7 +16971,7 @@
               <a:buNone/>
             </a:pPr>
             <a:r>
-              <a:rPr lang="en-US" sz="1320" dirty="0">
+              <a:rPr lang="en-US" sz="1220" dirty="0">
                 <a:solidFill>
                   <a:srgbClr val="17364A"/>
                 </a:solidFill>
@@ -16973,9 +16979,9 @@
                 <a:ea typeface="Aptos" pitchFamily="34" charset="-122"/>
                 <a:cs typeface="Aptos" pitchFamily="34" charset="-120"/>
               </a:rPr>
-              <a:t>Human factors is the discipline of designing systems around human abilities, limits, environments, and.</a:t>
-            </a:r>
-            <a:endParaRPr lang="en-US" sz="1320" dirty="0"/>
+              <a:t>Human factors is the discipline of designing systems around human abilities,.</a:t>
+            </a:r>
+            <a:endParaRPr lang="en-US" sz="1220" dirty="0"/>
           </a:p>
         </p:txBody>
       </p:sp>
@@ -16987,12 +16993,12 @@
         </p:nvSpPr>
         <p:spPr>
           <a:xfrm>
-            <a:off x="7635240" y="2718511"/>
-            <a:ext cx="3474720" cy="1328623"/>
+            <a:off x="7543800" y="2724912"/>
+            <a:ext cx="3611880" cy="1527048"/>
           </a:xfrm>
           <a:prstGeom prst="roundRect">
             <a:avLst>
-              <a:gd name="adj" fmla="val 8259"/>
+              <a:gd name="adj" fmla="val 7186"/>
             </a:avLst>
           </a:prstGeom>
           <a:solidFill>
@@ -17014,8 +17020,8 @@
         </p:nvSpPr>
         <p:spPr>
           <a:xfrm>
-            <a:off x="7799832" y="2864815"/>
-            <a:ext cx="3145536" cy="256032"/>
+            <a:off x="7708392" y="2852928"/>
+            <a:ext cx="3282696" cy="228600"/>
           </a:xfrm>
           <a:prstGeom prst="rect">
             <a:avLst/>
@@ -17031,7 +17037,7 @@
               <a:buNone/>
             </a:pPr>
             <a:r>
-              <a:rPr lang="en-US" sz="1300" b="1" dirty="0">
+              <a:rPr lang="en-US" sz="1220" b="1" dirty="0">
                 <a:solidFill>
                   <a:srgbClr val="0068B7"/>
                 </a:solidFill>
@@ -17041,7 +17047,7 @@
               </a:rPr>
               <a:t>Concept checkpoints</a:t>
             </a:r>
-            <a:endParaRPr lang="en-US" sz="1300" dirty="0"/>
+            <a:endParaRPr lang="en-US" sz="1220" dirty="0"/>
           </a:p>
         </p:txBody>
       </p:sp>
@@ -17053,8 +17059,8 @@
         </p:nvSpPr>
         <p:spPr>
           <a:xfrm>
-            <a:off x="7818120" y="3230575"/>
-            <a:ext cx="3090672" cy="670255"/>
+            <a:off x="7726680" y="3182112"/>
+            <a:ext cx="3227832" cy="960120"/>
           </a:xfrm>
           <a:prstGeom prst="rect">
             <a:avLst/>
@@ -17072,7 +17078,7 @@
               <a:buNone/>
             </a:pPr>
             <a:r>
-              <a:rPr lang="en-US" sz="1220" dirty="0">
+              <a:rPr lang="en-US" sz="1140" dirty="0">
                 <a:solidFill>
                   <a:srgbClr val="17364A"/>
                 </a:solidFill>
@@ -17080,16 +17086,16 @@
                 <a:ea typeface="Aptos" pitchFamily="34" charset="-122"/>
                 <a:cs typeface="Aptos" pitchFamily="34" charset="-120"/>
               </a:rPr>
-              <a:t>Human factors is the discipline of designing systems around human.</a:t>
-            </a:r>
-            <a:endParaRPr lang="en-US" sz="1220" dirty="0"/>
-          </a:p>
-          <a:p>
-            <a:pPr indent="0" marL="0">
-              <a:buNone/>
-            </a:pPr>
-            <a:r>
-              <a:rPr lang="en-US" sz="1220" dirty="0">
+              <a:t>Human factors is the discipline of designing.</a:t>
+            </a:r>
+            <a:endParaRPr lang="en-US" sz="1140" dirty="0"/>
+          </a:p>
+          <a:p>
+            <a:pPr indent="0" marL="0">
+              <a:buNone/>
+            </a:pPr>
+            <a:r>
+              <a:rPr lang="en-US" sz="1140" dirty="0">
                 <a:solidFill>
                   <a:srgbClr val="17364A"/>
                 </a:solidFill>
@@ -17097,16 +17103,16 @@
                 <a:ea typeface="Aptos" pitchFamily="34" charset="-122"/>
                 <a:cs typeface="Aptos" pitchFamily="34" charset="-120"/>
               </a:rPr>
-              <a:t>In AI-supported public health work, human factors help agencies.</a:t>
-            </a:r>
-            <a:endParaRPr lang="en-US" sz="1220" dirty="0"/>
-          </a:p>
-          <a:p>
-            <a:pPr indent="0" marL="0">
-              <a:buNone/>
-            </a:pPr>
-            <a:r>
-              <a:rPr lang="en-US" sz="1220" dirty="0">
+              <a:t>In AI-supported public health work, human factors.</a:t>
+            </a:r>
+            <a:endParaRPr lang="en-US" sz="1140" dirty="0"/>
+          </a:p>
+          <a:p>
+            <a:pPr indent="0" marL="0">
+              <a:buNone/>
+            </a:pPr>
+            <a:r>
+              <a:rPr lang="en-US" sz="1140" dirty="0">
                 <a:solidFill>
                   <a:srgbClr val="17364A"/>
                 </a:solidFill>
@@ -17114,9 +17120,9 @@
                 <a:ea typeface="Aptos" pitchFamily="34" charset="-122"/>
                 <a:cs typeface="Aptos" pitchFamily="34" charset="-120"/>
               </a:rPr>
-              <a:t>It can reveal confusion, workarounds, over-trust, alert fatigue,.</a:t>
-            </a:r>
-            <a:endParaRPr lang="en-US" sz="1220" dirty="0"/>
+              <a:t>It can reveal confusion, workarounds, over-trust,.</a:t>
+            </a:r>
+            <a:endParaRPr lang="en-US" sz="1140" dirty="0"/>
           </a:p>
         </p:txBody>
       </p:sp>
@@ -17128,12 +17134,12 @@
         </p:nvSpPr>
         <p:spPr>
           <a:xfrm>
-            <a:off x="7635240" y="4184294"/>
-            <a:ext cx="3474720" cy="1466698"/>
+            <a:off x="7543800" y="4389120"/>
+            <a:ext cx="3611880" cy="1261872"/>
           </a:xfrm>
           <a:prstGeom prst="roundRect">
             <a:avLst>
-              <a:gd name="adj" fmla="val 7481"/>
+              <a:gd name="adj" fmla="val 8696"/>
             </a:avLst>
           </a:prstGeom>
           <a:solidFill>
@@ -17155,8 +17161,8 @@
         </p:nvSpPr>
         <p:spPr>
           <a:xfrm>
-            <a:off x="7799832" y="4330598"/>
-            <a:ext cx="3145536" cy="256032"/>
+            <a:off x="7708392" y="4517136"/>
+            <a:ext cx="3282696" cy="228600"/>
           </a:xfrm>
           <a:prstGeom prst="rect">
             <a:avLst/>
@@ -17172,7 +17178,7 @@
               <a:buNone/>
             </a:pPr>
             <a:r>
-              <a:rPr lang="en-US" sz="1300" b="1" dirty="0">
+              <a:rPr lang="en-US" sz="1220" b="1" dirty="0">
                 <a:solidFill>
                   <a:srgbClr val="0068B7"/>
                 </a:solidFill>
@@ -17182,7 +17188,7 @@
               </a:rPr>
               <a:t>Next action</a:t>
             </a:r>
-            <a:endParaRPr lang="en-US" sz="1300" dirty="0"/>
+            <a:endParaRPr lang="en-US" sz="1220" dirty="0"/>
           </a:p>
         </p:txBody>
       </p:sp>
@@ -17194,8 +17200,8 @@
         </p:nvSpPr>
         <p:spPr>
           <a:xfrm>
-            <a:off x="7799832" y="4659782"/>
-            <a:ext cx="3145536" cy="899770"/>
+            <a:off x="7708392" y="4828032"/>
+            <a:ext cx="3282696" cy="749808"/>
           </a:xfrm>
           <a:prstGeom prst="rect">
             <a:avLst/>
@@ -17213,7 +17219,7 @@
               <a:buNone/>
             </a:pPr>
             <a:r>
-              <a:rPr lang="en-US" sz="1320" dirty="0">
+              <a:rPr lang="en-US" sz="1220" dirty="0">
                 <a:solidFill>
                   <a:srgbClr val="17364A"/>
                 </a:solidFill>
@@ -17221,9 +17227,9 @@
                 <a:ea typeface="Aptos" pitchFamily="34" charset="-122"/>
                 <a:cs typeface="Aptos" pitchFamily="34" charset="-120"/>
               </a:rPr>
-              <a:t>Use the concept to clarify workflow changes, dependencies, staffing, procurement requirements, training needs, and implementation checkpoints.</a:t>
-            </a:r>
-            <a:endParaRPr lang="en-US" sz="1320" dirty="0"/>
+              <a:t>Use the concept to clarify workflow changes, dependencies, staffing, procurement.</a:t>
+            </a:r>
+            <a:endParaRPr lang="en-US" sz="1220" dirty="0"/>
           </a:p>
         </p:txBody>
       </p:sp>

--- a/downloads/presentations/modules/ops-220.pptx
+++ b/downloads/presentations/modules/ops-220.pptx
@@ -9752,7 +9752,7 @@
                 <a:ea typeface="Aptos" pitchFamily="34" charset="-122"/>
                 <a:cs typeface="Aptos" pitchFamily="34" charset="-120"/>
               </a:rPr>
-              <a:t>• 1. What is the best reason to address human factors, workflow integration,.</a:t>
+              <a:t>1. What is the best reason to address human factors, workflow integration,.</a:t>
             </a:r>
             <a:endParaRPr lang="en-US" sz="1920" dirty="0"/>
           </a:p>
@@ -9769,7 +9769,7 @@
                 <a:ea typeface="Aptos" pitchFamily="34" charset="-122"/>
                 <a:cs typeface="Aptos" pitchFamily="34" charset="-120"/>
               </a:rPr>
-              <a:t>• 2. Which practice best supports responsible implementation?</a:t>
+              <a:t>2. Which practice best supports responsible implementation?</a:t>
             </a:r>
             <a:endParaRPr lang="en-US" sz="1920" dirty="0"/>
           </a:p>
@@ -9786,7 +9786,7 @@
                 <a:ea typeface="Aptos" pitchFamily="34" charset="-122"/>
                 <a:cs typeface="Aptos" pitchFamily="34" charset="-120"/>
               </a:rPr>
-              <a:t>• 3. Which statement best describes a common failure mode?</a:t>
+              <a:t>3. Which statement best describes a common failure mode?</a:t>
             </a:r>
             <a:endParaRPr lang="en-US" sz="1920" dirty="0"/>
           </a:p>
@@ -9893,7 +9893,7 @@
                 <a:ea typeface="Aptos" pitchFamily="34" charset="-122"/>
                 <a:cs typeface="Aptos" pitchFamily="34" charset="-120"/>
               </a:rPr>
-              <a:t>1. What is the best reason to address human factors, workflow integration, and.</a:t>
+              <a:t>What is the best reason to address human factors, workflow integration, and.</a:t>
             </a:r>
             <a:endParaRPr lang="en-US" sz="1220" dirty="0"/>
           </a:p>
@@ -10000,41 +10000,7 @@
                 <a:ea typeface="Aptos" pitchFamily="34" charset="-122"/>
                 <a:cs typeface="Aptos" pitchFamily="34" charset="-120"/>
               </a:rPr>
-              <a:t>1.</a:t>
-            </a:r>
-            <a:endParaRPr lang="en-US" sz="1140" dirty="0"/>
-          </a:p>
-          <a:p>
-            <a:pPr indent="0" marL="0">
-              <a:buNone/>
-            </a:pPr>
-            <a:r>
-              <a:rPr lang="en-US" sz="1140" dirty="0">
-                <a:solidFill>
-                  <a:srgbClr val="17364A"/>
-                </a:solidFill>
-                <a:latin typeface="Aptos" pitchFamily="34" charset="0"/>
-                <a:ea typeface="Aptos" pitchFamily="34" charset="-122"/>
-                <a:cs typeface="Aptos" pitchFamily="34" charset="-120"/>
-              </a:rPr>
               <a:t>What is the best reason to address human factors,.</a:t>
-            </a:r>
-            <a:endParaRPr lang="en-US" sz="1140" dirty="0"/>
-          </a:p>
-          <a:p>
-            <a:pPr indent="0" marL="0">
-              <a:buNone/>
-            </a:pPr>
-            <a:r>
-              <a:rPr lang="en-US" sz="1140" dirty="0">
-                <a:solidFill>
-                  <a:srgbClr val="17364A"/>
-                </a:solidFill>
-                <a:latin typeface="Aptos" pitchFamily="34" charset="0"/>
-                <a:ea typeface="Aptos" pitchFamily="34" charset="-122"/>
-                <a:cs typeface="Aptos" pitchFamily="34" charset="-120"/>
-              </a:rPr>
-              <a:t>2.</a:t>
             </a:r>
             <a:endParaRPr lang="en-US" sz="1140" dirty="0"/>
           </a:p>

--- a/downloads/presentations/modules/ops-220.pptx
+++ b/downloads/presentations/modules/ops-220.pptx
@@ -21,14 +21,9 @@
     <p:sldId id="269" r:id="rId15"/>
     <p:sldId id="270" r:id="rId16"/>
     <p:sldId id="271" r:id="rId17"/>
-    <p:sldId id="272" r:id="rId18"/>
-    <p:sldId id="273" r:id="rId19"/>
-    <p:sldId id="274" r:id="rId20"/>
-    <p:sldId id="275" r:id="rId21"/>
-    <p:sldId id="276" r:id="rId22"/>
   </p:sldIdLst>
   <p:notesMasterIdLst>
-    <p:notesMasterId r:id="rId23"/>
+    <p:notesMasterId r:id="rId18"/>
   </p:notesMasterIdLst>
   <p:sldSz cx="12192000" cy="6858000"/>
   <p:notesSz cx="6858000" cy="12192000"/>
@@ -522,8 +517,8 @@
           <a:p>
             <a:r>
               <a:rPr lang="en-US" dirty="0"/>
-              <a:t>OPS 220 Human Factors, Workflow Integration, and Usability Testing
-AI tools succeed or fail inside real public health workflows. Human factors and usability testing help agencies understand how staff actually use systems, where errors may occur, how cognitive load changes, and whether AI outputs support or distort decision-making. This module teaches learners to evaluate workflow fit, interface design, alert burden, documentation burden, and human review practices before deployment.</a:t>
+              <a:t>OPS 220 AI for Environmental Health and Field Operations
+This module introduces responsible AI use in environmental health and field operations. Public health field work may include inspections, complaint investigation, outbreak response, environmental monitoring, emergency preparedness, outreach, and service coordination. AI can support triage, routing, summarization, mapping, scheduling, report drafting, and pattern detection, but it can also create risks if outputs are inaccurate, biased, poorly reviewed, or disconnected from local context. The module is designed for national use and does not name specific approved tools. Agencies vary in inspection systems, environmental health authorities, field data platforms, mobile applications, GIS tools, and AI approval processes. Learners should focus on use case fit, data sensitivity, field workflow realities, human review, and safeguards before AI is introduced.</a:t>
             </a:r>
             <a:endParaRPr lang="en-US" dirty="0"/>
           </a:p>
@@ -611,8 +606,9 @@
           <a:p>
             <a:r>
               <a:rPr lang="en-US" dirty="0"/>
-              <a:t>Public Health Example
-A disease investigator may receive an AI-generated case summary in the surveillance system. If the summary hides uncertainty or makes unsupported claims look official, the investigator may over-trust it. If the summary is too long, poorly organized, or disconnected from source fields, it may not reduce burden. Usability testing would observe investigators using the summary and identify changes needed before launch.
+              <a:t>Application to AI-Supported Workflows
+A responsible field AI workflow should include intake, data classification, AI-supported organization or triage, human review, documented decision, field action, outcome recording, and monitoring. Staff should know which outputs are advisory and which decisions require professional judgment or supervisory approval. The workflow should also describe how staff correct AI errors and report concerns.
+Field operations also require communication planning. If AI affects inspection prioritization, complaint response, or outreach, the agency should be prepared to explain how the tool is used, what safeguards are in place, and how human staff remain accountable. This helps maintain trust with businesses, residents, workers, and community partners.
 Application guidance: Use the concept to clarify workflow changes, dependencies, staffing, procurement requirements, training needs, and implementation checkpoints.</a:t>
             </a:r>
             <a:endParaRPr lang="en-US" dirty="0"/>
@@ -701,10 +697,10 @@
           <a:p>
             <a:r>
               <a:rPr lang="en-US" dirty="0"/>
-              <a:t>Technical Deep Dive
-Workflow integration begins with current-state mapping. Agencies should document how work happens today, including informal workarounds, duplicate entry, handoffs, delays, and decision points. AI should be introduced only after the team understands which step is being improved and how the change affects users.
-Future-state design should define how staff will see, review, correct, accept, reject, or escalate AI outputs. The user interface should make source information available, show uncertainty when appropriate, and avoid presenting AI outputs as final decisions. Good design supports human judgment rather than bypassing it.
-Usability testing should include realistic users, realistic tasks, and realistic data. Testing should evaluate not only whether users can complete a task, but also whether they understand the AI output, recognize limitations, know when to escalate, and can document their final decision.
+              <a:t>Reflection Questions
+What field decisions should never be automated without human review?
+What location or complaint data would require special protection before AI use?
+How would you monitor whether AI-supported triage is fair and useful?
 Application guidance: Use the concept to clarify workflow changes, dependencies, staffing, procurement requirements, training needs, and implementation checkpoints.</a:t>
             </a:r>
             <a:endParaRPr lang="en-US" dirty="0"/>
@@ -793,11 +789,11 @@
           <a:p>
             <a:r>
               <a:rPr lang="en-US" dirty="0"/>
-              <a:t>Risks, Failure Modes, and Guardrails
-A common failure mode is treating the topic as a technical detail rather than a public health control. When staff do not connect technical decisions to authority, workflow, equity, privacy, security, and accountability, the agency may adopt a tool that appears useful but cannot be sustained or defended.
-Another risk is relying on vendor claims without agency-defined evidence. Vendors may provide demonstrations, dashboards, or summary metrics that do not match the agency workflow or data environment. A guardrail is to require documentation, test results, acceptance criteria, and agency-controlled review.
-A third risk is failing to plan for change. Public health data, policies, systems, and emergencies change. Any technical approach must include monitoring, review, versioning, escalation, and retirement pathways so the agency can respond when assumptions no longer hold.
-Application guidance: Identify what could go wrong, who could be affected, what safeguards are needed, and what evidence should be reviewed before use expands.</a:t>
+              <a:t>Practical Exercise
+Create an AI field workflow review for a fictional environmental health or field operations use case. Choose a use case such as complaint triage, inspection scheduling, emergency outreach routing, environmental hazard report summarization, or field note drafting. Use fictional or generalized information only.
+Your review should include workflow steps, data involved, sensitive fields, potential benefits, prohibited AI actions, human review points, equity concerns, field staff feedback needs, monitoring indicators, and escalation triggers.
+Example: For food safety complaint triage, the learner identifies complaint text, facility name, symptoms, address, and inspection history as sensitive data elements. The workflow allows AI to suggest priority but requires an inspector or supervisor to approve action, tracks false negatives, and monitors whether complaints from under-resourced neighborhoods are missed.
+Application guidance: Use the assignment to test whether you can explain the concept, apply it to a realistic public health situation, and identify what would need review before the work moves forward.</a:t>
             </a:r>
             <a:endParaRPr lang="en-US" dirty="0"/>
           </a:p>
@@ -885,9 +881,9 @@
           <a:p>
             <a:r>
               <a:rPr lang="en-US" dirty="0"/>
-              <a:t>Application to AI-Supported Workflows
-Generative AI, predictive analytics, RAG, automation, and agentic workflows all depend on the controls described in this module. The controls should be scaled to the risk of the use case. A tool that drafts internal training text may require lighter review than a tool that updates case records, prioritizes outreach, or supports public communication during an emergency.
-The module should be applied during readiness assessment, procurement, implementation planning, pilot testing, and post-deployment monitoring. Learners should document how the topic affects data, systems, users, safeguards, and decision-making for the selected workflow.
+              <a:t>Expected Artifact or Evidence
+AI Field Workflow Review
+Field AI Safeguards and Monitoring Plan
 Application guidance: Use the concept to clarify workflow changes, dependencies, staffing, procurement requirements, training needs, and implementation checkpoints.</a:t>
             </a:r>
             <a:endParaRPr lang="en-US" dirty="0"/>
@@ -976,11 +972,13 @@
           <a:p>
             <a:r>
               <a:rPr lang="en-US" dirty="0"/>
-              <a:t>Reflection Questions
-Where does this topic appear in one current or proposed AI workflow in your agency?
-What decisions, data sources, users, or partners would be affected if this area is poorly designed?
-What evidence would governance reviewers need before approving the workflow?
-Application guidance: Use the concept to clarify workflow changes, dependencies, staffing, procurement requirements, training needs, and implementation checkpoints.</a:t>
+              <a:t>Knowledge Check
+1. What is the most important first step after completing the AI for Environmental Health and Field Operations module?
+2. Which practice best supports responsible AI use in public health?
+3. Which statement best reflects the risk or guardrail for this module: A key risk is inappropriate prioritization. AI may under-prioritize complaints from communities with lower reporting access or over-prioritize facilities that have more documented history because they have been inspected more often. Guardrails include subgroup review, field staff validation, review of false negatives, and monitoring for geographic or facility-type disparities.
+Another risk is unsafe automation of regulatory or enforcement action. AI should not independently issue citations, enforcement actions, closure recommendations, or public notices without authorized human review. Guardrails include prohibited actions, human approval points, audit logs, and clear documentation of decision authority.
+A third risk is exposing sensitive field data through unapproved AI tools. Addresses, photos, complaint details, facility records, and environmental hazard information may be sensitive or restricted. Guardrails include approved platforms, data minimization, access controls, geospatial suppression, and privacy/security review.
+Application guidance: Use the assignment to test whether you can explain the concept, apply it to a realistic public health situation, and identify what would need review before the work moves forward.</a:t>
             </a:r>
             <a:endParaRPr lang="en-US" dirty="0"/>
           </a:p>
@@ -1068,10 +1066,10 @@
           <a:p>
             <a:r>
               <a:rPr lang="en-US" dirty="0"/>
-              <a:t>Reflection Questions
-Which safeguards should be required before pilot testing?
-Who owns ongoing monitoring and review?
-Application guidance: Use the concept to clarify workflow changes, dependencies, staffing, procurement requirements, training needs, and implementation checkpoints.</a:t>
+              <a:t>Knowledge Check
+4. When should a staff member escalate an AI-related concern?
+5. What counts as stronger completion evidence for a training module?
+Application guidance: Use the assignment to test whether you can explain the concept, apply it to a realistic public health situation, and identify what would need review before the work moves forward.</a:t>
             </a:r>
             <a:endParaRPr lang="en-US" dirty="0"/>
           </a:p>
@@ -1159,10 +1157,13 @@
           <a:p>
             <a:r>
               <a:rPr lang="en-US" dirty="0"/>
-              <a:t>Practical Exercise
-Create a workflow usability test plan for one real or realistic public health AI workflow. The artifact should describe the use case, affected users, data sources, system dependencies, risks, guardrails, review points, and unresolved questions.
-The exercise should produce a work product that could be used in a governance meeting, procurement review, implementation planning session, pilot evaluation, or monitoring review. Learners should document assumptions and identify which staff or partners need to be consulted.
-Application guidance: Use the assignment to test whether you can explain the concept, apply it to a realistic public health situation, and identify what would need review before the work moves forward.</a:t>
+              <a:t>References and Resources
+[object Object]
+[object Object]
+[object Object]
+[object Object]
+[object Object]
+Application guidance: Use the concept to clarify workflow changes, dependencies, staffing, procurement requirements, training needs, and implementation checkpoints.</a:t>
             </a:r>
             <a:endParaRPr lang="en-US" dirty="0"/>
           </a:p>
@@ -1186,280 +1187,6 @@
             <a:fld id="{F7021451-1387-4CA6-816F-3879F97B5CBC}" type="slidenum">
               <a:rPr lang="en-US"/>
               <a:t>16</a:t>
-            </a:fld>
-            <a:endParaRPr lang="en-US"/>
-          </a:p>
-        </p:txBody>
-      </p:sp>
-    </p:spTree>
-    <p:extLst>
-      <p:ext uri="{BB962C8B-B14F-4D97-AF65-F5344CB8AC3E}">
-        <p14:creationId xmlns:p14="http://schemas.microsoft.com/office/powerpoint/2010/main" val="1024086991"/>
-      </p:ext>
-    </p:extLst>
-  </p:cSld>
-  <p:clrMapOvr>
-    <a:masterClrMapping/>
-  </p:clrMapOvr>
-</p:notes>
-</file>
-
-<file path=ppt/notesSlides/notesSlide17.xml><?xml version="1.0" encoding="utf-8"?>
-<p:notes xmlns:a="http://schemas.openxmlformats.org/drawingml/2006/main" xmlns:r="http://schemas.openxmlformats.org/officeDocument/2006/relationships" xmlns:p="http://schemas.openxmlformats.org/presentationml/2006/main">
-  <p:cSld>
-    <p:spTree>
-      <p:nvGrpSpPr>
-        <p:cNvPr id="1" name=""/>
-        <p:cNvGrpSpPr/>
-        <p:nvPr/>
-      </p:nvGrpSpPr>
-      <p:grpSpPr>
-        <a:xfrm>
-          <a:off x="0" y="0"/>
-          <a:ext cx="0" cy="0"/>
-          <a:chOff x="0" y="0"/>
-          <a:chExt cx="0" cy="0"/>
-        </a:xfrm>
-      </p:grpSpPr>
-      <p:sp>
-        <p:nvSpPr>
-          <p:cNvPr id="2" name="Slide Image Placeholder 1"/>
-          <p:cNvSpPr>
-            <a:spLocks noGrp="1" noRot="1" noChangeAspect="1"/>
-          </p:cNvSpPr>
-          <p:nvPr>
-            <p:ph type="sldImg"/>
-          </p:nvPr>
-        </p:nvSpPr>
-        <p:spPr/>
-      </p:sp>
-      <p:sp>
-        <p:nvSpPr>
-          <p:cNvPr id="3" name="Notes Placeholder 2"/>
-          <p:cNvSpPr>
-            <a:spLocks noGrp="1"/>
-          </p:cNvSpPr>
-          <p:nvPr>
-            <p:ph type="body" idx="1"/>
-          </p:nvPr>
-        </p:nvSpPr>
-        <p:spPr/>
-        <p:txBody>
-          <a:bodyPr/>
-          <a:lstStyle/>
-          <a:p>
-            <a:r>
-              <a:rPr lang="en-US" dirty="0"/>
-              <a:t>Expected Artifact or Evidence
-The expected artifact is a completed workflow usability test plan. It should be specific to a public health workflow and should include technical dependencies, governance questions, human review expectations, monitoring indicators, and unresolved risks.
-Application guidance: Use the concept to clarify workflow changes, dependencies, staffing, procurement requirements, training needs, and implementation checkpoints.</a:t>
-            </a:r>
-            <a:endParaRPr lang="en-US" dirty="0"/>
-          </a:p>
-        </p:txBody>
-      </p:sp>
-      <p:sp>
-        <p:nvSpPr>
-          <p:cNvPr id="4" name="Slide Number Placeholder 3"/>
-          <p:cNvSpPr>
-            <a:spLocks noGrp="1"/>
-          </p:cNvSpPr>
-          <p:nvPr>
-            <p:ph type="sldNum" sz="quarter" idx="10"/>
-          </p:nvPr>
-        </p:nvSpPr>
-        <p:spPr/>
-        <p:txBody>
-          <a:bodyPr/>
-          <a:lstStyle/>
-          <a:p>
-            <a:fld id="{F7021451-1387-4CA6-816F-3879F97B5CBC}" type="slidenum">
-              <a:rPr lang="en-US"/>
-              <a:t>17</a:t>
-            </a:fld>
-            <a:endParaRPr lang="en-US"/>
-          </a:p>
-        </p:txBody>
-      </p:sp>
-    </p:spTree>
-    <p:extLst>
-      <p:ext uri="{BB962C8B-B14F-4D97-AF65-F5344CB8AC3E}">
-        <p14:creationId xmlns:p14="http://schemas.microsoft.com/office/powerpoint/2010/main" val="1024086991"/>
-      </p:ext>
-    </p:extLst>
-  </p:cSld>
-  <p:clrMapOvr>
-    <a:masterClrMapping/>
-  </p:clrMapOvr>
-</p:notes>
-</file>
-
-<file path=ppt/notesSlides/notesSlide18.xml><?xml version="1.0" encoding="utf-8"?>
-<p:notes xmlns:a="http://schemas.openxmlformats.org/drawingml/2006/main" xmlns:r="http://schemas.openxmlformats.org/officeDocument/2006/relationships" xmlns:p="http://schemas.openxmlformats.org/presentationml/2006/main">
-  <p:cSld>
-    <p:spTree>
-      <p:nvGrpSpPr>
-        <p:cNvPr id="1" name=""/>
-        <p:cNvGrpSpPr/>
-        <p:nvPr/>
-      </p:nvGrpSpPr>
-      <p:grpSpPr>
-        <a:xfrm>
-          <a:off x="0" y="0"/>
-          <a:ext cx="0" cy="0"/>
-          <a:chOff x="0" y="0"/>
-          <a:chExt cx="0" cy="0"/>
-        </a:xfrm>
-      </p:grpSpPr>
-      <p:sp>
-        <p:nvSpPr>
-          <p:cNvPr id="2" name="Slide Image Placeholder 1"/>
-          <p:cNvSpPr>
-            <a:spLocks noGrp="1" noRot="1" noChangeAspect="1"/>
-          </p:cNvSpPr>
-          <p:nvPr>
-            <p:ph type="sldImg"/>
-          </p:nvPr>
-        </p:nvSpPr>
-        <p:spPr/>
-      </p:sp>
-      <p:sp>
-        <p:nvSpPr>
-          <p:cNvPr id="3" name="Notes Placeholder 2"/>
-          <p:cNvSpPr>
-            <a:spLocks noGrp="1"/>
-          </p:cNvSpPr>
-          <p:nvPr>
-            <p:ph type="body" idx="1"/>
-          </p:nvPr>
-        </p:nvSpPr>
-        <p:spPr/>
-        <p:txBody>
-          <a:bodyPr/>
-          <a:lstStyle/>
-          <a:p>
-            <a:r>
-              <a:rPr lang="en-US" dirty="0"/>
-              <a:t>Expected Assignment
-The expected artifact is a completed workflow usability test plan. It should be specific to a public health workflow and should include technical dependencies, governance questions, human review expectations, monitoring indicators, and unresolved risks.
-Application guidance: Use the assignment to test whether you can explain the concept, apply it to a realistic public health situation, and identify what would need review before the work moves forward.</a:t>
-            </a:r>
-            <a:endParaRPr lang="en-US" dirty="0"/>
-          </a:p>
-        </p:txBody>
-      </p:sp>
-      <p:sp>
-        <p:nvSpPr>
-          <p:cNvPr id="4" name="Slide Number Placeholder 3"/>
-          <p:cNvSpPr>
-            <a:spLocks noGrp="1"/>
-          </p:cNvSpPr>
-          <p:nvPr>
-            <p:ph type="sldNum" sz="quarter" idx="10"/>
-          </p:nvPr>
-        </p:nvSpPr>
-        <p:spPr/>
-        <p:txBody>
-          <a:bodyPr/>
-          <a:lstStyle/>
-          <a:p>
-            <a:fld id="{F7021451-1387-4CA6-816F-3879F97B5CBC}" type="slidenum">
-              <a:rPr lang="en-US"/>
-              <a:t>18</a:t>
-            </a:fld>
-            <a:endParaRPr lang="en-US"/>
-          </a:p>
-        </p:txBody>
-      </p:sp>
-    </p:spTree>
-    <p:extLst>
-      <p:ext uri="{BB962C8B-B14F-4D97-AF65-F5344CB8AC3E}">
-        <p14:creationId xmlns:p14="http://schemas.microsoft.com/office/powerpoint/2010/main" val="1024086991"/>
-      </p:ext>
-    </p:extLst>
-  </p:cSld>
-  <p:clrMapOvr>
-    <a:masterClrMapping/>
-  </p:clrMapOvr>
-</p:notes>
-</file>
-
-<file path=ppt/notesSlides/notesSlide19.xml><?xml version="1.0" encoding="utf-8"?>
-<p:notes xmlns:a="http://schemas.openxmlformats.org/drawingml/2006/main" xmlns:r="http://schemas.openxmlformats.org/officeDocument/2006/relationships" xmlns:p="http://schemas.openxmlformats.org/presentationml/2006/main">
-  <p:cSld>
-    <p:spTree>
-      <p:nvGrpSpPr>
-        <p:cNvPr id="1" name=""/>
-        <p:cNvGrpSpPr/>
-        <p:nvPr/>
-      </p:nvGrpSpPr>
-      <p:grpSpPr>
-        <a:xfrm>
-          <a:off x="0" y="0"/>
-          <a:ext cx="0" cy="0"/>
-          <a:chOff x="0" y="0"/>
-          <a:chExt cx="0" cy="0"/>
-        </a:xfrm>
-      </p:grpSpPr>
-      <p:sp>
-        <p:nvSpPr>
-          <p:cNvPr id="2" name="Slide Image Placeholder 1"/>
-          <p:cNvSpPr>
-            <a:spLocks noGrp="1" noRot="1" noChangeAspect="1"/>
-          </p:cNvSpPr>
-          <p:nvPr>
-            <p:ph type="sldImg"/>
-          </p:nvPr>
-        </p:nvSpPr>
-        <p:spPr/>
-      </p:sp>
-      <p:sp>
-        <p:nvSpPr>
-          <p:cNvPr id="3" name="Notes Placeholder 2"/>
-          <p:cNvSpPr>
-            <a:spLocks noGrp="1"/>
-          </p:cNvSpPr>
-          <p:nvPr>
-            <p:ph type="body" idx="1"/>
-          </p:nvPr>
-        </p:nvSpPr>
-        <p:spPr/>
-        <p:txBody>
-          <a:bodyPr/>
-          <a:lstStyle/>
-          <a:p>
-            <a:r>
-              <a:rPr lang="en-US" dirty="0"/>
-              <a:t>Knowledge Check
-1. What is the best reason to address human factors, workflow integration, and usability testing before deployment?
-2. Which practice best supports responsible implementation?
-3. Which statement best describes a common failure mode?
-4. What should be included in the practical artifact for this module?
-5. When should the issue be escalated for governance or leadership review?
-Application guidance: Use the assignment to test whether you can explain the concept, apply it to a realistic public health situation, and identify what would need review before the work moves forward.</a:t>
-            </a:r>
-            <a:endParaRPr lang="en-US" dirty="0"/>
-          </a:p>
-        </p:txBody>
-      </p:sp>
-      <p:sp>
-        <p:nvSpPr>
-          <p:cNvPr id="4" name="Slide Number Placeholder 3"/>
-          <p:cNvSpPr>
-            <a:spLocks noGrp="1"/>
-          </p:cNvSpPr>
-          <p:nvPr>
-            <p:ph type="sldNum" sz="quarter" idx="10"/>
-          </p:nvPr>
-        </p:nvSpPr>
-        <p:spPr/>
-        <p:txBody>
-          <a:bodyPr/>
-          <a:lstStyle/>
-          <a:p>
-            <a:fld id="{F7021451-1387-4CA6-816F-3879F97B5CBC}" type="slidenum">
-              <a:rPr lang="en-US"/>
-              <a:t>19</a:t>
             </a:fld>
             <a:endParaRPr lang="en-US"/>
           </a:p>
@@ -1525,10 +1252,10 @@
             <a:r>
               <a:rPr lang="en-US" dirty="0"/>
               <a:t>Module Context
-Level: applied/foundational
-Primary track: Operations and Data Quality Track
+Level: Intermediate
+Primary track: Operations and Data Quality
 Appears in tracks: operations-data-quality
-AI tools succeed or fail inside real public health workflows. Human factors and usability testing help agencies understand how staff actually use systems, where errors may occur, how cognitive load changes, and whether AI outputs support or distort decision-making. This module teaches learners to evaluate workflow fit, interface design, alert burden, documentation burden, and human review practices before deployment.</a:t>
+This module introduces responsible AI use in environmental health and field operations. Public health field work may include inspections, complaint investigation, outbreak response, environmental monitoring, emergency preparedness, outreach, and service coordination. AI can support triage, routing, summarization, mapping, scheduling, report drafting, and pattern detection, but it can also create risks if outputs are inaccurate, biased, poorly reviewed, or disconnected from local context. The module is designed for national use and does not name specific approved tools. Agencies vary in inspection systems, environmental health authorities, field data platforms, mobile applications, GIS tools, and AI approval processes. Learners should focus on use case fit, data sensitivity, field workflow realities, human review, and safeguards before AI is introduced.</a:t>
             </a:r>
             <a:endParaRPr lang="en-US" dirty="0"/>
           </a:p>
@@ -1552,190 +1279,6 @@
             <a:fld id="{F7021451-1387-4CA6-816F-3879F97B5CBC}" type="slidenum">
               <a:rPr lang="en-US"/>
               <a:t>2</a:t>
-            </a:fld>
-            <a:endParaRPr lang="en-US"/>
-          </a:p>
-        </p:txBody>
-      </p:sp>
-    </p:spTree>
-    <p:extLst>
-      <p:ext uri="{BB962C8B-B14F-4D97-AF65-F5344CB8AC3E}">
-        <p14:creationId xmlns:p14="http://schemas.microsoft.com/office/powerpoint/2010/main" val="1024086991"/>
-      </p:ext>
-    </p:extLst>
-  </p:cSld>
-  <p:clrMapOvr>
-    <a:masterClrMapping/>
-  </p:clrMapOvr>
-</p:notes>
-</file>
-
-<file path=ppt/notesSlides/notesSlide20.xml><?xml version="1.0" encoding="utf-8"?>
-<p:notes xmlns:a="http://schemas.openxmlformats.org/drawingml/2006/main" xmlns:r="http://schemas.openxmlformats.org/officeDocument/2006/relationships" xmlns:p="http://schemas.openxmlformats.org/presentationml/2006/main">
-  <p:cSld>
-    <p:spTree>
-      <p:nvGrpSpPr>
-        <p:cNvPr id="1" name=""/>
-        <p:cNvGrpSpPr/>
-        <p:nvPr/>
-      </p:nvGrpSpPr>
-      <p:grpSpPr>
-        <a:xfrm>
-          <a:off x="0" y="0"/>
-          <a:ext cx="0" cy="0"/>
-          <a:chOff x="0" y="0"/>
-          <a:chExt cx="0" cy="0"/>
-        </a:xfrm>
-      </p:grpSpPr>
-      <p:sp>
-        <p:nvSpPr>
-          <p:cNvPr id="2" name="Slide Image Placeholder 1"/>
-          <p:cNvSpPr>
-            <a:spLocks noGrp="1" noRot="1" noChangeAspect="1"/>
-          </p:cNvSpPr>
-          <p:nvPr>
-            <p:ph type="sldImg"/>
-          </p:nvPr>
-        </p:nvSpPr>
-        <p:spPr/>
-      </p:sp>
-      <p:sp>
-        <p:nvSpPr>
-          <p:cNvPr id="3" name="Notes Placeholder 2"/>
-          <p:cNvSpPr>
-            <a:spLocks noGrp="1"/>
-          </p:cNvSpPr>
-          <p:nvPr>
-            <p:ph type="body" idx="1"/>
-          </p:nvPr>
-        </p:nvSpPr>
-        <p:spPr/>
-        <p:txBody>
-          <a:bodyPr/>
-          <a:lstStyle/>
-          <a:p>
-            <a:r>
-              <a:rPr lang="en-US" dirty="0"/>
-              <a:t>References and Resources
-NIST AI Risk Management Framework: https://www.nist.gov/itl/ai-risk-management-framework
-AHRQ human factors and usability resources
-NIST Generative AI Profile: https://www.nist.gov/publications/artificial-intelligence-risk-management-framework-generative-artificial-intelligence
-CDC Public Health Data Strategy and Data Modernization resources: https://www.cdc.gov/public-health-data-strategy/php/about/index.html
-OWASP Top 10 for LLM Applications, when security or AI integrations are relevant
-Application guidance: Use the concept to clarify workflow changes, dependencies, staffing, procurement requirements, training needs, and implementation checkpoints.</a:t>
-            </a:r>
-            <a:endParaRPr lang="en-US" dirty="0"/>
-          </a:p>
-        </p:txBody>
-      </p:sp>
-      <p:sp>
-        <p:nvSpPr>
-          <p:cNvPr id="4" name="Slide Number Placeholder 3"/>
-          <p:cNvSpPr>
-            <a:spLocks noGrp="1"/>
-          </p:cNvSpPr>
-          <p:nvPr>
-            <p:ph type="sldNum" sz="quarter" idx="10"/>
-          </p:nvPr>
-        </p:nvSpPr>
-        <p:spPr/>
-        <p:txBody>
-          <a:bodyPr/>
-          <a:lstStyle/>
-          <a:p>
-            <a:fld id="{F7021451-1387-4CA6-816F-3879F97B5CBC}" type="slidenum">
-              <a:rPr lang="en-US"/>
-              <a:t>20</a:t>
-            </a:fld>
-            <a:endParaRPr lang="en-US"/>
-          </a:p>
-        </p:txBody>
-      </p:sp>
-    </p:spTree>
-    <p:extLst>
-      <p:ext uri="{BB962C8B-B14F-4D97-AF65-F5344CB8AC3E}">
-        <p14:creationId xmlns:p14="http://schemas.microsoft.com/office/powerpoint/2010/main" val="1024086991"/>
-      </p:ext>
-    </p:extLst>
-  </p:cSld>
-  <p:clrMapOvr>
-    <a:masterClrMapping/>
-  </p:clrMapOvr>
-</p:notes>
-</file>
-
-<file path=ppt/notesSlides/notesSlide21.xml><?xml version="1.0" encoding="utf-8"?>
-<p:notes xmlns:a="http://schemas.openxmlformats.org/drawingml/2006/main" xmlns:r="http://schemas.openxmlformats.org/officeDocument/2006/relationships" xmlns:p="http://schemas.openxmlformats.org/presentationml/2006/main">
-  <p:cSld>
-    <p:spTree>
-      <p:nvGrpSpPr>
-        <p:cNvPr id="1" name=""/>
-        <p:cNvGrpSpPr/>
-        <p:nvPr/>
-      </p:nvGrpSpPr>
-      <p:grpSpPr>
-        <a:xfrm>
-          <a:off x="0" y="0"/>
-          <a:ext cx="0" cy="0"/>
-          <a:chOff x="0" y="0"/>
-          <a:chExt cx="0" cy="0"/>
-        </a:xfrm>
-      </p:grpSpPr>
-      <p:sp>
-        <p:nvSpPr>
-          <p:cNvPr id="2" name="Slide Image Placeholder 1"/>
-          <p:cNvSpPr>
-            <a:spLocks noGrp="1" noRot="1" noChangeAspect="1"/>
-          </p:cNvSpPr>
-          <p:nvPr>
-            <p:ph type="sldImg"/>
-          </p:nvPr>
-        </p:nvSpPr>
-        <p:spPr/>
-      </p:sp>
-      <p:sp>
-        <p:nvSpPr>
-          <p:cNvPr id="3" name="Notes Placeholder 2"/>
-          <p:cNvSpPr>
-            <a:spLocks noGrp="1"/>
-          </p:cNvSpPr>
-          <p:nvPr>
-            <p:ph type="body" idx="1"/>
-          </p:nvPr>
-        </p:nvSpPr>
-        <p:spPr/>
-        <p:txBody>
-          <a:bodyPr/>
-          <a:lstStyle/>
-          <a:p>
-            <a:r>
-              <a:rPr lang="en-US" dirty="0"/>
-              <a:t>References and Resources
-Agency privacy, cybersecurity, data governance, procurement, and records management policies
-Application guidance: Use the concept to clarify workflow changes, dependencies, staffing, procurement requirements, training needs, and implementation checkpoints.</a:t>
-            </a:r>
-            <a:endParaRPr lang="en-US" dirty="0"/>
-          </a:p>
-        </p:txBody>
-      </p:sp>
-      <p:sp>
-        <p:nvSpPr>
-          <p:cNvPr id="4" name="Slide Number Placeholder 3"/>
-          <p:cNvSpPr>
-            <a:spLocks noGrp="1"/>
-          </p:cNvSpPr>
-          <p:nvPr>
-            <p:ph type="sldNum" sz="quarter" idx="10"/>
-          </p:nvPr>
-        </p:nvSpPr>
-        <p:spPr/>
-        <p:txBody>
-          <a:bodyPr/>
-          <a:lstStyle/>
-          <a:p>
-            <a:fld id="{F7021451-1387-4CA6-816F-3879F97B5CBC}" type="slidenum">
-              <a:rPr lang="en-US"/>
-              <a:t>21</a:t>
             </a:fld>
             <a:endParaRPr lang="en-US"/>
           </a:p>
@@ -1800,11 +1343,13 @@
           <a:p>
             <a:r>
               <a:rPr lang="en-US" dirty="0"/>
-              <a:t>Related Playbook Plays
-Play 11: Build and Deploy AI Solutions - This lesson informs Play 11 by helping learners connect the lesson topic to build and deploy ai solutions work in the AI Playbook.
-Play 2: Readiness Assessment - This lesson informs Play 2 by helping learners connect the lesson topic to readiness assessment work in the AI Playbook sequence.
-Play 1: Vision &amp; Guardrails - This lesson informs Play 1 by helping learners connect the lesson topic to vision &amp; guardrails work in the AI Playbook sequence.
-Play 7: Prioritize Use Cases - This lesson informs Play 7 by helping learners connect the lesson topic to prioritize use cases work in the AI Playbook sequence.</a:t>
+              <a:t>Learning Objectives
+Identify appropriate AI support opportunities in environmental health and field operations.
+Assess data sensitivity, geospatial risk, and operational context for field AI use cases.
+Distinguish advisory decision support from prohibited automation in field workflows.
+Design safeguards for AI-supported inspection, complaint, outreach, or emergency response workflows.
+Create a monitoring plan for field AI impacts, including equity and operational usefulness.
+Application guidance: Use the assignment to test whether you can explain the concept, apply it to a realistic public health situation, and identify what would need review before the work moves forward.</a:t>
             </a:r>
             <a:endParaRPr lang="en-US" dirty="0"/>
           </a:p>
@@ -1892,13 +1437,10 @@
           <a:p>
             <a:r>
               <a:rPr lang="en-US" dirty="0"/>
-              <a:t>Related Toolkit Resources
-Tool 4: AI Policy Landscape Scan (Worksheet) - Use AI Policy Landscape Scan to translate this lesson into a documented public health AI planning, governance, implementation,.
-Tool 5: AI Environmental and Resource Impact Review (Checklist) - Use this tool to complete or strengthen the practical exercise for the module using fictional, de-identified, or generalized.
-Tool 6: Human-Centered AI Decision Rule Checklist (Checklist) - Use Human-Centered AI Decision Rule Checklist to translate this lesson into a documented public health AI planning, governance,.
-Tool 8: AI Project Charter (Planning) - Use AI Project Charter to translate this lesson into a documented public health AI planning, governance, implementation, or.
-Tool 9: Data Quality Assessment Checklist (Checklist) - Use this tool to complete or strengthen the practical exercise for the module using fictional, de-identified, or generalized.
-Tool 10: Tiered Data Classification for AI Use (Worksheet) - Use this tool to complete or strengthen the practical exercise for the module using fictional, de-identified, or generalized.</a:t>
+              <a:t>Module Overview
+This module introduces responsible AI use in environmental health and field operations. Public health field work may include inspections, complaint investigation, outbreak response, environmental monitoring, emergency preparedness, outreach, and service coordination. AI can support triage, routing, summarization, mapping, scheduling, report drafting, and pattern detection, but it can also create risks if outputs are inaccurate, biased, poorly reviewed, or disconnected from local context.
+The module is designed for national use and does not name specific approved tools. Agencies vary in inspection systems, environmental health authorities, field data platforms, mobile applications, GIS tools, and AI approval processes. Learners should focus on use case fit, data sensitivity, field workflow realities, human review, and safeguards before AI is introduced.
+Application guidance: Use the concept to clarify workflow changes, dependencies, staffing, procurement requirements, training needs, and implementation checkpoints.</a:t>
             </a:r>
             <a:endParaRPr lang="en-US" dirty="0"/>
           </a:p>
@@ -1986,13 +1528,9 @@
           <a:p>
             <a:r>
               <a:rPr lang="en-US" dirty="0"/>
-              <a:t>Learning Objectives
-Explain the purpose of human factors, workflow integration, and usability testing in public health AI work.
-Identify the technical, operational, privacy, security, equity, and governance issues associated with the topic.
-Apply the topic to a real or realistic public health workflow, system, or implementation scenario.
-Recognize common failure modes that can affect safety, accuracy, trust, workflow fit, or sustainability.
-Identify practical guardrails that should be documented before implementation.
-Application guidance: Use the assignment to test whether you can explain the concept, apply it to a realistic public health situation, and identify what would need review before the work moves forward.</a:t>
+              <a:t>Jurisdiction and Agency Policy Note
+This national-level module is intended for training and planning purposes. It does not replace legal, privacy, procurement, civil rights, records, cybersecurity, Tribal consultation, labor relations, human resources, or agency policy review. Learners should confirm applicable requirements in their own jurisdiction and organization before implementing AI-supported workflows.
+Application guidance: Translate this concept into clear decision rights, review steps, documentation expectations, and escalation paths before an AI-supported workflow is approved.</a:t>
             </a:r>
             <a:endParaRPr lang="en-US" dirty="0"/>
           </a:p>
@@ -2080,9 +1618,10 @@
           <a:p>
             <a:r>
               <a:rPr lang="en-US" dirty="0"/>
-              <a:t>Learning Objectives
-Produce a workflow usability test plan that can support readiness assessment, governance review, procurement, implementation, or monitoring.
-Application guidance: Use the assignment to test whether you can explain the concept, apply it to a realistic public health situation, and identify what would need review before the work moves forward.</a:t>
+              <a:t>Why This Topic Matters for Public Health AI
+Field operations are where AI recommendations can quickly become real-world actions. An AI-supported prioritization tool might influence which facility is inspected first, which complaint receives urgent follow-up, where outreach occurs, or how limited staff are deployed. These decisions can affect businesses, residents, workers, communities, and public trust.
+Environmental health and field data can include sensitive information such as addresses, facility histories, complaints, enforcement actions, photos, geolocation, environmental hazards, and community vulnerabilities. AI systems using these data must be designed and reviewed carefully. They should support field judgment rather than replace professional assessment, regulatory authority, or community engagement.
+Application guidance: Use the concept to clarify workflow changes, dependencies, staffing, procurement requirements, training needs, and implementation checkpoints.</a:t>
             </a:r>
             <a:endParaRPr lang="en-US" dirty="0"/>
           </a:p>
@@ -2170,8 +1709,9 @@
           <a:p>
             <a:r>
               <a:rPr lang="en-US" dirty="0"/>
-              <a:t>Module Overview
-AI tools succeed or fail inside real public health workflows. Human factors and usability testing help agencies understand how staff actually use systems, where errors may occur, how cognitive load changes, and whether AI outputs support or distort decision-making. This module teaches learners to evaluate workflow fit, interface design, alert burden, documentation burden, and human review practices before deployment.
+              <a:t>Public Health Example
+An environmental health program wants to explore AI-assisted triage of food safety complaints. The proposed system would summarize complaint narratives, identify possible high-risk complaints, and suggest inspection priority. The program hopes this will help staff respond more quickly when complaint volume is high.
+Before moving forward, the team reviews the data involved, including complaint addresses, facility names, complainant details, symptoms, and inspection history. The governance review requires removal or protection of identifiable complainant information, human review of all priority recommendations, documentation of false positives and false negatives, and monitoring to ensure that certain neighborhoods or facility types are not unfairly over- or under-prioritized.
 Application guidance: Use the concept to clarify workflow changes, dependencies, staffing, procurement requirements, training needs, and implementation checkpoints.</a:t>
             </a:r>
             <a:endParaRPr lang="en-US" dirty="0"/>
@@ -2260,9 +1800,10 @@
           <a:p>
             <a:r>
               <a:rPr lang="en-US" dirty="0"/>
-              <a:t>Why This Topic Matters for Public Health AI
-Human Factors, Workflow Integration, and Usability Testing matters because AI systems are embedded in public health programs, data systems, and decision processes rather than operating in isolation. The topic affects whether AI outputs are accurate, explainable, safe, equitable, secure, and sustainable. Agencies that ignore this area may create tools that work in a demonstration but fail in actual practice.
-The topic also affects accountability. Public health agencies must be able to explain how data are used, why a tool was approved, what evidence supports the workflow, who reviews outputs, and what happens when the system fails. These responsibilities become more important as AI tools move from experimentation into operational use.
+              <a:t>Technical, Programmatic, and Operational Deep Dive
+AI use in field operations should be evaluated through workflow mapping. The team should identify where information enters the system, who reviews it, what action may follow, and what legal or operational authority is involved. AI may be useful for organizing information, but field staff must retain authority for professional judgment, inspection decisions, and enforcement actions.
+Data quality is a major issue in field operations. Complaint narratives may be incomplete, photos may be unclear, inspection codes may be inconsistent, and historic data may reflect past inequities in reporting or enforcement. AI systems trained or configured on these data may reproduce existing patterns unless reviewed carefully.
+AI-supported field workflows should be piloted in limited settings before scale. Pilots should include field staff feedback, comparison with current workflow, error analysis, equity review, documentation burden, and monitoring of unintended consequences. A tool that saves time for one role may create additional work or risk for another.
 Application guidance: Use the concept to clarify workflow changes, dependencies, staffing, procurement requirements, training needs, and implementation checkpoints.</a:t>
             </a:r>
             <a:endParaRPr lang="en-US" dirty="0"/>
@@ -2351,11 +1892,11 @@
           <a:p>
             <a:r>
               <a:rPr lang="en-US" dirty="0"/>
-              <a:t>Core Concepts
-Human factors is the discipline of designing systems around human abilities, limits, environments, and tasks. In AI-supported public health work, human factors help agencies ensure that AI outputs are understandable, actionable, and reviewed appropriately.
-Usability testing is structured observation of how users interact with a tool or workflow. It can reveal confusion, workarounds, over-trust, alert fatigue, documentation burden, or steps that are inconsistent with actual practice. Usability testing is a safety activity, not simply a design preference.
-Cognitive load refers to the mental effort required to complete a task. AI can reduce burden by summarizing information, but it can also increase burden if staff must verify unclear outputs, interpret unexplained scores, or resolve conflicting recommendations.
-Application guidance: Use the concept to clarify workflow changes, dependencies, staffing, procurement requirements, training needs, and implementation checkpoints.</a:t>
+              <a:t>Risks, Failure Modes, and Guardrails
+A key risk is inappropriate prioritization. AI may under-prioritize complaints from communities with lower reporting access or over-prioritize facilities that have more documented history because they have been inspected more often. Guardrails include subgroup review, field staff validation, review of false negatives, and monitoring for geographic or facility-type disparities.
+Another risk is unsafe automation of regulatory or enforcement action. AI should not independently issue citations, enforcement actions, closure recommendations, or public notices without authorized human review. Guardrails include prohibited actions, human approval points, audit logs, and clear documentation of decision authority.
+A third risk is exposing sensitive field data through unapproved AI tools. Addresses, photos, complaint details, facility records, and environmental hazard information may be sensitive or restricted. Guardrails include approved platforms, data minimization, access controls, geospatial suppression, and privacy/security review.
+Application guidance: Identify what could go wrong, who could be affected, what safeguards are needed, and what evidence should be reviewed before use expands.</a:t>
             </a:r>
             <a:endParaRPr lang="en-US" dirty="0"/>
           </a:p>
@@ -2874,7 +2415,7 @@
                 <a:ea typeface="Aptos Display" pitchFamily="34" charset="-122"/>
                 <a:cs typeface="Aptos Display" pitchFamily="34" charset="-120"/>
               </a:rPr>
-              <a:t>Human Factors, Workflow Integration, and Usability Testing</a:t>
+              <a:t>AI for Environmental Health and Field Operations</a:t>
             </a:r>
             <a:endParaRPr lang="en-US" sz="3200" dirty="0"/>
           </a:p>
@@ -3073,7 +2614,7 @@
                 <a:ea typeface="Aptos" pitchFamily="34" charset="-122"/>
                 <a:cs typeface="Aptos" pitchFamily="34" charset="-120"/>
               </a:rPr>
-              <a:t>Human Factors, Workflow Integration, and Usability Testing</a:t>
+              <a:t>AI for Environmental Health and Field Operations</a:t>
             </a:r>
             <a:endParaRPr lang="en-US" sz="900" dirty="0"/>
           </a:p>
@@ -3231,7 +2772,7 @@
                 <a:ea typeface="Aptos Display" pitchFamily="34" charset="-122"/>
                 <a:cs typeface="Aptos Display" pitchFamily="34" charset="-120"/>
               </a:rPr>
-              <a:t>Public Health Example</a:t>
+              <a:t>Application to AI-Supported Workflows</a:t>
             </a:r>
             <a:endParaRPr lang="en-US" sz="3400" dirty="0"/>
           </a:p>
@@ -3272,7 +2813,7 @@
                 <a:ea typeface="Aptos" pitchFamily="34" charset="-122"/>
                 <a:cs typeface="Aptos" pitchFamily="34" charset="-120"/>
               </a:rPr>
-              <a:t>• A disease investigator may receive an AI-generated case summary in the.</a:t>
+              <a:t>• A responsible field AI workflow should include intake, data classification,.</a:t>
             </a:r>
             <a:endParaRPr lang="en-US" sz="1920" dirty="0"/>
           </a:p>
@@ -3289,7 +2830,7 @@
                 <a:ea typeface="Aptos" pitchFamily="34" charset="-122"/>
                 <a:cs typeface="Aptos" pitchFamily="34" charset="-120"/>
               </a:rPr>
-              <a:t>• If the summary hides uncertainty or makes unsupported claims look official,.</a:t>
+              <a:t>• Staff should know which outputs are advisory and which decisions require.</a:t>
             </a:r>
             <a:endParaRPr lang="en-US" sz="1920" dirty="0"/>
           </a:p>
@@ -3306,7 +2847,7 @@
                 <a:ea typeface="Aptos" pitchFamily="34" charset="-122"/>
                 <a:cs typeface="Aptos" pitchFamily="34" charset="-120"/>
               </a:rPr>
-              <a:t>• If the summary is too long, poorly organized, or disconnected from source.</a:t>
+              <a:t>• The workflow should also describe how staff correct AI errors and report.</a:t>
             </a:r>
             <a:endParaRPr lang="en-US" sz="1920" dirty="0"/>
           </a:p>
@@ -3413,7 +2954,7 @@
                 <a:ea typeface="Aptos" pitchFamily="34" charset="-122"/>
                 <a:cs typeface="Aptos" pitchFamily="34" charset="-120"/>
               </a:rPr>
-              <a:t>A disease investigator may receive an AI-generated case summary in the.</a:t>
+              <a:t>A responsible field AI workflow should include intake, data classification,.</a:t>
             </a:r>
             <a:endParaRPr lang="en-US" sz="1220" dirty="0"/>
           </a:p>
@@ -3520,7 +3061,7 @@
                 <a:ea typeface="Aptos" pitchFamily="34" charset="-122"/>
                 <a:cs typeface="Aptos" pitchFamily="34" charset="-120"/>
               </a:rPr>
-              <a:t>If the summary hides uncertainty or makes.</a:t>
+              <a:t>A responsible field AI workflow should include.</a:t>
             </a:r>
             <a:endParaRPr lang="en-US" sz="1140" dirty="0"/>
           </a:p>
@@ -3537,7 +3078,7 @@
                 <a:ea typeface="Aptos" pitchFamily="34" charset="-122"/>
                 <a:cs typeface="Aptos" pitchFamily="34" charset="-120"/>
               </a:rPr>
-              <a:t>If the summary is too long, poorly organized, or.</a:t>
+              <a:t>Staff should know which outputs are advisory and.</a:t>
             </a:r>
             <a:endParaRPr lang="en-US" sz="1140" dirty="0"/>
           </a:p>
@@ -3554,7 +3095,7 @@
                 <a:ea typeface="Aptos" pitchFamily="34" charset="-122"/>
                 <a:cs typeface="Aptos" pitchFamily="34" charset="-120"/>
               </a:rPr>
-              <a:t>Usability testing would observe investigators.</a:t>
+              <a:t>Field operations also require communication.</a:t>
             </a:r>
             <a:endParaRPr lang="en-US" sz="1140" dirty="0"/>
           </a:p>
@@ -3782,7 +3323,7 @@
                 <a:ea typeface="Aptos" pitchFamily="34" charset="-122"/>
                 <a:cs typeface="Aptos" pitchFamily="34" charset="-120"/>
               </a:rPr>
-              <a:t>Human Factors, Workflow Integration, and Usability Testing</a:t>
+              <a:t>AI for Environmental Health and Field Operations</a:t>
             </a:r>
             <a:endParaRPr lang="en-US" sz="900" dirty="0"/>
           </a:p>
@@ -3940,7 +3481,7 @@
                 <a:ea typeface="Aptos Display" pitchFamily="34" charset="-122"/>
                 <a:cs typeface="Aptos Display" pitchFamily="34" charset="-120"/>
               </a:rPr>
-              <a:t>Technical Deep Dive</a:t>
+              <a:t>Reflection Questions</a:t>
             </a:r>
             <a:endParaRPr lang="en-US" sz="3400" dirty="0"/>
           </a:p>
@@ -3981,7 +3522,7 @@
                 <a:ea typeface="Aptos" pitchFamily="34" charset="-122"/>
                 <a:cs typeface="Aptos" pitchFamily="34" charset="-120"/>
               </a:rPr>
-              <a:t>• Workflow integration begins with current-state mapping.</a:t>
+              <a:t>• What field decisions should never be automated without human review?</a:t>
             </a:r>
             <a:endParaRPr lang="en-US" sz="1920" dirty="0"/>
           </a:p>
@@ -3998,7 +3539,7 @@
                 <a:ea typeface="Aptos" pitchFamily="34" charset="-122"/>
                 <a:cs typeface="Aptos" pitchFamily="34" charset="-120"/>
               </a:rPr>
-              <a:t>• Agencies should document how work happens today, including informal.</a:t>
+              <a:t>• What location or complaint data would require special protection before AI.</a:t>
             </a:r>
             <a:endParaRPr lang="en-US" sz="1920" dirty="0"/>
           </a:p>
@@ -4015,7 +3556,7 @@
                 <a:ea typeface="Aptos" pitchFamily="34" charset="-122"/>
                 <a:cs typeface="Aptos" pitchFamily="34" charset="-120"/>
               </a:rPr>
-              <a:t>• AI should be introduced only after the team understands which step is being.</a:t>
+              <a:t>• How would you monitor whether AI-supported triage is fair and useful?</a:t>
             </a:r>
             <a:endParaRPr lang="en-US" sz="1920" dirty="0"/>
           </a:p>
@@ -4122,7 +3663,7 @@
                 <a:ea typeface="Aptos" pitchFamily="34" charset="-122"/>
                 <a:cs typeface="Aptos" pitchFamily="34" charset="-120"/>
               </a:rPr>
-              <a:t>Workflow integration begins with current-state mapping.</a:t>
+              <a:t>What field decisions should never be automated without human review?</a:t>
             </a:r>
             <a:endParaRPr lang="en-US" sz="1220" dirty="0"/>
           </a:p>
@@ -4164,16 +3705,55 @@
         <p:spPr>
           <a:xfrm>
             <a:off x="7708392" y="2852928"/>
-            <a:ext cx="3282696" cy="219456"/>
-          </a:xfrm>
-          <a:prstGeom prst="rect">
-            <a:avLst/>
-          </a:prstGeom>
-          <a:noFill/>
-          <a:ln/>
-        </p:spPr>
-        <p:txBody>
-          <a:bodyPr wrap="square" lIns="0" tIns="0" rIns="0" bIns="0" rtlCol="0" anchor="ctr">
+            <a:ext cx="3282696" cy="228600"/>
+          </a:xfrm>
+          <a:prstGeom prst="rect">
+            <a:avLst/>
+          </a:prstGeom>
+          <a:noFill/>
+          <a:ln/>
+        </p:spPr>
+        <p:txBody>
+          <a:bodyPr wrap="square" lIns="0" tIns="0" rIns="0" bIns="0" rtlCol="0" anchor="ctr"/>
+          <a:lstStyle/>
+          <a:p>
+            <a:pPr indent="0" marL="0">
+              <a:buNone/>
+            </a:pPr>
+            <a:r>
+              <a:rPr lang="en-US" sz="1220" b="1" dirty="0">
+                <a:solidFill>
+                  <a:srgbClr val="0068B7"/>
+                </a:solidFill>
+                <a:latin typeface="Aptos" pitchFamily="34" charset="0"/>
+                <a:ea typeface="Aptos" pitchFamily="34" charset="-122"/>
+                <a:cs typeface="Aptos" pitchFamily="34" charset="-120"/>
+              </a:rPr>
+              <a:t>Concept checkpoints</a:t>
+            </a:r>
+            <a:endParaRPr lang="en-US" sz="1220" dirty="0"/>
+          </a:p>
+        </p:txBody>
+      </p:sp>
+      <p:sp>
+        <p:nvSpPr>
+          <p:cNvPr id="15" name="Text 13"/>
+          <p:cNvSpPr/>
+          <p:nvPr/>
+        </p:nvSpPr>
+        <p:spPr>
+          <a:xfrm>
+            <a:off x="7726680" y="3182112"/>
+            <a:ext cx="3227832" cy="960120"/>
+          </a:xfrm>
+          <a:prstGeom prst="rect">
+            <a:avLst/>
+          </a:prstGeom>
+          <a:noFill/>
+          <a:ln/>
+        </p:spPr>
+        <p:txBody>
+          <a:bodyPr wrap="square" lIns="508" tIns="508" rIns="508" bIns="508" rtlCol="0" anchor="t">
             <a:normAutofit/>
           </a:bodyPr>
           <a:lstStyle/>
@@ -4182,314 +3762,57 @@
               <a:buNone/>
             </a:pPr>
             <a:r>
-              <a:rPr lang="en-US" sz="1160" b="1" dirty="0">
-                <a:solidFill>
-                  <a:srgbClr val="0068B7"/>
-                </a:solidFill>
-                <a:latin typeface="Aptos" pitchFamily="34" charset="0"/>
-                <a:ea typeface="Aptos" pitchFamily="34" charset="-122"/>
-                <a:cs typeface="Aptos" pitchFamily="34" charset="-120"/>
-              </a:rPr>
-              <a:t>Implementation path</a:t>
-            </a:r>
-            <a:endParaRPr lang="en-US" sz="1160" dirty="0"/>
-          </a:p>
-        </p:txBody>
-      </p:sp>
-      <p:sp>
-        <p:nvSpPr>
-          <p:cNvPr id="15" name="Shape 13"/>
-          <p:cNvSpPr/>
-          <p:nvPr/>
-        </p:nvSpPr>
-        <p:spPr>
-          <a:xfrm>
-            <a:off x="8717280" y="3406140"/>
-            <a:ext cx="164592" cy="0"/>
-          </a:xfrm>
-          <a:prstGeom prst="line">
-            <a:avLst/>
-          </a:prstGeom>
-          <a:noFill/>
-          <a:ln w="15240">
-            <a:solidFill>
-              <a:srgbClr val="8ABBD8"/>
-            </a:solidFill>
-            <a:prstDash val="solid"/>
-          </a:ln>
-        </p:spPr>
+              <a:rPr lang="en-US" sz="1140" dirty="0">
+                <a:solidFill>
+                  <a:srgbClr val="17364A"/>
+                </a:solidFill>
+                <a:latin typeface="Aptos" pitchFamily="34" charset="0"/>
+                <a:ea typeface="Aptos" pitchFamily="34" charset="-122"/>
+                <a:cs typeface="Aptos" pitchFamily="34" charset="-120"/>
+              </a:rPr>
+              <a:t>What field decisions should never be automated.</a:t>
+            </a:r>
+            <a:endParaRPr lang="en-US" sz="1140" dirty="0"/>
+          </a:p>
+          <a:p>
+            <a:pPr indent="0" marL="0">
+              <a:buNone/>
+            </a:pPr>
+            <a:r>
+              <a:rPr lang="en-US" sz="1140" dirty="0">
+                <a:solidFill>
+                  <a:srgbClr val="17364A"/>
+                </a:solidFill>
+                <a:latin typeface="Aptos" pitchFamily="34" charset="0"/>
+                <a:ea typeface="Aptos" pitchFamily="34" charset="-122"/>
+                <a:cs typeface="Aptos" pitchFamily="34" charset="-120"/>
+              </a:rPr>
+              <a:t>What location or complaint data would require.</a:t>
+            </a:r>
+            <a:endParaRPr lang="en-US" sz="1140" dirty="0"/>
+          </a:p>
+          <a:p>
+            <a:pPr indent="0" marL="0">
+              <a:buNone/>
+            </a:pPr>
+            <a:r>
+              <a:rPr lang="en-US" sz="1140" dirty="0">
+                <a:solidFill>
+                  <a:srgbClr val="17364A"/>
+                </a:solidFill>
+                <a:latin typeface="Aptos" pitchFamily="34" charset="0"/>
+                <a:ea typeface="Aptos" pitchFamily="34" charset="-122"/>
+                <a:cs typeface="Aptos" pitchFamily="34" charset="-120"/>
+              </a:rPr>
+              <a:t>How would you monitor whether AI-supported triage.</a:t>
+            </a:r>
+            <a:endParaRPr lang="en-US" sz="1140" dirty="0"/>
+          </a:p>
+        </p:txBody>
       </p:sp>
       <p:sp>
         <p:nvSpPr>
           <p:cNvPr id="16" name="Shape 14"/>
-          <p:cNvSpPr/>
-          <p:nvPr/>
-        </p:nvSpPr>
-        <p:spPr>
-          <a:xfrm>
-            <a:off x="7781544" y="3255264"/>
-            <a:ext cx="935736" cy="301752"/>
-          </a:xfrm>
-          <a:prstGeom prst="roundRect">
-            <a:avLst>
-              <a:gd name="adj" fmla="val 24242"/>
-            </a:avLst>
-          </a:prstGeom>
-          <a:solidFill>
-            <a:srgbClr val="0068B7"/>
-          </a:solidFill>
-          <a:ln w="12700">
-            <a:solidFill>
-              <a:srgbClr val="0068B7"/>
-            </a:solidFill>
-            <a:prstDash val="solid"/>
-          </a:ln>
-        </p:spPr>
-      </p:sp>
-      <p:sp>
-        <p:nvSpPr>
-          <p:cNvPr id="17" name="Text 15"/>
-          <p:cNvSpPr/>
-          <p:nvPr/>
-        </p:nvSpPr>
-        <p:spPr>
-          <a:xfrm>
-            <a:off x="7818120" y="3328416"/>
-            <a:ext cx="862584" cy="146304"/>
-          </a:xfrm>
-          <a:prstGeom prst="rect">
-            <a:avLst/>
-          </a:prstGeom>
-          <a:noFill/>
-          <a:ln/>
-        </p:spPr>
-        <p:txBody>
-          <a:bodyPr wrap="square" lIns="0" tIns="0" rIns="0" bIns="0" rtlCol="0" anchor="ctr">
-            <a:normAutofit/>
-          </a:bodyPr>
-          <a:lstStyle/>
-          <a:p>
-            <a:pPr algn="ctr" indent="0" marL="0">
-              <a:buNone/>
-            </a:pPr>
-            <a:r>
-              <a:rPr lang="en-US" sz="880" b="1" dirty="0">
-                <a:solidFill>
-                  <a:srgbClr val="FFFFFF"/>
-                </a:solidFill>
-                <a:latin typeface="Aptos" pitchFamily="34" charset="0"/>
-                <a:ea typeface="Aptos" pitchFamily="34" charset="-122"/>
-                <a:cs typeface="Aptos" pitchFamily="34" charset="-120"/>
-              </a:rPr>
-              <a:t>Need</a:t>
-            </a:r>
-            <a:endParaRPr lang="en-US" sz="880" dirty="0"/>
-          </a:p>
-        </p:txBody>
-      </p:sp>
-      <p:sp>
-        <p:nvSpPr>
-          <p:cNvPr id="18" name="Shape 16"/>
-          <p:cNvSpPr/>
-          <p:nvPr/>
-        </p:nvSpPr>
-        <p:spPr>
-          <a:xfrm>
-            <a:off x="9817608" y="3406140"/>
-            <a:ext cx="164592" cy="0"/>
-          </a:xfrm>
-          <a:prstGeom prst="line">
-            <a:avLst/>
-          </a:prstGeom>
-          <a:noFill/>
-          <a:ln w="15240">
-            <a:solidFill>
-              <a:srgbClr val="8ABBD8"/>
-            </a:solidFill>
-            <a:prstDash val="solid"/>
-          </a:ln>
-        </p:spPr>
-      </p:sp>
-      <p:sp>
-        <p:nvSpPr>
-          <p:cNvPr id="19" name="Shape 17"/>
-          <p:cNvSpPr/>
-          <p:nvPr/>
-        </p:nvSpPr>
-        <p:spPr>
-          <a:xfrm>
-            <a:off x="8881872" y="3255264"/>
-            <a:ext cx="935736" cy="301752"/>
-          </a:xfrm>
-          <a:prstGeom prst="roundRect">
-            <a:avLst>
-              <a:gd name="adj" fmla="val 24242"/>
-            </a:avLst>
-          </a:prstGeom>
-          <a:solidFill>
-            <a:srgbClr val="2F8A28"/>
-          </a:solidFill>
-          <a:ln w="12700">
-            <a:solidFill>
-              <a:srgbClr val="2F8A28"/>
-            </a:solidFill>
-            <a:prstDash val="solid"/>
-          </a:ln>
-        </p:spPr>
-      </p:sp>
-      <p:sp>
-        <p:nvSpPr>
-          <p:cNvPr id="20" name="Text 18"/>
-          <p:cNvSpPr/>
-          <p:nvPr/>
-        </p:nvSpPr>
-        <p:spPr>
-          <a:xfrm>
-            <a:off x="8918448" y="3328416"/>
-            <a:ext cx="862584" cy="146304"/>
-          </a:xfrm>
-          <a:prstGeom prst="rect">
-            <a:avLst/>
-          </a:prstGeom>
-          <a:noFill/>
-          <a:ln/>
-        </p:spPr>
-        <p:txBody>
-          <a:bodyPr wrap="square" lIns="0" tIns="0" rIns="0" bIns="0" rtlCol="0" anchor="ctr">
-            <a:normAutofit/>
-          </a:bodyPr>
-          <a:lstStyle/>
-          <a:p>
-            <a:pPr algn="ctr" indent="0" marL="0">
-              <a:buNone/>
-            </a:pPr>
-            <a:r>
-              <a:rPr lang="en-US" sz="880" b="1" dirty="0">
-                <a:solidFill>
-                  <a:srgbClr val="FFFFFF"/>
-                </a:solidFill>
-                <a:latin typeface="Aptos" pitchFamily="34" charset="0"/>
-                <a:ea typeface="Aptos" pitchFamily="34" charset="-122"/>
-                <a:cs typeface="Aptos" pitchFamily="34" charset="-120"/>
-              </a:rPr>
-              <a:t>Build</a:t>
-            </a:r>
-            <a:endParaRPr lang="en-US" sz="880" dirty="0"/>
-          </a:p>
-        </p:txBody>
-      </p:sp>
-      <p:sp>
-        <p:nvSpPr>
-          <p:cNvPr id="21" name="Shape 19"/>
-          <p:cNvSpPr/>
-          <p:nvPr/>
-        </p:nvSpPr>
-        <p:spPr>
-          <a:xfrm>
-            <a:off x="9982200" y="3255264"/>
-            <a:ext cx="935736" cy="301752"/>
-          </a:xfrm>
-          <a:prstGeom prst="roundRect">
-            <a:avLst>
-              <a:gd name="adj" fmla="val 24242"/>
-            </a:avLst>
-          </a:prstGeom>
-          <a:solidFill>
-            <a:srgbClr val="6A4CA3"/>
-          </a:solidFill>
-          <a:ln w="12700">
-            <a:solidFill>
-              <a:srgbClr val="6A4CA3"/>
-            </a:solidFill>
-            <a:prstDash val="solid"/>
-          </a:ln>
-        </p:spPr>
-      </p:sp>
-      <p:sp>
-        <p:nvSpPr>
-          <p:cNvPr id="22" name="Text 20"/>
-          <p:cNvSpPr/>
-          <p:nvPr/>
-        </p:nvSpPr>
-        <p:spPr>
-          <a:xfrm>
-            <a:off x="10018776" y="3328416"/>
-            <a:ext cx="862584" cy="146304"/>
-          </a:xfrm>
-          <a:prstGeom prst="rect">
-            <a:avLst/>
-          </a:prstGeom>
-          <a:noFill/>
-          <a:ln/>
-        </p:spPr>
-        <p:txBody>
-          <a:bodyPr wrap="square" lIns="0" tIns="0" rIns="0" bIns="0" rtlCol="0" anchor="ctr">
-            <a:normAutofit/>
-          </a:bodyPr>
-          <a:lstStyle/>
-          <a:p>
-            <a:pPr algn="ctr" indent="0" marL="0">
-              <a:buNone/>
-            </a:pPr>
-            <a:r>
-              <a:rPr lang="en-US" sz="880" b="1" dirty="0">
-                <a:solidFill>
-                  <a:srgbClr val="FFFFFF"/>
-                </a:solidFill>
-                <a:latin typeface="Aptos" pitchFamily="34" charset="0"/>
-                <a:ea typeface="Aptos" pitchFamily="34" charset="-122"/>
-                <a:cs typeface="Aptos" pitchFamily="34" charset="-120"/>
-              </a:rPr>
-              <a:t>Adopt</a:t>
-            </a:r>
-            <a:endParaRPr lang="en-US" sz="880" dirty="0"/>
-          </a:p>
-        </p:txBody>
-      </p:sp>
-      <p:sp>
-        <p:nvSpPr>
-          <p:cNvPr id="23" name="Text 21"/>
-          <p:cNvSpPr/>
-          <p:nvPr/>
-        </p:nvSpPr>
-        <p:spPr>
-          <a:xfrm>
-            <a:off x="7763256" y="3749040"/>
-            <a:ext cx="3172968" cy="356616"/>
-          </a:xfrm>
-          <a:prstGeom prst="rect">
-            <a:avLst/>
-          </a:prstGeom>
-          <a:noFill/>
-          <a:ln/>
-        </p:spPr>
-        <p:txBody>
-          <a:bodyPr wrap="square" lIns="254" tIns="254" rIns="254" bIns="254" rtlCol="0" anchor="t">
-            <a:normAutofit/>
-          </a:bodyPr>
-          <a:lstStyle/>
-          <a:p>
-            <a:pPr indent="0" marL="0">
-              <a:buNone/>
-            </a:pPr>
-            <a:r>
-              <a:rPr lang="en-US" sz="1040" dirty="0">
-                <a:solidFill>
-                  <a:srgbClr val="17364A"/>
-                </a:solidFill>
-                <a:latin typeface="Aptos" pitchFamily="34" charset="0"/>
-                <a:ea typeface="Aptos" pitchFamily="34" charset="-122"/>
-                <a:cs typeface="Aptos" pitchFamily="34" charset="-120"/>
-              </a:rPr>
-              <a:t>Implementation work should make dependencies, approvals, training, and.</a:t>
-            </a:r>
-            <a:endParaRPr lang="en-US" sz="1040" dirty="0"/>
-          </a:p>
-        </p:txBody>
-      </p:sp>
-      <p:sp>
-        <p:nvSpPr>
-          <p:cNvPr id="24" name="Shape 22"/>
           <p:cNvSpPr/>
           <p:nvPr/>
         </p:nvSpPr>
@@ -4516,7 +3839,7 @@
       </p:sp>
       <p:sp>
         <p:nvSpPr>
-          <p:cNvPr id="25" name="Text 23"/>
+          <p:cNvPr id="17" name="Text 15"/>
           <p:cNvSpPr/>
           <p:nvPr/>
         </p:nvSpPr>
@@ -4555,7 +3878,7 @@
       </p:sp>
       <p:sp>
         <p:nvSpPr>
-          <p:cNvPr id="26" name="Text 24"/>
+          <p:cNvPr id="18" name="Text 16"/>
           <p:cNvSpPr/>
           <p:nvPr/>
         </p:nvSpPr>
@@ -4709,7 +4032,7 @@
                 <a:ea typeface="Aptos" pitchFamily="34" charset="-122"/>
                 <a:cs typeface="Aptos" pitchFamily="34" charset="-120"/>
               </a:rPr>
-              <a:t>Human Factors, Workflow Integration, and Usability Testing</a:t>
+              <a:t>AI for Environmental Health and Field Operations</a:t>
             </a:r>
             <a:endParaRPr lang="en-US" sz="900" dirty="0"/>
           </a:p>
@@ -4867,7 +4190,7 @@
                 <a:ea typeface="Aptos Display" pitchFamily="34" charset="-122"/>
                 <a:cs typeface="Aptos Display" pitchFamily="34" charset="-120"/>
               </a:rPr>
-              <a:t>Risks, Failure Modes, and Guardrails</a:t>
+              <a:t>Practical Exercise</a:t>
             </a:r>
             <a:endParaRPr lang="en-US" sz="3400" dirty="0"/>
           </a:p>
@@ -4908,7 +4231,7 @@
                 <a:ea typeface="Aptos" pitchFamily="34" charset="-122"/>
                 <a:cs typeface="Aptos" pitchFamily="34" charset="-120"/>
               </a:rPr>
-              <a:t>• A common failure mode is treating the topic as a technical detail rather.</a:t>
+              <a:t>• Create an AI field workflow review for a fictional environmental health or.</a:t>
             </a:r>
             <a:endParaRPr lang="en-US" sz="1920" dirty="0"/>
           </a:p>
@@ -4925,7 +4248,7 @@
                 <a:ea typeface="Aptos" pitchFamily="34" charset="-122"/>
                 <a:cs typeface="Aptos" pitchFamily="34" charset="-120"/>
               </a:rPr>
-              <a:t>• When staff do not connect technical decisions to authority, workflow,.</a:t>
+              <a:t>• Choose a use case such as complaint triage, inspection scheduling, emergency.</a:t>
             </a:r>
             <a:endParaRPr lang="en-US" sz="1920" dirty="0"/>
           </a:p>
@@ -4942,7 +4265,7 @@
                 <a:ea typeface="Aptos" pitchFamily="34" charset="-122"/>
                 <a:cs typeface="Aptos" pitchFamily="34" charset="-120"/>
               </a:rPr>
-              <a:t>• Another risk is relying on vendor claims without agency-defined evidence.</a:t>
+              <a:t>• Use fictional or generalized information only.</a:t>
             </a:r>
             <a:endParaRPr lang="en-US" sz="1920" dirty="0"/>
           </a:p>
@@ -5008,7 +4331,7 @@
                 <a:ea typeface="Aptos" pitchFamily="34" charset="-122"/>
                 <a:cs typeface="Aptos" pitchFamily="34" charset="-120"/>
               </a:rPr>
-              <a:t>Risk check</a:t>
+              <a:t>Implementation cue</a:t>
             </a:r>
             <a:endParaRPr lang="en-US" sz="1220" dirty="0"/>
           </a:p>
@@ -5049,7 +4372,7 @@
                 <a:ea typeface="Aptos" pitchFamily="34" charset="-122"/>
                 <a:cs typeface="Aptos" pitchFamily="34" charset="-120"/>
               </a:rPr>
-              <a:t>A common failure mode is treating the topic as a technical detail rather than a.</a:t>
+              <a:t>Create an AI field workflow review for a fictional environmental health or field.</a:t>
             </a:r>
             <a:endParaRPr lang="en-US" sz="1220" dirty="0"/>
           </a:p>
@@ -5156,7 +4479,7 @@
                 <a:ea typeface="Aptos" pitchFamily="34" charset="-122"/>
                 <a:cs typeface="Aptos" pitchFamily="34" charset="-120"/>
               </a:rPr>
-              <a:t>When staff do not connect technical decisions to.</a:t>
+              <a:t>Choose a use case such as complaint triage,.</a:t>
             </a:r>
             <a:endParaRPr lang="en-US" sz="1140" dirty="0"/>
           </a:p>
@@ -5173,7 +4496,7 @@
                 <a:ea typeface="Aptos" pitchFamily="34" charset="-122"/>
                 <a:cs typeface="Aptos" pitchFamily="34" charset="-120"/>
               </a:rPr>
-              <a:t>Vendors may provide demonstrations, dashboards, or.</a:t>
+              <a:t>Your review should include workflow steps, data.</a:t>
             </a:r>
             <a:endParaRPr lang="en-US" sz="1140" dirty="0"/>
           </a:p>
@@ -5190,7 +4513,7 @@
                 <a:ea typeface="Aptos" pitchFamily="34" charset="-122"/>
                 <a:cs typeface="Aptos" pitchFamily="34" charset="-120"/>
               </a:rPr>
-              <a:t>A guardrail is to require documentation, test.</a:t>
+              <a:t>Example: For food safety complaint triage, the.</a:t>
             </a:r>
             <a:endParaRPr lang="en-US" sz="1140" dirty="0"/>
           </a:p>
@@ -5256,7 +4579,7 @@
                 <a:ea typeface="Aptos" pitchFamily="34" charset="-122"/>
                 <a:cs typeface="Aptos" pitchFamily="34" charset="-120"/>
               </a:rPr>
-              <a:t>Safeguard to plan</a:t>
+              <a:t>Next action</a:t>
             </a:r>
             <a:endParaRPr lang="en-US" sz="1220" dirty="0"/>
           </a:p>
@@ -5297,7 +4620,7 @@
                 <a:ea typeface="Aptos" pitchFamily="34" charset="-122"/>
                 <a:cs typeface="Aptos" pitchFamily="34" charset="-120"/>
               </a:rPr>
-              <a:t>Identify what could go wrong, who could be affected, what safeguards are needed,.</a:t>
+              <a:t>Use the assignment to test whether you can explain the concept, apply it to a.</a:t>
             </a:r>
             <a:endParaRPr lang="en-US" sz="1220" dirty="0"/>
           </a:p>
@@ -5418,7 +4741,7 @@
                 <a:ea typeface="Aptos" pitchFamily="34" charset="-122"/>
                 <a:cs typeface="Aptos" pitchFamily="34" charset="-120"/>
               </a:rPr>
-              <a:t>Human Factors, Workflow Integration, and Usability Testing</a:t>
+              <a:t>AI for Environmental Health and Field Operations</a:t>
             </a:r>
             <a:endParaRPr lang="en-US" sz="900" dirty="0"/>
           </a:p>
@@ -5576,7 +4899,7 @@
                 <a:ea typeface="Aptos Display" pitchFamily="34" charset="-122"/>
                 <a:cs typeface="Aptos Display" pitchFamily="34" charset="-120"/>
               </a:rPr>
-              <a:t>Application to AI-Supported Workflows</a:t>
+              <a:t>Expected Artifact or Evidence</a:t>
             </a:r>
             <a:endParaRPr lang="en-US" sz="3400" dirty="0"/>
           </a:p>
@@ -5617,7 +4940,7 @@
                 <a:ea typeface="Aptos" pitchFamily="34" charset="-122"/>
                 <a:cs typeface="Aptos" pitchFamily="34" charset="-120"/>
               </a:rPr>
-              <a:t>• Generative AI, predictive analytics, RAG, automation, and agentic workflows.</a:t>
+              <a:t>• AI Field Workflow Review</a:t>
             </a:r>
             <a:endParaRPr lang="en-US" sz="1920" dirty="0"/>
           </a:p>
@@ -5634,24 +4957,7 @@
                 <a:ea typeface="Aptos" pitchFamily="34" charset="-122"/>
                 <a:cs typeface="Aptos" pitchFamily="34" charset="-120"/>
               </a:rPr>
-              <a:t>• The controls should be scaled to the risk of the use case.</a:t>
-            </a:r>
-            <a:endParaRPr lang="en-US" sz="1920" dirty="0"/>
-          </a:p>
-          <a:p>
-            <a:pPr indent="0" marL="0">
-              <a:buNone/>
-            </a:pPr>
-            <a:r>
-              <a:rPr lang="en-US" sz="1920" dirty="0">
-                <a:solidFill>
-                  <a:srgbClr val="003A63"/>
-                </a:solidFill>
-                <a:latin typeface="Aptos" pitchFamily="34" charset="0"/>
-                <a:ea typeface="Aptos" pitchFamily="34" charset="-122"/>
-                <a:cs typeface="Aptos" pitchFamily="34" charset="-120"/>
-              </a:rPr>
-              <a:t>• A tool that drafts internal training text may require lighter review than a.</a:t>
+              <a:t>• Field AI Safeguards and Monitoring Plan</a:t>
             </a:r>
             <a:endParaRPr lang="en-US" sz="1920" dirty="0"/>
           </a:p>
@@ -5758,7 +5064,7 @@
                 <a:ea typeface="Aptos" pitchFamily="34" charset="-122"/>
                 <a:cs typeface="Aptos" pitchFamily="34" charset="-120"/>
               </a:rPr>
-              <a:t>Generative AI, predictive analytics, RAG, automation, and agentic workflows all.</a:t>
+              <a:t>AI Field Workflow Review</a:t>
             </a:r>
             <a:endParaRPr lang="en-US" sz="1220" dirty="0"/>
           </a:p>
@@ -5865,7 +5171,7 @@
                 <a:ea typeface="Aptos" pitchFamily="34" charset="-122"/>
                 <a:cs typeface="Aptos" pitchFamily="34" charset="-120"/>
               </a:rPr>
-              <a:t>Generative AI, predictive analytics, RAG,.</a:t>
+              <a:t>AI Field Workflow Review</a:t>
             </a:r>
             <a:endParaRPr lang="en-US" sz="1140" dirty="0"/>
           </a:p>
@@ -5882,24 +5188,7 @@
                 <a:ea typeface="Aptos" pitchFamily="34" charset="-122"/>
                 <a:cs typeface="Aptos" pitchFamily="34" charset="-120"/>
               </a:rPr>
-              <a:t>A tool that drafts internal training text may.</a:t>
-            </a:r>
-            <a:endParaRPr lang="en-US" sz="1140" dirty="0"/>
-          </a:p>
-          <a:p>
-            <a:pPr indent="0" marL="0">
-              <a:buNone/>
-            </a:pPr>
-            <a:r>
-              <a:rPr lang="en-US" sz="1140" dirty="0">
-                <a:solidFill>
-                  <a:srgbClr val="17364A"/>
-                </a:solidFill>
-                <a:latin typeface="Aptos" pitchFamily="34" charset="0"/>
-                <a:ea typeface="Aptos" pitchFamily="34" charset="-122"/>
-                <a:cs typeface="Aptos" pitchFamily="34" charset="-120"/>
-              </a:rPr>
-              <a:t>The module should be applied during readiness.</a:t>
+              <a:t>Field AI Safeguards and Monitoring Plan</a:t>
             </a:r>
             <a:endParaRPr lang="en-US" sz="1140" dirty="0"/>
           </a:p>
@@ -6127,7 +5416,7 @@
                 <a:ea typeface="Aptos" pitchFamily="34" charset="-122"/>
                 <a:cs typeface="Aptos" pitchFamily="34" charset="-120"/>
               </a:rPr>
-              <a:t>Human Factors, Workflow Integration, and Usability Testing</a:t>
+              <a:t>AI for Environmental Health and Field Operations</a:t>
             </a:r>
             <a:endParaRPr lang="en-US" sz="900" dirty="0"/>
           </a:p>
@@ -6285,7 +5574,7 @@
                 <a:ea typeface="Aptos Display" pitchFamily="34" charset="-122"/>
                 <a:cs typeface="Aptos Display" pitchFamily="34" charset="-120"/>
               </a:rPr>
-              <a:t>Reflection Questions</a:t>
+              <a:t>Knowledge Check</a:t>
             </a:r>
             <a:endParaRPr lang="en-US" sz="3400" dirty="0"/>
           </a:p>
@@ -6326,7 +5615,7 @@
                 <a:ea typeface="Aptos" pitchFamily="34" charset="-122"/>
                 <a:cs typeface="Aptos" pitchFamily="34" charset="-120"/>
               </a:rPr>
-              <a:t>• Where does this topic appear in one current or proposed AI workflow in your.</a:t>
+              <a:t>1. What is the most important first step after completing the AI for.</a:t>
             </a:r>
             <a:endParaRPr lang="en-US" sz="1920" dirty="0"/>
           </a:p>
@@ -6343,7 +5632,7 @@
                 <a:ea typeface="Aptos" pitchFamily="34" charset="-122"/>
                 <a:cs typeface="Aptos" pitchFamily="34" charset="-120"/>
               </a:rPr>
-              <a:t>• What decisions, data sources, users, or partners would be affected if this.</a:t>
+              <a:t>2. Which practice best supports responsible AI use in public health?</a:t>
             </a:r>
             <a:endParaRPr lang="en-US" sz="1920" dirty="0"/>
           </a:p>
@@ -6360,7 +5649,7 @@
                 <a:ea typeface="Aptos" pitchFamily="34" charset="-122"/>
                 <a:cs typeface="Aptos" pitchFamily="34" charset="-120"/>
               </a:rPr>
-              <a:t>• What evidence would governance reviewers need before approving the workflow?</a:t>
+              <a:t>3. Which statement best reflects the risk or guardrail for this module: A.</a:t>
             </a:r>
             <a:endParaRPr lang="en-US" sz="1920" dirty="0"/>
           </a:p>
@@ -6467,7 +5756,7 @@
                 <a:ea typeface="Aptos" pitchFamily="34" charset="-122"/>
                 <a:cs typeface="Aptos" pitchFamily="34" charset="-120"/>
               </a:rPr>
-              <a:t>Where does this topic appear in one current or proposed AI workflow in your.</a:t>
+              <a:t>What is the most important first step after completing the AI for Environmental.</a:t>
             </a:r>
             <a:endParaRPr lang="en-US" sz="1220" dirty="0"/>
           </a:p>
@@ -6574,41 +5863,7 @@
                 <a:ea typeface="Aptos" pitchFamily="34" charset="-122"/>
                 <a:cs typeface="Aptos" pitchFamily="34" charset="-120"/>
               </a:rPr>
-              <a:t>Where does this topic appear in one current or.</a:t>
-            </a:r>
-            <a:endParaRPr lang="en-US" sz="1140" dirty="0"/>
-          </a:p>
-          <a:p>
-            <a:pPr indent="0" marL="0">
-              <a:buNone/>
-            </a:pPr>
-            <a:r>
-              <a:rPr lang="en-US" sz="1140" dirty="0">
-                <a:solidFill>
-                  <a:srgbClr val="17364A"/>
-                </a:solidFill>
-                <a:latin typeface="Aptos" pitchFamily="34" charset="0"/>
-                <a:ea typeface="Aptos" pitchFamily="34" charset="-122"/>
-                <a:cs typeface="Aptos" pitchFamily="34" charset="-120"/>
-              </a:rPr>
-              <a:t>What decisions, data sources, users, or partners.</a:t>
-            </a:r>
-            <a:endParaRPr lang="en-US" sz="1140" dirty="0"/>
-          </a:p>
-          <a:p>
-            <a:pPr indent="0" marL="0">
-              <a:buNone/>
-            </a:pPr>
-            <a:r>
-              <a:rPr lang="en-US" sz="1140" dirty="0">
-                <a:solidFill>
-                  <a:srgbClr val="17364A"/>
-                </a:solidFill>
-                <a:latin typeface="Aptos" pitchFamily="34" charset="0"/>
-                <a:ea typeface="Aptos" pitchFamily="34" charset="-122"/>
-                <a:cs typeface="Aptos" pitchFamily="34" charset="-120"/>
-              </a:rPr>
-              <a:t>What evidence would governance reviewers need.</a:t>
+              <a:t>What is the most important first step after.</a:t>
             </a:r>
             <a:endParaRPr lang="en-US" sz="1140" dirty="0"/>
           </a:p>
@@ -6715,7 +5970,7 @@
                 <a:ea typeface="Aptos" pitchFamily="34" charset="-122"/>
                 <a:cs typeface="Aptos" pitchFamily="34" charset="-120"/>
               </a:rPr>
-              <a:t>Use the concept to clarify workflow changes, dependencies, staffing, procurement.</a:t>
+              <a:t>Use the assignment to test whether you can explain the concept, apply it to a.</a:t>
             </a:r>
             <a:endParaRPr lang="en-US" sz="1220" dirty="0"/>
           </a:p>
@@ -6836,7 +6091,7 @@
                 <a:ea typeface="Aptos" pitchFamily="34" charset="-122"/>
                 <a:cs typeface="Aptos" pitchFamily="34" charset="-120"/>
               </a:rPr>
-              <a:t>Human Factors, Workflow Integration, and Usability Testing</a:t>
+              <a:t>AI for Environmental Health and Field Operations</a:t>
             </a:r>
             <a:endParaRPr lang="en-US" sz="900" dirty="0"/>
           </a:p>
@@ -6994,7 +6249,7 @@
                 <a:ea typeface="Aptos Display" pitchFamily="34" charset="-122"/>
                 <a:cs typeface="Aptos Display" pitchFamily="34" charset="-120"/>
               </a:rPr>
-              <a:t>Reflection Questions Continued</a:t>
+              <a:t>Knowledge Check Continued</a:t>
             </a:r>
             <a:endParaRPr lang="en-US" sz="3400" dirty="0"/>
           </a:p>
@@ -7035,7 +6290,7 @@
                 <a:ea typeface="Aptos" pitchFamily="34" charset="-122"/>
                 <a:cs typeface="Aptos" pitchFamily="34" charset="-120"/>
               </a:rPr>
-              <a:t>• Which safeguards should be required before pilot testing?</a:t>
+              <a:t>4. When should a staff member escalate an AI-related concern?</a:t>
             </a:r>
             <a:endParaRPr lang="en-US" sz="1920" dirty="0"/>
           </a:p>
@@ -7052,7 +6307,7 @@
                 <a:ea typeface="Aptos" pitchFamily="34" charset="-122"/>
                 <a:cs typeface="Aptos" pitchFamily="34" charset="-120"/>
               </a:rPr>
-              <a:t>• Who owns ongoing monitoring and review?</a:t>
+              <a:t>5. What counts as stronger completion evidence for a training module?</a:t>
             </a:r>
             <a:endParaRPr lang="en-US" sz="1920" dirty="0"/>
           </a:p>
@@ -7159,7 +6414,7 @@
                 <a:ea typeface="Aptos" pitchFamily="34" charset="-122"/>
                 <a:cs typeface="Aptos" pitchFamily="34" charset="-120"/>
               </a:rPr>
-              <a:t>Which safeguards should be required before pilot testing?</a:t>
+              <a:t>When should a staff member escalate an AI-related concern?</a:t>
             </a:r>
             <a:endParaRPr lang="en-US" sz="1220" dirty="0"/>
           </a:p>
@@ -7266,24 +6521,7 @@
                 <a:ea typeface="Aptos" pitchFamily="34" charset="-122"/>
                 <a:cs typeface="Aptos" pitchFamily="34" charset="-120"/>
               </a:rPr>
-              <a:t>Which safeguards should be required before pilot.</a:t>
-            </a:r>
-            <a:endParaRPr lang="en-US" sz="1140" dirty="0"/>
-          </a:p>
-          <a:p>
-            <a:pPr indent="0" marL="0">
-              <a:buNone/>
-            </a:pPr>
-            <a:r>
-              <a:rPr lang="en-US" sz="1140" dirty="0">
-                <a:solidFill>
-                  <a:srgbClr val="17364A"/>
-                </a:solidFill>
-                <a:latin typeface="Aptos" pitchFamily="34" charset="0"/>
-                <a:ea typeface="Aptos" pitchFamily="34" charset="-122"/>
-                <a:cs typeface="Aptos" pitchFamily="34" charset="-120"/>
-              </a:rPr>
-              <a:t>Who owns ongoing monitoring and review?</a:t>
+              <a:t>When should a staff member escalate an AI-related.</a:t>
             </a:r>
             <a:endParaRPr lang="en-US" sz="1140" dirty="0"/>
           </a:p>
@@ -7390,7 +6628,7 @@
                 <a:ea typeface="Aptos" pitchFamily="34" charset="-122"/>
                 <a:cs typeface="Aptos" pitchFamily="34" charset="-120"/>
               </a:rPr>
-              <a:t>Use the concept to clarify workflow changes, dependencies, staffing, procurement.</a:t>
+              <a:t>Use the assignment to test whether you can explain the concept, apply it to a.</a:t>
             </a:r>
             <a:endParaRPr lang="en-US" sz="1220" dirty="0"/>
           </a:p>
@@ -7511,7 +6749,7 @@
                 <a:ea typeface="Aptos" pitchFamily="34" charset="-122"/>
                 <a:cs typeface="Aptos" pitchFamily="34" charset="-120"/>
               </a:rPr>
-              <a:t>Human Factors, Workflow Integration, and Usability Testing</a:t>
+              <a:t>AI for Environmental Health and Field Operations</a:t>
             </a:r>
             <a:endParaRPr lang="en-US" sz="900" dirty="0"/>
           </a:p>
@@ -7669,7 +6907,7 @@
                 <a:ea typeface="Aptos Display" pitchFamily="34" charset="-122"/>
                 <a:cs typeface="Aptos Display" pitchFamily="34" charset="-120"/>
               </a:rPr>
-              <a:t>Practical Exercise</a:t>
+              <a:t>References and Resources</a:t>
             </a:r>
             <a:endParaRPr lang="en-US" sz="3400" dirty="0"/>
           </a:p>
@@ -7710,7 +6948,7 @@
                 <a:ea typeface="Aptos" pitchFamily="34" charset="-122"/>
                 <a:cs typeface="Aptos" pitchFamily="34" charset="-120"/>
               </a:rPr>
-              <a:t>• Create a workflow usability test plan for one real or realistic public.</a:t>
+              <a:t>• [object Object]</a:t>
             </a:r>
             <a:endParaRPr lang="en-US" sz="1920" dirty="0"/>
           </a:p>
@@ -7727,7 +6965,7 @@
                 <a:ea typeface="Aptos" pitchFamily="34" charset="-122"/>
                 <a:cs typeface="Aptos" pitchFamily="34" charset="-120"/>
               </a:rPr>
-              <a:t>• The artifact should describe the use case, affected users, data sources,.</a:t>
+              <a:t>• [object Object]</a:t>
             </a:r>
             <a:endParaRPr lang="en-US" sz="1920" dirty="0"/>
           </a:p>
@@ -7744,7 +6982,7 @@
                 <a:ea typeface="Aptos" pitchFamily="34" charset="-122"/>
                 <a:cs typeface="Aptos" pitchFamily="34" charset="-120"/>
               </a:rPr>
-              <a:t>• The exercise should produce a work product that could be used in a.</a:t>
+              <a:t>• [object Object]</a:t>
             </a:r>
             <a:endParaRPr lang="en-US" sz="1920" dirty="0"/>
           </a:p>
@@ -7851,7 +7089,7 @@
                 <a:ea typeface="Aptos" pitchFamily="34" charset="-122"/>
                 <a:cs typeface="Aptos" pitchFamily="34" charset="-120"/>
               </a:rPr>
-              <a:t>Create a workflow usability test plan for one real or realistic public health AI.</a:t>
+              <a:t>[object Object]</a:t>
             </a:r>
             <a:endParaRPr lang="en-US" sz="1220" dirty="0"/>
           </a:p>
@@ -7958,7 +7196,7 @@
                 <a:ea typeface="Aptos" pitchFamily="34" charset="-122"/>
                 <a:cs typeface="Aptos" pitchFamily="34" charset="-120"/>
               </a:rPr>
-              <a:t>The artifact should describe the use case,.</a:t>
+              <a:t>[object Object]</a:t>
             </a:r>
             <a:endParaRPr lang="en-US" sz="1140" dirty="0"/>
           </a:p>
@@ -7975,7 +7213,7 @@
                 <a:ea typeface="Aptos" pitchFamily="34" charset="-122"/>
                 <a:cs typeface="Aptos" pitchFamily="34" charset="-120"/>
               </a:rPr>
-              <a:t>The exercise should produce a work product that.</a:t>
+              <a:t>[object Object]</a:t>
             </a:r>
             <a:endParaRPr lang="en-US" sz="1140" dirty="0"/>
           </a:p>
@@ -7992,7 +7230,7 @@
                 <a:ea typeface="Aptos" pitchFamily="34" charset="-122"/>
                 <a:cs typeface="Aptos" pitchFamily="34" charset="-120"/>
               </a:rPr>
-              <a:t>Learners should document assumptions and identify.</a:t>
+              <a:t>[object Object]</a:t>
             </a:r>
             <a:endParaRPr lang="en-US" sz="1140" dirty="0"/>
           </a:p>
@@ -8099,2015 +7337,7 @@
                 <a:ea typeface="Aptos" pitchFamily="34" charset="-122"/>
                 <a:cs typeface="Aptos" pitchFamily="34" charset="-120"/>
               </a:rPr>
-              <a:t>Use the assignment to test whether you can explain the concept, apply it to a.</a:t>
-            </a:r>
-            <a:endParaRPr lang="en-US" sz="1220" dirty="0"/>
-          </a:p>
-        </p:txBody>
-      </p:sp>
-    </p:spTree>
-  </p:cSld>
-  <p:clrMapOvr>
-    <a:masterClrMapping/>
-  </p:clrMapOvr>
-</p:sld>
-</file>
-
-<file path=ppt/slides/slide17.xml><?xml version="1.0" encoding="utf-8"?>
-<p:sld xmlns:a="http://schemas.openxmlformats.org/drawingml/2006/main" xmlns:r="http://schemas.openxmlformats.org/officeDocument/2006/relationships" xmlns:p="http://schemas.openxmlformats.org/presentationml/2006/main">
-  <p:cSld name="Slide 17">
-    <p:bg>
-      <p:bgPr>
-        <a:solidFill>
-          <a:srgbClr val="F7FBFD"/>
-        </a:solidFill>
-      </p:bgPr>
-    </p:bg>
-    <p:spTree>
-      <p:nvGrpSpPr>
-        <p:cNvPr id="1" name=""/>
-        <p:cNvGrpSpPr/>
-        <p:nvPr/>
-      </p:nvGrpSpPr>
-      <p:grpSpPr>
-        <a:xfrm>
-          <a:off x="0" y="0"/>
-          <a:ext cx="0" cy="0"/>
-          <a:chOff x="0" y="0"/>
-          <a:chExt cx="0" cy="0"/>
-        </a:xfrm>
-      </p:grpSpPr>
-      <p:sp>
-        <p:nvSpPr>
-          <p:cNvPr id="2" name="Shape 0"/>
-          <p:cNvSpPr/>
-          <p:nvPr/>
-        </p:nvSpPr>
-        <p:spPr>
-          <a:xfrm>
-            <a:off x="0" y="0"/>
-            <a:ext cx="12191695" cy="164592"/>
-          </a:xfrm>
-          <a:prstGeom prst="rect">
-            <a:avLst/>
-          </a:prstGeom>
-          <a:solidFill>
-            <a:srgbClr val="0068B7"/>
-          </a:solidFill>
-          <a:ln w="12700">
-            <a:solidFill>
-              <a:srgbClr val="0068B7"/>
-            </a:solidFill>
-            <a:prstDash val="solid"/>
-          </a:ln>
-        </p:spPr>
-      </p:sp>
-      <p:sp>
-        <p:nvSpPr>
-          <p:cNvPr id="3" name="Shape 1"/>
-          <p:cNvSpPr/>
-          <p:nvPr/>
-        </p:nvSpPr>
-        <p:spPr>
-          <a:xfrm>
-            <a:off x="0" y="164592"/>
-            <a:ext cx="146304" cy="6693408"/>
-          </a:xfrm>
-          <a:prstGeom prst="rect">
-            <a:avLst/>
-          </a:prstGeom>
-          <a:solidFill>
-            <a:srgbClr val="2F8A28"/>
-          </a:solidFill>
-          <a:ln w="12700">
-            <a:solidFill>
-              <a:srgbClr val="2F8A28"/>
-            </a:solidFill>
-            <a:prstDash val="solid"/>
-          </a:ln>
-        </p:spPr>
-      </p:sp>
-      <p:sp>
-        <p:nvSpPr>
-          <p:cNvPr id="4" name="Text 2"/>
-          <p:cNvSpPr/>
-          <p:nvPr/>
-        </p:nvSpPr>
-        <p:spPr>
-          <a:xfrm>
-            <a:off x="502920" y="292608"/>
-            <a:ext cx="10149840" cy="256032"/>
-          </a:xfrm>
-          <a:prstGeom prst="rect">
-            <a:avLst/>
-          </a:prstGeom>
-          <a:noFill/>
-          <a:ln/>
-        </p:spPr>
-        <p:txBody>
-          <a:bodyPr wrap="square" lIns="0" tIns="0" rIns="0" bIns="0" rtlCol="0" anchor="ctr"/>
-          <a:lstStyle/>
-          <a:p>
-            <a:pPr indent="0" marL="0">
-              <a:buNone/>
-            </a:pPr>
-            <a:r>
-              <a:rPr lang="en-US" sz="900" b="1" dirty="0">
-                <a:solidFill>
-                  <a:srgbClr val="5F7181"/>
-                </a:solidFill>
-                <a:latin typeface="Aptos" pitchFamily="34" charset="0"/>
-                <a:ea typeface="Aptos" pitchFamily="34" charset="-122"/>
-                <a:cs typeface="Aptos" pitchFamily="34" charset="-120"/>
-              </a:rPr>
-              <a:t>Human Factors, Workflow Integration, and Usability Testing</a:t>
-            </a:r>
-            <a:endParaRPr lang="en-US" sz="900" dirty="0"/>
-          </a:p>
-        </p:txBody>
-      </p:sp>
-      <p:sp>
-        <p:nvSpPr>
-          <p:cNvPr id="5" name="Text 3"/>
-          <p:cNvSpPr/>
-          <p:nvPr/>
-        </p:nvSpPr>
-        <p:spPr>
-          <a:xfrm>
-            <a:off x="502920" y="6537960"/>
-            <a:ext cx="7772400" cy="201168"/>
-          </a:xfrm>
-          <a:prstGeom prst="rect">
-            <a:avLst/>
-          </a:prstGeom>
-          <a:noFill/>
-          <a:ln/>
-        </p:spPr>
-        <p:txBody>
-          <a:bodyPr wrap="square" lIns="0" tIns="0" rIns="0" bIns="0" rtlCol="0" anchor="ctr"/>
-          <a:lstStyle/>
-          <a:p>
-            <a:pPr indent="0" marL="0">
-              <a:buNone/>
-            </a:pPr>
-            <a:r>
-              <a:rPr lang="en-US" sz="800" dirty="0">
-                <a:solidFill>
-                  <a:srgbClr val="5F7181"/>
-                </a:solidFill>
-                <a:latin typeface="Aptos" pitchFamily="34" charset="0"/>
-                <a:ea typeface="Aptos" pitchFamily="34" charset="-122"/>
-                <a:cs typeface="Aptos" pitchFamily="34" charset="-120"/>
-              </a:rPr>
-              <a:t>AI Playbook and Toolkit for Public Health Departments</a:t>
-            </a:r>
-            <a:endParaRPr lang="en-US" sz="800" dirty="0"/>
-          </a:p>
-        </p:txBody>
-      </p:sp>
-      <p:sp>
-        <p:nvSpPr>
-          <p:cNvPr id="6" name="Text 4"/>
-          <p:cNvSpPr/>
-          <p:nvPr/>
-        </p:nvSpPr>
-        <p:spPr>
-          <a:xfrm>
-            <a:off x="9646920" y="6537960"/>
-            <a:ext cx="1965960" cy="201168"/>
-          </a:xfrm>
-          <a:prstGeom prst="rect">
-            <a:avLst/>
-          </a:prstGeom>
-          <a:noFill/>
-          <a:ln/>
-        </p:spPr>
-        <p:txBody>
-          <a:bodyPr wrap="square" lIns="0" tIns="0" rIns="0" bIns="0" rtlCol="0" anchor="ctr"/>
-          <a:lstStyle/>
-          <a:p>
-            <a:pPr algn="r" indent="0" marL="0">
-              <a:buNone/>
-            </a:pPr>
-            <a:r>
-              <a:rPr lang="en-US" sz="800" dirty="0">
-                <a:solidFill>
-                  <a:srgbClr val="5F7181"/>
-                </a:solidFill>
-                <a:latin typeface="Aptos" pitchFamily="34" charset="0"/>
-                <a:ea typeface="Aptos" pitchFamily="34" charset="-122"/>
-                <a:cs typeface="Aptos" pitchFamily="34" charset="-120"/>
-              </a:rPr>
-              <a:t>Copyright Paula Soper</a:t>
-            </a:r>
-            <a:endParaRPr lang="en-US" sz="800" dirty="0"/>
-          </a:p>
-        </p:txBody>
-      </p:sp>
-      <p:sp>
-        <p:nvSpPr>
-          <p:cNvPr id="7" name="Text 5"/>
-          <p:cNvSpPr/>
-          <p:nvPr/>
-        </p:nvSpPr>
-        <p:spPr>
-          <a:xfrm>
-            <a:off x="11137392" y="6510528"/>
-            <a:ext cx="411480" cy="201168"/>
-          </a:xfrm>
-          <a:prstGeom prst="rect">
-            <a:avLst/>
-          </a:prstGeom>
-          <a:noFill/>
-          <a:ln/>
-        </p:spPr>
-        <p:txBody>
-          <a:bodyPr wrap="square" lIns="0" tIns="0" rIns="0" bIns="0" rtlCol="0" anchor="ctr"/>
-          <a:lstStyle/>
-          <a:p>
-            <a:pPr algn="r" indent="0" marL="0">
-              <a:buNone/>
-            </a:pPr>
-            <a:r>
-              <a:rPr lang="en-US" sz="900" dirty="0">
-                <a:solidFill>
-                  <a:srgbClr val="5F7181"/>
-                </a:solidFill>
-                <a:latin typeface="Aptos" pitchFamily="34" charset="0"/>
-                <a:ea typeface="Aptos" pitchFamily="34" charset="-122"/>
-                <a:cs typeface="Aptos" pitchFamily="34" charset="-120"/>
-              </a:rPr>
-              <a:t>17</a:t>
-            </a:r>
-            <a:endParaRPr lang="en-US" sz="900" dirty="0"/>
-          </a:p>
-        </p:txBody>
-      </p:sp>
-      <p:sp>
-        <p:nvSpPr>
-          <p:cNvPr id="8" name="Text 6"/>
-          <p:cNvSpPr/>
-          <p:nvPr/>
-        </p:nvSpPr>
-        <p:spPr>
-          <a:xfrm>
-            <a:off x="640080" y="658368"/>
-            <a:ext cx="10881360" cy="713232"/>
-          </a:xfrm>
-          <a:prstGeom prst="rect">
-            <a:avLst/>
-          </a:prstGeom>
-          <a:noFill/>
-          <a:ln/>
-        </p:spPr>
-        <p:txBody>
-          <a:bodyPr wrap="square" lIns="0" tIns="0" rIns="0" bIns="0" rtlCol="0" anchor="ctr">
-            <a:normAutofit/>
-          </a:bodyPr>
-          <a:lstStyle/>
-          <a:p>
-            <a:pPr indent="0" marL="0">
-              <a:buNone/>
-            </a:pPr>
-            <a:r>
-              <a:rPr lang="en-US" sz="3400" b="1" dirty="0">
-                <a:solidFill>
-                  <a:srgbClr val="003A63"/>
-                </a:solidFill>
-                <a:latin typeface="Aptos Display" pitchFamily="34" charset="0"/>
-                <a:ea typeface="Aptos Display" pitchFamily="34" charset="-122"/>
-                <a:cs typeface="Aptos Display" pitchFamily="34" charset="-120"/>
-              </a:rPr>
-              <a:t>Expected Artifact or Evidence</a:t>
-            </a:r>
-            <a:endParaRPr lang="en-US" sz="3400" dirty="0"/>
-          </a:p>
-        </p:txBody>
-      </p:sp>
-      <p:sp>
-        <p:nvSpPr>
-          <p:cNvPr id="9" name="Text 7"/>
-          <p:cNvSpPr/>
-          <p:nvPr/>
-        </p:nvSpPr>
-        <p:spPr>
-          <a:xfrm>
-            <a:off x="822960" y="1463040"/>
-            <a:ext cx="6565392" cy="4343400"/>
-          </a:xfrm>
-          <a:prstGeom prst="rect">
-            <a:avLst/>
-          </a:prstGeom>
-          <a:noFill/>
-          <a:ln/>
-        </p:spPr>
-        <p:txBody>
-          <a:bodyPr wrap="square" lIns="1016" tIns="1016" rIns="1016" bIns="1016" rtlCol="0" anchor="t">
-            <a:normAutofit/>
-          </a:bodyPr>
-          <a:lstStyle/>
-          <a:p>
-            <a:pPr indent="0" marL="0">
-              <a:buNone/>
-            </a:pPr>
-            <a:r>
-              <a:rPr lang="en-US" sz="1920" dirty="0">
-                <a:solidFill>
-                  <a:srgbClr val="003A63"/>
-                </a:solidFill>
-                <a:latin typeface="Aptos" pitchFamily="34" charset="0"/>
-                <a:ea typeface="Aptos" pitchFamily="34" charset="-122"/>
-                <a:cs typeface="Aptos" pitchFamily="34" charset="-120"/>
-              </a:rPr>
-              <a:t>• The expected artifact is a completed workflow usability test plan.</a:t>
-            </a:r>
-            <a:endParaRPr lang="en-US" sz="1920" dirty="0"/>
-          </a:p>
-          <a:p>
-            <a:pPr indent="0" marL="0">
-              <a:buNone/>
-            </a:pPr>
-            <a:r>
-              <a:rPr lang="en-US" sz="1920" dirty="0">
-                <a:solidFill>
-                  <a:srgbClr val="003A63"/>
-                </a:solidFill>
-                <a:latin typeface="Aptos" pitchFamily="34" charset="0"/>
-                <a:ea typeface="Aptos" pitchFamily="34" charset="-122"/>
-                <a:cs typeface="Aptos" pitchFamily="34" charset="-120"/>
-              </a:rPr>
-              <a:t>• It should be specific to a public health workflow and should include.</a:t>
-            </a:r>
-            <a:endParaRPr lang="en-US" sz="1920" dirty="0"/>
-          </a:p>
-        </p:txBody>
-      </p:sp>
-      <p:sp>
-        <p:nvSpPr>
-          <p:cNvPr id="10" name="Shape 8"/>
-          <p:cNvSpPr/>
-          <p:nvPr/>
-        </p:nvSpPr>
-        <p:spPr>
-          <a:xfrm>
-            <a:off x="7543800" y="1325880"/>
-            <a:ext cx="3611880" cy="1261872"/>
-          </a:xfrm>
-          <a:prstGeom prst="roundRect">
-            <a:avLst>
-              <a:gd name="adj" fmla="val 8696"/>
-            </a:avLst>
-          </a:prstGeom>
-          <a:solidFill>
-            <a:srgbClr val="EEF8ED"/>
-          </a:solidFill>
-          <a:ln w="12700">
-            <a:solidFill>
-              <a:srgbClr val="B9D7E6"/>
-            </a:solidFill>
-            <a:prstDash val="solid"/>
-          </a:ln>
-        </p:spPr>
-      </p:sp>
-      <p:sp>
-        <p:nvSpPr>
-          <p:cNvPr id="11" name="Text 9"/>
-          <p:cNvSpPr/>
-          <p:nvPr/>
-        </p:nvSpPr>
-        <p:spPr>
-          <a:xfrm>
-            <a:off x="7708392" y="1453896"/>
-            <a:ext cx="3282696" cy="228600"/>
-          </a:xfrm>
-          <a:prstGeom prst="rect">
-            <a:avLst/>
-          </a:prstGeom>
-          <a:noFill/>
-          <a:ln/>
-        </p:spPr>
-        <p:txBody>
-          <a:bodyPr wrap="square" lIns="0" tIns="0" rIns="0" bIns="0" rtlCol="0" anchor="ctr"/>
-          <a:lstStyle/>
-          <a:p>
-            <a:pPr indent="0" marL="0">
-              <a:buNone/>
-            </a:pPr>
-            <a:r>
-              <a:rPr lang="en-US" sz="1220" b="1" dirty="0">
-                <a:solidFill>
-                  <a:srgbClr val="0068B7"/>
-                </a:solidFill>
-                <a:latin typeface="Aptos" pitchFamily="34" charset="0"/>
-                <a:ea typeface="Aptos" pitchFamily="34" charset="-122"/>
-                <a:cs typeface="Aptos" pitchFamily="34" charset="-120"/>
-              </a:rPr>
-              <a:t>Implementation cue</a:t>
-            </a:r>
-            <a:endParaRPr lang="en-US" sz="1220" dirty="0"/>
-          </a:p>
-        </p:txBody>
-      </p:sp>
-      <p:sp>
-        <p:nvSpPr>
-          <p:cNvPr id="12" name="Text 10"/>
-          <p:cNvSpPr/>
-          <p:nvPr/>
-        </p:nvSpPr>
-        <p:spPr>
-          <a:xfrm>
-            <a:off x="7708392" y="1764792"/>
-            <a:ext cx="3282696" cy="749808"/>
-          </a:xfrm>
-          <a:prstGeom prst="rect">
-            <a:avLst/>
-          </a:prstGeom>
-          <a:noFill/>
-          <a:ln/>
-        </p:spPr>
-        <p:txBody>
-          <a:bodyPr wrap="square" lIns="254" tIns="254" rIns="254" bIns="254" rtlCol="0" anchor="t">
-            <a:normAutofit/>
-          </a:bodyPr>
-          <a:lstStyle/>
-          <a:p>
-            <a:pPr indent="0" marL="0">
-              <a:buNone/>
-            </a:pPr>
-            <a:r>
-              <a:rPr lang="en-US" sz="1220" dirty="0">
-                <a:solidFill>
-                  <a:srgbClr val="17364A"/>
-                </a:solidFill>
-                <a:latin typeface="Aptos" pitchFamily="34" charset="0"/>
-                <a:ea typeface="Aptos" pitchFamily="34" charset="-122"/>
-                <a:cs typeface="Aptos" pitchFamily="34" charset="-120"/>
-              </a:rPr>
-              <a:t>The expected artifact is a completed workflow usability test plan.</a:t>
-            </a:r>
-            <a:endParaRPr lang="en-US" sz="1220" dirty="0"/>
-          </a:p>
-        </p:txBody>
-      </p:sp>
-      <p:sp>
-        <p:nvSpPr>
-          <p:cNvPr id="13" name="Shape 11"/>
-          <p:cNvSpPr/>
-          <p:nvPr/>
-        </p:nvSpPr>
-        <p:spPr>
-          <a:xfrm>
-            <a:off x="7543800" y="2724912"/>
-            <a:ext cx="3611880" cy="1527048"/>
-          </a:xfrm>
-          <a:prstGeom prst="roundRect">
-            <a:avLst>
-              <a:gd name="adj" fmla="val 7186"/>
-            </a:avLst>
-          </a:prstGeom>
-          <a:solidFill>
-            <a:srgbClr val="FFFFFF"/>
-          </a:solidFill>
-          <a:ln w="12700">
-            <a:solidFill>
-              <a:srgbClr val="B9D7E6"/>
-            </a:solidFill>
-            <a:prstDash val="solid"/>
-          </a:ln>
-        </p:spPr>
-      </p:sp>
-      <p:sp>
-        <p:nvSpPr>
-          <p:cNvPr id="14" name="Text 12"/>
-          <p:cNvSpPr/>
-          <p:nvPr/>
-        </p:nvSpPr>
-        <p:spPr>
-          <a:xfrm>
-            <a:off x="7708392" y="2852928"/>
-            <a:ext cx="3282696" cy="228600"/>
-          </a:xfrm>
-          <a:prstGeom prst="rect">
-            <a:avLst/>
-          </a:prstGeom>
-          <a:noFill/>
-          <a:ln/>
-        </p:spPr>
-        <p:txBody>
-          <a:bodyPr wrap="square" lIns="0" tIns="0" rIns="0" bIns="0" rtlCol="0" anchor="ctr"/>
-          <a:lstStyle/>
-          <a:p>
-            <a:pPr indent="0" marL="0">
-              <a:buNone/>
-            </a:pPr>
-            <a:r>
-              <a:rPr lang="en-US" sz="1220" b="1" dirty="0">
-                <a:solidFill>
-                  <a:srgbClr val="0068B7"/>
-                </a:solidFill>
-                <a:latin typeface="Aptos" pitchFamily="34" charset="0"/>
-                <a:ea typeface="Aptos" pitchFamily="34" charset="-122"/>
-                <a:cs typeface="Aptos" pitchFamily="34" charset="-120"/>
-              </a:rPr>
-              <a:t>Concept checkpoints</a:t>
-            </a:r>
-            <a:endParaRPr lang="en-US" sz="1220" dirty="0"/>
-          </a:p>
-        </p:txBody>
-      </p:sp>
-      <p:sp>
-        <p:nvSpPr>
-          <p:cNvPr id="15" name="Text 13"/>
-          <p:cNvSpPr/>
-          <p:nvPr/>
-        </p:nvSpPr>
-        <p:spPr>
-          <a:xfrm>
-            <a:off x="7726680" y="3182112"/>
-            <a:ext cx="3227832" cy="960120"/>
-          </a:xfrm>
-          <a:prstGeom prst="rect">
-            <a:avLst/>
-          </a:prstGeom>
-          <a:noFill/>
-          <a:ln/>
-        </p:spPr>
-        <p:txBody>
-          <a:bodyPr wrap="square" lIns="508" tIns="508" rIns="508" bIns="508" rtlCol="0" anchor="t">
-            <a:normAutofit/>
-          </a:bodyPr>
-          <a:lstStyle/>
-          <a:p>
-            <a:pPr indent="0" marL="0">
-              <a:buNone/>
-            </a:pPr>
-            <a:r>
-              <a:rPr lang="en-US" sz="1140" dirty="0">
-                <a:solidFill>
-                  <a:srgbClr val="17364A"/>
-                </a:solidFill>
-                <a:latin typeface="Aptos" pitchFamily="34" charset="0"/>
-                <a:ea typeface="Aptos" pitchFamily="34" charset="-122"/>
-                <a:cs typeface="Aptos" pitchFamily="34" charset="-120"/>
-              </a:rPr>
-              <a:t>The expected artifact is a completed workflow.</a:t>
-            </a:r>
-            <a:endParaRPr lang="en-US" sz="1140" dirty="0"/>
-          </a:p>
-          <a:p>
-            <a:pPr indent="0" marL="0">
-              <a:buNone/>
-            </a:pPr>
-            <a:r>
-              <a:rPr lang="en-US" sz="1140" dirty="0">
-                <a:solidFill>
-                  <a:srgbClr val="17364A"/>
-                </a:solidFill>
-                <a:latin typeface="Aptos" pitchFamily="34" charset="0"/>
-                <a:ea typeface="Aptos" pitchFamily="34" charset="-122"/>
-                <a:cs typeface="Aptos" pitchFamily="34" charset="-120"/>
-              </a:rPr>
-              <a:t>It should be specific to a public health workflow.</a:t>
-            </a:r>
-            <a:endParaRPr lang="en-US" sz="1140" dirty="0"/>
-          </a:p>
-        </p:txBody>
-      </p:sp>
-      <p:sp>
-        <p:nvSpPr>
-          <p:cNvPr id="16" name="Shape 14"/>
-          <p:cNvSpPr/>
-          <p:nvPr/>
-        </p:nvSpPr>
-        <p:spPr>
-          <a:xfrm>
-            <a:off x="7543800" y="4389120"/>
-            <a:ext cx="3611880" cy="1261872"/>
-          </a:xfrm>
-          <a:prstGeom prst="roundRect">
-            <a:avLst>
-              <a:gd name="adj" fmla="val 8696"/>
-            </a:avLst>
-          </a:prstGeom>
-          <a:solidFill>
-            <a:srgbClr val="EAF6F8"/>
-          </a:solidFill>
-          <a:ln w="12700">
-            <a:solidFill>
-              <a:srgbClr val="B9D7E6"/>
-            </a:solidFill>
-            <a:prstDash val="solid"/>
-          </a:ln>
-        </p:spPr>
-      </p:sp>
-      <p:sp>
-        <p:nvSpPr>
-          <p:cNvPr id="17" name="Text 15"/>
-          <p:cNvSpPr/>
-          <p:nvPr/>
-        </p:nvSpPr>
-        <p:spPr>
-          <a:xfrm>
-            <a:off x="7708392" y="4517136"/>
-            <a:ext cx="3282696" cy="228600"/>
-          </a:xfrm>
-          <a:prstGeom prst="rect">
-            <a:avLst/>
-          </a:prstGeom>
-          <a:noFill/>
-          <a:ln/>
-        </p:spPr>
-        <p:txBody>
-          <a:bodyPr wrap="square" lIns="0" tIns="0" rIns="0" bIns="0" rtlCol="0" anchor="ctr"/>
-          <a:lstStyle/>
-          <a:p>
-            <a:pPr indent="0" marL="0">
-              <a:buNone/>
-            </a:pPr>
-            <a:r>
-              <a:rPr lang="en-US" sz="1220" b="1" dirty="0">
-                <a:solidFill>
-                  <a:srgbClr val="0068B7"/>
-                </a:solidFill>
-                <a:latin typeface="Aptos" pitchFamily="34" charset="0"/>
-                <a:ea typeface="Aptos" pitchFamily="34" charset="-122"/>
-                <a:cs typeface="Aptos" pitchFamily="34" charset="-120"/>
-              </a:rPr>
-              <a:t>Next action</a:t>
-            </a:r>
-            <a:endParaRPr lang="en-US" sz="1220" dirty="0"/>
-          </a:p>
-        </p:txBody>
-      </p:sp>
-      <p:sp>
-        <p:nvSpPr>
-          <p:cNvPr id="18" name="Text 16"/>
-          <p:cNvSpPr/>
-          <p:nvPr/>
-        </p:nvSpPr>
-        <p:spPr>
-          <a:xfrm>
-            <a:off x="7708392" y="4828032"/>
-            <a:ext cx="3282696" cy="749808"/>
-          </a:xfrm>
-          <a:prstGeom prst="rect">
-            <a:avLst/>
-          </a:prstGeom>
-          <a:noFill/>
-          <a:ln/>
-        </p:spPr>
-        <p:txBody>
-          <a:bodyPr wrap="square" lIns="254" tIns="254" rIns="254" bIns="254" rtlCol="0" anchor="t">
-            <a:normAutofit/>
-          </a:bodyPr>
-          <a:lstStyle/>
-          <a:p>
-            <a:pPr indent="0" marL="0">
-              <a:buNone/>
-            </a:pPr>
-            <a:r>
-              <a:rPr lang="en-US" sz="1220" dirty="0">
-                <a:solidFill>
-                  <a:srgbClr val="17364A"/>
-                </a:solidFill>
-                <a:latin typeface="Aptos" pitchFamily="34" charset="0"/>
-                <a:ea typeface="Aptos" pitchFamily="34" charset="-122"/>
-                <a:cs typeface="Aptos" pitchFamily="34" charset="-120"/>
-              </a:rPr>
               <a:t>Use the concept to clarify workflow changes, dependencies, staffing, procurement.</a:t>
-            </a:r>
-            <a:endParaRPr lang="en-US" sz="1220" dirty="0"/>
-          </a:p>
-        </p:txBody>
-      </p:sp>
-    </p:spTree>
-  </p:cSld>
-  <p:clrMapOvr>
-    <a:masterClrMapping/>
-  </p:clrMapOvr>
-</p:sld>
-</file>
-
-<file path=ppt/slides/slide18.xml><?xml version="1.0" encoding="utf-8"?>
-<p:sld xmlns:a="http://schemas.openxmlformats.org/drawingml/2006/main" xmlns:r="http://schemas.openxmlformats.org/officeDocument/2006/relationships" xmlns:p="http://schemas.openxmlformats.org/presentationml/2006/main">
-  <p:cSld name="Slide 18">
-    <p:bg>
-      <p:bgPr>
-        <a:solidFill>
-          <a:srgbClr val="F7FBFD"/>
-        </a:solidFill>
-      </p:bgPr>
-    </p:bg>
-    <p:spTree>
-      <p:nvGrpSpPr>
-        <p:cNvPr id="1" name=""/>
-        <p:cNvGrpSpPr/>
-        <p:nvPr/>
-      </p:nvGrpSpPr>
-      <p:grpSpPr>
-        <a:xfrm>
-          <a:off x="0" y="0"/>
-          <a:ext cx="0" cy="0"/>
-          <a:chOff x="0" y="0"/>
-          <a:chExt cx="0" cy="0"/>
-        </a:xfrm>
-      </p:grpSpPr>
-      <p:sp>
-        <p:nvSpPr>
-          <p:cNvPr id="2" name="Shape 0"/>
-          <p:cNvSpPr/>
-          <p:nvPr/>
-        </p:nvSpPr>
-        <p:spPr>
-          <a:xfrm>
-            <a:off x="0" y="0"/>
-            <a:ext cx="12191695" cy="164592"/>
-          </a:xfrm>
-          <a:prstGeom prst="rect">
-            <a:avLst/>
-          </a:prstGeom>
-          <a:solidFill>
-            <a:srgbClr val="0068B7"/>
-          </a:solidFill>
-          <a:ln w="12700">
-            <a:solidFill>
-              <a:srgbClr val="0068B7"/>
-            </a:solidFill>
-            <a:prstDash val="solid"/>
-          </a:ln>
-        </p:spPr>
-      </p:sp>
-      <p:sp>
-        <p:nvSpPr>
-          <p:cNvPr id="3" name="Shape 1"/>
-          <p:cNvSpPr/>
-          <p:nvPr/>
-        </p:nvSpPr>
-        <p:spPr>
-          <a:xfrm>
-            <a:off x="0" y="164592"/>
-            <a:ext cx="146304" cy="6693408"/>
-          </a:xfrm>
-          <a:prstGeom prst="rect">
-            <a:avLst/>
-          </a:prstGeom>
-          <a:solidFill>
-            <a:srgbClr val="2F8A28"/>
-          </a:solidFill>
-          <a:ln w="12700">
-            <a:solidFill>
-              <a:srgbClr val="2F8A28"/>
-            </a:solidFill>
-            <a:prstDash val="solid"/>
-          </a:ln>
-        </p:spPr>
-      </p:sp>
-      <p:sp>
-        <p:nvSpPr>
-          <p:cNvPr id="4" name="Text 2"/>
-          <p:cNvSpPr/>
-          <p:nvPr/>
-        </p:nvSpPr>
-        <p:spPr>
-          <a:xfrm>
-            <a:off x="502920" y="292608"/>
-            <a:ext cx="10149840" cy="256032"/>
-          </a:xfrm>
-          <a:prstGeom prst="rect">
-            <a:avLst/>
-          </a:prstGeom>
-          <a:noFill/>
-          <a:ln/>
-        </p:spPr>
-        <p:txBody>
-          <a:bodyPr wrap="square" lIns="0" tIns="0" rIns="0" bIns="0" rtlCol="0" anchor="ctr"/>
-          <a:lstStyle/>
-          <a:p>
-            <a:pPr indent="0" marL="0">
-              <a:buNone/>
-            </a:pPr>
-            <a:r>
-              <a:rPr lang="en-US" sz="900" b="1" dirty="0">
-                <a:solidFill>
-                  <a:srgbClr val="5F7181"/>
-                </a:solidFill>
-                <a:latin typeface="Aptos" pitchFamily="34" charset="0"/>
-                <a:ea typeface="Aptos" pitchFamily="34" charset="-122"/>
-                <a:cs typeface="Aptos" pitchFamily="34" charset="-120"/>
-              </a:rPr>
-              <a:t>Human Factors, Workflow Integration, and Usability Testing</a:t>
-            </a:r>
-            <a:endParaRPr lang="en-US" sz="900" dirty="0"/>
-          </a:p>
-        </p:txBody>
-      </p:sp>
-      <p:sp>
-        <p:nvSpPr>
-          <p:cNvPr id="5" name="Text 3"/>
-          <p:cNvSpPr/>
-          <p:nvPr/>
-        </p:nvSpPr>
-        <p:spPr>
-          <a:xfrm>
-            <a:off x="502920" y="6537960"/>
-            <a:ext cx="7772400" cy="201168"/>
-          </a:xfrm>
-          <a:prstGeom prst="rect">
-            <a:avLst/>
-          </a:prstGeom>
-          <a:noFill/>
-          <a:ln/>
-        </p:spPr>
-        <p:txBody>
-          <a:bodyPr wrap="square" lIns="0" tIns="0" rIns="0" bIns="0" rtlCol="0" anchor="ctr"/>
-          <a:lstStyle/>
-          <a:p>
-            <a:pPr indent="0" marL="0">
-              <a:buNone/>
-            </a:pPr>
-            <a:r>
-              <a:rPr lang="en-US" sz="800" dirty="0">
-                <a:solidFill>
-                  <a:srgbClr val="5F7181"/>
-                </a:solidFill>
-                <a:latin typeface="Aptos" pitchFamily="34" charset="0"/>
-                <a:ea typeface="Aptos" pitchFamily="34" charset="-122"/>
-                <a:cs typeface="Aptos" pitchFamily="34" charset="-120"/>
-              </a:rPr>
-              <a:t>AI Playbook and Toolkit for Public Health Departments</a:t>
-            </a:r>
-            <a:endParaRPr lang="en-US" sz="800" dirty="0"/>
-          </a:p>
-        </p:txBody>
-      </p:sp>
-      <p:sp>
-        <p:nvSpPr>
-          <p:cNvPr id="6" name="Text 4"/>
-          <p:cNvSpPr/>
-          <p:nvPr/>
-        </p:nvSpPr>
-        <p:spPr>
-          <a:xfrm>
-            <a:off x="9646920" y="6537960"/>
-            <a:ext cx="1965960" cy="201168"/>
-          </a:xfrm>
-          <a:prstGeom prst="rect">
-            <a:avLst/>
-          </a:prstGeom>
-          <a:noFill/>
-          <a:ln/>
-        </p:spPr>
-        <p:txBody>
-          <a:bodyPr wrap="square" lIns="0" tIns="0" rIns="0" bIns="0" rtlCol="0" anchor="ctr"/>
-          <a:lstStyle/>
-          <a:p>
-            <a:pPr algn="r" indent="0" marL="0">
-              <a:buNone/>
-            </a:pPr>
-            <a:r>
-              <a:rPr lang="en-US" sz="800" dirty="0">
-                <a:solidFill>
-                  <a:srgbClr val="5F7181"/>
-                </a:solidFill>
-                <a:latin typeface="Aptos" pitchFamily="34" charset="0"/>
-                <a:ea typeface="Aptos" pitchFamily="34" charset="-122"/>
-                <a:cs typeface="Aptos" pitchFamily="34" charset="-120"/>
-              </a:rPr>
-              <a:t>Copyright Paula Soper</a:t>
-            </a:r>
-            <a:endParaRPr lang="en-US" sz="800" dirty="0"/>
-          </a:p>
-        </p:txBody>
-      </p:sp>
-      <p:sp>
-        <p:nvSpPr>
-          <p:cNvPr id="7" name="Text 5"/>
-          <p:cNvSpPr/>
-          <p:nvPr/>
-        </p:nvSpPr>
-        <p:spPr>
-          <a:xfrm>
-            <a:off x="11137392" y="6510528"/>
-            <a:ext cx="411480" cy="201168"/>
-          </a:xfrm>
-          <a:prstGeom prst="rect">
-            <a:avLst/>
-          </a:prstGeom>
-          <a:noFill/>
-          <a:ln/>
-        </p:spPr>
-        <p:txBody>
-          <a:bodyPr wrap="square" lIns="0" tIns="0" rIns="0" bIns="0" rtlCol="0" anchor="ctr"/>
-          <a:lstStyle/>
-          <a:p>
-            <a:pPr algn="r" indent="0" marL="0">
-              <a:buNone/>
-            </a:pPr>
-            <a:r>
-              <a:rPr lang="en-US" sz="900" dirty="0">
-                <a:solidFill>
-                  <a:srgbClr val="5F7181"/>
-                </a:solidFill>
-                <a:latin typeface="Aptos" pitchFamily="34" charset="0"/>
-                <a:ea typeface="Aptos" pitchFamily="34" charset="-122"/>
-                <a:cs typeface="Aptos" pitchFamily="34" charset="-120"/>
-              </a:rPr>
-              <a:t>18</a:t>
-            </a:r>
-            <a:endParaRPr lang="en-US" sz="900" dirty="0"/>
-          </a:p>
-        </p:txBody>
-      </p:sp>
-      <p:sp>
-        <p:nvSpPr>
-          <p:cNvPr id="8" name="Text 6"/>
-          <p:cNvSpPr/>
-          <p:nvPr/>
-        </p:nvSpPr>
-        <p:spPr>
-          <a:xfrm>
-            <a:off x="640080" y="658368"/>
-            <a:ext cx="10881360" cy="713232"/>
-          </a:xfrm>
-          <a:prstGeom prst="rect">
-            <a:avLst/>
-          </a:prstGeom>
-          <a:noFill/>
-          <a:ln/>
-        </p:spPr>
-        <p:txBody>
-          <a:bodyPr wrap="square" lIns="0" tIns="0" rIns="0" bIns="0" rtlCol="0" anchor="ctr">
-            <a:normAutofit/>
-          </a:bodyPr>
-          <a:lstStyle/>
-          <a:p>
-            <a:pPr indent="0" marL="0">
-              <a:buNone/>
-            </a:pPr>
-            <a:r>
-              <a:rPr lang="en-US" sz="3400" b="1" dirty="0">
-                <a:solidFill>
-                  <a:srgbClr val="003A63"/>
-                </a:solidFill>
-                <a:latin typeface="Aptos Display" pitchFamily="34" charset="0"/>
-                <a:ea typeface="Aptos Display" pitchFamily="34" charset="-122"/>
-                <a:cs typeface="Aptos Display" pitchFamily="34" charset="-120"/>
-              </a:rPr>
-              <a:t>Expected Assignment</a:t>
-            </a:r>
-            <a:endParaRPr lang="en-US" sz="3400" dirty="0"/>
-          </a:p>
-        </p:txBody>
-      </p:sp>
-      <p:sp>
-        <p:nvSpPr>
-          <p:cNvPr id="9" name="Text 7"/>
-          <p:cNvSpPr/>
-          <p:nvPr/>
-        </p:nvSpPr>
-        <p:spPr>
-          <a:xfrm>
-            <a:off x="822960" y="1463040"/>
-            <a:ext cx="6565392" cy="4343400"/>
-          </a:xfrm>
-          <a:prstGeom prst="rect">
-            <a:avLst/>
-          </a:prstGeom>
-          <a:noFill/>
-          <a:ln/>
-        </p:spPr>
-        <p:txBody>
-          <a:bodyPr wrap="square" lIns="1016" tIns="1016" rIns="1016" bIns="1016" rtlCol="0" anchor="t">
-            <a:normAutofit/>
-          </a:bodyPr>
-          <a:lstStyle/>
-          <a:p>
-            <a:pPr indent="0" marL="0">
-              <a:buNone/>
-            </a:pPr>
-            <a:r>
-              <a:rPr lang="en-US" sz="1920" dirty="0">
-                <a:solidFill>
-                  <a:srgbClr val="003A63"/>
-                </a:solidFill>
-                <a:latin typeface="Aptos" pitchFamily="34" charset="0"/>
-                <a:ea typeface="Aptos" pitchFamily="34" charset="-122"/>
-                <a:cs typeface="Aptos" pitchFamily="34" charset="-120"/>
-              </a:rPr>
-              <a:t>• The expected artifact is a completed workflow usability test plan. It should.</a:t>
-            </a:r>
-            <a:endParaRPr lang="en-US" sz="1920" dirty="0"/>
-          </a:p>
-        </p:txBody>
-      </p:sp>
-      <p:sp>
-        <p:nvSpPr>
-          <p:cNvPr id="10" name="Shape 8"/>
-          <p:cNvSpPr/>
-          <p:nvPr/>
-        </p:nvSpPr>
-        <p:spPr>
-          <a:xfrm>
-            <a:off x="7543800" y="1325880"/>
-            <a:ext cx="3611880" cy="1261872"/>
-          </a:xfrm>
-          <a:prstGeom prst="roundRect">
-            <a:avLst>
-              <a:gd name="adj" fmla="val 8696"/>
-            </a:avLst>
-          </a:prstGeom>
-          <a:solidFill>
-            <a:srgbClr val="EEF8ED"/>
-          </a:solidFill>
-          <a:ln w="12700">
-            <a:solidFill>
-              <a:srgbClr val="B9D7E6"/>
-            </a:solidFill>
-            <a:prstDash val="solid"/>
-          </a:ln>
-        </p:spPr>
-      </p:sp>
-      <p:sp>
-        <p:nvSpPr>
-          <p:cNvPr id="11" name="Text 9"/>
-          <p:cNvSpPr/>
-          <p:nvPr/>
-        </p:nvSpPr>
-        <p:spPr>
-          <a:xfrm>
-            <a:off x="7708392" y="1453896"/>
-            <a:ext cx="3282696" cy="228600"/>
-          </a:xfrm>
-          <a:prstGeom prst="rect">
-            <a:avLst/>
-          </a:prstGeom>
-          <a:noFill/>
-          <a:ln/>
-        </p:spPr>
-        <p:txBody>
-          <a:bodyPr wrap="square" lIns="0" tIns="0" rIns="0" bIns="0" rtlCol="0" anchor="ctr"/>
-          <a:lstStyle/>
-          <a:p>
-            <a:pPr indent="0" marL="0">
-              <a:buNone/>
-            </a:pPr>
-            <a:r>
-              <a:rPr lang="en-US" sz="1220" b="1" dirty="0">
-                <a:solidFill>
-                  <a:srgbClr val="0068B7"/>
-                </a:solidFill>
-                <a:latin typeface="Aptos" pitchFamily="34" charset="0"/>
-                <a:ea typeface="Aptos" pitchFamily="34" charset="-122"/>
-                <a:cs typeface="Aptos" pitchFamily="34" charset="-120"/>
-              </a:rPr>
-              <a:t>Implementation cue</a:t>
-            </a:r>
-            <a:endParaRPr lang="en-US" sz="1220" dirty="0"/>
-          </a:p>
-        </p:txBody>
-      </p:sp>
-      <p:sp>
-        <p:nvSpPr>
-          <p:cNvPr id="12" name="Text 10"/>
-          <p:cNvSpPr/>
-          <p:nvPr/>
-        </p:nvSpPr>
-        <p:spPr>
-          <a:xfrm>
-            <a:off x="7708392" y="1764792"/>
-            <a:ext cx="3282696" cy="749808"/>
-          </a:xfrm>
-          <a:prstGeom prst="rect">
-            <a:avLst/>
-          </a:prstGeom>
-          <a:noFill/>
-          <a:ln/>
-        </p:spPr>
-        <p:txBody>
-          <a:bodyPr wrap="square" lIns="254" tIns="254" rIns="254" bIns="254" rtlCol="0" anchor="t">
-            <a:normAutofit/>
-          </a:bodyPr>
-          <a:lstStyle/>
-          <a:p>
-            <a:pPr indent="0" marL="0">
-              <a:buNone/>
-            </a:pPr>
-            <a:r>
-              <a:rPr lang="en-US" sz="1220" dirty="0">
-                <a:solidFill>
-                  <a:srgbClr val="17364A"/>
-                </a:solidFill>
-                <a:latin typeface="Aptos" pitchFamily="34" charset="0"/>
-                <a:ea typeface="Aptos" pitchFamily="34" charset="-122"/>
-                <a:cs typeface="Aptos" pitchFamily="34" charset="-120"/>
-              </a:rPr>
-              <a:t>The expected artifact is a completed workflow usability test plan. It should be.</a:t>
-            </a:r>
-            <a:endParaRPr lang="en-US" sz="1220" dirty="0"/>
-          </a:p>
-        </p:txBody>
-      </p:sp>
-      <p:sp>
-        <p:nvSpPr>
-          <p:cNvPr id="13" name="Shape 11"/>
-          <p:cNvSpPr/>
-          <p:nvPr/>
-        </p:nvSpPr>
-        <p:spPr>
-          <a:xfrm>
-            <a:off x="7543800" y="2724912"/>
-            <a:ext cx="3611880" cy="1527048"/>
-          </a:xfrm>
-          <a:prstGeom prst="roundRect">
-            <a:avLst>
-              <a:gd name="adj" fmla="val 7186"/>
-            </a:avLst>
-          </a:prstGeom>
-          <a:solidFill>
-            <a:srgbClr val="FFFFFF"/>
-          </a:solidFill>
-          <a:ln w="12700">
-            <a:solidFill>
-              <a:srgbClr val="B9D7E6"/>
-            </a:solidFill>
-            <a:prstDash val="solid"/>
-          </a:ln>
-        </p:spPr>
-      </p:sp>
-      <p:sp>
-        <p:nvSpPr>
-          <p:cNvPr id="14" name="Text 12"/>
-          <p:cNvSpPr/>
-          <p:nvPr/>
-        </p:nvSpPr>
-        <p:spPr>
-          <a:xfrm>
-            <a:off x="7708392" y="2852928"/>
-            <a:ext cx="3282696" cy="228600"/>
-          </a:xfrm>
-          <a:prstGeom prst="rect">
-            <a:avLst/>
-          </a:prstGeom>
-          <a:noFill/>
-          <a:ln/>
-        </p:spPr>
-        <p:txBody>
-          <a:bodyPr wrap="square" lIns="0" tIns="0" rIns="0" bIns="0" rtlCol="0" anchor="ctr"/>
-          <a:lstStyle/>
-          <a:p>
-            <a:pPr indent="0" marL="0">
-              <a:buNone/>
-            </a:pPr>
-            <a:r>
-              <a:rPr lang="en-US" sz="1220" b="1" dirty="0">
-                <a:solidFill>
-                  <a:srgbClr val="0068B7"/>
-                </a:solidFill>
-                <a:latin typeface="Aptos" pitchFamily="34" charset="0"/>
-                <a:ea typeface="Aptos" pitchFamily="34" charset="-122"/>
-                <a:cs typeface="Aptos" pitchFamily="34" charset="-120"/>
-              </a:rPr>
-              <a:t>Concept checkpoints</a:t>
-            </a:r>
-            <a:endParaRPr lang="en-US" sz="1220" dirty="0"/>
-          </a:p>
-        </p:txBody>
-      </p:sp>
-      <p:sp>
-        <p:nvSpPr>
-          <p:cNvPr id="15" name="Text 13"/>
-          <p:cNvSpPr/>
-          <p:nvPr/>
-        </p:nvSpPr>
-        <p:spPr>
-          <a:xfrm>
-            <a:off x="7726680" y="3182112"/>
-            <a:ext cx="3227832" cy="960120"/>
-          </a:xfrm>
-          <a:prstGeom prst="rect">
-            <a:avLst/>
-          </a:prstGeom>
-          <a:noFill/>
-          <a:ln/>
-        </p:spPr>
-        <p:txBody>
-          <a:bodyPr wrap="square" lIns="508" tIns="508" rIns="508" bIns="508" rtlCol="0" anchor="t">
-            <a:normAutofit/>
-          </a:bodyPr>
-          <a:lstStyle/>
-          <a:p>
-            <a:pPr indent="0" marL="0">
-              <a:buNone/>
-            </a:pPr>
-            <a:r>
-              <a:rPr lang="en-US" sz="1140" dirty="0">
-                <a:solidFill>
-                  <a:srgbClr val="17364A"/>
-                </a:solidFill>
-                <a:latin typeface="Aptos" pitchFamily="34" charset="0"/>
-                <a:ea typeface="Aptos" pitchFamily="34" charset="-122"/>
-                <a:cs typeface="Aptos" pitchFamily="34" charset="-120"/>
-              </a:rPr>
-              <a:t>The expected artifact is a completed workflow.</a:t>
-            </a:r>
-            <a:endParaRPr lang="en-US" sz="1140" dirty="0"/>
-          </a:p>
-          <a:p>
-            <a:pPr indent="0" marL="0">
-              <a:buNone/>
-            </a:pPr>
-            <a:r>
-              <a:rPr lang="en-US" sz="1140" dirty="0">
-                <a:solidFill>
-                  <a:srgbClr val="17364A"/>
-                </a:solidFill>
-                <a:latin typeface="Aptos" pitchFamily="34" charset="0"/>
-                <a:ea typeface="Aptos" pitchFamily="34" charset="-122"/>
-                <a:cs typeface="Aptos" pitchFamily="34" charset="-120"/>
-              </a:rPr>
-              <a:t>It should be specific to a public health workflow.</a:t>
-            </a:r>
-            <a:endParaRPr lang="en-US" sz="1140" dirty="0"/>
-          </a:p>
-        </p:txBody>
-      </p:sp>
-      <p:sp>
-        <p:nvSpPr>
-          <p:cNvPr id="16" name="Shape 14"/>
-          <p:cNvSpPr/>
-          <p:nvPr/>
-        </p:nvSpPr>
-        <p:spPr>
-          <a:xfrm>
-            <a:off x="7543800" y="4389120"/>
-            <a:ext cx="3611880" cy="1261872"/>
-          </a:xfrm>
-          <a:prstGeom prst="roundRect">
-            <a:avLst>
-              <a:gd name="adj" fmla="val 8696"/>
-            </a:avLst>
-          </a:prstGeom>
-          <a:solidFill>
-            <a:srgbClr val="EAF6F8"/>
-          </a:solidFill>
-          <a:ln w="12700">
-            <a:solidFill>
-              <a:srgbClr val="B9D7E6"/>
-            </a:solidFill>
-            <a:prstDash val="solid"/>
-          </a:ln>
-        </p:spPr>
-      </p:sp>
-      <p:sp>
-        <p:nvSpPr>
-          <p:cNvPr id="17" name="Text 15"/>
-          <p:cNvSpPr/>
-          <p:nvPr/>
-        </p:nvSpPr>
-        <p:spPr>
-          <a:xfrm>
-            <a:off x="7708392" y="4517136"/>
-            <a:ext cx="3282696" cy="228600"/>
-          </a:xfrm>
-          <a:prstGeom prst="rect">
-            <a:avLst/>
-          </a:prstGeom>
-          <a:noFill/>
-          <a:ln/>
-        </p:spPr>
-        <p:txBody>
-          <a:bodyPr wrap="square" lIns="0" tIns="0" rIns="0" bIns="0" rtlCol="0" anchor="ctr"/>
-          <a:lstStyle/>
-          <a:p>
-            <a:pPr indent="0" marL="0">
-              <a:buNone/>
-            </a:pPr>
-            <a:r>
-              <a:rPr lang="en-US" sz="1220" b="1" dirty="0">
-                <a:solidFill>
-                  <a:srgbClr val="0068B7"/>
-                </a:solidFill>
-                <a:latin typeface="Aptos" pitchFamily="34" charset="0"/>
-                <a:ea typeface="Aptos" pitchFamily="34" charset="-122"/>
-                <a:cs typeface="Aptos" pitchFamily="34" charset="-120"/>
-              </a:rPr>
-              <a:t>Next action</a:t>
-            </a:r>
-            <a:endParaRPr lang="en-US" sz="1220" dirty="0"/>
-          </a:p>
-        </p:txBody>
-      </p:sp>
-      <p:sp>
-        <p:nvSpPr>
-          <p:cNvPr id="18" name="Text 16"/>
-          <p:cNvSpPr/>
-          <p:nvPr/>
-        </p:nvSpPr>
-        <p:spPr>
-          <a:xfrm>
-            <a:off x="7708392" y="4828032"/>
-            <a:ext cx="3282696" cy="749808"/>
-          </a:xfrm>
-          <a:prstGeom prst="rect">
-            <a:avLst/>
-          </a:prstGeom>
-          <a:noFill/>
-          <a:ln/>
-        </p:spPr>
-        <p:txBody>
-          <a:bodyPr wrap="square" lIns="254" tIns="254" rIns="254" bIns="254" rtlCol="0" anchor="t">
-            <a:normAutofit/>
-          </a:bodyPr>
-          <a:lstStyle/>
-          <a:p>
-            <a:pPr indent="0" marL="0">
-              <a:buNone/>
-            </a:pPr>
-            <a:r>
-              <a:rPr lang="en-US" sz="1220" dirty="0">
-                <a:solidFill>
-                  <a:srgbClr val="17364A"/>
-                </a:solidFill>
-                <a:latin typeface="Aptos" pitchFamily="34" charset="0"/>
-                <a:ea typeface="Aptos" pitchFamily="34" charset="-122"/>
-                <a:cs typeface="Aptos" pitchFamily="34" charset="-120"/>
-              </a:rPr>
-              <a:t>Use the assignment to test whether you can explain the concept, apply it to a.</a:t>
-            </a:r>
-            <a:endParaRPr lang="en-US" sz="1220" dirty="0"/>
-          </a:p>
-        </p:txBody>
-      </p:sp>
-    </p:spTree>
-  </p:cSld>
-  <p:clrMapOvr>
-    <a:masterClrMapping/>
-  </p:clrMapOvr>
-</p:sld>
-</file>
-
-<file path=ppt/slides/slide19.xml><?xml version="1.0" encoding="utf-8"?>
-<p:sld xmlns:a="http://schemas.openxmlformats.org/drawingml/2006/main" xmlns:r="http://schemas.openxmlformats.org/officeDocument/2006/relationships" xmlns:p="http://schemas.openxmlformats.org/presentationml/2006/main">
-  <p:cSld name="Slide 19">
-    <p:bg>
-      <p:bgPr>
-        <a:solidFill>
-          <a:srgbClr val="F7FBFD"/>
-        </a:solidFill>
-      </p:bgPr>
-    </p:bg>
-    <p:spTree>
-      <p:nvGrpSpPr>
-        <p:cNvPr id="1" name=""/>
-        <p:cNvGrpSpPr/>
-        <p:nvPr/>
-      </p:nvGrpSpPr>
-      <p:grpSpPr>
-        <a:xfrm>
-          <a:off x="0" y="0"/>
-          <a:ext cx="0" cy="0"/>
-          <a:chOff x="0" y="0"/>
-          <a:chExt cx="0" cy="0"/>
-        </a:xfrm>
-      </p:grpSpPr>
-      <p:sp>
-        <p:nvSpPr>
-          <p:cNvPr id="2" name="Shape 0"/>
-          <p:cNvSpPr/>
-          <p:nvPr/>
-        </p:nvSpPr>
-        <p:spPr>
-          <a:xfrm>
-            <a:off x="0" y="0"/>
-            <a:ext cx="12191695" cy="164592"/>
-          </a:xfrm>
-          <a:prstGeom prst="rect">
-            <a:avLst/>
-          </a:prstGeom>
-          <a:solidFill>
-            <a:srgbClr val="0068B7"/>
-          </a:solidFill>
-          <a:ln w="12700">
-            <a:solidFill>
-              <a:srgbClr val="0068B7"/>
-            </a:solidFill>
-            <a:prstDash val="solid"/>
-          </a:ln>
-        </p:spPr>
-      </p:sp>
-      <p:sp>
-        <p:nvSpPr>
-          <p:cNvPr id="3" name="Shape 1"/>
-          <p:cNvSpPr/>
-          <p:nvPr/>
-        </p:nvSpPr>
-        <p:spPr>
-          <a:xfrm>
-            <a:off x="0" y="164592"/>
-            <a:ext cx="146304" cy="6693408"/>
-          </a:xfrm>
-          <a:prstGeom prst="rect">
-            <a:avLst/>
-          </a:prstGeom>
-          <a:solidFill>
-            <a:srgbClr val="2F8A28"/>
-          </a:solidFill>
-          <a:ln w="12700">
-            <a:solidFill>
-              <a:srgbClr val="2F8A28"/>
-            </a:solidFill>
-            <a:prstDash val="solid"/>
-          </a:ln>
-        </p:spPr>
-      </p:sp>
-      <p:sp>
-        <p:nvSpPr>
-          <p:cNvPr id="4" name="Text 2"/>
-          <p:cNvSpPr/>
-          <p:nvPr/>
-        </p:nvSpPr>
-        <p:spPr>
-          <a:xfrm>
-            <a:off x="502920" y="292608"/>
-            <a:ext cx="10149840" cy="256032"/>
-          </a:xfrm>
-          <a:prstGeom prst="rect">
-            <a:avLst/>
-          </a:prstGeom>
-          <a:noFill/>
-          <a:ln/>
-        </p:spPr>
-        <p:txBody>
-          <a:bodyPr wrap="square" lIns="0" tIns="0" rIns="0" bIns="0" rtlCol="0" anchor="ctr"/>
-          <a:lstStyle/>
-          <a:p>
-            <a:pPr indent="0" marL="0">
-              <a:buNone/>
-            </a:pPr>
-            <a:r>
-              <a:rPr lang="en-US" sz="900" b="1" dirty="0">
-                <a:solidFill>
-                  <a:srgbClr val="5F7181"/>
-                </a:solidFill>
-                <a:latin typeface="Aptos" pitchFamily="34" charset="0"/>
-                <a:ea typeface="Aptos" pitchFamily="34" charset="-122"/>
-                <a:cs typeface="Aptos" pitchFamily="34" charset="-120"/>
-              </a:rPr>
-              <a:t>Human Factors, Workflow Integration, and Usability Testing</a:t>
-            </a:r>
-            <a:endParaRPr lang="en-US" sz="900" dirty="0"/>
-          </a:p>
-        </p:txBody>
-      </p:sp>
-      <p:sp>
-        <p:nvSpPr>
-          <p:cNvPr id="5" name="Text 3"/>
-          <p:cNvSpPr/>
-          <p:nvPr/>
-        </p:nvSpPr>
-        <p:spPr>
-          <a:xfrm>
-            <a:off x="502920" y="6537960"/>
-            <a:ext cx="7772400" cy="201168"/>
-          </a:xfrm>
-          <a:prstGeom prst="rect">
-            <a:avLst/>
-          </a:prstGeom>
-          <a:noFill/>
-          <a:ln/>
-        </p:spPr>
-        <p:txBody>
-          <a:bodyPr wrap="square" lIns="0" tIns="0" rIns="0" bIns="0" rtlCol="0" anchor="ctr"/>
-          <a:lstStyle/>
-          <a:p>
-            <a:pPr indent="0" marL="0">
-              <a:buNone/>
-            </a:pPr>
-            <a:r>
-              <a:rPr lang="en-US" sz="800" dirty="0">
-                <a:solidFill>
-                  <a:srgbClr val="5F7181"/>
-                </a:solidFill>
-                <a:latin typeface="Aptos" pitchFamily="34" charset="0"/>
-                <a:ea typeface="Aptos" pitchFamily="34" charset="-122"/>
-                <a:cs typeface="Aptos" pitchFamily="34" charset="-120"/>
-              </a:rPr>
-              <a:t>AI Playbook and Toolkit for Public Health Departments</a:t>
-            </a:r>
-            <a:endParaRPr lang="en-US" sz="800" dirty="0"/>
-          </a:p>
-        </p:txBody>
-      </p:sp>
-      <p:sp>
-        <p:nvSpPr>
-          <p:cNvPr id="6" name="Text 4"/>
-          <p:cNvSpPr/>
-          <p:nvPr/>
-        </p:nvSpPr>
-        <p:spPr>
-          <a:xfrm>
-            <a:off x="9646920" y="6537960"/>
-            <a:ext cx="1965960" cy="201168"/>
-          </a:xfrm>
-          <a:prstGeom prst="rect">
-            <a:avLst/>
-          </a:prstGeom>
-          <a:noFill/>
-          <a:ln/>
-        </p:spPr>
-        <p:txBody>
-          <a:bodyPr wrap="square" lIns="0" tIns="0" rIns="0" bIns="0" rtlCol="0" anchor="ctr"/>
-          <a:lstStyle/>
-          <a:p>
-            <a:pPr algn="r" indent="0" marL="0">
-              <a:buNone/>
-            </a:pPr>
-            <a:r>
-              <a:rPr lang="en-US" sz="800" dirty="0">
-                <a:solidFill>
-                  <a:srgbClr val="5F7181"/>
-                </a:solidFill>
-                <a:latin typeface="Aptos" pitchFamily="34" charset="0"/>
-                <a:ea typeface="Aptos" pitchFamily="34" charset="-122"/>
-                <a:cs typeface="Aptos" pitchFamily="34" charset="-120"/>
-              </a:rPr>
-              <a:t>Copyright Paula Soper</a:t>
-            </a:r>
-            <a:endParaRPr lang="en-US" sz="800" dirty="0"/>
-          </a:p>
-        </p:txBody>
-      </p:sp>
-      <p:sp>
-        <p:nvSpPr>
-          <p:cNvPr id="7" name="Text 5"/>
-          <p:cNvSpPr/>
-          <p:nvPr/>
-        </p:nvSpPr>
-        <p:spPr>
-          <a:xfrm>
-            <a:off x="11137392" y="6510528"/>
-            <a:ext cx="411480" cy="201168"/>
-          </a:xfrm>
-          <a:prstGeom prst="rect">
-            <a:avLst/>
-          </a:prstGeom>
-          <a:noFill/>
-          <a:ln/>
-        </p:spPr>
-        <p:txBody>
-          <a:bodyPr wrap="square" lIns="0" tIns="0" rIns="0" bIns="0" rtlCol="0" anchor="ctr"/>
-          <a:lstStyle/>
-          <a:p>
-            <a:pPr algn="r" indent="0" marL="0">
-              <a:buNone/>
-            </a:pPr>
-            <a:r>
-              <a:rPr lang="en-US" sz="900" dirty="0">
-                <a:solidFill>
-                  <a:srgbClr val="5F7181"/>
-                </a:solidFill>
-                <a:latin typeface="Aptos" pitchFamily="34" charset="0"/>
-                <a:ea typeface="Aptos" pitchFamily="34" charset="-122"/>
-                <a:cs typeface="Aptos" pitchFamily="34" charset="-120"/>
-              </a:rPr>
-              <a:t>19</a:t>
-            </a:r>
-            <a:endParaRPr lang="en-US" sz="900" dirty="0"/>
-          </a:p>
-        </p:txBody>
-      </p:sp>
-      <p:sp>
-        <p:nvSpPr>
-          <p:cNvPr id="8" name="Text 6"/>
-          <p:cNvSpPr/>
-          <p:nvPr/>
-        </p:nvSpPr>
-        <p:spPr>
-          <a:xfrm>
-            <a:off x="640080" y="658368"/>
-            <a:ext cx="10881360" cy="713232"/>
-          </a:xfrm>
-          <a:prstGeom prst="rect">
-            <a:avLst/>
-          </a:prstGeom>
-          <a:noFill/>
-          <a:ln/>
-        </p:spPr>
-        <p:txBody>
-          <a:bodyPr wrap="square" lIns="0" tIns="0" rIns="0" bIns="0" rtlCol="0" anchor="ctr">
-            <a:normAutofit/>
-          </a:bodyPr>
-          <a:lstStyle/>
-          <a:p>
-            <a:pPr indent="0" marL="0">
-              <a:buNone/>
-            </a:pPr>
-            <a:r>
-              <a:rPr lang="en-US" sz="3400" b="1" dirty="0">
-                <a:solidFill>
-                  <a:srgbClr val="003A63"/>
-                </a:solidFill>
-                <a:latin typeface="Aptos Display" pitchFamily="34" charset="0"/>
-                <a:ea typeface="Aptos Display" pitchFamily="34" charset="-122"/>
-                <a:cs typeface="Aptos Display" pitchFamily="34" charset="-120"/>
-              </a:rPr>
-              <a:t>Knowledge Check</a:t>
-            </a:r>
-            <a:endParaRPr lang="en-US" sz="3400" dirty="0"/>
-          </a:p>
-        </p:txBody>
-      </p:sp>
-      <p:sp>
-        <p:nvSpPr>
-          <p:cNvPr id="9" name="Text 7"/>
-          <p:cNvSpPr/>
-          <p:nvPr/>
-        </p:nvSpPr>
-        <p:spPr>
-          <a:xfrm>
-            <a:off x="822960" y="1463040"/>
-            <a:ext cx="6565392" cy="4343400"/>
-          </a:xfrm>
-          <a:prstGeom prst="rect">
-            <a:avLst/>
-          </a:prstGeom>
-          <a:noFill/>
-          <a:ln/>
-        </p:spPr>
-        <p:txBody>
-          <a:bodyPr wrap="square" lIns="1016" tIns="1016" rIns="1016" bIns="1016" rtlCol="0" anchor="t">
-            <a:normAutofit/>
-          </a:bodyPr>
-          <a:lstStyle/>
-          <a:p>
-            <a:pPr indent="0" marL="0">
-              <a:buNone/>
-            </a:pPr>
-            <a:r>
-              <a:rPr lang="en-US" sz="1920" dirty="0">
-                <a:solidFill>
-                  <a:srgbClr val="003A63"/>
-                </a:solidFill>
-                <a:latin typeface="Aptos" pitchFamily="34" charset="0"/>
-                <a:ea typeface="Aptos" pitchFamily="34" charset="-122"/>
-                <a:cs typeface="Aptos" pitchFamily="34" charset="-120"/>
-              </a:rPr>
-              <a:t>1. What is the best reason to address human factors, workflow integration,.</a:t>
-            </a:r>
-            <a:endParaRPr lang="en-US" sz="1920" dirty="0"/>
-          </a:p>
-          <a:p>
-            <a:pPr indent="0" marL="0">
-              <a:buNone/>
-            </a:pPr>
-            <a:r>
-              <a:rPr lang="en-US" sz="1920" dirty="0">
-                <a:solidFill>
-                  <a:srgbClr val="003A63"/>
-                </a:solidFill>
-                <a:latin typeface="Aptos" pitchFamily="34" charset="0"/>
-                <a:ea typeface="Aptos" pitchFamily="34" charset="-122"/>
-                <a:cs typeface="Aptos" pitchFamily="34" charset="-120"/>
-              </a:rPr>
-              <a:t>2. Which practice best supports responsible implementation?</a:t>
-            </a:r>
-            <a:endParaRPr lang="en-US" sz="1920" dirty="0"/>
-          </a:p>
-          <a:p>
-            <a:pPr indent="0" marL="0">
-              <a:buNone/>
-            </a:pPr>
-            <a:r>
-              <a:rPr lang="en-US" sz="1920" dirty="0">
-                <a:solidFill>
-                  <a:srgbClr val="003A63"/>
-                </a:solidFill>
-                <a:latin typeface="Aptos" pitchFamily="34" charset="0"/>
-                <a:ea typeface="Aptos" pitchFamily="34" charset="-122"/>
-                <a:cs typeface="Aptos" pitchFamily="34" charset="-120"/>
-              </a:rPr>
-              <a:t>3. Which statement best describes a common failure mode?</a:t>
-            </a:r>
-            <a:endParaRPr lang="en-US" sz="1920" dirty="0"/>
-          </a:p>
-        </p:txBody>
-      </p:sp>
-      <p:sp>
-        <p:nvSpPr>
-          <p:cNvPr id="10" name="Shape 8"/>
-          <p:cNvSpPr/>
-          <p:nvPr/>
-        </p:nvSpPr>
-        <p:spPr>
-          <a:xfrm>
-            <a:off x="7543800" y="1325880"/>
-            <a:ext cx="3611880" cy="1261872"/>
-          </a:xfrm>
-          <a:prstGeom prst="roundRect">
-            <a:avLst>
-              <a:gd name="adj" fmla="val 8696"/>
-            </a:avLst>
-          </a:prstGeom>
-          <a:solidFill>
-            <a:srgbClr val="EEF8ED"/>
-          </a:solidFill>
-          <a:ln w="12700">
-            <a:solidFill>
-              <a:srgbClr val="B9D7E6"/>
-            </a:solidFill>
-            <a:prstDash val="solid"/>
-          </a:ln>
-        </p:spPr>
-      </p:sp>
-      <p:sp>
-        <p:nvSpPr>
-          <p:cNvPr id="11" name="Text 9"/>
-          <p:cNvSpPr/>
-          <p:nvPr/>
-        </p:nvSpPr>
-        <p:spPr>
-          <a:xfrm>
-            <a:off x="7708392" y="1453896"/>
-            <a:ext cx="3282696" cy="228600"/>
-          </a:xfrm>
-          <a:prstGeom prst="rect">
-            <a:avLst/>
-          </a:prstGeom>
-          <a:noFill/>
-          <a:ln/>
-        </p:spPr>
-        <p:txBody>
-          <a:bodyPr wrap="square" lIns="0" tIns="0" rIns="0" bIns="0" rtlCol="0" anchor="ctr"/>
-          <a:lstStyle/>
-          <a:p>
-            <a:pPr indent="0" marL="0">
-              <a:buNone/>
-            </a:pPr>
-            <a:r>
-              <a:rPr lang="en-US" sz="1220" b="1" dirty="0">
-                <a:solidFill>
-                  <a:srgbClr val="0068B7"/>
-                </a:solidFill>
-                <a:latin typeface="Aptos" pitchFamily="34" charset="0"/>
-                <a:ea typeface="Aptos" pitchFamily="34" charset="-122"/>
-                <a:cs typeface="Aptos" pitchFamily="34" charset="-120"/>
-              </a:rPr>
-              <a:t>Implementation cue</a:t>
-            </a:r>
-            <a:endParaRPr lang="en-US" sz="1220" dirty="0"/>
-          </a:p>
-        </p:txBody>
-      </p:sp>
-      <p:sp>
-        <p:nvSpPr>
-          <p:cNvPr id="12" name="Text 10"/>
-          <p:cNvSpPr/>
-          <p:nvPr/>
-        </p:nvSpPr>
-        <p:spPr>
-          <a:xfrm>
-            <a:off x="7708392" y="1764792"/>
-            <a:ext cx="3282696" cy="749808"/>
-          </a:xfrm>
-          <a:prstGeom prst="rect">
-            <a:avLst/>
-          </a:prstGeom>
-          <a:noFill/>
-          <a:ln/>
-        </p:spPr>
-        <p:txBody>
-          <a:bodyPr wrap="square" lIns="254" tIns="254" rIns="254" bIns="254" rtlCol="0" anchor="t">
-            <a:normAutofit/>
-          </a:bodyPr>
-          <a:lstStyle/>
-          <a:p>
-            <a:pPr indent="0" marL="0">
-              <a:buNone/>
-            </a:pPr>
-            <a:r>
-              <a:rPr lang="en-US" sz="1220" dirty="0">
-                <a:solidFill>
-                  <a:srgbClr val="17364A"/>
-                </a:solidFill>
-                <a:latin typeface="Aptos" pitchFamily="34" charset="0"/>
-                <a:ea typeface="Aptos" pitchFamily="34" charset="-122"/>
-                <a:cs typeface="Aptos" pitchFamily="34" charset="-120"/>
-              </a:rPr>
-              <a:t>What is the best reason to address human factors, workflow integration, and.</a:t>
-            </a:r>
-            <a:endParaRPr lang="en-US" sz="1220" dirty="0"/>
-          </a:p>
-        </p:txBody>
-      </p:sp>
-      <p:sp>
-        <p:nvSpPr>
-          <p:cNvPr id="13" name="Shape 11"/>
-          <p:cNvSpPr/>
-          <p:nvPr/>
-        </p:nvSpPr>
-        <p:spPr>
-          <a:xfrm>
-            <a:off x="7543800" y="2724912"/>
-            <a:ext cx="3611880" cy="1527048"/>
-          </a:xfrm>
-          <a:prstGeom prst="roundRect">
-            <a:avLst>
-              <a:gd name="adj" fmla="val 7186"/>
-            </a:avLst>
-          </a:prstGeom>
-          <a:solidFill>
-            <a:srgbClr val="FFFFFF"/>
-          </a:solidFill>
-          <a:ln w="12700">
-            <a:solidFill>
-              <a:srgbClr val="B9D7E6"/>
-            </a:solidFill>
-            <a:prstDash val="solid"/>
-          </a:ln>
-        </p:spPr>
-      </p:sp>
-      <p:sp>
-        <p:nvSpPr>
-          <p:cNvPr id="14" name="Text 12"/>
-          <p:cNvSpPr/>
-          <p:nvPr/>
-        </p:nvSpPr>
-        <p:spPr>
-          <a:xfrm>
-            <a:off x="7708392" y="2852928"/>
-            <a:ext cx="3282696" cy="228600"/>
-          </a:xfrm>
-          <a:prstGeom prst="rect">
-            <a:avLst/>
-          </a:prstGeom>
-          <a:noFill/>
-          <a:ln/>
-        </p:spPr>
-        <p:txBody>
-          <a:bodyPr wrap="square" lIns="0" tIns="0" rIns="0" bIns="0" rtlCol="0" anchor="ctr"/>
-          <a:lstStyle/>
-          <a:p>
-            <a:pPr indent="0" marL="0">
-              <a:buNone/>
-            </a:pPr>
-            <a:r>
-              <a:rPr lang="en-US" sz="1220" b="1" dirty="0">
-                <a:solidFill>
-                  <a:srgbClr val="0068B7"/>
-                </a:solidFill>
-                <a:latin typeface="Aptos" pitchFamily="34" charset="0"/>
-                <a:ea typeface="Aptos" pitchFamily="34" charset="-122"/>
-                <a:cs typeface="Aptos" pitchFamily="34" charset="-120"/>
-              </a:rPr>
-              <a:t>Concept checkpoints</a:t>
-            </a:r>
-            <a:endParaRPr lang="en-US" sz="1220" dirty="0"/>
-          </a:p>
-        </p:txBody>
-      </p:sp>
-      <p:sp>
-        <p:nvSpPr>
-          <p:cNvPr id="15" name="Text 13"/>
-          <p:cNvSpPr/>
-          <p:nvPr/>
-        </p:nvSpPr>
-        <p:spPr>
-          <a:xfrm>
-            <a:off x="7726680" y="3182112"/>
-            <a:ext cx="3227832" cy="960120"/>
-          </a:xfrm>
-          <a:prstGeom prst="rect">
-            <a:avLst/>
-          </a:prstGeom>
-          <a:noFill/>
-          <a:ln/>
-        </p:spPr>
-        <p:txBody>
-          <a:bodyPr wrap="square" lIns="508" tIns="508" rIns="508" bIns="508" rtlCol="0" anchor="t">
-            <a:normAutofit/>
-          </a:bodyPr>
-          <a:lstStyle/>
-          <a:p>
-            <a:pPr indent="0" marL="0">
-              <a:buNone/>
-            </a:pPr>
-            <a:r>
-              <a:rPr lang="en-US" sz="1140" dirty="0">
-                <a:solidFill>
-                  <a:srgbClr val="17364A"/>
-                </a:solidFill>
-                <a:latin typeface="Aptos" pitchFamily="34" charset="0"/>
-                <a:ea typeface="Aptos" pitchFamily="34" charset="-122"/>
-                <a:cs typeface="Aptos" pitchFamily="34" charset="-120"/>
-              </a:rPr>
-              <a:t>What is the best reason to address human factors,.</a:t>
-            </a:r>
-            <a:endParaRPr lang="en-US" sz="1140" dirty="0"/>
-          </a:p>
-        </p:txBody>
-      </p:sp>
-      <p:sp>
-        <p:nvSpPr>
-          <p:cNvPr id="16" name="Shape 14"/>
-          <p:cNvSpPr/>
-          <p:nvPr/>
-        </p:nvSpPr>
-        <p:spPr>
-          <a:xfrm>
-            <a:off x="7543800" y="4389120"/>
-            <a:ext cx="3611880" cy="1261872"/>
-          </a:xfrm>
-          <a:prstGeom prst="roundRect">
-            <a:avLst>
-              <a:gd name="adj" fmla="val 8696"/>
-            </a:avLst>
-          </a:prstGeom>
-          <a:solidFill>
-            <a:srgbClr val="EAF6F8"/>
-          </a:solidFill>
-          <a:ln w="12700">
-            <a:solidFill>
-              <a:srgbClr val="B9D7E6"/>
-            </a:solidFill>
-            <a:prstDash val="solid"/>
-          </a:ln>
-        </p:spPr>
-      </p:sp>
-      <p:sp>
-        <p:nvSpPr>
-          <p:cNvPr id="17" name="Text 15"/>
-          <p:cNvSpPr/>
-          <p:nvPr/>
-        </p:nvSpPr>
-        <p:spPr>
-          <a:xfrm>
-            <a:off x="7708392" y="4517136"/>
-            <a:ext cx="3282696" cy="228600"/>
-          </a:xfrm>
-          <a:prstGeom prst="rect">
-            <a:avLst/>
-          </a:prstGeom>
-          <a:noFill/>
-          <a:ln/>
-        </p:spPr>
-        <p:txBody>
-          <a:bodyPr wrap="square" lIns="0" tIns="0" rIns="0" bIns="0" rtlCol="0" anchor="ctr"/>
-          <a:lstStyle/>
-          <a:p>
-            <a:pPr indent="0" marL="0">
-              <a:buNone/>
-            </a:pPr>
-            <a:r>
-              <a:rPr lang="en-US" sz="1220" b="1" dirty="0">
-                <a:solidFill>
-                  <a:srgbClr val="0068B7"/>
-                </a:solidFill>
-                <a:latin typeface="Aptos" pitchFamily="34" charset="0"/>
-                <a:ea typeface="Aptos" pitchFamily="34" charset="-122"/>
-                <a:cs typeface="Aptos" pitchFamily="34" charset="-120"/>
-              </a:rPr>
-              <a:t>Next action</a:t>
-            </a:r>
-            <a:endParaRPr lang="en-US" sz="1220" dirty="0"/>
-          </a:p>
-        </p:txBody>
-      </p:sp>
-      <p:sp>
-        <p:nvSpPr>
-          <p:cNvPr id="18" name="Text 16"/>
-          <p:cNvSpPr/>
-          <p:nvPr/>
-        </p:nvSpPr>
-        <p:spPr>
-          <a:xfrm>
-            <a:off x="7708392" y="4828032"/>
-            <a:ext cx="3282696" cy="749808"/>
-          </a:xfrm>
-          <a:prstGeom prst="rect">
-            <a:avLst/>
-          </a:prstGeom>
-          <a:noFill/>
-          <a:ln/>
-        </p:spPr>
-        <p:txBody>
-          <a:bodyPr wrap="square" lIns="254" tIns="254" rIns="254" bIns="254" rtlCol="0" anchor="t">
-            <a:normAutofit/>
-          </a:bodyPr>
-          <a:lstStyle/>
-          <a:p>
-            <a:pPr indent="0" marL="0">
-              <a:buNone/>
-            </a:pPr>
-            <a:r>
-              <a:rPr lang="en-US" sz="1220" dirty="0">
-                <a:solidFill>
-                  <a:srgbClr val="17364A"/>
-                </a:solidFill>
-                <a:latin typeface="Aptos" pitchFamily="34" charset="0"/>
-                <a:ea typeface="Aptos" pitchFamily="34" charset="-122"/>
-                <a:cs typeface="Aptos" pitchFamily="34" charset="-120"/>
-              </a:rPr>
-              <a:t>Use the assignment to test whether you can explain the concept, apply it to a.</a:t>
             </a:r>
             <a:endParaRPr lang="en-US" sz="1220" dirty="0"/>
           </a:p>
@@ -10228,7 +7458,7 @@
                 <a:ea typeface="Aptos" pitchFamily="34" charset="-122"/>
                 <a:cs typeface="Aptos" pitchFamily="34" charset="-120"/>
               </a:rPr>
-              <a:t>Human Factors, Workflow Integration, and Usability Testing</a:t>
+              <a:t>AI for Environmental Health and Field Operations</a:t>
             </a:r>
             <a:endParaRPr lang="en-US" sz="900" dirty="0"/>
           </a:p>
@@ -10427,7 +7657,7 @@
                 <a:ea typeface="Aptos" pitchFamily="34" charset="-122"/>
                 <a:cs typeface="Aptos" pitchFamily="34" charset="-120"/>
               </a:rPr>
-              <a:t>• AI tools succeed or fail inside real public health workflows.</a:t>
+              <a:t>• This module introduces responsible AI use in environmental health and field.</a:t>
             </a:r>
             <a:endParaRPr lang="en-US" sz="2100" dirty="0"/>
           </a:p>
@@ -10444,7 +7674,7 @@
                 <a:ea typeface="Aptos" pitchFamily="34" charset="-122"/>
                 <a:cs typeface="Aptos" pitchFamily="34" charset="-120"/>
               </a:rPr>
-              <a:t>• Human factors and usability testing help agencies understand how staff.</a:t>
+              <a:t>• Public health field work may include inspections, complaint investigation,.</a:t>
             </a:r>
             <a:endParaRPr lang="en-US" sz="2100" dirty="0"/>
           </a:p>
@@ -10461,7 +7691,7 @@
                 <a:ea typeface="Aptos" pitchFamily="34" charset="-122"/>
                 <a:cs typeface="Aptos" pitchFamily="34" charset="-120"/>
               </a:rPr>
-              <a:t>• This module teaches learners to evaluate workflow fit, interface design,.</a:t>
+              <a:t>• AI can support triage, routing, summarization, mapping, scheduling, report.</a:t>
             </a:r>
             <a:endParaRPr lang="en-US" sz="2100" dirty="0"/>
           </a:p>
@@ -10568,7 +7798,7 @@
                 <a:ea typeface="Aptos" pitchFamily="34" charset="-122"/>
                 <a:cs typeface="Aptos" pitchFamily="34" charset="-120"/>
               </a:rPr>
-              <a:t>Level: applied/foundational Primary track: Operations and Data Quality Track.</a:t>
+              <a:t>Level: Intermediate Primary track: Operations and Data Quality Appears in.</a:t>
             </a:r>
             <a:endParaRPr lang="en-US" sz="1220" dirty="0"/>
           </a:p>
@@ -10712,1339 +7942,6 @@
               <a:t>Use the notes and references for deeper review.</a:t>
             </a:r>
             <a:endParaRPr lang="en-US" sz="1140" dirty="0"/>
-          </a:p>
-        </p:txBody>
-      </p:sp>
-    </p:spTree>
-  </p:cSld>
-  <p:clrMapOvr>
-    <a:masterClrMapping/>
-  </p:clrMapOvr>
-</p:sld>
-</file>
-
-<file path=ppt/slides/slide20.xml><?xml version="1.0" encoding="utf-8"?>
-<p:sld xmlns:a="http://schemas.openxmlformats.org/drawingml/2006/main" xmlns:r="http://schemas.openxmlformats.org/officeDocument/2006/relationships" xmlns:p="http://schemas.openxmlformats.org/presentationml/2006/main">
-  <p:cSld name="Slide 20">
-    <p:bg>
-      <p:bgPr>
-        <a:solidFill>
-          <a:srgbClr val="F7FBFD"/>
-        </a:solidFill>
-      </p:bgPr>
-    </p:bg>
-    <p:spTree>
-      <p:nvGrpSpPr>
-        <p:cNvPr id="1" name=""/>
-        <p:cNvGrpSpPr/>
-        <p:nvPr/>
-      </p:nvGrpSpPr>
-      <p:grpSpPr>
-        <a:xfrm>
-          <a:off x="0" y="0"/>
-          <a:ext cx="0" cy="0"/>
-          <a:chOff x="0" y="0"/>
-          <a:chExt cx="0" cy="0"/>
-        </a:xfrm>
-      </p:grpSpPr>
-      <p:sp>
-        <p:nvSpPr>
-          <p:cNvPr id="2" name="Shape 0"/>
-          <p:cNvSpPr/>
-          <p:nvPr/>
-        </p:nvSpPr>
-        <p:spPr>
-          <a:xfrm>
-            <a:off x="0" y="0"/>
-            <a:ext cx="12191695" cy="164592"/>
-          </a:xfrm>
-          <a:prstGeom prst="rect">
-            <a:avLst/>
-          </a:prstGeom>
-          <a:solidFill>
-            <a:srgbClr val="0068B7"/>
-          </a:solidFill>
-          <a:ln w="12700">
-            <a:solidFill>
-              <a:srgbClr val="0068B7"/>
-            </a:solidFill>
-            <a:prstDash val="solid"/>
-          </a:ln>
-        </p:spPr>
-      </p:sp>
-      <p:sp>
-        <p:nvSpPr>
-          <p:cNvPr id="3" name="Shape 1"/>
-          <p:cNvSpPr/>
-          <p:nvPr/>
-        </p:nvSpPr>
-        <p:spPr>
-          <a:xfrm>
-            <a:off x="0" y="164592"/>
-            <a:ext cx="146304" cy="6693408"/>
-          </a:xfrm>
-          <a:prstGeom prst="rect">
-            <a:avLst/>
-          </a:prstGeom>
-          <a:solidFill>
-            <a:srgbClr val="2F8A28"/>
-          </a:solidFill>
-          <a:ln w="12700">
-            <a:solidFill>
-              <a:srgbClr val="2F8A28"/>
-            </a:solidFill>
-            <a:prstDash val="solid"/>
-          </a:ln>
-        </p:spPr>
-      </p:sp>
-      <p:sp>
-        <p:nvSpPr>
-          <p:cNvPr id="4" name="Text 2"/>
-          <p:cNvSpPr/>
-          <p:nvPr/>
-        </p:nvSpPr>
-        <p:spPr>
-          <a:xfrm>
-            <a:off x="502920" y="292608"/>
-            <a:ext cx="10149840" cy="256032"/>
-          </a:xfrm>
-          <a:prstGeom prst="rect">
-            <a:avLst/>
-          </a:prstGeom>
-          <a:noFill/>
-          <a:ln/>
-        </p:spPr>
-        <p:txBody>
-          <a:bodyPr wrap="square" lIns="0" tIns="0" rIns="0" bIns="0" rtlCol="0" anchor="ctr"/>
-          <a:lstStyle/>
-          <a:p>
-            <a:pPr indent="0" marL="0">
-              <a:buNone/>
-            </a:pPr>
-            <a:r>
-              <a:rPr lang="en-US" sz="900" b="1" dirty="0">
-                <a:solidFill>
-                  <a:srgbClr val="5F7181"/>
-                </a:solidFill>
-                <a:latin typeface="Aptos" pitchFamily="34" charset="0"/>
-                <a:ea typeface="Aptos" pitchFamily="34" charset="-122"/>
-                <a:cs typeface="Aptos" pitchFamily="34" charset="-120"/>
-              </a:rPr>
-              <a:t>Human Factors, Workflow Integration, and Usability Testing</a:t>
-            </a:r>
-            <a:endParaRPr lang="en-US" sz="900" dirty="0"/>
-          </a:p>
-        </p:txBody>
-      </p:sp>
-      <p:sp>
-        <p:nvSpPr>
-          <p:cNvPr id="5" name="Text 3"/>
-          <p:cNvSpPr/>
-          <p:nvPr/>
-        </p:nvSpPr>
-        <p:spPr>
-          <a:xfrm>
-            <a:off x="502920" y="6537960"/>
-            <a:ext cx="7772400" cy="201168"/>
-          </a:xfrm>
-          <a:prstGeom prst="rect">
-            <a:avLst/>
-          </a:prstGeom>
-          <a:noFill/>
-          <a:ln/>
-        </p:spPr>
-        <p:txBody>
-          <a:bodyPr wrap="square" lIns="0" tIns="0" rIns="0" bIns="0" rtlCol="0" anchor="ctr"/>
-          <a:lstStyle/>
-          <a:p>
-            <a:pPr indent="0" marL="0">
-              <a:buNone/>
-            </a:pPr>
-            <a:r>
-              <a:rPr lang="en-US" sz="800" dirty="0">
-                <a:solidFill>
-                  <a:srgbClr val="5F7181"/>
-                </a:solidFill>
-                <a:latin typeface="Aptos" pitchFamily="34" charset="0"/>
-                <a:ea typeface="Aptos" pitchFamily="34" charset="-122"/>
-                <a:cs typeface="Aptos" pitchFamily="34" charset="-120"/>
-              </a:rPr>
-              <a:t>AI Playbook and Toolkit for Public Health Departments</a:t>
-            </a:r>
-            <a:endParaRPr lang="en-US" sz="800" dirty="0"/>
-          </a:p>
-        </p:txBody>
-      </p:sp>
-      <p:sp>
-        <p:nvSpPr>
-          <p:cNvPr id="6" name="Text 4"/>
-          <p:cNvSpPr/>
-          <p:nvPr/>
-        </p:nvSpPr>
-        <p:spPr>
-          <a:xfrm>
-            <a:off x="9646920" y="6537960"/>
-            <a:ext cx="1965960" cy="201168"/>
-          </a:xfrm>
-          <a:prstGeom prst="rect">
-            <a:avLst/>
-          </a:prstGeom>
-          <a:noFill/>
-          <a:ln/>
-        </p:spPr>
-        <p:txBody>
-          <a:bodyPr wrap="square" lIns="0" tIns="0" rIns="0" bIns="0" rtlCol="0" anchor="ctr"/>
-          <a:lstStyle/>
-          <a:p>
-            <a:pPr algn="r" indent="0" marL="0">
-              <a:buNone/>
-            </a:pPr>
-            <a:r>
-              <a:rPr lang="en-US" sz="800" dirty="0">
-                <a:solidFill>
-                  <a:srgbClr val="5F7181"/>
-                </a:solidFill>
-                <a:latin typeface="Aptos" pitchFamily="34" charset="0"/>
-                <a:ea typeface="Aptos" pitchFamily="34" charset="-122"/>
-                <a:cs typeface="Aptos" pitchFamily="34" charset="-120"/>
-              </a:rPr>
-              <a:t>Copyright Paula Soper</a:t>
-            </a:r>
-            <a:endParaRPr lang="en-US" sz="800" dirty="0"/>
-          </a:p>
-        </p:txBody>
-      </p:sp>
-      <p:sp>
-        <p:nvSpPr>
-          <p:cNvPr id="7" name="Text 5"/>
-          <p:cNvSpPr/>
-          <p:nvPr/>
-        </p:nvSpPr>
-        <p:spPr>
-          <a:xfrm>
-            <a:off x="11137392" y="6510528"/>
-            <a:ext cx="411480" cy="201168"/>
-          </a:xfrm>
-          <a:prstGeom prst="rect">
-            <a:avLst/>
-          </a:prstGeom>
-          <a:noFill/>
-          <a:ln/>
-        </p:spPr>
-        <p:txBody>
-          <a:bodyPr wrap="square" lIns="0" tIns="0" rIns="0" bIns="0" rtlCol="0" anchor="ctr"/>
-          <a:lstStyle/>
-          <a:p>
-            <a:pPr algn="r" indent="0" marL="0">
-              <a:buNone/>
-            </a:pPr>
-            <a:r>
-              <a:rPr lang="en-US" sz="900" dirty="0">
-                <a:solidFill>
-                  <a:srgbClr val="5F7181"/>
-                </a:solidFill>
-                <a:latin typeface="Aptos" pitchFamily="34" charset="0"/>
-                <a:ea typeface="Aptos" pitchFamily="34" charset="-122"/>
-                <a:cs typeface="Aptos" pitchFamily="34" charset="-120"/>
-              </a:rPr>
-              <a:t>20</a:t>
-            </a:r>
-            <a:endParaRPr lang="en-US" sz="900" dirty="0"/>
-          </a:p>
-        </p:txBody>
-      </p:sp>
-      <p:sp>
-        <p:nvSpPr>
-          <p:cNvPr id="8" name="Text 6"/>
-          <p:cNvSpPr/>
-          <p:nvPr/>
-        </p:nvSpPr>
-        <p:spPr>
-          <a:xfrm>
-            <a:off x="640080" y="658368"/>
-            <a:ext cx="10881360" cy="713232"/>
-          </a:xfrm>
-          <a:prstGeom prst="rect">
-            <a:avLst/>
-          </a:prstGeom>
-          <a:noFill/>
-          <a:ln/>
-        </p:spPr>
-        <p:txBody>
-          <a:bodyPr wrap="square" lIns="0" tIns="0" rIns="0" bIns="0" rtlCol="0" anchor="ctr">
-            <a:normAutofit/>
-          </a:bodyPr>
-          <a:lstStyle/>
-          <a:p>
-            <a:pPr indent="0" marL="0">
-              <a:buNone/>
-            </a:pPr>
-            <a:r>
-              <a:rPr lang="en-US" sz="3400" b="1" dirty="0">
-                <a:solidFill>
-                  <a:srgbClr val="003A63"/>
-                </a:solidFill>
-                <a:latin typeface="Aptos Display" pitchFamily="34" charset="0"/>
-                <a:ea typeface="Aptos Display" pitchFamily="34" charset="-122"/>
-                <a:cs typeface="Aptos Display" pitchFamily="34" charset="-120"/>
-              </a:rPr>
-              <a:t>References and Resources</a:t>
-            </a:r>
-            <a:endParaRPr lang="en-US" sz="3400" dirty="0"/>
-          </a:p>
-        </p:txBody>
-      </p:sp>
-      <p:sp>
-        <p:nvSpPr>
-          <p:cNvPr id="9" name="Text 7"/>
-          <p:cNvSpPr/>
-          <p:nvPr/>
-        </p:nvSpPr>
-        <p:spPr>
-          <a:xfrm>
-            <a:off x="822960" y="1463040"/>
-            <a:ext cx="6565392" cy="4343400"/>
-          </a:xfrm>
-          <a:prstGeom prst="rect">
-            <a:avLst/>
-          </a:prstGeom>
-          <a:noFill/>
-          <a:ln/>
-        </p:spPr>
-        <p:txBody>
-          <a:bodyPr wrap="square" lIns="1016" tIns="1016" rIns="1016" bIns="1016" rtlCol="0" anchor="t">
-            <a:normAutofit/>
-          </a:bodyPr>
-          <a:lstStyle/>
-          <a:p>
-            <a:pPr indent="0" marL="0">
-              <a:buNone/>
-            </a:pPr>
-            <a:r>
-              <a:rPr lang="en-US" sz="1920" dirty="0">
-                <a:solidFill>
-                  <a:srgbClr val="003A63"/>
-                </a:solidFill>
-                <a:latin typeface="Aptos" pitchFamily="34" charset="0"/>
-                <a:ea typeface="Aptos" pitchFamily="34" charset="-122"/>
-                <a:cs typeface="Aptos" pitchFamily="34" charset="-120"/>
-              </a:rPr>
-              <a:t>• NIST AI Risk Management Framework:.</a:t>
-            </a:r>
-            <a:endParaRPr lang="en-US" sz="1920" dirty="0"/>
-          </a:p>
-          <a:p>
-            <a:pPr indent="0" marL="0">
-              <a:buNone/>
-            </a:pPr>
-            <a:r>
-              <a:rPr lang="en-US" sz="1920" dirty="0">
-                <a:solidFill>
-                  <a:srgbClr val="003A63"/>
-                </a:solidFill>
-                <a:latin typeface="Aptos" pitchFamily="34" charset="0"/>
-                <a:ea typeface="Aptos" pitchFamily="34" charset="-122"/>
-                <a:cs typeface="Aptos" pitchFamily="34" charset="-120"/>
-              </a:rPr>
-              <a:t>• AHRQ human factors and usability resources</a:t>
-            </a:r>
-            <a:endParaRPr lang="en-US" sz="1920" dirty="0"/>
-          </a:p>
-          <a:p>
-            <a:pPr indent="0" marL="0">
-              <a:buNone/>
-            </a:pPr>
-            <a:r>
-              <a:rPr lang="en-US" sz="1920" dirty="0">
-                <a:solidFill>
-                  <a:srgbClr val="003A63"/>
-                </a:solidFill>
-                <a:latin typeface="Aptos" pitchFamily="34" charset="0"/>
-                <a:ea typeface="Aptos" pitchFamily="34" charset="-122"/>
-                <a:cs typeface="Aptos" pitchFamily="34" charset="-120"/>
-              </a:rPr>
-              <a:t>• NIST Generative AI Profile:.</a:t>
-            </a:r>
-            <a:endParaRPr lang="en-US" sz="1920" dirty="0"/>
-          </a:p>
-        </p:txBody>
-      </p:sp>
-      <p:sp>
-        <p:nvSpPr>
-          <p:cNvPr id="10" name="Shape 8"/>
-          <p:cNvSpPr/>
-          <p:nvPr/>
-        </p:nvSpPr>
-        <p:spPr>
-          <a:xfrm>
-            <a:off x="7543800" y="1325880"/>
-            <a:ext cx="3611880" cy="1261872"/>
-          </a:xfrm>
-          <a:prstGeom prst="roundRect">
-            <a:avLst>
-              <a:gd name="adj" fmla="val 8696"/>
-            </a:avLst>
-          </a:prstGeom>
-          <a:solidFill>
-            <a:srgbClr val="EEF8ED"/>
-          </a:solidFill>
-          <a:ln w="12700">
-            <a:solidFill>
-              <a:srgbClr val="B9D7E6"/>
-            </a:solidFill>
-            <a:prstDash val="solid"/>
-          </a:ln>
-        </p:spPr>
-      </p:sp>
-      <p:sp>
-        <p:nvSpPr>
-          <p:cNvPr id="11" name="Text 9"/>
-          <p:cNvSpPr/>
-          <p:nvPr/>
-        </p:nvSpPr>
-        <p:spPr>
-          <a:xfrm>
-            <a:off x="7708392" y="1453896"/>
-            <a:ext cx="3282696" cy="228600"/>
-          </a:xfrm>
-          <a:prstGeom prst="rect">
-            <a:avLst/>
-          </a:prstGeom>
-          <a:noFill/>
-          <a:ln/>
-        </p:spPr>
-        <p:txBody>
-          <a:bodyPr wrap="square" lIns="0" tIns="0" rIns="0" bIns="0" rtlCol="0" anchor="ctr"/>
-          <a:lstStyle/>
-          <a:p>
-            <a:pPr indent="0" marL="0">
-              <a:buNone/>
-            </a:pPr>
-            <a:r>
-              <a:rPr lang="en-US" sz="1220" b="1" dirty="0">
-                <a:solidFill>
-                  <a:srgbClr val="0068B7"/>
-                </a:solidFill>
-                <a:latin typeface="Aptos" pitchFamily="34" charset="0"/>
-                <a:ea typeface="Aptos" pitchFamily="34" charset="-122"/>
-                <a:cs typeface="Aptos" pitchFamily="34" charset="-120"/>
-              </a:rPr>
-              <a:t>Implementation cue</a:t>
-            </a:r>
-            <a:endParaRPr lang="en-US" sz="1220" dirty="0"/>
-          </a:p>
-        </p:txBody>
-      </p:sp>
-      <p:sp>
-        <p:nvSpPr>
-          <p:cNvPr id="12" name="Text 10"/>
-          <p:cNvSpPr/>
-          <p:nvPr/>
-        </p:nvSpPr>
-        <p:spPr>
-          <a:xfrm>
-            <a:off x="7708392" y="1764792"/>
-            <a:ext cx="3282696" cy="749808"/>
-          </a:xfrm>
-          <a:prstGeom prst="rect">
-            <a:avLst/>
-          </a:prstGeom>
-          <a:noFill/>
-          <a:ln/>
-        </p:spPr>
-        <p:txBody>
-          <a:bodyPr wrap="square" lIns="254" tIns="254" rIns="254" bIns="254" rtlCol="0" anchor="t">
-            <a:normAutofit/>
-          </a:bodyPr>
-          <a:lstStyle/>
-          <a:p>
-            <a:pPr indent="0" marL="0">
-              <a:buNone/>
-            </a:pPr>
-            <a:r>
-              <a:rPr lang="en-US" sz="1220" dirty="0">
-                <a:solidFill>
-                  <a:srgbClr val="17364A"/>
-                </a:solidFill>
-                <a:latin typeface="Aptos" pitchFamily="34" charset="0"/>
-                <a:ea typeface="Aptos" pitchFamily="34" charset="-122"/>
-                <a:cs typeface="Aptos" pitchFamily="34" charset="-120"/>
-              </a:rPr>
-              <a:t>NIST AI Risk Management Framework:.</a:t>
-            </a:r>
-            <a:endParaRPr lang="en-US" sz="1220" dirty="0"/>
-          </a:p>
-        </p:txBody>
-      </p:sp>
-      <p:sp>
-        <p:nvSpPr>
-          <p:cNvPr id="13" name="Shape 11"/>
-          <p:cNvSpPr/>
-          <p:nvPr/>
-        </p:nvSpPr>
-        <p:spPr>
-          <a:xfrm>
-            <a:off x="7543800" y="2724912"/>
-            <a:ext cx="3611880" cy="1527048"/>
-          </a:xfrm>
-          <a:prstGeom prst="roundRect">
-            <a:avLst>
-              <a:gd name="adj" fmla="val 7186"/>
-            </a:avLst>
-          </a:prstGeom>
-          <a:solidFill>
-            <a:srgbClr val="FFFFFF"/>
-          </a:solidFill>
-          <a:ln w="12700">
-            <a:solidFill>
-              <a:srgbClr val="B9D7E6"/>
-            </a:solidFill>
-            <a:prstDash val="solid"/>
-          </a:ln>
-        </p:spPr>
-      </p:sp>
-      <p:sp>
-        <p:nvSpPr>
-          <p:cNvPr id="14" name="Text 12"/>
-          <p:cNvSpPr/>
-          <p:nvPr/>
-        </p:nvSpPr>
-        <p:spPr>
-          <a:xfrm>
-            <a:off x="7708392" y="2852928"/>
-            <a:ext cx="3282696" cy="228600"/>
-          </a:xfrm>
-          <a:prstGeom prst="rect">
-            <a:avLst/>
-          </a:prstGeom>
-          <a:noFill/>
-          <a:ln/>
-        </p:spPr>
-        <p:txBody>
-          <a:bodyPr wrap="square" lIns="0" tIns="0" rIns="0" bIns="0" rtlCol="0" anchor="ctr"/>
-          <a:lstStyle/>
-          <a:p>
-            <a:pPr indent="0" marL="0">
-              <a:buNone/>
-            </a:pPr>
-            <a:r>
-              <a:rPr lang="en-US" sz="1220" b="1" dirty="0">
-                <a:solidFill>
-                  <a:srgbClr val="0068B7"/>
-                </a:solidFill>
-                <a:latin typeface="Aptos" pitchFamily="34" charset="0"/>
-                <a:ea typeface="Aptos" pitchFamily="34" charset="-122"/>
-                <a:cs typeface="Aptos" pitchFamily="34" charset="-120"/>
-              </a:rPr>
-              <a:t>Concept checkpoints</a:t>
-            </a:r>
-            <a:endParaRPr lang="en-US" sz="1220" dirty="0"/>
-          </a:p>
-        </p:txBody>
-      </p:sp>
-      <p:sp>
-        <p:nvSpPr>
-          <p:cNvPr id="15" name="Text 13"/>
-          <p:cNvSpPr/>
-          <p:nvPr/>
-        </p:nvSpPr>
-        <p:spPr>
-          <a:xfrm>
-            <a:off x="7726680" y="3182112"/>
-            <a:ext cx="3227832" cy="960120"/>
-          </a:xfrm>
-          <a:prstGeom prst="rect">
-            <a:avLst/>
-          </a:prstGeom>
-          <a:noFill/>
-          <a:ln/>
-        </p:spPr>
-        <p:txBody>
-          <a:bodyPr wrap="square" lIns="508" tIns="508" rIns="508" bIns="508" rtlCol="0" anchor="t">
-            <a:normAutofit/>
-          </a:bodyPr>
-          <a:lstStyle/>
-          <a:p>
-            <a:pPr indent="0" marL="0">
-              <a:buNone/>
-            </a:pPr>
-            <a:r>
-              <a:rPr lang="en-US" sz="1140" dirty="0">
-                <a:solidFill>
-                  <a:srgbClr val="17364A"/>
-                </a:solidFill>
-                <a:latin typeface="Aptos" pitchFamily="34" charset="0"/>
-                <a:ea typeface="Aptos" pitchFamily="34" charset="-122"/>
-                <a:cs typeface="Aptos" pitchFamily="34" charset="-120"/>
-              </a:rPr>
-              <a:t>CDC Public Health Data Strategy and Data.</a:t>
-            </a:r>
-            <a:endParaRPr lang="en-US" sz="1140" dirty="0"/>
-          </a:p>
-          <a:p>
-            <a:pPr indent="0" marL="0">
-              <a:buNone/>
-            </a:pPr>
-            <a:r>
-              <a:rPr lang="en-US" sz="1140" dirty="0">
-                <a:solidFill>
-                  <a:srgbClr val="17364A"/>
-                </a:solidFill>
-                <a:latin typeface="Aptos" pitchFamily="34" charset="0"/>
-                <a:ea typeface="Aptos" pitchFamily="34" charset="-122"/>
-                <a:cs typeface="Aptos" pitchFamily="34" charset="-120"/>
-              </a:rPr>
-              <a:t>OWASP Top 10 for LLM Applications, when security.</a:t>
-            </a:r>
-            <a:endParaRPr lang="en-US" sz="1140" dirty="0"/>
-          </a:p>
-        </p:txBody>
-      </p:sp>
-      <p:sp>
-        <p:nvSpPr>
-          <p:cNvPr id="16" name="Shape 14"/>
-          <p:cNvSpPr/>
-          <p:nvPr/>
-        </p:nvSpPr>
-        <p:spPr>
-          <a:xfrm>
-            <a:off x="7543800" y="4389120"/>
-            <a:ext cx="3611880" cy="1261872"/>
-          </a:xfrm>
-          <a:prstGeom prst="roundRect">
-            <a:avLst>
-              <a:gd name="adj" fmla="val 8696"/>
-            </a:avLst>
-          </a:prstGeom>
-          <a:solidFill>
-            <a:srgbClr val="EAF6F8"/>
-          </a:solidFill>
-          <a:ln w="12700">
-            <a:solidFill>
-              <a:srgbClr val="B9D7E6"/>
-            </a:solidFill>
-            <a:prstDash val="solid"/>
-          </a:ln>
-        </p:spPr>
-      </p:sp>
-      <p:sp>
-        <p:nvSpPr>
-          <p:cNvPr id="17" name="Text 15"/>
-          <p:cNvSpPr/>
-          <p:nvPr/>
-        </p:nvSpPr>
-        <p:spPr>
-          <a:xfrm>
-            <a:off x="7708392" y="4517136"/>
-            <a:ext cx="3282696" cy="228600"/>
-          </a:xfrm>
-          <a:prstGeom prst="rect">
-            <a:avLst/>
-          </a:prstGeom>
-          <a:noFill/>
-          <a:ln/>
-        </p:spPr>
-        <p:txBody>
-          <a:bodyPr wrap="square" lIns="0" tIns="0" rIns="0" bIns="0" rtlCol="0" anchor="ctr"/>
-          <a:lstStyle/>
-          <a:p>
-            <a:pPr indent="0" marL="0">
-              <a:buNone/>
-            </a:pPr>
-            <a:r>
-              <a:rPr lang="en-US" sz="1220" b="1" dirty="0">
-                <a:solidFill>
-                  <a:srgbClr val="0068B7"/>
-                </a:solidFill>
-                <a:latin typeface="Aptos" pitchFamily="34" charset="0"/>
-                <a:ea typeface="Aptos" pitchFamily="34" charset="-122"/>
-                <a:cs typeface="Aptos" pitchFamily="34" charset="-120"/>
-              </a:rPr>
-              <a:t>Next action</a:t>
-            </a:r>
-            <a:endParaRPr lang="en-US" sz="1220" dirty="0"/>
-          </a:p>
-        </p:txBody>
-      </p:sp>
-      <p:sp>
-        <p:nvSpPr>
-          <p:cNvPr id="18" name="Text 16"/>
-          <p:cNvSpPr/>
-          <p:nvPr/>
-        </p:nvSpPr>
-        <p:spPr>
-          <a:xfrm>
-            <a:off x="7708392" y="4828032"/>
-            <a:ext cx="3282696" cy="749808"/>
-          </a:xfrm>
-          <a:prstGeom prst="rect">
-            <a:avLst/>
-          </a:prstGeom>
-          <a:noFill/>
-          <a:ln/>
-        </p:spPr>
-        <p:txBody>
-          <a:bodyPr wrap="square" lIns="254" tIns="254" rIns="254" bIns="254" rtlCol="0" anchor="t">
-            <a:normAutofit/>
-          </a:bodyPr>
-          <a:lstStyle/>
-          <a:p>
-            <a:pPr indent="0" marL="0">
-              <a:buNone/>
-            </a:pPr>
-            <a:r>
-              <a:rPr lang="en-US" sz="1220" dirty="0">
-                <a:solidFill>
-                  <a:srgbClr val="17364A"/>
-                </a:solidFill>
-                <a:latin typeface="Aptos" pitchFamily="34" charset="0"/>
-                <a:ea typeface="Aptos" pitchFamily="34" charset="-122"/>
-                <a:cs typeface="Aptos" pitchFamily="34" charset="-120"/>
-              </a:rPr>
-              <a:t>Use the concept to clarify workflow changes, dependencies, staffing, procurement.</a:t>
-            </a:r>
-            <a:endParaRPr lang="en-US" sz="1220" dirty="0"/>
-          </a:p>
-        </p:txBody>
-      </p:sp>
-    </p:spTree>
-  </p:cSld>
-  <p:clrMapOvr>
-    <a:masterClrMapping/>
-  </p:clrMapOvr>
-</p:sld>
-</file>
-
-<file path=ppt/slides/slide21.xml><?xml version="1.0" encoding="utf-8"?>
-<p:sld xmlns:a="http://schemas.openxmlformats.org/drawingml/2006/main" xmlns:r="http://schemas.openxmlformats.org/officeDocument/2006/relationships" xmlns:p="http://schemas.openxmlformats.org/presentationml/2006/main">
-  <p:cSld name="Slide 21">
-    <p:bg>
-      <p:bgPr>
-        <a:solidFill>
-          <a:srgbClr val="F7FBFD"/>
-        </a:solidFill>
-      </p:bgPr>
-    </p:bg>
-    <p:spTree>
-      <p:nvGrpSpPr>
-        <p:cNvPr id="1" name=""/>
-        <p:cNvGrpSpPr/>
-        <p:nvPr/>
-      </p:nvGrpSpPr>
-      <p:grpSpPr>
-        <a:xfrm>
-          <a:off x="0" y="0"/>
-          <a:ext cx="0" cy="0"/>
-          <a:chOff x="0" y="0"/>
-          <a:chExt cx="0" cy="0"/>
-        </a:xfrm>
-      </p:grpSpPr>
-      <p:sp>
-        <p:nvSpPr>
-          <p:cNvPr id="2" name="Shape 0"/>
-          <p:cNvSpPr/>
-          <p:nvPr/>
-        </p:nvSpPr>
-        <p:spPr>
-          <a:xfrm>
-            <a:off x="0" y="0"/>
-            <a:ext cx="12191695" cy="164592"/>
-          </a:xfrm>
-          <a:prstGeom prst="rect">
-            <a:avLst/>
-          </a:prstGeom>
-          <a:solidFill>
-            <a:srgbClr val="0068B7"/>
-          </a:solidFill>
-          <a:ln w="12700">
-            <a:solidFill>
-              <a:srgbClr val="0068B7"/>
-            </a:solidFill>
-            <a:prstDash val="solid"/>
-          </a:ln>
-        </p:spPr>
-      </p:sp>
-      <p:sp>
-        <p:nvSpPr>
-          <p:cNvPr id="3" name="Shape 1"/>
-          <p:cNvSpPr/>
-          <p:nvPr/>
-        </p:nvSpPr>
-        <p:spPr>
-          <a:xfrm>
-            <a:off x="0" y="164592"/>
-            <a:ext cx="146304" cy="6693408"/>
-          </a:xfrm>
-          <a:prstGeom prst="rect">
-            <a:avLst/>
-          </a:prstGeom>
-          <a:solidFill>
-            <a:srgbClr val="2F8A28"/>
-          </a:solidFill>
-          <a:ln w="12700">
-            <a:solidFill>
-              <a:srgbClr val="2F8A28"/>
-            </a:solidFill>
-            <a:prstDash val="solid"/>
-          </a:ln>
-        </p:spPr>
-      </p:sp>
-      <p:sp>
-        <p:nvSpPr>
-          <p:cNvPr id="4" name="Text 2"/>
-          <p:cNvSpPr/>
-          <p:nvPr/>
-        </p:nvSpPr>
-        <p:spPr>
-          <a:xfrm>
-            <a:off x="502920" y="292608"/>
-            <a:ext cx="10149840" cy="256032"/>
-          </a:xfrm>
-          <a:prstGeom prst="rect">
-            <a:avLst/>
-          </a:prstGeom>
-          <a:noFill/>
-          <a:ln/>
-        </p:spPr>
-        <p:txBody>
-          <a:bodyPr wrap="square" lIns="0" tIns="0" rIns="0" bIns="0" rtlCol="0" anchor="ctr"/>
-          <a:lstStyle/>
-          <a:p>
-            <a:pPr indent="0" marL="0">
-              <a:buNone/>
-            </a:pPr>
-            <a:r>
-              <a:rPr lang="en-US" sz="900" b="1" dirty="0">
-                <a:solidFill>
-                  <a:srgbClr val="5F7181"/>
-                </a:solidFill>
-                <a:latin typeface="Aptos" pitchFamily="34" charset="0"/>
-                <a:ea typeface="Aptos" pitchFamily="34" charset="-122"/>
-                <a:cs typeface="Aptos" pitchFamily="34" charset="-120"/>
-              </a:rPr>
-              <a:t>Human Factors, Workflow Integration, and Usability Testing</a:t>
-            </a:r>
-            <a:endParaRPr lang="en-US" sz="900" dirty="0"/>
-          </a:p>
-        </p:txBody>
-      </p:sp>
-      <p:sp>
-        <p:nvSpPr>
-          <p:cNvPr id="5" name="Text 3"/>
-          <p:cNvSpPr/>
-          <p:nvPr/>
-        </p:nvSpPr>
-        <p:spPr>
-          <a:xfrm>
-            <a:off x="502920" y="6537960"/>
-            <a:ext cx="7772400" cy="201168"/>
-          </a:xfrm>
-          <a:prstGeom prst="rect">
-            <a:avLst/>
-          </a:prstGeom>
-          <a:noFill/>
-          <a:ln/>
-        </p:spPr>
-        <p:txBody>
-          <a:bodyPr wrap="square" lIns="0" tIns="0" rIns="0" bIns="0" rtlCol="0" anchor="ctr"/>
-          <a:lstStyle/>
-          <a:p>
-            <a:pPr indent="0" marL="0">
-              <a:buNone/>
-            </a:pPr>
-            <a:r>
-              <a:rPr lang="en-US" sz="800" dirty="0">
-                <a:solidFill>
-                  <a:srgbClr val="5F7181"/>
-                </a:solidFill>
-                <a:latin typeface="Aptos" pitchFamily="34" charset="0"/>
-                <a:ea typeface="Aptos" pitchFamily="34" charset="-122"/>
-                <a:cs typeface="Aptos" pitchFamily="34" charset="-120"/>
-              </a:rPr>
-              <a:t>AI Playbook and Toolkit for Public Health Departments</a:t>
-            </a:r>
-            <a:endParaRPr lang="en-US" sz="800" dirty="0"/>
-          </a:p>
-        </p:txBody>
-      </p:sp>
-      <p:sp>
-        <p:nvSpPr>
-          <p:cNvPr id="6" name="Text 4"/>
-          <p:cNvSpPr/>
-          <p:nvPr/>
-        </p:nvSpPr>
-        <p:spPr>
-          <a:xfrm>
-            <a:off x="9646920" y="6537960"/>
-            <a:ext cx="1965960" cy="201168"/>
-          </a:xfrm>
-          <a:prstGeom prst="rect">
-            <a:avLst/>
-          </a:prstGeom>
-          <a:noFill/>
-          <a:ln/>
-        </p:spPr>
-        <p:txBody>
-          <a:bodyPr wrap="square" lIns="0" tIns="0" rIns="0" bIns="0" rtlCol="0" anchor="ctr"/>
-          <a:lstStyle/>
-          <a:p>
-            <a:pPr algn="r" indent="0" marL="0">
-              <a:buNone/>
-            </a:pPr>
-            <a:r>
-              <a:rPr lang="en-US" sz="800" dirty="0">
-                <a:solidFill>
-                  <a:srgbClr val="5F7181"/>
-                </a:solidFill>
-                <a:latin typeface="Aptos" pitchFamily="34" charset="0"/>
-                <a:ea typeface="Aptos" pitchFamily="34" charset="-122"/>
-                <a:cs typeface="Aptos" pitchFamily="34" charset="-120"/>
-              </a:rPr>
-              <a:t>Copyright Paula Soper</a:t>
-            </a:r>
-            <a:endParaRPr lang="en-US" sz="800" dirty="0"/>
-          </a:p>
-        </p:txBody>
-      </p:sp>
-      <p:sp>
-        <p:nvSpPr>
-          <p:cNvPr id="7" name="Text 5"/>
-          <p:cNvSpPr/>
-          <p:nvPr/>
-        </p:nvSpPr>
-        <p:spPr>
-          <a:xfrm>
-            <a:off x="11137392" y="6510528"/>
-            <a:ext cx="411480" cy="201168"/>
-          </a:xfrm>
-          <a:prstGeom prst="rect">
-            <a:avLst/>
-          </a:prstGeom>
-          <a:noFill/>
-          <a:ln/>
-        </p:spPr>
-        <p:txBody>
-          <a:bodyPr wrap="square" lIns="0" tIns="0" rIns="0" bIns="0" rtlCol="0" anchor="ctr"/>
-          <a:lstStyle/>
-          <a:p>
-            <a:pPr algn="r" indent="0" marL="0">
-              <a:buNone/>
-            </a:pPr>
-            <a:r>
-              <a:rPr lang="en-US" sz="900" dirty="0">
-                <a:solidFill>
-                  <a:srgbClr val="5F7181"/>
-                </a:solidFill>
-                <a:latin typeface="Aptos" pitchFamily="34" charset="0"/>
-                <a:ea typeface="Aptos" pitchFamily="34" charset="-122"/>
-                <a:cs typeface="Aptos" pitchFamily="34" charset="-120"/>
-              </a:rPr>
-              <a:t>21</a:t>
-            </a:r>
-            <a:endParaRPr lang="en-US" sz="900" dirty="0"/>
-          </a:p>
-        </p:txBody>
-      </p:sp>
-      <p:sp>
-        <p:nvSpPr>
-          <p:cNvPr id="8" name="Text 6"/>
-          <p:cNvSpPr/>
-          <p:nvPr/>
-        </p:nvSpPr>
-        <p:spPr>
-          <a:xfrm>
-            <a:off x="640080" y="658368"/>
-            <a:ext cx="10881360" cy="713232"/>
-          </a:xfrm>
-          <a:prstGeom prst="rect">
-            <a:avLst/>
-          </a:prstGeom>
-          <a:noFill/>
-          <a:ln/>
-        </p:spPr>
-        <p:txBody>
-          <a:bodyPr wrap="square" lIns="0" tIns="0" rIns="0" bIns="0" rtlCol="0" anchor="ctr">
-            <a:normAutofit/>
-          </a:bodyPr>
-          <a:lstStyle/>
-          <a:p>
-            <a:pPr indent="0" marL="0">
-              <a:buNone/>
-            </a:pPr>
-            <a:r>
-              <a:rPr lang="en-US" sz="3400" b="1" dirty="0">
-                <a:solidFill>
-                  <a:srgbClr val="003A63"/>
-                </a:solidFill>
-                <a:latin typeface="Aptos Display" pitchFamily="34" charset="0"/>
-                <a:ea typeface="Aptos Display" pitchFamily="34" charset="-122"/>
-                <a:cs typeface="Aptos Display" pitchFamily="34" charset="-120"/>
-              </a:rPr>
-              <a:t>References and Resources Continued</a:t>
-            </a:r>
-            <a:endParaRPr lang="en-US" sz="3400" dirty="0"/>
-          </a:p>
-        </p:txBody>
-      </p:sp>
-      <p:sp>
-        <p:nvSpPr>
-          <p:cNvPr id="9" name="Text 7"/>
-          <p:cNvSpPr/>
-          <p:nvPr/>
-        </p:nvSpPr>
-        <p:spPr>
-          <a:xfrm>
-            <a:off x="822960" y="1463040"/>
-            <a:ext cx="6565392" cy="4343400"/>
-          </a:xfrm>
-          <a:prstGeom prst="rect">
-            <a:avLst/>
-          </a:prstGeom>
-          <a:noFill/>
-          <a:ln/>
-        </p:spPr>
-        <p:txBody>
-          <a:bodyPr wrap="square" lIns="1016" tIns="1016" rIns="1016" bIns="1016" rtlCol="0" anchor="t">
-            <a:normAutofit/>
-          </a:bodyPr>
-          <a:lstStyle/>
-          <a:p>
-            <a:pPr indent="0" marL="0">
-              <a:buNone/>
-            </a:pPr>
-            <a:r>
-              <a:rPr lang="en-US" sz="1920" dirty="0">
-                <a:solidFill>
-                  <a:srgbClr val="003A63"/>
-                </a:solidFill>
-                <a:latin typeface="Aptos" pitchFamily="34" charset="0"/>
-                <a:ea typeface="Aptos" pitchFamily="34" charset="-122"/>
-                <a:cs typeface="Aptos" pitchFamily="34" charset="-120"/>
-              </a:rPr>
-              <a:t>• Agency privacy, cybersecurity, data governance, procurement, and records.</a:t>
-            </a:r>
-            <a:endParaRPr lang="en-US" sz="1920" dirty="0"/>
-          </a:p>
-        </p:txBody>
-      </p:sp>
-      <p:sp>
-        <p:nvSpPr>
-          <p:cNvPr id="10" name="Shape 8"/>
-          <p:cNvSpPr/>
-          <p:nvPr/>
-        </p:nvSpPr>
-        <p:spPr>
-          <a:xfrm>
-            <a:off x="7543800" y="1325880"/>
-            <a:ext cx="3611880" cy="1261872"/>
-          </a:xfrm>
-          <a:prstGeom prst="roundRect">
-            <a:avLst>
-              <a:gd name="adj" fmla="val 8696"/>
-            </a:avLst>
-          </a:prstGeom>
-          <a:solidFill>
-            <a:srgbClr val="EEF8ED"/>
-          </a:solidFill>
-          <a:ln w="12700">
-            <a:solidFill>
-              <a:srgbClr val="B9D7E6"/>
-            </a:solidFill>
-            <a:prstDash val="solid"/>
-          </a:ln>
-        </p:spPr>
-      </p:sp>
-      <p:sp>
-        <p:nvSpPr>
-          <p:cNvPr id="11" name="Text 9"/>
-          <p:cNvSpPr/>
-          <p:nvPr/>
-        </p:nvSpPr>
-        <p:spPr>
-          <a:xfrm>
-            <a:off x="7708392" y="1453896"/>
-            <a:ext cx="3282696" cy="228600"/>
-          </a:xfrm>
-          <a:prstGeom prst="rect">
-            <a:avLst/>
-          </a:prstGeom>
-          <a:noFill/>
-          <a:ln/>
-        </p:spPr>
-        <p:txBody>
-          <a:bodyPr wrap="square" lIns="0" tIns="0" rIns="0" bIns="0" rtlCol="0" anchor="ctr"/>
-          <a:lstStyle/>
-          <a:p>
-            <a:pPr indent="0" marL="0">
-              <a:buNone/>
-            </a:pPr>
-            <a:r>
-              <a:rPr lang="en-US" sz="1220" b="1" dirty="0">
-                <a:solidFill>
-                  <a:srgbClr val="0068B7"/>
-                </a:solidFill>
-                <a:latin typeface="Aptos" pitchFamily="34" charset="0"/>
-                <a:ea typeface="Aptos" pitchFamily="34" charset="-122"/>
-                <a:cs typeface="Aptos" pitchFamily="34" charset="-120"/>
-              </a:rPr>
-              <a:t>Implementation cue</a:t>
-            </a:r>
-            <a:endParaRPr lang="en-US" sz="1220" dirty="0"/>
-          </a:p>
-        </p:txBody>
-      </p:sp>
-      <p:sp>
-        <p:nvSpPr>
-          <p:cNvPr id="12" name="Text 10"/>
-          <p:cNvSpPr/>
-          <p:nvPr/>
-        </p:nvSpPr>
-        <p:spPr>
-          <a:xfrm>
-            <a:off x="7708392" y="1764792"/>
-            <a:ext cx="3282696" cy="749808"/>
-          </a:xfrm>
-          <a:prstGeom prst="rect">
-            <a:avLst/>
-          </a:prstGeom>
-          <a:noFill/>
-          <a:ln/>
-        </p:spPr>
-        <p:txBody>
-          <a:bodyPr wrap="square" lIns="254" tIns="254" rIns="254" bIns="254" rtlCol="0" anchor="t">
-            <a:normAutofit/>
-          </a:bodyPr>
-          <a:lstStyle/>
-          <a:p>
-            <a:pPr indent="0" marL="0">
-              <a:buNone/>
-            </a:pPr>
-            <a:r>
-              <a:rPr lang="en-US" sz="1220" dirty="0">
-                <a:solidFill>
-                  <a:srgbClr val="17364A"/>
-                </a:solidFill>
-                <a:latin typeface="Aptos" pitchFamily="34" charset="0"/>
-                <a:ea typeface="Aptos" pitchFamily="34" charset="-122"/>
-                <a:cs typeface="Aptos" pitchFamily="34" charset="-120"/>
-              </a:rPr>
-              <a:t>Agency privacy, cybersecurity, data governance, procurement, and records.</a:t>
-            </a:r>
-            <a:endParaRPr lang="en-US" sz="1220" dirty="0"/>
-          </a:p>
-        </p:txBody>
-      </p:sp>
-      <p:sp>
-        <p:nvSpPr>
-          <p:cNvPr id="13" name="Shape 11"/>
-          <p:cNvSpPr/>
-          <p:nvPr/>
-        </p:nvSpPr>
-        <p:spPr>
-          <a:xfrm>
-            <a:off x="7543800" y="2724912"/>
-            <a:ext cx="3611880" cy="1527048"/>
-          </a:xfrm>
-          <a:prstGeom prst="roundRect">
-            <a:avLst>
-              <a:gd name="adj" fmla="val 7186"/>
-            </a:avLst>
-          </a:prstGeom>
-          <a:solidFill>
-            <a:srgbClr val="FFFFFF"/>
-          </a:solidFill>
-          <a:ln w="12700">
-            <a:solidFill>
-              <a:srgbClr val="B9D7E6"/>
-            </a:solidFill>
-            <a:prstDash val="solid"/>
-          </a:ln>
-        </p:spPr>
-      </p:sp>
-      <p:sp>
-        <p:nvSpPr>
-          <p:cNvPr id="14" name="Text 12"/>
-          <p:cNvSpPr/>
-          <p:nvPr/>
-        </p:nvSpPr>
-        <p:spPr>
-          <a:xfrm>
-            <a:off x="7708392" y="2852928"/>
-            <a:ext cx="3282696" cy="228600"/>
-          </a:xfrm>
-          <a:prstGeom prst="rect">
-            <a:avLst/>
-          </a:prstGeom>
-          <a:noFill/>
-          <a:ln/>
-        </p:spPr>
-        <p:txBody>
-          <a:bodyPr wrap="square" lIns="0" tIns="0" rIns="0" bIns="0" rtlCol="0" anchor="ctr"/>
-          <a:lstStyle/>
-          <a:p>
-            <a:pPr indent="0" marL="0">
-              <a:buNone/>
-            </a:pPr>
-            <a:r>
-              <a:rPr lang="en-US" sz="1220" b="1" dirty="0">
-                <a:solidFill>
-                  <a:srgbClr val="0068B7"/>
-                </a:solidFill>
-                <a:latin typeface="Aptos" pitchFamily="34" charset="0"/>
-                <a:ea typeface="Aptos" pitchFamily="34" charset="-122"/>
-                <a:cs typeface="Aptos" pitchFamily="34" charset="-120"/>
-              </a:rPr>
-              <a:t>Concept checkpoints</a:t>
-            </a:r>
-            <a:endParaRPr lang="en-US" sz="1220" dirty="0"/>
-          </a:p>
-        </p:txBody>
-      </p:sp>
-      <p:sp>
-        <p:nvSpPr>
-          <p:cNvPr id="15" name="Text 13"/>
-          <p:cNvSpPr/>
-          <p:nvPr/>
-        </p:nvSpPr>
-        <p:spPr>
-          <a:xfrm>
-            <a:off x="7726680" y="3182112"/>
-            <a:ext cx="3227832" cy="960120"/>
-          </a:xfrm>
-          <a:prstGeom prst="rect">
-            <a:avLst/>
-          </a:prstGeom>
-          <a:noFill/>
-          <a:ln/>
-        </p:spPr>
-        <p:txBody>
-          <a:bodyPr wrap="square" lIns="508" tIns="508" rIns="508" bIns="508" rtlCol="0" anchor="t">
-            <a:normAutofit/>
-          </a:bodyPr>
-          <a:lstStyle/>
-          <a:p>
-            <a:pPr indent="0" marL="0">
-              <a:buNone/>
-            </a:pPr>
-            <a:r>
-              <a:rPr lang="en-US" sz="1140" dirty="0">
-                <a:solidFill>
-                  <a:srgbClr val="17364A"/>
-                </a:solidFill>
-                <a:latin typeface="Aptos" pitchFamily="34" charset="0"/>
-                <a:ea typeface="Aptos" pitchFamily="34" charset="-122"/>
-                <a:cs typeface="Aptos" pitchFamily="34" charset="-120"/>
-              </a:rPr>
-              <a:t>Agency privacy, cybersecurity, data governance,.</a:t>
-            </a:r>
-            <a:endParaRPr lang="en-US" sz="1140" dirty="0"/>
-          </a:p>
-        </p:txBody>
-      </p:sp>
-      <p:sp>
-        <p:nvSpPr>
-          <p:cNvPr id="16" name="Shape 14"/>
-          <p:cNvSpPr/>
-          <p:nvPr/>
-        </p:nvSpPr>
-        <p:spPr>
-          <a:xfrm>
-            <a:off x="7543800" y="4389120"/>
-            <a:ext cx="3611880" cy="1261872"/>
-          </a:xfrm>
-          <a:prstGeom prst="roundRect">
-            <a:avLst>
-              <a:gd name="adj" fmla="val 8696"/>
-            </a:avLst>
-          </a:prstGeom>
-          <a:solidFill>
-            <a:srgbClr val="EAF6F8"/>
-          </a:solidFill>
-          <a:ln w="12700">
-            <a:solidFill>
-              <a:srgbClr val="B9D7E6"/>
-            </a:solidFill>
-            <a:prstDash val="solid"/>
-          </a:ln>
-        </p:spPr>
-      </p:sp>
-      <p:sp>
-        <p:nvSpPr>
-          <p:cNvPr id="17" name="Text 15"/>
-          <p:cNvSpPr/>
-          <p:nvPr/>
-        </p:nvSpPr>
-        <p:spPr>
-          <a:xfrm>
-            <a:off x="7708392" y="4517136"/>
-            <a:ext cx="3282696" cy="228600"/>
-          </a:xfrm>
-          <a:prstGeom prst="rect">
-            <a:avLst/>
-          </a:prstGeom>
-          <a:noFill/>
-          <a:ln/>
-        </p:spPr>
-        <p:txBody>
-          <a:bodyPr wrap="square" lIns="0" tIns="0" rIns="0" bIns="0" rtlCol="0" anchor="ctr"/>
-          <a:lstStyle/>
-          <a:p>
-            <a:pPr indent="0" marL="0">
-              <a:buNone/>
-            </a:pPr>
-            <a:r>
-              <a:rPr lang="en-US" sz="1220" b="1" dirty="0">
-                <a:solidFill>
-                  <a:srgbClr val="0068B7"/>
-                </a:solidFill>
-                <a:latin typeface="Aptos" pitchFamily="34" charset="0"/>
-                <a:ea typeface="Aptos" pitchFamily="34" charset="-122"/>
-                <a:cs typeface="Aptos" pitchFamily="34" charset="-120"/>
-              </a:rPr>
-              <a:t>Next action</a:t>
-            </a:r>
-            <a:endParaRPr lang="en-US" sz="1220" dirty="0"/>
-          </a:p>
-        </p:txBody>
-      </p:sp>
-      <p:sp>
-        <p:nvSpPr>
-          <p:cNvPr id="18" name="Text 16"/>
-          <p:cNvSpPr/>
-          <p:nvPr/>
-        </p:nvSpPr>
-        <p:spPr>
-          <a:xfrm>
-            <a:off x="7708392" y="4828032"/>
-            <a:ext cx="3282696" cy="749808"/>
-          </a:xfrm>
-          <a:prstGeom prst="rect">
-            <a:avLst/>
-          </a:prstGeom>
-          <a:noFill/>
-          <a:ln/>
-        </p:spPr>
-        <p:txBody>
-          <a:bodyPr wrap="square" lIns="254" tIns="254" rIns="254" bIns="254" rtlCol="0" anchor="t">
-            <a:normAutofit/>
-          </a:bodyPr>
-          <a:lstStyle/>
-          <a:p>
-            <a:pPr indent="0" marL="0">
-              <a:buNone/>
-            </a:pPr>
-            <a:r>
-              <a:rPr lang="en-US" sz="1220" dirty="0">
-                <a:solidFill>
-                  <a:srgbClr val="17364A"/>
-                </a:solidFill>
-                <a:latin typeface="Aptos" pitchFamily="34" charset="0"/>
-                <a:ea typeface="Aptos" pitchFamily="34" charset="-122"/>
-                <a:cs typeface="Aptos" pitchFamily="34" charset="-120"/>
-              </a:rPr>
-              <a:t>Use the concept to clarify workflow changes, dependencies, staffing, procurement.</a:t>
-            </a:r>
-            <a:endParaRPr lang="en-US" sz="1220" dirty="0"/>
           </a:p>
         </p:txBody>
       </p:sp>
@@ -12163,7 +8060,7 @@
                 <a:ea typeface="Aptos" pitchFamily="34" charset="-122"/>
                 <a:cs typeface="Aptos" pitchFamily="34" charset="-120"/>
               </a:rPr>
-              <a:t>Human Factors, Workflow Integration, and Usability Testing</a:t>
+              <a:t>AI for Environmental Health and Field Operations</a:t>
             </a:r>
             <a:endParaRPr lang="en-US" sz="900" dirty="0"/>
           </a:p>
@@ -12321,7 +8218,7 @@
                 <a:ea typeface="Aptos Display" pitchFamily="34" charset="-122"/>
                 <a:cs typeface="Aptos Display" pitchFamily="34" charset="-120"/>
               </a:rPr>
-              <a:t>How this module connects to the playbook</a:t>
+              <a:t>Learning Objectives</a:t>
             </a:r>
             <a:endParaRPr lang="en-US" sz="3400" dirty="0"/>
           </a:p>
@@ -12335,8 +8232,8 @@
         </p:nvSpPr>
         <p:spPr>
           <a:xfrm>
-            <a:off x="868680" y="1508760"/>
-            <a:ext cx="6812280" cy="3977640"/>
+            <a:off x="822960" y="1463040"/>
+            <a:ext cx="6565392" cy="4343400"/>
           </a:xfrm>
           <a:prstGeom prst="rect">
             <a:avLst/>
@@ -12354,7 +8251,7 @@
               <a:buNone/>
             </a:pPr>
             <a:r>
-              <a:rPr lang="en-US" sz="1900" dirty="0">
+              <a:rPr lang="en-US" sz="1920" dirty="0">
                 <a:solidFill>
                   <a:srgbClr val="003A63"/>
                 </a:solidFill>
@@ -12362,16 +8259,16 @@
                 <a:ea typeface="Aptos" pitchFamily="34" charset="-122"/>
                 <a:cs typeface="Aptos" pitchFamily="34" charset="-120"/>
               </a:rPr>
-              <a:t>• Play 11: Build and Deploy AI Solutions - This lesson informs Play 11 by.</a:t>
-            </a:r>
-            <a:endParaRPr lang="en-US" sz="1900" dirty="0"/>
-          </a:p>
-          <a:p>
-            <a:pPr indent="0" marL="0">
-              <a:buNone/>
-            </a:pPr>
-            <a:r>
-              <a:rPr lang="en-US" sz="1900" dirty="0">
+              <a:t>• Identify appropriate AI support opportunities in environmental health and.</a:t>
+            </a:r>
+            <a:endParaRPr lang="en-US" sz="1920" dirty="0"/>
+          </a:p>
+          <a:p>
+            <a:pPr indent="0" marL="0">
+              <a:buNone/>
+            </a:pPr>
+            <a:r>
+              <a:rPr lang="en-US" sz="1920" dirty="0">
                 <a:solidFill>
                   <a:srgbClr val="003A63"/>
                 </a:solidFill>
@@ -12379,16 +8276,16 @@
                 <a:ea typeface="Aptos" pitchFamily="34" charset="-122"/>
                 <a:cs typeface="Aptos" pitchFamily="34" charset="-120"/>
               </a:rPr>
-              <a:t>• Play 2: Readiness Assessment - This lesson informs Play 2 by helping.</a:t>
-            </a:r>
-            <a:endParaRPr lang="en-US" sz="1900" dirty="0"/>
-          </a:p>
-          <a:p>
-            <a:pPr indent="0" marL="0">
-              <a:buNone/>
-            </a:pPr>
-            <a:r>
-              <a:rPr lang="en-US" sz="1900" dirty="0">
+              <a:t>• Assess data sensitivity, geospatial risk, and operational context for field.</a:t>
+            </a:r>
+            <a:endParaRPr lang="en-US" sz="1920" dirty="0"/>
+          </a:p>
+          <a:p>
+            <a:pPr indent="0" marL="0">
+              <a:buNone/>
+            </a:pPr>
+            <a:r>
+              <a:rPr lang="en-US" sz="1920" dirty="0">
                 <a:solidFill>
                   <a:srgbClr val="003A63"/>
                 </a:solidFill>
@@ -12396,26 +8293,9 @@
                 <a:ea typeface="Aptos" pitchFamily="34" charset="-122"/>
                 <a:cs typeface="Aptos" pitchFamily="34" charset="-120"/>
               </a:rPr>
-              <a:t>• Play 1: Vision &amp; Guardrails - This lesson informs Play 1 by helping learners.</a:t>
-            </a:r>
-            <a:endParaRPr lang="en-US" sz="1900" dirty="0"/>
-          </a:p>
-          <a:p>
-            <a:pPr indent="0" marL="0">
-              <a:buNone/>
-            </a:pPr>
-            <a:r>
-              <a:rPr lang="en-US" sz="1900" dirty="0">
-                <a:solidFill>
-                  <a:srgbClr val="003A63"/>
-                </a:solidFill>
-                <a:latin typeface="Aptos" pitchFamily="34" charset="0"/>
-                <a:ea typeface="Aptos" pitchFamily="34" charset="-122"/>
-                <a:cs typeface="Aptos" pitchFamily="34" charset="-120"/>
-              </a:rPr>
-              <a:t>• Play 7: Prioritize Use Cases - This lesson informs Play 7 by helping.</a:t>
-            </a:r>
-            <a:endParaRPr lang="en-US" sz="1900" dirty="0"/>
+              <a:t>• Distinguish advisory decision support from prohibited automation in field.</a:t>
+            </a:r>
+            <a:endParaRPr lang="en-US" sz="1920" dirty="0"/>
           </a:p>
         </p:txBody>
       </p:sp>
@@ -12427,12 +8307,12 @@
         </p:nvSpPr>
         <p:spPr>
           <a:xfrm>
-            <a:off x="8046720" y="1417320"/>
-            <a:ext cx="3063240" cy="2103120"/>
+            <a:off x="7543800" y="1325880"/>
+            <a:ext cx="3611880" cy="1261872"/>
           </a:xfrm>
           <a:prstGeom prst="roundRect">
             <a:avLst>
-              <a:gd name="adj" fmla="val 5217"/>
+              <a:gd name="adj" fmla="val 8696"/>
             </a:avLst>
           </a:prstGeom>
           <a:solidFill>
@@ -12454,8 +8334,8 @@
         </p:nvSpPr>
         <p:spPr>
           <a:xfrm>
-            <a:off x="8211312" y="1545336"/>
-            <a:ext cx="2734056" cy="228600"/>
+            <a:off x="7708392" y="1453896"/>
+            <a:ext cx="3282696" cy="228600"/>
           </a:xfrm>
           <a:prstGeom prst="rect">
             <a:avLst/>
@@ -12479,7 +8359,7 @@
                 <a:ea typeface="Aptos" pitchFamily="34" charset="-122"/>
                 <a:cs typeface="Aptos" pitchFamily="34" charset="-120"/>
               </a:rPr>
-              <a:t>Apply the lesson</a:t>
+              <a:t>Implementation cue</a:t>
             </a:r>
             <a:endParaRPr lang="en-US" sz="1220" dirty="0"/>
           </a:p>
@@ -12493,8 +8373,8 @@
         </p:nvSpPr>
         <p:spPr>
           <a:xfrm>
-            <a:off x="8211312" y="1856232"/>
-            <a:ext cx="2734056" cy="1591056"/>
+            <a:off x="7708392" y="1764792"/>
+            <a:ext cx="3282696" cy="749808"/>
           </a:xfrm>
           <a:prstGeom prst="rect">
             <a:avLst/>
@@ -12520,7 +8400,7 @@
                 <a:ea typeface="Aptos" pitchFamily="34" charset="-122"/>
                 <a:cs typeface="Aptos" pitchFamily="34" charset="-120"/>
               </a:rPr>
-              <a:t>Use the related plays to identify decisions, participants, timing, approvals,.</a:t>
+              <a:t>Identify appropriate AI support opportunities in environmental health and field.</a:t>
             </a:r>
             <a:endParaRPr lang="en-US" sz="1220" dirty="0"/>
           </a:p>
@@ -12534,12 +8414,12 @@
         </p:nvSpPr>
         <p:spPr>
           <a:xfrm>
-            <a:off x="8046720" y="3794760"/>
-            <a:ext cx="3063240" cy="1600200"/>
+            <a:off x="7543800" y="2724912"/>
+            <a:ext cx="3611880" cy="1527048"/>
           </a:xfrm>
           <a:prstGeom prst="roundRect">
             <a:avLst>
-              <a:gd name="adj" fmla="val 6857"/>
+              <a:gd name="adj" fmla="val 7186"/>
             </a:avLst>
           </a:prstGeom>
           <a:solidFill>
@@ -12561,8 +8441,8 @@
         </p:nvSpPr>
         <p:spPr>
           <a:xfrm>
-            <a:off x="8211312" y="3922776"/>
-            <a:ext cx="2734056" cy="228600"/>
+            <a:off x="7708392" y="2852928"/>
+            <a:ext cx="3282696" cy="228600"/>
           </a:xfrm>
           <a:prstGeom prst="rect">
             <a:avLst/>
@@ -12586,7 +8466,7 @@
                 <a:ea typeface="Aptos" pitchFamily="34" charset="-122"/>
                 <a:cs typeface="Aptos" pitchFamily="34" charset="-120"/>
               </a:rPr>
-              <a:t>Use the play links to</a:t>
+              <a:t>Concept checkpoints</a:t>
             </a:r>
             <a:endParaRPr lang="en-US" sz="1220" dirty="0"/>
           </a:p>
@@ -12600,8 +8480,8 @@
         </p:nvSpPr>
         <p:spPr>
           <a:xfrm>
-            <a:off x="8229600" y="4251960"/>
-            <a:ext cx="2679192" cy="1033272"/>
+            <a:off x="7726680" y="3182112"/>
+            <a:ext cx="3227832" cy="960120"/>
           </a:xfrm>
           <a:prstGeom prst="rect">
             <a:avLst/>
@@ -12627,7 +8507,7 @@
                 <a:ea typeface="Aptos" pitchFamily="34" charset="-122"/>
                 <a:cs typeface="Aptos" pitchFamily="34" charset="-120"/>
               </a:rPr>
-              <a:t>Locate the decision point in the playbook sequence.</a:t>
+              <a:t>Design safeguards for AI-supported inspection,.</a:t>
             </a:r>
             <a:endParaRPr lang="en-US" sz="1140" dirty="0"/>
           </a:p>
@@ -12644,16 +8524,106 @@
                 <a:ea typeface="Aptos" pitchFamily="34" charset="-122"/>
                 <a:cs typeface="Aptos" pitchFamily="34" charset="-120"/>
               </a:rPr>
-              <a:t>Identify who should participate in the work.</a:t>
+              <a:t>Create a monitoring plan for field AI impacts,.</a:t>
             </a:r>
             <a:endParaRPr lang="en-US" sz="1140" dirty="0"/>
           </a:p>
-          <a:p>
-            <a:pPr indent="0" marL="0">
-              <a:buNone/>
-            </a:pPr>
-            <a:r>
-              <a:rPr lang="en-US" sz="1140" dirty="0">
+        </p:txBody>
+      </p:sp>
+      <p:sp>
+        <p:nvSpPr>
+          <p:cNvPr id="16" name="Shape 14"/>
+          <p:cNvSpPr/>
+          <p:nvPr/>
+        </p:nvSpPr>
+        <p:spPr>
+          <a:xfrm>
+            <a:off x="7543800" y="4389120"/>
+            <a:ext cx="3611880" cy="1261872"/>
+          </a:xfrm>
+          <a:prstGeom prst="roundRect">
+            <a:avLst>
+              <a:gd name="adj" fmla="val 8696"/>
+            </a:avLst>
+          </a:prstGeom>
+          <a:solidFill>
+            <a:srgbClr val="EAF6F8"/>
+          </a:solidFill>
+          <a:ln w="12700">
+            <a:solidFill>
+              <a:srgbClr val="B9D7E6"/>
+            </a:solidFill>
+            <a:prstDash val="solid"/>
+          </a:ln>
+        </p:spPr>
+      </p:sp>
+      <p:sp>
+        <p:nvSpPr>
+          <p:cNvPr id="17" name="Text 15"/>
+          <p:cNvSpPr/>
+          <p:nvPr/>
+        </p:nvSpPr>
+        <p:spPr>
+          <a:xfrm>
+            <a:off x="7708392" y="4517136"/>
+            <a:ext cx="3282696" cy="228600"/>
+          </a:xfrm>
+          <a:prstGeom prst="rect">
+            <a:avLst/>
+          </a:prstGeom>
+          <a:noFill/>
+          <a:ln/>
+        </p:spPr>
+        <p:txBody>
+          <a:bodyPr wrap="square" lIns="0" tIns="0" rIns="0" bIns="0" rtlCol="0" anchor="ctr"/>
+          <a:lstStyle/>
+          <a:p>
+            <a:pPr indent="0" marL="0">
+              <a:buNone/>
+            </a:pPr>
+            <a:r>
+              <a:rPr lang="en-US" sz="1220" b="1" dirty="0">
+                <a:solidFill>
+                  <a:srgbClr val="0068B7"/>
+                </a:solidFill>
+                <a:latin typeface="Aptos" pitchFamily="34" charset="0"/>
+                <a:ea typeface="Aptos" pitchFamily="34" charset="-122"/>
+                <a:cs typeface="Aptos" pitchFamily="34" charset="-120"/>
+              </a:rPr>
+              <a:t>Next action</a:t>
+            </a:r>
+            <a:endParaRPr lang="en-US" sz="1220" dirty="0"/>
+          </a:p>
+        </p:txBody>
+      </p:sp>
+      <p:sp>
+        <p:nvSpPr>
+          <p:cNvPr id="18" name="Text 16"/>
+          <p:cNvSpPr/>
+          <p:nvPr/>
+        </p:nvSpPr>
+        <p:spPr>
+          <a:xfrm>
+            <a:off x="7708392" y="4828032"/>
+            <a:ext cx="3282696" cy="749808"/>
+          </a:xfrm>
+          <a:prstGeom prst="rect">
+            <a:avLst/>
+          </a:prstGeom>
+          <a:noFill/>
+          <a:ln/>
+        </p:spPr>
+        <p:txBody>
+          <a:bodyPr wrap="square" lIns="254" tIns="254" rIns="254" bIns="254" rtlCol="0" anchor="t">
+            <a:normAutofit/>
+          </a:bodyPr>
+          <a:lstStyle/>
+          <a:p>
+            <a:pPr indent="0" marL="0">
+              <a:buNone/>
+            </a:pPr>
+            <a:r>
+              <a:rPr lang="en-US" sz="1220" dirty="0">
                 <a:solidFill>
                   <a:srgbClr val="17364A"/>
                 </a:solidFill>
@@ -12661,9 +8631,9 @@
                 <a:ea typeface="Aptos" pitchFamily="34" charset="-122"/>
                 <a:cs typeface="Aptos" pitchFamily="34" charset="-120"/>
               </a:rPr>
-              <a:t>Document the review, approval, or implementation.</a:t>
-            </a:r>
-            <a:endParaRPr lang="en-US" sz="1140" dirty="0"/>
+              <a:t>Use the assignment to test whether you can explain the concept, apply it to a.</a:t>
+            </a:r>
+            <a:endParaRPr lang="en-US" sz="1220" dirty="0"/>
           </a:p>
         </p:txBody>
       </p:sp>
@@ -12782,7 +8752,7 @@
                 <a:ea typeface="Aptos" pitchFamily="34" charset="-122"/>
                 <a:cs typeface="Aptos" pitchFamily="34" charset="-120"/>
               </a:rPr>
-              <a:t>Human Factors, Workflow Integration, and Usability Testing</a:t>
+              <a:t>AI for Environmental Health and Field Operations</a:t>
             </a:r>
             <a:endParaRPr lang="en-US" sz="900" dirty="0"/>
           </a:p>
@@ -12940,7 +8910,7 @@
                 <a:ea typeface="Aptos Display" pitchFamily="34" charset="-122"/>
                 <a:cs typeface="Aptos Display" pitchFamily="34" charset="-120"/>
               </a:rPr>
-              <a:t>Related toolkit resources</a:t>
+              <a:t>Module Overview</a:t>
             </a:r>
             <a:endParaRPr lang="en-US" sz="3400" dirty="0"/>
           </a:p>
@@ -12954,8 +8924,8 @@
         </p:nvSpPr>
         <p:spPr>
           <a:xfrm>
-            <a:off x="868680" y="1508760"/>
-            <a:ext cx="6812280" cy="3977640"/>
+            <a:off x="822960" y="1463040"/>
+            <a:ext cx="6565392" cy="4343400"/>
           </a:xfrm>
           <a:prstGeom prst="rect">
             <a:avLst/>
@@ -12973,7 +8943,7 @@
               <a:buNone/>
             </a:pPr>
             <a:r>
-              <a:rPr lang="en-US" sz="1850" dirty="0">
+              <a:rPr lang="en-US" sz="1920" dirty="0">
                 <a:solidFill>
                   <a:srgbClr val="003A63"/>
                 </a:solidFill>
@@ -12981,16 +8951,16 @@
                 <a:ea typeface="Aptos" pitchFamily="34" charset="-122"/>
                 <a:cs typeface="Aptos" pitchFamily="34" charset="-120"/>
               </a:rPr>
-              <a:t>• Tool 4: AI Policy Landscape Scan (Worksheet) - Use AI Policy Landscape Scan.</a:t>
-            </a:r>
-            <a:endParaRPr lang="en-US" sz="1850" dirty="0"/>
-          </a:p>
-          <a:p>
-            <a:pPr indent="0" marL="0">
-              <a:buNone/>
-            </a:pPr>
-            <a:r>
-              <a:rPr lang="en-US" sz="1850" dirty="0">
+              <a:t>• This module introduces responsible AI use in environmental health and field.</a:t>
+            </a:r>
+            <a:endParaRPr lang="en-US" sz="1920" dirty="0"/>
+          </a:p>
+          <a:p>
+            <a:pPr indent="0" marL="0">
+              <a:buNone/>
+            </a:pPr>
+            <a:r>
+              <a:rPr lang="en-US" sz="1920" dirty="0">
                 <a:solidFill>
                   <a:srgbClr val="003A63"/>
                 </a:solidFill>
@@ -12998,16 +8968,16 @@
                 <a:ea typeface="Aptos" pitchFamily="34" charset="-122"/>
                 <a:cs typeface="Aptos" pitchFamily="34" charset="-120"/>
               </a:rPr>
-              <a:t>• Tool 5: AI Environmental and Resource Impact Review (Checklist) - Use this.</a:t>
-            </a:r>
-            <a:endParaRPr lang="en-US" sz="1850" dirty="0"/>
-          </a:p>
-          <a:p>
-            <a:pPr indent="0" marL="0">
-              <a:buNone/>
-            </a:pPr>
-            <a:r>
-              <a:rPr lang="en-US" sz="1850" dirty="0">
+              <a:t>• Public health field work may include inspections, complaint investigation,.</a:t>
+            </a:r>
+            <a:endParaRPr lang="en-US" sz="1920" dirty="0"/>
+          </a:p>
+          <a:p>
+            <a:pPr indent="0" marL="0">
+              <a:buNone/>
+            </a:pPr>
+            <a:r>
+              <a:rPr lang="en-US" sz="1920" dirty="0">
                 <a:solidFill>
                   <a:srgbClr val="003A63"/>
                 </a:solidFill>
@@ -13015,26 +8985,9 @@
                 <a:ea typeface="Aptos" pitchFamily="34" charset="-122"/>
                 <a:cs typeface="Aptos" pitchFamily="34" charset="-120"/>
               </a:rPr>
-              <a:t>• Tool 6: Human-Centered AI Decision Rule Checklist (Checklist) - Use.</a:t>
-            </a:r>
-            <a:endParaRPr lang="en-US" sz="1850" dirty="0"/>
-          </a:p>
-          <a:p>
-            <a:pPr indent="0" marL="0">
-              <a:buNone/>
-            </a:pPr>
-            <a:r>
-              <a:rPr lang="en-US" sz="1850" dirty="0">
-                <a:solidFill>
-                  <a:srgbClr val="003A63"/>
-                </a:solidFill>
-                <a:latin typeface="Aptos" pitchFamily="34" charset="0"/>
-                <a:ea typeface="Aptos" pitchFamily="34" charset="-122"/>
-                <a:cs typeface="Aptos" pitchFamily="34" charset="-120"/>
-              </a:rPr>
-              <a:t>• Tool 8: AI Project Charter (Planning) - Use AI Project Charter to translate.</a:t>
-            </a:r>
-            <a:endParaRPr lang="en-US" sz="1850" dirty="0"/>
+              <a:t>• AI can support triage, routing, summarization, mapping, scheduling, report.</a:t>
+            </a:r>
+            <a:endParaRPr lang="en-US" sz="1920" dirty="0"/>
           </a:p>
         </p:txBody>
       </p:sp>
@@ -13046,12 +8999,478 @@
         </p:nvSpPr>
         <p:spPr>
           <a:xfrm>
-            <a:off x="8046720" y="1417320"/>
-            <a:ext cx="3063240" cy="2103120"/>
+            <a:off x="7543800" y="1325880"/>
+            <a:ext cx="3611880" cy="1261872"/>
           </a:xfrm>
           <a:prstGeom prst="roundRect">
             <a:avLst>
-              <a:gd name="adj" fmla="val 5217"/>
+              <a:gd name="adj" fmla="val 8696"/>
+            </a:avLst>
+          </a:prstGeom>
+          <a:solidFill>
+            <a:srgbClr val="EEF8ED"/>
+          </a:solidFill>
+          <a:ln w="12700">
+            <a:solidFill>
+              <a:srgbClr val="B9D7E6"/>
+            </a:solidFill>
+            <a:prstDash val="solid"/>
+          </a:ln>
+        </p:spPr>
+      </p:sp>
+      <p:sp>
+        <p:nvSpPr>
+          <p:cNvPr id="11" name="Text 9"/>
+          <p:cNvSpPr/>
+          <p:nvPr/>
+        </p:nvSpPr>
+        <p:spPr>
+          <a:xfrm>
+            <a:off x="7708392" y="1453896"/>
+            <a:ext cx="3282696" cy="228600"/>
+          </a:xfrm>
+          <a:prstGeom prst="rect">
+            <a:avLst/>
+          </a:prstGeom>
+          <a:noFill/>
+          <a:ln/>
+        </p:spPr>
+        <p:txBody>
+          <a:bodyPr wrap="square" lIns="0" tIns="0" rIns="0" bIns="0" rtlCol="0" anchor="ctr"/>
+          <a:lstStyle/>
+          <a:p>
+            <a:pPr indent="0" marL="0">
+              <a:buNone/>
+            </a:pPr>
+            <a:r>
+              <a:rPr lang="en-US" sz="1220" b="1" dirty="0">
+                <a:solidFill>
+                  <a:srgbClr val="0068B7"/>
+                </a:solidFill>
+                <a:latin typeface="Aptos" pitchFamily="34" charset="0"/>
+                <a:ea typeface="Aptos" pitchFamily="34" charset="-122"/>
+                <a:cs typeface="Aptos" pitchFamily="34" charset="-120"/>
+              </a:rPr>
+              <a:t>Implementation cue</a:t>
+            </a:r>
+            <a:endParaRPr lang="en-US" sz="1220" dirty="0"/>
+          </a:p>
+        </p:txBody>
+      </p:sp>
+      <p:sp>
+        <p:nvSpPr>
+          <p:cNvPr id="12" name="Text 10"/>
+          <p:cNvSpPr/>
+          <p:nvPr/>
+        </p:nvSpPr>
+        <p:spPr>
+          <a:xfrm>
+            <a:off x="7708392" y="1764792"/>
+            <a:ext cx="3282696" cy="749808"/>
+          </a:xfrm>
+          <a:prstGeom prst="rect">
+            <a:avLst/>
+          </a:prstGeom>
+          <a:noFill/>
+          <a:ln/>
+        </p:spPr>
+        <p:txBody>
+          <a:bodyPr wrap="square" lIns="254" tIns="254" rIns="254" bIns="254" rtlCol="0" anchor="t">
+            <a:normAutofit/>
+          </a:bodyPr>
+          <a:lstStyle/>
+          <a:p>
+            <a:pPr indent="0" marL="0">
+              <a:buNone/>
+            </a:pPr>
+            <a:r>
+              <a:rPr lang="en-US" sz="1220" dirty="0">
+                <a:solidFill>
+                  <a:srgbClr val="17364A"/>
+                </a:solidFill>
+                <a:latin typeface="Aptos" pitchFamily="34" charset="0"/>
+                <a:ea typeface="Aptos" pitchFamily="34" charset="-122"/>
+                <a:cs typeface="Aptos" pitchFamily="34" charset="-120"/>
+              </a:rPr>
+              <a:t>This module introduces responsible AI use in environmental health and field.</a:t>
+            </a:r>
+            <a:endParaRPr lang="en-US" sz="1220" dirty="0"/>
+          </a:p>
+        </p:txBody>
+      </p:sp>
+      <p:sp>
+        <p:nvSpPr>
+          <p:cNvPr id="13" name="Shape 11"/>
+          <p:cNvSpPr/>
+          <p:nvPr/>
+        </p:nvSpPr>
+        <p:spPr>
+          <a:xfrm>
+            <a:off x="7543800" y="2724912"/>
+            <a:ext cx="3611880" cy="1527048"/>
+          </a:xfrm>
+          <a:prstGeom prst="roundRect">
+            <a:avLst>
+              <a:gd name="adj" fmla="val 7186"/>
+            </a:avLst>
+          </a:prstGeom>
+          <a:solidFill>
+            <a:srgbClr val="FFFFFF"/>
+          </a:solidFill>
+          <a:ln w="12700">
+            <a:solidFill>
+              <a:srgbClr val="B9D7E6"/>
+            </a:solidFill>
+            <a:prstDash val="solid"/>
+          </a:ln>
+        </p:spPr>
+      </p:sp>
+      <p:sp>
+        <p:nvSpPr>
+          <p:cNvPr id="14" name="Text 12"/>
+          <p:cNvSpPr/>
+          <p:nvPr/>
+        </p:nvSpPr>
+        <p:spPr>
+          <a:xfrm>
+            <a:off x="7708392" y="2852928"/>
+            <a:ext cx="3282696" cy="219456"/>
+          </a:xfrm>
+          <a:prstGeom prst="rect">
+            <a:avLst/>
+          </a:prstGeom>
+          <a:noFill/>
+          <a:ln/>
+        </p:spPr>
+        <p:txBody>
+          <a:bodyPr wrap="square" lIns="0" tIns="0" rIns="0" bIns="0" rtlCol="0" anchor="ctr">
+            <a:normAutofit/>
+          </a:bodyPr>
+          <a:lstStyle/>
+          <a:p>
+            <a:pPr indent="0" marL="0">
+              <a:buNone/>
+            </a:pPr>
+            <a:r>
+              <a:rPr lang="en-US" sz="1160" b="1" dirty="0">
+                <a:solidFill>
+                  <a:srgbClr val="0068B7"/>
+                </a:solidFill>
+                <a:latin typeface="Aptos" pitchFamily="34" charset="0"/>
+                <a:ea typeface="Aptos" pitchFamily="34" charset="-122"/>
+                <a:cs typeface="Aptos" pitchFamily="34" charset="-120"/>
+              </a:rPr>
+              <a:t>Implementation path</a:t>
+            </a:r>
+            <a:endParaRPr lang="en-US" sz="1160" dirty="0"/>
+          </a:p>
+        </p:txBody>
+      </p:sp>
+      <p:sp>
+        <p:nvSpPr>
+          <p:cNvPr id="15" name="Shape 13"/>
+          <p:cNvSpPr/>
+          <p:nvPr/>
+        </p:nvSpPr>
+        <p:spPr>
+          <a:xfrm>
+            <a:off x="8717280" y="3406140"/>
+            <a:ext cx="164592" cy="0"/>
+          </a:xfrm>
+          <a:prstGeom prst="line">
+            <a:avLst/>
+          </a:prstGeom>
+          <a:noFill/>
+          <a:ln w="15240">
+            <a:solidFill>
+              <a:srgbClr val="8ABBD8"/>
+            </a:solidFill>
+            <a:prstDash val="solid"/>
+          </a:ln>
+        </p:spPr>
+      </p:sp>
+      <p:sp>
+        <p:nvSpPr>
+          <p:cNvPr id="16" name="Shape 14"/>
+          <p:cNvSpPr/>
+          <p:nvPr/>
+        </p:nvSpPr>
+        <p:spPr>
+          <a:xfrm>
+            <a:off x="7781544" y="3255264"/>
+            <a:ext cx="935736" cy="301752"/>
+          </a:xfrm>
+          <a:prstGeom prst="roundRect">
+            <a:avLst>
+              <a:gd name="adj" fmla="val 24242"/>
+            </a:avLst>
+          </a:prstGeom>
+          <a:solidFill>
+            <a:srgbClr val="0068B7"/>
+          </a:solidFill>
+          <a:ln w="12700">
+            <a:solidFill>
+              <a:srgbClr val="0068B7"/>
+            </a:solidFill>
+            <a:prstDash val="solid"/>
+          </a:ln>
+        </p:spPr>
+      </p:sp>
+      <p:sp>
+        <p:nvSpPr>
+          <p:cNvPr id="17" name="Text 15"/>
+          <p:cNvSpPr/>
+          <p:nvPr/>
+        </p:nvSpPr>
+        <p:spPr>
+          <a:xfrm>
+            <a:off x="7818120" y="3328416"/>
+            <a:ext cx="862584" cy="146304"/>
+          </a:xfrm>
+          <a:prstGeom prst="rect">
+            <a:avLst/>
+          </a:prstGeom>
+          <a:noFill/>
+          <a:ln/>
+        </p:spPr>
+        <p:txBody>
+          <a:bodyPr wrap="square" lIns="0" tIns="0" rIns="0" bIns="0" rtlCol="0" anchor="ctr">
+            <a:normAutofit/>
+          </a:bodyPr>
+          <a:lstStyle/>
+          <a:p>
+            <a:pPr algn="ctr" indent="0" marL="0">
+              <a:buNone/>
+            </a:pPr>
+            <a:r>
+              <a:rPr lang="en-US" sz="880" b="1" dirty="0">
+                <a:solidFill>
+                  <a:srgbClr val="FFFFFF"/>
+                </a:solidFill>
+                <a:latin typeface="Aptos" pitchFamily="34" charset="0"/>
+                <a:ea typeface="Aptos" pitchFamily="34" charset="-122"/>
+                <a:cs typeface="Aptos" pitchFamily="34" charset="-120"/>
+              </a:rPr>
+              <a:t>Need</a:t>
+            </a:r>
+            <a:endParaRPr lang="en-US" sz="880" dirty="0"/>
+          </a:p>
+        </p:txBody>
+      </p:sp>
+      <p:sp>
+        <p:nvSpPr>
+          <p:cNvPr id="18" name="Shape 16"/>
+          <p:cNvSpPr/>
+          <p:nvPr/>
+        </p:nvSpPr>
+        <p:spPr>
+          <a:xfrm>
+            <a:off x="9817608" y="3406140"/>
+            <a:ext cx="164592" cy="0"/>
+          </a:xfrm>
+          <a:prstGeom prst="line">
+            <a:avLst/>
+          </a:prstGeom>
+          <a:noFill/>
+          <a:ln w="15240">
+            <a:solidFill>
+              <a:srgbClr val="8ABBD8"/>
+            </a:solidFill>
+            <a:prstDash val="solid"/>
+          </a:ln>
+        </p:spPr>
+      </p:sp>
+      <p:sp>
+        <p:nvSpPr>
+          <p:cNvPr id="19" name="Shape 17"/>
+          <p:cNvSpPr/>
+          <p:nvPr/>
+        </p:nvSpPr>
+        <p:spPr>
+          <a:xfrm>
+            <a:off x="8881872" y="3255264"/>
+            <a:ext cx="935736" cy="301752"/>
+          </a:xfrm>
+          <a:prstGeom prst="roundRect">
+            <a:avLst>
+              <a:gd name="adj" fmla="val 24242"/>
+            </a:avLst>
+          </a:prstGeom>
+          <a:solidFill>
+            <a:srgbClr val="2F8A28"/>
+          </a:solidFill>
+          <a:ln w="12700">
+            <a:solidFill>
+              <a:srgbClr val="2F8A28"/>
+            </a:solidFill>
+            <a:prstDash val="solid"/>
+          </a:ln>
+        </p:spPr>
+      </p:sp>
+      <p:sp>
+        <p:nvSpPr>
+          <p:cNvPr id="20" name="Text 18"/>
+          <p:cNvSpPr/>
+          <p:nvPr/>
+        </p:nvSpPr>
+        <p:spPr>
+          <a:xfrm>
+            <a:off x="8918448" y="3328416"/>
+            <a:ext cx="862584" cy="146304"/>
+          </a:xfrm>
+          <a:prstGeom prst="rect">
+            <a:avLst/>
+          </a:prstGeom>
+          <a:noFill/>
+          <a:ln/>
+        </p:spPr>
+        <p:txBody>
+          <a:bodyPr wrap="square" lIns="0" tIns="0" rIns="0" bIns="0" rtlCol="0" anchor="ctr">
+            <a:normAutofit/>
+          </a:bodyPr>
+          <a:lstStyle/>
+          <a:p>
+            <a:pPr algn="ctr" indent="0" marL="0">
+              <a:buNone/>
+            </a:pPr>
+            <a:r>
+              <a:rPr lang="en-US" sz="880" b="1" dirty="0">
+                <a:solidFill>
+                  <a:srgbClr val="FFFFFF"/>
+                </a:solidFill>
+                <a:latin typeface="Aptos" pitchFamily="34" charset="0"/>
+                <a:ea typeface="Aptos" pitchFamily="34" charset="-122"/>
+                <a:cs typeface="Aptos" pitchFamily="34" charset="-120"/>
+              </a:rPr>
+              <a:t>Build</a:t>
+            </a:r>
+            <a:endParaRPr lang="en-US" sz="880" dirty="0"/>
+          </a:p>
+        </p:txBody>
+      </p:sp>
+      <p:sp>
+        <p:nvSpPr>
+          <p:cNvPr id="21" name="Shape 19"/>
+          <p:cNvSpPr/>
+          <p:nvPr/>
+        </p:nvSpPr>
+        <p:spPr>
+          <a:xfrm>
+            <a:off x="9982200" y="3255264"/>
+            <a:ext cx="935736" cy="301752"/>
+          </a:xfrm>
+          <a:prstGeom prst="roundRect">
+            <a:avLst>
+              <a:gd name="adj" fmla="val 24242"/>
+            </a:avLst>
+          </a:prstGeom>
+          <a:solidFill>
+            <a:srgbClr val="6A4CA3"/>
+          </a:solidFill>
+          <a:ln w="12700">
+            <a:solidFill>
+              <a:srgbClr val="6A4CA3"/>
+            </a:solidFill>
+            <a:prstDash val="solid"/>
+          </a:ln>
+        </p:spPr>
+      </p:sp>
+      <p:sp>
+        <p:nvSpPr>
+          <p:cNvPr id="22" name="Text 20"/>
+          <p:cNvSpPr/>
+          <p:nvPr/>
+        </p:nvSpPr>
+        <p:spPr>
+          <a:xfrm>
+            <a:off x="10018776" y="3328416"/>
+            <a:ext cx="862584" cy="146304"/>
+          </a:xfrm>
+          <a:prstGeom prst="rect">
+            <a:avLst/>
+          </a:prstGeom>
+          <a:noFill/>
+          <a:ln/>
+        </p:spPr>
+        <p:txBody>
+          <a:bodyPr wrap="square" lIns="0" tIns="0" rIns="0" bIns="0" rtlCol="0" anchor="ctr">
+            <a:normAutofit/>
+          </a:bodyPr>
+          <a:lstStyle/>
+          <a:p>
+            <a:pPr algn="ctr" indent="0" marL="0">
+              <a:buNone/>
+            </a:pPr>
+            <a:r>
+              <a:rPr lang="en-US" sz="880" b="1" dirty="0">
+                <a:solidFill>
+                  <a:srgbClr val="FFFFFF"/>
+                </a:solidFill>
+                <a:latin typeface="Aptos" pitchFamily="34" charset="0"/>
+                <a:ea typeface="Aptos" pitchFamily="34" charset="-122"/>
+                <a:cs typeface="Aptos" pitchFamily="34" charset="-120"/>
+              </a:rPr>
+              <a:t>Adopt</a:t>
+            </a:r>
+            <a:endParaRPr lang="en-US" sz="880" dirty="0"/>
+          </a:p>
+        </p:txBody>
+      </p:sp>
+      <p:sp>
+        <p:nvSpPr>
+          <p:cNvPr id="23" name="Text 21"/>
+          <p:cNvSpPr/>
+          <p:nvPr/>
+        </p:nvSpPr>
+        <p:spPr>
+          <a:xfrm>
+            <a:off x="7763256" y="3749040"/>
+            <a:ext cx="3172968" cy="356616"/>
+          </a:xfrm>
+          <a:prstGeom prst="rect">
+            <a:avLst/>
+          </a:prstGeom>
+          <a:noFill/>
+          <a:ln/>
+        </p:spPr>
+        <p:txBody>
+          <a:bodyPr wrap="square" lIns="254" tIns="254" rIns="254" bIns="254" rtlCol="0" anchor="t">
+            <a:normAutofit/>
+          </a:bodyPr>
+          <a:lstStyle/>
+          <a:p>
+            <a:pPr indent="0" marL="0">
+              <a:buNone/>
+            </a:pPr>
+            <a:r>
+              <a:rPr lang="en-US" sz="1040" dirty="0">
+                <a:solidFill>
+                  <a:srgbClr val="17364A"/>
+                </a:solidFill>
+                <a:latin typeface="Aptos" pitchFamily="34" charset="0"/>
+                <a:ea typeface="Aptos" pitchFamily="34" charset="-122"/>
+                <a:cs typeface="Aptos" pitchFamily="34" charset="-120"/>
+              </a:rPr>
+              <a:t>Implementation work should make dependencies, approvals, training, and.</a:t>
+            </a:r>
+            <a:endParaRPr lang="en-US" sz="1040" dirty="0"/>
+          </a:p>
+        </p:txBody>
+      </p:sp>
+      <p:sp>
+        <p:nvSpPr>
+          <p:cNvPr id="24" name="Shape 22"/>
+          <p:cNvSpPr/>
+          <p:nvPr/>
+        </p:nvSpPr>
+        <p:spPr>
+          <a:xfrm>
+            <a:off x="7543800" y="4389120"/>
+            <a:ext cx="3611880" cy="1261872"/>
+          </a:xfrm>
+          <a:prstGeom prst="roundRect">
+            <a:avLst>
+              <a:gd name="adj" fmla="val 8696"/>
             </a:avLst>
           </a:prstGeom>
           <a:solidFill>
@@ -13067,14 +9486,14 @@
       </p:sp>
       <p:sp>
         <p:nvSpPr>
-          <p:cNvPr id="11" name="Text 9"/>
-          <p:cNvSpPr/>
-          <p:nvPr/>
-        </p:nvSpPr>
-        <p:spPr>
-          <a:xfrm>
-            <a:off x="8211312" y="1545336"/>
-            <a:ext cx="2734056" cy="228600"/>
+          <p:cNvPr id="25" name="Text 23"/>
+          <p:cNvSpPr/>
+          <p:nvPr/>
+        </p:nvSpPr>
+        <p:spPr>
+          <a:xfrm>
+            <a:off x="7708392" y="4517136"/>
+            <a:ext cx="3282696" cy="228600"/>
           </a:xfrm>
           <a:prstGeom prst="rect">
             <a:avLst/>
@@ -13098,7 +9517,7 @@
                 <a:ea typeface="Aptos" pitchFamily="34" charset="-122"/>
                 <a:cs typeface="Aptos" pitchFamily="34" charset="-120"/>
               </a:rPr>
-              <a:t>Use the tools</a:t>
+              <a:t>Next action</a:t>
             </a:r>
             <a:endParaRPr lang="en-US" sz="1220" dirty="0"/>
           </a:p>
@@ -13106,14 +9525,14 @@
       </p:sp>
       <p:sp>
         <p:nvSpPr>
-          <p:cNvPr id="12" name="Text 10"/>
-          <p:cNvSpPr/>
-          <p:nvPr/>
-        </p:nvSpPr>
-        <p:spPr>
-          <a:xfrm>
-            <a:off x="8211312" y="1856232"/>
-            <a:ext cx="2734056" cy="1591056"/>
+          <p:cNvPr id="26" name="Text 24"/>
+          <p:cNvSpPr/>
+          <p:nvPr/>
+        </p:nvSpPr>
+        <p:spPr>
+          <a:xfrm>
+            <a:off x="7708392" y="4828032"/>
+            <a:ext cx="3282696" cy="749808"/>
           </a:xfrm>
           <a:prstGeom prst="rect">
             <a:avLst/>
@@ -13139,150 +9558,9 @@
                 <a:ea typeface="Aptos" pitchFamily="34" charset="-122"/>
                 <a:cs typeface="Aptos" pitchFamily="34" charset="-120"/>
               </a:rPr>
-              <a:t>Use linked tools when your department needs a structured worksheet, template,.</a:t>
+              <a:t>Use the concept to clarify workflow changes, dependencies, staffing, procurement.</a:t>
             </a:r>
             <a:endParaRPr lang="en-US" sz="1220" dirty="0"/>
-          </a:p>
-        </p:txBody>
-      </p:sp>
-      <p:sp>
-        <p:nvSpPr>
-          <p:cNvPr id="13" name="Shape 11"/>
-          <p:cNvSpPr/>
-          <p:nvPr/>
-        </p:nvSpPr>
-        <p:spPr>
-          <a:xfrm>
-            <a:off x="8046720" y="3794760"/>
-            <a:ext cx="3063240" cy="1600200"/>
-          </a:xfrm>
-          <a:prstGeom prst="roundRect">
-            <a:avLst>
-              <a:gd name="adj" fmla="val 6857"/>
-            </a:avLst>
-          </a:prstGeom>
-          <a:solidFill>
-            <a:srgbClr val="FFFFFF"/>
-          </a:solidFill>
-          <a:ln w="12700">
-            <a:solidFill>
-              <a:srgbClr val="B9D7E6"/>
-            </a:solidFill>
-            <a:prstDash val="solid"/>
-          </a:ln>
-        </p:spPr>
-      </p:sp>
-      <p:sp>
-        <p:nvSpPr>
-          <p:cNvPr id="14" name="Text 12"/>
-          <p:cNvSpPr/>
-          <p:nvPr/>
-        </p:nvSpPr>
-        <p:spPr>
-          <a:xfrm>
-            <a:off x="8211312" y="3922776"/>
-            <a:ext cx="2734056" cy="228600"/>
-          </a:xfrm>
-          <a:prstGeom prst="rect">
-            <a:avLst/>
-          </a:prstGeom>
-          <a:noFill/>
-          <a:ln/>
-        </p:spPr>
-        <p:txBody>
-          <a:bodyPr wrap="square" lIns="0" tIns="0" rIns="0" bIns="0" rtlCol="0" anchor="ctr"/>
-          <a:lstStyle/>
-          <a:p>
-            <a:pPr indent="0" marL="0">
-              <a:buNone/>
-            </a:pPr>
-            <a:r>
-              <a:rPr lang="en-US" sz="1220" b="1" dirty="0">
-                <a:solidFill>
-                  <a:srgbClr val="0068B7"/>
-                </a:solidFill>
-                <a:latin typeface="Aptos" pitchFamily="34" charset="0"/>
-                <a:ea typeface="Aptos" pitchFamily="34" charset="-122"/>
-                <a:cs typeface="Aptos" pitchFamily="34" charset="-120"/>
-              </a:rPr>
-              <a:t>Tool selection cues</a:t>
-            </a:r>
-            <a:endParaRPr lang="en-US" sz="1220" dirty="0"/>
-          </a:p>
-        </p:txBody>
-      </p:sp>
-      <p:sp>
-        <p:nvSpPr>
-          <p:cNvPr id="15" name="Text 13"/>
-          <p:cNvSpPr/>
-          <p:nvPr/>
-        </p:nvSpPr>
-        <p:spPr>
-          <a:xfrm>
-            <a:off x="8229600" y="4251960"/>
-            <a:ext cx="2679192" cy="1033272"/>
-          </a:xfrm>
-          <a:prstGeom prst="rect">
-            <a:avLst/>
-          </a:prstGeom>
-          <a:noFill/>
-          <a:ln/>
-        </p:spPr>
-        <p:txBody>
-          <a:bodyPr wrap="square" lIns="508" tIns="508" rIns="508" bIns="508" rtlCol="0" anchor="t">
-            <a:normAutofit/>
-          </a:bodyPr>
-          <a:lstStyle/>
-          <a:p>
-            <a:pPr indent="0" marL="0">
-              <a:buNone/>
-            </a:pPr>
-            <a:r>
-              <a:rPr lang="en-US" sz="1140" dirty="0">
-                <a:solidFill>
-                  <a:srgbClr val="17364A"/>
-                </a:solidFill>
-                <a:latin typeface="Aptos" pitchFamily="34" charset="0"/>
-                <a:ea typeface="Aptos" pitchFamily="34" charset="-122"/>
-                <a:cs typeface="Aptos" pitchFamily="34" charset="-120"/>
-              </a:rPr>
-              <a:t>Use a tool when no comparable local process exists.</a:t>
-            </a:r>
-            <a:endParaRPr lang="en-US" sz="1140" dirty="0"/>
-          </a:p>
-          <a:p>
-            <a:pPr indent="0" marL="0">
-              <a:buNone/>
-            </a:pPr>
-            <a:r>
-              <a:rPr lang="en-US" sz="1140" dirty="0">
-                <a:solidFill>
-                  <a:srgbClr val="17364A"/>
-                </a:solidFill>
-                <a:latin typeface="Aptos" pitchFamily="34" charset="0"/>
-                <a:ea typeface="Aptos" pitchFamily="34" charset="-122"/>
-                <a:cs typeface="Aptos" pitchFamily="34" charset="-120"/>
-              </a:rPr>
-              <a:t>Adapt existing department templates when they.</a:t>
-            </a:r>
-            <a:endParaRPr lang="en-US" sz="1140" dirty="0"/>
-          </a:p>
-          <a:p>
-            <a:pPr indent="0" marL="0">
-              <a:buNone/>
-            </a:pPr>
-            <a:r>
-              <a:rPr lang="en-US" sz="1140" dirty="0">
-                <a:solidFill>
-                  <a:srgbClr val="17364A"/>
-                </a:solidFill>
-                <a:latin typeface="Aptos" pitchFamily="34" charset="0"/>
-                <a:ea typeface="Aptos" pitchFamily="34" charset="-122"/>
-                <a:cs typeface="Aptos" pitchFamily="34" charset="-120"/>
-              </a:rPr>
-              <a:t>Save the completed artifact as evidence of the.</a:t>
-            </a:r>
-            <a:endParaRPr lang="en-US" sz="1140" dirty="0"/>
           </a:p>
         </p:txBody>
       </p:sp>
@@ -13401,7 +9679,7 @@
                 <a:ea typeface="Aptos" pitchFamily="34" charset="-122"/>
                 <a:cs typeface="Aptos" pitchFamily="34" charset="-120"/>
               </a:rPr>
-              <a:t>Human Factors, Workflow Integration, and Usability Testing</a:t>
+              <a:t>AI for Environmental Health and Field Operations</a:t>
             </a:r>
             <a:endParaRPr lang="en-US" sz="900" dirty="0"/>
           </a:p>
@@ -13559,7 +9837,7 @@
                 <a:ea typeface="Aptos Display" pitchFamily="34" charset="-122"/>
                 <a:cs typeface="Aptos Display" pitchFamily="34" charset="-120"/>
               </a:rPr>
-              <a:t>Learning Objectives</a:t>
+              <a:t>Jurisdiction and Agency Policy Note</a:t>
             </a:r>
             <a:endParaRPr lang="en-US" sz="3400" dirty="0"/>
           </a:p>
@@ -13600,7 +9878,7 @@
                 <a:ea typeface="Aptos" pitchFamily="34" charset="-122"/>
                 <a:cs typeface="Aptos" pitchFamily="34" charset="-120"/>
               </a:rPr>
-              <a:t>• Explain the purpose of human factors, workflow integration, and usability.</a:t>
+              <a:t>• This national-level module is intended for training and planning purposes.</a:t>
             </a:r>
             <a:endParaRPr lang="en-US" sz="1920" dirty="0"/>
           </a:p>
@@ -13617,7 +9895,7 @@
                 <a:ea typeface="Aptos" pitchFamily="34" charset="-122"/>
                 <a:cs typeface="Aptos" pitchFamily="34" charset="-120"/>
               </a:rPr>
-              <a:t>• Identify the technical, operational, privacy, security, equity, and.</a:t>
+              <a:t>• It does not replace legal, privacy, procurement, civil rights, records,.</a:t>
             </a:r>
             <a:endParaRPr lang="en-US" sz="1920" dirty="0"/>
           </a:p>
@@ -13634,7 +9912,7 @@
                 <a:ea typeface="Aptos" pitchFamily="34" charset="-122"/>
                 <a:cs typeface="Aptos" pitchFamily="34" charset="-120"/>
               </a:rPr>
-              <a:t>• Apply the topic to a real or realistic public health workflow, system, or.</a:t>
+              <a:t>• Learners should confirm applicable requirements in their own jurisdiction.</a:t>
             </a:r>
             <a:endParaRPr lang="en-US" sz="1920" dirty="0"/>
           </a:p>
@@ -13700,7 +9978,7 @@
                 <a:ea typeface="Aptos" pitchFamily="34" charset="-122"/>
                 <a:cs typeface="Aptos" pitchFamily="34" charset="-120"/>
               </a:rPr>
-              <a:t>Implementation cue</a:t>
+              <a:t>Governance lens</a:t>
             </a:r>
             <a:endParaRPr lang="en-US" sz="1220" dirty="0"/>
           </a:p>
@@ -13741,7 +10019,7 @@
                 <a:ea typeface="Aptos" pitchFamily="34" charset="-122"/>
                 <a:cs typeface="Aptos" pitchFamily="34" charset="-120"/>
               </a:rPr>
-              <a:t>Explain the purpose of human factors, workflow integration, and usability.</a:t>
+              <a:t>This national-level module is intended for training and planning purposes.</a:t>
             </a:r>
             <a:endParaRPr lang="en-US" sz="1220" dirty="0"/>
           </a:p>
@@ -13783,55 +10061,16 @@
         <p:spPr>
           <a:xfrm>
             <a:off x="7708392" y="2852928"/>
-            <a:ext cx="3282696" cy="228600"/>
-          </a:xfrm>
-          <a:prstGeom prst="rect">
-            <a:avLst/>
-          </a:prstGeom>
-          <a:noFill/>
-          <a:ln/>
-        </p:spPr>
-        <p:txBody>
-          <a:bodyPr wrap="square" lIns="0" tIns="0" rIns="0" bIns="0" rtlCol="0" anchor="ctr"/>
-          <a:lstStyle/>
-          <a:p>
-            <a:pPr indent="0" marL="0">
-              <a:buNone/>
-            </a:pPr>
-            <a:r>
-              <a:rPr lang="en-US" sz="1220" b="1" dirty="0">
-                <a:solidFill>
-                  <a:srgbClr val="0068B7"/>
-                </a:solidFill>
-                <a:latin typeface="Aptos" pitchFamily="34" charset="0"/>
-                <a:ea typeface="Aptos" pitchFamily="34" charset="-122"/>
-                <a:cs typeface="Aptos" pitchFamily="34" charset="-120"/>
-              </a:rPr>
-              <a:t>Concept checkpoints</a:t>
-            </a:r>
-            <a:endParaRPr lang="en-US" sz="1220" dirty="0"/>
-          </a:p>
-        </p:txBody>
-      </p:sp>
-      <p:sp>
-        <p:nvSpPr>
-          <p:cNvPr id="15" name="Text 13"/>
-          <p:cNvSpPr/>
-          <p:nvPr/>
-        </p:nvSpPr>
-        <p:spPr>
-          <a:xfrm>
-            <a:off x="7726680" y="3182112"/>
-            <a:ext cx="3227832" cy="960120"/>
-          </a:xfrm>
-          <a:prstGeom prst="rect">
-            <a:avLst/>
-          </a:prstGeom>
-          <a:noFill/>
-          <a:ln/>
-        </p:spPr>
-        <p:txBody>
-          <a:bodyPr wrap="square" lIns="508" tIns="508" rIns="508" bIns="508" rtlCol="0" anchor="t">
+            <a:ext cx="3282696" cy="219456"/>
+          </a:xfrm>
+          <a:prstGeom prst="rect">
+            <a:avLst/>
+          </a:prstGeom>
+          <a:noFill/>
+          <a:ln/>
+        </p:spPr>
+        <p:txBody>
+          <a:bodyPr wrap="square" lIns="0" tIns="0" rIns="0" bIns="0" rtlCol="0" anchor="ctr">
             <a:normAutofit/>
           </a:bodyPr>
           <a:lstStyle/>
@@ -13840,7 +10079,298 @@
               <a:buNone/>
             </a:pPr>
             <a:r>
-              <a:rPr lang="en-US" sz="1140" dirty="0">
+              <a:rPr lang="en-US" sz="1160" b="1" dirty="0">
+                <a:solidFill>
+                  <a:srgbClr val="0068B7"/>
+                </a:solidFill>
+                <a:latin typeface="Aptos" pitchFamily="34" charset="0"/>
+                <a:ea typeface="Aptos" pitchFamily="34" charset="-122"/>
+                <a:cs typeface="Aptos" pitchFamily="34" charset="-120"/>
+              </a:rPr>
+              <a:t>Governance pathway</a:t>
+            </a:r>
+            <a:endParaRPr lang="en-US" sz="1160" dirty="0"/>
+          </a:p>
+        </p:txBody>
+      </p:sp>
+      <p:sp>
+        <p:nvSpPr>
+          <p:cNvPr id="15" name="Shape 13"/>
+          <p:cNvSpPr/>
+          <p:nvPr/>
+        </p:nvSpPr>
+        <p:spPr>
+          <a:xfrm>
+            <a:off x="8717280" y="3406140"/>
+            <a:ext cx="164592" cy="0"/>
+          </a:xfrm>
+          <a:prstGeom prst="line">
+            <a:avLst/>
+          </a:prstGeom>
+          <a:noFill/>
+          <a:ln w="15240">
+            <a:solidFill>
+              <a:srgbClr val="8ABBD8"/>
+            </a:solidFill>
+            <a:prstDash val="solid"/>
+          </a:ln>
+        </p:spPr>
+      </p:sp>
+      <p:sp>
+        <p:nvSpPr>
+          <p:cNvPr id="16" name="Shape 14"/>
+          <p:cNvSpPr/>
+          <p:nvPr/>
+        </p:nvSpPr>
+        <p:spPr>
+          <a:xfrm>
+            <a:off x="7781544" y="3255264"/>
+            <a:ext cx="935736" cy="301752"/>
+          </a:xfrm>
+          <a:prstGeom prst="roundRect">
+            <a:avLst>
+              <a:gd name="adj" fmla="val 24242"/>
+            </a:avLst>
+          </a:prstGeom>
+          <a:solidFill>
+            <a:srgbClr val="0068B7"/>
+          </a:solidFill>
+          <a:ln w="12700">
+            <a:solidFill>
+              <a:srgbClr val="0068B7"/>
+            </a:solidFill>
+            <a:prstDash val="solid"/>
+          </a:ln>
+        </p:spPr>
+      </p:sp>
+      <p:sp>
+        <p:nvSpPr>
+          <p:cNvPr id="17" name="Text 15"/>
+          <p:cNvSpPr/>
+          <p:nvPr/>
+        </p:nvSpPr>
+        <p:spPr>
+          <a:xfrm>
+            <a:off x="7818120" y="3328416"/>
+            <a:ext cx="862584" cy="146304"/>
+          </a:xfrm>
+          <a:prstGeom prst="rect">
+            <a:avLst/>
+          </a:prstGeom>
+          <a:noFill/>
+          <a:ln/>
+        </p:spPr>
+        <p:txBody>
+          <a:bodyPr wrap="square" lIns="0" tIns="0" rIns="0" bIns="0" rtlCol="0" anchor="ctr">
+            <a:normAutofit/>
+          </a:bodyPr>
+          <a:lstStyle/>
+          <a:p>
+            <a:pPr algn="ctr" indent="0" marL="0">
+              <a:buNone/>
+            </a:pPr>
+            <a:r>
+              <a:rPr lang="en-US" sz="880" b="1" dirty="0">
+                <a:solidFill>
+                  <a:srgbClr val="FFFFFF"/>
+                </a:solidFill>
+                <a:latin typeface="Aptos" pitchFamily="34" charset="0"/>
+                <a:ea typeface="Aptos" pitchFamily="34" charset="-122"/>
+                <a:cs typeface="Aptos" pitchFamily="34" charset="-120"/>
+              </a:rPr>
+              <a:t>Submit</a:t>
+            </a:r>
+            <a:endParaRPr lang="en-US" sz="880" dirty="0"/>
+          </a:p>
+        </p:txBody>
+      </p:sp>
+      <p:sp>
+        <p:nvSpPr>
+          <p:cNvPr id="18" name="Shape 16"/>
+          <p:cNvSpPr/>
+          <p:nvPr/>
+        </p:nvSpPr>
+        <p:spPr>
+          <a:xfrm>
+            <a:off x="9817608" y="3406140"/>
+            <a:ext cx="164592" cy="0"/>
+          </a:xfrm>
+          <a:prstGeom prst="line">
+            <a:avLst/>
+          </a:prstGeom>
+          <a:noFill/>
+          <a:ln w="15240">
+            <a:solidFill>
+              <a:srgbClr val="8ABBD8"/>
+            </a:solidFill>
+            <a:prstDash val="solid"/>
+          </a:ln>
+        </p:spPr>
+      </p:sp>
+      <p:sp>
+        <p:nvSpPr>
+          <p:cNvPr id="19" name="Shape 17"/>
+          <p:cNvSpPr/>
+          <p:nvPr/>
+        </p:nvSpPr>
+        <p:spPr>
+          <a:xfrm>
+            <a:off x="8881872" y="3255264"/>
+            <a:ext cx="935736" cy="301752"/>
+          </a:xfrm>
+          <a:prstGeom prst="roundRect">
+            <a:avLst>
+              <a:gd name="adj" fmla="val 24242"/>
+            </a:avLst>
+          </a:prstGeom>
+          <a:solidFill>
+            <a:srgbClr val="2F8A28"/>
+          </a:solidFill>
+          <a:ln w="12700">
+            <a:solidFill>
+              <a:srgbClr val="2F8A28"/>
+            </a:solidFill>
+            <a:prstDash val="solid"/>
+          </a:ln>
+        </p:spPr>
+      </p:sp>
+      <p:sp>
+        <p:nvSpPr>
+          <p:cNvPr id="20" name="Text 18"/>
+          <p:cNvSpPr/>
+          <p:nvPr/>
+        </p:nvSpPr>
+        <p:spPr>
+          <a:xfrm>
+            <a:off x="8918448" y="3328416"/>
+            <a:ext cx="862584" cy="146304"/>
+          </a:xfrm>
+          <a:prstGeom prst="rect">
+            <a:avLst/>
+          </a:prstGeom>
+          <a:noFill/>
+          <a:ln/>
+        </p:spPr>
+        <p:txBody>
+          <a:bodyPr wrap="square" lIns="0" tIns="0" rIns="0" bIns="0" rtlCol="0" anchor="ctr">
+            <a:normAutofit/>
+          </a:bodyPr>
+          <a:lstStyle/>
+          <a:p>
+            <a:pPr algn="ctr" indent="0" marL="0">
+              <a:buNone/>
+            </a:pPr>
+            <a:r>
+              <a:rPr lang="en-US" sz="880" b="1" dirty="0">
+                <a:solidFill>
+                  <a:srgbClr val="FFFFFF"/>
+                </a:solidFill>
+                <a:latin typeface="Aptos" pitchFamily="34" charset="0"/>
+                <a:ea typeface="Aptos" pitchFamily="34" charset="-122"/>
+                <a:cs typeface="Aptos" pitchFamily="34" charset="-120"/>
+              </a:rPr>
+              <a:t>Review</a:t>
+            </a:r>
+            <a:endParaRPr lang="en-US" sz="880" dirty="0"/>
+          </a:p>
+        </p:txBody>
+      </p:sp>
+      <p:sp>
+        <p:nvSpPr>
+          <p:cNvPr id="21" name="Shape 19"/>
+          <p:cNvSpPr/>
+          <p:nvPr/>
+        </p:nvSpPr>
+        <p:spPr>
+          <a:xfrm>
+            <a:off x="9982200" y="3255264"/>
+            <a:ext cx="935736" cy="301752"/>
+          </a:xfrm>
+          <a:prstGeom prst="roundRect">
+            <a:avLst>
+              <a:gd name="adj" fmla="val 24242"/>
+            </a:avLst>
+          </a:prstGeom>
+          <a:solidFill>
+            <a:srgbClr val="6A4CA3"/>
+          </a:solidFill>
+          <a:ln w="12700">
+            <a:solidFill>
+              <a:srgbClr val="6A4CA3"/>
+            </a:solidFill>
+            <a:prstDash val="solid"/>
+          </a:ln>
+        </p:spPr>
+      </p:sp>
+      <p:sp>
+        <p:nvSpPr>
+          <p:cNvPr id="22" name="Text 20"/>
+          <p:cNvSpPr/>
+          <p:nvPr/>
+        </p:nvSpPr>
+        <p:spPr>
+          <a:xfrm>
+            <a:off x="10018776" y="3328416"/>
+            <a:ext cx="862584" cy="146304"/>
+          </a:xfrm>
+          <a:prstGeom prst="rect">
+            <a:avLst/>
+          </a:prstGeom>
+          <a:noFill/>
+          <a:ln/>
+        </p:spPr>
+        <p:txBody>
+          <a:bodyPr wrap="square" lIns="0" tIns="0" rIns="0" bIns="0" rtlCol="0" anchor="ctr">
+            <a:normAutofit/>
+          </a:bodyPr>
+          <a:lstStyle/>
+          <a:p>
+            <a:pPr algn="ctr" indent="0" marL="0">
+              <a:buNone/>
+            </a:pPr>
+            <a:r>
+              <a:rPr lang="en-US" sz="880" b="1" dirty="0">
+                <a:solidFill>
+                  <a:srgbClr val="FFFFFF"/>
+                </a:solidFill>
+                <a:latin typeface="Aptos" pitchFamily="34" charset="0"/>
+                <a:ea typeface="Aptos" pitchFamily="34" charset="-122"/>
+                <a:cs typeface="Aptos" pitchFamily="34" charset="-120"/>
+              </a:rPr>
+              <a:t>Oversee</a:t>
+            </a:r>
+            <a:endParaRPr lang="en-US" sz="880" dirty="0"/>
+          </a:p>
+        </p:txBody>
+      </p:sp>
+      <p:sp>
+        <p:nvSpPr>
+          <p:cNvPr id="23" name="Text 21"/>
+          <p:cNvSpPr/>
+          <p:nvPr/>
+        </p:nvSpPr>
+        <p:spPr>
+          <a:xfrm>
+            <a:off x="7763256" y="3749040"/>
+            <a:ext cx="3172968" cy="356616"/>
+          </a:xfrm>
+          <a:prstGeom prst="rect">
+            <a:avLst/>
+          </a:prstGeom>
+          <a:noFill/>
+          <a:ln/>
+        </p:spPr>
+        <p:txBody>
+          <a:bodyPr wrap="square" lIns="254" tIns="254" rIns="254" bIns="254" rtlCol="0" anchor="t">
+            <a:normAutofit/>
+          </a:bodyPr>
+          <a:lstStyle/>
+          <a:p>
+            <a:pPr indent="0" marL="0">
+              <a:buNone/>
+            </a:pPr>
+            <a:r>
+              <a:rPr lang="en-US" sz="1040" dirty="0">
                 <a:solidFill>
                   <a:srgbClr val="17364A"/>
                 </a:solidFill>
@@ -13848,49 +10378,15 @@
                 <a:ea typeface="Aptos" pitchFamily="34" charset="-122"/>
                 <a:cs typeface="Aptos" pitchFamily="34" charset="-120"/>
               </a:rPr>
-              <a:t>Explain the purpose of human factors, workflow.</a:t>
-            </a:r>
-            <a:endParaRPr lang="en-US" sz="1140" dirty="0"/>
-          </a:p>
-          <a:p>
-            <a:pPr indent="0" marL="0">
-              <a:buNone/>
-            </a:pPr>
-            <a:r>
-              <a:rPr lang="en-US" sz="1140" dirty="0">
-                <a:solidFill>
-                  <a:srgbClr val="17364A"/>
-                </a:solidFill>
-                <a:latin typeface="Aptos" pitchFamily="34" charset="0"/>
-                <a:ea typeface="Aptos" pitchFamily="34" charset="-122"/>
-                <a:cs typeface="Aptos" pitchFamily="34" charset="-120"/>
-              </a:rPr>
-              <a:t>Identify the technical, operational, privacy,.</a:t>
-            </a:r>
-            <a:endParaRPr lang="en-US" sz="1140" dirty="0"/>
-          </a:p>
-          <a:p>
-            <a:pPr indent="0" marL="0">
-              <a:buNone/>
-            </a:pPr>
-            <a:r>
-              <a:rPr lang="en-US" sz="1140" dirty="0">
-                <a:solidFill>
-                  <a:srgbClr val="17364A"/>
-                </a:solidFill>
-                <a:latin typeface="Aptos" pitchFamily="34" charset="0"/>
-                <a:ea typeface="Aptos" pitchFamily="34" charset="-122"/>
-                <a:cs typeface="Aptos" pitchFamily="34" charset="-120"/>
-              </a:rPr>
-              <a:t>Recognize common failure modes that can affect.</a:t>
-            </a:r>
-            <a:endParaRPr lang="en-US" sz="1140" dirty="0"/>
-          </a:p>
-        </p:txBody>
-      </p:sp>
-      <p:sp>
-        <p:nvSpPr>
-          <p:cNvPr id="16" name="Shape 14"/>
+              <a:t>A proposed AI use should move through documented review before it.</a:t>
+            </a:r>
+            <a:endParaRPr lang="en-US" sz="1040" dirty="0"/>
+          </a:p>
+        </p:txBody>
+      </p:sp>
+      <p:sp>
+        <p:nvSpPr>
+          <p:cNvPr id="24" name="Shape 22"/>
           <p:cNvSpPr/>
           <p:nvPr/>
         </p:nvSpPr>
@@ -13917,7 +10413,7 @@
       </p:sp>
       <p:sp>
         <p:nvSpPr>
-          <p:cNvPr id="17" name="Text 15"/>
+          <p:cNvPr id="25" name="Text 23"/>
           <p:cNvSpPr/>
           <p:nvPr/>
         </p:nvSpPr>
@@ -13948,7 +10444,7 @@
                 <a:ea typeface="Aptos" pitchFamily="34" charset="-122"/>
                 <a:cs typeface="Aptos" pitchFamily="34" charset="-120"/>
               </a:rPr>
-              <a:t>Next action</a:t>
+              <a:t>What to document</a:t>
             </a:r>
             <a:endParaRPr lang="en-US" sz="1220" dirty="0"/>
           </a:p>
@@ -13956,7 +10452,7 @@
       </p:sp>
       <p:sp>
         <p:nvSpPr>
-          <p:cNvPr id="18" name="Text 16"/>
+          <p:cNvPr id="26" name="Text 24"/>
           <p:cNvSpPr/>
           <p:nvPr/>
         </p:nvSpPr>
@@ -13989,7 +10485,7 @@
                 <a:ea typeface="Aptos" pitchFamily="34" charset="-122"/>
                 <a:cs typeface="Aptos" pitchFamily="34" charset="-120"/>
               </a:rPr>
-              <a:t>Use the assignment to test whether you can explain the concept, apply it to a.</a:t>
+              <a:t>Translate this concept into clear decision rights, review steps, documentation.</a:t>
             </a:r>
             <a:endParaRPr lang="en-US" sz="1220" dirty="0"/>
           </a:p>
@@ -14110,7 +10606,7 @@
                 <a:ea typeface="Aptos" pitchFamily="34" charset="-122"/>
                 <a:cs typeface="Aptos" pitchFamily="34" charset="-120"/>
               </a:rPr>
-              <a:t>Human Factors, Workflow Integration, and Usability Testing</a:t>
+              <a:t>AI for Environmental Health and Field Operations</a:t>
             </a:r>
             <a:endParaRPr lang="en-US" sz="900" dirty="0"/>
           </a:p>
@@ -14268,7 +10764,7 @@
                 <a:ea typeface="Aptos Display" pitchFamily="34" charset="-122"/>
                 <a:cs typeface="Aptos Display" pitchFamily="34" charset="-120"/>
               </a:rPr>
-              <a:t>Learning Objectives Continued</a:t>
+              <a:t>Why This Topic Matters for Public Health AI</a:t>
             </a:r>
             <a:endParaRPr lang="en-US" sz="3400" dirty="0"/>
           </a:p>
@@ -14309,7 +10805,41 @@
                 <a:ea typeface="Aptos" pitchFamily="34" charset="-122"/>
                 <a:cs typeface="Aptos" pitchFamily="34" charset="-120"/>
               </a:rPr>
-              <a:t>• Produce a workflow usability test plan that can support readiness.</a:t>
+              <a:t>• Field operations are where AI recommendations can quickly become real-world.</a:t>
+            </a:r>
+            <a:endParaRPr lang="en-US" sz="1920" dirty="0"/>
+          </a:p>
+          <a:p>
+            <a:pPr indent="0" marL="0">
+              <a:buNone/>
+            </a:pPr>
+            <a:r>
+              <a:rPr lang="en-US" sz="1920" dirty="0">
+                <a:solidFill>
+                  <a:srgbClr val="003A63"/>
+                </a:solidFill>
+                <a:latin typeface="Aptos" pitchFamily="34" charset="0"/>
+                <a:ea typeface="Aptos" pitchFamily="34" charset="-122"/>
+                <a:cs typeface="Aptos" pitchFamily="34" charset="-120"/>
+              </a:rPr>
+              <a:t>• An AI-supported prioritization tool might influence which facility is.</a:t>
+            </a:r>
+            <a:endParaRPr lang="en-US" sz="1920" dirty="0"/>
+          </a:p>
+          <a:p>
+            <a:pPr indent="0" marL="0">
+              <a:buNone/>
+            </a:pPr>
+            <a:r>
+              <a:rPr lang="en-US" sz="1920" dirty="0">
+                <a:solidFill>
+                  <a:srgbClr val="003A63"/>
+                </a:solidFill>
+                <a:latin typeface="Aptos" pitchFamily="34" charset="0"/>
+                <a:ea typeface="Aptos" pitchFamily="34" charset="-122"/>
+                <a:cs typeface="Aptos" pitchFamily="34" charset="-120"/>
+              </a:rPr>
+              <a:t>• These decisions can affect businesses, residents, workers, communities, and.</a:t>
             </a:r>
             <a:endParaRPr lang="en-US" sz="1920" dirty="0"/>
           </a:p>
@@ -14416,7 +10946,7 @@
                 <a:ea typeface="Aptos" pitchFamily="34" charset="-122"/>
                 <a:cs typeface="Aptos" pitchFamily="34" charset="-120"/>
               </a:rPr>
-              <a:t>Produce a workflow usability test plan that can support readiness assessment,.</a:t>
+              <a:t>Field operations are where AI recommendations can quickly become real-world.</a:t>
             </a:r>
             <a:endParaRPr lang="en-US" sz="1220" dirty="0"/>
           </a:p>
@@ -14458,55 +10988,16 @@
         <p:spPr>
           <a:xfrm>
             <a:off x="7708392" y="2852928"/>
-            <a:ext cx="3282696" cy="228600"/>
-          </a:xfrm>
-          <a:prstGeom prst="rect">
-            <a:avLst/>
-          </a:prstGeom>
-          <a:noFill/>
-          <a:ln/>
-        </p:spPr>
-        <p:txBody>
-          <a:bodyPr wrap="square" lIns="0" tIns="0" rIns="0" bIns="0" rtlCol="0" anchor="ctr"/>
-          <a:lstStyle/>
-          <a:p>
-            <a:pPr indent="0" marL="0">
-              <a:buNone/>
-            </a:pPr>
-            <a:r>
-              <a:rPr lang="en-US" sz="1220" b="1" dirty="0">
-                <a:solidFill>
-                  <a:srgbClr val="0068B7"/>
-                </a:solidFill>
-                <a:latin typeface="Aptos" pitchFamily="34" charset="0"/>
-                <a:ea typeface="Aptos" pitchFamily="34" charset="-122"/>
-                <a:cs typeface="Aptos" pitchFamily="34" charset="-120"/>
-              </a:rPr>
-              <a:t>Concept checkpoints</a:t>
-            </a:r>
-            <a:endParaRPr lang="en-US" sz="1220" dirty="0"/>
-          </a:p>
-        </p:txBody>
-      </p:sp>
-      <p:sp>
-        <p:nvSpPr>
-          <p:cNvPr id="15" name="Text 13"/>
-          <p:cNvSpPr/>
-          <p:nvPr/>
-        </p:nvSpPr>
-        <p:spPr>
-          <a:xfrm>
-            <a:off x="7726680" y="3182112"/>
-            <a:ext cx="3227832" cy="960120"/>
-          </a:xfrm>
-          <a:prstGeom prst="rect">
-            <a:avLst/>
-          </a:prstGeom>
-          <a:noFill/>
-          <a:ln/>
-        </p:spPr>
-        <p:txBody>
-          <a:bodyPr wrap="square" lIns="508" tIns="508" rIns="508" bIns="508" rtlCol="0" anchor="t">
+            <a:ext cx="3282696" cy="219456"/>
+          </a:xfrm>
+          <a:prstGeom prst="rect">
+            <a:avLst/>
+          </a:prstGeom>
+          <a:noFill/>
+          <a:ln/>
+        </p:spPr>
+        <p:txBody>
+          <a:bodyPr wrap="square" lIns="0" tIns="0" rIns="0" bIns="0" rtlCol="0" anchor="ctr">
             <a:normAutofit/>
           </a:bodyPr>
           <a:lstStyle/>
@@ -14515,7 +11006,298 @@
               <a:buNone/>
             </a:pPr>
             <a:r>
-              <a:rPr lang="en-US" sz="1140" dirty="0">
+              <a:rPr lang="en-US" sz="1160" b="1" dirty="0">
+                <a:solidFill>
+                  <a:srgbClr val="0068B7"/>
+                </a:solidFill>
+                <a:latin typeface="Aptos" pitchFamily="34" charset="0"/>
+                <a:ea typeface="Aptos" pitchFamily="34" charset="-122"/>
+                <a:cs typeface="Aptos" pitchFamily="34" charset="-120"/>
+              </a:rPr>
+              <a:t>Implementation path</a:t>
+            </a:r>
+            <a:endParaRPr lang="en-US" sz="1160" dirty="0"/>
+          </a:p>
+        </p:txBody>
+      </p:sp>
+      <p:sp>
+        <p:nvSpPr>
+          <p:cNvPr id="15" name="Shape 13"/>
+          <p:cNvSpPr/>
+          <p:nvPr/>
+        </p:nvSpPr>
+        <p:spPr>
+          <a:xfrm>
+            <a:off x="8717280" y="3406140"/>
+            <a:ext cx="164592" cy="0"/>
+          </a:xfrm>
+          <a:prstGeom prst="line">
+            <a:avLst/>
+          </a:prstGeom>
+          <a:noFill/>
+          <a:ln w="15240">
+            <a:solidFill>
+              <a:srgbClr val="8ABBD8"/>
+            </a:solidFill>
+            <a:prstDash val="solid"/>
+          </a:ln>
+        </p:spPr>
+      </p:sp>
+      <p:sp>
+        <p:nvSpPr>
+          <p:cNvPr id="16" name="Shape 14"/>
+          <p:cNvSpPr/>
+          <p:nvPr/>
+        </p:nvSpPr>
+        <p:spPr>
+          <a:xfrm>
+            <a:off x="7781544" y="3255264"/>
+            <a:ext cx="935736" cy="301752"/>
+          </a:xfrm>
+          <a:prstGeom prst="roundRect">
+            <a:avLst>
+              <a:gd name="adj" fmla="val 24242"/>
+            </a:avLst>
+          </a:prstGeom>
+          <a:solidFill>
+            <a:srgbClr val="0068B7"/>
+          </a:solidFill>
+          <a:ln w="12700">
+            <a:solidFill>
+              <a:srgbClr val="0068B7"/>
+            </a:solidFill>
+            <a:prstDash val="solid"/>
+          </a:ln>
+        </p:spPr>
+      </p:sp>
+      <p:sp>
+        <p:nvSpPr>
+          <p:cNvPr id="17" name="Text 15"/>
+          <p:cNvSpPr/>
+          <p:nvPr/>
+        </p:nvSpPr>
+        <p:spPr>
+          <a:xfrm>
+            <a:off x="7818120" y="3328416"/>
+            <a:ext cx="862584" cy="146304"/>
+          </a:xfrm>
+          <a:prstGeom prst="rect">
+            <a:avLst/>
+          </a:prstGeom>
+          <a:noFill/>
+          <a:ln/>
+        </p:spPr>
+        <p:txBody>
+          <a:bodyPr wrap="square" lIns="0" tIns="0" rIns="0" bIns="0" rtlCol="0" anchor="ctr">
+            <a:normAutofit/>
+          </a:bodyPr>
+          <a:lstStyle/>
+          <a:p>
+            <a:pPr algn="ctr" indent="0" marL="0">
+              <a:buNone/>
+            </a:pPr>
+            <a:r>
+              <a:rPr lang="en-US" sz="880" b="1" dirty="0">
+                <a:solidFill>
+                  <a:srgbClr val="FFFFFF"/>
+                </a:solidFill>
+                <a:latin typeface="Aptos" pitchFamily="34" charset="0"/>
+                <a:ea typeface="Aptos" pitchFamily="34" charset="-122"/>
+                <a:cs typeface="Aptos" pitchFamily="34" charset="-120"/>
+              </a:rPr>
+              <a:t>Need</a:t>
+            </a:r>
+            <a:endParaRPr lang="en-US" sz="880" dirty="0"/>
+          </a:p>
+        </p:txBody>
+      </p:sp>
+      <p:sp>
+        <p:nvSpPr>
+          <p:cNvPr id="18" name="Shape 16"/>
+          <p:cNvSpPr/>
+          <p:nvPr/>
+        </p:nvSpPr>
+        <p:spPr>
+          <a:xfrm>
+            <a:off x="9817608" y="3406140"/>
+            <a:ext cx="164592" cy="0"/>
+          </a:xfrm>
+          <a:prstGeom prst="line">
+            <a:avLst/>
+          </a:prstGeom>
+          <a:noFill/>
+          <a:ln w="15240">
+            <a:solidFill>
+              <a:srgbClr val="8ABBD8"/>
+            </a:solidFill>
+            <a:prstDash val="solid"/>
+          </a:ln>
+        </p:spPr>
+      </p:sp>
+      <p:sp>
+        <p:nvSpPr>
+          <p:cNvPr id="19" name="Shape 17"/>
+          <p:cNvSpPr/>
+          <p:nvPr/>
+        </p:nvSpPr>
+        <p:spPr>
+          <a:xfrm>
+            <a:off x="8881872" y="3255264"/>
+            <a:ext cx="935736" cy="301752"/>
+          </a:xfrm>
+          <a:prstGeom prst="roundRect">
+            <a:avLst>
+              <a:gd name="adj" fmla="val 24242"/>
+            </a:avLst>
+          </a:prstGeom>
+          <a:solidFill>
+            <a:srgbClr val="2F8A28"/>
+          </a:solidFill>
+          <a:ln w="12700">
+            <a:solidFill>
+              <a:srgbClr val="2F8A28"/>
+            </a:solidFill>
+            <a:prstDash val="solid"/>
+          </a:ln>
+        </p:spPr>
+      </p:sp>
+      <p:sp>
+        <p:nvSpPr>
+          <p:cNvPr id="20" name="Text 18"/>
+          <p:cNvSpPr/>
+          <p:nvPr/>
+        </p:nvSpPr>
+        <p:spPr>
+          <a:xfrm>
+            <a:off x="8918448" y="3328416"/>
+            <a:ext cx="862584" cy="146304"/>
+          </a:xfrm>
+          <a:prstGeom prst="rect">
+            <a:avLst/>
+          </a:prstGeom>
+          <a:noFill/>
+          <a:ln/>
+        </p:spPr>
+        <p:txBody>
+          <a:bodyPr wrap="square" lIns="0" tIns="0" rIns="0" bIns="0" rtlCol="0" anchor="ctr">
+            <a:normAutofit/>
+          </a:bodyPr>
+          <a:lstStyle/>
+          <a:p>
+            <a:pPr algn="ctr" indent="0" marL="0">
+              <a:buNone/>
+            </a:pPr>
+            <a:r>
+              <a:rPr lang="en-US" sz="880" b="1" dirty="0">
+                <a:solidFill>
+                  <a:srgbClr val="FFFFFF"/>
+                </a:solidFill>
+                <a:latin typeface="Aptos" pitchFamily="34" charset="0"/>
+                <a:ea typeface="Aptos" pitchFamily="34" charset="-122"/>
+                <a:cs typeface="Aptos" pitchFamily="34" charset="-120"/>
+              </a:rPr>
+              <a:t>Build</a:t>
+            </a:r>
+            <a:endParaRPr lang="en-US" sz="880" dirty="0"/>
+          </a:p>
+        </p:txBody>
+      </p:sp>
+      <p:sp>
+        <p:nvSpPr>
+          <p:cNvPr id="21" name="Shape 19"/>
+          <p:cNvSpPr/>
+          <p:nvPr/>
+        </p:nvSpPr>
+        <p:spPr>
+          <a:xfrm>
+            <a:off x="9982200" y="3255264"/>
+            <a:ext cx="935736" cy="301752"/>
+          </a:xfrm>
+          <a:prstGeom prst="roundRect">
+            <a:avLst>
+              <a:gd name="adj" fmla="val 24242"/>
+            </a:avLst>
+          </a:prstGeom>
+          <a:solidFill>
+            <a:srgbClr val="6A4CA3"/>
+          </a:solidFill>
+          <a:ln w="12700">
+            <a:solidFill>
+              <a:srgbClr val="6A4CA3"/>
+            </a:solidFill>
+            <a:prstDash val="solid"/>
+          </a:ln>
+        </p:spPr>
+      </p:sp>
+      <p:sp>
+        <p:nvSpPr>
+          <p:cNvPr id="22" name="Text 20"/>
+          <p:cNvSpPr/>
+          <p:nvPr/>
+        </p:nvSpPr>
+        <p:spPr>
+          <a:xfrm>
+            <a:off x="10018776" y="3328416"/>
+            <a:ext cx="862584" cy="146304"/>
+          </a:xfrm>
+          <a:prstGeom prst="rect">
+            <a:avLst/>
+          </a:prstGeom>
+          <a:noFill/>
+          <a:ln/>
+        </p:spPr>
+        <p:txBody>
+          <a:bodyPr wrap="square" lIns="0" tIns="0" rIns="0" bIns="0" rtlCol="0" anchor="ctr">
+            <a:normAutofit/>
+          </a:bodyPr>
+          <a:lstStyle/>
+          <a:p>
+            <a:pPr algn="ctr" indent="0" marL="0">
+              <a:buNone/>
+            </a:pPr>
+            <a:r>
+              <a:rPr lang="en-US" sz="880" b="1" dirty="0">
+                <a:solidFill>
+                  <a:srgbClr val="FFFFFF"/>
+                </a:solidFill>
+                <a:latin typeface="Aptos" pitchFamily="34" charset="0"/>
+                <a:ea typeface="Aptos" pitchFamily="34" charset="-122"/>
+                <a:cs typeface="Aptos" pitchFamily="34" charset="-120"/>
+              </a:rPr>
+              <a:t>Adopt</a:t>
+            </a:r>
+            <a:endParaRPr lang="en-US" sz="880" dirty="0"/>
+          </a:p>
+        </p:txBody>
+      </p:sp>
+      <p:sp>
+        <p:nvSpPr>
+          <p:cNvPr id="23" name="Text 21"/>
+          <p:cNvSpPr/>
+          <p:nvPr/>
+        </p:nvSpPr>
+        <p:spPr>
+          <a:xfrm>
+            <a:off x="7763256" y="3749040"/>
+            <a:ext cx="3172968" cy="356616"/>
+          </a:xfrm>
+          <a:prstGeom prst="rect">
+            <a:avLst/>
+          </a:prstGeom>
+          <a:noFill/>
+          <a:ln/>
+        </p:spPr>
+        <p:txBody>
+          <a:bodyPr wrap="square" lIns="254" tIns="254" rIns="254" bIns="254" rtlCol="0" anchor="t">
+            <a:normAutofit/>
+          </a:bodyPr>
+          <a:lstStyle/>
+          <a:p>
+            <a:pPr indent="0" marL="0">
+              <a:buNone/>
+            </a:pPr>
+            <a:r>
+              <a:rPr lang="en-US" sz="1040" dirty="0">
                 <a:solidFill>
                   <a:srgbClr val="17364A"/>
                 </a:solidFill>
@@ -14523,15 +11305,15 @@
                 <a:ea typeface="Aptos" pitchFamily="34" charset="-122"/>
                 <a:cs typeface="Aptos" pitchFamily="34" charset="-120"/>
               </a:rPr>
-              <a:t>Produce a workflow usability test plan that can.</a:t>
-            </a:r>
-            <a:endParaRPr lang="en-US" sz="1140" dirty="0"/>
-          </a:p>
-        </p:txBody>
-      </p:sp>
-      <p:sp>
-        <p:nvSpPr>
-          <p:cNvPr id="16" name="Shape 14"/>
+              <a:t>Implementation work should make dependencies, approvals, training, and.</a:t>
+            </a:r>
+            <a:endParaRPr lang="en-US" sz="1040" dirty="0"/>
+          </a:p>
+        </p:txBody>
+      </p:sp>
+      <p:sp>
+        <p:nvSpPr>
+          <p:cNvPr id="24" name="Shape 22"/>
           <p:cNvSpPr/>
           <p:nvPr/>
         </p:nvSpPr>
@@ -14558,7 +11340,7 @@
       </p:sp>
       <p:sp>
         <p:nvSpPr>
-          <p:cNvPr id="17" name="Text 15"/>
+          <p:cNvPr id="25" name="Text 23"/>
           <p:cNvSpPr/>
           <p:nvPr/>
         </p:nvSpPr>
@@ -14597,7 +11379,7 @@
       </p:sp>
       <p:sp>
         <p:nvSpPr>
-          <p:cNvPr id="18" name="Text 16"/>
+          <p:cNvPr id="26" name="Text 24"/>
           <p:cNvSpPr/>
           <p:nvPr/>
         </p:nvSpPr>
@@ -14630,7 +11412,7 @@
                 <a:ea typeface="Aptos" pitchFamily="34" charset="-122"/>
                 <a:cs typeface="Aptos" pitchFamily="34" charset="-120"/>
               </a:rPr>
-              <a:t>Use the assignment to test whether you can explain the concept, apply it to a.</a:t>
+              <a:t>Use the concept to clarify workflow changes, dependencies, staffing, procurement.</a:t>
             </a:r>
             <a:endParaRPr lang="en-US" sz="1220" dirty="0"/>
           </a:p>
@@ -14751,7 +11533,7 @@
                 <a:ea typeface="Aptos" pitchFamily="34" charset="-122"/>
                 <a:cs typeface="Aptos" pitchFamily="34" charset="-120"/>
               </a:rPr>
-              <a:t>Human Factors, Workflow Integration, and Usability Testing</a:t>
+              <a:t>AI for Environmental Health and Field Operations</a:t>
             </a:r>
             <a:endParaRPr lang="en-US" sz="900" dirty="0"/>
           </a:p>
@@ -14909,7 +11691,7 @@
                 <a:ea typeface="Aptos Display" pitchFamily="34" charset="-122"/>
                 <a:cs typeface="Aptos Display" pitchFamily="34" charset="-120"/>
               </a:rPr>
-              <a:t>Module Overview</a:t>
+              <a:t>Public Health Example</a:t>
             </a:r>
             <a:endParaRPr lang="en-US" sz="3400" dirty="0"/>
           </a:p>
@@ -14950,7 +11732,7 @@
                 <a:ea typeface="Aptos" pitchFamily="34" charset="-122"/>
                 <a:cs typeface="Aptos" pitchFamily="34" charset="-120"/>
               </a:rPr>
-              <a:t>• AI tools succeed or fail inside real public health workflows.</a:t>
+              <a:t>• An environmental health program wants to explore AI-assisted triage of food.</a:t>
             </a:r>
             <a:endParaRPr lang="en-US" sz="1920" dirty="0"/>
           </a:p>
@@ -14967,7 +11749,7 @@
                 <a:ea typeface="Aptos" pitchFamily="34" charset="-122"/>
                 <a:cs typeface="Aptos" pitchFamily="34" charset="-120"/>
               </a:rPr>
-              <a:t>• Human factors and usability testing help agencies understand how staff.</a:t>
+              <a:t>• The proposed system would summarize complaint narratives, identify possible.</a:t>
             </a:r>
             <a:endParaRPr lang="en-US" sz="1920" dirty="0"/>
           </a:p>
@@ -14984,7 +11766,7 @@
                 <a:ea typeface="Aptos" pitchFamily="34" charset="-122"/>
                 <a:cs typeface="Aptos" pitchFamily="34" charset="-120"/>
               </a:rPr>
-              <a:t>• This module teaches learners to evaluate workflow fit, interface design,.</a:t>
+              <a:t>• The program hopes this will help staff respond more quickly when complaint.</a:t>
             </a:r>
             <a:endParaRPr lang="en-US" sz="1920" dirty="0"/>
           </a:p>
@@ -15091,7 +11873,7 @@
                 <a:ea typeface="Aptos" pitchFamily="34" charset="-122"/>
                 <a:cs typeface="Aptos" pitchFamily="34" charset="-120"/>
               </a:rPr>
-              <a:t>AI tools succeed or fail inside real public health workflows.</a:t>
+              <a:t>An environmental health program wants to explore AI-assisted triage of food.</a:t>
             </a:r>
             <a:endParaRPr lang="en-US" sz="1220" dirty="0"/>
           </a:p>
@@ -15133,16 +11915,55 @@
         <p:spPr>
           <a:xfrm>
             <a:off x="7708392" y="2852928"/>
-            <a:ext cx="3282696" cy="219456"/>
-          </a:xfrm>
-          <a:prstGeom prst="rect">
-            <a:avLst/>
-          </a:prstGeom>
-          <a:noFill/>
-          <a:ln/>
-        </p:spPr>
-        <p:txBody>
-          <a:bodyPr wrap="square" lIns="0" tIns="0" rIns="0" bIns="0" rtlCol="0" anchor="ctr">
+            <a:ext cx="3282696" cy="228600"/>
+          </a:xfrm>
+          <a:prstGeom prst="rect">
+            <a:avLst/>
+          </a:prstGeom>
+          <a:noFill/>
+          <a:ln/>
+        </p:spPr>
+        <p:txBody>
+          <a:bodyPr wrap="square" lIns="0" tIns="0" rIns="0" bIns="0" rtlCol="0" anchor="ctr"/>
+          <a:lstStyle/>
+          <a:p>
+            <a:pPr indent="0" marL="0">
+              <a:buNone/>
+            </a:pPr>
+            <a:r>
+              <a:rPr lang="en-US" sz="1220" b="1" dirty="0">
+                <a:solidFill>
+                  <a:srgbClr val="0068B7"/>
+                </a:solidFill>
+                <a:latin typeface="Aptos" pitchFamily="34" charset="0"/>
+                <a:ea typeface="Aptos" pitchFamily="34" charset="-122"/>
+                <a:cs typeface="Aptos" pitchFamily="34" charset="-120"/>
+              </a:rPr>
+              <a:t>Concept checkpoints</a:t>
+            </a:r>
+            <a:endParaRPr lang="en-US" sz="1220" dirty="0"/>
+          </a:p>
+        </p:txBody>
+      </p:sp>
+      <p:sp>
+        <p:nvSpPr>
+          <p:cNvPr id="15" name="Text 13"/>
+          <p:cNvSpPr/>
+          <p:nvPr/>
+        </p:nvSpPr>
+        <p:spPr>
+          <a:xfrm>
+            <a:off x="7726680" y="3182112"/>
+            <a:ext cx="3227832" cy="960120"/>
+          </a:xfrm>
+          <a:prstGeom prst="rect">
+            <a:avLst/>
+          </a:prstGeom>
+          <a:noFill/>
+          <a:ln/>
+        </p:spPr>
+        <p:txBody>
+          <a:bodyPr wrap="square" lIns="508" tIns="508" rIns="508" bIns="508" rtlCol="0" anchor="t">
             <a:normAutofit/>
           </a:bodyPr>
           <a:lstStyle/>
@@ -15151,314 +11972,57 @@
               <a:buNone/>
             </a:pPr>
             <a:r>
-              <a:rPr lang="en-US" sz="1160" b="1" dirty="0">
-                <a:solidFill>
-                  <a:srgbClr val="0068B7"/>
-                </a:solidFill>
-                <a:latin typeface="Aptos" pitchFamily="34" charset="0"/>
-                <a:ea typeface="Aptos" pitchFamily="34" charset="-122"/>
-                <a:cs typeface="Aptos" pitchFamily="34" charset="-120"/>
-              </a:rPr>
-              <a:t>Implementation path</a:t>
-            </a:r>
-            <a:endParaRPr lang="en-US" sz="1160" dirty="0"/>
-          </a:p>
-        </p:txBody>
-      </p:sp>
-      <p:sp>
-        <p:nvSpPr>
-          <p:cNvPr id="15" name="Shape 13"/>
-          <p:cNvSpPr/>
-          <p:nvPr/>
-        </p:nvSpPr>
-        <p:spPr>
-          <a:xfrm>
-            <a:off x="8717280" y="3406140"/>
-            <a:ext cx="164592" cy="0"/>
-          </a:xfrm>
-          <a:prstGeom prst="line">
-            <a:avLst/>
-          </a:prstGeom>
-          <a:noFill/>
-          <a:ln w="15240">
-            <a:solidFill>
-              <a:srgbClr val="8ABBD8"/>
-            </a:solidFill>
-            <a:prstDash val="solid"/>
-          </a:ln>
-        </p:spPr>
+              <a:rPr lang="en-US" sz="1140" dirty="0">
+                <a:solidFill>
+                  <a:srgbClr val="17364A"/>
+                </a:solidFill>
+                <a:latin typeface="Aptos" pitchFamily="34" charset="0"/>
+                <a:ea typeface="Aptos" pitchFamily="34" charset="-122"/>
+                <a:cs typeface="Aptos" pitchFamily="34" charset="-120"/>
+              </a:rPr>
+              <a:t>The proposed system would summarize complaint.</a:t>
+            </a:r>
+            <a:endParaRPr lang="en-US" sz="1140" dirty="0"/>
+          </a:p>
+          <a:p>
+            <a:pPr indent="0" marL="0">
+              <a:buNone/>
+            </a:pPr>
+            <a:r>
+              <a:rPr lang="en-US" sz="1140" dirty="0">
+                <a:solidFill>
+                  <a:srgbClr val="17364A"/>
+                </a:solidFill>
+                <a:latin typeface="Aptos" pitchFamily="34" charset="0"/>
+                <a:ea typeface="Aptos" pitchFamily="34" charset="-122"/>
+                <a:cs typeface="Aptos" pitchFamily="34" charset="-120"/>
+              </a:rPr>
+              <a:t>Before moving forward, the team reviews the data.</a:t>
+            </a:r>
+            <a:endParaRPr lang="en-US" sz="1140" dirty="0"/>
+          </a:p>
+          <a:p>
+            <a:pPr indent="0" marL="0">
+              <a:buNone/>
+            </a:pPr>
+            <a:r>
+              <a:rPr lang="en-US" sz="1140" dirty="0">
+                <a:solidFill>
+                  <a:srgbClr val="17364A"/>
+                </a:solidFill>
+                <a:latin typeface="Aptos" pitchFamily="34" charset="0"/>
+                <a:ea typeface="Aptos" pitchFamily="34" charset="-122"/>
+                <a:cs typeface="Aptos" pitchFamily="34" charset="-120"/>
+              </a:rPr>
+              <a:t>The governance review requires removal or.</a:t>
+            </a:r>
+            <a:endParaRPr lang="en-US" sz="1140" dirty="0"/>
+          </a:p>
+        </p:txBody>
       </p:sp>
       <p:sp>
         <p:nvSpPr>
           <p:cNvPr id="16" name="Shape 14"/>
-          <p:cNvSpPr/>
-          <p:nvPr/>
-        </p:nvSpPr>
-        <p:spPr>
-          <a:xfrm>
-            <a:off x="7781544" y="3255264"/>
-            <a:ext cx="935736" cy="301752"/>
-          </a:xfrm>
-          <a:prstGeom prst="roundRect">
-            <a:avLst>
-              <a:gd name="adj" fmla="val 24242"/>
-            </a:avLst>
-          </a:prstGeom>
-          <a:solidFill>
-            <a:srgbClr val="0068B7"/>
-          </a:solidFill>
-          <a:ln w="12700">
-            <a:solidFill>
-              <a:srgbClr val="0068B7"/>
-            </a:solidFill>
-            <a:prstDash val="solid"/>
-          </a:ln>
-        </p:spPr>
-      </p:sp>
-      <p:sp>
-        <p:nvSpPr>
-          <p:cNvPr id="17" name="Text 15"/>
-          <p:cNvSpPr/>
-          <p:nvPr/>
-        </p:nvSpPr>
-        <p:spPr>
-          <a:xfrm>
-            <a:off x="7818120" y="3328416"/>
-            <a:ext cx="862584" cy="146304"/>
-          </a:xfrm>
-          <a:prstGeom prst="rect">
-            <a:avLst/>
-          </a:prstGeom>
-          <a:noFill/>
-          <a:ln/>
-        </p:spPr>
-        <p:txBody>
-          <a:bodyPr wrap="square" lIns="0" tIns="0" rIns="0" bIns="0" rtlCol="0" anchor="ctr">
-            <a:normAutofit/>
-          </a:bodyPr>
-          <a:lstStyle/>
-          <a:p>
-            <a:pPr algn="ctr" indent="0" marL="0">
-              <a:buNone/>
-            </a:pPr>
-            <a:r>
-              <a:rPr lang="en-US" sz="880" b="1" dirty="0">
-                <a:solidFill>
-                  <a:srgbClr val="FFFFFF"/>
-                </a:solidFill>
-                <a:latin typeface="Aptos" pitchFamily="34" charset="0"/>
-                <a:ea typeface="Aptos" pitchFamily="34" charset="-122"/>
-                <a:cs typeface="Aptos" pitchFamily="34" charset="-120"/>
-              </a:rPr>
-              <a:t>Need</a:t>
-            </a:r>
-            <a:endParaRPr lang="en-US" sz="880" dirty="0"/>
-          </a:p>
-        </p:txBody>
-      </p:sp>
-      <p:sp>
-        <p:nvSpPr>
-          <p:cNvPr id="18" name="Shape 16"/>
-          <p:cNvSpPr/>
-          <p:nvPr/>
-        </p:nvSpPr>
-        <p:spPr>
-          <a:xfrm>
-            <a:off x="9817608" y="3406140"/>
-            <a:ext cx="164592" cy="0"/>
-          </a:xfrm>
-          <a:prstGeom prst="line">
-            <a:avLst/>
-          </a:prstGeom>
-          <a:noFill/>
-          <a:ln w="15240">
-            <a:solidFill>
-              <a:srgbClr val="8ABBD8"/>
-            </a:solidFill>
-            <a:prstDash val="solid"/>
-          </a:ln>
-        </p:spPr>
-      </p:sp>
-      <p:sp>
-        <p:nvSpPr>
-          <p:cNvPr id="19" name="Shape 17"/>
-          <p:cNvSpPr/>
-          <p:nvPr/>
-        </p:nvSpPr>
-        <p:spPr>
-          <a:xfrm>
-            <a:off x="8881872" y="3255264"/>
-            <a:ext cx="935736" cy="301752"/>
-          </a:xfrm>
-          <a:prstGeom prst="roundRect">
-            <a:avLst>
-              <a:gd name="adj" fmla="val 24242"/>
-            </a:avLst>
-          </a:prstGeom>
-          <a:solidFill>
-            <a:srgbClr val="2F8A28"/>
-          </a:solidFill>
-          <a:ln w="12700">
-            <a:solidFill>
-              <a:srgbClr val="2F8A28"/>
-            </a:solidFill>
-            <a:prstDash val="solid"/>
-          </a:ln>
-        </p:spPr>
-      </p:sp>
-      <p:sp>
-        <p:nvSpPr>
-          <p:cNvPr id="20" name="Text 18"/>
-          <p:cNvSpPr/>
-          <p:nvPr/>
-        </p:nvSpPr>
-        <p:spPr>
-          <a:xfrm>
-            <a:off x="8918448" y="3328416"/>
-            <a:ext cx="862584" cy="146304"/>
-          </a:xfrm>
-          <a:prstGeom prst="rect">
-            <a:avLst/>
-          </a:prstGeom>
-          <a:noFill/>
-          <a:ln/>
-        </p:spPr>
-        <p:txBody>
-          <a:bodyPr wrap="square" lIns="0" tIns="0" rIns="0" bIns="0" rtlCol="0" anchor="ctr">
-            <a:normAutofit/>
-          </a:bodyPr>
-          <a:lstStyle/>
-          <a:p>
-            <a:pPr algn="ctr" indent="0" marL="0">
-              <a:buNone/>
-            </a:pPr>
-            <a:r>
-              <a:rPr lang="en-US" sz="880" b="1" dirty="0">
-                <a:solidFill>
-                  <a:srgbClr val="FFFFFF"/>
-                </a:solidFill>
-                <a:latin typeface="Aptos" pitchFamily="34" charset="0"/>
-                <a:ea typeface="Aptos" pitchFamily="34" charset="-122"/>
-                <a:cs typeface="Aptos" pitchFamily="34" charset="-120"/>
-              </a:rPr>
-              <a:t>Build</a:t>
-            </a:r>
-            <a:endParaRPr lang="en-US" sz="880" dirty="0"/>
-          </a:p>
-        </p:txBody>
-      </p:sp>
-      <p:sp>
-        <p:nvSpPr>
-          <p:cNvPr id="21" name="Shape 19"/>
-          <p:cNvSpPr/>
-          <p:nvPr/>
-        </p:nvSpPr>
-        <p:spPr>
-          <a:xfrm>
-            <a:off x="9982200" y="3255264"/>
-            <a:ext cx="935736" cy="301752"/>
-          </a:xfrm>
-          <a:prstGeom prst="roundRect">
-            <a:avLst>
-              <a:gd name="adj" fmla="val 24242"/>
-            </a:avLst>
-          </a:prstGeom>
-          <a:solidFill>
-            <a:srgbClr val="6A4CA3"/>
-          </a:solidFill>
-          <a:ln w="12700">
-            <a:solidFill>
-              <a:srgbClr val="6A4CA3"/>
-            </a:solidFill>
-            <a:prstDash val="solid"/>
-          </a:ln>
-        </p:spPr>
-      </p:sp>
-      <p:sp>
-        <p:nvSpPr>
-          <p:cNvPr id="22" name="Text 20"/>
-          <p:cNvSpPr/>
-          <p:nvPr/>
-        </p:nvSpPr>
-        <p:spPr>
-          <a:xfrm>
-            <a:off x="10018776" y="3328416"/>
-            <a:ext cx="862584" cy="146304"/>
-          </a:xfrm>
-          <a:prstGeom prst="rect">
-            <a:avLst/>
-          </a:prstGeom>
-          <a:noFill/>
-          <a:ln/>
-        </p:spPr>
-        <p:txBody>
-          <a:bodyPr wrap="square" lIns="0" tIns="0" rIns="0" bIns="0" rtlCol="0" anchor="ctr">
-            <a:normAutofit/>
-          </a:bodyPr>
-          <a:lstStyle/>
-          <a:p>
-            <a:pPr algn="ctr" indent="0" marL="0">
-              <a:buNone/>
-            </a:pPr>
-            <a:r>
-              <a:rPr lang="en-US" sz="880" b="1" dirty="0">
-                <a:solidFill>
-                  <a:srgbClr val="FFFFFF"/>
-                </a:solidFill>
-                <a:latin typeface="Aptos" pitchFamily="34" charset="0"/>
-                <a:ea typeface="Aptos" pitchFamily="34" charset="-122"/>
-                <a:cs typeface="Aptos" pitchFamily="34" charset="-120"/>
-              </a:rPr>
-              <a:t>Adopt</a:t>
-            </a:r>
-            <a:endParaRPr lang="en-US" sz="880" dirty="0"/>
-          </a:p>
-        </p:txBody>
-      </p:sp>
-      <p:sp>
-        <p:nvSpPr>
-          <p:cNvPr id="23" name="Text 21"/>
-          <p:cNvSpPr/>
-          <p:nvPr/>
-        </p:nvSpPr>
-        <p:spPr>
-          <a:xfrm>
-            <a:off x="7763256" y="3749040"/>
-            <a:ext cx="3172968" cy="356616"/>
-          </a:xfrm>
-          <a:prstGeom prst="rect">
-            <a:avLst/>
-          </a:prstGeom>
-          <a:noFill/>
-          <a:ln/>
-        </p:spPr>
-        <p:txBody>
-          <a:bodyPr wrap="square" lIns="254" tIns="254" rIns="254" bIns="254" rtlCol="0" anchor="t">
-            <a:normAutofit/>
-          </a:bodyPr>
-          <a:lstStyle/>
-          <a:p>
-            <a:pPr indent="0" marL="0">
-              <a:buNone/>
-            </a:pPr>
-            <a:r>
-              <a:rPr lang="en-US" sz="1040" dirty="0">
-                <a:solidFill>
-                  <a:srgbClr val="17364A"/>
-                </a:solidFill>
-                <a:latin typeface="Aptos" pitchFamily="34" charset="0"/>
-                <a:ea typeface="Aptos" pitchFamily="34" charset="-122"/>
-                <a:cs typeface="Aptos" pitchFamily="34" charset="-120"/>
-              </a:rPr>
-              <a:t>Implementation work should make dependencies, approvals, training, and.</a:t>
-            </a:r>
-            <a:endParaRPr lang="en-US" sz="1040" dirty="0"/>
-          </a:p>
-        </p:txBody>
-      </p:sp>
-      <p:sp>
-        <p:nvSpPr>
-          <p:cNvPr id="24" name="Shape 22"/>
           <p:cNvSpPr/>
           <p:nvPr/>
         </p:nvSpPr>
@@ -15485,7 +12049,7 @@
       </p:sp>
       <p:sp>
         <p:nvSpPr>
-          <p:cNvPr id="25" name="Text 23"/>
+          <p:cNvPr id="17" name="Text 15"/>
           <p:cNvSpPr/>
           <p:nvPr/>
         </p:nvSpPr>
@@ -15524,7 +12088,7 @@
       </p:sp>
       <p:sp>
         <p:nvSpPr>
-          <p:cNvPr id="26" name="Text 24"/>
+          <p:cNvPr id="18" name="Text 16"/>
           <p:cNvSpPr/>
           <p:nvPr/>
         </p:nvSpPr>
@@ -15678,7 +12242,7 @@
                 <a:ea typeface="Aptos" pitchFamily="34" charset="-122"/>
                 <a:cs typeface="Aptos" pitchFamily="34" charset="-120"/>
               </a:rPr>
-              <a:t>Human Factors, Workflow Integration, and Usability Testing</a:t>
+              <a:t>AI for Environmental Health and Field Operations</a:t>
             </a:r>
             <a:endParaRPr lang="en-US" sz="900" dirty="0"/>
           </a:p>
@@ -15836,7 +12400,7 @@
                 <a:ea typeface="Aptos Display" pitchFamily="34" charset="-122"/>
                 <a:cs typeface="Aptos Display" pitchFamily="34" charset="-120"/>
               </a:rPr>
-              <a:t>Why This Topic Matters for Public Health AI</a:t>
+              <a:t>Technical, Programmatic, and Operational Deep Dive</a:t>
             </a:r>
             <a:endParaRPr lang="en-US" sz="3400" dirty="0"/>
           </a:p>
@@ -15877,7 +12441,7 @@
                 <a:ea typeface="Aptos" pitchFamily="34" charset="-122"/>
                 <a:cs typeface="Aptos" pitchFamily="34" charset="-120"/>
               </a:rPr>
-              <a:t>• Human Factors, Workflow Integration, and Usability Testing matters because.</a:t>
+              <a:t>• AI use in field operations should be evaluated through workflow mapping.</a:t>
             </a:r>
             <a:endParaRPr lang="en-US" sz="1920" dirty="0"/>
           </a:p>
@@ -15894,7 +12458,7 @@
                 <a:ea typeface="Aptos" pitchFamily="34" charset="-122"/>
                 <a:cs typeface="Aptos" pitchFamily="34" charset="-120"/>
               </a:rPr>
-              <a:t>• The topic affects whether AI outputs are accurate, explainable, safe,.</a:t>
+              <a:t>• The team should identify where information enters the system, who reviews.</a:t>
             </a:r>
             <a:endParaRPr lang="en-US" sz="1920" dirty="0"/>
           </a:p>
@@ -15911,7 +12475,7 @@
                 <a:ea typeface="Aptos" pitchFamily="34" charset="-122"/>
                 <a:cs typeface="Aptos" pitchFamily="34" charset="-120"/>
               </a:rPr>
-              <a:t>• Agencies that ignore this area may create tools that work in a demonstration.</a:t>
+              <a:t>• AI may be useful for organizing information, but field staff must retain.</a:t>
             </a:r>
             <a:endParaRPr lang="en-US" sz="1920" dirty="0"/>
           </a:p>
@@ -16018,7 +12582,7 @@
                 <a:ea typeface="Aptos" pitchFamily="34" charset="-122"/>
                 <a:cs typeface="Aptos" pitchFamily="34" charset="-120"/>
               </a:rPr>
-              <a:t>Human Factors, Workflow Integration, and Usability Testing matters because AI.</a:t>
+              <a:t>AI use in field operations should be evaluated through workflow mapping.</a:t>
             </a:r>
             <a:endParaRPr lang="en-US" sz="1220" dirty="0"/>
           </a:p>
@@ -16060,16 +12624,55 @@
         <p:spPr>
           <a:xfrm>
             <a:off x="7708392" y="2852928"/>
-            <a:ext cx="3282696" cy="219456"/>
-          </a:xfrm>
-          <a:prstGeom prst="rect">
-            <a:avLst/>
-          </a:prstGeom>
-          <a:noFill/>
-          <a:ln/>
-        </p:spPr>
-        <p:txBody>
-          <a:bodyPr wrap="square" lIns="0" tIns="0" rIns="0" bIns="0" rtlCol="0" anchor="ctr">
+            <a:ext cx="3282696" cy="228600"/>
+          </a:xfrm>
+          <a:prstGeom prst="rect">
+            <a:avLst/>
+          </a:prstGeom>
+          <a:noFill/>
+          <a:ln/>
+        </p:spPr>
+        <p:txBody>
+          <a:bodyPr wrap="square" lIns="0" tIns="0" rIns="0" bIns="0" rtlCol="0" anchor="ctr"/>
+          <a:lstStyle/>
+          <a:p>
+            <a:pPr indent="0" marL="0">
+              <a:buNone/>
+            </a:pPr>
+            <a:r>
+              <a:rPr lang="en-US" sz="1220" b="1" dirty="0">
+                <a:solidFill>
+                  <a:srgbClr val="0068B7"/>
+                </a:solidFill>
+                <a:latin typeface="Aptos" pitchFamily="34" charset="0"/>
+                <a:ea typeface="Aptos" pitchFamily="34" charset="-122"/>
+                <a:cs typeface="Aptos" pitchFamily="34" charset="-120"/>
+              </a:rPr>
+              <a:t>Concept checkpoints</a:t>
+            </a:r>
+            <a:endParaRPr lang="en-US" sz="1220" dirty="0"/>
+          </a:p>
+        </p:txBody>
+      </p:sp>
+      <p:sp>
+        <p:nvSpPr>
+          <p:cNvPr id="15" name="Text 13"/>
+          <p:cNvSpPr/>
+          <p:nvPr/>
+        </p:nvSpPr>
+        <p:spPr>
+          <a:xfrm>
+            <a:off x="7726680" y="3182112"/>
+            <a:ext cx="3227832" cy="960120"/>
+          </a:xfrm>
+          <a:prstGeom prst="rect">
+            <a:avLst/>
+          </a:prstGeom>
+          <a:noFill/>
+          <a:ln/>
+        </p:spPr>
+        <p:txBody>
+          <a:bodyPr wrap="square" lIns="508" tIns="508" rIns="508" bIns="508" rtlCol="0" anchor="t">
             <a:normAutofit/>
           </a:bodyPr>
           <a:lstStyle/>
@@ -16078,314 +12681,57 @@
               <a:buNone/>
             </a:pPr>
             <a:r>
-              <a:rPr lang="en-US" sz="1160" b="1" dirty="0">
-                <a:solidFill>
-                  <a:srgbClr val="0068B7"/>
-                </a:solidFill>
-                <a:latin typeface="Aptos" pitchFamily="34" charset="0"/>
-                <a:ea typeface="Aptos" pitchFamily="34" charset="-122"/>
-                <a:cs typeface="Aptos" pitchFamily="34" charset="-120"/>
-              </a:rPr>
-              <a:t>Implementation path</a:t>
-            </a:r>
-            <a:endParaRPr lang="en-US" sz="1160" dirty="0"/>
-          </a:p>
-        </p:txBody>
-      </p:sp>
-      <p:sp>
-        <p:nvSpPr>
-          <p:cNvPr id="15" name="Shape 13"/>
-          <p:cNvSpPr/>
-          <p:nvPr/>
-        </p:nvSpPr>
-        <p:spPr>
-          <a:xfrm>
-            <a:off x="8717280" y="3406140"/>
-            <a:ext cx="164592" cy="0"/>
-          </a:xfrm>
-          <a:prstGeom prst="line">
-            <a:avLst/>
-          </a:prstGeom>
-          <a:noFill/>
-          <a:ln w="15240">
-            <a:solidFill>
-              <a:srgbClr val="8ABBD8"/>
-            </a:solidFill>
-            <a:prstDash val="solid"/>
-          </a:ln>
-        </p:spPr>
+              <a:rPr lang="en-US" sz="1140" dirty="0">
+                <a:solidFill>
+                  <a:srgbClr val="17364A"/>
+                </a:solidFill>
+                <a:latin typeface="Aptos" pitchFamily="34" charset="0"/>
+                <a:ea typeface="Aptos" pitchFamily="34" charset="-122"/>
+                <a:cs typeface="Aptos" pitchFamily="34" charset="-120"/>
+              </a:rPr>
+              <a:t>The team should identify where information enters.</a:t>
+            </a:r>
+            <a:endParaRPr lang="en-US" sz="1140" dirty="0"/>
+          </a:p>
+          <a:p>
+            <a:pPr indent="0" marL="0">
+              <a:buNone/>
+            </a:pPr>
+            <a:r>
+              <a:rPr lang="en-US" sz="1140" dirty="0">
+                <a:solidFill>
+                  <a:srgbClr val="17364A"/>
+                </a:solidFill>
+                <a:latin typeface="Aptos" pitchFamily="34" charset="0"/>
+                <a:ea typeface="Aptos" pitchFamily="34" charset="-122"/>
+                <a:cs typeface="Aptos" pitchFamily="34" charset="-120"/>
+              </a:rPr>
+              <a:t>AI may be useful for organizing information, but.</a:t>
+            </a:r>
+            <a:endParaRPr lang="en-US" sz="1140" dirty="0"/>
+          </a:p>
+          <a:p>
+            <a:pPr indent="0" marL="0">
+              <a:buNone/>
+            </a:pPr>
+            <a:r>
+              <a:rPr lang="en-US" sz="1140" dirty="0">
+                <a:solidFill>
+                  <a:srgbClr val="17364A"/>
+                </a:solidFill>
+                <a:latin typeface="Aptos" pitchFamily="34" charset="0"/>
+                <a:ea typeface="Aptos" pitchFamily="34" charset="-122"/>
+                <a:cs typeface="Aptos" pitchFamily="34" charset="-120"/>
+              </a:rPr>
+              <a:t>Data quality is a major issue in field operations.</a:t>
+            </a:r>
+            <a:endParaRPr lang="en-US" sz="1140" dirty="0"/>
+          </a:p>
+        </p:txBody>
       </p:sp>
       <p:sp>
         <p:nvSpPr>
           <p:cNvPr id="16" name="Shape 14"/>
-          <p:cNvSpPr/>
-          <p:nvPr/>
-        </p:nvSpPr>
-        <p:spPr>
-          <a:xfrm>
-            <a:off x="7781544" y="3255264"/>
-            <a:ext cx="935736" cy="301752"/>
-          </a:xfrm>
-          <a:prstGeom prst="roundRect">
-            <a:avLst>
-              <a:gd name="adj" fmla="val 24242"/>
-            </a:avLst>
-          </a:prstGeom>
-          <a:solidFill>
-            <a:srgbClr val="0068B7"/>
-          </a:solidFill>
-          <a:ln w="12700">
-            <a:solidFill>
-              <a:srgbClr val="0068B7"/>
-            </a:solidFill>
-            <a:prstDash val="solid"/>
-          </a:ln>
-        </p:spPr>
-      </p:sp>
-      <p:sp>
-        <p:nvSpPr>
-          <p:cNvPr id="17" name="Text 15"/>
-          <p:cNvSpPr/>
-          <p:nvPr/>
-        </p:nvSpPr>
-        <p:spPr>
-          <a:xfrm>
-            <a:off x="7818120" y="3328416"/>
-            <a:ext cx="862584" cy="146304"/>
-          </a:xfrm>
-          <a:prstGeom prst="rect">
-            <a:avLst/>
-          </a:prstGeom>
-          <a:noFill/>
-          <a:ln/>
-        </p:spPr>
-        <p:txBody>
-          <a:bodyPr wrap="square" lIns="0" tIns="0" rIns="0" bIns="0" rtlCol="0" anchor="ctr">
-            <a:normAutofit/>
-          </a:bodyPr>
-          <a:lstStyle/>
-          <a:p>
-            <a:pPr algn="ctr" indent="0" marL="0">
-              <a:buNone/>
-            </a:pPr>
-            <a:r>
-              <a:rPr lang="en-US" sz="880" b="1" dirty="0">
-                <a:solidFill>
-                  <a:srgbClr val="FFFFFF"/>
-                </a:solidFill>
-                <a:latin typeface="Aptos" pitchFamily="34" charset="0"/>
-                <a:ea typeface="Aptos" pitchFamily="34" charset="-122"/>
-                <a:cs typeface="Aptos" pitchFamily="34" charset="-120"/>
-              </a:rPr>
-              <a:t>Need</a:t>
-            </a:r>
-            <a:endParaRPr lang="en-US" sz="880" dirty="0"/>
-          </a:p>
-        </p:txBody>
-      </p:sp>
-      <p:sp>
-        <p:nvSpPr>
-          <p:cNvPr id="18" name="Shape 16"/>
-          <p:cNvSpPr/>
-          <p:nvPr/>
-        </p:nvSpPr>
-        <p:spPr>
-          <a:xfrm>
-            <a:off x="9817608" y="3406140"/>
-            <a:ext cx="164592" cy="0"/>
-          </a:xfrm>
-          <a:prstGeom prst="line">
-            <a:avLst/>
-          </a:prstGeom>
-          <a:noFill/>
-          <a:ln w="15240">
-            <a:solidFill>
-              <a:srgbClr val="8ABBD8"/>
-            </a:solidFill>
-            <a:prstDash val="solid"/>
-          </a:ln>
-        </p:spPr>
-      </p:sp>
-      <p:sp>
-        <p:nvSpPr>
-          <p:cNvPr id="19" name="Shape 17"/>
-          <p:cNvSpPr/>
-          <p:nvPr/>
-        </p:nvSpPr>
-        <p:spPr>
-          <a:xfrm>
-            <a:off x="8881872" y="3255264"/>
-            <a:ext cx="935736" cy="301752"/>
-          </a:xfrm>
-          <a:prstGeom prst="roundRect">
-            <a:avLst>
-              <a:gd name="adj" fmla="val 24242"/>
-            </a:avLst>
-          </a:prstGeom>
-          <a:solidFill>
-            <a:srgbClr val="2F8A28"/>
-          </a:solidFill>
-          <a:ln w="12700">
-            <a:solidFill>
-              <a:srgbClr val="2F8A28"/>
-            </a:solidFill>
-            <a:prstDash val="solid"/>
-          </a:ln>
-        </p:spPr>
-      </p:sp>
-      <p:sp>
-        <p:nvSpPr>
-          <p:cNvPr id="20" name="Text 18"/>
-          <p:cNvSpPr/>
-          <p:nvPr/>
-        </p:nvSpPr>
-        <p:spPr>
-          <a:xfrm>
-            <a:off x="8918448" y="3328416"/>
-            <a:ext cx="862584" cy="146304"/>
-          </a:xfrm>
-          <a:prstGeom prst="rect">
-            <a:avLst/>
-          </a:prstGeom>
-          <a:noFill/>
-          <a:ln/>
-        </p:spPr>
-        <p:txBody>
-          <a:bodyPr wrap="square" lIns="0" tIns="0" rIns="0" bIns="0" rtlCol="0" anchor="ctr">
-            <a:normAutofit/>
-          </a:bodyPr>
-          <a:lstStyle/>
-          <a:p>
-            <a:pPr algn="ctr" indent="0" marL="0">
-              <a:buNone/>
-            </a:pPr>
-            <a:r>
-              <a:rPr lang="en-US" sz="880" b="1" dirty="0">
-                <a:solidFill>
-                  <a:srgbClr val="FFFFFF"/>
-                </a:solidFill>
-                <a:latin typeface="Aptos" pitchFamily="34" charset="0"/>
-                <a:ea typeface="Aptos" pitchFamily="34" charset="-122"/>
-                <a:cs typeface="Aptos" pitchFamily="34" charset="-120"/>
-              </a:rPr>
-              <a:t>Build</a:t>
-            </a:r>
-            <a:endParaRPr lang="en-US" sz="880" dirty="0"/>
-          </a:p>
-        </p:txBody>
-      </p:sp>
-      <p:sp>
-        <p:nvSpPr>
-          <p:cNvPr id="21" name="Shape 19"/>
-          <p:cNvSpPr/>
-          <p:nvPr/>
-        </p:nvSpPr>
-        <p:spPr>
-          <a:xfrm>
-            <a:off x="9982200" y="3255264"/>
-            <a:ext cx="935736" cy="301752"/>
-          </a:xfrm>
-          <a:prstGeom prst="roundRect">
-            <a:avLst>
-              <a:gd name="adj" fmla="val 24242"/>
-            </a:avLst>
-          </a:prstGeom>
-          <a:solidFill>
-            <a:srgbClr val="6A4CA3"/>
-          </a:solidFill>
-          <a:ln w="12700">
-            <a:solidFill>
-              <a:srgbClr val="6A4CA3"/>
-            </a:solidFill>
-            <a:prstDash val="solid"/>
-          </a:ln>
-        </p:spPr>
-      </p:sp>
-      <p:sp>
-        <p:nvSpPr>
-          <p:cNvPr id="22" name="Text 20"/>
-          <p:cNvSpPr/>
-          <p:nvPr/>
-        </p:nvSpPr>
-        <p:spPr>
-          <a:xfrm>
-            <a:off x="10018776" y="3328416"/>
-            <a:ext cx="862584" cy="146304"/>
-          </a:xfrm>
-          <a:prstGeom prst="rect">
-            <a:avLst/>
-          </a:prstGeom>
-          <a:noFill/>
-          <a:ln/>
-        </p:spPr>
-        <p:txBody>
-          <a:bodyPr wrap="square" lIns="0" tIns="0" rIns="0" bIns="0" rtlCol="0" anchor="ctr">
-            <a:normAutofit/>
-          </a:bodyPr>
-          <a:lstStyle/>
-          <a:p>
-            <a:pPr algn="ctr" indent="0" marL="0">
-              <a:buNone/>
-            </a:pPr>
-            <a:r>
-              <a:rPr lang="en-US" sz="880" b="1" dirty="0">
-                <a:solidFill>
-                  <a:srgbClr val="FFFFFF"/>
-                </a:solidFill>
-                <a:latin typeface="Aptos" pitchFamily="34" charset="0"/>
-                <a:ea typeface="Aptos" pitchFamily="34" charset="-122"/>
-                <a:cs typeface="Aptos" pitchFamily="34" charset="-120"/>
-              </a:rPr>
-              <a:t>Adopt</a:t>
-            </a:r>
-            <a:endParaRPr lang="en-US" sz="880" dirty="0"/>
-          </a:p>
-        </p:txBody>
-      </p:sp>
-      <p:sp>
-        <p:nvSpPr>
-          <p:cNvPr id="23" name="Text 21"/>
-          <p:cNvSpPr/>
-          <p:nvPr/>
-        </p:nvSpPr>
-        <p:spPr>
-          <a:xfrm>
-            <a:off x="7763256" y="3749040"/>
-            <a:ext cx="3172968" cy="356616"/>
-          </a:xfrm>
-          <a:prstGeom prst="rect">
-            <a:avLst/>
-          </a:prstGeom>
-          <a:noFill/>
-          <a:ln/>
-        </p:spPr>
-        <p:txBody>
-          <a:bodyPr wrap="square" lIns="254" tIns="254" rIns="254" bIns="254" rtlCol="0" anchor="t">
-            <a:normAutofit/>
-          </a:bodyPr>
-          <a:lstStyle/>
-          <a:p>
-            <a:pPr indent="0" marL="0">
-              <a:buNone/>
-            </a:pPr>
-            <a:r>
-              <a:rPr lang="en-US" sz="1040" dirty="0">
-                <a:solidFill>
-                  <a:srgbClr val="17364A"/>
-                </a:solidFill>
-                <a:latin typeface="Aptos" pitchFamily="34" charset="0"/>
-                <a:ea typeface="Aptos" pitchFamily="34" charset="-122"/>
-                <a:cs typeface="Aptos" pitchFamily="34" charset="-120"/>
-              </a:rPr>
-              <a:t>Implementation work should make dependencies, approvals, training, and.</a:t>
-            </a:r>
-            <a:endParaRPr lang="en-US" sz="1040" dirty="0"/>
-          </a:p>
-        </p:txBody>
-      </p:sp>
-      <p:sp>
-        <p:nvSpPr>
-          <p:cNvPr id="24" name="Shape 22"/>
           <p:cNvSpPr/>
           <p:nvPr/>
         </p:nvSpPr>
@@ -16412,7 +12758,7 @@
       </p:sp>
       <p:sp>
         <p:nvSpPr>
-          <p:cNvPr id="25" name="Text 23"/>
+          <p:cNvPr id="17" name="Text 15"/>
           <p:cNvSpPr/>
           <p:nvPr/>
         </p:nvSpPr>
@@ -16451,7 +12797,7 @@
       </p:sp>
       <p:sp>
         <p:nvSpPr>
-          <p:cNvPr id="26" name="Text 24"/>
+          <p:cNvPr id="18" name="Text 16"/>
           <p:cNvSpPr/>
           <p:nvPr/>
         </p:nvSpPr>
@@ -16605,7 +12951,7 @@
                 <a:ea typeface="Aptos" pitchFamily="34" charset="-122"/>
                 <a:cs typeface="Aptos" pitchFamily="34" charset="-120"/>
               </a:rPr>
-              <a:t>Human Factors, Workflow Integration, and Usability Testing</a:t>
+              <a:t>AI for Environmental Health and Field Operations</a:t>
             </a:r>
             <a:endParaRPr lang="en-US" sz="900" dirty="0"/>
           </a:p>
@@ -16763,7 +13109,7 @@
                 <a:ea typeface="Aptos Display" pitchFamily="34" charset="-122"/>
                 <a:cs typeface="Aptos Display" pitchFamily="34" charset="-120"/>
               </a:rPr>
-              <a:t>Core Concepts</a:t>
+              <a:t>Risks, Failure Modes, and Guardrails</a:t>
             </a:r>
             <a:endParaRPr lang="en-US" sz="3400" dirty="0"/>
           </a:p>
@@ -16804,7 +13150,7 @@
                 <a:ea typeface="Aptos" pitchFamily="34" charset="-122"/>
                 <a:cs typeface="Aptos" pitchFamily="34" charset="-120"/>
               </a:rPr>
-              <a:t>• Human factors is the discipline of designing systems around human abilities,.</a:t>
+              <a:t>• A key risk is inappropriate prioritization.</a:t>
             </a:r>
             <a:endParaRPr lang="en-US" sz="1920" dirty="0"/>
           </a:p>
@@ -16821,7 +13167,7 @@
                 <a:ea typeface="Aptos" pitchFamily="34" charset="-122"/>
                 <a:cs typeface="Aptos" pitchFamily="34" charset="-120"/>
               </a:rPr>
-              <a:t>• In AI-supported public health work, human factors help agencies ensure that.</a:t>
+              <a:t>• AI may under-prioritize complaints from communities with lower reporting.</a:t>
             </a:r>
             <a:endParaRPr lang="en-US" sz="1920" dirty="0"/>
           </a:p>
@@ -16838,7 +13184,7 @@
                 <a:ea typeface="Aptos" pitchFamily="34" charset="-122"/>
                 <a:cs typeface="Aptos" pitchFamily="34" charset="-120"/>
               </a:rPr>
-              <a:t>• Usability testing is structured observation of how users interact with a.</a:t>
+              <a:t>• Guardrails include subgroup review, field staff validation, review of false.</a:t>
             </a:r>
             <a:endParaRPr lang="en-US" sz="1920" dirty="0"/>
           </a:p>
@@ -16904,7 +13250,7 @@
                 <a:ea typeface="Aptos" pitchFamily="34" charset="-122"/>
                 <a:cs typeface="Aptos" pitchFamily="34" charset="-120"/>
               </a:rPr>
-              <a:t>Implementation cue</a:t>
+              <a:t>Risk check</a:t>
             </a:r>
             <a:endParaRPr lang="en-US" sz="1220" dirty="0"/>
           </a:p>
@@ -16945,7 +13291,7 @@
                 <a:ea typeface="Aptos" pitchFamily="34" charset="-122"/>
                 <a:cs typeface="Aptos" pitchFamily="34" charset="-120"/>
               </a:rPr>
-              <a:t>Human factors is the discipline of designing systems around human abilities,.</a:t>
+              <a:t>A key risk is inappropriate prioritization.</a:t>
             </a:r>
             <a:endParaRPr lang="en-US" sz="1220" dirty="0"/>
           </a:p>
@@ -17052,7 +13398,7 @@
                 <a:ea typeface="Aptos" pitchFamily="34" charset="-122"/>
                 <a:cs typeface="Aptos" pitchFamily="34" charset="-120"/>
               </a:rPr>
-              <a:t>Human factors is the discipline of designing.</a:t>
+              <a:t>AI may under-prioritize complaints from.</a:t>
             </a:r>
             <a:endParaRPr lang="en-US" sz="1140" dirty="0"/>
           </a:p>
@@ -17069,7 +13415,7 @@
                 <a:ea typeface="Aptos" pitchFamily="34" charset="-122"/>
                 <a:cs typeface="Aptos" pitchFamily="34" charset="-120"/>
               </a:rPr>
-              <a:t>In AI-supported public health work, human factors.</a:t>
+              <a:t>Guardrails include subgroup review, field staff.</a:t>
             </a:r>
             <a:endParaRPr lang="en-US" sz="1140" dirty="0"/>
           </a:p>
@@ -17086,7 +13432,7 @@
                 <a:ea typeface="Aptos" pitchFamily="34" charset="-122"/>
                 <a:cs typeface="Aptos" pitchFamily="34" charset="-120"/>
               </a:rPr>
-              <a:t>It can reveal confusion, workarounds, over-trust,.</a:t>
+              <a:t>Another risk is unsafe automation of regulatory or.</a:t>
             </a:r>
             <a:endParaRPr lang="en-US" sz="1140" dirty="0"/>
           </a:p>
@@ -17152,7 +13498,7 @@
                 <a:ea typeface="Aptos" pitchFamily="34" charset="-122"/>
                 <a:cs typeface="Aptos" pitchFamily="34" charset="-120"/>
               </a:rPr>
-              <a:t>Next action</a:t>
+              <a:t>Safeguard to plan</a:t>
             </a:r>
             <a:endParaRPr lang="en-US" sz="1220" dirty="0"/>
           </a:p>
@@ -17193,7 +13539,7 @@
                 <a:ea typeface="Aptos" pitchFamily="34" charset="-122"/>
                 <a:cs typeface="Aptos" pitchFamily="34" charset="-120"/>
               </a:rPr>
-              <a:t>Use the concept to clarify workflow changes, dependencies, staffing, procurement.</a:t>
+              <a:t>Identify what could go wrong, who could be affected, what safeguards are needed,.</a:t>
             </a:r>
             <a:endParaRPr lang="en-US" sz="1220" dirty="0"/>
           </a:p>
